--- a/slides/C24_Regressão.pptx
+++ b/slides/C24_Regressão.pptx
@@ -5,22 +5,24 @@
     <p:sldMasterId id="2147483648" r:id="rId1"/>
   </p:sldMasterIdLst>
   <p:notesMasterIdLst>
-    <p:notesMasterId r:id="rId12"/>
+    <p:notesMasterId r:id="rId14"/>
   </p:notesMasterIdLst>
   <p:handoutMasterIdLst>
-    <p:handoutMasterId r:id="rId13"/>
+    <p:handoutMasterId r:id="rId15"/>
   </p:handoutMasterIdLst>
   <p:sldIdLst>
     <p:sldId id="256" r:id="rId2"/>
-    <p:sldId id="307" r:id="rId3"/>
-    <p:sldId id="308" r:id="rId4"/>
-    <p:sldId id="309" r:id="rId5"/>
-    <p:sldId id="310" r:id="rId6"/>
-    <p:sldId id="311" r:id="rId7"/>
-    <p:sldId id="312" r:id="rId8"/>
-    <p:sldId id="313" r:id="rId9"/>
-    <p:sldId id="293" r:id="rId10"/>
-    <p:sldId id="306" r:id="rId11"/>
+    <p:sldId id="296" r:id="rId3"/>
+    <p:sldId id="463" r:id="rId4"/>
+    <p:sldId id="517" r:id="rId5"/>
+    <p:sldId id="518" r:id="rId6"/>
+    <p:sldId id="464" r:id="rId7"/>
+    <p:sldId id="470" r:id="rId8"/>
+    <p:sldId id="471" r:id="rId9"/>
+    <p:sldId id="472" r:id="rId10"/>
+    <p:sldId id="519" r:id="rId11"/>
+    <p:sldId id="293" r:id="rId12"/>
+    <p:sldId id="306" r:id="rId13"/>
   </p:sldIdLst>
   <p:sldSz cx="12192000" cy="6858000"/>
   <p:notesSz cx="7315200" cy="9601200"/>
@@ -791,6 +793,603 @@
     <p:extLst>
       <p:ext uri="{BB962C8B-B14F-4D97-AF65-F5344CB8AC3E}">
         <p14:creationId xmlns:p14="http://schemas.microsoft.com/office/powerpoint/2010/main" val="1660747467"/>
+      </p:ext>
+    </p:extLst>
+  </p:cSld>
+  <p:clrMapOvr>
+    <a:masterClrMapping/>
+  </p:clrMapOvr>
+</p:notes>
+</file>
+
+<file path=ppt/notesSlides/notesSlide2.xml><?xml version="1.0" encoding="utf-8"?>
+<p:notes xmlns:a="http://schemas.openxmlformats.org/drawingml/2006/main" xmlns:r="http://schemas.openxmlformats.org/officeDocument/2006/relationships" xmlns:p="http://schemas.openxmlformats.org/presentationml/2006/main">
+  <p:cSld>
+    <p:spTree>
+      <p:nvGrpSpPr>
+        <p:cNvPr id="1" name=""/>
+        <p:cNvGrpSpPr/>
+        <p:nvPr/>
+      </p:nvGrpSpPr>
+      <p:grpSpPr>
+        <a:xfrm>
+          <a:off x="0" y="0"/>
+          <a:ext cx="0" cy="0"/>
+          <a:chOff x="0" y="0"/>
+          <a:chExt cx="0" cy="0"/>
+        </a:xfrm>
+      </p:grpSpPr>
+      <p:sp>
+        <p:nvSpPr>
+          <p:cNvPr id="2" name="Slide Image Placeholder 1"/>
+          <p:cNvSpPr>
+            <a:spLocks noGrp="1" noRot="1" noChangeAspect="1"/>
+          </p:cNvSpPr>
+          <p:nvPr>
+            <p:ph type="sldImg"/>
+          </p:nvPr>
+        </p:nvSpPr>
+        <p:spPr/>
+      </p:sp>
+      <p:sp>
+        <p:nvSpPr>
+          <p:cNvPr id="3" name="Notes Placeholder 2"/>
+          <p:cNvSpPr>
+            <a:spLocks noGrp="1"/>
+          </p:cNvSpPr>
+          <p:nvPr>
+            <p:ph type="body" idx="1"/>
+          </p:nvPr>
+        </p:nvSpPr>
+        <p:spPr/>
+        <p:txBody>
+          <a:bodyPr/>
+          <a:lstStyle/>
+          <a:p>
+            <a:endParaRPr lang="pt-BR" dirty="0"/>
+          </a:p>
+        </p:txBody>
+      </p:sp>
+      <p:sp>
+        <p:nvSpPr>
+          <p:cNvPr id="4" name="Slide Number Placeholder 3"/>
+          <p:cNvSpPr>
+            <a:spLocks noGrp="1"/>
+          </p:cNvSpPr>
+          <p:nvPr>
+            <p:ph type="sldNum" sz="quarter" idx="10"/>
+          </p:nvPr>
+        </p:nvSpPr>
+        <p:spPr/>
+        <p:txBody>
+          <a:bodyPr/>
+          <a:lstStyle/>
+          <a:p>
+            <a:fld id="{DA8B99DF-01BC-492A-8CEF-4FD88D18DD9D}" type="slidenum">
+              <a:rPr lang="nl-BE" smtClean="0"/>
+              <a:t>2</a:t>
+            </a:fld>
+            <a:endParaRPr lang="nl-BE"/>
+          </a:p>
+        </p:txBody>
+      </p:sp>
+    </p:spTree>
+    <p:extLst>
+      <p:ext uri="{BB962C8B-B14F-4D97-AF65-F5344CB8AC3E}">
+        <p14:creationId xmlns:p14="http://schemas.microsoft.com/office/powerpoint/2010/main" val="2833021327"/>
+      </p:ext>
+    </p:extLst>
+  </p:cSld>
+  <p:clrMapOvr>
+    <a:masterClrMapping/>
+  </p:clrMapOvr>
+</p:notes>
+</file>
+
+<file path=ppt/notesSlides/notesSlide3.xml><?xml version="1.0" encoding="utf-8"?>
+<p:notes xmlns:a="http://schemas.openxmlformats.org/drawingml/2006/main" xmlns:r="http://schemas.openxmlformats.org/officeDocument/2006/relationships" xmlns:p="http://schemas.openxmlformats.org/presentationml/2006/main">
+  <p:cSld>
+    <p:spTree>
+      <p:nvGrpSpPr>
+        <p:cNvPr id="1" name=""/>
+        <p:cNvGrpSpPr/>
+        <p:nvPr/>
+      </p:nvGrpSpPr>
+      <p:grpSpPr>
+        <a:xfrm>
+          <a:off x="0" y="0"/>
+          <a:ext cx="0" cy="0"/>
+          <a:chOff x="0" y="0"/>
+          <a:chExt cx="0" cy="0"/>
+        </a:xfrm>
+      </p:grpSpPr>
+      <p:sp>
+        <p:nvSpPr>
+          <p:cNvPr id="2" name="Slide Image Placeholder 1"/>
+          <p:cNvSpPr>
+            <a:spLocks noGrp="1" noRot="1" noChangeAspect="1"/>
+          </p:cNvSpPr>
+          <p:nvPr>
+            <p:ph type="sldImg"/>
+          </p:nvPr>
+        </p:nvSpPr>
+        <p:spPr/>
+      </p:sp>
+      <p:sp>
+        <p:nvSpPr>
+          <p:cNvPr id="3" name="Notes Placeholder 2"/>
+          <p:cNvSpPr>
+            <a:spLocks noGrp="1"/>
+          </p:cNvSpPr>
+          <p:nvPr>
+            <p:ph type="body" idx="1"/>
+          </p:nvPr>
+        </p:nvSpPr>
+        <p:spPr/>
+        <p:txBody>
+          <a:bodyPr/>
+          <a:lstStyle/>
+          <a:p>
+            <a:r>
+              <a:rPr lang="pt-BR" dirty="0"/>
+              <a:t>Exemplos de aplicações</a:t>
+            </a:r>
+            <a:r>
+              <a:rPr lang="pt-BR" baseline="0" dirty="0"/>
+              <a:t> de regressão linear:</a:t>
+            </a:r>
+            <a:endParaRPr lang="pt-BR" dirty="0"/>
+          </a:p>
+          <a:p>
+            <a:pPr marL="171450" indent="-171450">
+              <a:buFont typeface="Arial" panose="020B0604020202020204" pitchFamily="34" charset="0"/>
+              <a:buChar char="•"/>
+            </a:pPr>
+            <a:r>
+              <a:rPr lang="pt-BR" dirty="0"/>
+              <a:t>Modelos para predição do preço de casas.</a:t>
+            </a:r>
+          </a:p>
+          <a:p>
+            <a:pPr marL="171450" indent="-171450">
+              <a:buFont typeface="Arial" panose="020B0604020202020204" pitchFamily="34" charset="0"/>
+              <a:buChar char="•"/>
+            </a:pPr>
+            <a:r>
+              <a:rPr lang="pt-BR" dirty="0"/>
+              <a:t>Modelos para predição do salário de um empregado baseado em sua idade.</a:t>
+            </a:r>
+          </a:p>
+          <a:p>
+            <a:pPr marL="171450" indent="-171450">
+              <a:buFont typeface="Arial" panose="020B0604020202020204" pitchFamily="34" charset="0"/>
+              <a:buChar char="•"/>
+            </a:pPr>
+            <a:endParaRPr lang="pt-BR" dirty="0"/>
+          </a:p>
+          <a:p>
+            <a:r>
+              <a:rPr lang="pt-BR" b="1" dirty="0"/>
+              <a:t>📊 1. Previsão de vendas em negócios</a:t>
+            </a:r>
+          </a:p>
+          <a:p>
+            <a:r>
+              <a:rPr lang="pt-BR" dirty="0"/>
+              <a:t>Empresas analisam dados históricos de vendas, publicidade, sazonalidade e indicadores econômicos para </a:t>
+            </a:r>
+            <a:r>
+              <a:rPr lang="pt-BR" b="1" dirty="0"/>
+              <a:t>prever vendas futuras</a:t>
+            </a:r>
+            <a:r>
+              <a:rPr lang="pt-BR" dirty="0"/>
+              <a:t>. Isso ajuda no planejamento de estoque, orçamento e campanhas de marketing.</a:t>
+            </a:r>
+          </a:p>
+          <a:p>
+            <a:endParaRPr lang="en-US" dirty="0"/>
+          </a:p>
+          <a:p>
+            <a:r>
+              <a:rPr lang="pt-BR" b="1" dirty="0"/>
+              <a:t>🏠 2. Estimativa de preços de imóveis</a:t>
+            </a:r>
+          </a:p>
+          <a:p>
+            <a:r>
+              <a:rPr lang="pt-BR" dirty="0"/>
+              <a:t>Corretores e analistas usam regressão para </a:t>
+            </a:r>
+            <a:r>
+              <a:rPr lang="pt-BR" b="1" dirty="0"/>
+              <a:t>estimar o preço de uma casa</a:t>
+            </a:r>
+            <a:r>
+              <a:rPr lang="pt-BR" dirty="0"/>
+              <a:t> com base em características como área, número de quartos, localização e proximidade de escolas.</a:t>
+            </a:r>
+          </a:p>
+          <a:p>
+            <a:endParaRPr lang="en-US" dirty="0"/>
+          </a:p>
+          <a:p>
+            <a:r>
+              <a:rPr lang="pt-BR" b="1" dirty="0"/>
+              <a:t>💳 4. Avaliação de risco de crédito</a:t>
+            </a:r>
+          </a:p>
+          <a:p>
+            <a:r>
+              <a:rPr lang="pt-BR" dirty="0"/>
+              <a:t>Bancos e instituições financeiras aplicam regressão para </a:t>
+            </a:r>
+            <a:r>
+              <a:rPr lang="pt-BR" b="1" dirty="0"/>
+              <a:t>predizer probabilidade de inadimplência</a:t>
+            </a:r>
+            <a:r>
+              <a:rPr lang="pt-BR" dirty="0"/>
+              <a:t> de clientes, analisando renda, histórico de crédito, emprego, etc., orientando decisões de empréstimos.</a:t>
+            </a:r>
+          </a:p>
+          <a:p>
+            <a:endParaRPr lang="en-US" dirty="0"/>
+          </a:p>
+          <a:p>
+            <a:endParaRPr lang="en-US" dirty="0"/>
+          </a:p>
+          <a:p>
+            <a:pPr marL="171450" indent="-171450">
+              <a:buFont typeface="Arial" panose="020B0604020202020204" pitchFamily="34" charset="0"/>
+              <a:buChar char="•"/>
+            </a:pPr>
+            <a:endParaRPr lang="pt-BR" dirty="0"/>
+          </a:p>
+          <a:p>
+            <a:endParaRPr lang="pt-BR" dirty="0"/>
+          </a:p>
+        </p:txBody>
+      </p:sp>
+      <p:sp>
+        <p:nvSpPr>
+          <p:cNvPr id="4" name="Slide Number Placeholder 3"/>
+          <p:cNvSpPr>
+            <a:spLocks noGrp="1"/>
+          </p:cNvSpPr>
+          <p:nvPr>
+            <p:ph type="sldNum" sz="quarter" idx="10"/>
+          </p:nvPr>
+        </p:nvSpPr>
+        <p:spPr/>
+        <p:txBody>
+          <a:bodyPr/>
+          <a:lstStyle/>
+          <a:p>
+            <a:fld id="{DA8B99DF-01BC-492A-8CEF-4FD88D18DD9D}" type="slidenum">
+              <a:rPr lang="nl-BE" smtClean="0"/>
+              <a:t>3</a:t>
+            </a:fld>
+            <a:endParaRPr lang="nl-BE"/>
+          </a:p>
+        </p:txBody>
+      </p:sp>
+    </p:spTree>
+    <p:extLst>
+      <p:ext uri="{BB962C8B-B14F-4D97-AF65-F5344CB8AC3E}">
+        <p14:creationId xmlns:p14="http://schemas.microsoft.com/office/powerpoint/2010/main" val="441009829"/>
+      </p:ext>
+    </p:extLst>
+  </p:cSld>
+  <p:clrMapOvr>
+    <a:masterClrMapping/>
+  </p:clrMapOvr>
+</p:notes>
+</file>
+
+<file path=ppt/notesSlides/notesSlide4.xml><?xml version="1.0" encoding="utf-8"?>
+<p:notes xmlns:a="http://schemas.openxmlformats.org/drawingml/2006/main" xmlns:r="http://schemas.openxmlformats.org/officeDocument/2006/relationships" xmlns:p="http://schemas.openxmlformats.org/presentationml/2006/main">
+  <p:cSld>
+    <p:spTree>
+      <p:nvGrpSpPr>
+        <p:cNvPr id="1" name=""/>
+        <p:cNvGrpSpPr/>
+        <p:nvPr/>
+      </p:nvGrpSpPr>
+      <p:grpSpPr>
+        <a:xfrm>
+          <a:off x="0" y="0"/>
+          <a:ext cx="0" cy="0"/>
+          <a:chOff x="0" y="0"/>
+          <a:chExt cx="0" cy="0"/>
+        </a:xfrm>
+      </p:grpSpPr>
+      <p:sp>
+        <p:nvSpPr>
+          <p:cNvPr id="2" name="Espaço Reservado para Imagem de Slide 1"/>
+          <p:cNvSpPr>
+            <a:spLocks noGrp="1" noRot="1" noChangeAspect="1"/>
+          </p:cNvSpPr>
+          <p:nvPr>
+            <p:ph type="sldImg"/>
+          </p:nvPr>
+        </p:nvSpPr>
+        <p:spPr/>
+      </p:sp>
+      <p:sp>
+        <p:nvSpPr>
+          <p:cNvPr id="3" name="Espaço Reservado para Anotações 2"/>
+          <p:cNvSpPr>
+            <a:spLocks noGrp="1"/>
+          </p:cNvSpPr>
+          <p:nvPr>
+            <p:ph type="body" idx="1"/>
+          </p:nvPr>
+        </p:nvSpPr>
+        <p:spPr/>
+        <p:txBody>
+          <a:bodyPr/>
+          <a:lstStyle/>
+          <a:p>
+            <a:r>
+              <a:rPr lang="pt-BR" b="1" dirty="0"/>
+              <a:t>insight</a:t>
+            </a:r>
+            <a:r>
+              <a:rPr lang="pt-BR" dirty="0"/>
+              <a:t>: percepção; intuição; compreensão.</a:t>
+            </a:r>
+          </a:p>
+          <a:p>
+            <a:endParaRPr lang="pt-BR" dirty="0"/>
+          </a:p>
+          <a:p>
+            <a:r>
+              <a:rPr lang="pt-BR" dirty="0"/>
+              <a:t>O termo "regressão" foi cunhado por Francis </a:t>
+            </a:r>
+            <a:r>
+              <a:rPr lang="pt-BR" dirty="0" err="1"/>
+              <a:t>Galton</a:t>
+            </a:r>
+            <a:r>
+              <a:rPr lang="pt-BR" dirty="0"/>
+              <a:t> no século 19 para descrever um fenômeno biológico. O fenômeno foi que as alturas dos descendentes de ancestrais altos tendem a </a:t>
+            </a:r>
+            <a:r>
+              <a:rPr lang="pt-BR" b="1" i="1" dirty="0"/>
+              <a:t>regredir</a:t>
+            </a:r>
+            <a:r>
+              <a:rPr lang="pt-BR" dirty="0"/>
+              <a:t> para a média (um fenômeno também é conhecido como </a:t>
+            </a:r>
+            <a:r>
+              <a:rPr lang="pt-BR" b="1" dirty="0"/>
+              <a:t>regressão à média</a:t>
+            </a:r>
+            <a:r>
+              <a:rPr lang="pt-BR" dirty="0"/>
+              <a:t>).</a:t>
+            </a:r>
+          </a:p>
+          <a:p>
+            <a:endParaRPr lang="pt-BR" dirty="0"/>
+          </a:p>
+          <a:p>
+            <a:r>
+              <a:rPr lang="pt-BR" dirty="0"/>
+              <a:t>Os algoritmos de aprendizado de máquina são descritos como o aprendizado de uma função,</a:t>
+            </a:r>
+            <a:r>
+              <a:rPr lang="pt-BR" baseline="0" dirty="0"/>
+              <a:t> </a:t>
+            </a:r>
+            <a:r>
+              <a:rPr lang="pt-BR" i="1" baseline="0" dirty="0"/>
+              <a:t>h</a:t>
+            </a:r>
+            <a:r>
+              <a:rPr lang="pt-BR" dirty="0"/>
+              <a:t>, que melhor mapeie as variáveis de entrada x em uma variável de saída y: y = </a:t>
+            </a:r>
+            <a:r>
+              <a:rPr lang="pt-BR" i="1" dirty="0"/>
+              <a:t>h</a:t>
+            </a:r>
+            <a:r>
+              <a:rPr lang="pt-BR" dirty="0"/>
+              <a:t>(x)</a:t>
+            </a:r>
+          </a:p>
+          <a:p>
+            <a:endParaRPr lang="pt-BR" dirty="0"/>
+          </a:p>
+        </p:txBody>
+      </p:sp>
+      <p:sp>
+        <p:nvSpPr>
+          <p:cNvPr id="4" name="Espaço Reservado para Número de Slide 3"/>
+          <p:cNvSpPr>
+            <a:spLocks noGrp="1"/>
+          </p:cNvSpPr>
+          <p:nvPr>
+            <p:ph type="sldNum" sz="quarter" idx="5"/>
+          </p:nvPr>
+        </p:nvSpPr>
+        <p:spPr/>
+        <p:txBody>
+          <a:bodyPr/>
+          <a:lstStyle/>
+          <a:p>
+            <a:fld id="{DA8B99DF-01BC-492A-8CEF-4FD88D18DD9D}" type="slidenum">
+              <a:rPr lang="nl-BE" smtClean="0"/>
+              <a:t>6</a:t>
+            </a:fld>
+            <a:endParaRPr lang="nl-BE"/>
+          </a:p>
+        </p:txBody>
+      </p:sp>
+    </p:spTree>
+    <p:extLst>
+      <p:ext uri="{BB962C8B-B14F-4D97-AF65-F5344CB8AC3E}">
+        <p14:creationId xmlns:p14="http://schemas.microsoft.com/office/powerpoint/2010/main" val="122866648"/>
+      </p:ext>
+    </p:extLst>
+  </p:cSld>
+  <p:clrMapOvr>
+    <a:masterClrMapping/>
+  </p:clrMapOvr>
+</p:notes>
+</file>
+
+<file path=ppt/notesSlides/notesSlide5.xml><?xml version="1.0" encoding="utf-8"?>
+<p:notes xmlns:a="http://schemas.openxmlformats.org/drawingml/2006/main" xmlns:r="http://schemas.openxmlformats.org/officeDocument/2006/relationships" xmlns:p="http://schemas.openxmlformats.org/presentationml/2006/main">
+  <p:cSld>
+    <p:spTree>
+      <p:nvGrpSpPr>
+        <p:cNvPr id="1" name=""/>
+        <p:cNvGrpSpPr/>
+        <p:nvPr/>
+      </p:nvGrpSpPr>
+      <p:grpSpPr>
+        <a:xfrm>
+          <a:off x="0" y="0"/>
+          <a:ext cx="0" cy="0"/>
+          <a:chOff x="0" y="0"/>
+          <a:chExt cx="0" cy="0"/>
+        </a:xfrm>
+      </p:grpSpPr>
+      <p:sp>
+        <p:nvSpPr>
+          <p:cNvPr id="2" name="Espaço Reservado para Imagem de Slide 1"/>
+          <p:cNvSpPr>
+            <a:spLocks noGrp="1" noRot="1" noChangeAspect="1"/>
+          </p:cNvSpPr>
+          <p:nvPr>
+            <p:ph type="sldImg"/>
+          </p:nvPr>
+        </p:nvSpPr>
+        <p:spPr/>
+      </p:sp>
+      <p:sp>
+        <p:nvSpPr>
+          <p:cNvPr id="3" name="Espaço Reservado para Anotações 2"/>
+          <p:cNvSpPr>
+            <a:spLocks noGrp="1"/>
+          </p:cNvSpPr>
+          <p:nvPr>
+            <p:ph type="body" idx="1"/>
+          </p:nvPr>
+        </p:nvSpPr>
+        <p:spPr/>
+        <p:txBody>
+          <a:bodyPr/>
+          <a:lstStyle/>
+          <a:p>
+            <a:r>
+              <a:rPr lang="pt-BR" b="1" dirty="0"/>
+              <a:t>insight</a:t>
+            </a:r>
+            <a:r>
+              <a:rPr lang="pt-BR" dirty="0"/>
+              <a:t>: percepção; intuição; compreensão.</a:t>
+            </a:r>
+          </a:p>
+          <a:p>
+            <a:endParaRPr lang="pt-BR" dirty="0"/>
+          </a:p>
+          <a:p>
+            <a:r>
+              <a:rPr lang="pt-BR" dirty="0"/>
+              <a:t>O termo "regressão" foi cunhado por Francis </a:t>
+            </a:r>
+            <a:r>
+              <a:rPr lang="pt-BR" dirty="0" err="1"/>
+              <a:t>Galton</a:t>
+            </a:r>
+            <a:r>
+              <a:rPr lang="pt-BR" dirty="0"/>
+              <a:t> no século 19 para descrever um fenômeno biológico. O fenômeno foi que as alturas dos descendentes de ancestrais altos tendem a </a:t>
+            </a:r>
+            <a:r>
+              <a:rPr lang="pt-BR" b="1" i="1" dirty="0"/>
+              <a:t>regredir</a:t>
+            </a:r>
+            <a:r>
+              <a:rPr lang="pt-BR" dirty="0"/>
+              <a:t> para a média (um fenômeno também é conhecido como </a:t>
+            </a:r>
+            <a:r>
+              <a:rPr lang="pt-BR" b="1" dirty="0"/>
+              <a:t>regressão à média</a:t>
+            </a:r>
+            <a:r>
+              <a:rPr lang="pt-BR" dirty="0"/>
+              <a:t>).</a:t>
+            </a:r>
+          </a:p>
+          <a:p>
+            <a:endParaRPr lang="pt-BR" dirty="0"/>
+          </a:p>
+          <a:p>
+            <a:r>
+              <a:rPr lang="pt-BR" dirty="0"/>
+              <a:t>Os algoritmos de aprendizado de máquina são descritos como o aprendizado de uma função,</a:t>
+            </a:r>
+            <a:r>
+              <a:rPr lang="pt-BR" baseline="0" dirty="0"/>
+              <a:t> </a:t>
+            </a:r>
+            <a:r>
+              <a:rPr lang="pt-BR" i="1" baseline="0" dirty="0"/>
+              <a:t>h</a:t>
+            </a:r>
+            <a:r>
+              <a:rPr lang="pt-BR" dirty="0"/>
+              <a:t>, que melhor mapeie as variáveis de entrada x em uma variável de saída y: y = </a:t>
+            </a:r>
+            <a:r>
+              <a:rPr lang="pt-BR" i="1" dirty="0"/>
+              <a:t>h</a:t>
+            </a:r>
+            <a:r>
+              <a:rPr lang="pt-BR" dirty="0"/>
+              <a:t>(x)</a:t>
+            </a:r>
+          </a:p>
+          <a:p>
+            <a:endParaRPr lang="pt-BR" dirty="0"/>
+          </a:p>
+        </p:txBody>
+      </p:sp>
+      <p:sp>
+        <p:nvSpPr>
+          <p:cNvPr id="4" name="Espaço Reservado para Número de Slide 3"/>
+          <p:cNvSpPr>
+            <a:spLocks noGrp="1"/>
+          </p:cNvSpPr>
+          <p:nvPr>
+            <p:ph type="sldNum" sz="quarter" idx="5"/>
+          </p:nvPr>
+        </p:nvSpPr>
+        <p:spPr/>
+        <p:txBody>
+          <a:bodyPr/>
+          <a:lstStyle/>
+          <a:p>
+            <a:fld id="{DA8B99DF-01BC-492A-8CEF-4FD88D18DD9D}" type="slidenum">
+              <a:rPr lang="nl-BE" smtClean="0"/>
+              <a:t>7</a:t>
+            </a:fld>
+            <a:endParaRPr lang="nl-BE"/>
+          </a:p>
+        </p:txBody>
+      </p:sp>
+    </p:spTree>
+    <p:extLst>
+      <p:ext uri="{BB962C8B-B14F-4D97-AF65-F5344CB8AC3E}">
+        <p14:creationId xmlns:p14="http://schemas.microsoft.com/office/powerpoint/2010/main" val="2933540496"/>
       </p:ext>
     </p:extLst>
   </p:cSld>
@@ -4222,6 +4821,150 @@
       </p:grpSpPr>
       <p:sp>
         <p:nvSpPr>
+          <p:cNvPr id="3" name="Content Placeholder 2">
+            <a:extLst>
+              <a:ext uri="{FF2B5EF4-FFF2-40B4-BE49-F238E27FC236}">
+                <a16:creationId xmlns:a16="http://schemas.microsoft.com/office/drawing/2014/main" id="{02A82650-1C1A-E0B4-4844-CCDD72B1E6DE}"/>
+              </a:ext>
+            </a:extLst>
+          </p:cNvPr>
+          <p:cNvSpPr>
+            <a:spLocks noGrp="1"/>
+          </p:cNvSpPr>
+          <p:nvPr>
+            <p:ph idx="1"/>
+          </p:nvPr>
+        </p:nvSpPr>
+        <p:spPr/>
+        <p:txBody>
+          <a:bodyPr/>
+          <a:lstStyle/>
+          <a:p>
+            <a:pPr marL="0" indent="0">
+              <a:buNone/>
+            </a:pPr>
+            <a:endParaRPr lang="en-US" dirty="0"/>
+          </a:p>
+        </p:txBody>
+      </p:sp>
+    </p:spTree>
+    <p:extLst>
+      <p:ext uri="{BB962C8B-B14F-4D97-AF65-F5344CB8AC3E}">
+        <p14:creationId xmlns:p14="http://schemas.microsoft.com/office/powerpoint/2010/main" val="1907726768"/>
+      </p:ext>
+    </p:extLst>
+  </p:cSld>
+  <p:clrMapOvr>
+    <a:masterClrMapping/>
+  </p:clrMapOvr>
+</p:sld>
+</file>
+
+<file path=ppt/slides/slide11.xml><?xml version="1.0" encoding="utf-8"?>
+<p:sld xmlns:a="http://schemas.openxmlformats.org/drawingml/2006/main" xmlns:r="http://schemas.openxmlformats.org/officeDocument/2006/relationships" xmlns:p="http://schemas.openxmlformats.org/presentationml/2006/main">
+  <p:cSld>
+    <p:spTree>
+      <p:nvGrpSpPr>
+        <p:cNvPr id="1" name=""/>
+        <p:cNvGrpSpPr/>
+        <p:nvPr/>
+      </p:nvGrpSpPr>
+      <p:grpSpPr>
+        <a:xfrm>
+          <a:off x="0" y="0"/>
+          <a:ext cx="0" cy="0"/>
+          <a:chOff x="0" y="0"/>
+          <a:chExt cx="0" cy="0"/>
+        </a:xfrm>
+      </p:grpSpPr>
+      <p:sp>
+        <p:nvSpPr>
+          <p:cNvPr id="4" name="Título 1">
+            <a:extLst>
+              <a:ext uri="{FF2B5EF4-FFF2-40B4-BE49-F238E27FC236}">
+                <a16:creationId xmlns:a16="http://schemas.microsoft.com/office/drawing/2014/main" id="{32666AC8-2E17-4DB4-B0F5-60C640CCFD2E}"/>
+              </a:ext>
+            </a:extLst>
+          </p:cNvPr>
+          <p:cNvSpPr txBox="1">
+            <a:spLocks/>
+          </p:cNvSpPr>
+          <p:nvPr/>
+        </p:nvSpPr>
+        <p:spPr>
+          <a:xfrm>
+            <a:off x="1431533" y="2720526"/>
+            <a:ext cx="9144000" cy="1029541"/>
+          </a:xfrm>
+          <a:prstGeom prst="rect">
+            <a:avLst/>
+          </a:prstGeom>
+        </p:spPr>
+        <p:txBody>
+          <a:bodyPr vert="horz" lIns="91440" tIns="45720" rIns="91440" bIns="45720" rtlCol="0" anchor="ctr">
+            <a:normAutofit/>
+          </a:bodyPr>
+          <a:lstStyle>
+            <a:lvl1pPr algn="l" defTabSz="914400" rtl="0" eaLnBrk="1" latinLnBrk="0" hangingPunct="1">
+              <a:lnSpc>
+                <a:spcPct val="90000"/>
+              </a:lnSpc>
+              <a:spcBef>
+                <a:spcPct val="0"/>
+              </a:spcBef>
+              <a:buNone/>
+              <a:defRPr sz="4400" kern="1200">
+                <a:solidFill>
+                  <a:schemeClr val="tx1"/>
+                </a:solidFill>
+                <a:latin typeface="+mj-lt"/>
+                <a:ea typeface="+mj-ea"/>
+                <a:cs typeface="+mj-cs"/>
+              </a:defRPr>
+            </a:lvl1pPr>
+          </a:lstStyle>
+          <a:p>
+            <a:pPr algn="ctr"/>
+            <a:r>
+              <a:rPr lang="pt-BR" sz="6600" dirty="0"/>
+              <a:t>Perguntas?</a:t>
+            </a:r>
+            <a:endParaRPr lang="pt-BR" sz="6600" b="1" i="1" dirty="0"/>
+          </a:p>
+        </p:txBody>
+      </p:sp>
+    </p:spTree>
+    <p:extLst>
+      <p:ext uri="{BB962C8B-B14F-4D97-AF65-F5344CB8AC3E}">
+        <p14:creationId xmlns:p14="http://schemas.microsoft.com/office/powerpoint/2010/main" val="3773005660"/>
+      </p:ext>
+    </p:extLst>
+  </p:cSld>
+  <p:clrMapOvr>
+    <a:masterClrMapping/>
+  </p:clrMapOvr>
+</p:sld>
+</file>
+
+<file path=ppt/slides/slide12.xml><?xml version="1.0" encoding="utf-8"?>
+<p:sld xmlns:a="http://schemas.openxmlformats.org/drawingml/2006/main" xmlns:r="http://schemas.openxmlformats.org/officeDocument/2006/relationships" xmlns:p="http://schemas.openxmlformats.org/presentationml/2006/main">
+  <p:cSld>
+    <p:spTree>
+      <p:nvGrpSpPr>
+        <p:cNvPr id="1" name=""/>
+        <p:cNvGrpSpPr/>
+        <p:nvPr/>
+      </p:nvGrpSpPr>
+      <p:grpSpPr>
+        <a:xfrm>
+          <a:off x="0" y="0"/>
+          <a:ext cx="0" cy="0"/>
+          <a:chOff x="0" y="0"/>
+          <a:chExt cx="0" cy="0"/>
+        </a:xfrm>
+      </p:grpSpPr>
+      <p:sp>
+        <p:nvSpPr>
           <p:cNvPr id="4" name="Título 1">
             <a:extLst>
               <a:ext uri="{FF2B5EF4-FFF2-40B4-BE49-F238E27FC236}">
@@ -4308,13 +5051,7 @@
       </p:grpSpPr>
       <p:sp>
         <p:nvSpPr>
-          <p:cNvPr id="2" name="Título 1">
-            <a:extLst>
-              <a:ext uri="{FF2B5EF4-FFF2-40B4-BE49-F238E27FC236}">
-                <a16:creationId xmlns:a16="http://schemas.microsoft.com/office/drawing/2014/main" id="{7F5FF925-67DE-CC62-E869-C6E3C1D771E6}"/>
-              </a:ext>
-            </a:extLst>
-          </p:cNvPr>
+          <p:cNvPr id="2" name="Title 1"/>
           <p:cNvSpPr>
             <a:spLocks noGrp="1"/>
           </p:cNvSpPr>
@@ -4329,20 +5066,86 @@
           <a:p>
             <a:r>
               <a:rPr lang="pt-BR" dirty="0"/>
-              <a:t>Introdução</a:t>
-            </a:r>
-          </a:p>
-        </p:txBody>
-      </p:sp>
-      <p:sp>
-        <p:nvSpPr>
-          <p:cNvPr id="3" name="Espaço Reservado para Conteúdo 2">
-            <a:extLst>
-              <a:ext uri="{FF2B5EF4-FFF2-40B4-BE49-F238E27FC236}">
-                <a16:creationId xmlns:a16="http://schemas.microsoft.com/office/drawing/2014/main" id="{7DA84068-671A-9D40-4F76-2C57E4F720C2}"/>
-              </a:ext>
-            </a:extLst>
-          </p:cNvPr>
+              <a:t>Motivação</a:t>
+            </a:r>
+          </a:p>
+        </p:txBody>
+      </p:sp>
+      <p:pic>
+        <p:nvPicPr>
+          <p:cNvPr id="6" name="Picture 5"/>
+          <p:cNvPicPr>
+            <a:picLocks noChangeAspect="1"/>
+          </p:cNvPicPr>
+          <p:nvPr/>
+        </p:nvPicPr>
+        <p:blipFill>
+          <a:blip r:embed="rId3"/>
+          <a:stretch>
+            <a:fillRect/>
+          </a:stretch>
+        </p:blipFill>
+        <p:spPr>
+          <a:xfrm>
+            <a:off x="1555520" y="2921704"/>
+            <a:ext cx="2224946" cy="1481651"/>
+          </a:xfrm>
+          <a:prstGeom prst="rect">
+            <a:avLst/>
+          </a:prstGeom>
+        </p:spPr>
+      </p:pic>
+      <p:pic>
+        <p:nvPicPr>
+          <p:cNvPr id="7" name="Picture 6"/>
+          <p:cNvPicPr>
+            <a:picLocks noChangeAspect="1"/>
+          </p:cNvPicPr>
+          <p:nvPr/>
+        </p:nvPicPr>
+        <p:blipFill>
+          <a:blip r:embed="rId4"/>
+          <a:stretch>
+            <a:fillRect/>
+          </a:stretch>
+        </p:blipFill>
+        <p:spPr>
+          <a:xfrm>
+            <a:off x="5114109" y="2920986"/>
+            <a:ext cx="1965031" cy="1473773"/>
+          </a:xfrm>
+          <a:prstGeom prst="rect">
+            <a:avLst/>
+          </a:prstGeom>
+        </p:spPr>
+      </p:pic>
+      <p:pic>
+        <p:nvPicPr>
+          <p:cNvPr id="8" name="Picture 7"/>
+          <p:cNvPicPr>
+            <a:picLocks noChangeAspect="1"/>
+          </p:cNvPicPr>
+          <p:nvPr/>
+        </p:nvPicPr>
+        <p:blipFill>
+          <a:blip r:embed="rId5"/>
+          <a:stretch>
+            <a:fillRect/>
+          </a:stretch>
+        </p:blipFill>
+        <p:spPr>
+          <a:xfrm>
+            <a:off x="8209597" y="2929582"/>
+            <a:ext cx="2620040" cy="1473773"/>
+          </a:xfrm>
+          <a:prstGeom prst="rect">
+            <a:avLst/>
+          </a:prstGeom>
+        </p:spPr>
+      </p:pic>
+      <p:sp>
+        <p:nvSpPr>
+          <p:cNvPr id="9" name="Content Placeholder 2"/>
           <p:cNvSpPr>
             <a:spLocks noGrp="1"/>
           </p:cNvSpPr>
@@ -4350,19 +5153,776 @@
             <p:ph idx="1"/>
           </p:nvPr>
         </p:nvSpPr>
-        <p:spPr/>
-        <p:txBody>
-          <a:bodyPr/>
+        <p:spPr>
+          <a:xfrm>
+            <a:off x="627847" y="1654206"/>
+            <a:ext cx="10515600" cy="1073439"/>
+          </a:xfrm>
+        </p:spPr>
+        <p:txBody>
+          <a:bodyPr>
+            <a:normAutofit/>
+          </a:bodyPr>
           <a:lstStyle/>
           <a:p>
-            <a:endParaRPr lang="pt-BR" dirty="0"/>
-          </a:p>
-        </p:txBody>
-      </p:sp>
+            <a:r>
+              <a:rPr lang="pt-BR" b="1" dirty="0"/>
+              <a:t>Exemplo 1</a:t>
+            </a:r>
+            <a:r>
+              <a:rPr lang="pt-BR" dirty="0"/>
+              <a:t>: Estimar o preço de casas.</a:t>
+            </a:r>
+          </a:p>
+        </p:txBody>
+      </p:sp>
+      <mc:AlternateContent xmlns:mc="http://schemas.openxmlformats.org/markup-compatibility/2006" xmlns:a14="http://schemas.microsoft.com/office/drawing/2010/main">
+        <mc:Choice Requires="a14">
+          <p:sp>
+            <p:nvSpPr>
+              <p:cNvPr id="10" name="Content Placeholder 2"/>
+              <p:cNvSpPr txBox="1">
+                <a:spLocks/>
+              </p:cNvSpPr>
+              <p:nvPr/>
+            </p:nvSpPr>
+            <p:spPr>
+              <a:xfrm>
+                <a:off x="734291" y="5122567"/>
+                <a:ext cx="11185960" cy="1735434"/>
+              </a:xfrm>
+              <a:prstGeom prst="rect">
+                <a:avLst/>
+              </a:prstGeom>
+            </p:spPr>
+            <p:txBody>
+              <a:bodyPr vert="horz" lIns="91440" tIns="45720" rIns="91440" bIns="45720" rtlCol="0">
+                <a:normAutofit lnSpcReduction="10000"/>
+              </a:bodyPr>
+              <a:lstStyle>
+                <a:lvl1pPr marL="228600" indent="-228600" algn="l" defTabSz="914400" rtl="0" eaLnBrk="1" latinLnBrk="0" hangingPunct="1">
+                  <a:lnSpc>
+                    <a:spcPct val="90000"/>
+                  </a:lnSpc>
+                  <a:spcBef>
+                    <a:spcPts val="1000"/>
+                  </a:spcBef>
+                  <a:buFont typeface="Arial" panose="020B0604020202020204" pitchFamily="34" charset="0"/>
+                  <a:buChar char="•"/>
+                  <a:defRPr sz="2800" kern="1200">
+                    <a:solidFill>
+                      <a:schemeClr val="tx1"/>
+                    </a:solidFill>
+                    <a:latin typeface="+mn-lt"/>
+                    <a:ea typeface="+mn-ea"/>
+                    <a:cs typeface="+mn-cs"/>
+                  </a:defRPr>
+                </a:lvl1pPr>
+                <a:lvl2pPr marL="685800" indent="-228600" algn="l" defTabSz="914400" rtl="0" eaLnBrk="1" latinLnBrk="0" hangingPunct="1">
+                  <a:lnSpc>
+                    <a:spcPct val="90000"/>
+                  </a:lnSpc>
+                  <a:spcBef>
+                    <a:spcPts val="500"/>
+                  </a:spcBef>
+                  <a:buFont typeface="Arial" panose="020B0604020202020204" pitchFamily="34" charset="0"/>
+                  <a:buChar char="•"/>
+                  <a:defRPr sz="2400" kern="1200">
+                    <a:solidFill>
+                      <a:schemeClr val="tx1"/>
+                    </a:solidFill>
+                    <a:latin typeface="+mn-lt"/>
+                    <a:ea typeface="+mn-ea"/>
+                    <a:cs typeface="+mn-cs"/>
+                  </a:defRPr>
+                </a:lvl2pPr>
+                <a:lvl3pPr marL="1143000" indent="-228600" algn="l" defTabSz="914400" rtl="0" eaLnBrk="1" latinLnBrk="0" hangingPunct="1">
+                  <a:lnSpc>
+                    <a:spcPct val="90000"/>
+                  </a:lnSpc>
+                  <a:spcBef>
+                    <a:spcPts val="500"/>
+                  </a:spcBef>
+                  <a:buFont typeface="Arial" panose="020B0604020202020204" pitchFamily="34" charset="0"/>
+                  <a:buChar char="•"/>
+                  <a:defRPr sz="2000" kern="1200">
+                    <a:solidFill>
+                      <a:schemeClr val="tx1"/>
+                    </a:solidFill>
+                    <a:latin typeface="+mn-lt"/>
+                    <a:ea typeface="+mn-ea"/>
+                    <a:cs typeface="+mn-cs"/>
+                  </a:defRPr>
+                </a:lvl3pPr>
+                <a:lvl4pPr marL="1600200" indent="-228600" algn="l" defTabSz="914400" rtl="0" eaLnBrk="1" latinLnBrk="0" hangingPunct="1">
+                  <a:lnSpc>
+                    <a:spcPct val="90000"/>
+                  </a:lnSpc>
+                  <a:spcBef>
+                    <a:spcPts val="500"/>
+                  </a:spcBef>
+                  <a:buFont typeface="Arial" panose="020B0604020202020204" pitchFamily="34" charset="0"/>
+                  <a:buChar char="•"/>
+                  <a:defRPr sz="1800" kern="1200">
+                    <a:solidFill>
+                      <a:schemeClr val="tx1"/>
+                    </a:solidFill>
+                    <a:latin typeface="+mn-lt"/>
+                    <a:ea typeface="+mn-ea"/>
+                    <a:cs typeface="+mn-cs"/>
+                  </a:defRPr>
+                </a:lvl4pPr>
+                <a:lvl5pPr marL="2057400" indent="-228600" algn="l" defTabSz="914400" rtl="0" eaLnBrk="1" latinLnBrk="0" hangingPunct="1">
+                  <a:lnSpc>
+                    <a:spcPct val="90000"/>
+                  </a:lnSpc>
+                  <a:spcBef>
+                    <a:spcPts val="500"/>
+                  </a:spcBef>
+                  <a:buFont typeface="Arial" panose="020B0604020202020204" pitchFamily="34" charset="0"/>
+                  <a:buChar char="•"/>
+                  <a:defRPr sz="1800" kern="1200">
+                    <a:solidFill>
+                      <a:schemeClr val="tx1"/>
+                    </a:solidFill>
+                    <a:latin typeface="+mn-lt"/>
+                    <a:ea typeface="+mn-ea"/>
+                    <a:cs typeface="+mn-cs"/>
+                  </a:defRPr>
+                </a:lvl5pPr>
+                <a:lvl6pPr marL="2514600" indent="-228600" algn="l" defTabSz="914400" rtl="0" eaLnBrk="1" latinLnBrk="0" hangingPunct="1">
+                  <a:lnSpc>
+                    <a:spcPct val="90000"/>
+                  </a:lnSpc>
+                  <a:spcBef>
+                    <a:spcPts val="500"/>
+                  </a:spcBef>
+                  <a:buFont typeface="Arial" panose="020B0604020202020204" pitchFamily="34" charset="0"/>
+                  <a:buChar char="•"/>
+                  <a:defRPr sz="1800" kern="1200">
+                    <a:solidFill>
+                      <a:schemeClr val="tx1"/>
+                    </a:solidFill>
+                    <a:latin typeface="+mn-lt"/>
+                    <a:ea typeface="+mn-ea"/>
+                    <a:cs typeface="+mn-cs"/>
+                  </a:defRPr>
+                </a:lvl6pPr>
+                <a:lvl7pPr marL="2971800" indent="-228600" algn="l" defTabSz="914400" rtl="0" eaLnBrk="1" latinLnBrk="0" hangingPunct="1">
+                  <a:lnSpc>
+                    <a:spcPct val="90000"/>
+                  </a:lnSpc>
+                  <a:spcBef>
+                    <a:spcPts val="500"/>
+                  </a:spcBef>
+                  <a:buFont typeface="Arial" panose="020B0604020202020204" pitchFamily="34" charset="0"/>
+                  <a:buChar char="•"/>
+                  <a:defRPr sz="1800" kern="1200">
+                    <a:solidFill>
+                      <a:schemeClr val="tx1"/>
+                    </a:solidFill>
+                    <a:latin typeface="+mn-lt"/>
+                    <a:ea typeface="+mn-ea"/>
+                    <a:cs typeface="+mn-cs"/>
+                  </a:defRPr>
+                </a:lvl7pPr>
+                <a:lvl8pPr marL="3429000" indent="-228600" algn="l" defTabSz="914400" rtl="0" eaLnBrk="1" latinLnBrk="0" hangingPunct="1">
+                  <a:lnSpc>
+                    <a:spcPct val="90000"/>
+                  </a:lnSpc>
+                  <a:spcBef>
+                    <a:spcPts val="500"/>
+                  </a:spcBef>
+                  <a:buFont typeface="Arial" panose="020B0604020202020204" pitchFamily="34" charset="0"/>
+                  <a:buChar char="•"/>
+                  <a:defRPr sz="1800" kern="1200">
+                    <a:solidFill>
+                      <a:schemeClr val="tx1"/>
+                    </a:solidFill>
+                    <a:latin typeface="+mn-lt"/>
+                    <a:ea typeface="+mn-ea"/>
+                    <a:cs typeface="+mn-cs"/>
+                  </a:defRPr>
+                </a:lvl8pPr>
+                <a:lvl9pPr marL="3886200" indent="-228600" algn="l" defTabSz="914400" rtl="0" eaLnBrk="1" latinLnBrk="0" hangingPunct="1">
+                  <a:lnSpc>
+                    <a:spcPct val="90000"/>
+                  </a:lnSpc>
+                  <a:spcBef>
+                    <a:spcPts val="500"/>
+                  </a:spcBef>
+                  <a:buFont typeface="Arial" panose="020B0604020202020204" pitchFamily="34" charset="0"/>
+                  <a:buChar char="•"/>
+                  <a:defRPr sz="1800" kern="1200">
+                    <a:solidFill>
+                      <a:schemeClr val="tx1"/>
+                    </a:solidFill>
+                    <a:latin typeface="+mn-lt"/>
+                    <a:ea typeface="+mn-ea"/>
+                    <a:cs typeface="+mn-cs"/>
+                  </a:defRPr>
+                </a:lvl9pPr>
+              </a:lstStyle>
+              <a:p>
+                <a:r>
+                  <a:rPr lang="pt-BR" dirty="0"/>
+                  <a:t>Podemos usar </a:t>
+                </a:r>
+                <a:r>
+                  <a:rPr lang="pt-BR" b="1" i="1" dirty="0"/>
+                  <a:t>regressão</a:t>
+                </a:r>
+                <a:r>
+                  <a:rPr lang="pt-BR" dirty="0"/>
+                  <a:t> para encontrar uma </a:t>
+                </a:r>
+                <a:r>
+                  <a:rPr lang="pt-BR" b="1" i="1" dirty="0">
+                    <a:solidFill>
+                      <a:srgbClr val="0070C0"/>
+                    </a:solidFill>
+                  </a:rPr>
+                  <a:t>relação matemática</a:t>
+                </a:r>
+                <a:r>
+                  <a:rPr lang="pt-BR" dirty="0"/>
+                  <a:t>, </a:t>
+                </a:r>
+                <a14:m>
+                  <m:oMath xmlns:m="http://schemas.openxmlformats.org/officeDocument/2006/math">
+                    <m:r>
+                      <a:rPr lang="pt-BR" b="0" i="1" smtClean="0">
+                        <a:latin typeface="Cambria Math" panose="02040503050406030204" pitchFamily="18" charset="0"/>
+                      </a:rPr>
+                      <m:t>h</m:t>
+                    </m:r>
+                    <m:r>
+                      <a:rPr lang="pt-BR" b="0" i="1" smtClean="0">
+                        <a:latin typeface="Cambria Math" panose="02040503050406030204" pitchFamily="18" charset="0"/>
+                      </a:rPr>
+                      <m:t>(</m:t>
+                    </m:r>
+                    <m:r>
+                      <a:rPr lang="pt-BR" b="1" i="1" smtClean="0">
+                        <a:latin typeface="Cambria Math" panose="02040503050406030204" pitchFamily="18" charset="0"/>
+                      </a:rPr>
+                      <m:t>𝒙</m:t>
+                    </m:r>
+                    <m:r>
+                      <a:rPr lang="pt-BR" b="0" i="1" smtClean="0">
+                        <a:latin typeface="Cambria Math" panose="02040503050406030204" pitchFamily="18" charset="0"/>
+                      </a:rPr>
+                      <m:t>)</m:t>
+                    </m:r>
+                  </m:oMath>
+                </a14:m>
+                <a:r>
+                  <a:rPr lang="pt-BR" dirty="0"/>
+                  <a:t>, entre o n</a:t>
+                </a:r>
+                <a14:m>
+                  <m:oMath xmlns:m="http://schemas.openxmlformats.org/officeDocument/2006/math">
+                    <m:r>
+                      <a:rPr lang="pt-BR" i="1">
+                        <a:latin typeface="Cambria Math" panose="02040503050406030204" pitchFamily="18" charset="0"/>
+                        <a:ea typeface="Cambria Math" panose="02040503050406030204" pitchFamily="18" charset="0"/>
+                      </a:rPr>
+                      <m:t>°</m:t>
+                    </m:r>
+                  </m:oMath>
+                </a14:m>
+                <a:r>
+                  <a:rPr lang="pt-BR" dirty="0"/>
+                  <a:t> de quartos, n</a:t>
+                </a:r>
+                <a14:m>
+                  <m:oMath xmlns:m="http://schemas.openxmlformats.org/officeDocument/2006/math">
+                    <m:r>
+                      <a:rPr lang="pt-BR" i="1">
+                        <a:latin typeface="Cambria Math" panose="02040503050406030204" pitchFamily="18" charset="0"/>
+                        <a:ea typeface="Cambria Math" panose="02040503050406030204" pitchFamily="18" charset="0"/>
+                      </a:rPr>
+                      <m:t>° </m:t>
+                    </m:r>
+                  </m:oMath>
+                </a14:m>
+                <a:r>
+                  <a:rPr lang="pt-BR" dirty="0"/>
+                  <a:t>de vagas na garagem, se tem piscina, localização, área, etc. de uma casa e seu valor.</a:t>
+                </a:r>
+              </a:p>
+              <a:p>
+                <a:r>
+                  <a:rPr lang="pt-BR" b="1" dirty="0">
+                    <a:solidFill>
+                      <a:srgbClr val="00B050"/>
+                    </a:solidFill>
+                  </a:rPr>
+                  <a:t>Objetivo</a:t>
+                </a:r>
+                <a:r>
+                  <a:rPr lang="pt-BR" dirty="0"/>
+                  <a:t>: agilizar o processo de avaliação de propriedades.</a:t>
+                </a:r>
+              </a:p>
+            </p:txBody>
+          </p:sp>
+        </mc:Choice>
+        <mc:Fallback xmlns="">
+          <p:sp>
+            <p:nvSpPr>
+              <p:cNvPr id="10" name="Content Placeholder 2"/>
+              <p:cNvSpPr txBox="1">
+                <a:spLocks noRot="1" noChangeAspect="1" noMove="1" noResize="1" noEditPoints="1" noAdjustHandles="1" noChangeArrowheads="1" noChangeShapeType="1" noTextEdit="1"/>
+              </p:cNvSpPr>
+              <p:nvPr/>
+            </p:nvSpPr>
+            <p:spPr>
+              <a:xfrm>
+                <a:off x="734291" y="5122567"/>
+                <a:ext cx="11185960" cy="1735434"/>
+              </a:xfrm>
+              <a:prstGeom prst="rect">
+                <a:avLst/>
+              </a:prstGeom>
+              <a:blipFill>
+                <a:blip r:embed="rId6"/>
+                <a:stretch>
+                  <a:fillRect l="-981" t="-7719" r="-1035" b="-1754"/>
+                </a:stretch>
+              </a:blipFill>
+            </p:spPr>
+            <p:txBody>
+              <a:bodyPr/>
+              <a:lstStyle/>
+              <a:p>
+                <a:r>
+                  <a:rPr lang="en-US">
+                    <a:noFill/>
+                  </a:rPr>
+                  <a:t> </a:t>
+                </a:r>
+              </a:p>
+            </p:txBody>
+          </p:sp>
+        </mc:Fallback>
+      </mc:AlternateContent>
+      <p:sp>
+        <p:nvSpPr>
+          <p:cNvPr id="3" name="TextBox 2"/>
+          <p:cNvSpPr txBox="1"/>
+          <p:nvPr/>
+        </p:nvSpPr>
+        <p:spPr>
+          <a:xfrm>
+            <a:off x="1555520" y="4556041"/>
+            <a:ext cx="2224946" cy="369332"/>
+          </a:xfrm>
+          <a:prstGeom prst="rect">
+            <a:avLst/>
+          </a:prstGeom>
+          <a:noFill/>
+        </p:spPr>
+        <p:txBody>
+          <a:bodyPr wrap="square" rtlCol="0">
+            <a:spAutoFit/>
+          </a:bodyPr>
+          <a:lstStyle/>
+          <a:p>
+            <a:pPr algn="ctr"/>
+            <a:r>
+              <a:rPr lang="pt-BR" dirty="0"/>
+              <a:t>R$ 1.000.000,00</a:t>
+            </a:r>
+          </a:p>
+        </p:txBody>
+      </p:sp>
+      <p:sp>
+        <p:nvSpPr>
+          <p:cNvPr id="11" name="TextBox 10"/>
+          <p:cNvSpPr txBox="1"/>
+          <p:nvPr/>
+        </p:nvSpPr>
+        <p:spPr>
+          <a:xfrm>
+            <a:off x="5114109" y="4567526"/>
+            <a:ext cx="2003045" cy="369332"/>
+          </a:xfrm>
+          <a:prstGeom prst="rect">
+            <a:avLst/>
+          </a:prstGeom>
+          <a:noFill/>
+        </p:spPr>
+        <p:txBody>
+          <a:bodyPr wrap="square" rtlCol="0">
+            <a:spAutoFit/>
+          </a:bodyPr>
+          <a:lstStyle/>
+          <a:p>
+            <a:pPr algn="ctr"/>
+            <a:r>
+              <a:rPr lang="pt-BR" dirty="0"/>
+              <a:t>R$ 200.000,00</a:t>
+            </a:r>
+          </a:p>
+        </p:txBody>
+      </p:sp>
+      <p:sp>
+        <p:nvSpPr>
+          <p:cNvPr id="12" name="TextBox 11"/>
+          <p:cNvSpPr txBox="1"/>
+          <p:nvPr/>
+        </p:nvSpPr>
+        <p:spPr>
+          <a:xfrm>
+            <a:off x="8207147" y="4517680"/>
+            <a:ext cx="2620041" cy="461665"/>
+          </a:xfrm>
+          <a:prstGeom prst="rect">
+            <a:avLst/>
+          </a:prstGeom>
+          <a:noFill/>
+        </p:spPr>
+        <p:txBody>
+          <a:bodyPr wrap="square" rtlCol="0">
+            <a:spAutoFit/>
+          </a:bodyPr>
+          <a:lstStyle/>
+          <a:p>
+            <a:pPr algn="ctr"/>
+            <a:r>
+              <a:rPr lang="pt-BR" sz="2400" b="1" dirty="0">
+                <a:solidFill>
+                  <a:srgbClr val="FF0000"/>
+                </a:solidFill>
+              </a:rPr>
+              <a:t>???</a:t>
+            </a:r>
+          </a:p>
+        </p:txBody>
+      </p:sp>
+      <mc:AlternateContent xmlns:mc="http://schemas.openxmlformats.org/markup-compatibility/2006" xmlns:a14="http://schemas.microsoft.com/office/drawing/2010/main">
+        <mc:Choice Requires="a14">
+          <p:sp>
+            <p:nvSpPr>
+              <p:cNvPr id="4" name="TextBox 3"/>
+              <p:cNvSpPr txBox="1"/>
+              <p:nvPr/>
+            </p:nvSpPr>
+            <p:spPr>
+              <a:xfrm>
+                <a:off x="1260591" y="2308362"/>
+                <a:ext cx="2923229" cy="590354"/>
+              </a:xfrm>
+              <a:prstGeom prst="rect">
+                <a:avLst/>
+              </a:prstGeom>
+              <a:noFill/>
+            </p:spPr>
+            <p:txBody>
+              <a:bodyPr wrap="square" rtlCol="0">
+                <a:spAutoFit/>
+              </a:bodyPr>
+              <a:lstStyle/>
+              <a:p>
+                <a:pPr algn="ctr"/>
+                <a:r>
+                  <a:rPr lang="pt-BR" sz="1600" dirty="0"/>
+                  <a:t>5 quartos, 3 vagas na garagem, 1 piscina, cond. de luxo, 500 </a:t>
+                </a:r>
+                <a14:m>
+                  <m:oMath xmlns:m="http://schemas.openxmlformats.org/officeDocument/2006/math">
+                    <m:sSup>
+                      <m:sSupPr>
+                        <m:ctrlPr>
+                          <a:rPr lang="pt-BR" sz="1600" i="1" smtClean="0">
+                            <a:latin typeface="Cambria Math" panose="02040503050406030204" pitchFamily="18" charset="0"/>
+                          </a:rPr>
+                        </m:ctrlPr>
+                      </m:sSupPr>
+                      <m:e>
+                        <m:r>
+                          <a:rPr lang="pt-BR" sz="1600" b="0" i="1" smtClean="0">
+                            <a:latin typeface="Cambria Math" panose="02040503050406030204" pitchFamily="18" charset="0"/>
+                          </a:rPr>
+                          <m:t>𝑚</m:t>
+                        </m:r>
+                      </m:e>
+                      <m:sup>
+                        <m:r>
+                          <a:rPr lang="pt-BR" sz="1600" b="0" i="1" smtClean="0">
+                            <a:latin typeface="Cambria Math" panose="02040503050406030204" pitchFamily="18" charset="0"/>
+                          </a:rPr>
+                          <m:t>2</m:t>
+                        </m:r>
+                      </m:sup>
+                    </m:sSup>
+                  </m:oMath>
+                </a14:m>
+                <a:endParaRPr lang="pt-BR" sz="1600" dirty="0"/>
+              </a:p>
+            </p:txBody>
+          </p:sp>
+        </mc:Choice>
+        <mc:Fallback xmlns="">
+          <p:sp>
+            <p:nvSpPr>
+              <p:cNvPr id="4" name="TextBox 3"/>
+              <p:cNvSpPr txBox="1">
+                <a:spLocks noRot="1" noChangeAspect="1" noMove="1" noResize="1" noEditPoints="1" noAdjustHandles="1" noChangeArrowheads="1" noChangeShapeType="1" noTextEdit="1"/>
+              </p:cNvSpPr>
+              <p:nvPr/>
+            </p:nvSpPr>
+            <p:spPr>
+              <a:xfrm>
+                <a:off x="1260591" y="2308362"/>
+                <a:ext cx="2923229" cy="590354"/>
+              </a:xfrm>
+              <a:prstGeom prst="rect">
+                <a:avLst/>
+              </a:prstGeom>
+              <a:blipFill>
+                <a:blip r:embed="rId7"/>
+                <a:stretch>
+                  <a:fillRect l="-418" t="-3093" r="-1879" b="-12371"/>
+                </a:stretch>
+              </a:blipFill>
+            </p:spPr>
+            <p:txBody>
+              <a:bodyPr/>
+              <a:lstStyle/>
+              <a:p>
+                <a:r>
+                  <a:rPr lang="pt-BR">
+                    <a:noFill/>
+                  </a:rPr>
+                  <a:t> </a:t>
+                </a:r>
+              </a:p>
+            </p:txBody>
+          </p:sp>
+        </mc:Fallback>
+      </mc:AlternateContent>
+      <mc:AlternateContent xmlns:mc="http://schemas.openxmlformats.org/markup-compatibility/2006" xmlns:a14="http://schemas.microsoft.com/office/drawing/2010/main">
+        <mc:Choice Requires="a14">
+          <p:sp>
+            <p:nvSpPr>
+              <p:cNvPr id="13" name="TextBox 12"/>
+              <p:cNvSpPr txBox="1"/>
+              <p:nvPr/>
+            </p:nvSpPr>
+            <p:spPr>
+              <a:xfrm>
+                <a:off x="4694503" y="2316101"/>
+                <a:ext cx="2804242" cy="590354"/>
+              </a:xfrm>
+              <a:prstGeom prst="rect">
+                <a:avLst/>
+              </a:prstGeom>
+              <a:noFill/>
+            </p:spPr>
+            <p:txBody>
+              <a:bodyPr wrap="square" rtlCol="0">
+                <a:spAutoFit/>
+              </a:bodyPr>
+              <a:lstStyle>
+                <a:defPPr>
+                  <a:defRPr lang="nl-BE"/>
+                </a:defPPr>
+                <a:lvl1pPr algn="ctr">
+                  <a:defRPr sz="1600"/>
+                </a:lvl1pPr>
+              </a:lstStyle>
+              <a:p>
+                <a:r>
+                  <a:rPr lang="pt-BR" dirty="0"/>
+                  <a:t>1 quarto, sem vaga na garagem, bairro afastado, 70 </a:t>
+                </a:r>
+                <a14:m>
+                  <m:oMath xmlns:m="http://schemas.openxmlformats.org/officeDocument/2006/math">
+                    <m:sSup>
+                      <m:sSupPr>
+                        <m:ctrlPr>
+                          <a:rPr lang="pt-BR" i="1">
+                            <a:latin typeface="Cambria Math" panose="02040503050406030204" pitchFamily="18" charset="0"/>
+                          </a:rPr>
+                        </m:ctrlPr>
+                      </m:sSupPr>
+                      <m:e>
+                        <m:r>
+                          <a:rPr lang="pt-BR">
+                            <a:latin typeface="Cambria Math" panose="02040503050406030204" pitchFamily="18" charset="0"/>
+                          </a:rPr>
+                          <m:t>𝑚</m:t>
+                        </m:r>
+                      </m:e>
+                      <m:sup>
+                        <m:r>
+                          <a:rPr lang="pt-BR">
+                            <a:latin typeface="Cambria Math" panose="02040503050406030204" pitchFamily="18" charset="0"/>
+                          </a:rPr>
+                          <m:t>2</m:t>
+                        </m:r>
+                      </m:sup>
+                    </m:sSup>
+                  </m:oMath>
+                </a14:m>
+                <a:endParaRPr lang="pt-BR" dirty="0"/>
+              </a:p>
+            </p:txBody>
+          </p:sp>
+        </mc:Choice>
+        <mc:Fallback xmlns="">
+          <p:sp>
+            <p:nvSpPr>
+              <p:cNvPr id="13" name="TextBox 12"/>
+              <p:cNvSpPr txBox="1">
+                <a:spLocks noRot="1" noChangeAspect="1" noMove="1" noResize="1" noEditPoints="1" noAdjustHandles="1" noChangeArrowheads="1" noChangeShapeType="1" noTextEdit="1"/>
+              </p:cNvSpPr>
+              <p:nvPr/>
+            </p:nvSpPr>
+            <p:spPr>
+              <a:xfrm>
+                <a:off x="4694503" y="2316101"/>
+                <a:ext cx="2804242" cy="590354"/>
+              </a:xfrm>
+              <a:prstGeom prst="rect">
+                <a:avLst/>
+              </a:prstGeom>
+              <a:blipFill>
+                <a:blip r:embed="rId8"/>
+                <a:stretch>
+                  <a:fillRect l="-870" t="-3093" r="-3043" b="-12371"/>
+                </a:stretch>
+              </a:blipFill>
+            </p:spPr>
+            <p:txBody>
+              <a:bodyPr/>
+              <a:lstStyle/>
+              <a:p>
+                <a:r>
+                  <a:rPr lang="pt-BR">
+                    <a:noFill/>
+                  </a:rPr>
+                  <a:t> </a:t>
+                </a:r>
+              </a:p>
+            </p:txBody>
+          </p:sp>
+        </mc:Fallback>
+      </mc:AlternateContent>
+      <mc:AlternateContent xmlns:mc="http://schemas.openxmlformats.org/markup-compatibility/2006" xmlns:a14="http://schemas.microsoft.com/office/drawing/2010/main">
+        <mc:Choice Requires="a14">
+          <p:sp>
+            <p:nvSpPr>
+              <p:cNvPr id="14" name="TextBox 13"/>
+              <p:cNvSpPr txBox="1"/>
+              <p:nvPr/>
+            </p:nvSpPr>
+            <p:spPr>
+              <a:xfrm>
+                <a:off x="8207147" y="2361659"/>
+                <a:ext cx="2622490" cy="590354"/>
+              </a:xfrm>
+              <a:prstGeom prst="rect">
+                <a:avLst/>
+              </a:prstGeom>
+              <a:noFill/>
+            </p:spPr>
+            <p:txBody>
+              <a:bodyPr wrap="square" rtlCol="0">
+                <a:spAutoFit/>
+              </a:bodyPr>
+              <a:lstStyle>
+                <a:defPPr>
+                  <a:defRPr lang="nl-BE"/>
+                </a:defPPr>
+                <a:lvl1pPr algn="ctr">
+                  <a:defRPr sz="1600"/>
+                </a:lvl1pPr>
+              </a:lstStyle>
+              <a:p>
+                <a:r>
+                  <a:rPr lang="pt-BR" dirty="0"/>
+                  <a:t>2 quartos, 1 vaga na garagem, centro, 200 </a:t>
+                </a:r>
+                <a14:m>
+                  <m:oMath xmlns:m="http://schemas.openxmlformats.org/officeDocument/2006/math">
+                    <m:sSup>
+                      <m:sSupPr>
+                        <m:ctrlPr>
+                          <a:rPr lang="pt-BR" i="1">
+                            <a:latin typeface="Cambria Math" panose="02040503050406030204" pitchFamily="18" charset="0"/>
+                          </a:rPr>
+                        </m:ctrlPr>
+                      </m:sSupPr>
+                      <m:e>
+                        <m:r>
+                          <a:rPr lang="pt-BR">
+                            <a:latin typeface="Cambria Math" panose="02040503050406030204" pitchFamily="18" charset="0"/>
+                          </a:rPr>
+                          <m:t>𝑚</m:t>
+                        </m:r>
+                      </m:e>
+                      <m:sup>
+                        <m:r>
+                          <a:rPr lang="pt-BR">
+                            <a:latin typeface="Cambria Math" panose="02040503050406030204" pitchFamily="18" charset="0"/>
+                          </a:rPr>
+                          <m:t>2</m:t>
+                        </m:r>
+                      </m:sup>
+                    </m:sSup>
+                  </m:oMath>
+                </a14:m>
+                <a:endParaRPr lang="pt-BR" dirty="0"/>
+              </a:p>
+            </p:txBody>
+          </p:sp>
+        </mc:Choice>
+        <mc:Fallback xmlns="">
+          <p:sp>
+            <p:nvSpPr>
+              <p:cNvPr id="14" name="TextBox 13"/>
+              <p:cNvSpPr txBox="1">
+                <a:spLocks noRot="1" noChangeAspect="1" noMove="1" noResize="1" noEditPoints="1" noAdjustHandles="1" noChangeArrowheads="1" noChangeShapeType="1" noTextEdit="1"/>
+              </p:cNvSpPr>
+              <p:nvPr/>
+            </p:nvSpPr>
+            <p:spPr>
+              <a:xfrm>
+                <a:off x="8207147" y="2361659"/>
+                <a:ext cx="2622490" cy="590354"/>
+              </a:xfrm>
+              <a:prstGeom prst="rect">
+                <a:avLst/>
+              </a:prstGeom>
+              <a:blipFill>
+                <a:blip r:embed="rId9"/>
+                <a:stretch>
+                  <a:fillRect t="-3093" b="-12371"/>
+                </a:stretch>
+              </a:blipFill>
+            </p:spPr>
+            <p:txBody>
+              <a:bodyPr/>
+              <a:lstStyle/>
+              <a:p>
+                <a:r>
+                  <a:rPr lang="pt-BR">
+                    <a:noFill/>
+                  </a:rPr>
+                  <a:t> </a:t>
+                </a:r>
+              </a:p>
+            </p:txBody>
+          </p:sp>
+        </mc:Fallback>
+      </mc:AlternateContent>
     </p:spTree>
     <p:extLst>
       <p:ext uri="{BB962C8B-B14F-4D97-AF65-F5344CB8AC3E}">
-        <p14:creationId xmlns:p14="http://schemas.microsoft.com/office/powerpoint/2010/main" val="364118245"/>
+        <p14:creationId xmlns:p14="http://schemas.microsoft.com/office/powerpoint/2010/main" val="301802495"/>
       </p:ext>
     </p:extLst>
   </p:cSld>
@@ -4391,61 +5951,432 @@
       </p:grpSpPr>
       <p:sp>
         <p:nvSpPr>
-          <p:cNvPr id="2" name="Título 1">
+          <p:cNvPr id="2" name="Title 1"/>
+          <p:cNvSpPr>
+            <a:spLocks noGrp="1"/>
+          </p:cNvSpPr>
+          <p:nvPr>
+            <p:ph type="title"/>
+          </p:nvPr>
+        </p:nvSpPr>
+        <p:spPr/>
+        <p:txBody>
+          <a:bodyPr/>
+          <a:lstStyle/>
+          <a:p>
+            <a:r>
+              <a:rPr lang="pt-BR" dirty="0"/>
+              <a:t>Motivação</a:t>
+            </a:r>
+          </a:p>
+        </p:txBody>
+      </p:sp>
+      <p:sp>
+        <p:nvSpPr>
+          <p:cNvPr id="9" name="Content Placeholder 2"/>
+          <p:cNvSpPr>
+            <a:spLocks noGrp="1"/>
+          </p:cNvSpPr>
+          <p:nvPr>
+            <p:ph idx="1"/>
+          </p:nvPr>
+        </p:nvSpPr>
+        <p:spPr>
+          <a:xfrm>
+            <a:off x="627847" y="1654207"/>
+            <a:ext cx="10515600" cy="604252"/>
+          </a:xfrm>
+        </p:spPr>
+        <p:txBody>
+          <a:bodyPr>
+            <a:normAutofit/>
+          </a:bodyPr>
+          <a:lstStyle/>
+          <a:p>
+            <a:r>
+              <a:rPr lang="pt-BR" b="1" dirty="0"/>
+              <a:t>Exemplo 2</a:t>
+            </a:r>
+            <a:r>
+              <a:rPr lang="pt-BR" dirty="0"/>
+              <a:t>: Estimar as vendas de picolés.</a:t>
+            </a:r>
+          </a:p>
+        </p:txBody>
+      </p:sp>
+      <mc:AlternateContent xmlns:mc="http://schemas.openxmlformats.org/markup-compatibility/2006" xmlns:a14="http://schemas.microsoft.com/office/drawing/2010/main">
+        <mc:Choice Requires="a14">
+          <p:sp>
+            <p:nvSpPr>
+              <p:cNvPr id="10" name="Content Placeholder 2"/>
+              <p:cNvSpPr txBox="1">
+                <a:spLocks/>
+              </p:cNvSpPr>
+              <p:nvPr/>
+            </p:nvSpPr>
+            <p:spPr>
+              <a:xfrm>
+                <a:off x="734290" y="5532439"/>
+                <a:ext cx="11230027" cy="1325562"/>
+              </a:xfrm>
+              <a:prstGeom prst="rect">
+                <a:avLst/>
+              </a:prstGeom>
+            </p:spPr>
+            <p:txBody>
+              <a:bodyPr vert="horz" lIns="91440" tIns="45720" rIns="91440" bIns="45720" rtlCol="0">
+                <a:normAutofit lnSpcReduction="10000"/>
+              </a:bodyPr>
+              <a:lstStyle>
+                <a:lvl1pPr marL="228600" indent="-228600" algn="l" defTabSz="914400" rtl="0" eaLnBrk="1" latinLnBrk="0" hangingPunct="1">
+                  <a:lnSpc>
+                    <a:spcPct val="90000"/>
+                  </a:lnSpc>
+                  <a:spcBef>
+                    <a:spcPts val="1000"/>
+                  </a:spcBef>
+                  <a:buFont typeface="Arial" panose="020B0604020202020204" pitchFamily="34" charset="0"/>
+                  <a:buChar char="•"/>
+                  <a:defRPr sz="2800" kern="1200">
+                    <a:solidFill>
+                      <a:schemeClr val="tx1"/>
+                    </a:solidFill>
+                    <a:latin typeface="+mn-lt"/>
+                    <a:ea typeface="+mn-ea"/>
+                    <a:cs typeface="+mn-cs"/>
+                  </a:defRPr>
+                </a:lvl1pPr>
+                <a:lvl2pPr marL="685800" indent="-228600" algn="l" defTabSz="914400" rtl="0" eaLnBrk="1" latinLnBrk="0" hangingPunct="1">
+                  <a:lnSpc>
+                    <a:spcPct val="90000"/>
+                  </a:lnSpc>
+                  <a:spcBef>
+                    <a:spcPts val="500"/>
+                  </a:spcBef>
+                  <a:buFont typeface="Arial" panose="020B0604020202020204" pitchFamily="34" charset="0"/>
+                  <a:buChar char="•"/>
+                  <a:defRPr sz="2400" kern="1200">
+                    <a:solidFill>
+                      <a:schemeClr val="tx1"/>
+                    </a:solidFill>
+                    <a:latin typeface="+mn-lt"/>
+                    <a:ea typeface="+mn-ea"/>
+                    <a:cs typeface="+mn-cs"/>
+                  </a:defRPr>
+                </a:lvl2pPr>
+                <a:lvl3pPr marL="1143000" indent="-228600" algn="l" defTabSz="914400" rtl="0" eaLnBrk="1" latinLnBrk="0" hangingPunct="1">
+                  <a:lnSpc>
+                    <a:spcPct val="90000"/>
+                  </a:lnSpc>
+                  <a:spcBef>
+                    <a:spcPts val="500"/>
+                  </a:spcBef>
+                  <a:buFont typeface="Arial" panose="020B0604020202020204" pitchFamily="34" charset="0"/>
+                  <a:buChar char="•"/>
+                  <a:defRPr sz="2000" kern="1200">
+                    <a:solidFill>
+                      <a:schemeClr val="tx1"/>
+                    </a:solidFill>
+                    <a:latin typeface="+mn-lt"/>
+                    <a:ea typeface="+mn-ea"/>
+                    <a:cs typeface="+mn-cs"/>
+                  </a:defRPr>
+                </a:lvl3pPr>
+                <a:lvl4pPr marL="1600200" indent="-228600" algn="l" defTabSz="914400" rtl="0" eaLnBrk="1" latinLnBrk="0" hangingPunct="1">
+                  <a:lnSpc>
+                    <a:spcPct val="90000"/>
+                  </a:lnSpc>
+                  <a:spcBef>
+                    <a:spcPts val="500"/>
+                  </a:spcBef>
+                  <a:buFont typeface="Arial" panose="020B0604020202020204" pitchFamily="34" charset="0"/>
+                  <a:buChar char="•"/>
+                  <a:defRPr sz="1800" kern="1200">
+                    <a:solidFill>
+                      <a:schemeClr val="tx1"/>
+                    </a:solidFill>
+                    <a:latin typeface="+mn-lt"/>
+                    <a:ea typeface="+mn-ea"/>
+                    <a:cs typeface="+mn-cs"/>
+                  </a:defRPr>
+                </a:lvl4pPr>
+                <a:lvl5pPr marL="2057400" indent="-228600" algn="l" defTabSz="914400" rtl="0" eaLnBrk="1" latinLnBrk="0" hangingPunct="1">
+                  <a:lnSpc>
+                    <a:spcPct val="90000"/>
+                  </a:lnSpc>
+                  <a:spcBef>
+                    <a:spcPts val="500"/>
+                  </a:spcBef>
+                  <a:buFont typeface="Arial" panose="020B0604020202020204" pitchFamily="34" charset="0"/>
+                  <a:buChar char="•"/>
+                  <a:defRPr sz="1800" kern="1200">
+                    <a:solidFill>
+                      <a:schemeClr val="tx1"/>
+                    </a:solidFill>
+                    <a:latin typeface="+mn-lt"/>
+                    <a:ea typeface="+mn-ea"/>
+                    <a:cs typeface="+mn-cs"/>
+                  </a:defRPr>
+                </a:lvl5pPr>
+                <a:lvl6pPr marL="2514600" indent="-228600" algn="l" defTabSz="914400" rtl="0" eaLnBrk="1" latinLnBrk="0" hangingPunct="1">
+                  <a:lnSpc>
+                    <a:spcPct val="90000"/>
+                  </a:lnSpc>
+                  <a:spcBef>
+                    <a:spcPts val="500"/>
+                  </a:spcBef>
+                  <a:buFont typeface="Arial" panose="020B0604020202020204" pitchFamily="34" charset="0"/>
+                  <a:buChar char="•"/>
+                  <a:defRPr sz="1800" kern="1200">
+                    <a:solidFill>
+                      <a:schemeClr val="tx1"/>
+                    </a:solidFill>
+                    <a:latin typeface="+mn-lt"/>
+                    <a:ea typeface="+mn-ea"/>
+                    <a:cs typeface="+mn-cs"/>
+                  </a:defRPr>
+                </a:lvl6pPr>
+                <a:lvl7pPr marL="2971800" indent="-228600" algn="l" defTabSz="914400" rtl="0" eaLnBrk="1" latinLnBrk="0" hangingPunct="1">
+                  <a:lnSpc>
+                    <a:spcPct val="90000"/>
+                  </a:lnSpc>
+                  <a:spcBef>
+                    <a:spcPts val="500"/>
+                  </a:spcBef>
+                  <a:buFont typeface="Arial" panose="020B0604020202020204" pitchFamily="34" charset="0"/>
+                  <a:buChar char="•"/>
+                  <a:defRPr sz="1800" kern="1200">
+                    <a:solidFill>
+                      <a:schemeClr val="tx1"/>
+                    </a:solidFill>
+                    <a:latin typeface="+mn-lt"/>
+                    <a:ea typeface="+mn-ea"/>
+                    <a:cs typeface="+mn-cs"/>
+                  </a:defRPr>
+                </a:lvl7pPr>
+                <a:lvl8pPr marL="3429000" indent="-228600" algn="l" defTabSz="914400" rtl="0" eaLnBrk="1" latinLnBrk="0" hangingPunct="1">
+                  <a:lnSpc>
+                    <a:spcPct val="90000"/>
+                  </a:lnSpc>
+                  <a:spcBef>
+                    <a:spcPts val="500"/>
+                  </a:spcBef>
+                  <a:buFont typeface="Arial" panose="020B0604020202020204" pitchFamily="34" charset="0"/>
+                  <a:buChar char="•"/>
+                  <a:defRPr sz="1800" kern="1200">
+                    <a:solidFill>
+                      <a:schemeClr val="tx1"/>
+                    </a:solidFill>
+                    <a:latin typeface="+mn-lt"/>
+                    <a:ea typeface="+mn-ea"/>
+                    <a:cs typeface="+mn-cs"/>
+                  </a:defRPr>
+                </a:lvl8pPr>
+                <a:lvl9pPr marL="3886200" indent="-228600" algn="l" defTabSz="914400" rtl="0" eaLnBrk="1" latinLnBrk="0" hangingPunct="1">
+                  <a:lnSpc>
+                    <a:spcPct val="90000"/>
+                  </a:lnSpc>
+                  <a:spcBef>
+                    <a:spcPts val="500"/>
+                  </a:spcBef>
+                  <a:buFont typeface="Arial" panose="020B0604020202020204" pitchFamily="34" charset="0"/>
+                  <a:buChar char="•"/>
+                  <a:defRPr sz="1800" kern="1200">
+                    <a:solidFill>
+                      <a:schemeClr val="tx1"/>
+                    </a:solidFill>
+                    <a:latin typeface="+mn-lt"/>
+                    <a:ea typeface="+mn-ea"/>
+                    <a:cs typeface="+mn-cs"/>
+                  </a:defRPr>
+                </a:lvl9pPr>
+              </a:lstStyle>
+              <a:p>
+                <a:r>
+                  <a:rPr lang="pt-BR" dirty="0"/>
+                  <a:t>Podemos usar regressão para encontrar um </a:t>
+                </a:r>
+                <a:r>
+                  <a:rPr lang="pt-BR" b="1" i="1" dirty="0">
+                    <a:solidFill>
+                      <a:srgbClr val="0070C0"/>
+                    </a:solidFill>
+                  </a:rPr>
+                  <a:t>mapeamento</a:t>
+                </a:r>
+                <a:r>
+                  <a:rPr lang="pt-BR" dirty="0"/>
+                  <a:t>, </a:t>
+                </a:r>
+                <a14:m>
+                  <m:oMath xmlns:m="http://schemas.openxmlformats.org/officeDocument/2006/math">
+                    <m:r>
+                      <a:rPr lang="pt-BR" b="0" i="1" smtClean="0">
+                        <a:latin typeface="Cambria Math" panose="02040503050406030204" pitchFamily="18" charset="0"/>
+                      </a:rPr>
+                      <m:t>h</m:t>
+                    </m:r>
+                    <m:r>
+                      <a:rPr lang="pt-BR" b="0" i="1" smtClean="0">
+                        <a:latin typeface="Cambria Math" panose="02040503050406030204" pitchFamily="18" charset="0"/>
+                      </a:rPr>
+                      <m:t>(</m:t>
+                    </m:r>
+                    <m:r>
+                      <a:rPr lang="pt-BR" b="1" i="1" smtClean="0">
+                        <a:latin typeface="Cambria Math" panose="02040503050406030204" pitchFamily="18" charset="0"/>
+                      </a:rPr>
+                      <m:t>𝒙</m:t>
+                    </m:r>
+                    <m:r>
+                      <a:rPr lang="pt-BR" b="0" i="1" smtClean="0">
+                        <a:latin typeface="Cambria Math" panose="02040503050406030204" pitchFamily="18" charset="0"/>
+                      </a:rPr>
+                      <m:t>)</m:t>
+                    </m:r>
+                  </m:oMath>
+                </a14:m>
+                <a:r>
+                  <a:rPr lang="pt-BR" dirty="0"/>
+                  <a:t>, entre a temperatura média de um dia e a quantidade de picolés vendidos.</a:t>
+                </a:r>
+              </a:p>
+              <a:p>
+                <a:r>
+                  <a:rPr lang="pt-BR" b="1" dirty="0">
+                    <a:solidFill>
+                      <a:srgbClr val="00B050"/>
+                    </a:solidFill>
+                  </a:rPr>
+                  <a:t>Objetivo</a:t>
+                </a:r>
+                <a:r>
+                  <a:rPr lang="pt-BR" dirty="0"/>
+                  <a:t>: reduzir o desperdício e aumentar os lucros.</a:t>
+                </a:r>
+              </a:p>
+            </p:txBody>
+          </p:sp>
+        </mc:Choice>
+        <mc:Fallback xmlns="">
+          <p:sp>
+            <p:nvSpPr>
+              <p:cNvPr id="10" name="Content Placeholder 2"/>
+              <p:cNvSpPr txBox="1">
+                <a:spLocks noRot="1" noChangeAspect="1" noMove="1" noResize="1" noEditPoints="1" noAdjustHandles="1" noChangeArrowheads="1" noChangeShapeType="1" noTextEdit="1"/>
+              </p:cNvSpPr>
+              <p:nvPr/>
+            </p:nvSpPr>
+            <p:spPr>
+              <a:xfrm>
+                <a:off x="734290" y="5532439"/>
+                <a:ext cx="11230027" cy="1325562"/>
+              </a:xfrm>
+              <a:prstGeom prst="rect">
+                <a:avLst/>
+              </a:prstGeom>
+              <a:blipFill>
+                <a:blip r:embed="rId3"/>
+                <a:stretch>
+                  <a:fillRect l="-977" t="-10599" b="-7834"/>
+                </a:stretch>
+              </a:blipFill>
+            </p:spPr>
+            <p:txBody>
+              <a:bodyPr/>
+              <a:lstStyle/>
+              <a:p>
+                <a:r>
+                  <a:rPr lang="en-US">
+                    <a:noFill/>
+                  </a:rPr>
+                  <a:t> </a:t>
+                </a:r>
+              </a:p>
+            </p:txBody>
+          </p:sp>
+        </mc:Fallback>
+      </mc:AlternateContent>
+      <p:pic>
+        <p:nvPicPr>
+          <p:cNvPr id="5" name="Imagem 4">
             <a:extLst>
               <a:ext uri="{FF2B5EF4-FFF2-40B4-BE49-F238E27FC236}">
-                <a16:creationId xmlns:a16="http://schemas.microsoft.com/office/drawing/2014/main" id="{94AB8438-E56E-2412-517C-8456E4CA773C}"/>
+                <a16:creationId xmlns:a16="http://schemas.microsoft.com/office/drawing/2014/main" id="{D3B9ED84-5245-7889-8D8D-F74C85EB5B65}"/>
               </a:ext>
             </a:extLst>
           </p:cNvPr>
-          <p:cNvSpPr>
-            <a:spLocks noGrp="1"/>
-          </p:cNvSpPr>
-          <p:nvPr>
-            <p:ph type="title"/>
-          </p:nvPr>
-        </p:nvSpPr>
-        <p:spPr/>
-        <p:txBody>
-          <a:bodyPr/>
-          <a:lstStyle/>
-          <a:p>
-            <a:r>
-              <a:rPr lang="pt-BR" dirty="0"/>
-              <a:t>Fundamentação teórica</a:t>
-            </a:r>
-          </a:p>
-        </p:txBody>
-      </p:sp>
-      <p:sp>
-        <p:nvSpPr>
-          <p:cNvPr id="3" name="Espaço Reservado para Conteúdo 2">
+          <p:cNvPicPr>
+            <a:picLocks noChangeAspect="1"/>
+          </p:cNvPicPr>
+          <p:nvPr/>
+        </p:nvPicPr>
+        <p:blipFill rotWithShape="1">
+          <a:blip r:embed="rId4"/>
+          <a:srcRect l="3762" t="9838" r="8646"/>
+          <a:stretch/>
+        </p:blipFill>
+        <p:spPr>
+          <a:xfrm>
+            <a:off x="3811838" y="2364559"/>
+            <a:ext cx="3800818" cy="2934238"/>
+          </a:xfrm>
+          <a:prstGeom prst="rect">
+            <a:avLst/>
+          </a:prstGeom>
+        </p:spPr>
+      </p:pic>
+      <p:pic>
+        <p:nvPicPr>
+          <p:cNvPr id="15" name="Picture 2" descr="Picolé Electron – Sorvete Itália">
             <a:extLst>
               <a:ext uri="{FF2B5EF4-FFF2-40B4-BE49-F238E27FC236}">
-                <a16:creationId xmlns:a16="http://schemas.microsoft.com/office/drawing/2014/main" id="{F7E2B09C-6D56-4C9F-A364-B904CCE2F1A0}"/>
+                <a16:creationId xmlns:a16="http://schemas.microsoft.com/office/drawing/2014/main" id="{673E1C42-10C3-AF6F-1FF0-110BD135CF87}"/>
               </a:ext>
             </a:extLst>
           </p:cNvPr>
-          <p:cNvSpPr>
-            <a:spLocks noGrp="1"/>
-          </p:cNvSpPr>
-          <p:nvPr>
-            <p:ph idx="1"/>
-          </p:nvPr>
-        </p:nvSpPr>
-        <p:spPr/>
-        <p:txBody>
-          <a:bodyPr/>
-          <a:lstStyle/>
-          <a:p>
-            <a:endParaRPr lang="pt-BR"/>
-          </a:p>
-        </p:txBody>
-      </p:sp>
+          <p:cNvPicPr>
+            <a:picLocks noChangeAspect="1" noChangeArrowheads="1"/>
+          </p:cNvPicPr>
+          <p:nvPr/>
+        </p:nvPicPr>
+        <p:blipFill>
+          <a:blip r:embed="rId5" cstate="print">
+            <a:extLst>
+              <a:ext uri="{28A0092B-C50C-407E-A947-70E740481C1C}">
+                <a14:useLocalDpi xmlns:a14="http://schemas.microsoft.com/office/drawing/2010/main" val="0"/>
+              </a:ext>
+            </a:extLst>
+          </a:blip>
+          <a:srcRect/>
+          <a:stretch>
+            <a:fillRect/>
+          </a:stretch>
+        </p:blipFill>
+        <p:spPr bwMode="auto">
+          <a:xfrm>
+            <a:off x="6326446" y="3547541"/>
+            <a:ext cx="1075397" cy="1075397"/>
+          </a:xfrm>
+          <a:prstGeom prst="rect">
+            <a:avLst/>
+          </a:prstGeom>
+          <a:noFill/>
+          <a:extLst>
+            <a:ext uri="{909E8E84-426E-40DD-AFC4-6F175D3DCCD1}">
+              <a14:hiddenFill xmlns:a14="http://schemas.microsoft.com/office/drawing/2010/main">
+                <a:solidFill>
+                  <a:srgbClr val="FFFFFF"/>
+                </a:solidFill>
+              </a14:hiddenFill>
+            </a:ext>
+          </a:extLst>
+        </p:spPr>
+      </p:pic>
     </p:spTree>
     <p:extLst>
       <p:ext uri="{BB962C8B-B14F-4D97-AF65-F5344CB8AC3E}">
-        <p14:creationId xmlns:p14="http://schemas.microsoft.com/office/powerpoint/2010/main" val="3187071590"/>
+        <p14:creationId xmlns:p14="http://schemas.microsoft.com/office/powerpoint/2010/main" val="2006777104"/>
       </p:ext>
     </p:extLst>
   </p:cSld>
@@ -4474,10 +6405,10 @@
       </p:grpSpPr>
       <p:sp>
         <p:nvSpPr>
-          <p:cNvPr id="2" name="Título 1">
+          <p:cNvPr id="3" name="Espaço Reservado para Conteúdo 2">
             <a:extLst>
               <a:ext uri="{FF2B5EF4-FFF2-40B4-BE49-F238E27FC236}">
-                <a16:creationId xmlns:a16="http://schemas.microsoft.com/office/drawing/2014/main" id="{083FFF02-0FC8-9F0B-AAB0-565FC99EA70D}"/>
+                <a16:creationId xmlns:a16="http://schemas.microsoft.com/office/drawing/2014/main" id="{36C16A22-1E29-D959-69D9-364EB3DA7640}"/>
               </a:ext>
             </a:extLst>
           </p:cNvPr>
@@ -4485,50 +6416,35 @@
             <a:spLocks noGrp="1"/>
           </p:cNvSpPr>
           <p:nvPr>
-            <p:ph type="title"/>
-          </p:nvPr>
-        </p:nvSpPr>
-        <p:spPr/>
-        <p:txBody>
-          <a:bodyPr/>
+            <p:ph idx="1"/>
+          </p:nvPr>
+        </p:nvSpPr>
+        <p:spPr>
+          <a:xfrm>
+            <a:off x="838200" y="2593975"/>
+            <a:ext cx="10515600" cy="1670050"/>
+          </a:xfrm>
+        </p:spPr>
+        <p:txBody>
+          <a:bodyPr>
+            <a:normAutofit/>
+          </a:bodyPr>
           <a:lstStyle/>
           <a:p>
-            <a:r>
-              <a:rPr lang="pt-BR" dirty="0"/>
-              <a:t>Arquitetura e funcionamento</a:t>
-            </a:r>
-          </a:p>
-        </p:txBody>
-      </p:sp>
-      <p:sp>
-        <p:nvSpPr>
-          <p:cNvPr id="3" name="Espaço Reservado para Conteúdo 2">
-            <a:extLst>
-              <a:ext uri="{FF2B5EF4-FFF2-40B4-BE49-F238E27FC236}">
-                <a16:creationId xmlns:a16="http://schemas.microsoft.com/office/drawing/2014/main" id="{8C5488AE-34B4-EF1D-F674-507FF2FCD122}"/>
-              </a:ext>
-            </a:extLst>
-          </p:cNvPr>
-          <p:cNvSpPr>
-            <a:spLocks noGrp="1"/>
-          </p:cNvSpPr>
-          <p:nvPr>
-            <p:ph idx="1"/>
-          </p:nvPr>
-        </p:nvSpPr>
-        <p:spPr/>
-        <p:txBody>
-          <a:bodyPr/>
-          <a:lstStyle/>
-          <a:p>
-            <a:endParaRPr lang="pt-BR"/>
+            <a:pPr marL="0" indent="0" algn="ctr">
+              <a:buNone/>
+            </a:pPr>
+            <a:r>
+              <a:rPr lang="pt-BR" sz="4800" i="1" dirty="0"/>
+              <a:t>Como podemos resolver esses problemas de estimação?</a:t>
+            </a:r>
           </a:p>
         </p:txBody>
       </p:sp>
     </p:spTree>
     <p:extLst>
       <p:ext uri="{BB962C8B-B14F-4D97-AF65-F5344CB8AC3E}">
-        <p14:creationId xmlns:p14="http://schemas.microsoft.com/office/powerpoint/2010/main" val="1547259554"/>
+        <p14:creationId xmlns:p14="http://schemas.microsoft.com/office/powerpoint/2010/main" val="383076538"/>
       </p:ext>
     </p:extLst>
   </p:cSld>
@@ -4543,13 +6459,7 @@
   <p:cSld>
     <p:spTree>
       <p:nvGrpSpPr>
-        <p:cNvPr id="1" name="">
-          <a:extLst>
-            <a:ext uri="{FF2B5EF4-FFF2-40B4-BE49-F238E27FC236}">
-              <a16:creationId xmlns:a16="http://schemas.microsoft.com/office/drawing/2014/main" id="{E1C9F56A-97FC-7CCD-E5BA-3B5E230AD9AB}"/>
-            </a:ext>
-          </a:extLst>
-        </p:cNvPr>
+        <p:cNvPr id="1" name=""/>
         <p:cNvGrpSpPr/>
         <p:nvPr/>
       </p:nvGrpSpPr>
@@ -4561,63 +6471,96 @@
           <a:chExt cx="0" cy="0"/>
         </a:xfrm>
       </p:grpSpPr>
-      <p:sp>
-        <p:nvSpPr>
-          <p:cNvPr id="2" name="Título 1">
+      <p:pic>
+        <p:nvPicPr>
+          <p:cNvPr id="1026" name="Picture 2" descr="Machine Learning : 'Regression' - Day 3">
             <a:extLst>
               <a:ext uri="{FF2B5EF4-FFF2-40B4-BE49-F238E27FC236}">
-                <a16:creationId xmlns:a16="http://schemas.microsoft.com/office/drawing/2014/main" id="{A979DAB9-0612-F0CD-7BB1-AF52B98B3210}"/>
+                <a16:creationId xmlns:a16="http://schemas.microsoft.com/office/drawing/2014/main" id="{8C5B78AE-E842-ED4F-93D3-10BD11500339}"/>
               </a:ext>
             </a:extLst>
           </p:cNvPr>
-          <p:cNvSpPr>
-            <a:spLocks noGrp="1"/>
-          </p:cNvSpPr>
-          <p:nvPr>
-            <p:ph type="title"/>
-          </p:nvPr>
-        </p:nvSpPr>
-        <p:spPr/>
-        <p:txBody>
-          <a:bodyPr/>
-          <a:lstStyle/>
-          <a:p>
-            <a:r>
-              <a:rPr lang="pt-BR" dirty="0"/>
-              <a:t>Treinamento e otimização</a:t>
-            </a:r>
-          </a:p>
-        </p:txBody>
-      </p:sp>
-      <p:sp>
-        <p:nvSpPr>
-          <p:cNvPr id="3" name="Espaço Reservado para Conteúdo 2">
+          <p:cNvPicPr>
+            <a:picLocks noChangeAspect="1" noChangeArrowheads="1"/>
+          </p:cNvPicPr>
+          <p:nvPr/>
+        </p:nvPicPr>
+        <p:blipFill>
+          <a:blip r:embed="rId2">
+            <a:extLst>
+              <a:ext uri="{28A0092B-C50C-407E-A947-70E740481C1C}">
+                <a14:useLocalDpi xmlns:a14="http://schemas.microsoft.com/office/drawing/2010/main" val="0"/>
+              </a:ext>
+            </a:extLst>
+          </a:blip>
+          <a:srcRect/>
+          <a:stretch>
+            <a:fillRect/>
+          </a:stretch>
+        </p:blipFill>
+        <p:spPr bwMode="auto">
+          <a:xfrm>
+            <a:off x="700089" y="1589917"/>
+            <a:ext cx="6332081" cy="4051983"/>
+          </a:xfrm>
+          <a:prstGeom prst="rect">
+            <a:avLst/>
+          </a:prstGeom>
+          <a:noFill/>
+          <a:extLst>
+            <a:ext uri="{909E8E84-426E-40DD-AFC4-6F175D3DCCD1}">
+              <a14:hiddenFill xmlns:a14="http://schemas.microsoft.com/office/drawing/2010/main">
+                <a:solidFill>
+                  <a:srgbClr val="FFFFFF"/>
+                </a:solidFill>
+              </a14:hiddenFill>
+            </a:ext>
+          </a:extLst>
+        </p:spPr>
+      </p:pic>
+      <p:sp>
+        <p:nvSpPr>
+          <p:cNvPr id="3" name="TextBox 2">
             <a:extLst>
               <a:ext uri="{FF2B5EF4-FFF2-40B4-BE49-F238E27FC236}">
-                <a16:creationId xmlns:a16="http://schemas.microsoft.com/office/drawing/2014/main" id="{F22F88A5-87D1-340F-853F-8C2ED8F8C877}"/>
+                <a16:creationId xmlns:a16="http://schemas.microsoft.com/office/drawing/2014/main" id="{F8207647-D845-CF7E-6030-46E4389E11DD}"/>
               </a:ext>
             </a:extLst>
           </p:cNvPr>
-          <p:cNvSpPr>
-            <a:spLocks noGrp="1"/>
-          </p:cNvSpPr>
-          <p:nvPr>
-            <p:ph idx="1"/>
-          </p:nvPr>
-        </p:nvSpPr>
-        <p:spPr/>
-        <p:txBody>
-          <a:bodyPr/>
+          <p:cNvSpPr txBox="1"/>
+          <p:nvPr/>
+        </p:nvSpPr>
+        <p:spPr>
+          <a:xfrm>
+            <a:off x="7304313" y="2798019"/>
+            <a:ext cx="4321630" cy="1569660"/>
+          </a:xfrm>
+          <a:prstGeom prst="rect">
+            <a:avLst/>
+          </a:prstGeom>
+          <a:noFill/>
+        </p:spPr>
+        <p:txBody>
+          <a:bodyPr wrap="square">
+            <a:spAutoFit/>
+          </a:bodyPr>
           <a:lstStyle/>
           <a:p>
-            <a:endParaRPr lang="pt-BR"/>
+            <a:pPr marL="0" indent="0" algn="ctr">
+              <a:buNone/>
+            </a:pPr>
+            <a:r>
+              <a:rPr lang="pt-BR" sz="4800" dirty="0"/>
+              <a:t>Usando regressão linear!</a:t>
+            </a:r>
+            <a:endParaRPr lang="en-US" sz="4800" dirty="0"/>
           </a:p>
         </p:txBody>
       </p:sp>
     </p:spTree>
     <p:extLst>
       <p:ext uri="{BB962C8B-B14F-4D97-AF65-F5344CB8AC3E}">
-        <p14:creationId xmlns:p14="http://schemas.microsoft.com/office/powerpoint/2010/main" val="3906980817"/>
+        <p14:creationId xmlns:p14="http://schemas.microsoft.com/office/powerpoint/2010/main" val="695472605"/>
       </p:ext>
     </p:extLst>
   </p:cSld>
@@ -4632,13 +6575,7 @@
   <p:cSld>
     <p:spTree>
       <p:nvGrpSpPr>
-        <p:cNvPr id="1" name="">
-          <a:extLst>
-            <a:ext uri="{FF2B5EF4-FFF2-40B4-BE49-F238E27FC236}">
-              <a16:creationId xmlns:a16="http://schemas.microsoft.com/office/drawing/2014/main" id="{B28A9759-CA4F-DA4F-85C2-F6E51DCED2D9}"/>
-            </a:ext>
-          </a:extLst>
-        </p:cNvPr>
+        <p:cNvPr id="1" name=""/>
         <p:cNvGrpSpPr/>
         <p:nvPr/>
       </p:nvGrpSpPr>
@@ -4655,7 +6592,7 @@
           <p:cNvPr id="2" name="Título 1">
             <a:extLst>
               <a:ext uri="{FF2B5EF4-FFF2-40B4-BE49-F238E27FC236}">
-                <a16:creationId xmlns:a16="http://schemas.microsoft.com/office/drawing/2014/main" id="{072F732D-34CE-6153-324F-D7F6821577F0}"/>
+                <a16:creationId xmlns:a16="http://schemas.microsoft.com/office/drawing/2014/main" id="{DE06FD5B-6F51-847E-A4A8-1A8128322F68}"/>
               </a:ext>
             </a:extLst>
           </p:cNvPr>
@@ -4673,7 +6610,7 @@
           <a:p>
             <a:r>
               <a:rPr lang="pt-BR" dirty="0"/>
-              <a:t>Vantagens e desvantagens</a:t>
+              <a:t>Regressão linear</a:t>
             </a:r>
           </a:p>
         </p:txBody>
@@ -4683,7 +6620,7 @@
           <p:cNvPr id="3" name="Espaço Reservado para Conteúdo 2">
             <a:extLst>
               <a:ext uri="{FF2B5EF4-FFF2-40B4-BE49-F238E27FC236}">
-                <a16:creationId xmlns:a16="http://schemas.microsoft.com/office/drawing/2014/main" id="{62A55622-8E11-E5D7-8EAF-7AE2CCAA3321}"/>
+                <a16:creationId xmlns:a16="http://schemas.microsoft.com/office/drawing/2014/main" id="{B76F0953-075A-79EF-554F-4E05524F1DC5}"/>
               </a:ext>
             </a:extLst>
           </p:cNvPr>
@@ -4694,19 +6631,287 @@
             <p:ph idx="1"/>
           </p:nvPr>
         </p:nvSpPr>
-        <p:spPr/>
-        <p:txBody>
-          <a:bodyPr/>
+        <p:spPr>
+          <a:xfrm>
+            <a:off x="5552501" y="1825624"/>
+            <a:ext cx="6533004" cy="5032375"/>
+          </a:xfrm>
+        </p:spPr>
+        <p:txBody>
+          <a:bodyPr>
+            <a:normAutofit/>
+          </a:bodyPr>
           <a:lstStyle/>
           <a:p>
-            <a:endParaRPr lang="pt-BR"/>
-          </a:p>
-        </p:txBody>
-      </p:sp>
+            <a:r>
+              <a:rPr lang="pt-BR" dirty="0"/>
+              <a:t>É um dos mais simples, antigos e usados algoritmos de aprendizado de máquina.</a:t>
+            </a:r>
+          </a:p>
+          <a:p>
+            <a:r>
+              <a:rPr lang="pt-BR" dirty="0"/>
+              <a:t>Vai nos dar </a:t>
+            </a:r>
+            <a:r>
+              <a:rPr lang="pt-BR" b="1" i="1" dirty="0"/>
+              <a:t>intuições</a:t>
+            </a:r>
+            <a:r>
+              <a:rPr lang="pt-BR" dirty="0"/>
+              <a:t> importantes para o </a:t>
+            </a:r>
+            <a:r>
+              <a:rPr lang="pt-BR" b="1" i="1" dirty="0"/>
+              <a:t>entendimento</a:t>
+            </a:r>
+            <a:r>
+              <a:rPr lang="pt-BR" dirty="0"/>
+              <a:t> de </a:t>
+            </a:r>
+            <a:r>
+              <a:rPr lang="pt-BR" b="1" i="1" dirty="0"/>
+              <a:t>algoritmos mais complexos</a:t>
+            </a:r>
+            <a:r>
+              <a:rPr lang="pt-BR" dirty="0"/>
+              <a:t>, como </a:t>
+            </a:r>
+            <a:r>
+              <a:rPr lang="pt-BR" b="1" i="1" dirty="0"/>
+              <a:t>classificadores</a:t>
+            </a:r>
+            <a:r>
+              <a:rPr lang="pt-BR" dirty="0"/>
+              <a:t> e </a:t>
+            </a:r>
+            <a:r>
+              <a:rPr lang="pt-BR" b="1" i="1" dirty="0"/>
+              <a:t>redes neurais</a:t>
+            </a:r>
+            <a:r>
+              <a:rPr lang="pt-BR" dirty="0"/>
+              <a:t>.</a:t>
+            </a:r>
+          </a:p>
+        </p:txBody>
+      </p:sp>
+      <p:grpSp>
+        <p:nvGrpSpPr>
+          <p:cNvPr id="9" name="Agrupar 8">
+            <a:extLst>
+              <a:ext uri="{FF2B5EF4-FFF2-40B4-BE49-F238E27FC236}">
+                <a16:creationId xmlns:a16="http://schemas.microsoft.com/office/drawing/2014/main" id="{7184A45B-D6CC-54CD-EE0B-7CE85A9D94D5}"/>
+              </a:ext>
+            </a:extLst>
+          </p:cNvPr>
+          <p:cNvGrpSpPr/>
+          <p:nvPr/>
+        </p:nvGrpSpPr>
+        <p:grpSpPr>
+          <a:xfrm>
+            <a:off x="313057" y="2511846"/>
+            <a:ext cx="4622500" cy="3152391"/>
+            <a:chOff x="379861" y="2379643"/>
+            <a:chExt cx="4622500" cy="3152391"/>
+          </a:xfrm>
+        </p:grpSpPr>
+        <p:pic>
+          <p:nvPicPr>
+            <p:cNvPr id="5" name="Imagem 4">
+              <a:extLst>
+                <a:ext uri="{FF2B5EF4-FFF2-40B4-BE49-F238E27FC236}">
+                  <a16:creationId xmlns:a16="http://schemas.microsoft.com/office/drawing/2014/main" id="{AF1170FE-5534-DC43-8150-E2919F18F249}"/>
+                </a:ext>
+              </a:extLst>
+            </p:cNvPr>
+            <p:cNvPicPr>
+              <a:picLocks noChangeAspect="1"/>
+            </p:cNvPicPr>
+            <p:nvPr/>
+          </p:nvPicPr>
+          <p:blipFill rotWithShape="1">
+            <a:blip r:embed="rId3" cstate="print">
+              <a:extLst>
+                <a:ext uri="{28A0092B-C50C-407E-A947-70E740481C1C}">
+                  <a14:useLocalDpi xmlns:a14="http://schemas.microsoft.com/office/drawing/2010/main" val="0"/>
+                </a:ext>
+              </a:extLst>
+            </a:blip>
+            <a:srcRect l="3463" t="9957" r="8514"/>
+            <a:stretch/>
+          </p:blipFill>
+          <p:spPr>
+            <a:xfrm>
+              <a:off x="379861" y="2379643"/>
+              <a:ext cx="4622500" cy="3152391"/>
+            </a:xfrm>
+            <a:prstGeom prst="rect">
+              <a:avLst/>
+            </a:prstGeom>
+          </p:spPr>
+        </p:pic>
+        <mc:AlternateContent xmlns:mc="http://schemas.openxmlformats.org/markup-compatibility/2006" xmlns:a14="http://schemas.microsoft.com/office/drawing/2010/main">
+          <mc:Choice Requires="a14">
+            <p:sp>
+              <p:nvSpPr>
+                <p:cNvPr id="6" name="CaixaDeTexto 5">
+                  <a:extLst>
+                    <a:ext uri="{FF2B5EF4-FFF2-40B4-BE49-F238E27FC236}">
+                      <a16:creationId xmlns:a16="http://schemas.microsoft.com/office/drawing/2014/main" id="{10491C75-CC2B-4E6F-00D1-D7BCDA1CAC51}"/>
+                    </a:ext>
+                  </a:extLst>
+                </p:cNvPr>
+                <p:cNvSpPr txBox="1"/>
+                <p:nvPr/>
+              </p:nvSpPr>
+              <p:spPr>
+                <a:xfrm>
+                  <a:off x="3410072" y="3635566"/>
+                  <a:ext cx="738130" cy="369332"/>
+                </a:xfrm>
+                <a:prstGeom prst="rect">
+                  <a:avLst/>
+                </a:prstGeom>
+                <a:noFill/>
+              </p:spPr>
+              <p:txBody>
+                <a:bodyPr wrap="square" rtlCol="0">
+                  <a:spAutoFit/>
+                </a:bodyPr>
+                <a:lstStyle/>
+                <a:p>
+                  <a:pPr/>
+                  <a14:m>
+                    <m:oMathPara xmlns:m="http://schemas.openxmlformats.org/officeDocument/2006/math">
+                      <m:oMathParaPr>
+                        <m:jc m:val="centerGroup"/>
+                      </m:oMathParaPr>
+                      <m:oMath xmlns:m="http://schemas.openxmlformats.org/officeDocument/2006/math">
+                        <m:r>
+                          <a:rPr lang="pt-BR" b="0" i="1" smtClean="0">
+                            <a:latin typeface="Cambria Math" panose="02040503050406030204" pitchFamily="18" charset="0"/>
+                          </a:rPr>
+                          <m:t>h</m:t>
+                        </m:r>
+                        <m:r>
+                          <a:rPr lang="pt-BR" b="0" i="1" smtClean="0">
+                            <a:latin typeface="Cambria Math" panose="02040503050406030204" pitchFamily="18" charset="0"/>
+                          </a:rPr>
+                          <m:t>(</m:t>
+                        </m:r>
+                        <m:r>
+                          <a:rPr lang="pt-BR" b="1" i="1" smtClean="0">
+                            <a:latin typeface="Cambria Math" panose="02040503050406030204" pitchFamily="18" charset="0"/>
+                          </a:rPr>
+                          <m:t>𝒙</m:t>
+                        </m:r>
+                        <m:r>
+                          <a:rPr lang="pt-BR" b="0" i="1" smtClean="0">
+                            <a:latin typeface="Cambria Math" panose="02040503050406030204" pitchFamily="18" charset="0"/>
+                          </a:rPr>
+                          <m:t>)</m:t>
+                        </m:r>
+                      </m:oMath>
+                    </m:oMathPara>
+                  </a14:m>
+                  <a:endParaRPr lang="pt-BR" dirty="0"/>
+                </a:p>
+              </p:txBody>
+            </p:sp>
+          </mc:Choice>
+          <mc:Fallback xmlns="">
+            <p:sp>
+              <p:nvSpPr>
+                <p:cNvPr id="6" name="CaixaDeTexto 5">
+                  <a:extLst>
+                    <a:ext uri="{FF2B5EF4-FFF2-40B4-BE49-F238E27FC236}">
+                      <a16:creationId xmlns:a16="http://schemas.microsoft.com/office/drawing/2014/main" id="{10491C75-CC2B-4E6F-00D1-D7BCDA1CAC51}"/>
+                    </a:ext>
+                  </a:extLst>
+                </p:cNvPr>
+                <p:cNvSpPr txBox="1">
+                  <a:spLocks noRot="1" noChangeAspect="1" noMove="1" noResize="1" noEditPoints="1" noAdjustHandles="1" noChangeArrowheads="1" noChangeShapeType="1" noTextEdit="1"/>
+                </p:cNvSpPr>
+                <p:nvPr/>
+              </p:nvSpPr>
+              <p:spPr>
+                <a:xfrm>
+                  <a:off x="3410072" y="3635566"/>
+                  <a:ext cx="738130" cy="369332"/>
+                </a:xfrm>
+                <a:prstGeom prst="rect">
+                  <a:avLst/>
+                </a:prstGeom>
+                <a:blipFill>
+                  <a:blip r:embed="rId4"/>
+                  <a:stretch>
+                    <a:fillRect b="-13115"/>
+                  </a:stretch>
+                </a:blipFill>
+              </p:spPr>
+              <p:txBody>
+                <a:bodyPr/>
+                <a:lstStyle/>
+                <a:p>
+                  <a:r>
+                    <a:rPr lang="pt-BR">
+                      <a:noFill/>
+                    </a:rPr>
+                    <a:t> </a:t>
+                  </a:r>
+                </a:p>
+              </p:txBody>
+            </p:sp>
+          </mc:Fallback>
+        </mc:AlternateContent>
+        <p:cxnSp>
+          <p:nvCxnSpPr>
+            <p:cNvPr id="8" name="Conector de Seta Reta 7">
+              <a:extLst>
+                <a:ext uri="{FF2B5EF4-FFF2-40B4-BE49-F238E27FC236}">
+                  <a16:creationId xmlns:a16="http://schemas.microsoft.com/office/drawing/2014/main" id="{29596D1D-F48C-73D6-3778-6E52A3153EFC}"/>
+                </a:ext>
+              </a:extLst>
+            </p:cNvPr>
+            <p:cNvCxnSpPr/>
+            <p:nvPr/>
+          </p:nvCxnSpPr>
+          <p:spPr>
+            <a:xfrm>
+              <a:off x="3150824" y="3602516"/>
+              <a:ext cx="374574" cy="198303"/>
+            </a:xfrm>
+            <a:prstGeom prst="straightConnector1">
+              <a:avLst/>
+            </a:prstGeom>
+            <a:ln>
+              <a:solidFill>
+                <a:srgbClr val="FF0000"/>
+              </a:solidFill>
+              <a:tailEnd type="triangle"/>
+            </a:ln>
+          </p:spPr>
+          <p:style>
+            <a:lnRef idx="1">
+              <a:schemeClr val="accent1"/>
+            </a:lnRef>
+            <a:fillRef idx="0">
+              <a:schemeClr val="accent1"/>
+            </a:fillRef>
+            <a:effectRef idx="0">
+              <a:schemeClr val="accent1"/>
+            </a:effectRef>
+            <a:fontRef idx="minor">
+              <a:schemeClr val="tx1"/>
+            </a:fontRef>
+          </p:style>
+        </p:cxnSp>
+      </p:grpSp>
     </p:spTree>
     <p:extLst>
       <p:ext uri="{BB962C8B-B14F-4D97-AF65-F5344CB8AC3E}">
-        <p14:creationId xmlns:p14="http://schemas.microsoft.com/office/powerpoint/2010/main" val="1521811257"/>
+        <p14:creationId xmlns:p14="http://schemas.microsoft.com/office/powerpoint/2010/main" val="3469012495"/>
       </p:ext>
     </p:extLst>
   </p:cSld>
@@ -4738,7 +6943,7 @@
           <p:cNvPr id="2" name="Título 1">
             <a:extLst>
               <a:ext uri="{FF2B5EF4-FFF2-40B4-BE49-F238E27FC236}">
-                <a16:creationId xmlns:a16="http://schemas.microsoft.com/office/drawing/2014/main" id="{B9E502FC-4440-F5DA-F299-69CD15E702AE}"/>
+                <a16:creationId xmlns:a16="http://schemas.microsoft.com/office/drawing/2014/main" id="{DE06FD5B-6F51-847E-A4A8-1A8128322F68}"/>
               </a:ext>
             </a:extLst>
           </p:cNvPr>
@@ -4756,40 +6961,774 @@
           <a:p>
             <a:r>
               <a:rPr lang="pt-BR" dirty="0"/>
-              <a:t>Exemplo(s) de aplicação</a:t>
-            </a:r>
-          </a:p>
-        </p:txBody>
-      </p:sp>
-      <p:sp>
-        <p:nvSpPr>
-          <p:cNvPr id="3" name="Espaço Reservado para Conteúdo 2">
+              <a:t>Qual o objetivo da regressão linear?</a:t>
+            </a:r>
+          </a:p>
+        </p:txBody>
+      </p:sp>
+      <mc:AlternateContent xmlns:mc="http://schemas.openxmlformats.org/markup-compatibility/2006">
+        <mc:Choice xmlns:a14="http://schemas.microsoft.com/office/drawing/2010/main" Requires="a14">
+          <p:sp>
+            <p:nvSpPr>
+              <p:cNvPr id="3" name="Espaço Reservado para Conteúdo 2">
+                <a:extLst>
+                  <a:ext uri="{FF2B5EF4-FFF2-40B4-BE49-F238E27FC236}">
+                    <a16:creationId xmlns:a16="http://schemas.microsoft.com/office/drawing/2014/main" id="{B76F0953-075A-79EF-554F-4E05524F1DC5}"/>
+                  </a:ext>
+                </a:extLst>
+              </p:cNvPr>
+              <p:cNvSpPr>
+                <a:spLocks noGrp="1"/>
+              </p:cNvSpPr>
+              <p:nvPr>
+                <p:ph idx="1"/>
+              </p:nvPr>
+            </p:nvSpPr>
+            <p:spPr>
+              <a:xfrm>
+                <a:off x="5355771" y="1825624"/>
+                <a:ext cx="6729733" cy="5032375"/>
+              </a:xfrm>
+            </p:spPr>
+            <p:txBody>
+              <a:bodyPr>
+                <a:normAutofit/>
+              </a:bodyPr>
+              <a:lstStyle/>
+              <a:p>
+                <a:r>
+                  <a:rPr lang="pt-BR" b="1" dirty="0"/>
+                  <a:t>Objetivo</a:t>
+                </a:r>
+                <a:r>
+                  <a:rPr lang="pt-BR" dirty="0"/>
+                  <a:t>: encontrar uma função, </a:t>
+                </a:r>
+                <a14:m>
+                  <m:oMath xmlns:m="http://schemas.openxmlformats.org/officeDocument/2006/math">
+                    <m:r>
+                      <a:rPr lang="pt-BR" b="0" i="1" smtClean="0">
+                        <a:latin typeface="Cambria Math" panose="02040503050406030204" pitchFamily="18" charset="0"/>
+                      </a:rPr>
+                      <m:t>h</m:t>
+                    </m:r>
+                    <m:d>
+                      <m:dPr>
+                        <m:ctrlPr>
+                          <a:rPr lang="pt-BR" b="0" i="1" smtClean="0">
+                            <a:latin typeface="Cambria Math" panose="02040503050406030204" pitchFamily="18" charset="0"/>
+                          </a:rPr>
+                        </m:ctrlPr>
+                      </m:dPr>
+                      <m:e>
+                        <m:r>
+                          <a:rPr lang="pt-BR" b="1" i="1">
+                            <a:latin typeface="Cambria Math" panose="02040503050406030204" pitchFamily="18" charset="0"/>
+                          </a:rPr>
+                          <m:t>𝒙</m:t>
+                        </m:r>
+                      </m:e>
+                    </m:d>
+                  </m:oMath>
+                </a14:m>
+                <a:r>
+                  <a:rPr lang="pt-BR" dirty="0"/>
+                  <a:t>, que </a:t>
+                </a:r>
+                <a:r>
+                  <a:rPr lang="pt-BR" b="1" i="1" dirty="0">
+                    <a:solidFill>
+                      <a:srgbClr val="00B050"/>
+                    </a:solidFill>
+                  </a:rPr>
+                  <a:t>mapeie</a:t>
+                </a:r>
+                <a:r>
+                  <a:rPr lang="pt-BR" dirty="0"/>
+                  <a:t> os </a:t>
+                </a:r>
+                <a:r>
+                  <a:rPr lang="pt-BR" b="1" dirty="0">
+                    <a:solidFill>
+                      <a:srgbClr val="7030A0"/>
+                    </a:solidFill>
+                  </a:rPr>
+                  <a:t>atributos</a:t>
+                </a:r>
+                <a:r>
+                  <a:rPr lang="pt-BR" dirty="0"/>
+                  <a:t>, </a:t>
+                </a:r>
+                <a14:m>
+                  <m:oMath xmlns:m="http://schemas.openxmlformats.org/officeDocument/2006/math">
+                    <m:r>
+                      <a:rPr lang="pt-BR" b="1" i="1" smtClean="0">
+                        <a:latin typeface="Cambria Math" panose="02040503050406030204" pitchFamily="18" charset="0"/>
+                      </a:rPr>
+                      <m:t>𝒙</m:t>
+                    </m:r>
+                  </m:oMath>
+                </a14:m>
+                <a:r>
+                  <a:rPr lang="pt-BR" dirty="0"/>
+                  <a:t>, em uma variável de saída </a:t>
+                </a:r>
+                <a14:m>
+                  <m:oMath xmlns:m="http://schemas.openxmlformats.org/officeDocument/2006/math">
+                    <m:acc>
+                      <m:accPr>
+                        <m:chr m:val="̂"/>
+                        <m:ctrlPr>
+                          <a:rPr lang="pt-BR" i="1">
+                            <a:latin typeface="Cambria Math" panose="02040503050406030204" pitchFamily="18" charset="0"/>
+                            <a:ea typeface="Cambria Math" panose="02040503050406030204" pitchFamily="18" charset="0"/>
+                          </a:rPr>
+                        </m:ctrlPr>
+                      </m:accPr>
+                      <m:e>
+                        <m:r>
+                          <a:rPr lang="pt-BR" i="1">
+                            <a:latin typeface="Cambria Math" panose="02040503050406030204" pitchFamily="18" charset="0"/>
+                            <a:ea typeface="Cambria Math" panose="02040503050406030204" pitchFamily="18" charset="0"/>
+                          </a:rPr>
+                          <m:t>𝑦</m:t>
+                        </m:r>
+                      </m:e>
+                    </m:acc>
+                    <m:r>
+                      <a:rPr lang="pt-BR" b="0" i="1" smtClean="0">
+                        <a:latin typeface="Cambria Math" panose="02040503050406030204" pitchFamily="18" charset="0"/>
+                      </a:rPr>
+                      <m:t>=</m:t>
+                    </m:r>
+                    <m:r>
+                      <a:rPr lang="pt-BR" b="0" i="1" smtClean="0">
+                        <a:latin typeface="Cambria Math" panose="02040503050406030204" pitchFamily="18" charset="0"/>
+                      </a:rPr>
+                      <m:t>h</m:t>
+                    </m:r>
+                    <m:d>
+                      <m:dPr>
+                        <m:ctrlPr>
+                          <a:rPr lang="pt-BR" b="0" i="1" smtClean="0">
+                            <a:latin typeface="Cambria Math" panose="02040503050406030204" pitchFamily="18" charset="0"/>
+                          </a:rPr>
+                        </m:ctrlPr>
+                      </m:dPr>
+                      <m:e>
+                        <m:r>
+                          <a:rPr lang="pt-BR" b="1" i="1" smtClean="0">
+                            <a:latin typeface="Cambria Math" panose="02040503050406030204" pitchFamily="18" charset="0"/>
+                          </a:rPr>
+                          <m:t>𝒙</m:t>
+                        </m:r>
+                      </m:e>
+                    </m:d>
+                  </m:oMath>
+                </a14:m>
+                <a:r>
+                  <a:rPr lang="pt-BR" dirty="0"/>
+                  <a:t>, de tal forma que </a:t>
+                </a:r>
+                <a14:m>
+                  <m:oMath xmlns:m="http://schemas.openxmlformats.org/officeDocument/2006/math">
+                    <m:r>
+                      <a:rPr lang="pt-BR" i="1">
+                        <a:latin typeface="Cambria Math" panose="02040503050406030204" pitchFamily="18" charset="0"/>
+                      </a:rPr>
+                      <m:t>h</m:t>
+                    </m:r>
+                    <m:r>
+                      <a:rPr lang="pt-BR" b="0" i="1" smtClean="0">
+                        <a:latin typeface="Cambria Math" panose="02040503050406030204" pitchFamily="18" charset="0"/>
+                      </a:rPr>
+                      <m:t>(</m:t>
+                    </m:r>
+                    <m:r>
+                      <a:rPr lang="pt-BR" b="1" i="1" smtClean="0">
+                        <a:latin typeface="Cambria Math" panose="02040503050406030204" pitchFamily="18" charset="0"/>
+                      </a:rPr>
+                      <m:t>𝒙</m:t>
+                    </m:r>
+                    <m:r>
+                      <a:rPr lang="pt-BR" b="0" i="1" smtClean="0">
+                        <a:latin typeface="Cambria Math" panose="02040503050406030204" pitchFamily="18" charset="0"/>
+                      </a:rPr>
+                      <m:t>)</m:t>
+                    </m:r>
+                  </m:oMath>
+                </a14:m>
+                <a:r>
+                  <a:rPr lang="pt-BR" dirty="0"/>
+                  <a:t> se ajuste aos dados coletados de </a:t>
+                </a:r>
+                <a:r>
+                  <a:rPr lang="pt-BR" b="1" i="1" dirty="0">
+                    <a:solidFill>
+                      <a:srgbClr val="00B050"/>
+                    </a:solidFill>
+                  </a:rPr>
+                  <a:t>forma ótima</a:t>
+                </a:r>
+                <a:r>
+                  <a:rPr lang="pt-BR" dirty="0"/>
+                  <a:t>.</a:t>
+                </a:r>
+              </a:p>
+              <a:p>
+                <a:r>
+                  <a:rPr lang="pt-BR" b="0" i="0" dirty="0">
+                    <a:solidFill>
+                      <a:schemeClr val="tx1"/>
+                    </a:solidFill>
+                    <a:effectLst/>
+                  </a:rPr>
+                  <a:t>Ótimo no sentido da </a:t>
+                </a:r>
+                <a:r>
+                  <a:rPr lang="pt-BR" b="1" i="1" dirty="0">
+                    <a:solidFill>
+                      <a:srgbClr val="00B050"/>
+                    </a:solidFill>
+                    <a:effectLst/>
+                  </a:rPr>
+                  <a:t>minimização da diferença </a:t>
+                </a:r>
+                <a:r>
+                  <a:rPr lang="pt-BR" b="0" i="0" dirty="0">
+                    <a:solidFill>
+                      <a:schemeClr val="tx1"/>
+                    </a:solidFill>
+                    <a:effectLst/>
+                  </a:rPr>
+                  <a:t>entre as predições feitas por </a:t>
+                </a:r>
+                <a14:m>
+                  <m:oMath xmlns:m="http://schemas.openxmlformats.org/officeDocument/2006/math">
+                    <m:r>
+                      <a:rPr lang="pt-BR" i="1" smtClean="0">
+                        <a:solidFill>
+                          <a:schemeClr val="tx1"/>
+                        </a:solidFill>
+                        <a:latin typeface="Cambria Math" panose="02040503050406030204" pitchFamily="18" charset="0"/>
+                      </a:rPr>
+                      <m:t>h</m:t>
+                    </m:r>
+                    <m:r>
+                      <a:rPr lang="pt-BR" b="0" i="1" smtClean="0">
+                        <a:solidFill>
+                          <a:schemeClr val="tx1"/>
+                        </a:solidFill>
+                        <a:latin typeface="Cambria Math" panose="02040503050406030204" pitchFamily="18" charset="0"/>
+                      </a:rPr>
+                      <m:t>(</m:t>
+                    </m:r>
+                    <m:r>
+                      <a:rPr lang="pt-BR" b="1" i="1" smtClean="0">
+                        <a:solidFill>
+                          <a:schemeClr val="tx1"/>
+                        </a:solidFill>
+                        <a:latin typeface="Cambria Math" panose="02040503050406030204" pitchFamily="18" charset="0"/>
+                      </a:rPr>
+                      <m:t>𝒙</m:t>
+                    </m:r>
+                    <m:r>
+                      <a:rPr lang="pt-BR" b="0" i="1" smtClean="0">
+                        <a:solidFill>
+                          <a:schemeClr val="tx1"/>
+                        </a:solidFill>
+                        <a:latin typeface="Cambria Math" panose="02040503050406030204" pitchFamily="18" charset="0"/>
+                      </a:rPr>
+                      <m:t>)</m:t>
+                    </m:r>
+                  </m:oMath>
+                </a14:m>
+                <a:r>
+                  <a:rPr lang="pt-BR" b="0" i="0" dirty="0">
+                    <a:solidFill>
+                      <a:schemeClr val="tx1"/>
+                    </a:solidFill>
+                    <a:effectLst/>
+                  </a:rPr>
+                  <a:t>, (i.e., os valores de </a:t>
+                </a:r>
+                <a14:m>
+                  <m:oMath xmlns:m="http://schemas.openxmlformats.org/officeDocument/2006/math">
+                    <m:acc>
+                      <m:accPr>
+                        <m:chr m:val="̂"/>
+                        <m:ctrlPr>
+                          <a:rPr lang="pt-BR" i="1">
+                            <a:latin typeface="Cambria Math" panose="02040503050406030204" pitchFamily="18" charset="0"/>
+                            <a:ea typeface="Cambria Math" panose="02040503050406030204" pitchFamily="18" charset="0"/>
+                          </a:rPr>
+                        </m:ctrlPr>
+                      </m:accPr>
+                      <m:e>
+                        <m:r>
+                          <a:rPr lang="pt-BR" i="1">
+                            <a:latin typeface="Cambria Math" panose="02040503050406030204" pitchFamily="18" charset="0"/>
+                            <a:ea typeface="Cambria Math" panose="02040503050406030204" pitchFamily="18" charset="0"/>
+                          </a:rPr>
+                          <m:t>𝑦</m:t>
+                        </m:r>
+                      </m:e>
+                    </m:acc>
+                  </m:oMath>
+                </a14:m>
+                <a:r>
+                  <a:rPr lang="pt-BR" b="0" i="0" dirty="0">
+                    <a:solidFill>
+                      <a:schemeClr val="tx1"/>
+                    </a:solidFill>
+                    <a:effectLst/>
+                  </a:rPr>
+                  <a:t>), e os </a:t>
+                </a:r>
+                <a:r>
+                  <a:rPr lang="pt-BR" b="1" i="0" dirty="0">
+                    <a:solidFill>
+                      <a:srgbClr val="7030A0"/>
+                    </a:solidFill>
+                    <a:effectLst/>
+                  </a:rPr>
+                  <a:t>rótulos</a:t>
+                </a:r>
+                <a:r>
+                  <a:rPr lang="pt-BR" b="0" i="0" dirty="0">
+                    <a:solidFill>
+                      <a:schemeClr val="tx1"/>
+                    </a:solidFill>
+                    <a:effectLst/>
+                  </a:rPr>
+                  <a:t>, (i.e., os </a:t>
+                </a:r>
+                <a:r>
+                  <a:rPr lang="pt-BR" dirty="0"/>
+                  <a:t>valores esperados de saída, </a:t>
+                </a:r>
+                <a14:m>
+                  <m:oMath xmlns:m="http://schemas.openxmlformats.org/officeDocument/2006/math">
+                    <m:r>
+                      <a:rPr lang="pt-BR" b="0" i="1" smtClean="0">
+                        <a:solidFill>
+                          <a:schemeClr val="tx1"/>
+                        </a:solidFill>
+                        <a:effectLst/>
+                        <a:latin typeface="Cambria Math" panose="02040503050406030204" pitchFamily="18" charset="0"/>
+                      </a:rPr>
+                      <m:t>𝑦</m:t>
+                    </m:r>
+                  </m:oMath>
+                </a14:m>
+                <a:r>
+                  <a:rPr lang="pt-BR" b="0" i="0" dirty="0">
+                    <a:solidFill>
+                      <a:schemeClr val="tx1"/>
+                    </a:solidFill>
+                    <a:effectLst/>
+                  </a:rPr>
+                  <a:t>.</a:t>
+                </a:r>
+              </a:p>
+            </p:txBody>
+          </p:sp>
+        </mc:Choice>
+        <mc:Fallback>
+          <p:sp>
+            <p:nvSpPr>
+              <p:cNvPr id="3" name="Espaço Reservado para Conteúdo 2">
+                <a:extLst>
+                  <a:ext uri="{FF2B5EF4-FFF2-40B4-BE49-F238E27FC236}">
+                    <a16:creationId xmlns:a16="http://schemas.microsoft.com/office/drawing/2014/main" id="{B76F0953-075A-79EF-554F-4E05524F1DC5}"/>
+                  </a:ext>
+                </a:extLst>
+              </p:cNvPr>
+              <p:cNvSpPr>
+                <a:spLocks noGrp="1" noRot="1" noChangeAspect="1" noMove="1" noResize="1" noEditPoints="1" noAdjustHandles="1" noChangeArrowheads="1" noChangeShapeType="1" noTextEdit="1"/>
+              </p:cNvSpPr>
+              <p:nvPr>
+                <p:ph idx="1"/>
+              </p:nvPr>
+            </p:nvSpPr>
+            <p:spPr>
+              <a:xfrm>
+                <a:off x="5355771" y="1825624"/>
+                <a:ext cx="6729733" cy="5032375"/>
+              </a:xfrm>
+              <a:blipFill>
+                <a:blip r:embed="rId3"/>
+                <a:stretch>
+                  <a:fillRect l="-1630" t="-1937" r="-2717"/>
+                </a:stretch>
+              </a:blipFill>
+            </p:spPr>
+            <p:txBody>
+              <a:bodyPr/>
+              <a:lstStyle/>
+              <a:p>
+                <a:r>
+                  <a:rPr lang="en-US">
+                    <a:noFill/>
+                  </a:rPr>
+                  <a:t> </a:t>
+                </a:r>
+              </a:p>
+            </p:txBody>
+          </p:sp>
+        </mc:Fallback>
+      </mc:AlternateContent>
+      <p:grpSp>
+        <p:nvGrpSpPr>
+          <p:cNvPr id="7" name="Group 6">
             <a:extLst>
               <a:ext uri="{FF2B5EF4-FFF2-40B4-BE49-F238E27FC236}">
-                <a16:creationId xmlns:a16="http://schemas.microsoft.com/office/drawing/2014/main" id="{69359096-6B47-BEA3-55AD-95F90CDC8489}"/>
+                <a16:creationId xmlns:a16="http://schemas.microsoft.com/office/drawing/2014/main" id="{0B11DDB3-BDC9-57EF-0BC8-921A1B6B8D9B}"/>
               </a:ext>
             </a:extLst>
           </p:cNvPr>
-          <p:cNvSpPr>
-            <a:spLocks noGrp="1"/>
-          </p:cNvSpPr>
-          <p:nvPr>
-            <p:ph idx="1"/>
-          </p:nvPr>
-        </p:nvSpPr>
-        <p:spPr/>
-        <p:txBody>
-          <a:bodyPr/>
-          <a:lstStyle/>
-          <a:p>
-            <a:endParaRPr lang="pt-BR"/>
-          </a:p>
-        </p:txBody>
-      </p:sp>
+          <p:cNvGrpSpPr/>
+          <p:nvPr/>
+        </p:nvGrpSpPr>
+        <p:grpSpPr>
+          <a:xfrm>
+            <a:off x="313057" y="2511846"/>
+            <a:ext cx="4622500" cy="3152391"/>
+            <a:chOff x="313057" y="2511846"/>
+            <a:chExt cx="4622500" cy="3152391"/>
+          </a:xfrm>
+        </p:grpSpPr>
+        <p:grpSp>
+          <p:nvGrpSpPr>
+            <p:cNvPr id="9" name="Agrupar 8">
+              <a:extLst>
+                <a:ext uri="{FF2B5EF4-FFF2-40B4-BE49-F238E27FC236}">
+                  <a16:creationId xmlns:a16="http://schemas.microsoft.com/office/drawing/2014/main" id="{7184A45B-D6CC-54CD-EE0B-7CE85A9D94D5}"/>
+                </a:ext>
+              </a:extLst>
+            </p:cNvPr>
+            <p:cNvGrpSpPr/>
+            <p:nvPr/>
+          </p:nvGrpSpPr>
+          <p:grpSpPr>
+            <a:xfrm>
+              <a:off x="313057" y="2511846"/>
+              <a:ext cx="4622500" cy="3152391"/>
+              <a:chOff x="379861" y="2379643"/>
+              <a:chExt cx="4622500" cy="3152391"/>
+            </a:xfrm>
+          </p:grpSpPr>
+          <p:pic>
+            <p:nvPicPr>
+              <p:cNvPr id="5" name="Imagem 4">
+                <a:extLst>
+                  <a:ext uri="{FF2B5EF4-FFF2-40B4-BE49-F238E27FC236}">
+                    <a16:creationId xmlns:a16="http://schemas.microsoft.com/office/drawing/2014/main" id="{AF1170FE-5534-DC43-8150-E2919F18F249}"/>
+                  </a:ext>
+                </a:extLst>
+              </p:cNvPr>
+              <p:cNvPicPr>
+                <a:picLocks noChangeAspect="1"/>
+              </p:cNvPicPr>
+              <p:nvPr/>
+            </p:nvPicPr>
+            <p:blipFill rotWithShape="1">
+              <a:blip r:embed="rId4" cstate="print">
+                <a:extLst>
+                  <a:ext uri="{28A0092B-C50C-407E-A947-70E740481C1C}">
+                    <a14:useLocalDpi xmlns:a14="http://schemas.microsoft.com/office/drawing/2010/main" val="0"/>
+                  </a:ext>
+                </a:extLst>
+              </a:blip>
+              <a:srcRect l="3463" t="9957" r="8514"/>
+              <a:stretch/>
+            </p:blipFill>
+            <p:spPr>
+              <a:xfrm>
+                <a:off x="379861" y="2379643"/>
+                <a:ext cx="4622500" cy="3152391"/>
+              </a:xfrm>
+              <a:prstGeom prst="rect">
+                <a:avLst/>
+              </a:prstGeom>
+            </p:spPr>
+          </p:pic>
+          <mc:AlternateContent xmlns:mc="http://schemas.openxmlformats.org/markup-compatibility/2006" xmlns:a14="http://schemas.microsoft.com/office/drawing/2010/main">
+            <mc:Choice Requires="a14">
+              <p:sp>
+                <p:nvSpPr>
+                  <p:cNvPr id="6" name="CaixaDeTexto 5">
+                    <a:extLst>
+                      <a:ext uri="{FF2B5EF4-FFF2-40B4-BE49-F238E27FC236}">
+                        <a16:creationId xmlns:a16="http://schemas.microsoft.com/office/drawing/2014/main" id="{10491C75-CC2B-4E6F-00D1-D7BCDA1CAC51}"/>
+                      </a:ext>
+                    </a:extLst>
+                  </p:cNvPr>
+                  <p:cNvSpPr txBox="1"/>
+                  <p:nvPr/>
+                </p:nvSpPr>
+                <p:spPr>
+                  <a:xfrm>
+                    <a:off x="3410072" y="3635566"/>
+                    <a:ext cx="738130" cy="369332"/>
+                  </a:xfrm>
+                  <a:prstGeom prst="rect">
+                    <a:avLst/>
+                  </a:prstGeom>
+                  <a:noFill/>
+                </p:spPr>
+                <p:txBody>
+                  <a:bodyPr wrap="square" rtlCol="0">
+                    <a:spAutoFit/>
+                  </a:bodyPr>
+                  <a:lstStyle/>
+                  <a:p>
+                    <a:pPr/>
+                    <a14:m>
+                      <m:oMathPara xmlns:m="http://schemas.openxmlformats.org/officeDocument/2006/math">
+                        <m:oMathParaPr>
+                          <m:jc m:val="centerGroup"/>
+                        </m:oMathParaPr>
+                        <m:oMath xmlns:m="http://schemas.openxmlformats.org/officeDocument/2006/math">
+                          <m:r>
+                            <a:rPr lang="pt-BR" b="0" i="1" smtClean="0">
+                              <a:latin typeface="Cambria Math" panose="02040503050406030204" pitchFamily="18" charset="0"/>
+                            </a:rPr>
+                            <m:t>h</m:t>
+                          </m:r>
+                          <m:r>
+                            <a:rPr lang="pt-BR" b="0" i="1" smtClean="0">
+                              <a:latin typeface="Cambria Math" panose="02040503050406030204" pitchFamily="18" charset="0"/>
+                            </a:rPr>
+                            <m:t>(</m:t>
+                          </m:r>
+                          <m:r>
+                            <a:rPr lang="pt-BR" b="1" i="1" smtClean="0">
+                              <a:latin typeface="Cambria Math" panose="02040503050406030204" pitchFamily="18" charset="0"/>
+                            </a:rPr>
+                            <m:t>𝒙</m:t>
+                          </m:r>
+                          <m:r>
+                            <a:rPr lang="pt-BR" b="0" i="1" smtClean="0">
+                              <a:latin typeface="Cambria Math" panose="02040503050406030204" pitchFamily="18" charset="0"/>
+                            </a:rPr>
+                            <m:t>)</m:t>
+                          </m:r>
+                        </m:oMath>
+                      </m:oMathPara>
+                    </a14:m>
+                    <a:endParaRPr lang="pt-BR" dirty="0"/>
+                  </a:p>
+                </p:txBody>
+              </p:sp>
+            </mc:Choice>
+            <mc:Fallback xmlns="">
+              <p:sp>
+                <p:nvSpPr>
+                  <p:cNvPr id="6" name="CaixaDeTexto 5">
+                    <a:extLst>
+                      <a:ext uri="{FF2B5EF4-FFF2-40B4-BE49-F238E27FC236}">
+                        <a16:creationId xmlns:a16="http://schemas.microsoft.com/office/drawing/2014/main" id="{10491C75-CC2B-4E6F-00D1-D7BCDA1CAC51}"/>
+                      </a:ext>
+                    </a:extLst>
+                  </p:cNvPr>
+                  <p:cNvSpPr txBox="1">
+                    <a:spLocks noRot="1" noChangeAspect="1" noMove="1" noResize="1" noEditPoints="1" noAdjustHandles="1" noChangeArrowheads="1" noChangeShapeType="1" noTextEdit="1"/>
+                  </p:cNvSpPr>
+                  <p:nvPr/>
+                </p:nvSpPr>
+                <p:spPr>
+                  <a:xfrm>
+                    <a:off x="3410072" y="3635566"/>
+                    <a:ext cx="738130" cy="369332"/>
+                  </a:xfrm>
+                  <a:prstGeom prst="rect">
+                    <a:avLst/>
+                  </a:prstGeom>
+                  <a:blipFill>
+                    <a:blip r:embed="rId5"/>
+                    <a:stretch>
+                      <a:fillRect b="-13115"/>
+                    </a:stretch>
+                  </a:blipFill>
+                </p:spPr>
+                <p:txBody>
+                  <a:bodyPr/>
+                  <a:lstStyle/>
+                  <a:p>
+                    <a:r>
+                      <a:rPr lang="pt-BR">
+                        <a:noFill/>
+                      </a:rPr>
+                      <a:t> </a:t>
+                    </a:r>
+                  </a:p>
+                </p:txBody>
+              </p:sp>
+            </mc:Fallback>
+          </mc:AlternateContent>
+          <p:cxnSp>
+            <p:nvCxnSpPr>
+              <p:cNvPr id="8" name="Conector de Seta Reta 7">
+                <a:extLst>
+                  <a:ext uri="{FF2B5EF4-FFF2-40B4-BE49-F238E27FC236}">
+                    <a16:creationId xmlns:a16="http://schemas.microsoft.com/office/drawing/2014/main" id="{29596D1D-F48C-73D6-3778-6E52A3153EFC}"/>
+                  </a:ext>
+                </a:extLst>
+              </p:cNvPr>
+              <p:cNvCxnSpPr/>
+              <p:nvPr/>
+            </p:nvCxnSpPr>
+            <p:spPr>
+              <a:xfrm>
+                <a:off x="3150824" y="3602516"/>
+                <a:ext cx="374574" cy="198303"/>
+              </a:xfrm>
+              <a:prstGeom prst="straightConnector1">
+                <a:avLst/>
+              </a:prstGeom>
+              <a:ln>
+                <a:solidFill>
+                  <a:srgbClr val="FF0000"/>
+                </a:solidFill>
+                <a:tailEnd type="triangle"/>
+              </a:ln>
+            </p:spPr>
+            <p:style>
+              <a:lnRef idx="1">
+                <a:schemeClr val="accent1"/>
+              </a:lnRef>
+              <a:fillRef idx="0">
+                <a:schemeClr val="accent1"/>
+              </a:fillRef>
+              <a:effectRef idx="0">
+                <a:schemeClr val="accent1"/>
+              </a:effectRef>
+              <a:fontRef idx="minor">
+                <a:schemeClr val="tx1"/>
+              </a:fontRef>
+            </p:style>
+          </p:cxnSp>
+        </p:grpSp>
+        <mc:AlternateContent xmlns:mc="http://schemas.openxmlformats.org/markup-compatibility/2006">
+          <mc:Choice xmlns:a14="http://schemas.microsoft.com/office/drawing/2010/main" Requires="a14">
+            <p:sp>
+              <p:nvSpPr>
+                <p:cNvPr id="4" name="CaixaDeTexto 3">
+                  <a:extLst>
+                    <a:ext uri="{FF2B5EF4-FFF2-40B4-BE49-F238E27FC236}">
+                      <a16:creationId xmlns:a16="http://schemas.microsoft.com/office/drawing/2014/main" id="{B6371B7D-BB1A-D7F3-A54B-3E89596BFE8C}"/>
+                    </a:ext>
+                  </a:extLst>
+                </p:cNvPr>
+                <p:cNvSpPr txBox="1"/>
+                <p:nvPr/>
+              </p:nvSpPr>
+              <p:spPr>
+                <a:xfrm>
+                  <a:off x="2409352" y="2755948"/>
+                  <a:ext cx="738130" cy="307777"/>
+                </a:xfrm>
+                <a:prstGeom prst="rect">
+                  <a:avLst/>
+                </a:prstGeom>
+                <a:noFill/>
+              </p:spPr>
+              <p:txBody>
+                <a:bodyPr wrap="square" rtlCol="0">
+                  <a:spAutoFit/>
+                </a:bodyPr>
+                <a:lstStyle/>
+                <a:p>
+                  <a:pPr/>
+                  <a14:m>
+                    <m:oMathPara xmlns:m="http://schemas.openxmlformats.org/officeDocument/2006/math">
+                      <m:oMathParaPr>
+                        <m:jc m:val="centerGroup"/>
+                      </m:oMathParaPr>
+                      <m:oMath xmlns:m="http://schemas.openxmlformats.org/officeDocument/2006/math">
+                        <m:r>
+                          <a:rPr lang="pt-BR" sz="1400" b="0" i="1" smtClean="0">
+                            <a:latin typeface="Cambria Math" panose="02040503050406030204" pitchFamily="18" charset="0"/>
+                          </a:rPr>
+                          <m:t>h</m:t>
+                        </m:r>
+                        <m:r>
+                          <a:rPr lang="pt-BR" sz="1400" b="0" i="1" smtClean="0">
+                            <a:latin typeface="Cambria Math" panose="02040503050406030204" pitchFamily="18" charset="0"/>
+                          </a:rPr>
+                          <m:t>(</m:t>
+                        </m:r>
+                        <m:r>
+                          <a:rPr lang="pt-BR" sz="1400" b="1" i="1" smtClean="0">
+                            <a:latin typeface="Cambria Math" panose="02040503050406030204" pitchFamily="18" charset="0"/>
+                          </a:rPr>
+                          <m:t>𝒙</m:t>
+                        </m:r>
+                        <m:r>
+                          <a:rPr lang="pt-BR" sz="1400" b="0" i="1" smtClean="0">
+                            <a:latin typeface="Cambria Math" panose="02040503050406030204" pitchFamily="18" charset="0"/>
+                          </a:rPr>
+                          <m:t>)</m:t>
+                        </m:r>
+                      </m:oMath>
+                    </m:oMathPara>
+                  </a14:m>
+                  <a:endParaRPr lang="pt-BR" sz="1400" dirty="0"/>
+                </a:p>
+              </p:txBody>
+            </p:sp>
+          </mc:Choice>
+          <mc:Fallback>
+            <p:sp>
+              <p:nvSpPr>
+                <p:cNvPr id="4" name="CaixaDeTexto 3">
+                  <a:extLst>
+                    <a:ext uri="{FF2B5EF4-FFF2-40B4-BE49-F238E27FC236}">
+                      <a16:creationId xmlns:a16="http://schemas.microsoft.com/office/drawing/2014/main" id="{B6371B7D-BB1A-D7F3-A54B-3E89596BFE8C}"/>
+                    </a:ext>
+                  </a:extLst>
+                </p:cNvPr>
+                <p:cNvSpPr txBox="1">
+                  <a:spLocks noRot="1" noChangeAspect="1" noMove="1" noResize="1" noEditPoints="1" noAdjustHandles="1" noChangeArrowheads="1" noChangeShapeType="1" noTextEdit="1"/>
+                </p:cNvSpPr>
+                <p:nvPr/>
+              </p:nvSpPr>
+              <p:spPr>
+                <a:xfrm>
+                  <a:off x="2409352" y="2755948"/>
+                  <a:ext cx="738130" cy="307777"/>
+                </a:xfrm>
+                <a:prstGeom prst="rect">
+                  <a:avLst/>
+                </a:prstGeom>
+                <a:blipFill>
+                  <a:blip r:embed="rId6"/>
+                  <a:stretch>
+                    <a:fillRect b="-5882"/>
+                  </a:stretch>
+                </a:blipFill>
+              </p:spPr>
+              <p:txBody>
+                <a:bodyPr/>
+                <a:lstStyle/>
+                <a:p>
+                  <a:r>
+                    <a:rPr lang="en-US">
+                      <a:noFill/>
+                    </a:rPr>
+                    <a:t> </a:t>
+                  </a:r>
+                </a:p>
+              </p:txBody>
+            </p:sp>
+          </mc:Fallback>
+        </mc:AlternateContent>
+      </p:grpSp>
     </p:spTree>
     <p:extLst>
       <p:ext uri="{BB962C8B-B14F-4D97-AF65-F5344CB8AC3E}">
-        <p14:creationId xmlns:p14="http://schemas.microsoft.com/office/powerpoint/2010/main" val="1532530965"/>
+        <p14:creationId xmlns:p14="http://schemas.microsoft.com/office/powerpoint/2010/main" val="4180587221"/>
       </p:ext>
     </p:extLst>
   </p:cSld>
@@ -4821,7 +7760,7 @@
           <p:cNvPr id="2" name="Título 1">
             <a:extLst>
               <a:ext uri="{FF2B5EF4-FFF2-40B4-BE49-F238E27FC236}">
-                <a16:creationId xmlns:a16="http://schemas.microsoft.com/office/drawing/2014/main" id="{B7EBC8F7-03EF-338A-A90B-280A41AF9688}"/>
+                <a16:creationId xmlns:a16="http://schemas.microsoft.com/office/drawing/2014/main" id="{6C106918-4928-8D8F-109D-FE4154A6ACEE}"/>
               </a:ext>
             </a:extLst>
           </p:cNvPr>
@@ -4839,40 +7778,502 @@
           <a:p>
             <a:r>
               <a:rPr lang="pt-BR" dirty="0"/>
-              <a:t>Comparação com outros algoritmos</a:t>
-            </a:r>
-          </a:p>
-        </p:txBody>
-      </p:sp>
-      <p:sp>
-        <p:nvSpPr>
-          <p:cNvPr id="3" name="Espaço Reservado para Conteúdo 2">
+              <a:t>Qual é o paradigma de aprendizado?</a:t>
+            </a:r>
+          </a:p>
+        </p:txBody>
+      </p:sp>
+      <mc:AlternateContent xmlns:mc="http://schemas.openxmlformats.org/markup-compatibility/2006" xmlns:a14="http://schemas.microsoft.com/office/drawing/2010/main">
+        <mc:Choice Requires="a14">
+          <p:sp>
+            <p:nvSpPr>
+              <p:cNvPr id="3" name="Espaço Reservado para Conteúdo 2">
+                <a:extLst>
+                  <a:ext uri="{FF2B5EF4-FFF2-40B4-BE49-F238E27FC236}">
+                    <a16:creationId xmlns:a16="http://schemas.microsoft.com/office/drawing/2014/main" id="{5873D4D9-70C9-4892-D3C8-28B1750BC291}"/>
+                  </a:ext>
+                </a:extLst>
+              </p:cNvPr>
+              <p:cNvSpPr>
+                <a:spLocks noGrp="1"/>
+              </p:cNvSpPr>
+              <p:nvPr>
+                <p:ph idx="1"/>
+              </p:nvPr>
+            </p:nvSpPr>
+            <p:spPr>
+              <a:xfrm>
+                <a:off x="5541485" y="1825624"/>
+                <a:ext cx="6477918" cy="5032375"/>
+              </a:xfrm>
+            </p:spPr>
+            <p:txBody>
+              <a:bodyPr/>
+              <a:lstStyle/>
+              <a:p>
+                <a:r>
+                  <a:rPr lang="pt-BR" dirty="0"/>
+                  <a:t>Dado que possuímos um </a:t>
+                </a:r>
+                <a:r>
+                  <a:rPr lang="pt-BR" b="1" i="1" dirty="0"/>
+                  <a:t>conjunto</a:t>
+                </a:r>
+                <a:r>
+                  <a:rPr lang="pt-BR" dirty="0"/>
+                  <a:t> de valores de entrada, </a:t>
+                </a:r>
+                <a14:m>
+                  <m:oMath xmlns:m="http://schemas.openxmlformats.org/officeDocument/2006/math">
+                    <m:r>
+                      <a:rPr lang="pt-BR" b="1" i="1" smtClean="0">
+                        <a:latin typeface="Cambria Math" panose="02040503050406030204" pitchFamily="18" charset="0"/>
+                      </a:rPr>
+                      <m:t>𝒙</m:t>
+                    </m:r>
+                  </m:oMath>
+                </a14:m>
+                <a:r>
+                  <a:rPr lang="pt-BR" dirty="0"/>
+                  <a:t> (os </a:t>
+                </a:r>
+                <a:r>
+                  <a:rPr lang="pt-BR" b="1" i="1" dirty="0"/>
+                  <a:t>atributos</a:t>
+                </a:r>
+                <a:r>
+                  <a:rPr lang="pt-BR" dirty="0"/>
+                  <a:t>), e os seus respectivos valores esperados de saída, </a:t>
+                </a:r>
+                <a14:m>
+                  <m:oMath xmlns:m="http://schemas.openxmlformats.org/officeDocument/2006/math">
+                    <m:r>
+                      <a:rPr lang="pt-BR" b="0" i="1" smtClean="0">
+                        <a:latin typeface="Cambria Math" panose="02040503050406030204" pitchFamily="18" charset="0"/>
+                      </a:rPr>
+                      <m:t>𝑦</m:t>
+                    </m:r>
+                  </m:oMath>
+                </a14:m>
+                <a:r>
+                  <a:rPr lang="pt-BR" dirty="0"/>
+                  <a:t> (os </a:t>
+                </a:r>
+                <a:r>
+                  <a:rPr lang="pt-BR" b="1" i="1" dirty="0"/>
+                  <a:t>rótulos</a:t>
+                </a:r>
+                <a:r>
+                  <a:rPr lang="pt-BR" dirty="0"/>
+                  <a:t>), </a:t>
+                </a:r>
+                <a:r>
+                  <a:rPr lang="pt-BR" b="1" i="1" dirty="0">
+                    <a:solidFill>
+                      <a:srgbClr val="00B0F0"/>
+                    </a:solidFill>
+                  </a:rPr>
+                  <a:t>que tipo de aprendizado é realizado pela regressão linear?</a:t>
+                </a:r>
+              </a:p>
+            </p:txBody>
+          </p:sp>
+        </mc:Choice>
+        <mc:Fallback xmlns="">
+          <p:sp>
+            <p:nvSpPr>
+              <p:cNvPr id="3" name="Espaço Reservado para Conteúdo 2">
+                <a:extLst>
+                  <a:ext uri="{FF2B5EF4-FFF2-40B4-BE49-F238E27FC236}">
+                    <a16:creationId xmlns:a16="http://schemas.microsoft.com/office/drawing/2014/main" id="{5873D4D9-70C9-4892-D3C8-28B1750BC291}"/>
+                  </a:ext>
+                </a:extLst>
+              </p:cNvPr>
+              <p:cNvSpPr>
+                <a:spLocks noGrp="1" noRot="1" noChangeAspect="1" noMove="1" noResize="1" noEditPoints="1" noAdjustHandles="1" noChangeArrowheads="1" noChangeShapeType="1" noTextEdit="1"/>
+              </p:cNvSpPr>
+              <p:nvPr>
+                <p:ph idx="1"/>
+              </p:nvPr>
+            </p:nvSpPr>
+            <p:spPr>
+              <a:xfrm>
+                <a:off x="5541485" y="1825624"/>
+                <a:ext cx="6477918" cy="5032375"/>
+              </a:xfrm>
+              <a:blipFill>
+                <a:blip r:embed="rId2"/>
+                <a:stretch>
+                  <a:fillRect l="-1693" t="-1937"/>
+                </a:stretch>
+              </a:blipFill>
+            </p:spPr>
+            <p:txBody>
+              <a:bodyPr/>
+              <a:lstStyle/>
+              <a:p>
+                <a:r>
+                  <a:rPr lang="pt-BR">
+                    <a:noFill/>
+                  </a:rPr>
+                  <a:t> </a:t>
+                </a:r>
+              </a:p>
+            </p:txBody>
+          </p:sp>
+        </mc:Fallback>
+      </mc:AlternateContent>
+      <p:grpSp>
+        <p:nvGrpSpPr>
+          <p:cNvPr id="5" name="Group 4">
             <a:extLst>
               <a:ext uri="{FF2B5EF4-FFF2-40B4-BE49-F238E27FC236}">
-                <a16:creationId xmlns:a16="http://schemas.microsoft.com/office/drawing/2014/main" id="{C525BCE7-C19D-7DDA-016A-E3016C398CBA}"/>
+                <a16:creationId xmlns:a16="http://schemas.microsoft.com/office/drawing/2014/main" id="{1235B076-2510-BA54-045E-9FDA19549589}"/>
               </a:ext>
             </a:extLst>
           </p:cNvPr>
-          <p:cNvSpPr>
-            <a:spLocks noGrp="1"/>
-          </p:cNvSpPr>
-          <p:nvPr>
-            <p:ph idx="1"/>
-          </p:nvPr>
-        </p:nvSpPr>
-        <p:spPr/>
-        <p:txBody>
-          <a:bodyPr/>
-          <a:lstStyle/>
-          <a:p>
-            <a:endParaRPr lang="pt-BR"/>
-          </a:p>
-        </p:txBody>
-      </p:sp>
+          <p:cNvGrpSpPr/>
+          <p:nvPr/>
+        </p:nvGrpSpPr>
+        <p:grpSpPr>
+          <a:xfrm>
+            <a:off x="313057" y="2511846"/>
+            <a:ext cx="4622500" cy="3152391"/>
+            <a:chOff x="313057" y="2511846"/>
+            <a:chExt cx="4622500" cy="3152391"/>
+          </a:xfrm>
+        </p:grpSpPr>
+        <p:grpSp>
+          <p:nvGrpSpPr>
+            <p:cNvPr id="8" name="Agrupar 8">
+              <a:extLst>
+                <a:ext uri="{FF2B5EF4-FFF2-40B4-BE49-F238E27FC236}">
+                  <a16:creationId xmlns:a16="http://schemas.microsoft.com/office/drawing/2014/main" id="{6BA6F8C4-313D-7B7A-8A78-327F3069654F}"/>
+                </a:ext>
+              </a:extLst>
+            </p:cNvPr>
+            <p:cNvGrpSpPr/>
+            <p:nvPr/>
+          </p:nvGrpSpPr>
+          <p:grpSpPr>
+            <a:xfrm>
+              <a:off x="313057" y="2511846"/>
+              <a:ext cx="4622500" cy="3152391"/>
+              <a:chOff x="379861" y="2379643"/>
+              <a:chExt cx="4622500" cy="3152391"/>
+            </a:xfrm>
+          </p:grpSpPr>
+          <p:pic>
+            <p:nvPicPr>
+              <p:cNvPr id="10" name="Imagem 4">
+                <a:extLst>
+                  <a:ext uri="{FF2B5EF4-FFF2-40B4-BE49-F238E27FC236}">
+                    <a16:creationId xmlns:a16="http://schemas.microsoft.com/office/drawing/2014/main" id="{2FDB8C03-A236-C2AB-BA26-35BCEB125546}"/>
+                  </a:ext>
+                </a:extLst>
+              </p:cNvPr>
+              <p:cNvPicPr>
+                <a:picLocks noChangeAspect="1"/>
+              </p:cNvPicPr>
+              <p:nvPr/>
+            </p:nvPicPr>
+            <p:blipFill rotWithShape="1">
+              <a:blip r:embed="rId3" cstate="print">
+                <a:extLst>
+                  <a:ext uri="{28A0092B-C50C-407E-A947-70E740481C1C}">
+                    <a14:useLocalDpi xmlns:a14="http://schemas.microsoft.com/office/drawing/2010/main" val="0"/>
+                  </a:ext>
+                </a:extLst>
+              </a:blip>
+              <a:srcRect l="3463" t="9957" r="8514"/>
+              <a:stretch/>
+            </p:blipFill>
+            <p:spPr>
+              <a:xfrm>
+                <a:off x="379861" y="2379643"/>
+                <a:ext cx="4622500" cy="3152391"/>
+              </a:xfrm>
+              <a:prstGeom prst="rect">
+                <a:avLst/>
+              </a:prstGeom>
+            </p:spPr>
+          </p:pic>
+          <mc:AlternateContent xmlns:mc="http://schemas.openxmlformats.org/markup-compatibility/2006" xmlns:a14="http://schemas.microsoft.com/office/drawing/2010/main">
+            <mc:Choice Requires="a14">
+              <p:sp>
+                <p:nvSpPr>
+                  <p:cNvPr id="11" name="CaixaDeTexto 5">
+                    <a:extLst>
+                      <a:ext uri="{FF2B5EF4-FFF2-40B4-BE49-F238E27FC236}">
+                        <a16:creationId xmlns:a16="http://schemas.microsoft.com/office/drawing/2014/main" id="{D1A24C38-EFA6-2F8B-5C0C-9C486DD9AA95}"/>
+                      </a:ext>
+                    </a:extLst>
+                  </p:cNvPr>
+                  <p:cNvSpPr txBox="1"/>
+                  <p:nvPr/>
+                </p:nvSpPr>
+                <p:spPr>
+                  <a:xfrm>
+                    <a:off x="3410072" y="3635566"/>
+                    <a:ext cx="738130" cy="369332"/>
+                  </a:xfrm>
+                  <a:prstGeom prst="rect">
+                    <a:avLst/>
+                  </a:prstGeom>
+                  <a:noFill/>
+                </p:spPr>
+                <p:txBody>
+                  <a:bodyPr wrap="square" rtlCol="0">
+                    <a:spAutoFit/>
+                  </a:bodyPr>
+                  <a:lstStyle/>
+                  <a:p>
+                    <a:pPr/>
+                    <a14:m>
+                      <m:oMathPara xmlns:m="http://schemas.openxmlformats.org/officeDocument/2006/math">
+                        <m:oMathParaPr>
+                          <m:jc m:val="centerGroup"/>
+                        </m:oMathParaPr>
+                        <m:oMath xmlns:m="http://schemas.openxmlformats.org/officeDocument/2006/math">
+                          <m:r>
+                            <a:rPr lang="pt-BR" b="0" i="1" smtClean="0">
+                              <a:latin typeface="Cambria Math" panose="02040503050406030204" pitchFamily="18" charset="0"/>
+                            </a:rPr>
+                            <m:t>h</m:t>
+                          </m:r>
+                          <m:r>
+                            <a:rPr lang="pt-BR" b="0" i="1" smtClean="0">
+                              <a:latin typeface="Cambria Math" panose="02040503050406030204" pitchFamily="18" charset="0"/>
+                            </a:rPr>
+                            <m:t>(</m:t>
+                          </m:r>
+                          <m:r>
+                            <a:rPr lang="pt-BR" b="1" i="1" smtClean="0">
+                              <a:latin typeface="Cambria Math" panose="02040503050406030204" pitchFamily="18" charset="0"/>
+                            </a:rPr>
+                            <m:t>𝒙</m:t>
+                          </m:r>
+                          <m:r>
+                            <a:rPr lang="pt-BR" b="0" i="1" smtClean="0">
+                              <a:latin typeface="Cambria Math" panose="02040503050406030204" pitchFamily="18" charset="0"/>
+                            </a:rPr>
+                            <m:t>)</m:t>
+                          </m:r>
+                        </m:oMath>
+                      </m:oMathPara>
+                    </a14:m>
+                    <a:endParaRPr lang="pt-BR" dirty="0"/>
+                  </a:p>
+                </p:txBody>
+              </p:sp>
+            </mc:Choice>
+            <mc:Fallback xmlns="">
+              <p:sp>
+                <p:nvSpPr>
+                  <p:cNvPr id="6" name="CaixaDeTexto 5">
+                    <a:extLst>
+                      <a:ext uri="{FF2B5EF4-FFF2-40B4-BE49-F238E27FC236}">
+                        <a16:creationId xmlns:a16="http://schemas.microsoft.com/office/drawing/2014/main" id="{10491C75-CC2B-4E6F-00D1-D7BCDA1CAC51}"/>
+                      </a:ext>
+                    </a:extLst>
+                  </p:cNvPr>
+                  <p:cNvSpPr txBox="1">
+                    <a:spLocks noRot="1" noChangeAspect="1" noMove="1" noResize="1" noEditPoints="1" noAdjustHandles="1" noChangeArrowheads="1" noChangeShapeType="1" noTextEdit="1"/>
+                  </p:cNvSpPr>
+                  <p:nvPr/>
+                </p:nvSpPr>
+                <p:spPr>
+                  <a:xfrm>
+                    <a:off x="3410072" y="3635566"/>
+                    <a:ext cx="738130" cy="369332"/>
+                  </a:xfrm>
+                  <a:prstGeom prst="rect">
+                    <a:avLst/>
+                  </a:prstGeom>
+                  <a:blipFill>
+                    <a:blip r:embed="rId5"/>
+                    <a:stretch>
+                      <a:fillRect b="-13115"/>
+                    </a:stretch>
+                  </a:blipFill>
+                </p:spPr>
+                <p:txBody>
+                  <a:bodyPr/>
+                  <a:lstStyle/>
+                  <a:p>
+                    <a:r>
+                      <a:rPr lang="pt-BR">
+                        <a:noFill/>
+                      </a:rPr>
+                      <a:t> </a:t>
+                    </a:r>
+                  </a:p>
+                </p:txBody>
+              </p:sp>
+            </mc:Fallback>
+          </mc:AlternateContent>
+          <p:cxnSp>
+            <p:nvCxnSpPr>
+              <p:cNvPr id="12" name="Conector de Seta Reta 7">
+                <a:extLst>
+                  <a:ext uri="{FF2B5EF4-FFF2-40B4-BE49-F238E27FC236}">
+                    <a16:creationId xmlns:a16="http://schemas.microsoft.com/office/drawing/2014/main" id="{57EE6B8B-A053-340A-CAEE-30CFEBD53D7E}"/>
+                  </a:ext>
+                </a:extLst>
+              </p:cNvPr>
+              <p:cNvCxnSpPr/>
+              <p:nvPr/>
+            </p:nvCxnSpPr>
+            <p:spPr>
+              <a:xfrm>
+                <a:off x="3150824" y="3602516"/>
+                <a:ext cx="374574" cy="198303"/>
+              </a:xfrm>
+              <a:prstGeom prst="straightConnector1">
+                <a:avLst/>
+              </a:prstGeom>
+              <a:ln>
+                <a:solidFill>
+                  <a:srgbClr val="FF0000"/>
+                </a:solidFill>
+                <a:tailEnd type="triangle"/>
+              </a:ln>
+            </p:spPr>
+            <p:style>
+              <a:lnRef idx="1">
+                <a:schemeClr val="accent1"/>
+              </a:lnRef>
+              <a:fillRef idx="0">
+                <a:schemeClr val="accent1"/>
+              </a:fillRef>
+              <a:effectRef idx="0">
+                <a:schemeClr val="accent1"/>
+              </a:effectRef>
+              <a:fontRef idx="minor">
+                <a:schemeClr val="tx1"/>
+              </a:fontRef>
+            </p:style>
+          </p:cxnSp>
+        </p:grpSp>
+        <mc:AlternateContent xmlns:mc="http://schemas.openxmlformats.org/markup-compatibility/2006">
+          <mc:Choice xmlns:a14="http://schemas.microsoft.com/office/drawing/2010/main" Requires="a14">
+            <p:sp>
+              <p:nvSpPr>
+                <p:cNvPr id="9" name="CaixaDeTexto 3">
+                  <a:extLst>
+                    <a:ext uri="{FF2B5EF4-FFF2-40B4-BE49-F238E27FC236}">
+                      <a16:creationId xmlns:a16="http://schemas.microsoft.com/office/drawing/2014/main" id="{84693792-F9CA-4DDE-7B29-0D00BA687EFA}"/>
+                    </a:ext>
+                  </a:extLst>
+                </p:cNvPr>
+                <p:cNvSpPr txBox="1"/>
+                <p:nvPr/>
+              </p:nvSpPr>
+              <p:spPr>
+                <a:xfrm>
+                  <a:off x="2409352" y="2755948"/>
+                  <a:ext cx="738130" cy="307777"/>
+                </a:xfrm>
+                <a:prstGeom prst="rect">
+                  <a:avLst/>
+                </a:prstGeom>
+                <a:noFill/>
+              </p:spPr>
+              <p:txBody>
+                <a:bodyPr wrap="square" rtlCol="0">
+                  <a:spAutoFit/>
+                </a:bodyPr>
+                <a:lstStyle/>
+                <a:p>
+                  <a:pPr/>
+                  <a14:m>
+                    <m:oMathPara xmlns:m="http://schemas.openxmlformats.org/officeDocument/2006/math">
+                      <m:oMathParaPr>
+                        <m:jc m:val="centerGroup"/>
+                      </m:oMathParaPr>
+                      <m:oMath xmlns:m="http://schemas.openxmlformats.org/officeDocument/2006/math">
+                        <m:r>
+                          <a:rPr lang="pt-BR" sz="1400" b="0" i="1" smtClean="0">
+                            <a:latin typeface="Cambria Math" panose="02040503050406030204" pitchFamily="18" charset="0"/>
+                          </a:rPr>
+                          <m:t>h</m:t>
+                        </m:r>
+                        <m:r>
+                          <a:rPr lang="pt-BR" sz="1400" b="0" i="1" smtClean="0">
+                            <a:latin typeface="Cambria Math" panose="02040503050406030204" pitchFamily="18" charset="0"/>
+                          </a:rPr>
+                          <m:t>(</m:t>
+                        </m:r>
+                        <m:r>
+                          <a:rPr lang="pt-BR" sz="1400" b="1" i="1" smtClean="0">
+                            <a:latin typeface="Cambria Math" panose="02040503050406030204" pitchFamily="18" charset="0"/>
+                          </a:rPr>
+                          <m:t>𝒙</m:t>
+                        </m:r>
+                        <m:r>
+                          <a:rPr lang="pt-BR" sz="1400" b="0" i="1" smtClean="0">
+                            <a:latin typeface="Cambria Math" panose="02040503050406030204" pitchFamily="18" charset="0"/>
+                          </a:rPr>
+                          <m:t>)</m:t>
+                        </m:r>
+                      </m:oMath>
+                    </m:oMathPara>
+                  </a14:m>
+                  <a:endParaRPr lang="pt-BR" sz="1400" dirty="0"/>
+                </a:p>
+              </p:txBody>
+            </p:sp>
+          </mc:Choice>
+          <mc:Fallback>
+            <p:sp>
+              <p:nvSpPr>
+                <p:cNvPr id="9" name="CaixaDeTexto 3">
+                  <a:extLst>
+                    <a:ext uri="{FF2B5EF4-FFF2-40B4-BE49-F238E27FC236}">
+                      <a16:creationId xmlns:a16="http://schemas.microsoft.com/office/drawing/2014/main" id="{84693792-F9CA-4DDE-7B29-0D00BA687EFA}"/>
+                    </a:ext>
+                  </a:extLst>
+                </p:cNvPr>
+                <p:cNvSpPr txBox="1">
+                  <a:spLocks noRot="1" noChangeAspect="1" noMove="1" noResize="1" noEditPoints="1" noAdjustHandles="1" noChangeArrowheads="1" noChangeShapeType="1" noTextEdit="1"/>
+                </p:cNvSpPr>
+                <p:nvPr/>
+              </p:nvSpPr>
+              <p:spPr>
+                <a:xfrm>
+                  <a:off x="2409352" y="2755948"/>
+                  <a:ext cx="738130" cy="307777"/>
+                </a:xfrm>
+                <a:prstGeom prst="rect">
+                  <a:avLst/>
+                </a:prstGeom>
+                <a:blipFill>
+                  <a:blip r:embed="rId6"/>
+                  <a:stretch>
+                    <a:fillRect b="-5882"/>
+                  </a:stretch>
+                </a:blipFill>
+              </p:spPr>
+              <p:txBody>
+                <a:bodyPr/>
+                <a:lstStyle/>
+                <a:p>
+                  <a:r>
+                    <a:rPr lang="en-US">
+                      <a:noFill/>
+                    </a:rPr>
+                    <a:t> </a:t>
+                  </a:r>
+                </a:p>
+              </p:txBody>
+            </p:sp>
+          </mc:Fallback>
+        </mc:AlternateContent>
+      </p:grpSp>
     </p:spTree>
     <p:extLst>
       <p:ext uri="{BB962C8B-B14F-4D97-AF65-F5344CB8AC3E}">
-        <p14:creationId xmlns:p14="http://schemas.microsoft.com/office/powerpoint/2010/main" val="3601469261"/>
+        <p14:creationId xmlns:p14="http://schemas.microsoft.com/office/powerpoint/2010/main" val="3265644497"/>
       </p:ext>
     </p:extLst>
   </p:cSld>
@@ -4901,64 +8302,425 @@
       </p:grpSpPr>
       <p:sp>
         <p:nvSpPr>
-          <p:cNvPr id="4" name="Título 1">
+          <p:cNvPr id="2" name="Título 1">
             <a:extLst>
               <a:ext uri="{FF2B5EF4-FFF2-40B4-BE49-F238E27FC236}">
-                <a16:creationId xmlns:a16="http://schemas.microsoft.com/office/drawing/2014/main" id="{32666AC8-2E17-4DB4-B0F5-60C640CCFD2E}"/>
+                <a16:creationId xmlns:a16="http://schemas.microsoft.com/office/drawing/2014/main" id="{6C106918-4928-8D8F-109D-FE4154A6ACEE}"/>
               </a:ext>
             </a:extLst>
           </p:cNvPr>
-          <p:cNvSpPr txBox="1">
-            <a:spLocks/>
-          </p:cNvSpPr>
+          <p:cNvSpPr>
+            <a:spLocks noGrp="1"/>
+          </p:cNvSpPr>
+          <p:nvPr>
+            <p:ph type="title"/>
+          </p:nvPr>
+        </p:nvSpPr>
+        <p:spPr/>
+        <p:txBody>
+          <a:bodyPr/>
+          <a:lstStyle/>
+          <a:p>
+            <a:r>
+              <a:rPr lang="pt-BR" dirty="0"/>
+              <a:t>Qual é o paradigma de aprendizado?</a:t>
+            </a:r>
+          </a:p>
+        </p:txBody>
+      </p:sp>
+      <p:sp>
+        <p:nvSpPr>
+          <p:cNvPr id="5" name="CaixaDeTexto 4">
+            <a:extLst>
+              <a:ext uri="{FF2B5EF4-FFF2-40B4-BE49-F238E27FC236}">
+                <a16:creationId xmlns:a16="http://schemas.microsoft.com/office/drawing/2014/main" id="{77D13973-0CC4-804D-B65C-ACF1497CA131}"/>
+              </a:ext>
+            </a:extLst>
+          </p:cNvPr>
+          <p:cNvSpPr txBox="1"/>
           <p:nvPr/>
         </p:nvSpPr>
         <p:spPr>
           <a:xfrm>
-            <a:off x="1431533" y="2720526"/>
-            <a:ext cx="9144000" cy="1029541"/>
+            <a:off x="6543036" y="3032554"/>
+            <a:ext cx="3983450" cy="1446550"/>
           </a:xfrm>
           <a:prstGeom prst="rect">
             <a:avLst/>
           </a:prstGeom>
+          <a:noFill/>
         </p:spPr>
         <p:txBody>
-          <a:bodyPr vert="horz" lIns="91440" tIns="45720" rIns="91440" bIns="45720" rtlCol="0" anchor="ctr">
-            <a:normAutofit/>
+          <a:bodyPr wrap="square">
+            <a:spAutoFit/>
           </a:bodyPr>
-          <a:lstStyle>
-            <a:lvl1pPr algn="l" defTabSz="914400" rtl="0" eaLnBrk="1" latinLnBrk="0" hangingPunct="1">
-              <a:lnSpc>
-                <a:spcPct val="90000"/>
-              </a:lnSpc>
-              <a:spcBef>
-                <a:spcPct val="0"/>
-              </a:spcBef>
+          <a:lstStyle/>
+          <a:p>
+            <a:pPr marL="0" indent="0" algn="ctr">
               <a:buNone/>
-              <a:defRPr sz="4400" kern="1200">
+            </a:pPr>
+            <a:r>
+              <a:rPr lang="pt-BR" sz="4400" b="1" i="1" dirty="0">
                 <a:solidFill>
-                  <a:schemeClr val="tx1"/>
+                  <a:srgbClr val="00B050"/>
                 </a:solidFill>
-                <a:latin typeface="+mj-lt"/>
-                <a:ea typeface="+mj-ea"/>
-                <a:cs typeface="+mj-cs"/>
-              </a:defRPr>
-            </a:lvl1pPr>
-          </a:lstStyle>
-          <a:p>
-            <a:pPr algn="ctr"/>
-            <a:r>
-              <a:rPr lang="pt-BR" sz="6600" dirty="0"/>
-              <a:t>Perguntas?</a:t>
-            </a:r>
-            <a:endParaRPr lang="pt-BR" sz="6600" b="1" i="1" dirty="0"/>
-          </a:p>
-        </p:txBody>
-      </p:sp>
+              </a:rPr>
+              <a:t>Aprendizado supervisionado</a:t>
+            </a:r>
+          </a:p>
+        </p:txBody>
+      </p:sp>
+      <p:grpSp>
+        <p:nvGrpSpPr>
+          <p:cNvPr id="4" name="Group 3">
+            <a:extLst>
+              <a:ext uri="{FF2B5EF4-FFF2-40B4-BE49-F238E27FC236}">
+                <a16:creationId xmlns:a16="http://schemas.microsoft.com/office/drawing/2014/main" id="{74FA83DA-1176-B494-DF6D-26AABD487B72}"/>
+              </a:ext>
+            </a:extLst>
+          </p:cNvPr>
+          <p:cNvGrpSpPr/>
+          <p:nvPr/>
+        </p:nvGrpSpPr>
+        <p:grpSpPr>
+          <a:xfrm>
+            <a:off x="606971" y="2326789"/>
+            <a:ext cx="4622500" cy="3152391"/>
+            <a:chOff x="313057" y="2511846"/>
+            <a:chExt cx="4622500" cy="3152391"/>
+          </a:xfrm>
+        </p:grpSpPr>
+        <p:grpSp>
+          <p:nvGrpSpPr>
+            <p:cNvPr id="8" name="Agrupar 8">
+              <a:extLst>
+                <a:ext uri="{FF2B5EF4-FFF2-40B4-BE49-F238E27FC236}">
+                  <a16:creationId xmlns:a16="http://schemas.microsoft.com/office/drawing/2014/main" id="{3601490F-BA92-2E2F-4176-8548977CDC6B}"/>
+                </a:ext>
+              </a:extLst>
+            </p:cNvPr>
+            <p:cNvGrpSpPr/>
+            <p:nvPr/>
+          </p:nvGrpSpPr>
+          <p:grpSpPr>
+            <a:xfrm>
+              <a:off x="313057" y="2511846"/>
+              <a:ext cx="4622500" cy="3152391"/>
+              <a:chOff x="379861" y="2379643"/>
+              <a:chExt cx="4622500" cy="3152391"/>
+            </a:xfrm>
+          </p:grpSpPr>
+          <p:pic>
+            <p:nvPicPr>
+              <p:cNvPr id="10" name="Imagem 4">
+                <a:extLst>
+                  <a:ext uri="{FF2B5EF4-FFF2-40B4-BE49-F238E27FC236}">
+                    <a16:creationId xmlns:a16="http://schemas.microsoft.com/office/drawing/2014/main" id="{5C8759EA-A495-1092-5721-C2D5BB969782}"/>
+                  </a:ext>
+                </a:extLst>
+              </p:cNvPr>
+              <p:cNvPicPr>
+                <a:picLocks noChangeAspect="1"/>
+              </p:cNvPicPr>
+              <p:nvPr/>
+            </p:nvPicPr>
+            <p:blipFill rotWithShape="1">
+              <a:blip r:embed="rId2" cstate="print">
+                <a:extLst>
+                  <a:ext uri="{28A0092B-C50C-407E-A947-70E740481C1C}">
+                    <a14:useLocalDpi xmlns:a14="http://schemas.microsoft.com/office/drawing/2010/main" val="0"/>
+                  </a:ext>
+                </a:extLst>
+              </a:blip>
+              <a:srcRect l="3463" t="9957" r="8514"/>
+              <a:stretch/>
+            </p:blipFill>
+            <p:spPr>
+              <a:xfrm>
+                <a:off x="379861" y="2379643"/>
+                <a:ext cx="4622500" cy="3152391"/>
+              </a:xfrm>
+              <a:prstGeom prst="rect">
+                <a:avLst/>
+              </a:prstGeom>
+            </p:spPr>
+          </p:pic>
+          <mc:AlternateContent xmlns:mc="http://schemas.openxmlformats.org/markup-compatibility/2006" xmlns:a14="http://schemas.microsoft.com/office/drawing/2010/main">
+            <mc:Choice Requires="a14">
+              <p:sp>
+                <p:nvSpPr>
+                  <p:cNvPr id="11" name="CaixaDeTexto 5">
+                    <a:extLst>
+                      <a:ext uri="{FF2B5EF4-FFF2-40B4-BE49-F238E27FC236}">
+                        <a16:creationId xmlns:a16="http://schemas.microsoft.com/office/drawing/2014/main" id="{3DC28E94-1E78-E96F-81AC-6660B1EAE0DB}"/>
+                      </a:ext>
+                    </a:extLst>
+                  </p:cNvPr>
+                  <p:cNvSpPr txBox="1"/>
+                  <p:nvPr/>
+                </p:nvSpPr>
+                <p:spPr>
+                  <a:xfrm>
+                    <a:off x="3410072" y="3635566"/>
+                    <a:ext cx="738130" cy="369332"/>
+                  </a:xfrm>
+                  <a:prstGeom prst="rect">
+                    <a:avLst/>
+                  </a:prstGeom>
+                  <a:noFill/>
+                </p:spPr>
+                <p:txBody>
+                  <a:bodyPr wrap="square" rtlCol="0">
+                    <a:spAutoFit/>
+                  </a:bodyPr>
+                  <a:lstStyle/>
+                  <a:p>
+                    <a:pPr/>
+                    <a14:m>
+                      <m:oMathPara xmlns:m="http://schemas.openxmlformats.org/officeDocument/2006/math">
+                        <m:oMathParaPr>
+                          <m:jc m:val="centerGroup"/>
+                        </m:oMathParaPr>
+                        <m:oMath xmlns:m="http://schemas.openxmlformats.org/officeDocument/2006/math">
+                          <m:r>
+                            <a:rPr lang="pt-BR" b="0" i="1" smtClean="0">
+                              <a:latin typeface="Cambria Math" panose="02040503050406030204" pitchFamily="18" charset="0"/>
+                            </a:rPr>
+                            <m:t>h</m:t>
+                          </m:r>
+                          <m:r>
+                            <a:rPr lang="pt-BR" b="0" i="1" smtClean="0">
+                              <a:latin typeface="Cambria Math" panose="02040503050406030204" pitchFamily="18" charset="0"/>
+                            </a:rPr>
+                            <m:t>(</m:t>
+                          </m:r>
+                          <m:r>
+                            <a:rPr lang="pt-BR" b="1" i="1" smtClean="0">
+                              <a:latin typeface="Cambria Math" panose="02040503050406030204" pitchFamily="18" charset="0"/>
+                            </a:rPr>
+                            <m:t>𝒙</m:t>
+                          </m:r>
+                          <m:r>
+                            <a:rPr lang="pt-BR" b="0" i="1" smtClean="0">
+                              <a:latin typeface="Cambria Math" panose="02040503050406030204" pitchFamily="18" charset="0"/>
+                            </a:rPr>
+                            <m:t>)</m:t>
+                          </m:r>
+                        </m:oMath>
+                      </m:oMathPara>
+                    </a14:m>
+                    <a:endParaRPr lang="pt-BR" dirty="0"/>
+                  </a:p>
+                </p:txBody>
+              </p:sp>
+            </mc:Choice>
+            <mc:Fallback xmlns="">
+              <p:sp>
+                <p:nvSpPr>
+                  <p:cNvPr id="6" name="CaixaDeTexto 5">
+                    <a:extLst>
+                      <a:ext uri="{FF2B5EF4-FFF2-40B4-BE49-F238E27FC236}">
+                        <a16:creationId xmlns:a16="http://schemas.microsoft.com/office/drawing/2014/main" id="{10491C75-CC2B-4E6F-00D1-D7BCDA1CAC51}"/>
+                      </a:ext>
+                    </a:extLst>
+                  </p:cNvPr>
+                  <p:cNvSpPr txBox="1">
+                    <a:spLocks noRot="1" noChangeAspect="1" noMove="1" noResize="1" noEditPoints="1" noAdjustHandles="1" noChangeArrowheads="1" noChangeShapeType="1" noTextEdit="1"/>
+                  </p:cNvSpPr>
+                  <p:nvPr/>
+                </p:nvSpPr>
+                <p:spPr>
+                  <a:xfrm>
+                    <a:off x="3410072" y="3635566"/>
+                    <a:ext cx="738130" cy="369332"/>
+                  </a:xfrm>
+                  <a:prstGeom prst="rect">
+                    <a:avLst/>
+                  </a:prstGeom>
+                  <a:blipFill>
+                    <a:blip r:embed="rId5"/>
+                    <a:stretch>
+                      <a:fillRect b="-13115"/>
+                    </a:stretch>
+                  </a:blipFill>
+                </p:spPr>
+                <p:txBody>
+                  <a:bodyPr/>
+                  <a:lstStyle/>
+                  <a:p>
+                    <a:r>
+                      <a:rPr lang="pt-BR">
+                        <a:noFill/>
+                      </a:rPr>
+                      <a:t> </a:t>
+                    </a:r>
+                  </a:p>
+                </p:txBody>
+              </p:sp>
+            </mc:Fallback>
+          </mc:AlternateContent>
+          <p:cxnSp>
+            <p:nvCxnSpPr>
+              <p:cNvPr id="12" name="Conector de Seta Reta 7">
+                <a:extLst>
+                  <a:ext uri="{FF2B5EF4-FFF2-40B4-BE49-F238E27FC236}">
+                    <a16:creationId xmlns:a16="http://schemas.microsoft.com/office/drawing/2014/main" id="{18708C14-B461-C0FC-A091-97D0B01047D3}"/>
+                  </a:ext>
+                </a:extLst>
+              </p:cNvPr>
+              <p:cNvCxnSpPr/>
+              <p:nvPr/>
+            </p:nvCxnSpPr>
+            <p:spPr>
+              <a:xfrm>
+                <a:off x="3150824" y="3602516"/>
+                <a:ext cx="374574" cy="198303"/>
+              </a:xfrm>
+              <a:prstGeom prst="straightConnector1">
+                <a:avLst/>
+              </a:prstGeom>
+              <a:ln>
+                <a:solidFill>
+                  <a:srgbClr val="FF0000"/>
+                </a:solidFill>
+                <a:tailEnd type="triangle"/>
+              </a:ln>
+            </p:spPr>
+            <p:style>
+              <a:lnRef idx="1">
+                <a:schemeClr val="accent1"/>
+              </a:lnRef>
+              <a:fillRef idx="0">
+                <a:schemeClr val="accent1"/>
+              </a:fillRef>
+              <a:effectRef idx="0">
+                <a:schemeClr val="accent1"/>
+              </a:effectRef>
+              <a:fontRef idx="minor">
+                <a:schemeClr val="tx1"/>
+              </a:fontRef>
+            </p:style>
+          </p:cxnSp>
+        </p:grpSp>
+        <mc:AlternateContent xmlns:mc="http://schemas.openxmlformats.org/markup-compatibility/2006">
+          <mc:Choice xmlns:a14="http://schemas.microsoft.com/office/drawing/2010/main" Requires="a14">
+            <p:sp>
+              <p:nvSpPr>
+                <p:cNvPr id="9" name="CaixaDeTexto 3">
+                  <a:extLst>
+                    <a:ext uri="{FF2B5EF4-FFF2-40B4-BE49-F238E27FC236}">
+                      <a16:creationId xmlns:a16="http://schemas.microsoft.com/office/drawing/2014/main" id="{CD48A18A-A494-29A6-49E8-BAE3B1ECBF7E}"/>
+                    </a:ext>
+                  </a:extLst>
+                </p:cNvPr>
+                <p:cNvSpPr txBox="1"/>
+                <p:nvPr/>
+              </p:nvSpPr>
+              <p:spPr>
+                <a:xfrm>
+                  <a:off x="2409352" y="2755948"/>
+                  <a:ext cx="738130" cy="307777"/>
+                </a:xfrm>
+                <a:prstGeom prst="rect">
+                  <a:avLst/>
+                </a:prstGeom>
+                <a:noFill/>
+              </p:spPr>
+              <p:txBody>
+                <a:bodyPr wrap="square" rtlCol="0">
+                  <a:spAutoFit/>
+                </a:bodyPr>
+                <a:lstStyle/>
+                <a:p>
+                  <a:pPr/>
+                  <a14:m>
+                    <m:oMathPara xmlns:m="http://schemas.openxmlformats.org/officeDocument/2006/math">
+                      <m:oMathParaPr>
+                        <m:jc m:val="centerGroup"/>
+                      </m:oMathParaPr>
+                      <m:oMath xmlns:m="http://schemas.openxmlformats.org/officeDocument/2006/math">
+                        <m:r>
+                          <a:rPr lang="pt-BR" sz="1400" b="0" i="1" smtClean="0">
+                            <a:latin typeface="Cambria Math" panose="02040503050406030204" pitchFamily="18" charset="0"/>
+                          </a:rPr>
+                          <m:t>h</m:t>
+                        </m:r>
+                        <m:r>
+                          <a:rPr lang="pt-BR" sz="1400" b="0" i="1" smtClean="0">
+                            <a:latin typeface="Cambria Math" panose="02040503050406030204" pitchFamily="18" charset="0"/>
+                          </a:rPr>
+                          <m:t>(</m:t>
+                        </m:r>
+                        <m:r>
+                          <a:rPr lang="pt-BR" sz="1400" b="1" i="1" smtClean="0">
+                            <a:latin typeface="Cambria Math" panose="02040503050406030204" pitchFamily="18" charset="0"/>
+                          </a:rPr>
+                          <m:t>𝒙</m:t>
+                        </m:r>
+                        <m:r>
+                          <a:rPr lang="pt-BR" sz="1400" b="0" i="1" smtClean="0">
+                            <a:latin typeface="Cambria Math" panose="02040503050406030204" pitchFamily="18" charset="0"/>
+                          </a:rPr>
+                          <m:t>)</m:t>
+                        </m:r>
+                      </m:oMath>
+                    </m:oMathPara>
+                  </a14:m>
+                  <a:endParaRPr lang="pt-BR" sz="1400" dirty="0"/>
+                </a:p>
+              </p:txBody>
+            </p:sp>
+          </mc:Choice>
+          <mc:Fallback>
+            <p:sp>
+              <p:nvSpPr>
+                <p:cNvPr id="9" name="CaixaDeTexto 3">
+                  <a:extLst>
+                    <a:ext uri="{FF2B5EF4-FFF2-40B4-BE49-F238E27FC236}">
+                      <a16:creationId xmlns:a16="http://schemas.microsoft.com/office/drawing/2014/main" id="{CD48A18A-A494-29A6-49E8-BAE3B1ECBF7E}"/>
+                    </a:ext>
+                  </a:extLst>
+                </p:cNvPr>
+                <p:cNvSpPr txBox="1">
+                  <a:spLocks noRot="1" noChangeAspect="1" noMove="1" noResize="1" noEditPoints="1" noAdjustHandles="1" noChangeArrowheads="1" noChangeShapeType="1" noTextEdit="1"/>
+                </p:cNvSpPr>
+                <p:nvPr/>
+              </p:nvSpPr>
+              <p:spPr>
+                <a:xfrm>
+                  <a:off x="2409352" y="2755948"/>
+                  <a:ext cx="738130" cy="307777"/>
+                </a:xfrm>
+                <a:prstGeom prst="rect">
+                  <a:avLst/>
+                </a:prstGeom>
+                <a:blipFill>
+                  <a:blip r:embed="rId6"/>
+                  <a:stretch>
+                    <a:fillRect b="-8000"/>
+                  </a:stretch>
+                </a:blipFill>
+              </p:spPr>
+              <p:txBody>
+                <a:bodyPr/>
+                <a:lstStyle/>
+                <a:p>
+                  <a:r>
+                    <a:rPr lang="en-US">
+                      <a:noFill/>
+                    </a:rPr>
+                    <a:t> </a:t>
+                  </a:r>
+                </a:p>
+              </p:txBody>
+            </p:sp>
+          </mc:Fallback>
+        </mc:AlternateContent>
+      </p:grpSp>
     </p:spTree>
     <p:extLst>
       <p:ext uri="{BB962C8B-B14F-4D97-AF65-F5344CB8AC3E}">
-        <p14:creationId xmlns:p14="http://schemas.microsoft.com/office/powerpoint/2010/main" val="3773005660"/>
+        <p14:creationId xmlns:p14="http://schemas.microsoft.com/office/powerpoint/2010/main" val="1720068782"/>
       </p:ext>
     </p:extLst>
   </p:cSld>

--- a/slides/C24_Regressão.pptx
+++ b/slides/C24_Regressão.pptx
@@ -5,10 +5,10 @@
     <p:sldMasterId id="2147483648" r:id="rId1"/>
   </p:sldMasterIdLst>
   <p:notesMasterIdLst>
-    <p:notesMasterId r:id="rId14"/>
+    <p:notesMasterId r:id="rId16"/>
   </p:notesMasterIdLst>
   <p:handoutMasterIdLst>
-    <p:handoutMasterId r:id="rId15"/>
+    <p:handoutMasterId r:id="rId17"/>
   </p:handoutMasterIdLst>
   <p:sldIdLst>
     <p:sldId id="256" r:id="rId2"/>
@@ -20,9 +20,11 @@
     <p:sldId id="470" r:id="rId8"/>
     <p:sldId id="471" r:id="rId9"/>
     <p:sldId id="472" r:id="rId10"/>
-    <p:sldId id="519" r:id="rId11"/>
-    <p:sldId id="293" r:id="rId12"/>
-    <p:sldId id="306" r:id="rId13"/>
+    <p:sldId id="465" r:id="rId11"/>
+    <p:sldId id="520" r:id="rId12"/>
+    <p:sldId id="519" r:id="rId13"/>
+    <p:sldId id="293" r:id="rId14"/>
+    <p:sldId id="306" r:id="rId15"/>
   </p:sldIdLst>
   <p:sldSz cx="12192000" cy="6858000"/>
   <p:notesSz cx="7315200" cy="9601200"/>
@@ -1390,6 +1392,312 @@
     <p:extLst>
       <p:ext uri="{BB962C8B-B14F-4D97-AF65-F5344CB8AC3E}">
         <p14:creationId xmlns:p14="http://schemas.microsoft.com/office/powerpoint/2010/main" val="2933540496"/>
+      </p:ext>
+    </p:extLst>
+  </p:cSld>
+  <p:clrMapOvr>
+    <a:masterClrMapping/>
+  </p:clrMapOvr>
+</p:notes>
+</file>
+
+<file path=ppt/notesSlides/notesSlide6.xml><?xml version="1.0" encoding="utf-8"?>
+<p:notes xmlns:a="http://schemas.openxmlformats.org/drawingml/2006/main" xmlns:r="http://schemas.openxmlformats.org/officeDocument/2006/relationships" xmlns:p="http://schemas.openxmlformats.org/presentationml/2006/main">
+  <p:cSld>
+    <p:spTree>
+      <p:nvGrpSpPr>
+        <p:cNvPr id="1" name=""/>
+        <p:cNvGrpSpPr/>
+        <p:nvPr/>
+      </p:nvGrpSpPr>
+      <p:grpSpPr>
+        <a:xfrm>
+          <a:off x="0" y="0"/>
+          <a:ext cx="0" cy="0"/>
+          <a:chOff x="0" y="0"/>
+          <a:chExt cx="0" cy="0"/>
+        </a:xfrm>
+      </p:grpSpPr>
+      <p:sp>
+        <p:nvSpPr>
+          <p:cNvPr id="2" name="Slide Image Placeholder 1"/>
+          <p:cNvSpPr>
+            <a:spLocks noGrp="1" noRot="1" noChangeAspect="1"/>
+          </p:cNvSpPr>
+          <p:nvPr>
+            <p:ph type="sldImg"/>
+          </p:nvPr>
+        </p:nvSpPr>
+        <p:spPr/>
+      </p:sp>
+      <p:sp>
+        <p:nvSpPr>
+          <p:cNvPr id="3" name="Notes Placeholder 2"/>
+          <p:cNvSpPr>
+            <a:spLocks noGrp="1"/>
+          </p:cNvSpPr>
+          <p:nvPr>
+            <p:ph type="body" idx="1"/>
+          </p:nvPr>
+        </p:nvSpPr>
+        <p:spPr/>
+        <p:txBody>
+          <a:bodyPr/>
+          <a:lstStyle/>
+          <a:p>
+            <a:r>
+              <a:rPr lang="en-US" sz="1200" b="0" i="0" kern="1200" dirty="0">
+                <a:solidFill>
+                  <a:schemeClr val="tx1"/>
+                </a:solidFill>
+                <a:effectLst/>
+                <a:latin typeface="+mn-lt"/>
+                <a:ea typeface="+mn-ea"/>
+                <a:cs typeface="+mn-cs"/>
+              </a:rPr>
+              <a:t>O </a:t>
+            </a:r>
+            <a:r>
+              <a:rPr lang="en-US" sz="1200" b="0" i="0" kern="1200" dirty="0" err="1">
+                <a:solidFill>
+                  <a:schemeClr val="tx1"/>
+                </a:solidFill>
+                <a:effectLst/>
+                <a:latin typeface="+mn-lt"/>
+                <a:ea typeface="+mn-ea"/>
+                <a:cs typeface="+mn-cs"/>
+              </a:rPr>
+              <a:t>teorema</a:t>
+            </a:r>
+            <a:r>
+              <a:rPr lang="en-US" sz="1200" b="0" i="0" kern="1200" baseline="0" dirty="0">
+                <a:solidFill>
+                  <a:schemeClr val="tx1"/>
+                </a:solidFill>
+                <a:effectLst/>
+                <a:latin typeface="+mn-lt"/>
+                <a:ea typeface="+mn-ea"/>
+                <a:cs typeface="+mn-cs"/>
+              </a:rPr>
+              <a:t> f</a:t>
+            </a:r>
+            <a:r>
+              <a:rPr lang="pt-BR" sz="1200" b="0" i="0" kern="1200" dirty="0" err="1">
+                <a:solidFill>
+                  <a:schemeClr val="tx1"/>
+                </a:solidFill>
+                <a:effectLst/>
+                <a:latin typeface="+mn-lt"/>
+                <a:ea typeface="+mn-ea"/>
+                <a:cs typeface="+mn-cs"/>
+              </a:rPr>
+              <a:t>ornece</a:t>
+            </a:r>
+            <a:r>
+              <a:rPr lang="pt-BR" sz="1200" b="0" i="0" kern="1200" dirty="0">
+                <a:solidFill>
+                  <a:schemeClr val="tx1"/>
+                </a:solidFill>
+                <a:effectLst/>
+                <a:latin typeface="+mn-lt"/>
+                <a:ea typeface="+mn-ea"/>
+                <a:cs typeface="+mn-cs"/>
+              </a:rPr>
+              <a:t> uma maneira de aproximar funções complexas e não polinomiais por meio de polinômios simples.</a:t>
+            </a:r>
+            <a:endParaRPr lang="en-US" sz="1200" b="0" i="0" kern="1200" dirty="0">
+              <a:solidFill>
+                <a:schemeClr val="tx1"/>
+              </a:solidFill>
+              <a:effectLst/>
+              <a:latin typeface="+mn-lt"/>
+              <a:ea typeface="+mn-ea"/>
+              <a:cs typeface="+mn-cs"/>
+            </a:endParaRPr>
+          </a:p>
+          <a:p>
+            <a:endParaRPr lang="en-US" sz="1200" b="0" i="0" kern="1200" dirty="0">
+              <a:solidFill>
+                <a:schemeClr val="tx1"/>
+              </a:solidFill>
+              <a:effectLst/>
+              <a:latin typeface="+mn-lt"/>
+              <a:ea typeface="+mn-ea"/>
+              <a:cs typeface="+mn-cs"/>
+            </a:endParaRPr>
+          </a:p>
+          <a:p>
+            <a:r>
+              <a:rPr lang="en-US" sz="1200" b="0" i="0" kern="1200" dirty="0">
+                <a:solidFill>
+                  <a:schemeClr val="tx1"/>
+                </a:solidFill>
+                <a:effectLst/>
+                <a:latin typeface="+mn-lt"/>
+                <a:ea typeface="+mn-ea"/>
+                <a:cs typeface="+mn-cs"/>
+              </a:rPr>
+              <a:t>The </a:t>
+            </a:r>
+            <a:r>
+              <a:rPr lang="en-US" sz="1200" b="0" i="0" kern="1200" dirty="0" err="1">
+                <a:solidFill>
+                  <a:schemeClr val="tx1"/>
+                </a:solidFill>
+                <a:effectLst/>
+                <a:latin typeface="+mn-lt"/>
+                <a:ea typeface="+mn-ea"/>
+                <a:cs typeface="+mn-cs"/>
+              </a:rPr>
+              <a:t>Weierstrass</a:t>
+            </a:r>
+            <a:r>
+              <a:rPr lang="en-US" sz="1200" b="0" i="0" kern="1200" dirty="0">
+                <a:solidFill>
+                  <a:schemeClr val="tx1"/>
+                </a:solidFill>
+                <a:effectLst/>
+                <a:latin typeface="+mn-lt"/>
+                <a:ea typeface="+mn-ea"/>
+                <a:cs typeface="+mn-cs"/>
+              </a:rPr>
+              <a:t> approximation theorem assures us that </a:t>
+            </a:r>
+            <a:r>
+              <a:rPr lang="en-US" sz="1200" b="0" i="0" u="none" strike="noStrike" kern="1200" dirty="0">
+                <a:solidFill>
+                  <a:schemeClr val="tx1"/>
+                </a:solidFill>
+                <a:effectLst/>
+                <a:latin typeface="+mn-lt"/>
+                <a:ea typeface="+mn-ea"/>
+                <a:cs typeface="+mn-cs"/>
+                <a:hlinkClick r:id="rId3"/>
+              </a:rPr>
+              <a:t>polynomial approximation</a:t>
+            </a:r>
+            <a:r>
+              <a:rPr lang="en-US" sz="1200" b="0" i="0" kern="1200" dirty="0">
+                <a:solidFill>
+                  <a:schemeClr val="tx1"/>
+                </a:solidFill>
+                <a:effectLst/>
+                <a:latin typeface="+mn-lt"/>
+                <a:ea typeface="+mn-ea"/>
+                <a:cs typeface="+mn-cs"/>
+              </a:rPr>
+              <a:t> can get arbitrarily close to any continuous function as the polynomial order is increased.</a:t>
+            </a:r>
+          </a:p>
+          <a:p>
+            <a:endParaRPr lang="en-US" sz="1200" b="0" i="0" kern="1200" dirty="0">
+              <a:solidFill>
+                <a:schemeClr val="tx1"/>
+              </a:solidFill>
+              <a:effectLst/>
+              <a:latin typeface="+mn-lt"/>
+              <a:ea typeface="+mn-ea"/>
+              <a:cs typeface="+mn-cs"/>
+            </a:endParaRPr>
+          </a:p>
+          <a:p>
+            <a:endParaRPr lang="en-US" sz="1200" b="0" i="0" kern="1200" dirty="0">
+              <a:solidFill>
+                <a:schemeClr val="tx1"/>
+              </a:solidFill>
+              <a:effectLst/>
+              <a:latin typeface="+mn-lt"/>
+              <a:ea typeface="+mn-ea"/>
+              <a:cs typeface="+mn-cs"/>
+            </a:endParaRPr>
+          </a:p>
+          <a:p>
+            <a:r>
+              <a:rPr lang="en-US" sz="1200" b="0" i="0" kern="1200" dirty="0" err="1">
+                <a:solidFill>
+                  <a:schemeClr val="tx1"/>
+                </a:solidFill>
+                <a:effectLst/>
+                <a:latin typeface="+mn-lt"/>
+                <a:ea typeface="+mn-ea"/>
+                <a:cs typeface="+mn-cs"/>
+              </a:rPr>
+              <a:t>Referências</a:t>
+            </a:r>
+            <a:endParaRPr lang="en-US" sz="1200" b="0" i="0" kern="1200" dirty="0">
+              <a:solidFill>
+                <a:schemeClr val="tx1"/>
+              </a:solidFill>
+              <a:effectLst/>
+              <a:latin typeface="+mn-lt"/>
+              <a:ea typeface="+mn-ea"/>
+              <a:cs typeface="+mn-cs"/>
+            </a:endParaRPr>
+          </a:p>
+          <a:p>
+            <a:r>
+              <a:rPr lang="en-US" sz="1200" b="0" i="0" kern="1200" dirty="0">
+                <a:solidFill>
+                  <a:schemeClr val="tx1"/>
+                </a:solidFill>
+                <a:effectLst/>
+                <a:latin typeface="+mn-lt"/>
+                <a:ea typeface="+mn-ea"/>
+                <a:cs typeface="+mn-cs"/>
+              </a:rPr>
+              <a:t>[1] https://ccrma.stanford.edu/~jos/st/Weierstrass_Approximation_Theorem.html</a:t>
+            </a:r>
+          </a:p>
+          <a:p>
+            <a:r>
+              <a:rPr lang="en-US" sz="1200" b="0" i="0" kern="1200" dirty="0">
+                <a:solidFill>
+                  <a:schemeClr val="tx1"/>
+                </a:solidFill>
+                <a:effectLst/>
+                <a:latin typeface="+mn-lt"/>
+                <a:ea typeface="+mn-ea"/>
+                <a:cs typeface="+mn-cs"/>
+              </a:rPr>
+              <a:t>[2] https://people.bath.ac.uk/mw2319/ma30252/sec-approx.html</a:t>
+            </a:r>
+            <a:endParaRPr lang="pt-BR" dirty="0"/>
+          </a:p>
+          <a:p>
+            <a:endParaRPr lang="pt-BR" dirty="0"/>
+          </a:p>
+          <a:p>
+            <a:endParaRPr lang="en-US" dirty="0"/>
+          </a:p>
+        </p:txBody>
+      </p:sp>
+      <p:sp>
+        <p:nvSpPr>
+          <p:cNvPr id="4" name="Slide Number Placeholder 3"/>
+          <p:cNvSpPr>
+            <a:spLocks noGrp="1"/>
+          </p:cNvSpPr>
+          <p:nvPr>
+            <p:ph type="sldNum" sz="quarter" idx="5"/>
+          </p:nvPr>
+        </p:nvSpPr>
+        <p:spPr/>
+        <p:txBody>
+          <a:bodyPr/>
+          <a:lstStyle/>
+          <a:p>
+            <a:fld id="{6FC8D850-966F-45A6-8DE7-15B891E7D40D}" type="slidenum">
+              <a:rPr lang="pt-BR" smtClean="0"/>
+              <a:t>10</a:t>
+            </a:fld>
+            <a:endParaRPr lang="pt-BR"/>
+          </a:p>
+        </p:txBody>
+      </p:sp>
+    </p:spTree>
+    <p:extLst>
+      <p:ext uri="{BB962C8B-B14F-4D97-AF65-F5344CB8AC3E}">
+        <p14:creationId xmlns:p14="http://schemas.microsoft.com/office/powerpoint/2010/main" val="763708746"/>
       </p:ext>
     </p:extLst>
   </p:cSld>
@@ -4821,6 +5129,1942 @@
       </p:grpSpPr>
       <p:sp>
         <p:nvSpPr>
+          <p:cNvPr id="2" name="Título 1">
+            <a:extLst>
+              <a:ext uri="{FF2B5EF4-FFF2-40B4-BE49-F238E27FC236}">
+                <a16:creationId xmlns:a16="http://schemas.microsoft.com/office/drawing/2014/main" id="{B3645331-4B2E-BB50-BF81-FDF8C639EED5}"/>
+              </a:ext>
+            </a:extLst>
+          </p:cNvPr>
+          <p:cNvSpPr>
+            <a:spLocks noGrp="1"/>
+          </p:cNvSpPr>
+          <p:nvPr>
+            <p:ph type="title"/>
+          </p:nvPr>
+        </p:nvSpPr>
+        <p:spPr/>
+        <p:txBody>
+          <a:bodyPr/>
+          <a:lstStyle/>
+          <a:p>
+            <a:r>
+              <a:rPr lang="pt-BR" dirty="0"/>
+              <a:t>Por que linear?</a:t>
+            </a:r>
+          </a:p>
+        </p:txBody>
+      </p:sp>
+      <mc:AlternateContent xmlns:mc="http://schemas.openxmlformats.org/markup-compatibility/2006">
+        <mc:Choice xmlns:a14="http://schemas.microsoft.com/office/drawing/2010/main" Requires="a14">
+          <p:sp>
+            <p:nvSpPr>
+              <p:cNvPr id="3" name="Espaço Reservado para Conteúdo 2">
+                <a:extLst>
+                  <a:ext uri="{FF2B5EF4-FFF2-40B4-BE49-F238E27FC236}">
+                    <a16:creationId xmlns:a16="http://schemas.microsoft.com/office/drawing/2014/main" id="{67745B10-6162-30F7-6050-58C45B781852}"/>
+                  </a:ext>
+                </a:extLst>
+              </p:cNvPr>
+              <p:cNvSpPr>
+                <a:spLocks noGrp="1"/>
+              </p:cNvSpPr>
+              <p:nvPr>
+                <p:ph idx="1"/>
+              </p:nvPr>
+            </p:nvSpPr>
+            <p:spPr>
+              <a:xfrm>
+                <a:off x="838200" y="1825624"/>
+                <a:ext cx="11184082" cy="5032375"/>
+              </a:xfrm>
+            </p:spPr>
+            <p:txBody>
+              <a:bodyPr>
+                <a:normAutofit/>
+              </a:bodyPr>
+              <a:lstStyle/>
+              <a:p>
+                <a:r>
+                  <a:rPr lang="pt-BR" dirty="0"/>
+                  <a:t>Porque a saída da </a:t>
+                </a:r>
+                <a:r>
+                  <a:rPr lang="pt-BR" b="1" i="1" dirty="0"/>
+                  <a:t>função aproximadora</a:t>
+                </a:r>
+                <a:r>
+                  <a:rPr lang="pt-BR" dirty="0"/>
+                  <a:t>, </a:t>
+                </a:r>
+                <a14:m>
+                  <m:oMath xmlns:m="http://schemas.openxmlformats.org/officeDocument/2006/math">
+                    <m:acc>
+                      <m:accPr>
+                        <m:chr m:val="̂"/>
+                        <m:ctrlPr>
+                          <a:rPr lang="pt-BR" i="1" smtClean="0">
+                            <a:latin typeface="Cambria Math" panose="02040503050406030204" pitchFamily="18" charset="0"/>
+                          </a:rPr>
+                        </m:ctrlPr>
+                      </m:accPr>
+                      <m:e>
+                        <m:r>
+                          <a:rPr lang="pt-BR" b="0" i="1" smtClean="0">
+                            <a:latin typeface="Cambria Math" panose="02040503050406030204" pitchFamily="18" charset="0"/>
+                          </a:rPr>
+                          <m:t>𝑦</m:t>
+                        </m:r>
+                      </m:e>
+                    </m:acc>
+                    <m:r>
+                      <a:rPr lang="pt-BR" i="1">
+                        <a:latin typeface="Cambria Math" panose="02040503050406030204" pitchFamily="18" charset="0"/>
+                      </a:rPr>
+                      <m:t>=</m:t>
+                    </m:r>
+                    <m:r>
+                      <a:rPr lang="pt-BR" i="1">
+                        <a:latin typeface="Cambria Math" panose="02040503050406030204" pitchFamily="18" charset="0"/>
+                        <a:ea typeface="Cambria Math" panose="02040503050406030204" pitchFamily="18" charset="0"/>
+                      </a:rPr>
+                      <m:t>h</m:t>
+                    </m:r>
+                    <m:d>
+                      <m:dPr>
+                        <m:ctrlPr>
+                          <a:rPr lang="pt-BR" b="1" i="1">
+                            <a:latin typeface="Cambria Math" panose="02040503050406030204" pitchFamily="18" charset="0"/>
+                            <a:ea typeface="Cambria Math" panose="02040503050406030204" pitchFamily="18" charset="0"/>
+                          </a:rPr>
+                        </m:ctrlPr>
+                      </m:dPr>
+                      <m:e>
+                        <m:r>
+                          <a:rPr lang="pt-BR" b="1" i="1">
+                            <a:latin typeface="Cambria Math" panose="02040503050406030204" pitchFamily="18" charset="0"/>
+                            <a:ea typeface="Cambria Math" panose="02040503050406030204" pitchFamily="18" charset="0"/>
+                          </a:rPr>
+                          <m:t>𝒙</m:t>
+                        </m:r>
+                      </m:e>
+                    </m:d>
+                  </m:oMath>
+                </a14:m>
+                <a:r>
+                  <a:rPr lang="pt-BR" dirty="0"/>
+                  <a:t>, é </a:t>
+                </a:r>
+                <a:r>
+                  <a:rPr lang="pt-BR" b="1" i="1" dirty="0">
+                    <a:solidFill>
+                      <a:srgbClr val="FF0000"/>
+                    </a:solidFill>
+                  </a:rPr>
+                  <a:t>modelada</a:t>
+                </a:r>
+                <a:r>
+                  <a:rPr lang="pt-BR" dirty="0"/>
+                  <a:t> como sendo uma </a:t>
+                </a:r>
+                <a:r>
+                  <a:rPr lang="pt-BR" b="1" i="1" dirty="0">
+                    <a:solidFill>
+                      <a:srgbClr val="00B050"/>
+                    </a:solidFill>
+                  </a:rPr>
+                  <a:t>combinação linear dos atributos</a:t>
+                </a:r>
+                <a:r>
+                  <a:rPr lang="pt-BR" dirty="0"/>
+                  <a:t>, </a:t>
+                </a:r>
+                <a14:m>
+                  <m:oMath xmlns:m="http://schemas.openxmlformats.org/officeDocument/2006/math">
+                    <m:r>
+                      <a:rPr lang="pt-BR" b="1" i="1">
+                        <a:latin typeface="Cambria Math" panose="02040503050406030204" pitchFamily="18" charset="0"/>
+                      </a:rPr>
+                      <m:t>𝒙</m:t>
+                    </m:r>
+                  </m:oMath>
+                </a14:m>
+                <a:r>
+                  <a:rPr lang="pt-BR" dirty="0"/>
+                  <a:t>.</a:t>
+                </a:r>
+              </a:p>
+              <a:p>
+                <a:r>
+                  <a:rPr lang="pt-BR" dirty="0"/>
+                  <a:t>Na regressão linear, usamos </a:t>
+                </a:r>
+                <a:r>
+                  <a:rPr lang="pt-BR" b="1" i="1" dirty="0">
+                    <a:solidFill>
+                      <a:srgbClr val="00B0F0"/>
+                    </a:solidFill>
+                  </a:rPr>
+                  <a:t>funções que são combinações lineares dos atributos em relação a pesos </a:t>
+                </a:r>
+                <a:r>
+                  <a:rPr lang="pt-BR" dirty="0"/>
+                  <a:t>para modelar o relacionamento entre </a:t>
+                </a:r>
+                <a14:m>
+                  <m:oMath xmlns:m="http://schemas.openxmlformats.org/officeDocument/2006/math">
+                    <m:r>
+                      <a:rPr lang="pt-BR" b="1" i="1" smtClean="0">
+                        <a:latin typeface="Cambria Math" panose="02040503050406030204" pitchFamily="18" charset="0"/>
+                      </a:rPr>
+                      <m:t>𝒙</m:t>
+                    </m:r>
+                  </m:oMath>
+                </a14:m>
+                <a:r>
+                  <a:rPr lang="pt-BR" dirty="0"/>
+                  <a:t> e </a:t>
+                </a:r>
+                <a14:m>
+                  <m:oMath xmlns:m="http://schemas.openxmlformats.org/officeDocument/2006/math">
+                    <m:r>
+                      <a:rPr lang="pt-BR" b="0" i="1" smtClean="0">
+                        <a:latin typeface="Cambria Math" panose="02040503050406030204" pitchFamily="18" charset="0"/>
+                      </a:rPr>
+                      <m:t>𝑦</m:t>
+                    </m:r>
+                  </m:oMath>
+                </a14:m>
+                <a:r>
+                  <a:rPr lang="pt-BR" dirty="0"/>
+                  <a:t>.</a:t>
+                </a:r>
+              </a:p>
+              <a:p>
+                <a:r>
+                  <a:rPr lang="pt-BR" dirty="0"/>
+                  <a:t>Em geral, usamos </a:t>
+                </a:r>
+                <a:r>
+                  <a:rPr lang="pt-BR" b="1" dirty="0">
+                    <a:solidFill>
+                      <a:srgbClr val="7030A0"/>
+                    </a:solidFill>
+                  </a:rPr>
+                  <a:t>polinômios</a:t>
+                </a:r>
+                <a:r>
+                  <a:rPr lang="pt-BR" dirty="0"/>
+                  <a:t> para modelar essa relação.</a:t>
+                </a:r>
+              </a:p>
+              <a:p>
+                <a:r>
+                  <a:rPr lang="pt-BR" dirty="0"/>
+                  <a:t>Pois segundo o teorema da aproximação de </a:t>
+                </a:r>
+                <a:r>
+                  <a:rPr lang="pt-BR" b="1" i="1" dirty="0">
+                    <a:solidFill>
+                      <a:srgbClr val="00B050"/>
+                    </a:solidFill>
+                  </a:rPr>
+                  <a:t>Stone-</a:t>
+                </a:r>
+                <a:r>
+                  <a:rPr lang="pt-BR" b="1" i="1" dirty="0" err="1">
+                    <a:solidFill>
+                      <a:srgbClr val="00B050"/>
+                    </a:solidFill>
+                  </a:rPr>
+                  <a:t>Weierstrass</a:t>
+                </a:r>
+                <a:r>
+                  <a:rPr lang="pt-BR" dirty="0"/>
+                  <a:t> “</a:t>
+                </a:r>
+                <a:r>
+                  <a:rPr lang="pt-BR" i="1" dirty="0"/>
+                  <a:t>qualquer função contínua no intervalo fechado [a, b] pode ser uniformemente aproximada por um </a:t>
+                </a:r>
+                <a:r>
+                  <a:rPr lang="pt-BR" b="1" i="1" dirty="0">
+                    <a:solidFill>
+                      <a:schemeClr val="accent2"/>
+                    </a:solidFill>
+                  </a:rPr>
+                  <a:t>polinômio</a:t>
+                </a:r>
+                <a:r>
+                  <a:rPr lang="pt-BR" i="1" dirty="0"/>
+                  <a:t>”.</a:t>
+                </a:r>
+              </a:p>
+            </p:txBody>
+          </p:sp>
+        </mc:Choice>
+        <mc:Fallback>
+          <p:sp>
+            <p:nvSpPr>
+              <p:cNvPr id="3" name="Espaço Reservado para Conteúdo 2">
+                <a:extLst>
+                  <a:ext uri="{FF2B5EF4-FFF2-40B4-BE49-F238E27FC236}">
+                    <a16:creationId xmlns:a16="http://schemas.microsoft.com/office/drawing/2014/main" id="{67745B10-6162-30F7-6050-58C45B781852}"/>
+                  </a:ext>
+                </a:extLst>
+              </p:cNvPr>
+              <p:cNvSpPr>
+                <a:spLocks noGrp="1" noRot="1" noChangeAspect="1" noMove="1" noResize="1" noEditPoints="1" noAdjustHandles="1" noChangeArrowheads="1" noChangeShapeType="1" noTextEdit="1"/>
+              </p:cNvSpPr>
+              <p:nvPr>
+                <p:ph idx="1"/>
+              </p:nvPr>
+            </p:nvSpPr>
+            <p:spPr>
+              <a:xfrm>
+                <a:off x="838200" y="1825624"/>
+                <a:ext cx="11184082" cy="5032375"/>
+              </a:xfrm>
+              <a:blipFill>
+                <a:blip r:embed="rId3"/>
+                <a:stretch>
+                  <a:fillRect l="-981" t="-1937" r="-109"/>
+                </a:stretch>
+              </a:blipFill>
+            </p:spPr>
+            <p:txBody>
+              <a:bodyPr/>
+              <a:lstStyle/>
+              <a:p>
+                <a:r>
+                  <a:rPr lang="en-US">
+                    <a:noFill/>
+                  </a:rPr>
+                  <a:t> </a:t>
+                </a:r>
+              </a:p>
+            </p:txBody>
+          </p:sp>
+        </mc:Fallback>
+      </mc:AlternateContent>
+    </p:spTree>
+    <p:extLst>
+      <p:ext uri="{BB962C8B-B14F-4D97-AF65-F5344CB8AC3E}">
+        <p14:creationId xmlns:p14="http://schemas.microsoft.com/office/powerpoint/2010/main" val="3982877338"/>
+      </p:ext>
+    </p:extLst>
+  </p:cSld>
+  <p:clrMapOvr>
+    <a:masterClrMapping/>
+  </p:clrMapOvr>
+</p:sld>
+</file>
+
+<file path=ppt/slides/slide11.xml><?xml version="1.0" encoding="utf-8"?>
+<p:sld xmlns:a="http://schemas.openxmlformats.org/drawingml/2006/main" xmlns:r="http://schemas.openxmlformats.org/officeDocument/2006/relationships" xmlns:p="http://schemas.openxmlformats.org/presentationml/2006/main">
+  <p:cSld>
+    <p:spTree>
+      <p:nvGrpSpPr>
+        <p:cNvPr id="1" name="">
+          <a:extLst>
+            <a:ext uri="{FF2B5EF4-FFF2-40B4-BE49-F238E27FC236}">
+              <a16:creationId xmlns:a16="http://schemas.microsoft.com/office/drawing/2014/main" id="{6050803C-34C9-CCF4-6673-47CCCF2C74AF}"/>
+            </a:ext>
+          </a:extLst>
+        </p:cNvPr>
+        <p:cNvGrpSpPr/>
+        <p:nvPr/>
+      </p:nvGrpSpPr>
+      <p:grpSpPr>
+        <a:xfrm>
+          <a:off x="0" y="0"/>
+          <a:ext cx="0" cy="0"/>
+          <a:chOff x="0" y="0"/>
+          <a:chExt cx="0" cy="0"/>
+        </a:xfrm>
+      </p:grpSpPr>
+      <p:sp>
+        <p:nvSpPr>
+          <p:cNvPr id="2" name="Título 1">
+            <a:extLst>
+              <a:ext uri="{FF2B5EF4-FFF2-40B4-BE49-F238E27FC236}">
+                <a16:creationId xmlns:a16="http://schemas.microsoft.com/office/drawing/2014/main" id="{E7B6B386-02B2-D964-73F3-196F9F79BAF2}"/>
+              </a:ext>
+            </a:extLst>
+          </p:cNvPr>
+          <p:cNvSpPr>
+            <a:spLocks noGrp="1"/>
+          </p:cNvSpPr>
+          <p:nvPr>
+            <p:ph type="title"/>
+          </p:nvPr>
+        </p:nvSpPr>
+        <p:spPr/>
+        <p:txBody>
+          <a:bodyPr/>
+          <a:lstStyle/>
+          <a:p>
+            <a:r>
+              <a:rPr lang="pt-BR" dirty="0"/>
+              <a:t>Por que linear?</a:t>
+            </a:r>
+          </a:p>
+        </p:txBody>
+      </p:sp>
+      <mc:AlternateContent xmlns:mc="http://schemas.openxmlformats.org/markup-compatibility/2006">
+        <mc:Choice xmlns:a14="http://schemas.microsoft.com/office/drawing/2010/main" Requires="a14">
+          <p:sp>
+            <p:nvSpPr>
+              <p:cNvPr id="3" name="Espaço Reservado para Conteúdo 2">
+                <a:extLst>
+                  <a:ext uri="{FF2B5EF4-FFF2-40B4-BE49-F238E27FC236}">
+                    <a16:creationId xmlns:a16="http://schemas.microsoft.com/office/drawing/2014/main" id="{9C482631-ECEA-B4D7-2D72-82A636953ACA}"/>
+                  </a:ext>
+                </a:extLst>
+              </p:cNvPr>
+              <p:cNvSpPr>
+                <a:spLocks noGrp="1"/>
+              </p:cNvSpPr>
+              <p:nvPr>
+                <p:ph idx="1"/>
+              </p:nvPr>
+            </p:nvSpPr>
+            <p:spPr>
+              <a:xfrm>
+                <a:off x="4847422" y="1825624"/>
+                <a:ext cx="7174860" cy="5032375"/>
+              </a:xfrm>
+            </p:spPr>
+            <p:txBody>
+              <a:bodyPr>
+                <a:normAutofit lnSpcReduction="10000"/>
+              </a:bodyPr>
+              <a:lstStyle/>
+              <a:p>
+                <a:r>
+                  <a:rPr lang="pt-BR" dirty="0"/>
+                  <a:t>Podemos aproximar</a:t>
+                </a:r>
+                <a:r>
+                  <a:rPr lang="pt-BR" b="1" i="1" dirty="0">
+                    <a:solidFill>
+                      <a:srgbClr val="00B050"/>
+                    </a:solidFill>
+                  </a:rPr>
+                  <a:t> </a:t>
+                </a:r>
+                <a:r>
+                  <a:rPr lang="pt-BR" b="1" i="1" dirty="0">
+                    <a:solidFill>
+                      <a:srgbClr val="0070C0"/>
+                    </a:solidFill>
+                  </a:rPr>
+                  <a:t>qualquer tipo de mapeamento (linear ou não linear) </a:t>
+                </a:r>
+                <a:r>
+                  <a:rPr lang="pt-BR" dirty="0"/>
+                  <a:t>com</a:t>
+                </a:r>
+                <a:r>
+                  <a:rPr lang="pt-BR" b="1" i="1" dirty="0">
+                    <a:solidFill>
+                      <a:srgbClr val="00B050"/>
+                    </a:solidFill>
+                  </a:rPr>
+                  <a:t> polinômios</a:t>
+                </a:r>
+                <a:r>
+                  <a:rPr lang="pt-BR" dirty="0"/>
+                  <a:t>, bastando apenas </a:t>
+                </a:r>
+                <a:r>
+                  <a:rPr lang="pt-BR" b="1" i="1" dirty="0">
+                    <a:solidFill>
+                      <a:srgbClr val="7030A0"/>
+                    </a:solidFill>
+                  </a:rPr>
+                  <a:t>encontrar o grau (ou ordem) ideal</a:t>
+                </a:r>
+                <a:r>
+                  <a:rPr lang="pt-BR" dirty="0"/>
+                  <a:t>.</a:t>
+                </a:r>
+              </a:p>
+              <a:p>
+                <a:r>
+                  <a:rPr lang="pt-BR" dirty="0"/>
+                  <a:t>Por exemplo, com </a:t>
+                </a:r>
+                <a:r>
+                  <a:rPr lang="pt-BR" b="1" i="1" dirty="0">
+                    <a:solidFill>
+                      <a:schemeClr val="accent2"/>
+                    </a:solidFill>
+                  </a:rPr>
+                  <a:t>um atributo</a:t>
+                </a:r>
+                <a:r>
+                  <a:rPr lang="pt-BR" dirty="0"/>
+                  <a:t>, </a:t>
+                </a:r>
+                <a14:m>
+                  <m:oMath xmlns:m="http://schemas.openxmlformats.org/officeDocument/2006/math">
+                    <m:sSub>
+                      <m:sSubPr>
+                        <m:ctrlPr>
+                          <a:rPr lang="pt-BR" i="1" smtClean="0">
+                            <a:latin typeface="Cambria Math" panose="02040503050406030204" pitchFamily="18" charset="0"/>
+                            <a:ea typeface="Cambria Math" panose="02040503050406030204" pitchFamily="18" charset="0"/>
+                          </a:rPr>
+                        </m:ctrlPr>
+                      </m:sSubPr>
+                      <m:e>
+                        <m:r>
+                          <a:rPr lang="pt-BR" i="1">
+                            <a:latin typeface="Cambria Math" panose="02040503050406030204" pitchFamily="18" charset="0"/>
+                            <a:ea typeface="Cambria Math" panose="02040503050406030204" pitchFamily="18" charset="0"/>
+                          </a:rPr>
+                          <m:t>𝑥</m:t>
+                        </m:r>
+                      </m:e>
+                      <m:sub>
+                        <m:r>
+                          <a:rPr lang="pt-BR" i="1">
+                            <a:latin typeface="Cambria Math" panose="02040503050406030204" pitchFamily="18" charset="0"/>
+                            <a:ea typeface="Cambria Math" panose="02040503050406030204" pitchFamily="18" charset="0"/>
+                          </a:rPr>
+                          <m:t>1</m:t>
+                        </m:r>
+                      </m:sub>
+                    </m:sSub>
+                  </m:oMath>
+                </a14:m>
+                <a:r>
+                  <a:rPr lang="pt-BR" dirty="0"/>
+                  <a:t>, temos a equação de uma </a:t>
+                </a:r>
+                <a:r>
+                  <a:rPr lang="pt-BR" b="1" i="1" dirty="0"/>
+                  <a:t>reta</a:t>
+                </a:r>
+                <a:r>
+                  <a:rPr lang="pt-BR" dirty="0"/>
+                  <a:t>:</a:t>
+                </a:r>
+              </a:p>
+              <a:p>
+                <a:pPr marL="457200" lvl="1" indent="0" algn="ctr">
+                  <a:buNone/>
+                </a:pPr>
+                <a14:m>
+                  <m:oMath xmlns:m="http://schemas.openxmlformats.org/officeDocument/2006/math">
+                    <m:acc>
+                      <m:accPr>
+                        <m:chr m:val="̂"/>
+                        <m:ctrlPr>
+                          <a:rPr lang="pt-BR" i="1">
+                            <a:latin typeface="Cambria Math" panose="02040503050406030204" pitchFamily="18" charset="0"/>
+                          </a:rPr>
+                        </m:ctrlPr>
+                      </m:accPr>
+                      <m:e>
+                        <m:r>
+                          <a:rPr lang="pt-BR" i="1">
+                            <a:latin typeface="Cambria Math" panose="02040503050406030204" pitchFamily="18" charset="0"/>
+                          </a:rPr>
+                          <m:t>𝑦</m:t>
+                        </m:r>
+                      </m:e>
+                    </m:acc>
+                    <m:r>
+                      <a:rPr lang="pt-BR" b="0" i="1" smtClean="0">
+                        <a:latin typeface="Cambria Math" panose="02040503050406030204" pitchFamily="18" charset="0"/>
+                      </a:rPr>
+                      <m:t>=</m:t>
+                    </m:r>
+                    <m:r>
+                      <a:rPr lang="pt-BR" i="1">
+                        <a:latin typeface="Cambria Math" panose="02040503050406030204" pitchFamily="18" charset="0"/>
+                        <a:ea typeface="Cambria Math" panose="02040503050406030204" pitchFamily="18" charset="0"/>
+                      </a:rPr>
+                      <m:t>h</m:t>
+                    </m:r>
+                    <m:d>
+                      <m:dPr>
+                        <m:ctrlPr>
+                          <a:rPr lang="pt-BR" b="1" i="1">
+                            <a:latin typeface="Cambria Math" panose="02040503050406030204" pitchFamily="18" charset="0"/>
+                            <a:ea typeface="Cambria Math" panose="02040503050406030204" pitchFamily="18" charset="0"/>
+                          </a:rPr>
+                        </m:ctrlPr>
+                      </m:dPr>
+                      <m:e>
+                        <m:r>
+                          <a:rPr lang="pt-BR" b="1" i="1">
+                            <a:latin typeface="Cambria Math" panose="02040503050406030204" pitchFamily="18" charset="0"/>
+                            <a:ea typeface="Cambria Math" panose="02040503050406030204" pitchFamily="18" charset="0"/>
+                          </a:rPr>
+                          <m:t>𝒙</m:t>
+                        </m:r>
+                      </m:e>
+                    </m:d>
+                    <m:r>
+                      <a:rPr lang="pt-BR" b="1" i="1">
+                        <a:latin typeface="Cambria Math" panose="02040503050406030204" pitchFamily="18" charset="0"/>
+                        <a:ea typeface="Cambria Math" panose="02040503050406030204" pitchFamily="18" charset="0"/>
+                      </a:rPr>
+                      <m:t>= </m:t>
+                    </m:r>
+                    <m:sSub>
+                      <m:sSubPr>
+                        <m:ctrlPr>
+                          <a:rPr lang="pt-BR" i="1">
+                            <a:latin typeface="Cambria Math" panose="02040503050406030204" pitchFamily="18" charset="0"/>
+                            <a:ea typeface="Cambria Math" panose="02040503050406030204" pitchFamily="18" charset="0"/>
+                          </a:rPr>
+                        </m:ctrlPr>
+                      </m:sSubPr>
+                      <m:e>
+                        <m:r>
+                          <a:rPr lang="pt-BR" i="1">
+                            <a:latin typeface="Cambria Math" panose="02040503050406030204" pitchFamily="18" charset="0"/>
+                            <a:ea typeface="Cambria Math" panose="02040503050406030204" pitchFamily="18" charset="0"/>
+                          </a:rPr>
+                          <m:t>𝑎</m:t>
+                        </m:r>
+                      </m:e>
+                      <m:sub>
+                        <m:r>
+                          <a:rPr lang="pt-BR" i="1">
+                            <a:latin typeface="Cambria Math" panose="02040503050406030204" pitchFamily="18" charset="0"/>
+                            <a:ea typeface="Cambria Math" panose="02040503050406030204" pitchFamily="18" charset="0"/>
+                          </a:rPr>
+                          <m:t>0</m:t>
+                        </m:r>
+                      </m:sub>
+                    </m:sSub>
+                  </m:oMath>
+                </a14:m>
+                <a:r>
+                  <a:rPr lang="pt-BR" dirty="0"/>
+                  <a:t> + </a:t>
+                </a:r>
+                <a14:m>
+                  <m:oMath xmlns:m="http://schemas.openxmlformats.org/officeDocument/2006/math">
+                    <m:sSub>
+                      <m:sSubPr>
+                        <m:ctrlPr>
+                          <a:rPr lang="pt-BR" i="1">
+                            <a:latin typeface="Cambria Math" panose="02040503050406030204" pitchFamily="18" charset="0"/>
+                            <a:ea typeface="Cambria Math" panose="02040503050406030204" pitchFamily="18" charset="0"/>
+                          </a:rPr>
+                        </m:ctrlPr>
+                      </m:sSubPr>
+                      <m:e>
+                        <m:r>
+                          <a:rPr lang="pt-BR" i="1">
+                            <a:latin typeface="Cambria Math" panose="02040503050406030204" pitchFamily="18" charset="0"/>
+                            <a:ea typeface="Cambria Math" panose="02040503050406030204" pitchFamily="18" charset="0"/>
+                          </a:rPr>
+                          <m:t>𝑎</m:t>
+                        </m:r>
+                      </m:e>
+                      <m:sub>
+                        <m:r>
+                          <a:rPr lang="pt-BR" i="1">
+                            <a:latin typeface="Cambria Math" panose="02040503050406030204" pitchFamily="18" charset="0"/>
+                            <a:ea typeface="Cambria Math" panose="02040503050406030204" pitchFamily="18" charset="0"/>
+                          </a:rPr>
+                          <m:t>1</m:t>
+                        </m:r>
+                      </m:sub>
+                    </m:sSub>
+                    <m:sSub>
+                      <m:sSubPr>
+                        <m:ctrlPr>
+                          <a:rPr lang="pt-BR" i="1">
+                            <a:latin typeface="Cambria Math" panose="02040503050406030204" pitchFamily="18" charset="0"/>
+                            <a:ea typeface="Cambria Math" panose="02040503050406030204" pitchFamily="18" charset="0"/>
+                          </a:rPr>
+                        </m:ctrlPr>
+                      </m:sSubPr>
+                      <m:e>
+                        <m:r>
+                          <a:rPr lang="pt-BR" i="1">
+                            <a:latin typeface="Cambria Math" panose="02040503050406030204" pitchFamily="18" charset="0"/>
+                            <a:ea typeface="Cambria Math" panose="02040503050406030204" pitchFamily="18" charset="0"/>
+                          </a:rPr>
+                          <m:t>𝑥</m:t>
+                        </m:r>
+                      </m:e>
+                      <m:sub>
+                        <m:r>
+                          <a:rPr lang="pt-BR" i="1">
+                            <a:latin typeface="Cambria Math" panose="02040503050406030204" pitchFamily="18" charset="0"/>
+                            <a:ea typeface="Cambria Math" panose="02040503050406030204" pitchFamily="18" charset="0"/>
+                          </a:rPr>
+                          <m:t>1</m:t>
+                        </m:r>
+                      </m:sub>
+                    </m:sSub>
+                  </m:oMath>
+                </a14:m>
+                <a:r>
+                  <a:rPr lang="pt-BR" dirty="0"/>
+                  <a:t>.</a:t>
+                </a:r>
+              </a:p>
+              <a:p>
+                <a:r>
+                  <a:rPr lang="pt-BR" dirty="0"/>
+                  <a:t>Já com </a:t>
+                </a:r>
+                <a:r>
+                  <a:rPr lang="pt-BR" b="1" i="1" dirty="0">
+                    <a:solidFill>
+                      <a:schemeClr val="accent2"/>
+                    </a:solidFill>
+                  </a:rPr>
+                  <a:t>dois atributos</a:t>
+                </a:r>
+                <a:r>
+                  <a:rPr lang="pt-BR" dirty="0"/>
+                  <a:t>, </a:t>
+                </a:r>
+                <a14:m>
+                  <m:oMath xmlns:m="http://schemas.openxmlformats.org/officeDocument/2006/math">
+                    <m:sSub>
+                      <m:sSubPr>
+                        <m:ctrlPr>
+                          <a:rPr lang="pt-BR" i="1" smtClean="0">
+                            <a:latin typeface="Cambria Math" panose="02040503050406030204" pitchFamily="18" charset="0"/>
+                            <a:ea typeface="Cambria Math" panose="02040503050406030204" pitchFamily="18" charset="0"/>
+                          </a:rPr>
+                        </m:ctrlPr>
+                      </m:sSubPr>
+                      <m:e>
+                        <m:r>
+                          <a:rPr lang="pt-BR" i="1">
+                            <a:latin typeface="Cambria Math" panose="02040503050406030204" pitchFamily="18" charset="0"/>
+                            <a:ea typeface="Cambria Math" panose="02040503050406030204" pitchFamily="18" charset="0"/>
+                          </a:rPr>
+                          <m:t>𝑥</m:t>
+                        </m:r>
+                      </m:e>
+                      <m:sub>
+                        <m:r>
+                          <a:rPr lang="pt-BR" i="1">
+                            <a:latin typeface="Cambria Math" panose="02040503050406030204" pitchFamily="18" charset="0"/>
+                            <a:ea typeface="Cambria Math" panose="02040503050406030204" pitchFamily="18" charset="0"/>
+                          </a:rPr>
+                          <m:t>1</m:t>
+                        </m:r>
+                      </m:sub>
+                    </m:sSub>
+                  </m:oMath>
+                </a14:m>
+                <a:r>
+                  <a:rPr lang="pt-BR" dirty="0"/>
+                  <a:t>e </a:t>
+                </a:r>
+                <a14:m>
+                  <m:oMath xmlns:m="http://schemas.openxmlformats.org/officeDocument/2006/math">
+                    <m:sSub>
+                      <m:sSubPr>
+                        <m:ctrlPr>
+                          <a:rPr lang="pt-BR" i="1">
+                            <a:latin typeface="Cambria Math" panose="02040503050406030204" pitchFamily="18" charset="0"/>
+                            <a:ea typeface="Cambria Math" panose="02040503050406030204" pitchFamily="18" charset="0"/>
+                          </a:rPr>
+                        </m:ctrlPr>
+                      </m:sSubPr>
+                      <m:e>
+                        <m:r>
+                          <a:rPr lang="pt-BR" i="1">
+                            <a:latin typeface="Cambria Math" panose="02040503050406030204" pitchFamily="18" charset="0"/>
+                            <a:ea typeface="Cambria Math" panose="02040503050406030204" pitchFamily="18" charset="0"/>
+                          </a:rPr>
+                          <m:t>𝑥</m:t>
+                        </m:r>
+                      </m:e>
+                      <m:sub>
+                        <m:r>
+                          <a:rPr lang="pt-BR" b="0" i="1" smtClean="0">
+                            <a:latin typeface="Cambria Math" panose="02040503050406030204" pitchFamily="18" charset="0"/>
+                            <a:ea typeface="Cambria Math" panose="02040503050406030204" pitchFamily="18" charset="0"/>
+                          </a:rPr>
+                          <m:t>2</m:t>
+                        </m:r>
+                      </m:sub>
+                    </m:sSub>
+                  </m:oMath>
+                </a14:m>
+                <a:r>
+                  <a:rPr lang="pt-BR" dirty="0"/>
+                  <a:t>, podemos ter a equação de um </a:t>
+                </a:r>
+                <a:r>
+                  <a:rPr lang="pt-BR" b="1" i="1" dirty="0"/>
+                  <a:t>plano</a:t>
+                </a:r>
+                <a:r>
+                  <a:rPr lang="pt-BR" dirty="0"/>
+                  <a:t>:</a:t>
+                </a:r>
+              </a:p>
+              <a:p>
+                <a:pPr marL="457200" lvl="1" indent="0" algn="ctr">
+                  <a:buNone/>
+                </a:pPr>
+                <a14:m>
+                  <m:oMath xmlns:m="http://schemas.openxmlformats.org/officeDocument/2006/math">
+                    <m:acc>
+                      <m:accPr>
+                        <m:chr m:val="̂"/>
+                        <m:ctrlPr>
+                          <a:rPr lang="pt-BR" i="1">
+                            <a:latin typeface="Cambria Math" panose="02040503050406030204" pitchFamily="18" charset="0"/>
+                          </a:rPr>
+                        </m:ctrlPr>
+                      </m:accPr>
+                      <m:e>
+                        <m:r>
+                          <a:rPr lang="pt-BR" i="1">
+                            <a:latin typeface="Cambria Math" panose="02040503050406030204" pitchFamily="18" charset="0"/>
+                          </a:rPr>
+                          <m:t>𝑦</m:t>
+                        </m:r>
+                      </m:e>
+                    </m:acc>
+                    <m:r>
+                      <a:rPr lang="pt-BR" b="0" i="1" smtClean="0">
+                        <a:latin typeface="Cambria Math" panose="02040503050406030204" pitchFamily="18" charset="0"/>
+                      </a:rPr>
+                      <m:t>=</m:t>
+                    </m:r>
+                    <m:r>
+                      <a:rPr lang="pt-BR" i="1">
+                        <a:latin typeface="Cambria Math" panose="02040503050406030204" pitchFamily="18" charset="0"/>
+                        <a:ea typeface="Cambria Math" panose="02040503050406030204" pitchFamily="18" charset="0"/>
+                      </a:rPr>
+                      <m:t>h</m:t>
+                    </m:r>
+                    <m:d>
+                      <m:dPr>
+                        <m:ctrlPr>
+                          <a:rPr lang="pt-BR" b="1" i="1">
+                            <a:latin typeface="Cambria Math" panose="02040503050406030204" pitchFamily="18" charset="0"/>
+                            <a:ea typeface="Cambria Math" panose="02040503050406030204" pitchFamily="18" charset="0"/>
+                          </a:rPr>
+                        </m:ctrlPr>
+                      </m:dPr>
+                      <m:e>
+                        <m:r>
+                          <a:rPr lang="pt-BR" b="1" i="1">
+                            <a:latin typeface="Cambria Math" panose="02040503050406030204" pitchFamily="18" charset="0"/>
+                            <a:ea typeface="Cambria Math" panose="02040503050406030204" pitchFamily="18" charset="0"/>
+                          </a:rPr>
+                          <m:t>𝒙</m:t>
+                        </m:r>
+                      </m:e>
+                    </m:d>
+                    <m:r>
+                      <a:rPr lang="pt-BR" b="1" i="1">
+                        <a:latin typeface="Cambria Math" panose="02040503050406030204" pitchFamily="18" charset="0"/>
+                        <a:ea typeface="Cambria Math" panose="02040503050406030204" pitchFamily="18" charset="0"/>
+                      </a:rPr>
+                      <m:t>= </m:t>
+                    </m:r>
+                    <m:sSub>
+                      <m:sSubPr>
+                        <m:ctrlPr>
+                          <a:rPr lang="pt-BR" i="1">
+                            <a:latin typeface="Cambria Math" panose="02040503050406030204" pitchFamily="18" charset="0"/>
+                            <a:ea typeface="Cambria Math" panose="02040503050406030204" pitchFamily="18" charset="0"/>
+                          </a:rPr>
+                        </m:ctrlPr>
+                      </m:sSubPr>
+                      <m:e>
+                        <m:r>
+                          <a:rPr lang="pt-BR" i="1">
+                            <a:latin typeface="Cambria Math" panose="02040503050406030204" pitchFamily="18" charset="0"/>
+                            <a:ea typeface="Cambria Math" panose="02040503050406030204" pitchFamily="18" charset="0"/>
+                          </a:rPr>
+                          <m:t>𝑎</m:t>
+                        </m:r>
+                      </m:e>
+                      <m:sub>
+                        <m:r>
+                          <a:rPr lang="pt-BR" i="1">
+                            <a:latin typeface="Cambria Math" panose="02040503050406030204" pitchFamily="18" charset="0"/>
+                            <a:ea typeface="Cambria Math" panose="02040503050406030204" pitchFamily="18" charset="0"/>
+                          </a:rPr>
+                          <m:t>0</m:t>
+                        </m:r>
+                      </m:sub>
+                    </m:sSub>
+                  </m:oMath>
+                </a14:m>
+                <a:r>
+                  <a:rPr lang="pt-BR" dirty="0"/>
+                  <a:t> + </a:t>
+                </a:r>
+                <a14:m>
+                  <m:oMath xmlns:m="http://schemas.openxmlformats.org/officeDocument/2006/math">
+                    <m:sSub>
+                      <m:sSubPr>
+                        <m:ctrlPr>
+                          <a:rPr lang="pt-BR" i="1">
+                            <a:latin typeface="Cambria Math" panose="02040503050406030204" pitchFamily="18" charset="0"/>
+                            <a:ea typeface="Cambria Math" panose="02040503050406030204" pitchFamily="18" charset="0"/>
+                          </a:rPr>
+                        </m:ctrlPr>
+                      </m:sSubPr>
+                      <m:e>
+                        <m:r>
+                          <a:rPr lang="pt-BR" i="1">
+                            <a:latin typeface="Cambria Math" panose="02040503050406030204" pitchFamily="18" charset="0"/>
+                            <a:ea typeface="Cambria Math" panose="02040503050406030204" pitchFamily="18" charset="0"/>
+                          </a:rPr>
+                          <m:t>𝑎</m:t>
+                        </m:r>
+                      </m:e>
+                      <m:sub>
+                        <m:r>
+                          <a:rPr lang="pt-BR" i="1">
+                            <a:latin typeface="Cambria Math" panose="02040503050406030204" pitchFamily="18" charset="0"/>
+                            <a:ea typeface="Cambria Math" panose="02040503050406030204" pitchFamily="18" charset="0"/>
+                          </a:rPr>
+                          <m:t>1</m:t>
+                        </m:r>
+                      </m:sub>
+                    </m:sSub>
+                    <m:sSub>
+                      <m:sSubPr>
+                        <m:ctrlPr>
+                          <a:rPr lang="pt-BR" i="1">
+                            <a:latin typeface="Cambria Math" panose="02040503050406030204" pitchFamily="18" charset="0"/>
+                            <a:ea typeface="Cambria Math" panose="02040503050406030204" pitchFamily="18" charset="0"/>
+                          </a:rPr>
+                        </m:ctrlPr>
+                      </m:sSubPr>
+                      <m:e>
+                        <m:r>
+                          <a:rPr lang="pt-BR" i="1">
+                            <a:latin typeface="Cambria Math" panose="02040503050406030204" pitchFamily="18" charset="0"/>
+                            <a:ea typeface="Cambria Math" panose="02040503050406030204" pitchFamily="18" charset="0"/>
+                          </a:rPr>
+                          <m:t>𝑥</m:t>
+                        </m:r>
+                      </m:e>
+                      <m:sub>
+                        <m:r>
+                          <a:rPr lang="pt-BR" i="1">
+                            <a:latin typeface="Cambria Math" panose="02040503050406030204" pitchFamily="18" charset="0"/>
+                            <a:ea typeface="Cambria Math" panose="02040503050406030204" pitchFamily="18" charset="0"/>
+                          </a:rPr>
+                          <m:t>1</m:t>
+                        </m:r>
+                      </m:sub>
+                    </m:sSub>
+                  </m:oMath>
+                </a14:m>
+                <a:r>
+                  <a:rPr lang="pt-BR" dirty="0"/>
+                  <a:t> + </a:t>
+                </a:r>
+                <a14:m>
+                  <m:oMath xmlns:m="http://schemas.openxmlformats.org/officeDocument/2006/math">
+                    <m:sSub>
+                      <m:sSubPr>
+                        <m:ctrlPr>
+                          <a:rPr lang="pt-BR" i="1">
+                            <a:latin typeface="Cambria Math" panose="02040503050406030204" pitchFamily="18" charset="0"/>
+                            <a:ea typeface="Cambria Math" panose="02040503050406030204" pitchFamily="18" charset="0"/>
+                          </a:rPr>
+                        </m:ctrlPr>
+                      </m:sSubPr>
+                      <m:e>
+                        <m:r>
+                          <a:rPr lang="pt-BR" i="1">
+                            <a:latin typeface="Cambria Math" panose="02040503050406030204" pitchFamily="18" charset="0"/>
+                            <a:ea typeface="Cambria Math" panose="02040503050406030204" pitchFamily="18" charset="0"/>
+                          </a:rPr>
+                          <m:t>𝑎</m:t>
+                        </m:r>
+                      </m:e>
+                      <m:sub>
+                        <m:r>
+                          <a:rPr lang="pt-BR" b="0" i="1" smtClean="0">
+                            <a:latin typeface="Cambria Math" panose="02040503050406030204" pitchFamily="18" charset="0"/>
+                            <a:ea typeface="Cambria Math" panose="02040503050406030204" pitchFamily="18" charset="0"/>
+                          </a:rPr>
+                          <m:t>2</m:t>
+                        </m:r>
+                      </m:sub>
+                    </m:sSub>
+                    <m:sSub>
+                      <m:sSubPr>
+                        <m:ctrlPr>
+                          <a:rPr lang="pt-BR" i="1" smtClean="0">
+                            <a:latin typeface="Cambria Math" panose="02040503050406030204" pitchFamily="18" charset="0"/>
+                            <a:ea typeface="Cambria Math" panose="02040503050406030204" pitchFamily="18" charset="0"/>
+                          </a:rPr>
+                        </m:ctrlPr>
+                      </m:sSubPr>
+                      <m:e>
+                        <m:r>
+                          <a:rPr lang="pt-BR" i="1">
+                            <a:latin typeface="Cambria Math" panose="02040503050406030204" pitchFamily="18" charset="0"/>
+                            <a:ea typeface="Cambria Math" panose="02040503050406030204" pitchFamily="18" charset="0"/>
+                          </a:rPr>
+                          <m:t>𝑥</m:t>
+                        </m:r>
+                      </m:e>
+                      <m:sub>
+                        <m:r>
+                          <a:rPr lang="pt-BR" b="0" i="1" smtClean="0">
+                            <a:latin typeface="Cambria Math" panose="02040503050406030204" pitchFamily="18" charset="0"/>
+                            <a:ea typeface="Cambria Math" panose="02040503050406030204" pitchFamily="18" charset="0"/>
+                          </a:rPr>
+                          <m:t>2</m:t>
+                        </m:r>
+                      </m:sub>
+                    </m:sSub>
+                  </m:oMath>
+                </a14:m>
+                <a:r>
+                  <a:rPr lang="pt-BR" dirty="0"/>
+                  <a:t>.</a:t>
+                </a:r>
+              </a:p>
+              <a:p>
+                <a:pPr marL="457200" lvl="1" indent="0" algn="ctr">
+                  <a:buNone/>
+                </a:pPr>
+                <a:endParaRPr lang="pt-BR" dirty="0"/>
+              </a:p>
+              <a:p>
+                <a:pPr marL="457200" lvl="1" indent="0" algn="ctr">
+                  <a:buNone/>
+                </a:pPr>
+                <a14:m>
+                  <m:oMathPara xmlns:m="http://schemas.openxmlformats.org/officeDocument/2006/math">
+                    <m:oMathParaPr>
+                      <m:jc m:val="centerGroup"/>
+                    </m:oMathParaPr>
+                    <m:oMath xmlns:m="http://schemas.openxmlformats.org/officeDocument/2006/math">
+                      <m:sSub>
+                        <m:sSubPr>
+                          <m:ctrlPr>
+                            <a:rPr lang="pt-BR" i="1">
+                              <a:latin typeface="Cambria Math" panose="02040503050406030204" pitchFamily="18" charset="0"/>
+                            </a:rPr>
+                          </m:ctrlPr>
+                        </m:sSubPr>
+                        <m:e>
+                          <m:r>
+                            <a:rPr lang="pt-BR" i="1">
+                              <a:latin typeface="Cambria Math" panose="02040503050406030204" pitchFamily="18" charset="0"/>
+                            </a:rPr>
+                            <m:t>𝑦</m:t>
+                          </m:r>
+                          <m:d>
+                            <m:dPr>
+                              <m:ctrlPr>
+                                <a:rPr lang="pt-BR" i="1">
+                                  <a:latin typeface="Cambria Math" panose="02040503050406030204" pitchFamily="18" charset="0"/>
+                                </a:rPr>
+                              </m:ctrlPr>
+                            </m:dPr>
+                            <m:e>
+                              <m:sSub>
+                                <m:sSubPr>
+                                  <m:ctrlPr>
+                                    <a:rPr lang="pt-BR" i="1">
+                                      <a:latin typeface="Cambria Math" panose="02040503050406030204" pitchFamily="18" charset="0"/>
+                                    </a:rPr>
+                                  </m:ctrlPr>
+                                </m:sSubPr>
+                                <m:e>
+                                  <m:r>
+                                    <a:rPr lang="pt-BR" i="1">
+                                      <a:latin typeface="Cambria Math" panose="02040503050406030204" pitchFamily="18" charset="0"/>
+                                    </a:rPr>
+                                    <m:t>𝑥</m:t>
+                                  </m:r>
+                                </m:e>
+                                <m:sub>
+                                  <m:r>
+                                    <a:rPr lang="pt-BR" i="1">
+                                      <a:latin typeface="Cambria Math" panose="02040503050406030204" pitchFamily="18" charset="0"/>
+                                    </a:rPr>
+                                    <m:t>1</m:t>
+                                  </m:r>
+                                </m:sub>
+                              </m:sSub>
+                              <m:r>
+                                <a:rPr lang="pt-BR" b="1" i="1">
+                                  <a:latin typeface="Cambria Math" panose="02040503050406030204" pitchFamily="18" charset="0"/>
+                                </a:rPr>
+                                <m:t>,</m:t>
+                              </m:r>
+                              <m:sSub>
+                                <m:sSubPr>
+                                  <m:ctrlPr>
+                                    <a:rPr lang="pt-BR" i="1">
+                                      <a:latin typeface="Cambria Math" panose="02040503050406030204" pitchFamily="18" charset="0"/>
+                                    </a:rPr>
+                                  </m:ctrlPr>
+                                </m:sSubPr>
+                                <m:e>
+                                  <m:r>
+                                    <a:rPr lang="pt-BR" i="1">
+                                      <a:latin typeface="Cambria Math" panose="02040503050406030204" pitchFamily="18" charset="0"/>
+                                    </a:rPr>
+                                    <m:t>𝑥</m:t>
+                                  </m:r>
+                                </m:e>
+                                <m:sub>
+                                  <m:r>
+                                    <a:rPr lang="pt-BR" i="1">
+                                      <a:latin typeface="Cambria Math" panose="02040503050406030204" pitchFamily="18" charset="0"/>
+                                    </a:rPr>
+                                    <m:t>2</m:t>
+                                  </m:r>
+                                </m:sub>
+                              </m:sSub>
+                            </m:e>
+                          </m:d>
+                          <m:r>
+                            <a:rPr lang="pt-BR" i="1">
+                              <a:latin typeface="Cambria Math" panose="02040503050406030204" pitchFamily="18" charset="0"/>
+                            </a:rPr>
+                            <m:t>=</m:t>
+                          </m:r>
+                          <m:r>
+                            <a:rPr lang="pt-BR" i="1">
+                              <a:latin typeface="Cambria Math" panose="02040503050406030204" pitchFamily="18" charset="0"/>
+                            </a:rPr>
+                            <m:t>𝑎</m:t>
+                          </m:r>
+                        </m:e>
+                        <m:sub>
+                          <m:r>
+                            <a:rPr lang="pt-BR" i="1">
+                              <a:latin typeface="Cambria Math" panose="02040503050406030204" pitchFamily="18" charset="0"/>
+                            </a:rPr>
+                            <m:t>0</m:t>
+                          </m:r>
+                        </m:sub>
+                      </m:sSub>
+                      <m:r>
+                        <a:rPr lang="pt-BR" i="1">
+                          <a:latin typeface="Cambria Math" panose="02040503050406030204" pitchFamily="18" charset="0"/>
+                        </a:rPr>
+                        <m:t>+</m:t>
+                      </m:r>
+                      <m:sSub>
+                        <m:sSubPr>
+                          <m:ctrlPr>
+                            <a:rPr lang="pt-BR" i="1">
+                              <a:latin typeface="Cambria Math" panose="02040503050406030204" pitchFamily="18" charset="0"/>
+                            </a:rPr>
+                          </m:ctrlPr>
+                        </m:sSubPr>
+                        <m:e>
+                          <m:r>
+                            <a:rPr lang="pt-BR" i="1">
+                              <a:latin typeface="Cambria Math" panose="02040503050406030204" pitchFamily="18" charset="0"/>
+                            </a:rPr>
+                            <m:t>𝑎</m:t>
+                          </m:r>
+                        </m:e>
+                        <m:sub>
+                          <m:r>
+                            <a:rPr lang="pt-BR" i="1">
+                              <a:latin typeface="Cambria Math" panose="02040503050406030204" pitchFamily="18" charset="0"/>
+                            </a:rPr>
+                            <m:t>1</m:t>
+                          </m:r>
+                        </m:sub>
+                      </m:sSub>
+                      <m:sSub>
+                        <m:sSubPr>
+                          <m:ctrlPr>
+                            <a:rPr lang="pt-BR" i="1">
+                              <a:latin typeface="Cambria Math" panose="02040503050406030204" pitchFamily="18" charset="0"/>
+                            </a:rPr>
+                          </m:ctrlPr>
+                        </m:sSubPr>
+                        <m:e>
+                          <m:r>
+                            <a:rPr lang="pt-BR" i="1">
+                              <a:latin typeface="Cambria Math" panose="02040503050406030204" pitchFamily="18" charset="0"/>
+                            </a:rPr>
+                            <m:t>𝑥</m:t>
+                          </m:r>
+                        </m:e>
+                        <m:sub>
+                          <m:r>
+                            <a:rPr lang="pt-BR" i="1">
+                              <a:latin typeface="Cambria Math" panose="02040503050406030204" pitchFamily="18" charset="0"/>
+                            </a:rPr>
+                            <m:t>1</m:t>
+                          </m:r>
+                        </m:sub>
+                      </m:sSub>
+                      <m:r>
+                        <a:rPr lang="pt-BR" i="1">
+                          <a:latin typeface="Cambria Math" panose="02040503050406030204" pitchFamily="18" charset="0"/>
+                        </a:rPr>
+                        <m:t>+</m:t>
+                      </m:r>
+                      <m:sSub>
+                        <m:sSubPr>
+                          <m:ctrlPr>
+                            <a:rPr lang="pt-BR" i="1">
+                              <a:latin typeface="Cambria Math" panose="02040503050406030204" pitchFamily="18" charset="0"/>
+                            </a:rPr>
+                          </m:ctrlPr>
+                        </m:sSubPr>
+                        <m:e>
+                          <m:r>
+                            <a:rPr lang="pt-BR" i="1">
+                              <a:latin typeface="Cambria Math" panose="02040503050406030204" pitchFamily="18" charset="0"/>
+                            </a:rPr>
+                            <m:t>𝑎</m:t>
+                          </m:r>
+                        </m:e>
+                        <m:sub>
+                          <m:r>
+                            <a:rPr lang="pt-BR" i="1">
+                              <a:latin typeface="Cambria Math" panose="02040503050406030204" pitchFamily="18" charset="0"/>
+                            </a:rPr>
+                            <m:t>2</m:t>
+                          </m:r>
+                        </m:sub>
+                      </m:sSub>
+                      <m:sSub>
+                        <m:sSubPr>
+                          <m:ctrlPr>
+                            <a:rPr lang="pt-BR" i="1">
+                              <a:latin typeface="Cambria Math" panose="02040503050406030204" pitchFamily="18" charset="0"/>
+                            </a:rPr>
+                          </m:ctrlPr>
+                        </m:sSubPr>
+                        <m:e>
+                          <m:r>
+                            <a:rPr lang="pt-BR" i="1">
+                              <a:latin typeface="Cambria Math" panose="02040503050406030204" pitchFamily="18" charset="0"/>
+                            </a:rPr>
+                            <m:t>𝑥</m:t>
+                          </m:r>
+                        </m:e>
+                        <m:sub>
+                          <m:r>
+                            <a:rPr lang="pt-BR" i="1">
+                              <a:latin typeface="Cambria Math" panose="02040503050406030204" pitchFamily="18" charset="0"/>
+                            </a:rPr>
+                            <m:t>2</m:t>
+                          </m:r>
+                        </m:sub>
+                      </m:sSub>
+                      <m:r>
+                        <a:rPr lang="pt-BR" i="1">
+                          <a:latin typeface="Cambria Math" panose="02040503050406030204" pitchFamily="18" charset="0"/>
+                        </a:rPr>
+                        <m:t>+</m:t>
+                      </m:r>
+                      <m:sSub>
+                        <m:sSubPr>
+                          <m:ctrlPr>
+                            <a:rPr lang="pt-BR" i="1">
+                              <a:latin typeface="Cambria Math" panose="02040503050406030204" pitchFamily="18" charset="0"/>
+                            </a:rPr>
+                          </m:ctrlPr>
+                        </m:sSubPr>
+                        <m:e>
+                          <m:r>
+                            <a:rPr lang="pt-BR" i="1">
+                              <a:latin typeface="Cambria Math" panose="02040503050406030204" pitchFamily="18" charset="0"/>
+                            </a:rPr>
+                            <m:t>𝑎</m:t>
+                          </m:r>
+                        </m:e>
+                        <m:sub>
+                          <m:r>
+                            <a:rPr lang="pt-BR" i="1">
+                              <a:latin typeface="Cambria Math" panose="02040503050406030204" pitchFamily="18" charset="0"/>
+                            </a:rPr>
+                            <m:t>3</m:t>
+                          </m:r>
+                        </m:sub>
+                      </m:sSub>
+                      <m:sSub>
+                        <m:sSubPr>
+                          <m:ctrlPr>
+                            <a:rPr lang="pt-BR" i="1">
+                              <a:latin typeface="Cambria Math" panose="02040503050406030204" pitchFamily="18" charset="0"/>
+                            </a:rPr>
+                          </m:ctrlPr>
+                        </m:sSubPr>
+                        <m:e>
+                          <m:r>
+                            <a:rPr lang="pt-BR" i="1">
+                              <a:latin typeface="Cambria Math" panose="02040503050406030204" pitchFamily="18" charset="0"/>
+                            </a:rPr>
+                            <m:t>𝑥</m:t>
+                          </m:r>
+                        </m:e>
+                        <m:sub>
+                          <m:r>
+                            <a:rPr lang="pt-BR" i="1">
+                              <a:latin typeface="Cambria Math" panose="02040503050406030204" pitchFamily="18" charset="0"/>
+                            </a:rPr>
+                            <m:t>3</m:t>
+                          </m:r>
+                        </m:sub>
+                      </m:sSub>
+                      <m:r>
+                        <a:rPr lang="pt-BR" i="1">
+                          <a:latin typeface="Cambria Math" panose="02040503050406030204" pitchFamily="18" charset="0"/>
+                        </a:rPr>
+                        <m:t>+</m:t>
+                      </m:r>
+                      <m:sSub>
+                        <m:sSubPr>
+                          <m:ctrlPr>
+                            <a:rPr lang="pt-BR" i="1">
+                              <a:latin typeface="Cambria Math" panose="02040503050406030204" pitchFamily="18" charset="0"/>
+                            </a:rPr>
+                          </m:ctrlPr>
+                        </m:sSubPr>
+                        <m:e>
+                          <m:r>
+                            <a:rPr lang="pt-BR" i="1">
+                              <a:latin typeface="Cambria Math" panose="02040503050406030204" pitchFamily="18" charset="0"/>
+                            </a:rPr>
+                            <m:t>𝑎</m:t>
+                          </m:r>
+                        </m:e>
+                        <m:sub>
+                          <m:r>
+                            <a:rPr lang="pt-BR" i="1">
+                              <a:latin typeface="Cambria Math" panose="02040503050406030204" pitchFamily="18" charset="0"/>
+                            </a:rPr>
+                            <m:t>4</m:t>
+                          </m:r>
+                        </m:sub>
+                      </m:sSub>
+                      <m:sSub>
+                        <m:sSubPr>
+                          <m:ctrlPr>
+                            <a:rPr lang="pt-BR" i="1">
+                              <a:latin typeface="Cambria Math" panose="02040503050406030204" pitchFamily="18" charset="0"/>
+                            </a:rPr>
+                          </m:ctrlPr>
+                        </m:sSubPr>
+                        <m:e>
+                          <m:r>
+                            <a:rPr lang="pt-BR" i="1">
+                              <a:latin typeface="Cambria Math" panose="02040503050406030204" pitchFamily="18" charset="0"/>
+                            </a:rPr>
+                            <m:t>𝑥</m:t>
+                          </m:r>
+                        </m:e>
+                        <m:sub>
+                          <m:r>
+                            <a:rPr lang="pt-BR" i="1">
+                              <a:latin typeface="Cambria Math" panose="02040503050406030204" pitchFamily="18" charset="0"/>
+                            </a:rPr>
+                            <m:t>1</m:t>
+                          </m:r>
+                        </m:sub>
+                      </m:sSub>
+                      <m:sSub>
+                        <m:sSubPr>
+                          <m:ctrlPr>
+                            <a:rPr lang="pt-BR" i="1">
+                              <a:latin typeface="Cambria Math" panose="02040503050406030204" pitchFamily="18" charset="0"/>
+                            </a:rPr>
+                          </m:ctrlPr>
+                        </m:sSubPr>
+                        <m:e>
+                          <m:r>
+                            <a:rPr lang="pt-BR" i="1">
+                              <a:latin typeface="Cambria Math" panose="02040503050406030204" pitchFamily="18" charset="0"/>
+                            </a:rPr>
+                            <m:t>𝑥</m:t>
+                          </m:r>
+                        </m:e>
+                        <m:sub>
+                          <m:r>
+                            <a:rPr lang="pt-BR" i="1">
+                              <a:latin typeface="Cambria Math" panose="02040503050406030204" pitchFamily="18" charset="0"/>
+                            </a:rPr>
+                            <m:t>3</m:t>
+                          </m:r>
+                        </m:sub>
+                      </m:sSub>
+                      <m:r>
+                        <a:rPr lang="pt-BR" i="1">
+                          <a:latin typeface="Cambria Math" panose="02040503050406030204" pitchFamily="18" charset="0"/>
+                        </a:rPr>
+                        <m:t>+</m:t>
+                      </m:r>
+                      <m:sSub>
+                        <m:sSubPr>
+                          <m:ctrlPr>
+                            <a:rPr lang="pt-BR" i="1">
+                              <a:latin typeface="Cambria Math" panose="02040503050406030204" pitchFamily="18" charset="0"/>
+                            </a:rPr>
+                          </m:ctrlPr>
+                        </m:sSubPr>
+                        <m:e>
+                          <m:r>
+                            <a:rPr lang="pt-BR" i="1">
+                              <a:latin typeface="Cambria Math" panose="02040503050406030204" pitchFamily="18" charset="0"/>
+                            </a:rPr>
+                            <m:t>𝑎</m:t>
+                          </m:r>
+                        </m:e>
+                        <m:sub>
+                          <m:r>
+                            <a:rPr lang="pt-BR" i="1">
+                              <a:latin typeface="Cambria Math" panose="02040503050406030204" pitchFamily="18" charset="0"/>
+                            </a:rPr>
+                            <m:t>5</m:t>
+                          </m:r>
+                        </m:sub>
+                      </m:sSub>
+                      <m:sSup>
+                        <m:sSupPr>
+                          <m:ctrlPr>
+                            <a:rPr lang="pt-BR" i="1">
+                              <a:latin typeface="Cambria Math" panose="02040503050406030204" pitchFamily="18" charset="0"/>
+                            </a:rPr>
+                          </m:ctrlPr>
+                        </m:sSupPr>
+                        <m:e>
+                          <m:sSub>
+                            <m:sSubPr>
+                              <m:ctrlPr>
+                                <a:rPr lang="pt-BR" i="1">
+                                  <a:latin typeface="Cambria Math" panose="02040503050406030204" pitchFamily="18" charset="0"/>
+                                </a:rPr>
+                              </m:ctrlPr>
+                            </m:sSubPr>
+                            <m:e>
+                              <m:r>
+                                <a:rPr lang="pt-BR" i="1">
+                                  <a:latin typeface="Cambria Math" panose="02040503050406030204" pitchFamily="18" charset="0"/>
+                                </a:rPr>
+                                <m:t>𝑥</m:t>
+                              </m:r>
+                            </m:e>
+                            <m:sub>
+                              <m:r>
+                                <a:rPr lang="pt-BR" i="1">
+                                  <a:latin typeface="Cambria Math" panose="02040503050406030204" pitchFamily="18" charset="0"/>
+                                </a:rPr>
+                                <m:t>1</m:t>
+                              </m:r>
+                            </m:sub>
+                          </m:sSub>
+                        </m:e>
+                        <m:sup>
+                          <m:r>
+                            <a:rPr lang="pt-BR" i="1">
+                              <a:latin typeface="Cambria Math" panose="02040503050406030204" pitchFamily="18" charset="0"/>
+                            </a:rPr>
+                            <m:t>3</m:t>
+                          </m:r>
+                        </m:sup>
+                      </m:sSup>
+                      <m:r>
+                        <a:rPr lang="pt-BR" i="1">
+                          <a:latin typeface="Cambria Math" panose="02040503050406030204" pitchFamily="18" charset="0"/>
+                        </a:rPr>
+                        <m:t>+</m:t>
+                      </m:r>
+                      <m:sSub>
+                        <m:sSubPr>
+                          <m:ctrlPr>
+                            <a:rPr lang="pt-BR" i="1">
+                              <a:latin typeface="Cambria Math" panose="02040503050406030204" pitchFamily="18" charset="0"/>
+                            </a:rPr>
+                          </m:ctrlPr>
+                        </m:sSubPr>
+                        <m:e>
+                          <m:r>
+                            <a:rPr lang="pt-BR" i="1">
+                              <a:latin typeface="Cambria Math" panose="02040503050406030204" pitchFamily="18" charset="0"/>
+                            </a:rPr>
+                            <m:t>𝑎</m:t>
+                          </m:r>
+                        </m:e>
+                        <m:sub>
+                          <m:r>
+                            <a:rPr lang="pt-BR" i="1">
+                              <a:latin typeface="Cambria Math" panose="02040503050406030204" pitchFamily="18" charset="0"/>
+                            </a:rPr>
+                            <m:t>6</m:t>
+                          </m:r>
+                        </m:sub>
+                      </m:sSub>
+                      <m:sSub>
+                        <m:sSubPr>
+                          <m:ctrlPr>
+                            <a:rPr lang="pt-BR" i="1">
+                              <a:latin typeface="Cambria Math" panose="02040503050406030204" pitchFamily="18" charset="0"/>
+                            </a:rPr>
+                          </m:ctrlPr>
+                        </m:sSubPr>
+                        <m:e>
+                          <m:r>
+                            <a:rPr lang="pt-BR" i="1">
+                              <a:latin typeface="Cambria Math" panose="02040503050406030204" pitchFamily="18" charset="0"/>
+                            </a:rPr>
+                            <m:t>𝑥</m:t>
+                          </m:r>
+                        </m:e>
+                        <m:sub>
+                          <m:r>
+                            <a:rPr lang="pt-BR" i="1">
+                              <a:latin typeface="Cambria Math" panose="02040503050406030204" pitchFamily="18" charset="0"/>
+                            </a:rPr>
+                            <m:t>1</m:t>
+                          </m:r>
+                        </m:sub>
+                      </m:sSub>
+                      <m:sSub>
+                        <m:sSubPr>
+                          <m:ctrlPr>
+                            <a:rPr lang="pt-BR" i="1">
+                              <a:latin typeface="Cambria Math" panose="02040503050406030204" pitchFamily="18" charset="0"/>
+                            </a:rPr>
+                          </m:ctrlPr>
+                        </m:sSubPr>
+                        <m:e>
+                          <m:r>
+                            <a:rPr lang="pt-BR" i="1">
+                              <a:latin typeface="Cambria Math" panose="02040503050406030204" pitchFamily="18" charset="0"/>
+                            </a:rPr>
+                            <m:t>𝑥</m:t>
+                          </m:r>
+                        </m:e>
+                        <m:sub>
+                          <m:r>
+                            <a:rPr lang="pt-BR" i="1">
+                              <a:latin typeface="Cambria Math" panose="02040503050406030204" pitchFamily="18" charset="0"/>
+                            </a:rPr>
+                            <m:t>2</m:t>
+                          </m:r>
+                        </m:sub>
+                      </m:sSub>
+                      <m:sSup>
+                        <m:sSupPr>
+                          <m:ctrlPr>
+                            <a:rPr lang="pt-BR" i="1">
+                              <a:latin typeface="Cambria Math" panose="02040503050406030204" pitchFamily="18" charset="0"/>
+                            </a:rPr>
+                          </m:ctrlPr>
+                        </m:sSupPr>
+                        <m:e>
+                          <m:sSub>
+                            <m:sSubPr>
+                              <m:ctrlPr>
+                                <a:rPr lang="pt-BR" i="1">
+                                  <a:latin typeface="Cambria Math" panose="02040503050406030204" pitchFamily="18" charset="0"/>
+                                </a:rPr>
+                              </m:ctrlPr>
+                            </m:sSubPr>
+                            <m:e>
+                              <m:r>
+                                <a:rPr lang="pt-BR" i="1">
+                                  <a:latin typeface="Cambria Math" panose="02040503050406030204" pitchFamily="18" charset="0"/>
+                                </a:rPr>
+                                <m:t>𝑥</m:t>
+                              </m:r>
+                            </m:e>
+                            <m:sub>
+                              <m:r>
+                                <a:rPr lang="pt-BR" i="1">
+                                  <a:latin typeface="Cambria Math" panose="02040503050406030204" pitchFamily="18" charset="0"/>
+                                </a:rPr>
+                                <m:t>3</m:t>
+                              </m:r>
+                            </m:sub>
+                          </m:sSub>
+                        </m:e>
+                        <m:sup>
+                          <m:r>
+                            <a:rPr lang="pt-BR" i="1">
+                              <a:latin typeface="Cambria Math" panose="02040503050406030204" pitchFamily="18" charset="0"/>
+                            </a:rPr>
+                            <m:t>2</m:t>
+                          </m:r>
+                        </m:sup>
+                      </m:sSup>
+                    </m:oMath>
+                  </m:oMathPara>
+                </a14:m>
+                <a:endParaRPr lang="pt-BR" dirty="0"/>
+              </a:p>
+              <a:p>
+                <a:pPr marL="457200" lvl="1" indent="0" algn="ctr">
+                  <a:buNone/>
+                </a:pPr>
+                <a:endParaRPr lang="pt-BR" dirty="0"/>
+              </a:p>
+            </p:txBody>
+          </p:sp>
+        </mc:Choice>
+        <mc:Fallback>
+          <p:sp>
+            <p:nvSpPr>
+              <p:cNvPr id="3" name="Espaço Reservado para Conteúdo 2">
+                <a:extLst>
+                  <a:ext uri="{FF2B5EF4-FFF2-40B4-BE49-F238E27FC236}">
+                    <a16:creationId xmlns:a16="http://schemas.microsoft.com/office/drawing/2014/main" id="{9C482631-ECEA-B4D7-2D72-82A636953ACA}"/>
+                  </a:ext>
+                </a:extLst>
+              </p:cNvPr>
+              <p:cNvSpPr>
+                <a:spLocks noGrp="1" noRot="1" noChangeAspect="1" noMove="1" noResize="1" noEditPoints="1" noAdjustHandles="1" noChangeArrowheads="1" noChangeShapeType="1" noTextEdit="1"/>
+              </p:cNvSpPr>
+              <p:nvPr>
+                <p:ph idx="1"/>
+              </p:nvPr>
+            </p:nvSpPr>
+            <p:spPr>
+              <a:xfrm>
+                <a:off x="4847422" y="1825624"/>
+                <a:ext cx="7174860" cy="5032375"/>
+              </a:xfrm>
+              <a:blipFill>
+                <a:blip r:embed="rId2"/>
+                <a:stretch>
+                  <a:fillRect l="-1529" t="-2663"/>
+                </a:stretch>
+              </a:blipFill>
+            </p:spPr>
+            <p:txBody>
+              <a:bodyPr/>
+              <a:lstStyle/>
+              <a:p>
+                <a:r>
+                  <a:rPr lang="en-US">
+                    <a:noFill/>
+                  </a:rPr>
+                  <a:t> </a:t>
+                </a:r>
+              </a:p>
+            </p:txBody>
+          </p:sp>
+        </mc:Fallback>
+      </mc:AlternateContent>
+      <p:pic>
+        <p:nvPicPr>
+          <p:cNvPr id="16" name="Picture 5">
+            <a:extLst>
+              <a:ext uri="{FF2B5EF4-FFF2-40B4-BE49-F238E27FC236}">
+                <a16:creationId xmlns:a16="http://schemas.microsoft.com/office/drawing/2014/main" id="{6B762FC7-E922-DA79-1250-E8A6D6A7D813}"/>
+              </a:ext>
+            </a:extLst>
+          </p:cNvPr>
+          <p:cNvPicPr>
+            <a:picLocks noChangeAspect="1"/>
+          </p:cNvPicPr>
+          <p:nvPr/>
+        </p:nvPicPr>
+        <p:blipFill rotWithShape="1">
+          <a:blip r:embed="rId3" cstate="print">
+            <a:extLst>
+              <a:ext uri="{28A0092B-C50C-407E-A947-70E740481C1C}">
+                <a14:useLocalDpi xmlns:a14="http://schemas.microsoft.com/office/drawing/2010/main" val="0"/>
+              </a:ext>
+            </a:extLst>
+          </a:blip>
+          <a:srcRect l="3301" t="11423" r="9569" b="2419"/>
+          <a:stretch/>
+        </p:blipFill>
+        <p:spPr>
+          <a:xfrm>
+            <a:off x="838200" y="1995964"/>
+            <a:ext cx="2677173" cy="1985502"/>
+          </a:xfrm>
+          <a:prstGeom prst="rect">
+            <a:avLst/>
+          </a:prstGeom>
+        </p:spPr>
+      </p:pic>
+      <mc:AlternateContent xmlns:mc="http://schemas.openxmlformats.org/markup-compatibility/2006" xmlns:a14="http://schemas.microsoft.com/office/drawing/2010/main">
+        <mc:Choice Requires="a14">
+          <p:sp>
+            <p:nvSpPr>
+              <p:cNvPr id="18" name="Rectangle 11">
+                <a:extLst>
+                  <a:ext uri="{FF2B5EF4-FFF2-40B4-BE49-F238E27FC236}">
+                    <a16:creationId xmlns:a16="http://schemas.microsoft.com/office/drawing/2014/main" id="{F2E3855C-B1A8-73CE-4337-2A0B4919B4AD}"/>
+                  </a:ext>
+                </a:extLst>
+              </p:cNvPr>
+              <p:cNvSpPr/>
+              <p:nvPr/>
+            </p:nvSpPr>
+            <p:spPr>
+              <a:xfrm>
+                <a:off x="886682" y="1635877"/>
+                <a:ext cx="2628691" cy="338554"/>
+              </a:xfrm>
+              <a:prstGeom prst="rect">
+                <a:avLst/>
+              </a:prstGeom>
+            </p:spPr>
+            <p:txBody>
+              <a:bodyPr wrap="square">
+                <a:spAutoFit/>
+              </a:bodyPr>
+              <a:lstStyle/>
+              <a:p>
+                <a:pPr algn="ctr"/>
+                <a14:m>
+                  <m:oMath xmlns:m="http://schemas.openxmlformats.org/officeDocument/2006/math">
+                    <m:r>
+                      <a:rPr lang="pt-BR" sz="1600" i="1">
+                        <a:latin typeface="Cambria Math" panose="02040503050406030204" pitchFamily="18" charset="0"/>
+                        <a:ea typeface="Cambria Math" panose="02040503050406030204" pitchFamily="18" charset="0"/>
+                      </a:rPr>
+                      <m:t>h</m:t>
+                    </m:r>
+                    <m:d>
+                      <m:dPr>
+                        <m:ctrlPr>
+                          <a:rPr lang="pt-BR" sz="1600" b="1" i="1">
+                            <a:latin typeface="Cambria Math" panose="02040503050406030204" pitchFamily="18" charset="0"/>
+                            <a:ea typeface="Cambria Math" panose="02040503050406030204" pitchFamily="18" charset="0"/>
+                          </a:rPr>
+                        </m:ctrlPr>
+                      </m:dPr>
+                      <m:e>
+                        <m:sSub>
+                          <m:sSubPr>
+                            <m:ctrlPr>
+                              <a:rPr lang="pt-BR" sz="1600" i="1">
+                                <a:latin typeface="Cambria Math" panose="02040503050406030204" pitchFamily="18" charset="0"/>
+                                <a:ea typeface="Cambria Math" panose="02040503050406030204" pitchFamily="18" charset="0"/>
+                              </a:rPr>
+                            </m:ctrlPr>
+                          </m:sSubPr>
+                          <m:e>
+                            <m:r>
+                              <a:rPr lang="pt-BR" sz="1600" i="1">
+                                <a:latin typeface="Cambria Math" panose="02040503050406030204" pitchFamily="18" charset="0"/>
+                                <a:ea typeface="Cambria Math" panose="02040503050406030204" pitchFamily="18" charset="0"/>
+                              </a:rPr>
+                              <m:t>𝑥</m:t>
+                            </m:r>
+                          </m:e>
+                          <m:sub>
+                            <m:r>
+                              <a:rPr lang="pt-BR" sz="1600" i="1">
+                                <a:latin typeface="Cambria Math" panose="02040503050406030204" pitchFamily="18" charset="0"/>
+                                <a:ea typeface="Cambria Math" panose="02040503050406030204" pitchFamily="18" charset="0"/>
+                              </a:rPr>
+                              <m:t>1</m:t>
+                            </m:r>
+                          </m:sub>
+                        </m:sSub>
+                      </m:e>
+                    </m:d>
+                    <m:r>
+                      <a:rPr lang="pt-BR" sz="1600" b="1" i="1">
+                        <a:latin typeface="Cambria Math" panose="02040503050406030204" pitchFamily="18" charset="0"/>
+                        <a:ea typeface="Cambria Math" panose="02040503050406030204" pitchFamily="18" charset="0"/>
+                      </a:rPr>
+                      <m:t>= </m:t>
+                    </m:r>
+                    <m:sSub>
+                      <m:sSubPr>
+                        <m:ctrlPr>
+                          <a:rPr lang="pt-BR" sz="1600" i="1">
+                            <a:latin typeface="Cambria Math" panose="02040503050406030204" pitchFamily="18" charset="0"/>
+                            <a:ea typeface="Cambria Math" panose="02040503050406030204" pitchFamily="18" charset="0"/>
+                          </a:rPr>
+                        </m:ctrlPr>
+                      </m:sSubPr>
+                      <m:e>
+                        <m:r>
+                          <a:rPr lang="pt-BR" sz="1600" i="1">
+                            <a:latin typeface="Cambria Math" panose="02040503050406030204" pitchFamily="18" charset="0"/>
+                            <a:ea typeface="Cambria Math" panose="02040503050406030204" pitchFamily="18" charset="0"/>
+                          </a:rPr>
+                          <m:t>𝑎</m:t>
+                        </m:r>
+                      </m:e>
+                      <m:sub>
+                        <m:r>
+                          <a:rPr lang="pt-BR" sz="1600" i="1">
+                            <a:latin typeface="Cambria Math" panose="02040503050406030204" pitchFamily="18" charset="0"/>
+                            <a:ea typeface="Cambria Math" panose="02040503050406030204" pitchFamily="18" charset="0"/>
+                          </a:rPr>
+                          <m:t>0</m:t>
+                        </m:r>
+                      </m:sub>
+                    </m:sSub>
+                  </m:oMath>
+                </a14:m>
+                <a:r>
+                  <a:rPr lang="pt-BR" sz="1600" dirty="0"/>
+                  <a:t> + </a:t>
+                </a:r>
+                <a14:m>
+                  <m:oMath xmlns:m="http://schemas.openxmlformats.org/officeDocument/2006/math">
+                    <m:sSub>
+                      <m:sSubPr>
+                        <m:ctrlPr>
+                          <a:rPr lang="pt-BR" sz="1600" i="1">
+                            <a:latin typeface="Cambria Math" panose="02040503050406030204" pitchFamily="18" charset="0"/>
+                            <a:ea typeface="Cambria Math" panose="02040503050406030204" pitchFamily="18" charset="0"/>
+                          </a:rPr>
+                        </m:ctrlPr>
+                      </m:sSubPr>
+                      <m:e>
+                        <m:r>
+                          <a:rPr lang="pt-BR" sz="1600" i="1">
+                            <a:latin typeface="Cambria Math" panose="02040503050406030204" pitchFamily="18" charset="0"/>
+                            <a:ea typeface="Cambria Math" panose="02040503050406030204" pitchFamily="18" charset="0"/>
+                          </a:rPr>
+                          <m:t>𝑎</m:t>
+                        </m:r>
+                      </m:e>
+                      <m:sub>
+                        <m:r>
+                          <a:rPr lang="pt-BR" sz="1600" i="1">
+                            <a:latin typeface="Cambria Math" panose="02040503050406030204" pitchFamily="18" charset="0"/>
+                            <a:ea typeface="Cambria Math" panose="02040503050406030204" pitchFamily="18" charset="0"/>
+                          </a:rPr>
+                          <m:t>1</m:t>
+                        </m:r>
+                      </m:sub>
+                    </m:sSub>
+                    <m:sSub>
+                      <m:sSubPr>
+                        <m:ctrlPr>
+                          <a:rPr lang="pt-BR" sz="1600" i="1">
+                            <a:latin typeface="Cambria Math" panose="02040503050406030204" pitchFamily="18" charset="0"/>
+                            <a:ea typeface="Cambria Math" panose="02040503050406030204" pitchFamily="18" charset="0"/>
+                          </a:rPr>
+                        </m:ctrlPr>
+                      </m:sSubPr>
+                      <m:e>
+                        <m:r>
+                          <a:rPr lang="pt-BR" sz="1600" i="1">
+                            <a:latin typeface="Cambria Math" panose="02040503050406030204" pitchFamily="18" charset="0"/>
+                            <a:ea typeface="Cambria Math" panose="02040503050406030204" pitchFamily="18" charset="0"/>
+                          </a:rPr>
+                          <m:t>𝑥</m:t>
+                        </m:r>
+                      </m:e>
+                      <m:sub>
+                        <m:r>
+                          <a:rPr lang="pt-BR" sz="1600" i="1">
+                            <a:latin typeface="Cambria Math" panose="02040503050406030204" pitchFamily="18" charset="0"/>
+                            <a:ea typeface="Cambria Math" panose="02040503050406030204" pitchFamily="18" charset="0"/>
+                          </a:rPr>
+                          <m:t>1</m:t>
+                        </m:r>
+                      </m:sub>
+                    </m:sSub>
+                  </m:oMath>
+                </a14:m>
+                <a:r>
+                  <a:rPr lang="pt-BR" sz="1600" dirty="0"/>
+                  <a:t> (reta)</a:t>
+                </a:r>
+              </a:p>
+            </p:txBody>
+          </p:sp>
+        </mc:Choice>
+        <mc:Fallback xmlns="">
+          <p:sp>
+            <p:nvSpPr>
+              <p:cNvPr id="18" name="Rectangle 11">
+                <a:extLst>
+                  <a:ext uri="{FF2B5EF4-FFF2-40B4-BE49-F238E27FC236}">
+                    <a16:creationId xmlns:a16="http://schemas.microsoft.com/office/drawing/2014/main" id="{4C95BBF0-D0FC-ED09-8232-4BA9B9608B03}"/>
+                  </a:ext>
+                </a:extLst>
+              </p:cNvPr>
+              <p:cNvSpPr>
+                <a:spLocks noRot="1" noChangeAspect="1" noMove="1" noResize="1" noEditPoints="1" noAdjustHandles="1" noChangeArrowheads="1" noChangeShapeType="1" noTextEdit="1"/>
+              </p:cNvSpPr>
+              <p:nvPr/>
+            </p:nvSpPr>
+            <p:spPr>
+              <a:xfrm>
+                <a:off x="886682" y="1635877"/>
+                <a:ext cx="2628691" cy="338554"/>
+              </a:xfrm>
+              <a:prstGeom prst="rect">
+                <a:avLst/>
+              </a:prstGeom>
+              <a:blipFill>
+                <a:blip r:embed="rId6"/>
+                <a:stretch>
+                  <a:fillRect t="-5357" b="-21429"/>
+                </a:stretch>
+              </a:blipFill>
+            </p:spPr>
+            <p:txBody>
+              <a:bodyPr/>
+              <a:lstStyle/>
+              <a:p>
+                <a:r>
+                  <a:rPr lang="pt-BR">
+                    <a:noFill/>
+                  </a:rPr>
+                  <a:t> </a:t>
+                </a:r>
+              </a:p>
+            </p:txBody>
+          </p:sp>
+        </mc:Fallback>
+      </mc:AlternateContent>
+    </p:spTree>
+    <p:extLst>
+      <p:ext uri="{BB962C8B-B14F-4D97-AF65-F5344CB8AC3E}">
+        <p14:creationId xmlns:p14="http://schemas.microsoft.com/office/powerpoint/2010/main" val="4109425315"/>
+      </p:ext>
+    </p:extLst>
+  </p:cSld>
+  <p:clrMapOvr>
+    <a:masterClrMapping/>
+  </p:clrMapOvr>
+</p:sld>
+</file>
+
+<file path=ppt/slides/slide12.xml><?xml version="1.0" encoding="utf-8"?>
+<p:sld xmlns:a="http://schemas.openxmlformats.org/drawingml/2006/main" xmlns:r="http://schemas.openxmlformats.org/officeDocument/2006/relationships" xmlns:p="http://schemas.openxmlformats.org/presentationml/2006/main">
+  <p:cSld>
+    <p:spTree>
+      <p:nvGrpSpPr>
+        <p:cNvPr id="1" name=""/>
+        <p:cNvGrpSpPr/>
+        <p:nvPr/>
+      </p:nvGrpSpPr>
+      <p:grpSpPr>
+        <a:xfrm>
+          <a:off x="0" y="0"/>
+          <a:ext cx="0" cy="0"/>
+          <a:chOff x="0" y="0"/>
+          <a:chExt cx="0" cy="0"/>
+        </a:xfrm>
+      </p:grpSpPr>
+      <p:sp>
+        <p:nvSpPr>
           <p:cNvPr id="3" name="Content Placeholder 2">
             <a:extLst>
               <a:ext uri="{FF2B5EF4-FFF2-40B4-BE49-F238E27FC236}">
@@ -4860,7 +7104,7 @@
 </p:sld>
 </file>
 
-<file path=ppt/slides/slide11.xml><?xml version="1.0" encoding="utf-8"?>
+<file path=ppt/slides/slide13.xml><?xml version="1.0" encoding="utf-8"?>
 <p:sld xmlns:a="http://schemas.openxmlformats.org/drawingml/2006/main" xmlns:r="http://schemas.openxmlformats.org/officeDocument/2006/relationships" xmlns:p="http://schemas.openxmlformats.org/presentationml/2006/main">
   <p:cSld>
     <p:spTree>
@@ -4946,7 +7190,7 @@
 </p:sld>
 </file>
 
-<file path=ppt/slides/slide12.xml><?xml version="1.0" encoding="utf-8"?>
+<file path=ppt/slides/slide14.xml><?xml version="1.0" encoding="utf-8"?>
 <p:sld xmlns:a="http://schemas.openxmlformats.org/drawingml/2006/main" xmlns:r="http://schemas.openxmlformats.org/officeDocument/2006/relationships" xmlns:p="http://schemas.openxmlformats.org/presentationml/2006/main">
   <p:cSld>
     <p:spTree>
@@ -6651,7 +8895,7 @@
           <a:p>
             <a:r>
               <a:rPr lang="pt-BR" dirty="0"/>
-              <a:t>Vai nos dar </a:t>
+              <a:t>Nos dará </a:t>
             </a:r>
             <a:r>
               <a:rPr lang="pt-BR" b="1" i="1" dirty="0"/>
@@ -6698,10 +8942,10 @@
       </p:sp>
       <p:grpSp>
         <p:nvGrpSpPr>
-          <p:cNvPr id="9" name="Agrupar 8">
+          <p:cNvPr id="4" name="Group 3">
             <a:extLst>
               <a:ext uri="{FF2B5EF4-FFF2-40B4-BE49-F238E27FC236}">
-                <a16:creationId xmlns:a16="http://schemas.microsoft.com/office/drawing/2014/main" id="{7184A45B-D6CC-54CD-EE0B-7CE85A9D94D5}"/>
+                <a16:creationId xmlns:a16="http://schemas.microsoft.com/office/drawing/2014/main" id="{CAA6EE23-CD07-9149-8335-18879B84AB15}"/>
               </a:ext>
             </a:extLst>
           </p:cNvPr>
@@ -6712,53 +8956,230 @@
           <a:xfrm>
             <a:off x="313057" y="2511846"/>
             <a:ext cx="4622500" cy="3152391"/>
-            <a:chOff x="379861" y="2379643"/>
+            <a:chOff x="313057" y="2511846"/>
             <a:chExt cx="4622500" cy="3152391"/>
           </a:xfrm>
         </p:grpSpPr>
-        <p:pic>
-          <p:nvPicPr>
-            <p:cNvPr id="5" name="Imagem 4">
+        <p:grpSp>
+          <p:nvGrpSpPr>
+            <p:cNvPr id="7" name="Agrupar 8">
               <a:extLst>
                 <a:ext uri="{FF2B5EF4-FFF2-40B4-BE49-F238E27FC236}">
-                  <a16:creationId xmlns:a16="http://schemas.microsoft.com/office/drawing/2014/main" id="{AF1170FE-5534-DC43-8150-E2919F18F249}"/>
+                  <a16:creationId xmlns:a16="http://schemas.microsoft.com/office/drawing/2014/main" id="{CF20AF4F-BFBD-21EC-07E1-41C0B2191505}"/>
                 </a:ext>
               </a:extLst>
             </p:cNvPr>
-            <p:cNvPicPr>
-              <a:picLocks noChangeAspect="1"/>
-            </p:cNvPicPr>
+            <p:cNvGrpSpPr/>
             <p:nvPr/>
-          </p:nvPicPr>
-          <p:blipFill rotWithShape="1">
-            <a:blip r:embed="rId3" cstate="print">
-              <a:extLst>
-                <a:ext uri="{28A0092B-C50C-407E-A947-70E740481C1C}">
-                  <a14:useLocalDpi xmlns:a14="http://schemas.microsoft.com/office/drawing/2010/main" val="0"/>
-                </a:ext>
-              </a:extLst>
-            </a:blip>
-            <a:srcRect l="3463" t="9957" r="8514"/>
-            <a:stretch/>
-          </p:blipFill>
-          <p:spPr>
+          </p:nvGrpSpPr>
+          <p:grpSpPr>
             <a:xfrm>
-              <a:off x="379861" y="2379643"/>
+              <a:off x="313057" y="2511846"/>
               <a:ext cx="4622500" cy="3152391"/>
+              <a:chOff x="379861" y="2379643"/>
+              <a:chExt cx="4622500" cy="3152391"/>
             </a:xfrm>
-            <a:prstGeom prst="rect">
-              <a:avLst/>
-            </a:prstGeom>
-          </p:spPr>
-        </p:pic>
+          </p:grpSpPr>
+          <p:pic>
+            <p:nvPicPr>
+              <p:cNvPr id="11" name="Imagem 4">
+                <a:extLst>
+                  <a:ext uri="{FF2B5EF4-FFF2-40B4-BE49-F238E27FC236}">
+                    <a16:creationId xmlns:a16="http://schemas.microsoft.com/office/drawing/2014/main" id="{4D31E461-1A6A-29D1-2297-DFBFD51CB0D8}"/>
+                  </a:ext>
+                </a:extLst>
+              </p:cNvPr>
+              <p:cNvPicPr>
+                <a:picLocks noChangeAspect="1"/>
+              </p:cNvPicPr>
+              <p:nvPr/>
+            </p:nvPicPr>
+            <p:blipFill rotWithShape="1">
+              <a:blip r:embed="rId3" cstate="print">
+                <a:extLst>
+                  <a:ext uri="{28A0092B-C50C-407E-A947-70E740481C1C}">
+                    <a14:useLocalDpi xmlns:a14="http://schemas.microsoft.com/office/drawing/2010/main" val="0"/>
+                  </a:ext>
+                </a:extLst>
+              </a:blip>
+              <a:srcRect l="3463" t="9957" r="8514"/>
+              <a:stretch/>
+            </p:blipFill>
+            <p:spPr>
+              <a:xfrm>
+                <a:off x="379861" y="2379643"/>
+                <a:ext cx="4622500" cy="3152391"/>
+              </a:xfrm>
+              <a:prstGeom prst="rect">
+                <a:avLst/>
+              </a:prstGeom>
+            </p:spPr>
+          </p:pic>
+          <mc:AlternateContent xmlns:mc="http://schemas.openxmlformats.org/markup-compatibility/2006" xmlns:a14="http://schemas.microsoft.com/office/drawing/2010/main">
+            <mc:Choice Requires="a14">
+              <p:sp>
+                <p:nvSpPr>
+                  <p:cNvPr id="12" name="CaixaDeTexto 5">
+                    <a:extLst>
+                      <a:ext uri="{FF2B5EF4-FFF2-40B4-BE49-F238E27FC236}">
+                        <a16:creationId xmlns:a16="http://schemas.microsoft.com/office/drawing/2014/main" id="{E01136AD-4899-EC9B-8DFF-D35176FFB912}"/>
+                      </a:ext>
+                    </a:extLst>
+                  </p:cNvPr>
+                  <p:cNvSpPr txBox="1"/>
+                  <p:nvPr/>
+                </p:nvSpPr>
+                <p:spPr>
+                  <a:xfrm>
+                    <a:off x="3410072" y="3635566"/>
+                    <a:ext cx="738130" cy="369332"/>
+                  </a:xfrm>
+                  <a:prstGeom prst="rect">
+                    <a:avLst/>
+                  </a:prstGeom>
+                  <a:noFill/>
+                </p:spPr>
+                <p:txBody>
+                  <a:bodyPr wrap="square" rtlCol="0">
+                    <a:spAutoFit/>
+                  </a:bodyPr>
+                  <a:lstStyle/>
+                  <a:p>
+                    <a:pPr/>
+                    <a14:m>
+                      <m:oMathPara xmlns:m="http://schemas.openxmlformats.org/officeDocument/2006/math">
+                        <m:oMathParaPr>
+                          <m:jc m:val="centerGroup"/>
+                        </m:oMathParaPr>
+                        <m:oMath xmlns:m="http://schemas.openxmlformats.org/officeDocument/2006/math">
+                          <m:r>
+                            <a:rPr lang="pt-BR" b="0" i="1" smtClean="0">
+                              <a:latin typeface="Cambria Math" panose="02040503050406030204" pitchFamily="18" charset="0"/>
+                            </a:rPr>
+                            <m:t>h</m:t>
+                          </m:r>
+                          <m:r>
+                            <a:rPr lang="pt-BR" b="0" i="1" smtClean="0">
+                              <a:latin typeface="Cambria Math" panose="02040503050406030204" pitchFamily="18" charset="0"/>
+                            </a:rPr>
+                            <m:t>(</m:t>
+                          </m:r>
+                          <m:r>
+                            <a:rPr lang="pt-BR" b="1" i="1" smtClean="0">
+                              <a:latin typeface="Cambria Math" panose="02040503050406030204" pitchFamily="18" charset="0"/>
+                            </a:rPr>
+                            <m:t>𝒙</m:t>
+                          </m:r>
+                          <m:r>
+                            <a:rPr lang="pt-BR" b="0" i="1" smtClean="0">
+                              <a:latin typeface="Cambria Math" panose="02040503050406030204" pitchFamily="18" charset="0"/>
+                            </a:rPr>
+                            <m:t>)</m:t>
+                          </m:r>
+                        </m:oMath>
+                      </m:oMathPara>
+                    </a14:m>
+                    <a:endParaRPr lang="pt-BR" dirty="0"/>
+                  </a:p>
+                </p:txBody>
+              </p:sp>
+            </mc:Choice>
+            <mc:Fallback xmlns="">
+              <p:sp>
+                <p:nvSpPr>
+                  <p:cNvPr id="6" name="CaixaDeTexto 5">
+                    <a:extLst>
+                      <a:ext uri="{FF2B5EF4-FFF2-40B4-BE49-F238E27FC236}">
+                        <a16:creationId xmlns:a16="http://schemas.microsoft.com/office/drawing/2014/main" id="{10491C75-CC2B-4E6F-00D1-D7BCDA1CAC51}"/>
+                      </a:ext>
+                    </a:extLst>
+                  </p:cNvPr>
+                  <p:cNvSpPr txBox="1">
+                    <a:spLocks noRot="1" noChangeAspect="1" noMove="1" noResize="1" noEditPoints="1" noAdjustHandles="1" noChangeArrowheads="1" noChangeShapeType="1" noTextEdit="1"/>
+                  </p:cNvSpPr>
+                  <p:nvPr/>
+                </p:nvSpPr>
+                <p:spPr>
+                  <a:xfrm>
+                    <a:off x="3410072" y="3635566"/>
+                    <a:ext cx="738130" cy="369332"/>
+                  </a:xfrm>
+                  <a:prstGeom prst="rect">
+                    <a:avLst/>
+                  </a:prstGeom>
+                  <a:blipFill>
+                    <a:blip r:embed="rId5"/>
+                    <a:stretch>
+                      <a:fillRect b="-13115"/>
+                    </a:stretch>
+                  </a:blipFill>
+                </p:spPr>
+                <p:txBody>
+                  <a:bodyPr/>
+                  <a:lstStyle/>
+                  <a:p>
+                    <a:r>
+                      <a:rPr lang="pt-BR">
+                        <a:noFill/>
+                      </a:rPr>
+                      <a:t> </a:t>
+                    </a:r>
+                  </a:p>
+                </p:txBody>
+              </p:sp>
+            </mc:Fallback>
+          </mc:AlternateContent>
+          <p:cxnSp>
+            <p:nvCxnSpPr>
+              <p:cNvPr id="13" name="Conector de Seta Reta 7">
+                <a:extLst>
+                  <a:ext uri="{FF2B5EF4-FFF2-40B4-BE49-F238E27FC236}">
+                    <a16:creationId xmlns:a16="http://schemas.microsoft.com/office/drawing/2014/main" id="{E6A4E71A-8296-6E9B-6F53-58CD005C17C6}"/>
+                  </a:ext>
+                </a:extLst>
+              </p:cNvPr>
+              <p:cNvCxnSpPr/>
+              <p:nvPr/>
+            </p:nvCxnSpPr>
+            <p:spPr>
+              <a:xfrm>
+                <a:off x="3150824" y="3602516"/>
+                <a:ext cx="374574" cy="198303"/>
+              </a:xfrm>
+              <a:prstGeom prst="straightConnector1">
+                <a:avLst/>
+              </a:prstGeom>
+              <a:ln>
+                <a:solidFill>
+                  <a:srgbClr val="FF0000"/>
+                </a:solidFill>
+                <a:tailEnd type="triangle"/>
+              </a:ln>
+            </p:spPr>
+            <p:style>
+              <a:lnRef idx="1">
+                <a:schemeClr val="accent1"/>
+              </a:lnRef>
+              <a:fillRef idx="0">
+                <a:schemeClr val="accent1"/>
+              </a:fillRef>
+              <a:effectRef idx="0">
+                <a:schemeClr val="accent1"/>
+              </a:effectRef>
+              <a:fontRef idx="minor">
+                <a:schemeClr val="tx1"/>
+              </a:fontRef>
+            </p:style>
+          </p:cxnSp>
+        </p:grpSp>
         <mc:AlternateContent xmlns:mc="http://schemas.openxmlformats.org/markup-compatibility/2006" xmlns:a14="http://schemas.microsoft.com/office/drawing/2010/main">
           <mc:Choice Requires="a14">
             <p:sp>
               <p:nvSpPr>
-                <p:cNvPr id="6" name="CaixaDeTexto 5">
+                <p:cNvPr id="10" name="CaixaDeTexto 3">
                   <a:extLst>
                     <a:ext uri="{FF2B5EF4-FFF2-40B4-BE49-F238E27FC236}">
-                      <a16:creationId xmlns:a16="http://schemas.microsoft.com/office/drawing/2014/main" id="{10491C75-CC2B-4E6F-00D1-D7BCDA1CAC51}"/>
+                      <a16:creationId xmlns:a16="http://schemas.microsoft.com/office/drawing/2014/main" id="{9E8479D2-8EC0-0456-F706-2969C0BC1122}"/>
                     </a:ext>
                   </a:extLst>
                 </p:cNvPr>
@@ -6767,8 +9188,8 @@
               </p:nvSpPr>
               <p:spPr>
                 <a:xfrm>
-                  <a:off x="3410072" y="3635566"/>
-                  <a:ext cx="738130" cy="369332"/>
+                  <a:off x="2409352" y="2755948"/>
+                  <a:ext cx="738130" cy="307777"/>
                 </a:xfrm>
                 <a:prstGeom prst="rect">
                   <a:avLst/>
@@ -6789,25 +9210,25 @@
                       </m:oMathParaPr>
                       <m:oMath xmlns:m="http://schemas.openxmlformats.org/officeDocument/2006/math">
                         <m:r>
-                          <a:rPr lang="pt-BR" b="0" i="1" smtClean="0">
+                          <a:rPr lang="pt-BR" sz="1400" b="0" i="1" smtClean="0">
                             <a:latin typeface="Cambria Math" panose="02040503050406030204" pitchFamily="18" charset="0"/>
                           </a:rPr>
                           <m:t>h</m:t>
                         </m:r>
                         <m:r>
-                          <a:rPr lang="pt-BR" b="0" i="1" smtClean="0">
+                          <a:rPr lang="pt-BR" sz="1400" b="0" i="1" smtClean="0">
                             <a:latin typeface="Cambria Math" panose="02040503050406030204" pitchFamily="18" charset="0"/>
                           </a:rPr>
                           <m:t>(</m:t>
                         </m:r>
                         <m:r>
-                          <a:rPr lang="pt-BR" b="1" i="1" smtClean="0">
+                          <a:rPr lang="pt-BR" sz="1400" b="1" i="1" smtClean="0">
                             <a:latin typeface="Cambria Math" panose="02040503050406030204" pitchFamily="18" charset="0"/>
                           </a:rPr>
                           <m:t>𝒙</m:t>
                         </m:r>
                         <m:r>
-                          <a:rPr lang="pt-BR" b="0" i="1" smtClean="0">
+                          <a:rPr lang="pt-BR" sz="1400" b="0" i="1" smtClean="0">
                             <a:latin typeface="Cambria Math" panose="02040503050406030204" pitchFamily="18" charset="0"/>
                           </a:rPr>
                           <m:t>)</m:t>
@@ -6815,7 +9236,7 @@
                       </m:oMath>
                     </m:oMathPara>
                   </a14:m>
-                  <a:endParaRPr lang="pt-BR" dirty="0"/>
+                  <a:endParaRPr lang="pt-BR" sz="1400" dirty="0"/>
                 </a:p>
               </p:txBody>
             </p:sp>
@@ -6823,10 +9244,10 @@
           <mc:Fallback xmlns="">
             <p:sp>
               <p:nvSpPr>
-                <p:cNvPr id="6" name="CaixaDeTexto 5">
+                <p:cNvPr id="4" name="CaixaDeTexto 3">
                   <a:extLst>
                     <a:ext uri="{FF2B5EF4-FFF2-40B4-BE49-F238E27FC236}">
-                      <a16:creationId xmlns:a16="http://schemas.microsoft.com/office/drawing/2014/main" id="{10491C75-CC2B-4E6F-00D1-D7BCDA1CAC51}"/>
+                      <a16:creationId xmlns:a16="http://schemas.microsoft.com/office/drawing/2014/main" id="{B6371B7D-BB1A-D7F3-A54B-3E89596BFE8C}"/>
                     </a:ext>
                   </a:extLst>
                 </p:cNvPr>
@@ -6837,16 +9258,16 @@
               </p:nvSpPr>
               <p:spPr>
                 <a:xfrm>
-                  <a:off x="3410072" y="3635566"/>
-                  <a:ext cx="738130" cy="369332"/>
+                  <a:off x="2409352" y="2755948"/>
+                  <a:ext cx="738130" cy="307777"/>
                 </a:xfrm>
                 <a:prstGeom prst="rect">
                   <a:avLst/>
                 </a:prstGeom>
                 <a:blipFill>
-                  <a:blip r:embed="rId4"/>
+                  <a:blip r:embed="rId6"/>
                   <a:stretch>
-                    <a:fillRect b="-13115"/>
+                    <a:fillRect b="-5882"/>
                   </a:stretch>
                 </a:blipFill>
               </p:spPr>
@@ -6855,7 +9276,7 @@
                 <a:lstStyle/>
                 <a:p>
                   <a:r>
-                    <a:rPr lang="pt-BR">
+                    <a:rPr lang="en-US">
                       <a:noFill/>
                     </a:rPr>
                     <a:t> </a:t>
@@ -6865,48 +9286,6 @@
             </p:sp>
           </mc:Fallback>
         </mc:AlternateContent>
-        <p:cxnSp>
-          <p:nvCxnSpPr>
-            <p:cNvPr id="8" name="Conector de Seta Reta 7">
-              <a:extLst>
-                <a:ext uri="{FF2B5EF4-FFF2-40B4-BE49-F238E27FC236}">
-                  <a16:creationId xmlns:a16="http://schemas.microsoft.com/office/drawing/2014/main" id="{29596D1D-F48C-73D6-3778-6E52A3153EFC}"/>
-                </a:ext>
-              </a:extLst>
-            </p:cNvPr>
-            <p:cNvCxnSpPr/>
-            <p:nvPr/>
-          </p:nvCxnSpPr>
-          <p:spPr>
-            <a:xfrm>
-              <a:off x="3150824" y="3602516"/>
-              <a:ext cx="374574" cy="198303"/>
-            </a:xfrm>
-            <a:prstGeom prst="straightConnector1">
-              <a:avLst/>
-            </a:prstGeom>
-            <a:ln>
-              <a:solidFill>
-                <a:srgbClr val="FF0000"/>
-              </a:solidFill>
-              <a:tailEnd type="triangle"/>
-            </a:ln>
-          </p:spPr>
-          <p:style>
-            <a:lnRef idx="1">
-              <a:schemeClr val="accent1"/>
-            </a:lnRef>
-            <a:fillRef idx="0">
-              <a:schemeClr val="accent1"/>
-            </a:fillRef>
-            <a:effectRef idx="0">
-              <a:schemeClr val="accent1"/>
-            </a:effectRef>
-            <a:fontRef idx="minor">
-              <a:schemeClr val="tx1"/>
-            </a:fontRef>
-          </p:style>
-        </p:cxnSp>
       </p:grpSp>
     </p:spTree>
     <p:extLst>
@@ -6966,8 +9345,8 @@
           </a:p>
         </p:txBody>
       </p:sp>
-      <mc:AlternateContent xmlns:mc="http://schemas.openxmlformats.org/markup-compatibility/2006">
-        <mc:Choice xmlns:a14="http://schemas.microsoft.com/office/drawing/2010/main" Requires="a14">
+      <mc:AlternateContent xmlns:mc="http://schemas.openxmlformats.org/markup-compatibility/2006" xmlns:a14="http://schemas.microsoft.com/office/drawing/2010/main">
+        <mc:Choice Requires="a14">
           <p:sp>
             <p:nvSpPr>
               <p:cNvPr id="3" name="Espaço Reservado para Conteúdo 2">
@@ -7334,7 +9713,7 @@
             </p:txBody>
           </p:sp>
         </mc:Choice>
-        <mc:Fallback>
+        <mc:Fallback xmlns="">
           <p:sp>
             <p:nvSpPr>
               <p:cNvPr id="3" name="Espaço Reservado para Conteúdo 2">
@@ -7610,8 +9989,8 @@
             </p:style>
           </p:cxnSp>
         </p:grpSp>
-        <mc:AlternateContent xmlns:mc="http://schemas.openxmlformats.org/markup-compatibility/2006">
-          <mc:Choice xmlns:a14="http://schemas.microsoft.com/office/drawing/2010/main" Requires="a14">
+        <mc:AlternateContent xmlns:mc="http://schemas.openxmlformats.org/markup-compatibility/2006" xmlns:a14="http://schemas.microsoft.com/office/drawing/2010/main">
+          <mc:Choice Requires="a14">
             <p:sp>
               <p:nvSpPr>
                 <p:cNvPr id="4" name="CaixaDeTexto 3">
@@ -7679,7 +10058,7 @@
               </p:txBody>
             </p:sp>
           </mc:Choice>
-          <mc:Fallback>
+          <mc:Fallback xmlns="">
             <p:sp>
               <p:nvSpPr>
                 <p:cNvPr id="4" name="CaixaDeTexto 3">
@@ -8155,8 +10534,8 @@
             </p:style>
           </p:cxnSp>
         </p:grpSp>
-        <mc:AlternateContent xmlns:mc="http://schemas.openxmlformats.org/markup-compatibility/2006">
-          <mc:Choice xmlns:a14="http://schemas.microsoft.com/office/drawing/2010/main" Requires="a14">
+        <mc:AlternateContent xmlns:mc="http://schemas.openxmlformats.org/markup-compatibility/2006" xmlns:a14="http://schemas.microsoft.com/office/drawing/2010/main">
+          <mc:Choice Requires="a14">
             <p:sp>
               <p:nvSpPr>
                 <p:cNvPr id="9" name="CaixaDeTexto 3">
@@ -8224,7 +10603,7 @@
               </p:txBody>
             </p:sp>
           </mc:Choice>
-          <mc:Fallback>
+          <mc:Fallback xmlns="">
             <p:sp>
               <p:nvSpPr>
                 <p:cNvPr id="9" name="CaixaDeTexto 3">
@@ -8602,8 +10981,8 @@
             </p:style>
           </p:cxnSp>
         </p:grpSp>
-        <mc:AlternateContent xmlns:mc="http://schemas.openxmlformats.org/markup-compatibility/2006">
-          <mc:Choice xmlns:a14="http://schemas.microsoft.com/office/drawing/2010/main" Requires="a14">
+        <mc:AlternateContent xmlns:mc="http://schemas.openxmlformats.org/markup-compatibility/2006" xmlns:a14="http://schemas.microsoft.com/office/drawing/2010/main">
+          <mc:Choice Requires="a14">
             <p:sp>
               <p:nvSpPr>
                 <p:cNvPr id="9" name="CaixaDeTexto 3">
@@ -8671,7 +11050,7 @@
               </p:txBody>
             </p:sp>
           </mc:Choice>
-          <mc:Fallback>
+          <mc:Fallback xmlns="">
             <p:sp>
               <p:nvSpPr>
                 <p:cNvPr id="9" name="CaixaDeTexto 3">

--- a/slides/C24_Regressão.pptx
+++ b/slides/C24_Regressão.pptx
@@ -5,10 +5,10 @@
     <p:sldMasterId id="2147483648" r:id="rId1"/>
   </p:sldMasterIdLst>
   <p:notesMasterIdLst>
-    <p:notesMasterId r:id="rId16"/>
+    <p:notesMasterId r:id="rId17"/>
   </p:notesMasterIdLst>
   <p:handoutMasterIdLst>
-    <p:handoutMasterId r:id="rId17"/>
+    <p:handoutMasterId r:id="rId18"/>
   </p:handoutMasterIdLst>
   <p:sldIdLst>
     <p:sldId id="256" r:id="rId2"/>
@@ -20,11 +20,12 @@
     <p:sldId id="470" r:id="rId8"/>
     <p:sldId id="471" r:id="rId9"/>
     <p:sldId id="472" r:id="rId10"/>
-    <p:sldId id="465" r:id="rId11"/>
-    <p:sldId id="520" r:id="rId12"/>
-    <p:sldId id="519" r:id="rId13"/>
-    <p:sldId id="293" r:id="rId14"/>
-    <p:sldId id="306" r:id="rId15"/>
+    <p:sldId id="521" r:id="rId11"/>
+    <p:sldId id="465" r:id="rId12"/>
+    <p:sldId id="520" r:id="rId13"/>
+    <p:sldId id="519" r:id="rId14"/>
+    <p:sldId id="293" r:id="rId15"/>
+    <p:sldId id="306" r:id="rId16"/>
   </p:sldIdLst>
   <p:sldSz cx="12192000" cy="6858000"/>
   <p:notesSz cx="7315200" cy="9601200"/>
@@ -288,7 +289,7 @@
           <a:p>
             <a:fld id="{144F1436-6906-4D93-B7A2-786C327BFA14}" type="datetimeFigureOut">
               <a:rPr lang="nl-BE" smtClean="0"/>
-              <a:t>8/02/2026</a:t>
+              <a:t>11/02/2026</a:t>
             </a:fld>
             <a:endParaRPr lang="nl-BE"/>
           </a:p>
@@ -453,7 +454,7 @@
           <a:p>
             <a:fld id="{AA8CD09E-2914-4F47-B6C1-51B2C31814C9}" type="datetimeFigureOut">
               <a:rPr lang="pt-BR" smtClean="0"/>
-              <a:t>08/02/2026</a:t>
+              <a:t>11/02/2026</a:t>
             </a:fld>
             <a:endParaRPr lang="pt-BR"/>
           </a:p>
@@ -1688,7 +1689,7 @@
           <a:p>
             <a:fld id="{6FC8D850-966F-45A6-8DE7-15B891E7D40D}" type="slidenum">
               <a:rPr lang="pt-BR" smtClean="0"/>
-              <a:t>10</a:t>
+              <a:t>11</a:t>
             </a:fld>
             <a:endParaRPr lang="pt-BR"/>
           </a:p>
@@ -1854,7 +1855,7 @@
           <a:p>
             <a:fld id="{63289F7E-B80B-496E-81B4-D396C37C9454}" type="datetimeFigureOut">
               <a:rPr lang="pt-BR" smtClean="0"/>
-              <a:t>08/02/2026</a:t>
+              <a:t>11/02/2026</a:t>
             </a:fld>
             <a:endParaRPr lang="pt-BR"/>
           </a:p>
@@ -2052,7 +2053,7 @@
           <a:p>
             <a:fld id="{63289F7E-B80B-496E-81B4-D396C37C9454}" type="datetimeFigureOut">
               <a:rPr lang="pt-BR" smtClean="0"/>
-              <a:t>08/02/2026</a:t>
+              <a:t>11/02/2026</a:t>
             </a:fld>
             <a:endParaRPr lang="pt-BR"/>
           </a:p>
@@ -2260,7 +2261,7 @@
           <a:p>
             <a:fld id="{63289F7E-B80B-496E-81B4-D396C37C9454}" type="datetimeFigureOut">
               <a:rPr lang="pt-BR" smtClean="0"/>
-              <a:t>08/02/2026</a:t>
+              <a:t>11/02/2026</a:t>
             </a:fld>
             <a:endParaRPr lang="pt-BR"/>
           </a:p>
@@ -2458,7 +2459,7 @@
           <a:p>
             <a:fld id="{63289F7E-B80B-496E-81B4-D396C37C9454}" type="datetimeFigureOut">
               <a:rPr lang="pt-BR" smtClean="0"/>
-              <a:t>08/02/2026</a:t>
+              <a:t>11/02/2026</a:t>
             </a:fld>
             <a:endParaRPr lang="pt-BR"/>
           </a:p>
@@ -2733,7 +2734,7 @@
           <a:p>
             <a:fld id="{63289F7E-B80B-496E-81B4-D396C37C9454}" type="datetimeFigureOut">
               <a:rPr lang="pt-BR" smtClean="0"/>
-              <a:t>08/02/2026</a:t>
+              <a:t>11/02/2026</a:t>
             </a:fld>
             <a:endParaRPr lang="pt-BR"/>
           </a:p>
@@ -2998,7 +2999,7 @@
           <a:p>
             <a:fld id="{63289F7E-B80B-496E-81B4-D396C37C9454}" type="datetimeFigureOut">
               <a:rPr lang="pt-BR" smtClean="0"/>
-              <a:t>08/02/2026</a:t>
+              <a:t>11/02/2026</a:t>
             </a:fld>
             <a:endParaRPr lang="pt-BR"/>
           </a:p>
@@ -3410,7 +3411,7 @@
           <a:p>
             <a:fld id="{63289F7E-B80B-496E-81B4-D396C37C9454}" type="datetimeFigureOut">
               <a:rPr lang="pt-BR" smtClean="0"/>
-              <a:t>08/02/2026</a:t>
+              <a:t>11/02/2026</a:t>
             </a:fld>
             <a:endParaRPr lang="pt-BR"/>
           </a:p>
@@ -3551,7 +3552,7 @@
           <a:p>
             <a:fld id="{63289F7E-B80B-496E-81B4-D396C37C9454}" type="datetimeFigureOut">
               <a:rPr lang="pt-BR" smtClean="0"/>
-              <a:t>08/02/2026</a:t>
+              <a:t>11/02/2026</a:t>
             </a:fld>
             <a:endParaRPr lang="pt-BR"/>
           </a:p>
@@ -3664,7 +3665,7 @@
           <a:p>
             <a:fld id="{63289F7E-B80B-496E-81B4-D396C37C9454}" type="datetimeFigureOut">
               <a:rPr lang="pt-BR" smtClean="0"/>
-              <a:t>08/02/2026</a:t>
+              <a:t>11/02/2026</a:t>
             </a:fld>
             <a:endParaRPr lang="pt-BR"/>
           </a:p>
@@ -3975,7 +3976,7 @@
           <a:p>
             <a:fld id="{63289F7E-B80B-496E-81B4-D396C37C9454}" type="datetimeFigureOut">
               <a:rPr lang="pt-BR" smtClean="0"/>
-              <a:t>08/02/2026</a:t>
+              <a:t>11/02/2026</a:t>
             </a:fld>
             <a:endParaRPr lang="pt-BR"/>
           </a:p>
@@ -4263,7 +4264,7 @@
           <a:p>
             <a:fld id="{63289F7E-B80B-496E-81B4-D396C37C9454}" type="datetimeFigureOut">
               <a:rPr lang="pt-BR" smtClean="0"/>
-              <a:t>08/02/2026</a:t>
+              <a:t>11/02/2026</a:t>
             </a:fld>
             <a:endParaRPr lang="pt-BR"/>
           </a:p>
@@ -4504,7 +4505,7 @@
           <a:p>
             <a:fld id="{63289F7E-B80B-496E-81B4-D396C37C9454}" type="datetimeFigureOut">
               <a:rPr lang="pt-BR" smtClean="0"/>
-              <a:t>08/02/2026</a:t>
+              <a:t>11/02/2026</a:t>
             </a:fld>
             <a:endParaRPr lang="pt-BR"/>
           </a:p>
@@ -5129,6 +5130,100 @@
       </p:grpSpPr>
       <p:sp>
         <p:nvSpPr>
+          <p:cNvPr id="2" name="Title 1">
+            <a:extLst>
+              <a:ext uri="{FF2B5EF4-FFF2-40B4-BE49-F238E27FC236}">
+                <a16:creationId xmlns:a16="http://schemas.microsoft.com/office/drawing/2014/main" id="{CED0B404-F3ED-8087-A024-C72B793DE4C8}"/>
+              </a:ext>
+            </a:extLst>
+          </p:cNvPr>
+          <p:cNvSpPr>
+            <a:spLocks noGrp="1"/>
+          </p:cNvSpPr>
+          <p:nvPr>
+            <p:ph type="title"/>
+          </p:nvPr>
+        </p:nvSpPr>
+        <p:spPr/>
+        <p:txBody>
+          <a:bodyPr/>
+          <a:lstStyle/>
+          <a:p>
+            <a:endParaRPr lang="en-US"/>
+          </a:p>
+        </p:txBody>
+      </p:sp>
+      <p:sp>
+        <p:nvSpPr>
+          <p:cNvPr id="3" name="Content Placeholder 2">
+            <a:extLst>
+              <a:ext uri="{FF2B5EF4-FFF2-40B4-BE49-F238E27FC236}">
+                <a16:creationId xmlns:a16="http://schemas.microsoft.com/office/drawing/2014/main" id="{C6D4684C-15AE-EBFA-CC52-BE2B10624210}"/>
+              </a:ext>
+            </a:extLst>
+          </p:cNvPr>
+          <p:cNvSpPr>
+            <a:spLocks noGrp="1"/>
+          </p:cNvSpPr>
+          <p:nvPr>
+            <p:ph idx="1"/>
+          </p:nvPr>
+        </p:nvSpPr>
+        <p:spPr/>
+        <p:txBody>
+          <a:bodyPr>
+            <a:normAutofit/>
+          </a:bodyPr>
+          <a:lstStyle/>
+          <a:p>
+            <a:r>
+              <a:rPr lang="pt-BR" sz="4800" b="1" dirty="0">
+                <a:solidFill>
+                  <a:srgbClr val="FF0000"/>
+                </a:solidFill>
+              </a:rPr>
+              <a:t>PAREI AQUI!!!!!!!!!!!</a:t>
+            </a:r>
+            <a:endParaRPr lang="en-US" sz="4800" b="1" dirty="0">
+              <a:solidFill>
+                <a:srgbClr val="FF0000"/>
+              </a:solidFill>
+            </a:endParaRPr>
+          </a:p>
+        </p:txBody>
+      </p:sp>
+    </p:spTree>
+    <p:extLst>
+      <p:ext uri="{BB962C8B-B14F-4D97-AF65-F5344CB8AC3E}">
+        <p14:creationId xmlns:p14="http://schemas.microsoft.com/office/powerpoint/2010/main" val="956125625"/>
+      </p:ext>
+    </p:extLst>
+  </p:cSld>
+  <p:clrMapOvr>
+    <a:masterClrMapping/>
+  </p:clrMapOvr>
+</p:sld>
+</file>
+
+<file path=ppt/slides/slide11.xml><?xml version="1.0" encoding="utf-8"?>
+<p:sld xmlns:a="http://schemas.openxmlformats.org/drawingml/2006/main" xmlns:r="http://schemas.openxmlformats.org/officeDocument/2006/relationships" xmlns:p="http://schemas.openxmlformats.org/presentationml/2006/main">
+  <p:cSld>
+    <p:spTree>
+      <p:nvGrpSpPr>
+        <p:cNvPr id="1" name=""/>
+        <p:cNvGrpSpPr/>
+        <p:nvPr/>
+      </p:nvGrpSpPr>
+      <p:grpSpPr>
+        <a:xfrm>
+          <a:off x="0" y="0"/>
+          <a:ext cx="0" cy="0"/>
+          <a:chOff x="0" y="0"/>
+          <a:chExt cx="0" cy="0"/>
+        </a:xfrm>
+      </p:grpSpPr>
+      <p:sp>
+        <p:nvSpPr>
           <p:cNvPr id="2" name="Título 1">
             <a:extLst>
               <a:ext uri="{FF2B5EF4-FFF2-40B4-BE49-F238E27FC236}">
@@ -5291,50 +5386,16 @@
                 </a14:m>
                 <a:r>
                   <a:rPr lang="pt-BR" dirty="0"/>
-                  <a:t>.</a:t>
-                </a:r>
-              </a:p>
-              <a:p>
-                <a:r>
-                  <a:rPr lang="pt-BR" dirty="0"/>
-                  <a:t>Na regressão linear, usamos </a:t>
+                  <a:t>, </a:t>
                 </a:r>
                 <a:r>
-                  <a:rPr lang="pt-BR" b="1" i="1" dirty="0">
+                  <a:rPr lang="pt-BR" b="1" dirty="0">
                     <a:solidFill>
-                      <a:srgbClr val="00B0F0"/>
+                      <a:srgbClr val="7030A0"/>
                     </a:solidFill>
                   </a:rPr>
-                  <a:t>funções que são combinações lineares dos atributos em relação a pesos </a:t>
+                  <a:t>em relação aos pesos</a:t>
                 </a:r>
-                <a:r>
-                  <a:rPr lang="pt-BR" dirty="0"/>
-                  <a:t>para modelar o relacionamento entre </a:t>
-                </a:r>
-                <a14:m>
-                  <m:oMath xmlns:m="http://schemas.openxmlformats.org/officeDocument/2006/math">
-                    <m:r>
-                      <a:rPr lang="pt-BR" b="1" i="1" smtClean="0">
-                        <a:latin typeface="Cambria Math" panose="02040503050406030204" pitchFamily="18" charset="0"/>
-                      </a:rPr>
-                      <m:t>𝒙</m:t>
-                    </m:r>
-                  </m:oMath>
-                </a14:m>
-                <a:r>
-                  <a:rPr lang="pt-BR" dirty="0"/>
-                  <a:t> e </a:t>
-                </a:r>
-                <a14:m>
-                  <m:oMath xmlns:m="http://schemas.openxmlformats.org/officeDocument/2006/math">
-                    <m:r>
-                      <a:rPr lang="pt-BR" b="0" i="1" smtClean="0">
-                        <a:latin typeface="Cambria Math" panose="02040503050406030204" pitchFamily="18" charset="0"/>
-                      </a:rPr>
-                      <m:t>𝑦</m:t>
-                    </m:r>
-                  </m:oMath>
-                </a14:m>
                 <a:r>
                   <a:rPr lang="pt-BR" dirty="0"/>
                   <a:t>.</a:t>
@@ -5400,6 +5461,58 @@
                   <a:t>”.</a:t>
                 </a:r>
               </a:p>
+              <a:p>
+                <a:r>
+                  <a:rPr lang="pt-BR" dirty="0"/>
+                  <a:t>Portanto, polinômios podem modelar relação lineares e não lineares entre os atributos, </a:t>
+                </a:r>
+                <a14:m>
+                  <m:oMath xmlns:m="http://schemas.openxmlformats.org/officeDocument/2006/math">
+                    <m:r>
+                      <a:rPr lang="pt-BR" b="1" i="1">
+                        <a:latin typeface="Cambria Math" panose="02040503050406030204" pitchFamily="18" charset="0"/>
+                      </a:rPr>
+                      <m:t>𝒙</m:t>
+                    </m:r>
+                  </m:oMath>
+                </a14:m>
+                <a:r>
+                  <a:rPr lang="pt-BR" dirty="0"/>
+                  <a:t>, e </a:t>
+                </a:r>
+                <a14:m>
+                  <m:oMath xmlns:m="http://schemas.openxmlformats.org/officeDocument/2006/math">
+                    <m:acc>
+                      <m:accPr>
+                        <m:chr m:val="̂"/>
+                        <m:ctrlPr>
+                          <a:rPr lang="pt-BR" i="1">
+                            <a:latin typeface="Cambria Math" panose="02040503050406030204" pitchFamily="18" charset="0"/>
+                          </a:rPr>
+                        </m:ctrlPr>
+                      </m:accPr>
+                      <m:e>
+                        <m:r>
+                          <a:rPr lang="pt-BR" i="1">
+                            <a:latin typeface="Cambria Math" panose="02040503050406030204" pitchFamily="18" charset="0"/>
+                          </a:rPr>
+                          <m:t>𝑦</m:t>
+                        </m:r>
+                      </m:e>
+                    </m:acc>
+                    <m:r>
+                      <a:rPr lang="pt-BR" b="0" i="0" smtClean="0">
+                        <a:latin typeface="Cambria Math" panose="02040503050406030204" pitchFamily="18" charset="0"/>
+                      </a:rPr>
+                      <m:t>.</m:t>
+                    </m:r>
+                  </m:oMath>
+                </a14:m>
+                <a:br>
+                  <a:rPr lang="pt-BR" dirty="0"/>
+                </a:br>
+                <a:endParaRPr lang="pt-BR" i="1" dirty="0"/>
+              </a:p>
             </p:txBody>
           </p:sp>
         </mc:Choice>
@@ -5428,7 +5541,7 @@
               <a:blipFill>
                 <a:blip r:embed="rId3"/>
                 <a:stretch>
-                  <a:fillRect l="-981" t="-1937" r="-109"/>
+                  <a:fillRect l="-981" t="-1937" r="-1363"/>
                 </a:stretch>
               </a:blipFill>
             </p:spPr>
@@ -5460,7 +5573,7 @@
 </p:sld>
 </file>
 
-<file path=ppt/slides/slide11.xml><?xml version="1.0" encoding="utf-8"?>
+<file path=ppt/slides/slide12.xml><?xml version="1.0" encoding="utf-8"?>
 <p:sld xmlns:a="http://schemas.openxmlformats.org/drawingml/2006/main" xmlns:r="http://schemas.openxmlformats.org/officeDocument/2006/relationships" xmlns:p="http://schemas.openxmlformats.org/presentationml/2006/main">
   <p:cSld>
     <p:spTree>
@@ -5511,8 +5624,8 @@
           </a:p>
         </p:txBody>
       </p:sp>
-      <mc:AlternateContent xmlns:mc="http://schemas.openxmlformats.org/markup-compatibility/2006">
-        <mc:Choice xmlns:a14="http://schemas.microsoft.com/office/drawing/2010/main" Requires="a14">
+      <mc:AlternateContent xmlns:mc="http://schemas.openxmlformats.org/markup-compatibility/2006" xmlns:a14="http://schemas.microsoft.com/office/drawing/2010/main">
+        <mc:Choice Requires="a14">
           <p:sp>
             <p:nvSpPr>
               <p:cNvPr id="3" name="Espaço Reservado para Conteúdo 2">
@@ -6721,7 +6834,7 @@
             </p:txBody>
           </p:sp>
         </mc:Choice>
-        <mc:Fallback>
+        <mc:Fallback xmlns="">
           <p:sp>
             <p:nvSpPr>
               <p:cNvPr id="3" name="Espaço Reservado para Conteúdo 2">
@@ -7046,7 +7159,7 @@
 </p:sld>
 </file>
 
-<file path=ppt/slides/slide12.xml><?xml version="1.0" encoding="utf-8"?>
+<file path=ppt/slides/slide13.xml><?xml version="1.0" encoding="utf-8"?>
 <p:sld xmlns:a="http://schemas.openxmlformats.org/drawingml/2006/main" xmlns:r="http://schemas.openxmlformats.org/officeDocument/2006/relationships" xmlns:p="http://schemas.openxmlformats.org/presentationml/2006/main">
   <p:cSld>
     <p:spTree>
@@ -7104,7 +7217,7 @@
 </p:sld>
 </file>
 
-<file path=ppt/slides/slide13.xml><?xml version="1.0" encoding="utf-8"?>
+<file path=ppt/slides/slide14.xml><?xml version="1.0" encoding="utf-8"?>
 <p:sld xmlns:a="http://schemas.openxmlformats.org/drawingml/2006/main" xmlns:r="http://schemas.openxmlformats.org/officeDocument/2006/relationships" xmlns:p="http://schemas.openxmlformats.org/presentationml/2006/main">
   <p:cSld>
     <p:spTree>
@@ -7190,7 +7303,7 @@
 </p:sld>
 </file>
 
-<file path=ppt/slides/slide14.xml><?xml version="1.0" encoding="utf-8"?>
+<file path=ppt/slides/slide15.xml><?xml version="1.0" encoding="utf-8"?>
 <p:sld xmlns:a="http://schemas.openxmlformats.org/drawingml/2006/main" xmlns:r="http://schemas.openxmlformats.org/officeDocument/2006/relationships" xmlns:p="http://schemas.openxmlformats.org/presentationml/2006/main">
   <p:cSld>
     <p:spTree>
@@ -8889,7 +9002,7 @@
           <a:p>
             <a:r>
               <a:rPr lang="pt-BR" dirty="0"/>
-              <a:t>É um dos mais simples, antigos e usados algoritmos de aprendizado de máquina.</a:t>
+              <a:t>É um dos algoritmos mais simples, antigos e usados de aprendizado de máquina.</a:t>
             </a:r>
           </a:p>
           <a:p>
@@ -9345,8 +9458,8 @@
           </a:p>
         </p:txBody>
       </p:sp>
-      <mc:AlternateContent xmlns:mc="http://schemas.openxmlformats.org/markup-compatibility/2006" xmlns:a14="http://schemas.microsoft.com/office/drawing/2010/main">
-        <mc:Choice Requires="a14">
+      <mc:AlternateContent xmlns:mc="http://schemas.openxmlformats.org/markup-compatibility/2006">
+        <mc:Choice xmlns:a14="http://schemas.microsoft.com/office/drawing/2010/main" Requires="a14">
           <p:sp>
             <p:nvSpPr>
               <p:cNvPr id="3" name="Espaço Reservado para Conteúdo 2">
@@ -9415,7 +9528,7 @@
                   <a:t>, que </a:t>
                 </a:r>
                 <a:r>
-                  <a:rPr lang="pt-BR" b="1" i="1" dirty="0">
+                  <a:rPr lang="pt-BR" b="1" dirty="0">
                     <a:solidFill>
                       <a:srgbClr val="00B050"/>
                     </a:solidFill>
@@ -9542,12 +9655,28 @@
                   <a:t> se ajuste aos dados coletados de </a:t>
                 </a:r>
                 <a:r>
+                  <a:rPr lang="pt-BR" b="1" dirty="0">
+                    <a:solidFill>
+                      <a:srgbClr val="00B050"/>
+                    </a:solidFill>
+                  </a:rPr>
+                  <a:t>forma</a:t>
+                </a:r>
+                <a:r>
                   <a:rPr lang="pt-BR" b="1" i="1" dirty="0">
                     <a:solidFill>
                       <a:srgbClr val="00B050"/>
                     </a:solidFill>
                   </a:rPr>
-                  <a:t>forma ótima</a:t>
+                  <a:t> </a:t>
+                </a:r>
+                <a:r>
+                  <a:rPr lang="pt-BR" b="1" dirty="0">
+                    <a:solidFill>
+                      <a:srgbClr val="00B050"/>
+                    </a:solidFill>
+                  </a:rPr>
+                  <a:t>ótima</a:t>
                 </a:r>
                 <a:r>
                   <a:rPr lang="pt-BR" dirty="0"/>
@@ -9565,13 +9694,40 @@
                   <a:t>Ótimo no sentido da </a:t>
                 </a:r>
                 <a:r>
+                  <a:rPr lang="pt-BR" b="1" dirty="0">
+                    <a:solidFill>
+                      <a:srgbClr val="00B050"/>
+                    </a:solidFill>
+                    <a:effectLst/>
+                  </a:rPr>
+                  <a:t>minimização</a:t>
+                </a:r>
+                <a:r>
                   <a:rPr lang="pt-BR" b="1" i="1" dirty="0">
                     <a:solidFill>
                       <a:srgbClr val="00B050"/>
                     </a:solidFill>
                     <a:effectLst/>
                   </a:rPr>
-                  <a:t>minimização da diferença </a:t>
+                  <a:t> </a:t>
+                </a:r>
+                <a:r>
+                  <a:rPr lang="pt-BR" b="1" dirty="0">
+                    <a:solidFill>
+                      <a:srgbClr val="00B050"/>
+                    </a:solidFill>
+                    <a:effectLst/>
+                  </a:rPr>
+                  <a:t>da diferença</a:t>
+                </a:r>
+                <a:r>
+                  <a:rPr lang="pt-BR" b="1" i="1" dirty="0">
+                    <a:solidFill>
+                      <a:srgbClr val="00B050"/>
+                    </a:solidFill>
+                    <a:effectLst/>
+                  </a:rPr>
+                  <a:t> </a:t>
                 </a:r>
                 <a:r>
                   <a:rPr lang="pt-BR" b="0" i="0" dirty="0">
@@ -9713,7 +9869,7 @@
             </p:txBody>
           </p:sp>
         </mc:Choice>
-        <mc:Fallback xmlns="">
+        <mc:Fallback>
           <p:sp>
             <p:nvSpPr>
               <p:cNvPr id="3" name="Espaço Reservado para Conteúdo 2">
@@ -10162,8 +10318,8 @@
           </a:p>
         </p:txBody>
       </p:sp>
-      <mc:AlternateContent xmlns:mc="http://schemas.openxmlformats.org/markup-compatibility/2006" xmlns:a14="http://schemas.microsoft.com/office/drawing/2010/main">
-        <mc:Choice Requires="a14">
+      <mc:AlternateContent xmlns:mc="http://schemas.openxmlformats.org/markup-compatibility/2006">
+        <mc:Choice xmlns:a14="http://schemas.microsoft.com/office/drawing/2010/main" Requires="a14">
           <p:sp>
             <p:nvSpPr>
               <p:cNvPr id="3" name="Espaço Reservado para Conteúdo 2">
@@ -10195,7 +10351,7 @@
                   <a:t>Dado que possuímos um </a:t>
                 </a:r>
                 <a:r>
-                  <a:rPr lang="pt-BR" b="1" i="1" dirty="0"/>
+                  <a:rPr lang="pt-BR" b="1" dirty="0"/>
                   <a:t>conjunto</a:t>
                 </a:r>
                 <a:r>
@@ -10217,7 +10373,7 @@
                   <a:t> (os </a:t>
                 </a:r>
                 <a:r>
-                  <a:rPr lang="pt-BR" b="1" i="1" dirty="0"/>
+                  <a:rPr lang="pt-BR" b="1" dirty="0"/>
                   <a:t>atributos</a:t>
                 </a:r>
                 <a:r>
@@ -10239,7 +10395,7 @@
                   <a:t> (os </a:t>
                 </a:r>
                 <a:r>
-                  <a:rPr lang="pt-BR" b="1" i="1" dirty="0"/>
+                  <a:rPr lang="pt-BR" b="1" dirty="0"/>
                   <a:t>rótulos</a:t>
                 </a:r>
                 <a:r>
@@ -10247,7 +10403,7 @@
                   <a:t>), </a:t>
                 </a:r>
                 <a:r>
-                  <a:rPr lang="pt-BR" b="1" i="1" dirty="0">
+                  <a:rPr lang="pt-BR" b="1" dirty="0">
                     <a:solidFill>
                       <a:srgbClr val="00B0F0"/>
                     </a:solidFill>
@@ -10258,7 +10414,7 @@
             </p:txBody>
           </p:sp>
         </mc:Choice>
-        <mc:Fallback xmlns="">
+        <mc:Fallback>
           <p:sp>
             <p:nvSpPr>
               <p:cNvPr id="3" name="Espaço Reservado para Conteúdo 2">
@@ -10292,7 +10448,7 @@
               <a:lstStyle/>
               <a:p>
                 <a:r>
-                  <a:rPr lang="pt-BR">
+                  <a:rPr lang="en-US">
                     <a:noFill/>
                   </a:rPr>
                   <a:t> </a:t>
@@ -10739,7 +10895,7 @@
               <a:buNone/>
             </a:pPr>
             <a:r>
-              <a:rPr lang="pt-BR" sz="4400" b="1" i="1" dirty="0">
+              <a:rPr lang="pt-BR" sz="4400" b="1" dirty="0">
                 <a:solidFill>
                   <a:srgbClr val="00B050"/>
                 </a:solidFill>

--- a/slides/C24_Regressão.pptx
+++ b/slides/C24_Regressão.pptx
@@ -20,8 +20,8 @@
     <p:sldId id="470" r:id="rId8"/>
     <p:sldId id="471" r:id="rId9"/>
     <p:sldId id="472" r:id="rId10"/>
-    <p:sldId id="521" r:id="rId11"/>
-    <p:sldId id="465" r:id="rId12"/>
+    <p:sldId id="465" r:id="rId11"/>
+    <p:sldId id="521" r:id="rId12"/>
     <p:sldId id="520" r:id="rId13"/>
     <p:sldId id="519" r:id="rId14"/>
     <p:sldId id="293" r:id="rId15"/>
@@ -289,7 +289,7 @@
           <a:p>
             <a:fld id="{144F1436-6906-4D93-B7A2-786C327BFA14}" type="datetimeFigureOut">
               <a:rPr lang="nl-BE" smtClean="0"/>
-              <a:t>11/02/2026</a:t>
+              <a:t>12/02/2026</a:t>
             </a:fld>
             <a:endParaRPr lang="nl-BE"/>
           </a:p>
@@ -355,7 +355,7 @@
           <a:p>
             <a:fld id="{F7E56D9B-79AD-444A-AFED-DEC23408F8B4}" type="slidenum">
               <a:rPr lang="nl-BE" smtClean="0"/>
-              <a:t>‹#›</a:t>
+              <a:t>‹nº›</a:t>
             </a:fld>
             <a:endParaRPr lang="nl-BE"/>
           </a:p>
@@ -454,7 +454,7 @@
           <a:p>
             <a:fld id="{AA8CD09E-2914-4F47-B6C1-51B2C31814C9}" type="datetimeFigureOut">
               <a:rPr lang="pt-BR" smtClean="0"/>
-              <a:t>11/02/2026</a:t>
+              <a:t>12/02/2026</a:t>
             </a:fld>
             <a:endParaRPr lang="pt-BR"/>
           </a:p>
@@ -612,7 +612,7 @@
           <a:p>
             <a:fld id="{6FC8D850-966F-45A6-8DE7-15B891E7D40D}" type="slidenum">
               <a:rPr lang="pt-BR" smtClean="0"/>
-              <a:t>‹#›</a:t>
+              <a:t>‹nº›</a:t>
             </a:fld>
             <a:endParaRPr lang="pt-BR"/>
           </a:p>
@@ -1689,7 +1689,7 @@
           <a:p>
             <a:fld id="{6FC8D850-966F-45A6-8DE7-15B891E7D40D}" type="slidenum">
               <a:rPr lang="pt-BR" smtClean="0"/>
-              <a:t>11</a:t>
+              <a:t>10</a:t>
             </a:fld>
             <a:endParaRPr lang="pt-BR"/>
           </a:p>
@@ -1699,6 +1699,324 @@
     <p:extLst>
       <p:ext uri="{BB962C8B-B14F-4D97-AF65-F5344CB8AC3E}">
         <p14:creationId xmlns:p14="http://schemas.microsoft.com/office/powerpoint/2010/main" val="763708746"/>
+      </p:ext>
+    </p:extLst>
+  </p:cSld>
+  <p:clrMapOvr>
+    <a:masterClrMapping/>
+  </p:clrMapOvr>
+</p:notes>
+</file>
+
+<file path=ppt/notesSlides/notesSlide7.xml><?xml version="1.0" encoding="utf-8"?>
+<p:notes xmlns:a="http://schemas.openxmlformats.org/drawingml/2006/main" xmlns:r="http://schemas.openxmlformats.org/officeDocument/2006/relationships" xmlns:p="http://schemas.openxmlformats.org/presentationml/2006/main">
+  <p:cSld>
+    <p:spTree>
+      <p:nvGrpSpPr>
+        <p:cNvPr id="1" name=""/>
+        <p:cNvGrpSpPr/>
+        <p:nvPr/>
+      </p:nvGrpSpPr>
+      <p:grpSpPr>
+        <a:xfrm>
+          <a:off x="0" y="0"/>
+          <a:ext cx="0" cy="0"/>
+          <a:chOff x="0" y="0"/>
+          <a:chExt cx="0" cy="0"/>
+        </a:xfrm>
+      </p:grpSpPr>
+      <p:sp>
+        <p:nvSpPr>
+          <p:cNvPr id="2" name="Espaço Reservado para Imagem de Slide 1"/>
+          <p:cNvSpPr>
+            <a:spLocks noGrp="1" noRot="1" noChangeAspect="1"/>
+          </p:cNvSpPr>
+          <p:nvPr>
+            <p:ph type="sldImg"/>
+          </p:nvPr>
+        </p:nvSpPr>
+        <p:spPr/>
+      </p:sp>
+      <p:sp>
+        <p:nvSpPr>
+          <p:cNvPr id="3" name="Espaço Reservado para Anotações 2"/>
+          <p:cNvSpPr>
+            <a:spLocks noGrp="1"/>
+          </p:cNvSpPr>
+          <p:nvPr>
+            <p:ph type="body" idx="1"/>
+          </p:nvPr>
+        </p:nvSpPr>
+        <p:spPr/>
+        <p:txBody>
+          <a:bodyPr/>
+          <a:lstStyle/>
+          <a:p>
+            <a:r>
+              <a:rPr lang="pt-BR" sz="1200" kern="1200" dirty="0">
+                <a:solidFill>
+                  <a:schemeClr val="tx1"/>
+                </a:solidFill>
+                <a:effectLst/>
+                <a:latin typeface="+mn-lt"/>
+                <a:ea typeface="+mn-ea"/>
+                <a:cs typeface="+mn-cs"/>
+              </a:rPr>
+              <a:t>Para aproximar uma função senoidal usando um polinômio, o método mais comum e elegante é a </a:t>
+            </a:r>
+            <a:r>
+              <a:rPr lang="pt-BR" sz="1200" b="1" kern="1200" dirty="0">
+                <a:solidFill>
+                  <a:schemeClr val="tx1"/>
+                </a:solidFill>
+                <a:effectLst/>
+                <a:latin typeface="+mn-lt"/>
+                <a:ea typeface="+mn-ea"/>
+                <a:cs typeface="+mn-cs"/>
+              </a:rPr>
+              <a:t>Série de Taylor</a:t>
+            </a:r>
+            <a:r>
+              <a:rPr lang="pt-BR" sz="1200" kern="1200" dirty="0">
+                <a:solidFill>
+                  <a:schemeClr val="tx1"/>
+                </a:solidFill>
+                <a:effectLst/>
+                <a:latin typeface="+mn-lt"/>
+                <a:ea typeface="+mn-ea"/>
+                <a:cs typeface="+mn-cs"/>
+              </a:rPr>
+              <a:t> (especificamente a Série de </a:t>
+            </a:r>
+            <a:r>
+              <a:rPr lang="pt-BR" sz="1200" kern="1200" dirty="0" err="1">
+                <a:solidFill>
+                  <a:schemeClr val="tx1"/>
+                </a:solidFill>
+                <a:effectLst/>
+                <a:latin typeface="+mn-lt"/>
+                <a:ea typeface="+mn-ea"/>
+                <a:cs typeface="+mn-cs"/>
+              </a:rPr>
+              <a:t>Maclaurin</a:t>
+            </a:r>
+            <a:r>
+              <a:rPr lang="pt-BR" sz="1200" kern="1200" dirty="0">
+                <a:solidFill>
+                  <a:schemeClr val="tx1"/>
+                </a:solidFill>
+                <a:effectLst/>
+                <a:latin typeface="+mn-lt"/>
+                <a:ea typeface="+mn-ea"/>
+                <a:cs typeface="+mn-cs"/>
+              </a:rPr>
+              <a:t>, quando centrada em zero).</a:t>
+            </a:r>
+          </a:p>
+          <a:p>
+            <a:r>
+              <a:rPr lang="pt-BR" sz="1200" kern="1200" dirty="0">
+                <a:solidFill>
+                  <a:schemeClr val="tx1"/>
+                </a:solidFill>
+                <a:effectLst/>
+                <a:latin typeface="+mn-lt"/>
+                <a:ea typeface="+mn-ea"/>
+                <a:cs typeface="+mn-cs"/>
+              </a:rPr>
+              <a:t>A fórmula para o seno é:</a:t>
+            </a:r>
+          </a:p>
+          <a:p>
+            <a:r>
+              <a:rPr lang="pt-BR" sz="1200" kern="1200" dirty="0">
+                <a:solidFill>
+                  <a:schemeClr val="tx1"/>
+                </a:solidFill>
+                <a:effectLst/>
+                <a:latin typeface="+mn-lt"/>
+                <a:ea typeface="+mn-ea"/>
+                <a:cs typeface="+mn-cs"/>
+              </a:rPr>
+              <a:t>$$\</a:t>
+            </a:r>
+            <a:r>
+              <a:rPr lang="pt-BR" sz="1200" kern="1200" dirty="0" err="1">
+                <a:solidFill>
+                  <a:schemeClr val="tx1"/>
+                </a:solidFill>
+                <a:effectLst/>
+                <a:latin typeface="+mn-lt"/>
+                <a:ea typeface="+mn-ea"/>
+                <a:cs typeface="+mn-cs"/>
+              </a:rPr>
+              <a:t>sin</a:t>
+            </a:r>
+            <a:r>
+              <a:rPr lang="pt-BR" sz="1200" kern="1200" dirty="0">
+                <a:solidFill>
+                  <a:schemeClr val="tx1"/>
+                </a:solidFill>
+                <a:effectLst/>
+                <a:latin typeface="+mn-lt"/>
+                <a:ea typeface="+mn-ea"/>
+                <a:cs typeface="+mn-cs"/>
+              </a:rPr>
+              <a:t>(x) \</a:t>
+            </a:r>
+            <a:r>
+              <a:rPr lang="pt-BR" sz="1200" kern="1200" dirty="0" err="1">
+                <a:solidFill>
+                  <a:schemeClr val="tx1"/>
+                </a:solidFill>
+                <a:effectLst/>
+                <a:latin typeface="+mn-lt"/>
+                <a:ea typeface="+mn-ea"/>
+                <a:cs typeface="+mn-cs"/>
+              </a:rPr>
+              <a:t>approx</a:t>
+            </a:r>
+            <a:r>
+              <a:rPr lang="pt-BR" sz="1200" kern="1200" dirty="0">
+                <a:solidFill>
+                  <a:schemeClr val="tx1"/>
+                </a:solidFill>
+                <a:effectLst/>
+                <a:latin typeface="+mn-lt"/>
+                <a:ea typeface="+mn-ea"/>
+                <a:cs typeface="+mn-cs"/>
+              </a:rPr>
+              <a:t> x - \</a:t>
+            </a:r>
+            <a:r>
+              <a:rPr lang="pt-BR" sz="1200" kern="1200" dirty="0" err="1">
+                <a:solidFill>
+                  <a:schemeClr val="tx1"/>
+                </a:solidFill>
+                <a:effectLst/>
+                <a:latin typeface="+mn-lt"/>
+                <a:ea typeface="+mn-ea"/>
+                <a:cs typeface="+mn-cs"/>
+              </a:rPr>
+              <a:t>frac</a:t>
+            </a:r>
+            <a:r>
+              <a:rPr lang="pt-BR" sz="1200" kern="1200" dirty="0">
+                <a:solidFill>
+                  <a:schemeClr val="tx1"/>
+                </a:solidFill>
+                <a:effectLst/>
+                <a:latin typeface="+mn-lt"/>
+                <a:ea typeface="+mn-ea"/>
+                <a:cs typeface="+mn-cs"/>
+              </a:rPr>
+              <a:t>{x^3}{3!} + \</a:t>
+            </a:r>
+            <a:r>
+              <a:rPr lang="pt-BR" sz="1200" kern="1200" dirty="0" err="1">
+                <a:solidFill>
+                  <a:schemeClr val="tx1"/>
+                </a:solidFill>
+                <a:effectLst/>
+                <a:latin typeface="+mn-lt"/>
+                <a:ea typeface="+mn-ea"/>
+                <a:cs typeface="+mn-cs"/>
+              </a:rPr>
+              <a:t>frac</a:t>
+            </a:r>
+            <a:r>
+              <a:rPr lang="pt-BR" sz="1200" kern="1200" dirty="0">
+                <a:solidFill>
+                  <a:schemeClr val="tx1"/>
+                </a:solidFill>
+                <a:effectLst/>
+                <a:latin typeface="+mn-lt"/>
+                <a:ea typeface="+mn-ea"/>
+                <a:cs typeface="+mn-cs"/>
+              </a:rPr>
+              <a:t>{x^5}{5!} - \</a:t>
+            </a:r>
+            <a:r>
+              <a:rPr lang="pt-BR" sz="1200" kern="1200" dirty="0" err="1">
+                <a:solidFill>
+                  <a:schemeClr val="tx1"/>
+                </a:solidFill>
+                <a:effectLst/>
+                <a:latin typeface="+mn-lt"/>
+                <a:ea typeface="+mn-ea"/>
+                <a:cs typeface="+mn-cs"/>
+              </a:rPr>
+              <a:t>frac</a:t>
+            </a:r>
+            <a:r>
+              <a:rPr lang="pt-BR" sz="1200" kern="1200" dirty="0">
+                <a:solidFill>
+                  <a:schemeClr val="tx1"/>
+                </a:solidFill>
+                <a:effectLst/>
+                <a:latin typeface="+mn-lt"/>
+                <a:ea typeface="+mn-ea"/>
+                <a:cs typeface="+mn-cs"/>
+              </a:rPr>
+              <a:t>{x^7}{7!} + \</a:t>
+            </a:r>
+            <a:r>
+              <a:rPr lang="pt-BR" sz="1200" kern="1200" dirty="0" err="1">
+                <a:solidFill>
+                  <a:schemeClr val="tx1"/>
+                </a:solidFill>
+                <a:effectLst/>
+                <a:latin typeface="+mn-lt"/>
+                <a:ea typeface="+mn-ea"/>
+                <a:cs typeface="+mn-cs"/>
+              </a:rPr>
+              <a:t>dots</a:t>
+            </a:r>
+            <a:r>
+              <a:rPr lang="pt-BR" sz="1200" kern="1200">
+                <a:solidFill>
+                  <a:schemeClr val="tx1"/>
+                </a:solidFill>
+                <a:effectLst/>
+                <a:latin typeface="+mn-lt"/>
+                <a:ea typeface="+mn-ea"/>
+                <a:cs typeface="+mn-cs"/>
+              </a:rPr>
+              <a:t>$$</a:t>
+            </a:r>
+          </a:p>
+          <a:p>
+            <a:endParaRPr lang="pt-BR"/>
+          </a:p>
+        </p:txBody>
+      </p:sp>
+      <p:sp>
+        <p:nvSpPr>
+          <p:cNvPr id="4" name="Espaço Reservado para Número de Slide 3"/>
+          <p:cNvSpPr>
+            <a:spLocks noGrp="1"/>
+          </p:cNvSpPr>
+          <p:nvPr>
+            <p:ph type="sldNum" sz="quarter" idx="5"/>
+          </p:nvPr>
+        </p:nvSpPr>
+        <p:spPr/>
+        <p:txBody>
+          <a:bodyPr/>
+          <a:lstStyle/>
+          <a:p>
+            <a:fld id="{6FC8D850-966F-45A6-8DE7-15B891E7D40D}" type="slidenum">
+              <a:rPr lang="pt-BR" smtClean="0"/>
+              <a:t>12</a:t>
+            </a:fld>
+            <a:endParaRPr lang="pt-BR"/>
+          </a:p>
+        </p:txBody>
+      </p:sp>
+    </p:spTree>
+    <p:extLst>
+      <p:ext uri="{BB962C8B-B14F-4D97-AF65-F5344CB8AC3E}">
+        <p14:creationId xmlns:p14="http://schemas.microsoft.com/office/powerpoint/2010/main" val="2805807960"/>
       </p:ext>
     </p:extLst>
   </p:cSld>
@@ -1855,7 +2173,7 @@
           <a:p>
             <a:fld id="{63289F7E-B80B-496E-81B4-D396C37C9454}" type="datetimeFigureOut">
               <a:rPr lang="pt-BR" smtClean="0"/>
-              <a:t>11/02/2026</a:t>
+              <a:t>12/02/2026</a:t>
             </a:fld>
             <a:endParaRPr lang="pt-BR"/>
           </a:p>
@@ -1909,7 +2227,7 @@
           <a:p>
             <a:fld id="{1A7E88B7-70CE-4035-AE73-13FA6FB985D4}" type="slidenum">
               <a:rPr lang="pt-BR" smtClean="0"/>
-              <a:t>‹#›</a:t>
+              <a:t>‹nº›</a:t>
             </a:fld>
             <a:endParaRPr lang="pt-BR"/>
           </a:p>
@@ -2053,7 +2371,7 @@
           <a:p>
             <a:fld id="{63289F7E-B80B-496E-81B4-D396C37C9454}" type="datetimeFigureOut">
               <a:rPr lang="pt-BR" smtClean="0"/>
-              <a:t>11/02/2026</a:t>
+              <a:t>12/02/2026</a:t>
             </a:fld>
             <a:endParaRPr lang="pt-BR"/>
           </a:p>
@@ -2107,7 +2425,7 @@
           <a:p>
             <a:fld id="{1A7E88B7-70CE-4035-AE73-13FA6FB985D4}" type="slidenum">
               <a:rPr lang="pt-BR" smtClean="0"/>
-              <a:t>‹#›</a:t>
+              <a:t>‹nº›</a:t>
             </a:fld>
             <a:endParaRPr lang="pt-BR"/>
           </a:p>
@@ -2261,7 +2579,7 @@
           <a:p>
             <a:fld id="{63289F7E-B80B-496E-81B4-D396C37C9454}" type="datetimeFigureOut">
               <a:rPr lang="pt-BR" smtClean="0"/>
-              <a:t>11/02/2026</a:t>
+              <a:t>12/02/2026</a:t>
             </a:fld>
             <a:endParaRPr lang="pt-BR"/>
           </a:p>
@@ -2315,7 +2633,7 @@
           <a:p>
             <a:fld id="{1A7E88B7-70CE-4035-AE73-13FA6FB985D4}" type="slidenum">
               <a:rPr lang="pt-BR" smtClean="0"/>
-              <a:t>‹#›</a:t>
+              <a:t>‹nº›</a:t>
             </a:fld>
             <a:endParaRPr lang="pt-BR"/>
           </a:p>
@@ -2459,7 +2777,7 @@
           <a:p>
             <a:fld id="{63289F7E-B80B-496E-81B4-D396C37C9454}" type="datetimeFigureOut">
               <a:rPr lang="pt-BR" smtClean="0"/>
-              <a:t>11/02/2026</a:t>
+              <a:t>12/02/2026</a:t>
             </a:fld>
             <a:endParaRPr lang="pt-BR"/>
           </a:p>
@@ -2513,7 +2831,7 @@
           <a:p>
             <a:fld id="{1A7E88B7-70CE-4035-AE73-13FA6FB985D4}" type="slidenum">
               <a:rPr lang="pt-BR" smtClean="0"/>
-              <a:t>‹#›</a:t>
+              <a:t>‹nº›</a:t>
             </a:fld>
             <a:endParaRPr lang="pt-BR"/>
           </a:p>
@@ -2734,7 +3052,7 @@
           <a:p>
             <a:fld id="{63289F7E-B80B-496E-81B4-D396C37C9454}" type="datetimeFigureOut">
               <a:rPr lang="pt-BR" smtClean="0"/>
-              <a:t>11/02/2026</a:t>
+              <a:t>12/02/2026</a:t>
             </a:fld>
             <a:endParaRPr lang="pt-BR"/>
           </a:p>
@@ -2788,7 +3106,7 @@
           <a:p>
             <a:fld id="{1A7E88B7-70CE-4035-AE73-13FA6FB985D4}" type="slidenum">
               <a:rPr lang="pt-BR" smtClean="0"/>
-              <a:t>‹#›</a:t>
+              <a:t>‹nº›</a:t>
             </a:fld>
             <a:endParaRPr lang="pt-BR"/>
           </a:p>
@@ -2999,7 +3317,7 @@
           <a:p>
             <a:fld id="{63289F7E-B80B-496E-81B4-D396C37C9454}" type="datetimeFigureOut">
               <a:rPr lang="pt-BR" smtClean="0"/>
-              <a:t>11/02/2026</a:t>
+              <a:t>12/02/2026</a:t>
             </a:fld>
             <a:endParaRPr lang="pt-BR"/>
           </a:p>
@@ -3053,7 +3371,7 @@
           <a:p>
             <a:fld id="{1A7E88B7-70CE-4035-AE73-13FA6FB985D4}" type="slidenum">
               <a:rPr lang="pt-BR" smtClean="0"/>
-              <a:t>‹#›</a:t>
+              <a:t>‹nº›</a:t>
             </a:fld>
             <a:endParaRPr lang="pt-BR"/>
           </a:p>
@@ -3411,7 +3729,7 @@
           <a:p>
             <a:fld id="{63289F7E-B80B-496E-81B4-D396C37C9454}" type="datetimeFigureOut">
               <a:rPr lang="pt-BR" smtClean="0"/>
-              <a:t>11/02/2026</a:t>
+              <a:t>12/02/2026</a:t>
             </a:fld>
             <a:endParaRPr lang="pt-BR"/>
           </a:p>
@@ -3465,7 +3783,7 @@
           <a:p>
             <a:fld id="{1A7E88B7-70CE-4035-AE73-13FA6FB985D4}" type="slidenum">
               <a:rPr lang="pt-BR" smtClean="0"/>
-              <a:t>‹#›</a:t>
+              <a:t>‹nº›</a:t>
             </a:fld>
             <a:endParaRPr lang="pt-BR"/>
           </a:p>
@@ -3552,7 +3870,7 @@
           <a:p>
             <a:fld id="{63289F7E-B80B-496E-81B4-D396C37C9454}" type="datetimeFigureOut">
               <a:rPr lang="pt-BR" smtClean="0"/>
-              <a:t>11/02/2026</a:t>
+              <a:t>12/02/2026</a:t>
             </a:fld>
             <a:endParaRPr lang="pt-BR"/>
           </a:p>
@@ -3606,7 +3924,7 @@
           <a:p>
             <a:fld id="{1A7E88B7-70CE-4035-AE73-13FA6FB985D4}" type="slidenum">
               <a:rPr lang="pt-BR" smtClean="0"/>
-              <a:t>‹#›</a:t>
+              <a:t>‹nº›</a:t>
             </a:fld>
             <a:endParaRPr lang="pt-BR"/>
           </a:p>
@@ -3665,7 +3983,7 @@
           <a:p>
             <a:fld id="{63289F7E-B80B-496E-81B4-D396C37C9454}" type="datetimeFigureOut">
               <a:rPr lang="pt-BR" smtClean="0"/>
-              <a:t>11/02/2026</a:t>
+              <a:t>12/02/2026</a:t>
             </a:fld>
             <a:endParaRPr lang="pt-BR"/>
           </a:p>
@@ -3719,7 +4037,7 @@
           <a:p>
             <a:fld id="{1A7E88B7-70CE-4035-AE73-13FA6FB985D4}" type="slidenum">
               <a:rPr lang="pt-BR" smtClean="0"/>
-              <a:t>‹#›</a:t>
+              <a:t>‹nº›</a:t>
             </a:fld>
             <a:endParaRPr lang="pt-BR"/>
           </a:p>
@@ -3976,7 +4294,7 @@
           <a:p>
             <a:fld id="{63289F7E-B80B-496E-81B4-D396C37C9454}" type="datetimeFigureOut">
               <a:rPr lang="pt-BR" smtClean="0"/>
-              <a:t>11/02/2026</a:t>
+              <a:t>12/02/2026</a:t>
             </a:fld>
             <a:endParaRPr lang="pt-BR"/>
           </a:p>
@@ -4030,7 +4348,7 @@
           <a:p>
             <a:fld id="{1A7E88B7-70CE-4035-AE73-13FA6FB985D4}" type="slidenum">
               <a:rPr lang="pt-BR" smtClean="0"/>
-              <a:t>‹#›</a:t>
+              <a:t>‹nº›</a:t>
             </a:fld>
             <a:endParaRPr lang="pt-BR"/>
           </a:p>
@@ -4264,7 +4582,7 @@
           <a:p>
             <a:fld id="{63289F7E-B80B-496E-81B4-D396C37C9454}" type="datetimeFigureOut">
               <a:rPr lang="pt-BR" smtClean="0"/>
-              <a:t>11/02/2026</a:t>
+              <a:t>12/02/2026</a:t>
             </a:fld>
             <a:endParaRPr lang="pt-BR"/>
           </a:p>
@@ -4318,7 +4636,7 @@
           <a:p>
             <a:fld id="{1A7E88B7-70CE-4035-AE73-13FA6FB985D4}" type="slidenum">
               <a:rPr lang="pt-BR" smtClean="0"/>
-              <a:t>‹#›</a:t>
+              <a:t>‹nº›</a:t>
             </a:fld>
             <a:endParaRPr lang="pt-BR"/>
           </a:p>
@@ -4505,7 +4823,7 @@
           <a:p>
             <a:fld id="{63289F7E-B80B-496E-81B4-D396C37C9454}" type="datetimeFigureOut">
               <a:rPr lang="pt-BR" smtClean="0"/>
-              <a:t>11/02/2026</a:t>
+              <a:t>12/02/2026</a:t>
             </a:fld>
             <a:endParaRPr lang="pt-BR"/>
           </a:p>
@@ -4595,7 +4913,7 @@
           <a:p>
             <a:fld id="{1A7E88B7-70CE-4035-AE73-13FA6FB985D4}" type="slidenum">
               <a:rPr lang="pt-BR" smtClean="0"/>
-              <a:t>‹#›</a:t>
+              <a:t>‹nº›</a:t>
             </a:fld>
             <a:endParaRPr lang="pt-BR"/>
           </a:p>
@@ -5130,100 +5448,6 @@
       </p:grpSpPr>
       <p:sp>
         <p:nvSpPr>
-          <p:cNvPr id="2" name="Title 1">
-            <a:extLst>
-              <a:ext uri="{FF2B5EF4-FFF2-40B4-BE49-F238E27FC236}">
-                <a16:creationId xmlns:a16="http://schemas.microsoft.com/office/drawing/2014/main" id="{CED0B404-F3ED-8087-A024-C72B793DE4C8}"/>
-              </a:ext>
-            </a:extLst>
-          </p:cNvPr>
-          <p:cNvSpPr>
-            <a:spLocks noGrp="1"/>
-          </p:cNvSpPr>
-          <p:nvPr>
-            <p:ph type="title"/>
-          </p:nvPr>
-        </p:nvSpPr>
-        <p:spPr/>
-        <p:txBody>
-          <a:bodyPr/>
-          <a:lstStyle/>
-          <a:p>
-            <a:endParaRPr lang="en-US"/>
-          </a:p>
-        </p:txBody>
-      </p:sp>
-      <p:sp>
-        <p:nvSpPr>
-          <p:cNvPr id="3" name="Content Placeholder 2">
-            <a:extLst>
-              <a:ext uri="{FF2B5EF4-FFF2-40B4-BE49-F238E27FC236}">
-                <a16:creationId xmlns:a16="http://schemas.microsoft.com/office/drawing/2014/main" id="{C6D4684C-15AE-EBFA-CC52-BE2B10624210}"/>
-              </a:ext>
-            </a:extLst>
-          </p:cNvPr>
-          <p:cNvSpPr>
-            <a:spLocks noGrp="1"/>
-          </p:cNvSpPr>
-          <p:nvPr>
-            <p:ph idx="1"/>
-          </p:nvPr>
-        </p:nvSpPr>
-        <p:spPr/>
-        <p:txBody>
-          <a:bodyPr>
-            <a:normAutofit/>
-          </a:bodyPr>
-          <a:lstStyle/>
-          <a:p>
-            <a:r>
-              <a:rPr lang="pt-BR" sz="4800" b="1" dirty="0">
-                <a:solidFill>
-                  <a:srgbClr val="FF0000"/>
-                </a:solidFill>
-              </a:rPr>
-              <a:t>PAREI AQUI!!!!!!!!!!!</a:t>
-            </a:r>
-            <a:endParaRPr lang="en-US" sz="4800" b="1" dirty="0">
-              <a:solidFill>
-                <a:srgbClr val="FF0000"/>
-              </a:solidFill>
-            </a:endParaRPr>
-          </a:p>
-        </p:txBody>
-      </p:sp>
-    </p:spTree>
-    <p:extLst>
-      <p:ext uri="{BB962C8B-B14F-4D97-AF65-F5344CB8AC3E}">
-        <p14:creationId xmlns:p14="http://schemas.microsoft.com/office/powerpoint/2010/main" val="956125625"/>
-      </p:ext>
-    </p:extLst>
-  </p:cSld>
-  <p:clrMapOvr>
-    <a:masterClrMapping/>
-  </p:clrMapOvr>
-</p:sld>
-</file>
-
-<file path=ppt/slides/slide11.xml><?xml version="1.0" encoding="utf-8"?>
-<p:sld xmlns:a="http://schemas.openxmlformats.org/drawingml/2006/main" xmlns:r="http://schemas.openxmlformats.org/officeDocument/2006/relationships" xmlns:p="http://schemas.openxmlformats.org/presentationml/2006/main">
-  <p:cSld>
-    <p:spTree>
-      <p:nvGrpSpPr>
-        <p:cNvPr id="1" name=""/>
-        <p:cNvGrpSpPr/>
-        <p:nvPr/>
-      </p:nvGrpSpPr>
-      <p:grpSpPr>
-        <a:xfrm>
-          <a:off x="0" y="0"/>
-          <a:ext cx="0" cy="0"/>
-          <a:chOff x="0" y="0"/>
-          <a:chExt cx="0" cy="0"/>
-        </a:xfrm>
-      </p:grpSpPr>
-      <p:sp>
-        <p:nvSpPr>
           <p:cNvPr id="2" name="Título 1">
             <a:extLst>
               <a:ext uri="{FF2B5EF4-FFF2-40B4-BE49-F238E27FC236}">
@@ -5271,7 +5495,7 @@
             <p:spPr>
               <a:xfrm>
                 <a:off x="838200" y="1825624"/>
-                <a:ext cx="11184082" cy="5032375"/>
+                <a:ext cx="11155325" cy="5032375"/>
               </a:xfrm>
             </p:spPr>
             <p:txBody>
@@ -5464,7 +5688,7 @@
               <a:p>
                 <a:r>
                   <a:rPr lang="pt-BR" dirty="0"/>
-                  <a:t>Portanto, polinômios podem modelar relação lineares e não lineares entre os atributos, </a:t>
+                  <a:t>Portanto, polinômios podem modelar qualquer tipo de mapeamento  (lineares ou não lineares) entre os atributos, </a:t>
                 </a:r>
                 <a14:m>
                   <m:oMath xmlns:m="http://schemas.openxmlformats.org/officeDocument/2006/math">
@@ -5504,13 +5728,32 @@
                       <a:rPr lang="pt-BR" b="0" i="0" smtClean="0">
                         <a:latin typeface="Cambria Math" panose="02040503050406030204" pitchFamily="18" charset="0"/>
                       </a:rPr>
-                      <m:t>.</m:t>
+                      <m:t>,</m:t>
                     </m:r>
                   </m:oMath>
                 </a14:m>
-                <a:br>
+                <a:r>
+                  <a:rPr lang="pt-BR" i="1" dirty="0"/>
+                  <a:t> </a:t>
+                </a:r>
+                <a:r>
                   <a:rPr lang="pt-BR" dirty="0"/>
-                </a:br>
+                  <a:t>bastando apenas </a:t>
+                </a:r>
+                <a:r>
+                  <a:rPr lang="pt-BR" b="1" dirty="0">
+                    <a:solidFill>
+                      <a:srgbClr val="7030A0"/>
+                    </a:solidFill>
+                  </a:rPr>
+                  <a:t>encontrar seu grau (ou ordem) ideal e os pesos</a:t>
+                </a:r>
+                <a:r>
+                  <a:rPr lang="pt-BR" dirty="0"/>
+                  <a:t>.</a:t>
+                </a:r>
+              </a:p>
+              <a:p>
                 <a:endParaRPr lang="pt-BR" i="1" dirty="0"/>
               </a:p>
             </p:txBody>
@@ -5536,12 +5779,12 @@
             <p:spPr>
               <a:xfrm>
                 <a:off x="838200" y="1825624"/>
-                <a:ext cx="11184082" cy="5032375"/>
+                <a:ext cx="11155325" cy="5032375"/>
               </a:xfrm>
               <a:blipFill>
                 <a:blip r:embed="rId3"/>
                 <a:stretch>
-                  <a:fillRect l="-981" t="-1937" r="-1363"/>
+                  <a:fillRect l="-984" t="-1937" r="-164"/>
                 </a:stretch>
               </a:blipFill>
             </p:spPr>
@@ -5550,7 +5793,7 @@
               <a:lstStyle/>
               <a:p>
                 <a:r>
-                  <a:rPr lang="en-US">
+                  <a:rPr lang="pt-BR">
                     <a:noFill/>
                   </a:rPr>
                   <a:t> </a:t>
@@ -5564,6 +5807,100 @@
     <p:extLst>
       <p:ext uri="{BB962C8B-B14F-4D97-AF65-F5344CB8AC3E}">
         <p14:creationId xmlns:p14="http://schemas.microsoft.com/office/powerpoint/2010/main" val="3982877338"/>
+      </p:ext>
+    </p:extLst>
+  </p:cSld>
+  <p:clrMapOvr>
+    <a:masterClrMapping/>
+  </p:clrMapOvr>
+</p:sld>
+</file>
+
+<file path=ppt/slides/slide11.xml><?xml version="1.0" encoding="utf-8"?>
+<p:sld xmlns:a="http://schemas.openxmlformats.org/drawingml/2006/main" xmlns:r="http://schemas.openxmlformats.org/officeDocument/2006/relationships" xmlns:p="http://schemas.openxmlformats.org/presentationml/2006/main">
+  <p:cSld>
+    <p:spTree>
+      <p:nvGrpSpPr>
+        <p:cNvPr id="1" name=""/>
+        <p:cNvGrpSpPr/>
+        <p:nvPr/>
+      </p:nvGrpSpPr>
+      <p:grpSpPr>
+        <a:xfrm>
+          <a:off x="0" y="0"/>
+          <a:ext cx="0" cy="0"/>
+          <a:chOff x="0" y="0"/>
+          <a:chExt cx="0" cy="0"/>
+        </a:xfrm>
+      </p:grpSpPr>
+      <p:sp>
+        <p:nvSpPr>
+          <p:cNvPr id="2" name="Title 1">
+            <a:extLst>
+              <a:ext uri="{FF2B5EF4-FFF2-40B4-BE49-F238E27FC236}">
+                <a16:creationId xmlns:a16="http://schemas.microsoft.com/office/drawing/2014/main" id="{CED0B404-F3ED-8087-A024-C72B793DE4C8}"/>
+              </a:ext>
+            </a:extLst>
+          </p:cNvPr>
+          <p:cNvSpPr>
+            <a:spLocks noGrp="1"/>
+          </p:cNvSpPr>
+          <p:nvPr>
+            <p:ph type="title"/>
+          </p:nvPr>
+        </p:nvSpPr>
+        <p:spPr/>
+        <p:txBody>
+          <a:bodyPr/>
+          <a:lstStyle/>
+          <a:p>
+            <a:endParaRPr lang="en-US"/>
+          </a:p>
+        </p:txBody>
+      </p:sp>
+      <p:sp>
+        <p:nvSpPr>
+          <p:cNvPr id="3" name="Content Placeholder 2">
+            <a:extLst>
+              <a:ext uri="{FF2B5EF4-FFF2-40B4-BE49-F238E27FC236}">
+                <a16:creationId xmlns:a16="http://schemas.microsoft.com/office/drawing/2014/main" id="{C6D4684C-15AE-EBFA-CC52-BE2B10624210}"/>
+              </a:ext>
+            </a:extLst>
+          </p:cNvPr>
+          <p:cNvSpPr>
+            <a:spLocks noGrp="1"/>
+          </p:cNvSpPr>
+          <p:nvPr>
+            <p:ph idx="1"/>
+          </p:nvPr>
+        </p:nvSpPr>
+        <p:spPr/>
+        <p:txBody>
+          <a:bodyPr>
+            <a:normAutofit/>
+          </a:bodyPr>
+          <a:lstStyle/>
+          <a:p>
+            <a:r>
+              <a:rPr lang="pt-BR" sz="4800" b="1" dirty="0">
+                <a:solidFill>
+                  <a:srgbClr val="FF0000"/>
+                </a:solidFill>
+              </a:rPr>
+              <a:t>PAREI AQUI!!!!!!!!!!!</a:t>
+            </a:r>
+            <a:endParaRPr lang="en-US" sz="4800" b="1" dirty="0">
+              <a:solidFill>
+                <a:srgbClr val="FF0000"/>
+              </a:solidFill>
+            </a:endParaRPr>
+          </a:p>
+        </p:txBody>
+      </p:sp>
+    </p:spTree>
+    <p:extLst>
+      <p:ext uri="{BB962C8B-B14F-4D97-AF65-F5344CB8AC3E}">
+        <p14:creationId xmlns:p14="http://schemas.microsoft.com/office/powerpoint/2010/main" val="956125625"/>
       </p:ext>
     </p:extLst>
   </p:cSld>
@@ -5624,8 +5961,8 @@
           </a:p>
         </p:txBody>
       </p:sp>
-      <mc:AlternateContent xmlns:mc="http://schemas.openxmlformats.org/markup-compatibility/2006" xmlns:a14="http://schemas.microsoft.com/office/drawing/2010/main">
-        <mc:Choice Requires="a14">
+      <mc:AlternateContent xmlns:mc="http://schemas.openxmlformats.org/markup-compatibility/2006">
+        <mc:Choice xmlns:a14="http://schemas.microsoft.com/office/drawing/2010/main" Requires="a14">
           <p:sp>
             <p:nvSpPr>
               <p:cNvPr id="3" name="Espaço Reservado para Conteúdo 2">
@@ -5644,125 +5981,27 @@
             </p:nvSpPr>
             <p:spPr>
               <a:xfrm>
-                <a:off x="4847422" y="1825624"/>
-                <a:ext cx="7174860" cy="5032375"/>
+                <a:off x="4391247" y="1825624"/>
+                <a:ext cx="7800753" cy="5032375"/>
               </a:xfrm>
             </p:spPr>
             <p:txBody>
               <a:bodyPr>
-                <a:normAutofit lnSpcReduction="10000"/>
+                <a:normAutofit/>
               </a:bodyPr>
               <a:lstStyle/>
               <a:p>
                 <a:r>
                   <a:rPr lang="pt-BR" dirty="0"/>
-                  <a:t>Podemos aproximar</a:t>
+                  <a:t>Podemos modelar um </a:t>
                 </a:r>
                 <a:r>
-                  <a:rPr lang="pt-BR" b="1" i="1" dirty="0">
-                    <a:solidFill>
-                      <a:srgbClr val="00B050"/>
-                    </a:solidFill>
-                  </a:rPr>
-                  <a:t> </a:t>
-                </a:r>
-                <a:r>
-                  <a:rPr lang="pt-BR" b="1" i="1" dirty="0">
-                    <a:solidFill>
-                      <a:srgbClr val="0070C0"/>
-                    </a:solidFill>
-                  </a:rPr>
-                  <a:t>qualquer tipo de mapeamento (linear ou não linear) </a:t>
+                  <a:rPr lang="pt-BR" b="1" dirty="0"/>
+                  <a:t>mapeamento linear</a:t>
                 </a:r>
                 <a:r>
                   <a:rPr lang="pt-BR" dirty="0"/>
-                  <a:t>com</a:t>
-                </a:r>
-                <a:r>
-                  <a:rPr lang="pt-BR" b="1" i="1" dirty="0">
-                    <a:solidFill>
-                      <a:srgbClr val="00B050"/>
-                    </a:solidFill>
-                  </a:rPr>
-                  <a:t> polinômios</a:t>
-                </a:r>
-                <a:r>
-                  <a:rPr lang="pt-BR" dirty="0"/>
-                  <a:t>, bastando apenas </a:t>
-                </a:r>
-                <a:r>
-                  <a:rPr lang="pt-BR" b="1" i="1" dirty="0">
-                    <a:solidFill>
-                      <a:srgbClr val="7030A0"/>
-                    </a:solidFill>
-                  </a:rPr>
-                  <a:t>encontrar o grau (ou ordem) ideal</a:t>
-                </a:r>
-                <a:r>
-                  <a:rPr lang="pt-BR" dirty="0"/>
-                  <a:t>.</a:t>
-                </a:r>
-              </a:p>
-              <a:p>
-                <a:r>
-                  <a:rPr lang="pt-BR" dirty="0"/>
-                  <a:t>Por exemplo, com </a:t>
-                </a:r>
-                <a:r>
-                  <a:rPr lang="pt-BR" b="1" i="1" dirty="0">
-                    <a:solidFill>
-                      <a:schemeClr val="accent2"/>
-                    </a:solidFill>
-                  </a:rPr>
-                  <a:t>um atributo</a:t>
-                </a:r>
-                <a:r>
-                  <a:rPr lang="pt-BR" dirty="0"/>
-                  <a:t>, </a:t>
-                </a:r>
-                <a14:m>
-                  <m:oMath xmlns:m="http://schemas.openxmlformats.org/officeDocument/2006/math">
-                    <m:sSub>
-                      <m:sSubPr>
-                        <m:ctrlPr>
-                          <a:rPr lang="pt-BR" i="1" smtClean="0">
-                            <a:latin typeface="Cambria Math" panose="02040503050406030204" pitchFamily="18" charset="0"/>
-                            <a:ea typeface="Cambria Math" panose="02040503050406030204" pitchFamily="18" charset="0"/>
-                          </a:rPr>
-                        </m:ctrlPr>
-                      </m:sSubPr>
-                      <m:e>
-                        <m:r>
-                          <a:rPr lang="pt-BR" i="1">
-                            <a:latin typeface="Cambria Math" panose="02040503050406030204" pitchFamily="18" charset="0"/>
-                            <a:ea typeface="Cambria Math" panose="02040503050406030204" pitchFamily="18" charset="0"/>
-                          </a:rPr>
-                          <m:t>𝑥</m:t>
-                        </m:r>
-                      </m:e>
-                      <m:sub>
-                        <m:r>
-                          <a:rPr lang="pt-BR" i="1">
-                            <a:latin typeface="Cambria Math" panose="02040503050406030204" pitchFamily="18" charset="0"/>
-                            <a:ea typeface="Cambria Math" panose="02040503050406030204" pitchFamily="18" charset="0"/>
-                          </a:rPr>
-                          <m:t>1</m:t>
-                        </m:r>
-                      </m:sub>
-                    </m:sSub>
-                  </m:oMath>
-                </a14:m>
-                <a:r>
-                  <a:rPr lang="pt-BR" dirty="0"/>
-                  <a:t>, temos a equação de uma </a:t>
-                </a:r>
-                <a:r>
-                  <a:rPr lang="pt-BR" b="1" i="1" dirty="0"/>
-                  <a:t>reta</a:t>
-                </a:r>
-                <a:r>
-                  <a:rPr lang="pt-BR" dirty="0"/>
-                  <a:t>:</a:t>
+                  <a:t> com a equação de uma reta:</a:t>
                 </a:r>
               </a:p>
               <a:p>
@@ -5805,7 +6044,7 @@
                     <m:d>
                       <m:dPr>
                         <m:ctrlPr>
-                          <a:rPr lang="pt-BR" b="1" i="1">
+                          <a:rPr lang="pt-BR" b="1" i="1" smtClean="0">
                             <a:latin typeface="Cambria Math" panose="02040503050406030204" pitchFamily="18" charset="0"/>
                             <a:ea typeface="Cambria Math" panose="02040503050406030204" pitchFamily="18" charset="0"/>
                           </a:rPr>
@@ -5813,11 +6052,11 @@
                       </m:dPr>
                       <m:e>
                         <m:r>
-                          <a:rPr lang="pt-BR" b="1" i="1">
+                          <a:rPr lang="pt-BR" b="0" i="1">
                             <a:latin typeface="Cambria Math" panose="02040503050406030204" pitchFamily="18" charset="0"/>
                             <a:ea typeface="Cambria Math" panose="02040503050406030204" pitchFamily="18" charset="0"/>
                           </a:rPr>
-                          <m:t>𝒙</m:t>
+                          <m:t>𝑥</m:t>
                         </m:r>
                       </m:e>
                     </m:d>
@@ -5826,7 +6065,14 @@
                         <a:latin typeface="Cambria Math" panose="02040503050406030204" pitchFamily="18" charset="0"/>
                         <a:ea typeface="Cambria Math" panose="02040503050406030204" pitchFamily="18" charset="0"/>
                       </a:rPr>
-                      <m:t>= </m:t>
+                      <m:t>=</m:t>
+                    </m:r>
+                    <m:r>
+                      <a:rPr lang="pt-BR" b="1" i="1" smtClean="0">
+                        <a:latin typeface="Cambria Math" panose="02040503050406030204" pitchFamily="18" charset="0"/>
+                        <a:ea typeface="Cambria Math" panose="02040503050406030204" pitchFamily="18" charset="0"/>
+                      </a:rPr>
+                      <m:t> </m:t>
                     </m:r>
                     <m:sSub>
                       <m:sSubPr>
@@ -5892,34 +6138,13 @@
                         </m:r>
                       </m:sub>
                     </m:sSub>
-                    <m:sSub>
-                      <m:sSubPr>
-                        <m:ctrlPr>
-                          <a:rPr lang="pt-BR" i="1">
-                            <a:latin typeface="Cambria Math" panose="02040503050406030204" pitchFamily="18" charset="0"/>
-                            <a:ea typeface="Cambria Math" panose="02040503050406030204" pitchFamily="18" charset="0"/>
-                          </a:rPr>
-                        </m:ctrlPr>
-                      </m:sSubPr>
-                      <m:e>
-                        <m:r>
-                          <a:rPr lang="pt-BR" i="1">
-                            <a:latin typeface="Cambria Math" panose="02040503050406030204" pitchFamily="18" charset="0"/>
-                            <a:ea typeface="Cambria Math" panose="02040503050406030204" pitchFamily="18" charset="0"/>
-                          </a:rPr>
-                          <m:t>𝑥</m:t>
-                        </m:r>
-                      </m:e>
-                      <m:sub>
-                        <m:r>
-                          <a:rPr lang="pt-BR" i="1">
-                            <a:latin typeface="Cambria Math" panose="02040503050406030204" pitchFamily="18" charset="0"/>
-                            <a:ea typeface="Cambria Math" panose="02040503050406030204" pitchFamily="18" charset="0"/>
-                          </a:rPr>
-                          <m:t>1</m:t>
-                        </m:r>
-                      </m:sub>
-                    </m:sSub>
+                    <m:r>
+                      <a:rPr lang="pt-BR" b="0" i="1" smtClean="0">
+                        <a:latin typeface="Cambria Math" panose="02040503050406030204" pitchFamily="18" charset="0"/>
+                        <a:ea typeface="Cambria Math" panose="02040503050406030204" pitchFamily="18" charset="0"/>
+                      </a:rPr>
+                      <m:t>𝑥</m:t>
+                    </m:r>
                   </m:oMath>
                 </a14:m>
                 <a:r>
@@ -5930,95 +6155,19 @@
               <a:p>
                 <a:r>
                   <a:rPr lang="pt-BR" dirty="0"/>
-                  <a:t>Já com </a:t>
+                  <a:t>Podemos ter um </a:t>
                 </a:r>
                 <a:r>
-                  <a:rPr lang="pt-BR" b="1" i="1" dirty="0">
-                    <a:solidFill>
-                      <a:schemeClr val="accent2"/>
-                    </a:solidFill>
-                  </a:rPr>
-                  <a:t>dois atributos</a:t>
+                  <a:rPr lang="pt-BR" b="1" dirty="0"/>
+                  <a:t>mapeamento não-linear</a:t>
                 </a:r>
                 <a:r>
                   <a:rPr lang="pt-BR" dirty="0"/>
-                  <a:t>, </a:t>
-                </a:r>
-                <a14:m>
-                  <m:oMath xmlns:m="http://schemas.openxmlformats.org/officeDocument/2006/math">
-                    <m:sSub>
-                      <m:sSubPr>
-                        <m:ctrlPr>
-                          <a:rPr lang="pt-BR" i="1" smtClean="0">
-                            <a:latin typeface="Cambria Math" panose="02040503050406030204" pitchFamily="18" charset="0"/>
-                            <a:ea typeface="Cambria Math" panose="02040503050406030204" pitchFamily="18" charset="0"/>
-                          </a:rPr>
-                        </m:ctrlPr>
-                      </m:sSubPr>
-                      <m:e>
-                        <m:r>
-                          <a:rPr lang="pt-BR" i="1">
-                            <a:latin typeface="Cambria Math" panose="02040503050406030204" pitchFamily="18" charset="0"/>
-                            <a:ea typeface="Cambria Math" panose="02040503050406030204" pitchFamily="18" charset="0"/>
-                          </a:rPr>
-                          <m:t>𝑥</m:t>
-                        </m:r>
-                      </m:e>
-                      <m:sub>
-                        <m:r>
-                          <a:rPr lang="pt-BR" i="1">
-                            <a:latin typeface="Cambria Math" panose="02040503050406030204" pitchFamily="18" charset="0"/>
-                            <a:ea typeface="Cambria Math" panose="02040503050406030204" pitchFamily="18" charset="0"/>
-                          </a:rPr>
-                          <m:t>1</m:t>
-                        </m:r>
-                      </m:sub>
-                    </m:sSub>
-                  </m:oMath>
-                </a14:m>
-                <a:r>
-                  <a:rPr lang="pt-BR" dirty="0"/>
-                  <a:t>e </a:t>
-                </a:r>
-                <a14:m>
-                  <m:oMath xmlns:m="http://schemas.openxmlformats.org/officeDocument/2006/math">
-                    <m:sSub>
-                      <m:sSubPr>
-                        <m:ctrlPr>
-                          <a:rPr lang="pt-BR" i="1">
-                            <a:latin typeface="Cambria Math" panose="02040503050406030204" pitchFamily="18" charset="0"/>
-                            <a:ea typeface="Cambria Math" panose="02040503050406030204" pitchFamily="18" charset="0"/>
-                          </a:rPr>
-                        </m:ctrlPr>
-                      </m:sSubPr>
-                      <m:e>
-                        <m:r>
-                          <a:rPr lang="pt-BR" i="1">
-                            <a:latin typeface="Cambria Math" panose="02040503050406030204" pitchFamily="18" charset="0"/>
-                            <a:ea typeface="Cambria Math" panose="02040503050406030204" pitchFamily="18" charset="0"/>
-                          </a:rPr>
-                          <m:t>𝑥</m:t>
-                        </m:r>
-                      </m:e>
-                      <m:sub>
-                        <m:r>
-                          <a:rPr lang="pt-BR" b="0" i="1" smtClean="0">
-                            <a:latin typeface="Cambria Math" panose="02040503050406030204" pitchFamily="18" charset="0"/>
-                            <a:ea typeface="Cambria Math" panose="02040503050406030204" pitchFamily="18" charset="0"/>
-                          </a:rPr>
-                          <m:t>2</m:t>
-                        </m:r>
-                      </m:sub>
-                    </m:sSub>
-                  </m:oMath>
-                </a14:m>
-                <a:r>
-                  <a:rPr lang="pt-BR" dirty="0"/>
-                  <a:t>, podemos ter a equação de um </a:t>
+                  <a:t> com uma equação que aproxima uma </a:t>
                 </a:r>
                 <a:r>
-                  <a:rPr lang="pt-BR" b="1" i="1" dirty="0"/>
-                  <a:t>plano</a:t>
+                  <a:rPr lang="pt-BR" dirty="0" err="1"/>
+                  <a:t>senoide</a:t>
                 </a:r>
                 <a:r>
                   <a:rPr lang="pt-BR" dirty="0"/>
@@ -6073,11 +6222,11 @@
                       </m:dPr>
                       <m:e>
                         <m:r>
-                          <a:rPr lang="pt-BR" b="1" i="1">
+                          <a:rPr lang="pt-BR" b="0" i="1">
                             <a:latin typeface="Cambria Math" panose="02040503050406030204" pitchFamily="18" charset="0"/>
                             <a:ea typeface="Cambria Math" panose="02040503050406030204" pitchFamily="18" charset="0"/>
                           </a:rPr>
-                          <m:t>𝒙</m:t>
+                          <m:t>𝑥</m:t>
                         </m:r>
                       </m:e>
                     </m:d>
@@ -6086,7 +6235,7 @@
                         <a:latin typeface="Cambria Math" panose="02040503050406030204" pitchFamily="18" charset="0"/>
                         <a:ea typeface="Cambria Math" panose="02040503050406030204" pitchFamily="18" charset="0"/>
                       </a:rPr>
-                      <m:t>= </m:t>
+                      <m:t>=</m:t>
                     </m:r>
                     <m:sSub>
                       <m:sSubPr>
@@ -6116,14 +6265,13 @@
                         </m:r>
                       </m:sub>
                     </m:sSub>
-                  </m:oMath>
-                </a14:m>
-                <a:r>
-                  <a:rPr lang="pt-BR" dirty="0"/>
-                  <a:t> + </a:t>
-                </a:r>
-                <a14:m>
-                  <m:oMath xmlns:m="http://schemas.openxmlformats.org/officeDocument/2006/math">
+                    <m:r>
+                      <a:rPr lang="pt-BR" b="0" i="1" smtClean="0">
+                        <a:latin typeface="Cambria Math" panose="02040503050406030204" pitchFamily="18" charset="0"/>
+                        <a:ea typeface="Cambria Math" panose="02040503050406030204" pitchFamily="18" charset="0"/>
+                      </a:rPr>
+                      <m:t>+</m:t>
+                    </m:r>
                     <m:sSub>
                       <m:sSubPr>
                         <m:ctrlPr>
@@ -6144,7 +6292,7 @@
                       </m:e>
                       <m:sub>
                         <m:r>
-                          <a:rPr lang="pt-BR" i="1">
+                          <a:rPr lang="pt-BR" b="0" i="1" smtClean="0">
                             <a:latin typeface="Cambria Math" panose="02040503050406030204" pitchFamily="18" charset="0"/>
                             <a:ea typeface="Cambria Math" panose="02040503050406030204" pitchFamily="18" charset="0"/>
                           </a:rPr>
@@ -6152,42 +6300,20 @@
                         </m:r>
                       </m:sub>
                     </m:sSub>
-                    <m:sSub>
-                      <m:sSubPr>
-                        <m:ctrlPr>
-                          <a:rPr lang="pt-BR" i="1">
-                            <a:latin typeface="Cambria Math" panose="02040503050406030204" pitchFamily="18" charset="0"/>
-                            <a:ea typeface="Cambria Math" panose="02040503050406030204" pitchFamily="18" charset="0"/>
-                          </a:rPr>
-                        </m:ctrlPr>
-                      </m:sSubPr>
-                      <m:e>
-                        <m:r>
-                          <a:rPr lang="pt-BR" i="1">
-                            <a:latin typeface="Cambria Math" panose="02040503050406030204" pitchFamily="18" charset="0"/>
-                            <a:ea typeface="Cambria Math" panose="02040503050406030204" pitchFamily="18" charset="0"/>
-                          </a:rPr>
-                          <m:t>𝑥</m:t>
-                        </m:r>
-                      </m:e>
-                      <m:sub>
-                        <m:r>
-                          <a:rPr lang="pt-BR" i="1">
-                            <a:latin typeface="Cambria Math" panose="02040503050406030204" pitchFamily="18" charset="0"/>
-                            <a:ea typeface="Cambria Math" panose="02040503050406030204" pitchFamily="18" charset="0"/>
-                          </a:rPr>
-                          <m:t>1</m:t>
-                        </m:r>
-                      </m:sub>
-                    </m:sSub>
-                  </m:oMath>
-                </a14:m>
-                <a:r>
-                  <a:rPr lang="pt-BR" dirty="0"/>
-                  <a:t> + </a:t>
-                </a:r>
-                <a14:m>
-                  <m:oMath xmlns:m="http://schemas.openxmlformats.org/officeDocument/2006/math">
+                    <m:r>
+                      <a:rPr lang="pt-BR" b="0" i="1" smtClean="0">
+                        <a:latin typeface="Cambria Math" panose="02040503050406030204" pitchFamily="18" charset="0"/>
+                        <a:ea typeface="Cambria Math" panose="02040503050406030204" pitchFamily="18" charset="0"/>
+                      </a:rPr>
+                      <m:t>𝑥</m:t>
+                    </m:r>
+                    <m:r>
+                      <a:rPr lang="pt-BR" b="0" i="1" smtClean="0">
+                        <a:latin typeface="Cambria Math" panose="02040503050406030204" pitchFamily="18" charset="0"/>
+                        <a:ea typeface="Cambria Math" panose="02040503050406030204" pitchFamily="18" charset="0"/>
+                      </a:rPr>
+                      <m:t>+</m:t>
+                    </m:r>
                     <m:sSub>
                       <m:sSubPr>
                         <m:ctrlPr>
@@ -6216,10 +6342,45 @@
                         </m:r>
                       </m:sub>
                     </m:sSub>
+                    <m:sSup>
+                      <m:sSupPr>
+                        <m:ctrlPr>
+                          <a:rPr lang="pt-BR" i="1">
+                            <a:latin typeface="Cambria Math" panose="02040503050406030204" pitchFamily="18" charset="0"/>
+                            <a:ea typeface="Cambria Math" panose="02040503050406030204" pitchFamily="18" charset="0"/>
+                          </a:rPr>
+                        </m:ctrlPr>
+                      </m:sSupPr>
+                      <m:e>
+                        <m:r>
+                          <a:rPr lang="pt-BR" i="1">
+                            <a:latin typeface="Cambria Math" panose="02040503050406030204" pitchFamily="18" charset="0"/>
+                            <a:ea typeface="Cambria Math" panose="02040503050406030204" pitchFamily="18" charset="0"/>
+                          </a:rPr>
+                          <m:t>𝑥</m:t>
+                        </m:r>
+                      </m:e>
+                      <m:sup>
+                        <m:r>
+                          <a:rPr lang="pt-BR" i="1">
+                            <a:latin typeface="Cambria Math" panose="02040503050406030204" pitchFamily="18" charset="0"/>
+                            <a:ea typeface="Cambria Math" panose="02040503050406030204" pitchFamily="18" charset="0"/>
+                          </a:rPr>
+                          <m:t>3</m:t>
+                        </m:r>
+                      </m:sup>
+                    </m:sSup>
+                    <m:r>
+                      <a:rPr lang="pt-BR" i="1">
+                        <a:latin typeface="Cambria Math" panose="02040503050406030204" pitchFamily="18" charset="0"/>
+                        <a:ea typeface="Cambria Math" panose="02040503050406030204" pitchFamily="18" charset="0"/>
+                      </a:rPr>
+                      <m:t>+</m:t>
+                    </m:r>
                     <m:sSub>
                       <m:sSubPr>
                         <m:ctrlPr>
-                          <a:rPr lang="pt-BR" i="1" smtClean="0">
+                          <a:rPr lang="pt-BR" i="1">
                             <a:latin typeface="Cambria Math" panose="02040503050406030204" pitchFamily="18" charset="0"/>
                             <a:ea typeface="Cambria Math" panose="02040503050406030204" pitchFamily="18" charset="0"/>
                           </a:rPr>
@@ -6231,7 +6392,7 @@
                             <a:latin typeface="Cambria Math" panose="02040503050406030204" pitchFamily="18" charset="0"/>
                             <a:ea typeface="Cambria Math" panose="02040503050406030204" pitchFamily="18" charset="0"/>
                           </a:rPr>
-                          <m:t>𝑥</m:t>
+                          <m:t>𝑎</m:t>
                         </m:r>
                       </m:e>
                       <m:sub>
@@ -6240,10 +6401,164 @@
                             <a:latin typeface="Cambria Math" panose="02040503050406030204" pitchFamily="18" charset="0"/>
                             <a:ea typeface="Cambria Math" panose="02040503050406030204" pitchFamily="18" charset="0"/>
                           </a:rPr>
-                          <m:t>2</m:t>
+                          <m:t>3</m:t>
                         </m:r>
                       </m:sub>
                     </m:sSub>
+                    <m:sSup>
+                      <m:sSupPr>
+                        <m:ctrlPr>
+                          <a:rPr lang="pt-BR" i="1">
+                            <a:latin typeface="Cambria Math" panose="02040503050406030204" pitchFamily="18" charset="0"/>
+                            <a:ea typeface="Cambria Math" panose="02040503050406030204" pitchFamily="18" charset="0"/>
+                          </a:rPr>
+                        </m:ctrlPr>
+                      </m:sSupPr>
+                      <m:e>
+                        <m:r>
+                          <a:rPr lang="pt-BR" i="1">
+                            <a:latin typeface="Cambria Math" panose="02040503050406030204" pitchFamily="18" charset="0"/>
+                            <a:ea typeface="Cambria Math" panose="02040503050406030204" pitchFamily="18" charset="0"/>
+                          </a:rPr>
+                          <m:t>𝑥</m:t>
+                        </m:r>
+                      </m:e>
+                      <m:sup>
+                        <m:r>
+                          <a:rPr lang="pt-BR" b="0" i="1" smtClean="0">
+                            <a:latin typeface="Cambria Math" panose="02040503050406030204" pitchFamily="18" charset="0"/>
+                            <a:ea typeface="Cambria Math" panose="02040503050406030204" pitchFamily="18" charset="0"/>
+                          </a:rPr>
+                          <m:t>5</m:t>
+                        </m:r>
+                      </m:sup>
+                    </m:sSup>
+                    <m:r>
+                      <a:rPr lang="pt-BR" b="0" i="1" smtClean="0">
+                        <a:latin typeface="Cambria Math" panose="02040503050406030204" pitchFamily="18" charset="0"/>
+                        <a:ea typeface="Cambria Math" panose="02040503050406030204" pitchFamily="18" charset="0"/>
+                      </a:rPr>
+                      <m:t>+</m:t>
+                    </m:r>
+                    <m:sSub>
+                      <m:sSubPr>
+                        <m:ctrlPr>
+                          <a:rPr lang="pt-BR" i="1">
+                            <a:latin typeface="Cambria Math" panose="02040503050406030204" pitchFamily="18" charset="0"/>
+                            <a:ea typeface="Cambria Math" panose="02040503050406030204" pitchFamily="18" charset="0"/>
+                          </a:rPr>
+                        </m:ctrlPr>
+                      </m:sSubPr>
+                      <m:e>
+                        <m:r>
+                          <a:rPr lang="pt-BR" i="1">
+                            <a:latin typeface="Cambria Math" panose="02040503050406030204" pitchFamily="18" charset="0"/>
+                            <a:ea typeface="Cambria Math" panose="02040503050406030204" pitchFamily="18" charset="0"/>
+                          </a:rPr>
+                          <m:t>𝑎</m:t>
+                        </m:r>
+                      </m:e>
+                      <m:sub>
+                        <m:r>
+                          <a:rPr lang="pt-BR" b="0" i="1" smtClean="0">
+                            <a:latin typeface="Cambria Math" panose="02040503050406030204" pitchFamily="18" charset="0"/>
+                            <a:ea typeface="Cambria Math" panose="02040503050406030204" pitchFamily="18" charset="0"/>
+                          </a:rPr>
+                          <m:t>4</m:t>
+                        </m:r>
+                      </m:sub>
+                    </m:sSub>
+                    <m:sSup>
+                      <m:sSupPr>
+                        <m:ctrlPr>
+                          <a:rPr lang="pt-BR" i="1">
+                            <a:latin typeface="Cambria Math" panose="02040503050406030204" pitchFamily="18" charset="0"/>
+                            <a:ea typeface="Cambria Math" panose="02040503050406030204" pitchFamily="18" charset="0"/>
+                          </a:rPr>
+                        </m:ctrlPr>
+                      </m:sSupPr>
+                      <m:e>
+                        <m:r>
+                          <a:rPr lang="pt-BR" i="1">
+                            <a:latin typeface="Cambria Math" panose="02040503050406030204" pitchFamily="18" charset="0"/>
+                            <a:ea typeface="Cambria Math" panose="02040503050406030204" pitchFamily="18" charset="0"/>
+                          </a:rPr>
+                          <m:t>𝑥</m:t>
+                        </m:r>
+                      </m:e>
+                      <m:sup>
+                        <m:r>
+                          <a:rPr lang="pt-BR" b="0" i="1" smtClean="0">
+                            <a:latin typeface="Cambria Math" panose="02040503050406030204" pitchFamily="18" charset="0"/>
+                            <a:ea typeface="Cambria Math" panose="02040503050406030204" pitchFamily="18" charset="0"/>
+                          </a:rPr>
+                          <m:t>7</m:t>
+                        </m:r>
+                      </m:sup>
+                    </m:sSup>
+                    <m:r>
+                      <a:rPr lang="pt-BR" i="1">
+                        <a:latin typeface="Cambria Math" panose="02040503050406030204" pitchFamily="18" charset="0"/>
+                        <a:ea typeface="Cambria Math" panose="02040503050406030204" pitchFamily="18" charset="0"/>
+                      </a:rPr>
+                      <m:t>+</m:t>
+                    </m:r>
+                    <m:sSub>
+                      <m:sSubPr>
+                        <m:ctrlPr>
+                          <a:rPr lang="pt-BR" i="1">
+                            <a:latin typeface="Cambria Math" panose="02040503050406030204" pitchFamily="18" charset="0"/>
+                            <a:ea typeface="Cambria Math" panose="02040503050406030204" pitchFamily="18" charset="0"/>
+                          </a:rPr>
+                        </m:ctrlPr>
+                      </m:sSubPr>
+                      <m:e>
+                        <m:r>
+                          <a:rPr lang="pt-BR" i="1">
+                            <a:latin typeface="Cambria Math" panose="02040503050406030204" pitchFamily="18" charset="0"/>
+                            <a:ea typeface="Cambria Math" panose="02040503050406030204" pitchFamily="18" charset="0"/>
+                          </a:rPr>
+                          <m:t>𝑎</m:t>
+                        </m:r>
+                      </m:e>
+                      <m:sub>
+                        <m:r>
+                          <a:rPr lang="pt-BR" b="0" i="1" smtClean="0">
+                            <a:latin typeface="Cambria Math" panose="02040503050406030204" pitchFamily="18" charset="0"/>
+                            <a:ea typeface="Cambria Math" panose="02040503050406030204" pitchFamily="18" charset="0"/>
+                          </a:rPr>
+                          <m:t>5</m:t>
+                        </m:r>
+                      </m:sub>
+                    </m:sSub>
+                    <m:sSup>
+                      <m:sSupPr>
+                        <m:ctrlPr>
+                          <a:rPr lang="pt-BR" i="1">
+                            <a:latin typeface="Cambria Math" panose="02040503050406030204" pitchFamily="18" charset="0"/>
+                            <a:ea typeface="Cambria Math" panose="02040503050406030204" pitchFamily="18" charset="0"/>
+                          </a:rPr>
+                        </m:ctrlPr>
+                      </m:sSupPr>
+                      <m:e>
+                        <m:r>
+                          <a:rPr lang="pt-BR" i="1">
+                            <a:latin typeface="Cambria Math" panose="02040503050406030204" pitchFamily="18" charset="0"/>
+                            <a:ea typeface="Cambria Math" panose="02040503050406030204" pitchFamily="18" charset="0"/>
+                          </a:rPr>
+                          <m:t>𝑥</m:t>
+                        </m:r>
+                      </m:e>
+                      <m:sup>
+                        <m:r>
+                          <a:rPr lang="pt-BR" b="0" i="1" smtClean="0">
+                            <a:latin typeface="Cambria Math" panose="02040503050406030204" pitchFamily="18" charset="0"/>
+                            <a:ea typeface="Cambria Math" panose="02040503050406030204" pitchFamily="18" charset="0"/>
+                          </a:rPr>
+                          <m:t>9</m:t>
+                        </m:r>
+                      </m:sup>
+                    </m:sSup>
                   </m:oMath>
                 </a14:m>
                 <a:r>
@@ -6252,10 +6567,18 @@
                 </a:r>
               </a:p>
               <a:p>
+                <a:r>
+                  <a:rPr lang="pt-BR" dirty="0"/>
+                  <a:t>Podemos ter mapeamentos lineares e não lineares com 2 ou mais atributos.</a:t>
+                </a:r>
+              </a:p>
+              <a:p>
                 <a:pPr marL="457200" lvl="1" indent="0" algn="ctr">
                   <a:buNone/>
                 </a:pPr>
-                <a:endParaRPr lang="pt-BR" dirty="0"/>
+                <a:endParaRPr lang="pt-BR" i="1" dirty="0">
+                  <a:latin typeface="Cambria Math" panose="02040503050406030204" pitchFamily="18" charset="0"/>
+                </a:endParaRPr>
               </a:p>
               <a:p>
                 <a:pPr marL="457200" lvl="1" indent="0" algn="ctr">
@@ -6834,7 +7157,7 @@
             </p:txBody>
           </p:sp>
         </mc:Choice>
-        <mc:Fallback xmlns="">
+        <mc:Fallback>
           <p:sp>
             <p:nvSpPr>
               <p:cNvPr id="3" name="Espaço Reservado para Conteúdo 2">
@@ -6853,281 +7176,13 @@
             </p:nvSpPr>
             <p:spPr>
               <a:xfrm>
-                <a:off x="4847422" y="1825624"/>
-                <a:ext cx="7174860" cy="5032375"/>
+                <a:off x="4391247" y="1825624"/>
+                <a:ext cx="7800753" cy="5032375"/>
               </a:xfrm>
               <a:blipFill>
-                <a:blip r:embed="rId2"/>
+                <a:blip r:embed="rId3"/>
                 <a:stretch>
-                  <a:fillRect l="-1529" t="-2663"/>
-                </a:stretch>
-              </a:blipFill>
-            </p:spPr>
-            <p:txBody>
-              <a:bodyPr/>
-              <a:lstStyle/>
-              <a:p>
-                <a:r>
-                  <a:rPr lang="en-US">
-                    <a:noFill/>
-                  </a:rPr>
-                  <a:t> </a:t>
-                </a:r>
-              </a:p>
-            </p:txBody>
-          </p:sp>
-        </mc:Fallback>
-      </mc:AlternateContent>
-      <p:pic>
-        <p:nvPicPr>
-          <p:cNvPr id="16" name="Picture 5">
-            <a:extLst>
-              <a:ext uri="{FF2B5EF4-FFF2-40B4-BE49-F238E27FC236}">
-                <a16:creationId xmlns:a16="http://schemas.microsoft.com/office/drawing/2014/main" id="{6B762FC7-E922-DA79-1250-E8A6D6A7D813}"/>
-              </a:ext>
-            </a:extLst>
-          </p:cNvPr>
-          <p:cNvPicPr>
-            <a:picLocks noChangeAspect="1"/>
-          </p:cNvPicPr>
-          <p:nvPr/>
-        </p:nvPicPr>
-        <p:blipFill rotWithShape="1">
-          <a:blip r:embed="rId3" cstate="print">
-            <a:extLst>
-              <a:ext uri="{28A0092B-C50C-407E-A947-70E740481C1C}">
-                <a14:useLocalDpi xmlns:a14="http://schemas.microsoft.com/office/drawing/2010/main" val="0"/>
-              </a:ext>
-            </a:extLst>
-          </a:blip>
-          <a:srcRect l="3301" t="11423" r="9569" b="2419"/>
-          <a:stretch/>
-        </p:blipFill>
-        <p:spPr>
-          <a:xfrm>
-            <a:off x="838200" y="1995964"/>
-            <a:ext cx="2677173" cy="1985502"/>
-          </a:xfrm>
-          <a:prstGeom prst="rect">
-            <a:avLst/>
-          </a:prstGeom>
-        </p:spPr>
-      </p:pic>
-      <mc:AlternateContent xmlns:mc="http://schemas.openxmlformats.org/markup-compatibility/2006" xmlns:a14="http://schemas.microsoft.com/office/drawing/2010/main">
-        <mc:Choice Requires="a14">
-          <p:sp>
-            <p:nvSpPr>
-              <p:cNvPr id="18" name="Rectangle 11">
-                <a:extLst>
-                  <a:ext uri="{FF2B5EF4-FFF2-40B4-BE49-F238E27FC236}">
-                    <a16:creationId xmlns:a16="http://schemas.microsoft.com/office/drawing/2014/main" id="{F2E3855C-B1A8-73CE-4337-2A0B4919B4AD}"/>
-                  </a:ext>
-                </a:extLst>
-              </p:cNvPr>
-              <p:cNvSpPr/>
-              <p:nvPr/>
-            </p:nvSpPr>
-            <p:spPr>
-              <a:xfrm>
-                <a:off x="886682" y="1635877"/>
-                <a:ext cx="2628691" cy="338554"/>
-              </a:xfrm>
-              <a:prstGeom prst="rect">
-                <a:avLst/>
-              </a:prstGeom>
-            </p:spPr>
-            <p:txBody>
-              <a:bodyPr wrap="square">
-                <a:spAutoFit/>
-              </a:bodyPr>
-              <a:lstStyle/>
-              <a:p>
-                <a:pPr algn="ctr"/>
-                <a14:m>
-                  <m:oMath xmlns:m="http://schemas.openxmlformats.org/officeDocument/2006/math">
-                    <m:r>
-                      <a:rPr lang="pt-BR" sz="1600" i="1">
-                        <a:latin typeface="Cambria Math" panose="02040503050406030204" pitchFamily="18" charset="0"/>
-                        <a:ea typeface="Cambria Math" panose="02040503050406030204" pitchFamily="18" charset="0"/>
-                      </a:rPr>
-                      <m:t>h</m:t>
-                    </m:r>
-                    <m:d>
-                      <m:dPr>
-                        <m:ctrlPr>
-                          <a:rPr lang="pt-BR" sz="1600" b="1" i="1">
-                            <a:latin typeface="Cambria Math" panose="02040503050406030204" pitchFamily="18" charset="0"/>
-                            <a:ea typeface="Cambria Math" panose="02040503050406030204" pitchFamily="18" charset="0"/>
-                          </a:rPr>
-                        </m:ctrlPr>
-                      </m:dPr>
-                      <m:e>
-                        <m:sSub>
-                          <m:sSubPr>
-                            <m:ctrlPr>
-                              <a:rPr lang="pt-BR" sz="1600" i="1">
-                                <a:latin typeface="Cambria Math" panose="02040503050406030204" pitchFamily="18" charset="0"/>
-                                <a:ea typeface="Cambria Math" panose="02040503050406030204" pitchFamily="18" charset="0"/>
-                              </a:rPr>
-                            </m:ctrlPr>
-                          </m:sSubPr>
-                          <m:e>
-                            <m:r>
-                              <a:rPr lang="pt-BR" sz="1600" i="1">
-                                <a:latin typeface="Cambria Math" panose="02040503050406030204" pitchFamily="18" charset="0"/>
-                                <a:ea typeface="Cambria Math" panose="02040503050406030204" pitchFamily="18" charset="0"/>
-                              </a:rPr>
-                              <m:t>𝑥</m:t>
-                            </m:r>
-                          </m:e>
-                          <m:sub>
-                            <m:r>
-                              <a:rPr lang="pt-BR" sz="1600" i="1">
-                                <a:latin typeface="Cambria Math" panose="02040503050406030204" pitchFamily="18" charset="0"/>
-                                <a:ea typeface="Cambria Math" panose="02040503050406030204" pitchFamily="18" charset="0"/>
-                              </a:rPr>
-                              <m:t>1</m:t>
-                            </m:r>
-                          </m:sub>
-                        </m:sSub>
-                      </m:e>
-                    </m:d>
-                    <m:r>
-                      <a:rPr lang="pt-BR" sz="1600" b="1" i="1">
-                        <a:latin typeface="Cambria Math" panose="02040503050406030204" pitchFamily="18" charset="0"/>
-                        <a:ea typeface="Cambria Math" panose="02040503050406030204" pitchFamily="18" charset="0"/>
-                      </a:rPr>
-                      <m:t>= </m:t>
-                    </m:r>
-                    <m:sSub>
-                      <m:sSubPr>
-                        <m:ctrlPr>
-                          <a:rPr lang="pt-BR" sz="1600" i="1">
-                            <a:latin typeface="Cambria Math" panose="02040503050406030204" pitchFamily="18" charset="0"/>
-                            <a:ea typeface="Cambria Math" panose="02040503050406030204" pitchFamily="18" charset="0"/>
-                          </a:rPr>
-                        </m:ctrlPr>
-                      </m:sSubPr>
-                      <m:e>
-                        <m:r>
-                          <a:rPr lang="pt-BR" sz="1600" i="1">
-                            <a:latin typeface="Cambria Math" panose="02040503050406030204" pitchFamily="18" charset="0"/>
-                            <a:ea typeface="Cambria Math" panose="02040503050406030204" pitchFamily="18" charset="0"/>
-                          </a:rPr>
-                          <m:t>𝑎</m:t>
-                        </m:r>
-                      </m:e>
-                      <m:sub>
-                        <m:r>
-                          <a:rPr lang="pt-BR" sz="1600" i="1">
-                            <a:latin typeface="Cambria Math" panose="02040503050406030204" pitchFamily="18" charset="0"/>
-                            <a:ea typeface="Cambria Math" panose="02040503050406030204" pitchFamily="18" charset="0"/>
-                          </a:rPr>
-                          <m:t>0</m:t>
-                        </m:r>
-                      </m:sub>
-                    </m:sSub>
-                  </m:oMath>
-                </a14:m>
-                <a:r>
-                  <a:rPr lang="pt-BR" sz="1600" dirty="0"/>
-                  <a:t> + </a:t>
-                </a:r>
-                <a14:m>
-                  <m:oMath xmlns:m="http://schemas.openxmlformats.org/officeDocument/2006/math">
-                    <m:sSub>
-                      <m:sSubPr>
-                        <m:ctrlPr>
-                          <a:rPr lang="pt-BR" sz="1600" i="1">
-                            <a:latin typeface="Cambria Math" panose="02040503050406030204" pitchFamily="18" charset="0"/>
-                            <a:ea typeface="Cambria Math" panose="02040503050406030204" pitchFamily="18" charset="0"/>
-                          </a:rPr>
-                        </m:ctrlPr>
-                      </m:sSubPr>
-                      <m:e>
-                        <m:r>
-                          <a:rPr lang="pt-BR" sz="1600" i="1">
-                            <a:latin typeface="Cambria Math" panose="02040503050406030204" pitchFamily="18" charset="0"/>
-                            <a:ea typeface="Cambria Math" panose="02040503050406030204" pitchFamily="18" charset="0"/>
-                          </a:rPr>
-                          <m:t>𝑎</m:t>
-                        </m:r>
-                      </m:e>
-                      <m:sub>
-                        <m:r>
-                          <a:rPr lang="pt-BR" sz="1600" i="1">
-                            <a:latin typeface="Cambria Math" panose="02040503050406030204" pitchFamily="18" charset="0"/>
-                            <a:ea typeface="Cambria Math" panose="02040503050406030204" pitchFamily="18" charset="0"/>
-                          </a:rPr>
-                          <m:t>1</m:t>
-                        </m:r>
-                      </m:sub>
-                    </m:sSub>
-                    <m:sSub>
-                      <m:sSubPr>
-                        <m:ctrlPr>
-                          <a:rPr lang="pt-BR" sz="1600" i="1">
-                            <a:latin typeface="Cambria Math" panose="02040503050406030204" pitchFamily="18" charset="0"/>
-                            <a:ea typeface="Cambria Math" panose="02040503050406030204" pitchFamily="18" charset="0"/>
-                          </a:rPr>
-                        </m:ctrlPr>
-                      </m:sSubPr>
-                      <m:e>
-                        <m:r>
-                          <a:rPr lang="pt-BR" sz="1600" i="1">
-                            <a:latin typeface="Cambria Math" panose="02040503050406030204" pitchFamily="18" charset="0"/>
-                            <a:ea typeface="Cambria Math" panose="02040503050406030204" pitchFamily="18" charset="0"/>
-                          </a:rPr>
-                          <m:t>𝑥</m:t>
-                        </m:r>
-                      </m:e>
-                      <m:sub>
-                        <m:r>
-                          <a:rPr lang="pt-BR" sz="1600" i="1">
-                            <a:latin typeface="Cambria Math" panose="02040503050406030204" pitchFamily="18" charset="0"/>
-                            <a:ea typeface="Cambria Math" panose="02040503050406030204" pitchFamily="18" charset="0"/>
-                          </a:rPr>
-                          <m:t>1</m:t>
-                        </m:r>
-                      </m:sub>
-                    </m:sSub>
-                  </m:oMath>
-                </a14:m>
-                <a:r>
-                  <a:rPr lang="pt-BR" sz="1600" dirty="0"/>
-                  <a:t> (reta)</a:t>
-                </a:r>
-              </a:p>
-            </p:txBody>
-          </p:sp>
-        </mc:Choice>
-        <mc:Fallback xmlns="">
-          <p:sp>
-            <p:nvSpPr>
-              <p:cNvPr id="18" name="Rectangle 11">
-                <a:extLst>
-                  <a:ext uri="{FF2B5EF4-FFF2-40B4-BE49-F238E27FC236}">
-                    <a16:creationId xmlns:a16="http://schemas.microsoft.com/office/drawing/2014/main" id="{4C95BBF0-D0FC-ED09-8232-4BA9B9608B03}"/>
-                  </a:ext>
-                </a:extLst>
-              </p:cNvPr>
-              <p:cNvSpPr>
-                <a:spLocks noRot="1" noChangeAspect="1" noMove="1" noResize="1" noEditPoints="1" noAdjustHandles="1" noChangeArrowheads="1" noChangeShapeType="1" noTextEdit="1"/>
-              </p:cNvSpPr>
-              <p:nvPr/>
-            </p:nvSpPr>
-            <p:spPr>
-              <a:xfrm>
-                <a:off x="886682" y="1635877"/>
-                <a:ext cx="2628691" cy="338554"/>
-              </a:xfrm>
-              <a:prstGeom prst="rect">
-                <a:avLst/>
-              </a:prstGeom>
-              <a:blipFill>
-                <a:blip r:embed="rId6"/>
-                <a:stretch>
-                  <a:fillRect t="-5357" b="-21429"/>
+                  <a:fillRect l="-1406" t="-1937" r="-1484"/>
                 </a:stretch>
               </a:blipFill>
             </p:spPr>
@@ -7146,6 +7201,100 @@
           </p:sp>
         </mc:Fallback>
       </mc:AlternateContent>
+      <p:pic>
+        <p:nvPicPr>
+          <p:cNvPr id="1028" name="Picture 4">
+            <a:extLst>
+              <a:ext uri="{FF2B5EF4-FFF2-40B4-BE49-F238E27FC236}">
+                <a16:creationId xmlns:a16="http://schemas.microsoft.com/office/drawing/2014/main" id="{12007748-1241-43BA-BCB2-C3CEA1054E90}"/>
+              </a:ext>
+            </a:extLst>
+          </p:cNvPr>
+          <p:cNvPicPr>
+            <a:picLocks noChangeAspect="1" noChangeArrowheads="1"/>
+          </p:cNvPicPr>
+          <p:nvPr/>
+        </p:nvPicPr>
+        <p:blipFill>
+          <a:blip r:embed="rId4">
+            <a:extLst>
+              <a:ext uri="{28A0092B-C50C-407E-A947-70E740481C1C}">
+                <a14:useLocalDpi xmlns:a14="http://schemas.microsoft.com/office/drawing/2010/main" val="0"/>
+              </a:ext>
+            </a:extLst>
+          </a:blip>
+          <a:srcRect/>
+          <a:stretch>
+            <a:fillRect/>
+          </a:stretch>
+        </p:blipFill>
+        <p:spPr bwMode="auto">
+          <a:xfrm>
+            <a:off x="838200" y="1552353"/>
+            <a:ext cx="3064982" cy="2232837"/>
+          </a:xfrm>
+          <a:prstGeom prst="rect">
+            <a:avLst/>
+          </a:prstGeom>
+          <a:noFill/>
+          <a:extLst>
+            <a:ext uri="{909E8E84-426E-40DD-AFC4-6F175D3DCCD1}">
+              <a14:hiddenFill xmlns:a14="http://schemas.microsoft.com/office/drawing/2010/main">
+                <a:solidFill>
+                  <a:srgbClr val="FFFFFF"/>
+                </a:solidFill>
+              </a14:hiddenFill>
+            </a:ext>
+          </a:extLst>
+        </p:spPr>
+      </p:pic>
+      <p:pic>
+        <p:nvPicPr>
+          <p:cNvPr id="1030" name="Picture 6">
+            <a:extLst>
+              <a:ext uri="{FF2B5EF4-FFF2-40B4-BE49-F238E27FC236}">
+                <a16:creationId xmlns:a16="http://schemas.microsoft.com/office/drawing/2014/main" id="{D0BE679B-48AF-4331-B659-21FE08DC204B}"/>
+              </a:ext>
+            </a:extLst>
+          </p:cNvPr>
+          <p:cNvPicPr>
+            <a:picLocks noChangeAspect="1" noChangeArrowheads="1"/>
+          </p:cNvPicPr>
+          <p:nvPr/>
+        </p:nvPicPr>
+        <p:blipFill>
+          <a:blip r:embed="rId5">
+            <a:extLst>
+              <a:ext uri="{28A0092B-C50C-407E-A947-70E740481C1C}">
+                <a14:useLocalDpi xmlns:a14="http://schemas.microsoft.com/office/drawing/2010/main" val="0"/>
+              </a:ext>
+            </a:extLst>
+          </a:blip>
+          <a:srcRect/>
+          <a:stretch>
+            <a:fillRect/>
+          </a:stretch>
+        </p:blipFill>
+        <p:spPr bwMode="auto">
+          <a:xfrm>
+            <a:off x="745866" y="4341811"/>
+            <a:ext cx="3157316" cy="2300102"/>
+          </a:xfrm>
+          <a:prstGeom prst="rect">
+            <a:avLst/>
+          </a:prstGeom>
+          <a:noFill/>
+          <a:extLst>
+            <a:ext uri="{909E8E84-426E-40DD-AFC4-6F175D3DCCD1}">
+              <a14:hiddenFill xmlns:a14="http://schemas.microsoft.com/office/drawing/2010/main">
+                <a:solidFill>
+                  <a:srgbClr val="FFFFFF"/>
+                </a:solidFill>
+              </a14:hiddenFill>
+            </a:ext>
+          </a:extLst>
+        </p:spPr>
+      </p:pic>
     </p:spTree>
     <p:extLst>
       <p:ext uri="{BB962C8B-B14F-4D97-AF65-F5344CB8AC3E}">
@@ -9458,8 +9607,8 @@
           </a:p>
         </p:txBody>
       </p:sp>
-      <mc:AlternateContent xmlns:mc="http://schemas.openxmlformats.org/markup-compatibility/2006">
-        <mc:Choice xmlns:a14="http://schemas.microsoft.com/office/drawing/2010/main" Requires="a14">
+      <mc:AlternateContent xmlns:mc="http://schemas.openxmlformats.org/markup-compatibility/2006" xmlns:a14="http://schemas.microsoft.com/office/drawing/2010/main">
+        <mc:Choice Requires="a14">
           <p:sp>
             <p:nvSpPr>
               <p:cNvPr id="3" name="Espaço Reservado para Conteúdo 2">
@@ -9869,7 +10018,7 @@
             </p:txBody>
           </p:sp>
         </mc:Choice>
-        <mc:Fallback>
+        <mc:Fallback xmlns="">
           <p:sp>
             <p:nvSpPr>
               <p:cNvPr id="3" name="Espaço Reservado para Conteúdo 2">
@@ -10318,8 +10467,8 @@
           </a:p>
         </p:txBody>
       </p:sp>
-      <mc:AlternateContent xmlns:mc="http://schemas.openxmlformats.org/markup-compatibility/2006">
-        <mc:Choice xmlns:a14="http://schemas.microsoft.com/office/drawing/2010/main" Requires="a14">
+      <mc:AlternateContent xmlns:mc="http://schemas.openxmlformats.org/markup-compatibility/2006" xmlns:a14="http://schemas.microsoft.com/office/drawing/2010/main">
+        <mc:Choice Requires="a14">
           <p:sp>
             <p:nvSpPr>
               <p:cNvPr id="3" name="Espaço Reservado para Conteúdo 2">
@@ -10414,7 +10563,7 @@
             </p:txBody>
           </p:sp>
         </mc:Choice>
-        <mc:Fallback>
+        <mc:Fallback xmlns="">
           <p:sp>
             <p:nvSpPr>
               <p:cNvPr id="3" name="Espaço Reservado para Conteúdo 2">

--- a/slides/C24_Regressão.pptx
+++ b/slides/C24_Regressão.pptx
@@ -5474,8 +5474,8 @@
           </a:p>
         </p:txBody>
       </p:sp>
-      <mc:AlternateContent xmlns:mc="http://schemas.openxmlformats.org/markup-compatibility/2006">
-        <mc:Choice xmlns:a14="http://schemas.microsoft.com/office/drawing/2010/main" Requires="a14">
+      <mc:AlternateContent xmlns:mc="http://schemas.openxmlformats.org/markup-compatibility/2006" xmlns:a14="http://schemas.microsoft.com/office/drawing/2010/main">
+        <mc:Choice Requires="a14">
           <p:sp>
             <p:nvSpPr>
               <p:cNvPr id="3" name="Espaço Reservado para Conteúdo 2">
@@ -5759,7 +5759,7 @@
             </p:txBody>
           </p:sp>
         </mc:Choice>
-        <mc:Fallback>
+        <mc:Fallback xmlns="">
           <p:sp>
             <p:nvSpPr>
               <p:cNvPr id="3" name="Espaço Reservado para Conteúdo 2">
@@ -5981,8 +5981,8 @@
             </p:nvSpPr>
             <p:spPr>
               <a:xfrm>
-                <a:off x="4391247" y="1825624"/>
-                <a:ext cx="7800753" cy="5032375"/>
+                <a:off x="4678326" y="1825624"/>
+                <a:ext cx="7513674" cy="5032375"/>
               </a:xfrm>
             </p:spPr>
             <p:txBody>
@@ -6571,11 +6571,6 @@
                   <a:rPr lang="pt-BR" dirty="0"/>
                   <a:t>Podemos ter mapeamentos lineares e não lineares com 2 ou mais atributos.</a:t>
                 </a:r>
-              </a:p>
-              <a:p>
-                <a:pPr marL="457200" lvl="1" indent="0" algn="ctr">
-                  <a:buNone/>
-                </a:pPr>
                 <a:endParaRPr lang="pt-BR" i="1" dirty="0">
                   <a:latin typeface="Cambria Math" panose="02040503050406030204" pitchFamily="18" charset="0"/>
                 </a:endParaRPr>
@@ -6590,14 +6585,15 @@
                       <m:jc m:val="centerGroup"/>
                     </m:oMathParaPr>
                     <m:oMath xmlns:m="http://schemas.openxmlformats.org/officeDocument/2006/math">
-                      <m:sSub>
-                        <m:sSubPr>
+                      <m:acc>
+                        <m:accPr>
+                          <m:chr m:val="̂"/>
                           <m:ctrlPr>
                             <a:rPr lang="pt-BR" i="1">
                               <a:latin typeface="Cambria Math" panose="02040503050406030204" pitchFamily="18" charset="0"/>
                             </a:rPr>
                           </m:ctrlPr>
-                        </m:sSubPr>
+                        </m:accPr>
                         <m:e>
                           <m:r>
                             <a:rPr lang="pt-BR" i="1">
@@ -6605,73 +6601,98 @@
                             </a:rPr>
                             <m:t>𝑦</m:t>
                           </m:r>
-                          <m:d>
-                            <m:dPr>
+                        </m:e>
+                      </m:acc>
+                      <m:r>
+                        <a:rPr lang="pt-BR" i="1">
+                          <a:latin typeface="Cambria Math" panose="02040503050406030204" pitchFamily="18" charset="0"/>
+                        </a:rPr>
+                        <m:t>=</m:t>
+                      </m:r>
+                      <m:r>
+                        <a:rPr lang="pt-BR" i="1">
+                          <a:latin typeface="Cambria Math" panose="02040503050406030204" pitchFamily="18" charset="0"/>
+                          <a:ea typeface="Cambria Math" panose="02040503050406030204" pitchFamily="18" charset="0"/>
+                        </a:rPr>
+                        <m:t>h</m:t>
+                      </m:r>
+                      <m:d>
+                        <m:dPr>
+                          <m:ctrlPr>
+                            <a:rPr lang="pt-BR" b="1" i="1">
+                              <a:latin typeface="Cambria Math" panose="02040503050406030204" pitchFamily="18" charset="0"/>
+                              <a:ea typeface="Cambria Math" panose="02040503050406030204" pitchFamily="18" charset="0"/>
+                            </a:rPr>
+                          </m:ctrlPr>
+                        </m:dPr>
+                        <m:e>
+                          <m:sSub>
+                            <m:sSubPr>
                               <m:ctrlPr>
                                 <a:rPr lang="pt-BR" i="1">
                                   <a:latin typeface="Cambria Math" panose="02040503050406030204" pitchFamily="18" charset="0"/>
                                 </a:rPr>
                               </m:ctrlPr>
-                            </m:dPr>
+                            </m:sSubPr>
                             <m:e>
-                              <m:sSub>
-                                <m:sSubPr>
-                                  <m:ctrlPr>
-                                    <a:rPr lang="pt-BR" i="1">
-                                      <a:latin typeface="Cambria Math" panose="02040503050406030204" pitchFamily="18" charset="0"/>
-                                    </a:rPr>
-                                  </m:ctrlPr>
-                                </m:sSubPr>
-                                <m:e>
-                                  <m:r>
-                                    <a:rPr lang="pt-BR" i="1">
-                                      <a:latin typeface="Cambria Math" panose="02040503050406030204" pitchFamily="18" charset="0"/>
-                                    </a:rPr>
-                                    <m:t>𝑥</m:t>
-                                  </m:r>
-                                </m:e>
-                                <m:sub>
-                                  <m:r>
-                                    <a:rPr lang="pt-BR" i="1">
-                                      <a:latin typeface="Cambria Math" panose="02040503050406030204" pitchFamily="18" charset="0"/>
-                                    </a:rPr>
-                                    <m:t>1</m:t>
-                                  </m:r>
-                                </m:sub>
-                              </m:sSub>
                               <m:r>
-                                <a:rPr lang="pt-BR" b="1" i="1">
+                                <a:rPr lang="pt-BR" i="1">
                                   <a:latin typeface="Cambria Math" panose="02040503050406030204" pitchFamily="18" charset="0"/>
                                 </a:rPr>
-                                <m:t>,</m:t>
+                                <m:t>𝑥</m:t>
                               </m:r>
-                              <m:sSub>
-                                <m:sSubPr>
-                                  <m:ctrlPr>
-                                    <a:rPr lang="pt-BR" i="1">
-                                      <a:latin typeface="Cambria Math" panose="02040503050406030204" pitchFamily="18" charset="0"/>
-                                    </a:rPr>
-                                  </m:ctrlPr>
-                                </m:sSubPr>
-                                <m:e>
-                                  <m:r>
-                                    <a:rPr lang="pt-BR" i="1">
-                                      <a:latin typeface="Cambria Math" panose="02040503050406030204" pitchFamily="18" charset="0"/>
-                                    </a:rPr>
-                                    <m:t>𝑥</m:t>
-                                  </m:r>
-                                </m:e>
-                                <m:sub>
-                                  <m:r>
-                                    <a:rPr lang="pt-BR" i="1">
-                                      <a:latin typeface="Cambria Math" panose="02040503050406030204" pitchFamily="18" charset="0"/>
-                                    </a:rPr>
-                                    <m:t>2</m:t>
-                                  </m:r>
-                                </m:sub>
-                              </m:sSub>
                             </m:e>
-                          </m:d>
+                            <m:sub>
+                              <m:r>
+                                <a:rPr lang="pt-BR" i="1">
+                                  <a:latin typeface="Cambria Math" panose="02040503050406030204" pitchFamily="18" charset="0"/>
+                                </a:rPr>
+                                <m:t>1</m:t>
+                              </m:r>
+                            </m:sub>
+                          </m:sSub>
+                          <m:r>
+                            <a:rPr lang="pt-BR" b="1" i="1">
+                              <a:latin typeface="Cambria Math" panose="02040503050406030204" pitchFamily="18" charset="0"/>
+                            </a:rPr>
+                            <m:t>,</m:t>
+                          </m:r>
+                          <m:sSub>
+                            <m:sSubPr>
+                              <m:ctrlPr>
+                                <a:rPr lang="pt-BR" i="1">
+                                  <a:latin typeface="Cambria Math" panose="02040503050406030204" pitchFamily="18" charset="0"/>
+                                </a:rPr>
+                              </m:ctrlPr>
+                            </m:sSubPr>
+                            <m:e>
+                              <m:r>
+                                <a:rPr lang="pt-BR" i="1">
+                                  <a:latin typeface="Cambria Math" panose="02040503050406030204" pitchFamily="18" charset="0"/>
+                                </a:rPr>
+                                <m:t>𝑥</m:t>
+                              </m:r>
+                            </m:e>
+                            <m:sub>
+                              <m:r>
+                                <a:rPr lang="pt-BR" i="1">
+                                  <a:latin typeface="Cambria Math" panose="02040503050406030204" pitchFamily="18" charset="0"/>
+                                </a:rPr>
+                                <m:t>2</m:t>
+                              </m:r>
+                            </m:sub>
+                          </m:sSub>
+                        </m:e>
+                      </m:d>
+                      <m:sSub>
+                        <m:sSubPr>
+                          <m:ctrlPr>
+                            <a:rPr lang="pt-BR" i="1" smtClean="0">
+                              <a:latin typeface="Cambria Math" panose="02040503050406030204" pitchFamily="18" charset="0"/>
+                            </a:rPr>
+                          </m:ctrlPr>
+                        </m:sSubPr>
+                        <m:e>
                           <m:r>
                             <a:rPr lang="pt-BR" i="1">
                               <a:latin typeface="Cambria Math" panose="02040503050406030204" pitchFamily="18" charset="0"/>
@@ -7148,12 +7169,6 @@
                 </a14:m>
                 <a:endParaRPr lang="pt-BR" dirty="0"/>
               </a:p>
-              <a:p>
-                <a:pPr marL="457200" lvl="1" indent="0" algn="ctr">
-                  <a:buNone/>
-                </a:pPr>
-                <a:endParaRPr lang="pt-BR" dirty="0"/>
-              </a:p>
             </p:txBody>
           </p:sp>
         </mc:Choice>
@@ -7176,13 +7191,13 @@
             </p:nvSpPr>
             <p:spPr>
               <a:xfrm>
-                <a:off x="4391247" y="1825624"/>
-                <a:ext cx="7800753" cy="5032375"/>
+                <a:off x="4678326" y="1825624"/>
+                <a:ext cx="7513674" cy="5032375"/>
               </a:xfrm>
               <a:blipFill>
                 <a:blip r:embed="rId3"/>
                 <a:stretch>
-                  <a:fillRect l="-1406" t="-1937" r="-1484"/>
+                  <a:fillRect l="-1460" t="-1937" r="-487"/>
                 </a:stretch>
               </a:blipFill>
             </p:spPr>
@@ -7230,8 +7245,8 @@
         </p:blipFill>
         <p:spPr bwMode="auto">
           <a:xfrm>
-            <a:off x="838200" y="1552353"/>
-            <a:ext cx="3064982" cy="2232837"/>
+            <a:off x="391632" y="1690688"/>
+            <a:ext cx="3157316" cy="2300102"/>
           </a:xfrm>
           <a:prstGeom prst="rect">
             <a:avLst/>
@@ -7277,7 +7292,7 @@
         </p:blipFill>
         <p:spPr bwMode="auto">
           <a:xfrm>
-            <a:off x="745866" y="4341811"/>
+            <a:off x="391632" y="4193397"/>
             <a:ext cx="3157316" cy="2300102"/>
           </a:xfrm>
           <a:prstGeom prst="rect">

--- a/slides/C24_Regressão.pptx
+++ b/slides/C24_Regressão.pptx
@@ -5,10 +5,10 @@
     <p:sldMasterId id="2147483648" r:id="rId1"/>
   </p:sldMasterIdLst>
   <p:notesMasterIdLst>
-    <p:notesMasterId r:id="rId17"/>
+    <p:notesMasterId r:id="rId23"/>
   </p:notesMasterIdLst>
   <p:handoutMasterIdLst>
-    <p:handoutMasterId r:id="rId18"/>
+    <p:handoutMasterId r:id="rId24"/>
   </p:handoutMasterIdLst>
   <p:sldIdLst>
     <p:sldId id="256" r:id="rId2"/>
@@ -21,11 +21,17 @@
     <p:sldId id="471" r:id="rId9"/>
     <p:sldId id="472" r:id="rId10"/>
     <p:sldId id="465" r:id="rId11"/>
-    <p:sldId id="521" r:id="rId12"/>
-    <p:sldId id="520" r:id="rId13"/>
-    <p:sldId id="519" r:id="rId14"/>
-    <p:sldId id="293" r:id="rId15"/>
-    <p:sldId id="306" r:id="rId16"/>
+    <p:sldId id="520" r:id="rId12"/>
+    <p:sldId id="522" r:id="rId13"/>
+    <p:sldId id="523" r:id="rId14"/>
+    <p:sldId id="524" r:id="rId15"/>
+    <p:sldId id="481" r:id="rId16"/>
+    <p:sldId id="525" r:id="rId17"/>
+    <p:sldId id="320" r:id="rId18"/>
+    <p:sldId id="521" r:id="rId19"/>
+    <p:sldId id="526" r:id="rId20"/>
+    <p:sldId id="293" r:id="rId21"/>
+    <p:sldId id="306" r:id="rId22"/>
   </p:sldIdLst>
   <p:sldSz cx="12192000" cy="6858000"/>
   <p:notesSz cx="7315200" cy="9601200"/>
@@ -355,7 +361,7 @@
           <a:p>
             <a:fld id="{F7E56D9B-79AD-444A-AFED-DEC23408F8B4}" type="slidenum">
               <a:rPr lang="nl-BE" smtClean="0"/>
-              <a:t>‹nº›</a:t>
+              <a:t>‹#›</a:t>
             </a:fld>
             <a:endParaRPr lang="nl-BE"/>
           </a:p>
@@ -612,7 +618,7 @@
           <a:p>
             <a:fld id="{6FC8D850-966F-45A6-8DE7-15B891E7D40D}" type="slidenum">
               <a:rPr lang="pt-BR" smtClean="0"/>
-              <a:t>‹nº›</a:t>
+              <a:t>‹#›</a:t>
             </a:fld>
             <a:endParaRPr lang="pt-BR"/>
           </a:p>
@@ -2007,7 +2013,7 @@
           <a:p>
             <a:fld id="{6FC8D850-966F-45A6-8DE7-15B891E7D40D}" type="slidenum">
               <a:rPr lang="pt-BR" smtClean="0"/>
-              <a:t>12</a:t>
+              <a:t>11</a:t>
             </a:fld>
             <a:endParaRPr lang="pt-BR"/>
           </a:p>
@@ -2017,6 +2023,278 @@
     <p:extLst>
       <p:ext uri="{BB962C8B-B14F-4D97-AF65-F5344CB8AC3E}">
         <p14:creationId xmlns:p14="http://schemas.microsoft.com/office/powerpoint/2010/main" val="2805807960"/>
+      </p:ext>
+    </p:extLst>
+  </p:cSld>
+  <p:clrMapOvr>
+    <a:masterClrMapping/>
+  </p:clrMapOvr>
+</p:notes>
+</file>
+
+<file path=ppt/notesSlides/notesSlide8.xml><?xml version="1.0" encoding="utf-8"?>
+<p:notes xmlns:a="http://schemas.openxmlformats.org/drawingml/2006/main" xmlns:r="http://schemas.openxmlformats.org/officeDocument/2006/relationships" xmlns:p="http://schemas.openxmlformats.org/presentationml/2006/main">
+  <p:cSld>
+    <p:spTree>
+      <p:nvGrpSpPr>
+        <p:cNvPr id="1" name=""/>
+        <p:cNvGrpSpPr/>
+        <p:nvPr/>
+      </p:nvGrpSpPr>
+      <p:grpSpPr>
+        <a:xfrm>
+          <a:off x="0" y="0"/>
+          <a:ext cx="0" cy="0"/>
+          <a:chOff x="0" y="0"/>
+          <a:chExt cx="0" cy="0"/>
+        </a:xfrm>
+      </p:grpSpPr>
+      <p:sp>
+        <p:nvSpPr>
+          <p:cNvPr id="2" name="Espaço Reservado para Imagem de Slide 1"/>
+          <p:cNvSpPr>
+            <a:spLocks noGrp="1" noRot="1" noChangeAspect="1"/>
+          </p:cNvSpPr>
+          <p:nvPr>
+            <p:ph type="sldImg"/>
+          </p:nvPr>
+        </p:nvSpPr>
+        <p:spPr/>
+      </p:sp>
+      <mc:AlternateContent xmlns:mc="http://schemas.openxmlformats.org/markup-compatibility/2006" xmlns:a14="http://schemas.microsoft.com/office/drawing/2010/main">
+        <mc:Choice Requires="a14">
+          <p:sp>
+            <p:nvSpPr>
+              <p:cNvPr id="3" name="Espaço Reservado para Anotações 2"/>
+              <p:cNvSpPr>
+                <a:spLocks noGrp="1"/>
+              </p:cNvSpPr>
+              <p:nvPr>
+                <p:ph type="body" idx="1"/>
+              </p:nvPr>
+            </p:nvSpPr>
+            <p:spPr/>
+            <p:txBody>
+              <a:bodyPr/>
+              <a:lstStyle/>
+              <a:p>
+                <a:r>
+                  <a:rPr lang="pt-BR" dirty="0"/>
+                  <a:t>Percebam que </a:t>
+                </a:r>
+                <a14:m>
+                  <m:oMath xmlns:m="http://schemas.openxmlformats.org/officeDocument/2006/math">
+                    <m:sSub>
+                      <m:sSubPr>
+                        <m:ctrlPr>
+                          <a:rPr lang="pt-BR" i="1" smtClean="0">
+                            <a:latin typeface="Cambria Math" panose="02040503050406030204" pitchFamily="18" charset="0"/>
+                          </a:rPr>
+                        </m:ctrlPr>
+                      </m:sSubPr>
+                      <m:e>
+                        <m:r>
+                          <a:rPr lang="pt-BR" i="1">
+                            <a:latin typeface="Cambria Math" panose="02040503050406030204" pitchFamily="18" charset="0"/>
+                          </a:rPr>
+                          <m:t>𝐽</m:t>
+                        </m:r>
+                      </m:e>
+                      <m:sub>
+                        <m:r>
+                          <a:rPr lang="pt-BR" i="1">
+                            <a:latin typeface="Cambria Math" panose="02040503050406030204" pitchFamily="18" charset="0"/>
+                          </a:rPr>
+                          <m:t>𝑒</m:t>
+                        </m:r>
+                      </m:sub>
+                    </m:sSub>
+                    <m:r>
+                      <a:rPr lang="pt-BR" i="1">
+                        <a:latin typeface="Cambria Math" panose="02040503050406030204" pitchFamily="18" charset="0"/>
+                      </a:rPr>
+                      <m:t>(</m:t>
+                    </m:r>
+                    <m:r>
+                      <a:rPr lang="pt-BR" b="1" i="1">
+                        <a:latin typeface="Cambria Math" panose="02040503050406030204" pitchFamily="18" charset="0"/>
+                      </a:rPr>
+                      <m:t>𝒂</m:t>
+                    </m:r>
+                    <m:r>
+                      <a:rPr lang="pt-BR" i="1">
+                        <a:latin typeface="Cambria Math" panose="02040503050406030204" pitchFamily="18" charset="0"/>
+                      </a:rPr>
+                      <m:t>)</m:t>
+                    </m:r>
+                  </m:oMath>
+                </a14:m>
+                <a:r>
+                  <a:rPr lang="pt-BR" dirty="0"/>
+                  <a:t> é função do vetor de pesos, pois variando os valores dos pesos, ficamos mais próximos ou distantes da função hipótese que minimiza o erro.</a:t>
+                </a:r>
+              </a:p>
+            </p:txBody>
+          </p:sp>
+        </mc:Choice>
+        <mc:Fallback xmlns="">
+          <p:sp>
+            <p:nvSpPr>
+              <p:cNvPr id="3" name="Espaço Reservado para Anotações 2"/>
+              <p:cNvSpPr>
+                <a:spLocks noGrp="1"/>
+              </p:cNvSpPr>
+              <p:nvPr>
+                <p:ph type="body" idx="1"/>
+              </p:nvPr>
+            </p:nvSpPr>
+            <p:spPr/>
+            <p:txBody>
+              <a:bodyPr/>
+              <a:lstStyle/>
+              <a:p>
+                <a:r>
+                  <a:rPr lang="pt-BR" dirty="0"/>
+                  <a:t>Percebam que </a:t>
+                </a:r>
+                <a:r>
+                  <a:rPr lang="pt-BR" i="0">
+                    <a:latin typeface="Cambria Math" panose="02040503050406030204" pitchFamily="18" charset="0"/>
+                  </a:rPr>
+                  <a:t>𝐽_𝑒 (</a:t>
+                </a:r>
+                <a:r>
+                  <a:rPr lang="pt-BR" b="1" i="0">
+                    <a:latin typeface="Cambria Math" panose="02040503050406030204" pitchFamily="18" charset="0"/>
+                  </a:rPr>
+                  <a:t>𝒂</a:t>
+                </a:r>
+                <a:r>
+                  <a:rPr lang="pt-BR" i="0">
+                    <a:latin typeface="Cambria Math" panose="02040503050406030204" pitchFamily="18" charset="0"/>
+                  </a:rPr>
+                  <a:t>)</a:t>
+                </a:r>
+                <a:r>
+                  <a:rPr lang="pt-BR" dirty="0"/>
+                  <a:t> é função do vetor de pesos, pois variando os valores dos pesos, ficamos mais próximos ou distantes da função hipótese que minimiza o erro.</a:t>
+                </a:r>
+              </a:p>
+            </p:txBody>
+          </p:sp>
+        </mc:Fallback>
+      </mc:AlternateContent>
+      <p:sp>
+        <p:nvSpPr>
+          <p:cNvPr id="4" name="Espaço Reservado para Número de Slide 3"/>
+          <p:cNvSpPr>
+            <a:spLocks noGrp="1"/>
+          </p:cNvSpPr>
+          <p:nvPr>
+            <p:ph type="sldNum" sz="quarter" idx="5"/>
+          </p:nvPr>
+        </p:nvSpPr>
+        <p:spPr/>
+        <p:txBody>
+          <a:bodyPr/>
+          <a:lstStyle/>
+          <a:p>
+            <a:fld id="{DA8B99DF-01BC-492A-8CEF-4FD88D18DD9D}" type="slidenum">
+              <a:rPr lang="nl-BE" smtClean="0"/>
+              <a:t>15</a:t>
+            </a:fld>
+            <a:endParaRPr lang="nl-BE"/>
+          </a:p>
+        </p:txBody>
+      </p:sp>
+    </p:spTree>
+    <p:extLst>
+      <p:ext uri="{BB962C8B-B14F-4D97-AF65-F5344CB8AC3E}">
+        <p14:creationId xmlns:p14="http://schemas.microsoft.com/office/powerpoint/2010/main" val="4289599324"/>
+      </p:ext>
+    </p:extLst>
+  </p:cSld>
+  <p:clrMapOvr>
+    <a:masterClrMapping/>
+  </p:clrMapOvr>
+</p:notes>
+</file>
+
+<file path=ppt/notesSlides/notesSlide9.xml><?xml version="1.0" encoding="utf-8"?>
+<p:notes xmlns:a="http://schemas.openxmlformats.org/drawingml/2006/main" xmlns:r="http://schemas.openxmlformats.org/officeDocument/2006/relationships" xmlns:p="http://schemas.openxmlformats.org/presentationml/2006/main">
+  <p:cSld>
+    <p:spTree>
+      <p:nvGrpSpPr>
+        <p:cNvPr id="1" name=""/>
+        <p:cNvGrpSpPr/>
+        <p:nvPr/>
+      </p:nvGrpSpPr>
+      <p:grpSpPr>
+        <a:xfrm>
+          <a:off x="0" y="0"/>
+          <a:ext cx="0" cy="0"/>
+          <a:chOff x="0" y="0"/>
+          <a:chExt cx="0" cy="0"/>
+        </a:xfrm>
+      </p:grpSpPr>
+      <p:sp>
+        <p:nvSpPr>
+          <p:cNvPr id="2" name="Slide Image Placeholder 1"/>
+          <p:cNvSpPr>
+            <a:spLocks noGrp="1" noRot="1" noChangeAspect="1"/>
+          </p:cNvSpPr>
+          <p:nvPr>
+            <p:ph type="sldImg"/>
+          </p:nvPr>
+        </p:nvSpPr>
+        <p:spPr/>
+      </p:sp>
+      <p:sp>
+        <p:nvSpPr>
+          <p:cNvPr id="3" name="Notes Placeholder 2"/>
+          <p:cNvSpPr>
+            <a:spLocks noGrp="1"/>
+          </p:cNvSpPr>
+          <p:nvPr>
+            <p:ph type="body" idx="1"/>
+          </p:nvPr>
+        </p:nvSpPr>
+        <p:spPr/>
+        <p:txBody>
+          <a:bodyPr/>
+          <a:lstStyle/>
+          <a:p>
+            <a:endParaRPr lang="pt-BR" baseline="0" dirty="0"/>
+          </a:p>
+        </p:txBody>
+      </p:sp>
+      <p:sp>
+        <p:nvSpPr>
+          <p:cNvPr id="4" name="Slide Number Placeholder 3"/>
+          <p:cNvSpPr>
+            <a:spLocks noGrp="1"/>
+          </p:cNvSpPr>
+          <p:nvPr>
+            <p:ph type="sldNum" sz="quarter" idx="10"/>
+          </p:nvPr>
+        </p:nvSpPr>
+        <p:spPr/>
+        <p:txBody>
+          <a:bodyPr/>
+          <a:lstStyle/>
+          <a:p>
+            <a:fld id="{DA8B99DF-01BC-492A-8CEF-4FD88D18DD9D}" type="slidenum">
+              <a:rPr lang="nl-BE" smtClean="0"/>
+              <a:t>17</a:t>
+            </a:fld>
+            <a:endParaRPr lang="nl-BE"/>
+          </a:p>
+        </p:txBody>
+      </p:sp>
+    </p:spTree>
+    <p:extLst>
+      <p:ext uri="{BB962C8B-B14F-4D97-AF65-F5344CB8AC3E}">
+        <p14:creationId xmlns:p14="http://schemas.microsoft.com/office/powerpoint/2010/main" val="2818660927"/>
       </p:ext>
     </p:extLst>
   </p:cSld>
@@ -2227,7 +2505,7 @@
           <a:p>
             <a:fld id="{1A7E88B7-70CE-4035-AE73-13FA6FB985D4}" type="slidenum">
               <a:rPr lang="pt-BR" smtClean="0"/>
-              <a:t>‹nº›</a:t>
+              <a:t>‹#›</a:t>
             </a:fld>
             <a:endParaRPr lang="pt-BR"/>
           </a:p>
@@ -2425,7 +2703,7 @@
           <a:p>
             <a:fld id="{1A7E88B7-70CE-4035-AE73-13FA6FB985D4}" type="slidenum">
               <a:rPr lang="pt-BR" smtClean="0"/>
-              <a:t>‹nº›</a:t>
+              <a:t>‹#›</a:t>
             </a:fld>
             <a:endParaRPr lang="pt-BR"/>
           </a:p>
@@ -2633,7 +2911,7 @@
           <a:p>
             <a:fld id="{1A7E88B7-70CE-4035-AE73-13FA6FB985D4}" type="slidenum">
               <a:rPr lang="pt-BR" smtClean="0"/>
-              <a:t>‹nº›</a:t>
+              <a:t>‹#›</a:t>
             </a:fld>
             <a:endParaRPr lang="pt-BR"/>
           </a:p>
@@ -2831,7 +3109,7 @@
           <a:p>
             <a:fld id="{1A7E88B7-70CE-4035-AE73-13FA6FB985D4}" type="slidenum">
               <a:rPr lang="pt-BR" smtClean="0"/>
-              <a:t>‹nº›</a:t>
+              <a:t>‹#›</a:t>
             </a:fld>
             <a:endParaRPr lang="pt-BR"/>
           </a:p>
@@ -3106,7 +3384,7 @@
           <a:p>
             <a:fld id="{1A7E88B7-70CE-4035-AE73-13FA6FB985D4}" type="slidenum">
               <a:rPr lang="pt-BR" smtClean="0"/>
-              <a:t>‹nº›</a:t>
+              <a:t>‹#›</a:t>
             </a:fld>
             <a:endParaRPr lang="pt-BR"/>
           </a:p>
@@ -3371,7 +3649,7 @@
           <a:p>
             <a:fld id="{1A7E88B7-70CE-4035-AE73-13FA6FB985D4}" type="slidenum">
               <a:rPr lang="pt-BR" smtClean="0"/>
-              <a:t>‹nº›</a:t>
+              <a:t>‹#›</a:t>
             </a:fld>
             <a:endParaRPr lang="pt-BR"/>
           </a:p>
@@ -3783,7 +4061,7 @@
           <a:p>
             <a:fld id="{1A7E88B7-70CE-4035-AE73-13FA6FB985D4}" type="slidenum">
               <a:rPr lang="pt-BR" smtClean="0"/>
-              <a:t>‹nº›</a:t>
+              <a:t>‹#›</a:t>
             </a:fld>
             <a:endParaRPr lang="pt-BR"/>
           </a:p>
@@ -3924,7 +4202,7 @@
           <a:p>
             <a:fld id="{1A7E88B7-70CE-4035-AE73-13FA6FB985D4}" type="slidenum">
               <a:rPr lang="pt-BR" smtClean="0"/>
-              <a:t>‹nº›</a:t>
+              <a:t>‹#›</a:t>
             </a:fld>
             <a:endParaRPr lang="pt-BR"/>
           </a:p>
@@ -4037,7 +4315,7 @@
           <a:p>
             <a:fld id="{1A7E88B7-70CE-4035-AE73-13FA6FB985D4}" type="slidenum">
               <a:rPr lang="pt-BR" smtClean="0"/>
-              <a:t>‹nº›</a:t>
+              <a:t>‹#›</a:t>
             </a:fld>
             <a:endParaRPr lang="pt-BR"/>
           </a:p>
@@ -4348,7 +4626,7 @@
           <a:p>
             <a:fld id="{1A7E88B7-70CE-4035-AE73-13FA6FB985D4}" type="slidenum">
               <a:rPr lang="pt-BR" smtClean="0"/>
-              <a:t>‹nº›</a:t>
+              <a:t>‹#›</a:t>
             </a:fld>
             <a:endParaRPr lang="pt-BR"/>
           </a:p>
@@ -4636,7 +4914,7 @@
           <a:p>
             <a:fld id="{1A7E88B7-70CE-4035-AE73-13FA6FB985D4}" type="slidenum">
               <a:rPr lang="pt-BR" smtClean="0"/>
-              <a:t>‹nº›</a:t>
+              <a:t>‹#›</a:t>
             </a:fld>
             <a:endParaRPr lang="pt-BR"/>
           </a:p>
@@ -4913,7 +5191,7 @@
           <a:p>
             <a:fld id="{1A7E88B7-70CE-4035-AE73-13FA6FB985D4}" type="slidenum">
               <a:rPr lang="pt-BR" smtClean="0"/>
-              <a:t>‹nº›</a:t>
+              <a:t>‹#›</a:t>
             </a:fld>
             <a:endParaRPr lang="pt-BR"/>
           </a:p>
@@ -5474,8 +5752,8 @@
           </a:p>
         </p:txBody>
       </p:sp>
-      <mc:AlternateContent xmlns:mc="http://schemas.openxmlformats.org/markup-compatibility/2006" xmlns:a14="http://schemas.microsoft.com/office/drawing/2010/main">
-        <mc:Choice Requires="a14">
+      <mc:AlternateContent xmlns:mc="http://schemas.openxmlformats.org/markup-compatibility/2006">
+        <mc:Choice xmlns:a14="http://schemas.microsoft.com/office/drawing/2010/main" Requires="a14">
           <p:sp>
             <p:nvSpPr>
               <p:cNvPr id="3" name="Espaço Reservado para Conteúdo 2">
@@ -5644,6 +5922,164 @@
                 </a:r>
               </a:p>
               <a:p>
+                <a:pPr lvl="1">
+                  <a:buFont typeface="Wingdings" panose="05000000000000000000" pitchFamily="2" charset="2"/>
+                  <a:buChar char="§"/>
+                </a:pPr>
+                <a14:m>
+                  <m:oMath xmlns:m="http://schemas.openxmlformats.org/officeDocument/2006/math">
+                    <m:acc>
+                      <m:accPr>
+                        <m:chr m:val="̂"/>
+                        <m:ctrlPr>
+                          <a:rPr lang="pt-BR" i="1">
+                            <a:latin typeface="Cambria Math" panose="02040503050406030204" pitchFamily="18" charset="0"/>
+                          </a:rPr>
+                        </m:ctrlPr>
+                      </m:accPr>
+                      <m:e>
+                        <m:r>
+                          <a:rPr lang="pt-BR" i="1">
+                            <a:latin typeface="Cambria Math" panose="02040503050406030204" pitchFamily="18" charset="0"/>
+                          </a:rPr>
+                          <m:t>𝑦</m:t>
+                        </m:r>
+                      </m:e>
+                    </m:acc>
+                    <m:r>
+                      <a:rPr lang="pt-BR" i="1">
+                        <a:latin typeface="Cambria Math" panose="02040503050406030204" pitchFamily="18" charset="0"/>
+                      </a:rPr>
+                      <m:t>=</m:t>
+                    </m:r>
+                    <m:r>
+                      <a:rPr lang="pt-BR" i="1">
+                        <a:latin typeface="Cambria Math" panose="02040503050406030204" pitchFamily="18" charset="0"/>
+                        <a:ea typeface="Cambria Math" panose="02040503050406030204" pitchFamily="18" charset="0"/>
+                      </a:rPr>
+                      <m:t>h</m:t>
+                    </m:r>
+                    <m:d>
+                      <m:dPr>
+                        <m:ctrlPr>
+                          <a:rPr lang="pt-BR" i="1">
+                            <a:latin typeface="Cambria Math" panose="02040503050406030204" pitchFamily="18" charset="0"/>
+                            <a:ea typeface="Cambria Math" panose="02040503050406030204" pitchFamily="18" charset="0"/>
+                          </a:rPr>
+                        </m:ctrlPr>
+                      </m:dPr>
+                      <m:e>
+                        <m:r>
+                          <a:rPr lang="pt-BR" b="0" i="1">
+                            <a:latin typeface="Cambria Math" panose="02040503050406030204" pitchFamily="18" charset="0"/>
+                            <a:ea typeface="Cambria Math" panose="02040503050406030204" pitchFamily="18" charset="0"/>
+                          </a:rPr>
+                          <m:t>𝑥</m:t>
+                        </m:r>
+                      </m:e>
+                    </m:d>
+                    <m:r>
+                      <a:rPr lang="pt-BR" b="0" i="1" smtClean="0">
+                        <a:latin typeface="Cambria Math" panose="02040503050406030204" pitchFamily="18" charset="0"/>
+                        <a:ea typeface="Cambria Math" panose="02040503050406030204" pitchFamily="18" charset="0"/>
+                      </a:rPr>
+                      <m:t>=1+</m:t>
+                    </m:r>
+                    <m:r>
+                      <a:rPr lang="pt-BR" b="0" i="1" smtClean="0">
+                        <a:latin typeface="Cambria Math" panose="02040503050406030204" pitchFamily="18" charset="0"/>
+                        <a:ea typeface="Cambria Math" panose="02040503050406030204" pitchFamily="18" charset="0"/>
+                      </a:rPr>
+                      <m:t>𝑥</m:t>
+                    </m:r>
+                    <m:r>
+                      <a:rPr lang="pt-BR" b="0" i="1" smtClean="0">
+                        <a:latin typeface="Cambria Math" panose="02040503050406030204" pitchFamily="18" charset="0"/>
+                        <a:ea typeface="Cambria Math" panose="02040503050406030204" pitchFamily="18" charset="0"/>
+                      </a:rPr>
+                      <m:t>+2</m:t>
+                    </m:r>
+                    <m:sSup>
+                      <m:sSupPr>
+                        <m:ctrlPr>
+                          <a:rPr lang="pt-BR" i="1" smtClean="0">
+                            <a:latin typeface="Cambria Math" panose="02040503050406030204" pitchFamily="18" charset="0"/>
+                            <a:ea typeface="Cambria Math" panose="02040503050406030204" pitchFamily="18" charset="0"/>
+                          </a:rPr>
+                        </m:ctrlPr>
+                      </m:sSupPr>
+                      <m:e>
+                        <m:r>
+                          <a:rPr lang="pt-BR" b="0" i="1" smtClean="0">
+                            <a:latin typeface="Cambria Math" panose="02040503050406030204" pitchFamily="18" charset="0"/>
+                            <a:ea typeface="Cambria Math" panose="02040503050406030204" pitchFamily="18" charset="0"/>
+                          </a:rPr>
+                          <m:t>𝑥</m:t>
+                        </m:r>
+                      </m:e>
+                      <m:sup>
+                        <m:r>
+                          <a:rPr lang="pt-BR" b="0" i="1" smtClean="0">
+                            <a:latin typeface="Cambria Math" panose="02040503050406030204" pitchFamily="18" charset="0"/>
+                            <a:ea typeface="Cambria Math" panose="02040503050406030204" pitchFamily="18" charset="0"/>
+                          </a:rPr>
+                          <m:t>2</m:t>
+                        </m:r>
+                      </m:sup>
+                    </m:sSup>
+                  </m:oMath>
+                </a14:m>
+                <a:r>
+                  <a:rPr lang="pt-BR" i="1" dirty="0"/>
+                  <a:t> </a:t>
+                </a:r>
+                <a:r>
+                  <a:rPr lang="pt-BR" dirty="0"/>
+                  <a:t>(</a:t>
+                </a:r>
+                <a:r>
+                  <a:rPr lang="en-US" dirty="0" err="1"/>
+                  <a:t>polinômio</a:t>
+                </a:r>
+                <a:r>
+                  <a:rPr lang="en-US" dirty="0"/>
+                  <a:t> de </a:t>
+                </a:r>
+                <a:r>
+                  <a:rPr lang="en-US" dirty="0" err="1"/>
+                  <a:t>grau</a:t>
+                </a:r>
+                <a:r>
+                  <a:rPr lang="en-US" dirty="0"/>
+                  <a:t> 2 </a:t>
+                </a:r>
+                <a:r>
+                  <a:rPr lang="en-US" dirty="0" err="1"/>
+                  <a:t>em</a:t>
+                </a:r>
+                <a:r>
+                  <a:rPr lang="en-US" dirty="0"/>
+                  <a:t> </a:t>
+                </a:r>
+                <a:r>
+                  <a:rPr lang="en-US" dirty="0" err="1"/>
+                  <a:t>uma</a:t>
+                </a:r>
+                <a:r>
+                  <a:rPr lang="en-US" dirty="0"/>
+                  <a:t> </a:t>
+                </a:r>
+                <a:r>
+                  <a:rPr lang="en-US" dirty="0" err="1"/>
+                  <a:t>variável</a:t>
+                </a:r>
+                <a:r>
+                  <a:rPr lang="en-US" dirty="0"/>
+                  <a:t>).</a:t>
+                </a:r>
+                <a:endParaRPr lang="pt-BR" i="1" dirty="0"/>
+              </a:p>
+              <a:p>
                 <a:r>
                   <a:rPr lang="pt-BR" dirty="0"/>
                   <a:t>Pois segundo o teorema da aproximação de </a:t>
@@ -5746,10 +6182,14 @@
                       <a:srgbClr val="7030A0"/>
                     </a:solidFill>
                   </a:rPr>
-                  <a:t>encontrar seu grau (ou ordem) ideal e os pesos</a:t>
-                </a:r>
-                <a:r>
-                  <a:rPr lang="pt-BR" dirty="0"/>
+                  <a:t>encontrar os pesos e o grau (ou ordem) ideal</a:t>
+                </a:r>
+                <a:r>
+                  <a:rPr lang="pt-BR" dirty="0">
+                    <a:solidFill>
+                      <a:srgbClr val="7030A0"/>
+                    </a:solidFill>
+                  </a:rPr>
                   <a:t>.</a:t>
                 </a:r>
               </a:p>
@@ -5759,7 +6199,7 @@
             </p:txBody>
           </p:sp>
         </mc:Choice>
-        <mc:Fallback xmlns="">
+        <mc:Fallback>
           <p:sp>
             <p:nvSpPr>
               <p:cNvPr id="3" name="Espaço Reservado para Conteúdo 2">
@@ -5793,7 +6233,7 @@
               <a:lstStyle/>
               <a:p>
                 <a:r>
-                  <a:rPr lang="pt-BR">
+                  <a:rPr lang="en-US">
                     <a:noFill/>
                   </a:rPr>
                   <a:t> </a:t>
@@ -5817,100 +6257,6 @@
 </file>
 
 <file path=ppt/slides/slide11.xml><?xml version="1.0" encoding="utf-8"?>
-<p:sld xmlns:a="http://schemas.openxmlformats.org/drawingml/2006/main" xmlns:r="http://schemas.openxmlformats.org/officeDocument/2006/relationships" xmlns:p="http://schemas.openxmlformats.org/presentationml/2006/main">
-  <p:cSld>
-    <p:spTree>
-      <p:nvGrpSpPr>
-        <p:cNvPr id="1" name=""/>
-        <p:cNvGrpSpPr/>
-        <p:nvPr/>
-      </p:nvGrpSpPr>
-      <p:grpSpPr>
-        <a:xfrm>
-          <a:off x="0" y="0"/>
-          <a:ext cx="0" cy="0"/>
-          <a:chOff x="0" y="0"/>
-          <a:chExt cx="0" cy="0"/>
-        </a:xfrm>
-      </p:grpSpPr>
-      <p:sp>
-        <p:nvSpPr>
-          <p:cNvPr id="2" name="Title 1">
-            <a:extLst>
-              <a:ext uri="{FF2B5EF4-FFF2-40B4-BE49-F238E27FC236}">
-                <a16:creationId xmlns:a16="http://schemas.microsoft.com/office/drawing/2014/main" id="{CED0B404-F3ED-8087-A024-C72B793DE4C8}"/>
-              </a:ext>
-            </a:extLst>
-          </p:cNvPr>
-          <p:cNvSpPr>
-            <a:spLocks noGrp="1"/>
-          </p:cNvSpPr>
-          <p:nvPr>
-            <p:ph type="title"/>
-          </p:nvPr>
-        </p:nvSpPr>
-        <p:spPr/>
-        <p:txBody>
-          <a:bodyPr/>
-          <a:lstStyle/>
-          <a:p>
-            <a:endParaRPr lang="en-US"/>
-          </a:p>
-        </p:txBody>
-      </p:sp>
-      <p:sp>
-        <p:nvSpPr>
-          <p:cNvPr id="3" name="Content Placeholder 2">
-            <a:extLst>
-              <a:ext uri="{FF2B5EF4-FFF2-40B4-BE49-F238E27FC236}">
-                <a16:creationId xmlns:a16="http://schemas.microsoft.com/office/drawing/2014/main" id="{C6D4684C-15AE-EBFA-CC52-BE2B10624210}"/>
-              </a:ext>
-            </a:extLst>
-          </p:cNvPr>
-          <p:cNvSpPr>
-            <a:spLocks noGrp="1"/>
-          </p:cNvSpPr>
-          <p:nvPr>
-            <p:ph idx="1"/>
-          </p:nvPr>
-        </p:nvSpPr>
-        <p:spPr/>
-        <p:txBody>
-          <a:bodyPr>
-            <a:normAutofit/>
-          </a:bodyPr>
-          <a:lstStyle/>
-          <a:p>
-            <a:r>
-              <a:rPr lang="pt-BR" sz="4800" b="1" dirty="0">
-                <a:solidFill>
-                  <a:srgbClr val="FF0000"/>
-                </a:solidFill>
-              </a:rPr>
-              <a:t>PAREI AQUI!!!!!!!!!!!</a:t>
-            </a:r>
-            <a:endParaRPr lang="en-US" sz="4800" b="1" dirty="0">
-              <a:solidFill>
-                <a:srgbClr val="FF0000"/>
-              </a:solidFill>
-            </a:endParaRPr>
-          </a:p>
-        </p:txBody>
-      </p:sp>
-    </p:spTree>
-    <p:extLst>
-      <p:ext uri="{BB962C8B-B14F-4D97-AF65-F5344CB8AC3E}">
-        <p14:creationId xmlns:p14="http://schemas.microsoft.com/office/powerpoint/2010/main" val="956125625"/>
-      </p:ext>
-    </p:extLst>
-  </p:cSld>
-  <p:clrMapOvr>
-    <a:masterClrMapping/>
-  </p:clrMapOvr>
-</p:sld>
-</file>
-
-<file path=ppt/slides/slide12.xml><?xml version="1.0" encoding="utf-8"?>
 <p:sld xmlns:a="http://schemas.openxmlformats.org/drawingml/2006/main" xmlns:r="http://schemas.openxmlformats.org/officeDocument/2006/relationships" xmlns:p="http://schemas.openxmlformats.org/presentationml/2006/main">
   <p:cSld>
     <p:spTree>
@@ -5981,8 +6327,8 @@
             </p:nvSpPr>
             <p:spPr>
               <a:xfrm>
-                <a:off x="4678326" y="1825624"/>
-                <a:ext cx="7513674" cy="5032375"/>
+                <a:off x="4691742" y="1825624"/>
+                <a:ext cx="7413171" cy="5032375"/>
               </a:xfrm>
             </p:spPr>
             <p:txBody>
@@ -6569,7 +6915,15 @@
               <a:p>
                 <a:r>
                   <a:rPr lang="pt-BR" dirty="0"/>
-                  <a:t>Podemos ter mapeamentos lineares e não lineares com 2 ou mais atributos.</a:t>
+                  <a:t>Também podemos ter mapeamentos lineares e não lineares </a:t>
+                </a:r>
+                <a:r>
+                  <a:rPr lang="pt-BR" b="1" dirty="0"/>
+                  <a:t>com dois ou mais atributos</a:t>
+                </a:r>
+                <a:r>
+                  <a:rPr lang="pt-BR" dirty="0"/>
+                  <a:t>.</a:t>
                 </a:r>
                 <a:endParaRPr lang="pt-BR" i="1" dirty="0">
                   <a:latin typeface="Cambria Math" panose="02040503050406030204" pitchFamily="18" charset="0"/>
@@ -7164,6 +7518,12 @@
                           </m:r>
                         </m:sup>
                       </m:sSup>
+                      <m:r>
+                        <a:rPr lang="pt-BR" b="0" i="1" smtClean="0">
+                          <a:latin typeface="Cambria Math" panose="02040503050406030204" pitchFamily="18" charset="0"/>
+                        </a:rPr>
+                        <m:t>.</m:t>
+                      </m:r>
                     </m:oMath>
                   </m:oMathPara>
                 </a14:m>
@@ -7191,13 +7551,13 @@
             </p:nvSpPr>
             <p:spPr>
               <a:xfrm>
-                <a:off x="4678326" y="1825624"/>
-                <a:ext cx="7513674" cy="5032375"/>
+                <a:off x="4691742" y="1825624"/>
+                <a:ext cx="7413171" cy="5032375"/>
               </a:xfrm>
               <a:blipFill>
                 <a:blip r:embed="rId3"/>
                 <a:stretch>
-                  <a:fillRect l="-1460" t="-1937" r="-487"/>
+                  <a:fillRect l="-1480" t="-1937" r="-1151"/>
                 </a:stretch>
               </a:blipFill>
             </p:spPr>
@@ -7206,7 +7566,7 @@
               <a:lstStyle/>
               <a:p>
                 <a:r>
-                  <a:rPr lang="pt-BR">
+                  <a:rPr lang="en-US">
                     <a:noFill/>
                   </a:rPr>
                   <a:t> </a:t>
@@ -7245,8 +7605,8 @@
         </p:blipFill>
         <p:spPr bwMode="auto">
           <a:xfrm>
-            <a:off x="391632" y="1690688"/>
-            <a:ext cx="3157316" cy="2300102"/>
+            <a:off x="674915" y="1690688"/>
+            <a:ext cx="3456316" cy="2517923"/>
           </a:xfrm>
           <a:prstGeom prst="rect">
             <a:avLst/>
@@ -7292,8 +7652,8 @@
         </p:blipFill>
         <p:spPr bwMode="auto">
           <a:xfrm>
-            <a:off x="391632" y="4193397"/>
-            <a:ext cx="3157316" cy="2300102"/>
+            <a:off x="674915" y="4275212"/>
+            <a:ext cx="3456316" cy="2517923"/>
           </a:xfrm>
           <a:prstGeom prst="rect">
             <a:avLst/>
@@ -7323,6 +7683,80 @@
 </p:sld>
 </file>
 
+<file path=ppt/slides/slide12.xml><?xml version="1.0" encoding="utf-8"?>
+<p:sld xmlns:a="http://schemas.openxmlformats.org/drawingml/2006/main" xmlns:r="http://schemas.openxmlformats.org/officeDocument/2006/relationships" xmlns:p="http://schemas.openxmlformats.org/presentationml/2006/main">
+  <p:cSld>
+    <p:spTree>
+      <p:nvGrpSpPr>
+        <p:cNvPr id="1" name="">
+          <a:extLst>
+            <a:ext uri="{FF2B5EF4-FFF2-40B4-BE49-F238E27FC236}">
+              <a16:creationId xmlns:a16="http://schemas.microsoft.com/office/drawing/2014/main" id="{E791E141-9BEA-1A7F-F3BE-B2EC1675E232}"/>
+            </a:ext>
+          </a:extLst>
+        </p:cNvPr>
+        <p:cNvGrpSpPr/>
+        <p:nvPr/>
+      </p:nvGrpSpPr>
+      <p:grpSpPr>
+        <a:xfrm>
+          <a:off x="0" y="0"/>
+          <a:ext cx="0" cy="0"/>
+          <a:chOff x="0" y="0"/>
+          <a:chExt cx="0" cy="0"/>
+        </a:xfrm>
+      </p:grpSpPr>
+      <p:sp>
+        <p:nvSpPr>
+          <p:cNvPr id="3" name="Espaço Reservado para Conteúdo 2">
+            <a:extLst>
+              <a:ext uri="{FF2B5EF4-FFF2-40B4-BE49-F238E27FC236}">
+                <a16:creationId xmlns:a16="http://schemas.microsoft.com/office/drawing/2014/main" id="{7636E6F2-3CD7-063A-5B72-5FF656E61DA5}"/>
+              </a:ext>
+            </a:extLst>
+          </p:cNvPr>
+          <p:cNvSpPr>
+            <a:spLocks noGrp="1"/>
+          </p:cNvSpPr>
+          <p:nvPr>
+            <p:ph idx="1"/>
+          </p:nvPr>
+        </p:nvSpPr>
+        <p:spPr>
+          <a:xfrm>
+            <a:off x="838200" y="2593975"/>
+            <a:ext cx="10515600" cy="1670050"/>
+          </a:xfrm>
+        </p:spPr>
+        <p:txBody>
+          <a:bodyPr>
+            <a:normAutofit/>
+          </a:bodyPr>
+          <a:lstStyle/>
+          <a:p>
+            <a:pPr marL="0" indent="0" algn="ctr">
+              <a:buNone/>
+            </a:pPr>
+            <a:r>
+              <a:rPr lang="pt-BR" sz="5400" i="1" dirty="0"/>
+              <a:t>Como encontramos os pesos e o melhor grau?</a:t>
+            </a:r>
+          </a:p>
+        </p:txBody>
+      </p:sp>
+    </p:spTree>
+    <p:extLst>
+      <p:ext uri="{BB962C8B-B14F-4D97-AF65-F5344CB8AC3E}">
+        <p14:creationId xmlns:p14="http://schemas.microsoft.com/office/powerpoint/2010/main" val="2819797940"/>
+      </p:ext>
+    </p:extLst>
+  </p:cSld>
+  <p:clrMapOvr>
+    <a:masterClrMapping/>
+  </p:clrMapOvr>
+</p:sld>
+</file>
+
 <file path=ppt/slides/slide13.xml><?xml version="1.0" encoding="utf-8"?>
 <p:sld xmlns:a="http://schemas.openxmlformats.org/drawingml/2006/main" xmlns:r="http://schemas.openxmlformats.org/officeDocument/2006/relationships" xmlns:p="http://schemas.openxmlformats.org/presentationml/2006/main">
   <p:cSld>
@@ -7342,10 +7776,10 @@
       </p:grpSpPr>
       <p:sp>
         <p:nvSpPr>
-          <p:cNvPr id="3" name="Content Placeholder 2">
+          <p:cNvPr id="2" name="Title 1">
             <a:extLst>
               <a:ext uri="{FF2B5EF4-FFF2-40B4-BE49-F238E27FC236}">
-                <a16:creationId xmlns:a16="http://schemas.microsoft.com/office/drawing/2014/main" id="{02A82650-1C1A-E0B4-4844-CCDD72B1E6DE}"/>
+                <a16:creationId xmlns:a16="http://schemas.microsoft.com/office/drawing/2014/main" id="{E88D1460-F0A9-8CC3-99B3-716DC4544139}"/>
               </a:ext>
             </a:extLst>
           </p:cNvPr>
@@ -7353,7 +7787,7 @@
             <a:spLocks noGrp="1"/>
           </p:cNvSpPr>
           <p:nvPr>
-            <p:ph idx="1"/>
+            <p:ph type="title"/>
           </p:nvPr>
         </p:nvSpPr>
         <p:spPr/>
@@ -7361,17 +7795,728 @@
           <a:bodyPr/>
           <a:lstStyle/>
           <a:p>
-            <a:pPr marL="0" indent="0">
-              <a:buNone/>
-            </a:pPr>
+            <a:r>
+              <a:rPr lang="pt-BR" dirty="0"/>
+              <a:t>Objetivo da regressão linear</a:t>
+            </a:r>
             <a:endParaRPr lang="en-US" dirty="0"/>
           </a:p>
         </p:txBody>
       </p:sp>
+      <mc:AlternateContent xmlns:mc="http://schemas.openxmlformats.org/markup-compatibility/2006">
+        <mc:Choice xmlns:a14="http://schemas.microsoft.com/office/drawing/2010/main" Requires="a14">
+          <p:sp>
+            <p:nvSpPr>
+              <p:cNvPr id="3" name="Content Placeholder 2">
+                <a:extLst>
+                  <a:ext uri="{FF2B5EF4-FFF2-40B4-BE49-F238E27FC236}">
+                    <a16:creationId xmlns:a16="http://schemas.microsoft.com/office/drawing/2014/main" id="{A8F1D988-6925-C286-BA9F-B4A4851E2FFB}"/>
+                  </a:ext>
+                </a:extLst>
+              </p:cNvPr>
+              <p:cNvSpPr>
+                <a:spLocks noGrp="1"/>
+              </p:cNvSpPr>
+              <p:nvPr>
+                <p:ph idx="1"/>
+              </p:nvPr>
+            </p:nvSpPr>
+            <p:spPr>
+              <a:xfrm>
+                <a:off x="838199" y="1825624"/>
+                <a:ext cx="11157857" cy="5032375"/>
+              </a:xfrm>
+            </p:spPr>
+            <p:txBody>
+              <a:bodyPr>
+                <a:normAutofit/>
+              </a:bodyPr>
+              <a:lstStyle/>
+              <a:p>
+                <a:r>
+                  <a:rPr lang="pt-BR" dirty="0"/>
+                  <a:t>Por enquanto, vamos assumir que já conhecemos o melhor grau do polinômio.</a:t>
+                </a:r>
+              </a:p>
+              <a:p>
+                <a:r>
+                  <a:rPr lang="pt-BR" dirty="0"/>
+                  <a:t>Como temos as entradas (i.e., atributos) e as saídas esperadas (i.e., rótulos), o </a:t>
+                </a:r>
+                <a:r>
+                  <a:rPr lang="pt-BR" b="1" dirty="0"/>
+                  <a:t>objetivo</a:t>
+                </a:r>
+                <a:r>
+                  <a:rPr lang="pt-BR" dirty="0"/>
+                  <a:t> passa a ser encontrar os </a:t>
+                </a:r>
+                <a:r>
+                  <a:rPr lang="pt-BR" b="1" dirty="0"/>
+                  <a:t>pesos ótimos</a:t>
+                </a:r>
+                <a:r>
+                  <a:rPr lang="pt-BR" dirty="0"/>
+                  <a:t> que </a:t>
+                </a:r>
+                <a:r>
+                  <a:rPr lang="pt-BR" b="1" dirty="0"/>
+                  <a:t>minimizam a distância (i.e., </a:t>
+                </a:r>
+                <a:r>
+                  <a:rPr lang="pt-BR" b="1" dirty="0">
+                    <a:solidFill>
+                      <a:srgbClr val="7030A0"/>
+                    </a:solidFill>
+                  </a:rPr>
+                  <a:t>erro</a:t>
+                </a:r>
+                <a:r>
+                  <a:rPr lang="pt-BR" b="1" dirty="0"/>
+                  <a:t>) entre predição</a:t>
+                </a:r>
+                <a:r>
+                  <a:rPr lang="pt-BR" dirty="0"/>
+                  <a:t>,</a:t>
+                </a:r>
+                <a:r>
+                  <a:rPr lang="pt-BR" b="1" dirty="0"/>
+                  <a:t> </a:t>
+                </a:r>
+                <a14:m>
+                  <m:oMath xmlns:m="http://schemas.openxmlformats.org/officeDocument/2006/math">
+                    <m:acc>
+                      <m:accPr>
+                        <m:chr m:val="̂"/>
+                        <m:ctrlPr>
+                          <a:rPr lang="pt-BR" i="1">
+                            <a:latin typeface="Cambria Math" panose="02040503050406030204" pitchFamily="18" charset="0"/>
+                          </a:rPr>
+                        </m:ctrlPr>
+                      </m:accPr>
+                      <m:e>
+                        <m:r>
+                          <a:rPr lang="pt-BR" i="1">
+                            <a:latin typeface="Cambria Math" panose="02040503050406030204" pitchFamily="18" charset="0"/>
+                          </a:rPr>
+                          <m:t>𝑦</m:t>
+                        </m:r>
+                      </m:e>
+                    </m:acc>
+                  </m:oMath>
+                </a14:m>
+                <a:r>
+                  <a:rPr lang="pt-BR" dirty="0"/>
+                  <a:t> (i.e., saída do modelo) </a:t>
+                </a:r>
+                <a:r>
+                  <a:rPr lang="pt-BR" b="1" dirty="0"/>
+                  <a:t>e os rótulos</a:t>
+                </a:r>
+                <a:r>
+                  <a:rPr lang="pt-BR" dirty="0"/>
+                  <a:t>, </a:t>
+                </a:r>
+                <a14:m>
+                  <m:oMath xmlns:m="http://schemas.openxmlformats.org/officeDocument/2006/math">
+                    <m:r>
+                      <a:rPr lang="pt-BR" b="0" i="1" smtClean="0">
+                        <a:latin typeface="Cambria Math" panose="02040503050406030204" pitchFamily="18" charset="0"/>
+                      </a:rPr>
+                      <m:t>𝑦</m:t>
+                    </m:r>
+                  </m:oMath>
+                </a14:m>
+                <a:r>
+                  <a:rPr lang="pt-BR" dirty="0"/>
+                  <a:t>.</a:t>
+                </a:r>
+              </a:p>
+              <a:p>
+                <a:r>
+                  <a:rPr lang="pt-BR" dirty="0"/>
+                  <a:t>Escrevendo como um problema de otimização, temos que o objetivo é</a:t>
+                </a:r>
+              </a:p>
+              <a:p>
+                <a:pPr lvl="1">
+                  <a:buFont typeface="Wingdings" panose="05000000000000000000" pitchFamily="2" charset="2"/>
+                  <a:buChar char="§"/>
+                </a:pPr>
+                <a:r>
+                  <a:rPr lang="pt-BR" dirty="0"/>
+                  <a:t>Encontrar o </a:t>
+                </a:r>
+                <a:r>
+                  <a:rPr lang="pt-BR" b="1" dirty="0">
+                    <a:solidFill>
+                      <a:srgbClr val="0070C0"/>
+                    </a:solidFill>
+                  </a:rPr>
+                  <a:t>vetor de pesos</a:t>
+                </a:r>
+                <a:r>
+                  <a:rPr lang="pt-BR" dirty="0"/>
+                  <a:t>, </a:t>
+                </a:r>
+                <a14:m>
+                  <m:oMath xmlns:m="http://schemas.openxmlformats.org/officeDocument/2006/math">
+                    <m:r>
+                      <a:rPr lang="pt-BR" b="1" i="1">
+                        <a:latin typeface="Cambria Math" panose="02040503050406030204" pitchFamily="18" charset="0"/>
+                      </a:rPr>
+                      <m:t>𝒂</m:t>
+                    </m:r>
+                    <m:r>
+                      <a:rPr lang="pt-BR" b="1" i="1" smtClean="0">
+                        <a:latin typeface="Cambria Math" panose="02040503050406030204" pitchFamily="18" charset="0"/>
+                      </a:rPr>
+                      <m:t>=</m:t>
+                    </m:r>
+                    <m:sSup>
+                      <m:sSupPr>
+                        <m:ctrlPr>
+                          <a:rPr lang="pt-BR" b="1" i="1">
+                            <a:latin typeface="Cambria Math" panose="02040503050406030204" pitchFamily="18" charset="0"/>
+                          </a:rPr>
+                        </m:ctrlPr>
+                      </m:sSupPr>
+                      <m:e>
+                        <m:r>
+                          <a:rPr lang="pt-BR" b="1" i="1">
+                            <a:latin typeface="Cambria Math" panose="02040503050406030204" pitchFamily="18" charset="0"/>
+                          </a:rPr>
+                          <m:t>[</m:t>
+                        </m:r>
+                        <m:sSub>
+                          <m:sSubPr>
+                            <m:ctrlPr>
+                              <a:rPr lang="pt-BR" i="1">
+                                <a:latin typeface="Cambria Math" panose="02040503050406030204" pitchFamily="18" charset="0"/>
+                                <a:ea typeface="Cambria Math" panose="02040503050406030204" pitchFamily="18" charset="0"/>
+                              </a:rPr>
+                            </m:ctrlPr>
+                          </m:sSubPr>
+                          <m:e>
+                            <m:r>
+                              <a:rPr lang="pt-BR" i="1">
+                                <a:latin typeface="Cambria Math" panose="02040503050406030204" pitchFamily="18" charset="0"/>
+                                <a:ea typeface="Cambria Math" panose="02040503050406030204" pitchFamily="18" charset="0"/>
+                              </a:rPr>
+                              <m:t>𝑎</m:t>
+                            </m:r>
+                          </m:e>
+                          <m:sub>
+                            <m:r>
+                              <a:rPr lang="pt-BR" i="1">
+                                <a:latin typeface="Cambria Math" panose="02040503050406030204" pitchFamily="18" charset="0"/>
+                                <a:ea typeface="Cambria Math" panose="02040503050406030204" pitchFamily="18" charset="0"/>
+                              </a:rPr>
+                              <m:t>0</m:t>
+                            </m:r>
+                          </m:sub>
+                        </m:sSub>
+                        <m:r>
+                          <a:rPr lang="pt-BR" b="1" i="1">
+                            <a:latin typeface="Cambria Math" panose="02040503050406030204" pitchFamily="18" charset="0"/>
+                            <a:ea typeface="Cambria Math" panose="02040503050406030204" pitchFamily="18" charset="0"/>
+                          </a:rPr>
+                          <m:t>…</m:t>
+                        </m:r>
+                        <m:sSub>
+                          <m:sSubPr>
+                            <m:ctrlPr>
+                              <a:rPr lang="pt-BR" i="1">
+                                <a:latin typeface="Cambria Math" panose="02040503050406030204" pitchFamily="18" charset="0"/>
+                                <a:ea typeface="Cambria Math" panose="02040503050406030204" pitchFamily="18" charset="0"/>
+                              </a:rPr>
+                            </m:ctrlPr>
+                          </m:sSubPr>
+                          <m:e>
+                            <m:r>
+                              <a:rPr lang="pt-BR" i="1">
+                                <a:latin typeface="Cambria Math" panose="02040503050406030204" pitchFamily="18" charset="0"/>
+                                <a:ea typeface="Cambria Math" panose="02040503050406030204" pitchFamily="18" charset="0"/>
+                              </a:rPr>
+                              <m:t>𝑎</m:t>
+                            </m:r>
+                          </m:e>
+                          <m:sub>
+                            <m:r>
+                              <a:rPr lang="pt-BR" i="1">
+                                <a:latin typeface="Cambria Math" panose="02040503050406030204" pitchFamily="18" charset="0"/>
+                                <a:ea typeface="Cambria Math" panose="02040503050406030204" pitchFamily="18" charset="0"/>
+                              </a:rPr>
+                              <m:t>𝐾</m:t>
+                            </m:r>
+                          </m:sub>
+                        </m:sSub>
+                        <m:r>
+                          <a:rPr lang="pt-BR" b="1" i="1">
+                            <a:latin typeface="Cambria Math" panose="02040503050406030204" pitchFamily="18" charset="0"/>
+                          </a:rPr>
+                          <m:t>]</m:t>
+                        </m:r>
+                      </m:e>
+                      <m:sup>
+                        <m:r>
+                          <a:rPr lang="pt-BR" i="1">
+                            <a:latin typeface="Cambria Math" panose="02040503050406030204" pitchFamily="18" charset="0"/>
+                          </a:rPr>
+                          <m:t>𝑇</m:t>
+                        </m:r>
+                      </m:sup>
+                    </m:sSup>
+                    <m:r>
+                      <a:rPr lang="pt-BR" b="1" i="1">
+                        <a:latin typeface="Cambria Math" panose="02040503050406030204" pitchFamily="18" charset="0"/>
+                        <a:ea typeface="Cambria Math" panose="02040503050406030204" pitchFamily="18" charset="0"/>
+                      </a:rPr>
+                      <m:t>∈</m:t>
+                    </m:r>
+                    <m:sSup>
+                      <m:sSupPr>
+                        <m:ctrlPr>
+                          <a:rPr lang="pt-BR" b="1" i="1">
+                            <a:latin typeface="Cambria Math" panose="02040503050406030204" pitchFamily="18" charset="0"/>
+                            <a:ea typeface="Cambria Math" panose="02040503050406030204" pitchFamily="18" charset="0"/>
+                          </a:rPr>
+                        </m:ctrlPr>
+                      </m:sSupPr>
+                      <m:e>
+                        <m:r>
+                          <a:rPr lang="pt-BR" b="1" i="1">
+                            <a:latin typeface="Cambria Math" panose="02040503050406030204" pitchFamily="18" charset="0"/>
+                            <a:ea typeface="Cambria Math" panose="02040503050406030204" pitchFamily="18" charset="0"/>
+                          </a:rPr>
+                          <m:t> </m:t>
+                        </m:r>
+                        <m:r>
+                          <a:rPr lang="pt-BR" b="1" i="1">
+                            <a:latin typeface="Cambria Math" panose="02040503050406030204" pitchFamily="18" charset="0"/>
+                            <a:ea typeface="Cambria Math" panose="02040503050406030204" pitchFamily="18" charset="0"/>
+                          </a:rPr>
+                          <m:t>ℝ</m:t>
+                        </m:r>
+                      </m:e>
+                      <m:sup>
+                        <m:r>
+                          <a:rPr lang="pt-BR" i="1">
+                            <a:latin typeface="Cambria Math" panose="02040503050406030204" pitchFamily="18" charset="0"/>
+                            <a:ea typeface="Cambria Math" panose="02040503050406030204" pitchFamily="18" charset="0"/>
+                          </a:rPr>
+                          <m:t>𝐾</m:t>
+                        </m:r>
+                        <m:r>
+                          <a:rPr lang="pt-BR" b="0" i="1" smtClean="0">
+                            <a:latin typeface="Cambria Math" panose="02040503050406030204" pitchFamily="18" charset="0"/>
+                            <a:ea typeface="Cambria Math" panose="02040503050406030204" pitchFamily="18" charset="0"/>
+                          </a:rPr>
+                          <m:t>+1</m:t>
+                        </m:r>
+                        <m:r>
+                          <a:rPr lang="pt-BR" i="1">
+                            <a:latin typeface="Cambria Math" panose="02040503050406030204" pitchFamily="18" charset="0"/>
+                            <a:ea typeface="Cambria Math" panose="02040503050406030204" pitchFamily="18" charset="0"/>
+                          </a:rPr>
+                          <m:t>×1</m:t>
+                        </m:r>
+                      </m:sup>
+                    </m:sSup>
+                  </m:oMath>
+                </a14:m>
+                <a:r>
+                  <a:rPr lang="pt-BR" dirty="0"/>
+                  <a:t>, que minimize o </a:t>
+                </a:r>
+                <a:r>
+                  <a:rPr lang="pt-BR" b="1" dirty="0"/>
+                  <a:t>erro</a:t>
+                </a:r>
+                <a:r>
+                  <a:rPr lang="pt-BR" dirty="0"/>
+                  <a:t>, dado por uma </a:t>
+                </a:r>
+                <a:r>
+                  <a:rPr lang="pt-BR" b="1" dirty="0"/>
+                  <a:t>função de erro</a:t>
+                </a:r>
+                <a:r>
+                  <a:rPr lang="pt-BR" dirty="0"/>
+                  <a:t>, </a:t>
+                </a:r>
+                <a14:m>
+                  <m:oMath xmlns:m="http://schemas.openxmlformats.org/officeDocument/2006/math">
+                    <m:sSub>
+                      <m:sSubPr>
+                        <m:ctrlPr>
+                          <a:rPr lang="pt-BR" i="1">
+                            <a:latin typeface="Cambria Math" panose="02040503050406030204" pitchFamily="18" charset="0"/>
+                          </a:rPr>
+                        </m:ctrlPr>
+                      </m:sSubPr>
+                      <m:e>
+                        <m:r>
+                          <a:rPr lang="pt-BR" i="1">
+                            <a:latin typeface="Cambria Math" panose="02040503050406030204" pitchFamily="18" charset="0"/>
+                          </a:rPr>
+                          <m:t>𝐽</m:t>
+                        </m:r>
+                      </m:e>
+                      <m:sub>
+                        <m:r>
+                          <a:rPr lang="pt-BR" i="1">
+                            <a:latin typeface="Cambria Math" panose="02040503050406030204" pitchFamily="18" charset="0"/>
+                          </a:rPr>
+                          <m:t>𝑒</m:t>
+                        </m:r>
+                      </m:sub>
+                    </m:sSub>
+                    <m:d>
+                      <m:dPr>
+                        <m:ctrlPr>
+                          <a:rPr lang="pt-BR" i="1">
+                            <a:latin typeface="Cambria Math" panose="02040503050406030204" pitchFamily="18" charset="0"/>
+                          </a:rPr>
+                        </m:ctrlPr>
+                      </m:dPr>
+                      <m:e>
+                        <m:r>
+                          <a:rPr lang="pt-BR" b="1" i="1">
+                            <a:latin typeface="Cambria Math" panose="02040503050406030204" pitchFamily="18" charset="0"/>
+                          </a:rPr>
+                          <m:t>𝒂</m:t>
+                        </m:r>
+                      </m:e>
+                    </m:d>
+                  </m:oMath>
+                </a14:m>
+                <a:r>
+                  <a:rPr lang="pt-BR" dirty="0"/>
+                  <a:t>, entre a aproximação, </a:t>
+                </a:r>
+                <a14:m>
+                  <m:oMath xmlns:m="http://schemas.openxmlformats.org/officeDocument/2006/math">
+                    <m:acc>
+                      <m:accPr>
+                        <m:chr m:val="̂"/>
+                        <m:ctrlPr>
+                          <a:rPr lang="pt-BR" i="1">
+                            <a:latin typeface="Cambria Math" panose="02040503050406030204" pitchFamily="18" charset="0"/>
+                          </a:rPr>
+                        </m:ctrlPr>
+                      </m:accPr>
+                      <m:e>
+                        <m:r>
+                          <a:rPr lang="pt-BR" i="1">
+                            <a:latin typeface="Cambria Math" panose="02040503050406030204" pitchFamily="18" charset="0"/>
+                          </a:rPr>
+                          <m:t>𝑦</m:t>
+                        </m:r>
+                      </m:e>
+                    </m:acc>
+                  </m:oMath>
+                </a14:m>
+                <a:r>
+                  <a:rPr lang="pt-BR" dirty="0"/>
+                  <a:t>, e o valor esperado, </a:t>
+                </a:r>
+                <a14:m>
+                  <m:oMath xmlns:m="http://schemas.openxmlformats.org/officeDocument/2006/math">
+                    <m:r>
+                      <a:rPr lang="pt-BR" i="1">
+                        <a:latin typeface="Cambria Math" panose="02040503050406030204" pitchFamily="18" charset="0"/>
+                      </a:rPr>
+                      <m:t>𝑦</m:t>
+                    </m:r>
+                  </m:oMath>
+                </a14:m>
+                <a:r>
+                  <a:rPr lang="pt-BR" dirty="0"/>
+                  <a:t>, </a:t>
+                </a:r>
+                <a:r>
+                  <a:rPr lang="pt-BR" b="1" dirty="0">
+                    <a:solidFill>
+                      <a:srgbClr val="00B050"/>
+                    </a:solidFill>
+                  </a:rPr>
+                  <a:t>para todos </a:t>
+                </a:r>
+                <a:r>
+                  <a:rPr lang="pt-BR" b="1" dirty="0">
+                    <a:solidFill>
+                      <a:srgbClr val="0070C0"/>
+                    </a:solidFill>
+                  </a:rPr>
+                  <a:t>os exemplos do conjunto de treinamento</a:t>
+                </a:r>
+                <a:r>
+                  <a:rPr lang="pt-BR" dirty="0"/>
+                  <a:t>.</a:t>
+                </a:r>
+              </a:p>
+              <a:p>
+                <a:pPr marL="0" indent="0" algn="ctr">
+                  <a:buNone/>
+                </a:pPr>
+                <a14:m>
+                  <m:oMath xmlns:m="http://schemas.openxmlformats.org/officeDocument/2006/math">
+                    <m:func>
+                      <m:funcPr>
+                        <m:ctrlPr>
+                          <a:rPr lang="pt-BR" i="1">
+                            <a:latin typeface="Cambria Math" panose="02040503050406030204" pitchFamily="18" charset="0"/>
+                          </a:rPr>
+                        </m:ctrlPr>
+                      </m:funcPr>
+                      <m:fName>
+                        <m:limLow>
+                          <m:limLowPr>
+                            <m:ctrlPr>
+                              <a:rPr lang="pt-BR" i="1">
+                                <a:latin typeface="Cambria Math" panose="02040503050406030204" pitchFamily="18" charset="0"/>
+                              </a:rPr>
+                            </m:ctrlPr>
+                          </m:limLowPr>
+                          <m:e>
+                            <m:r>
+                              <m:rPr>
+                                <m:sty m:val="p"/>
+                              </m:rPr>
+                              <a:rPr lang="pt-BR">
+                                <a:latin typeface="Cambria Math" panose="02040503050406030204" pitchFamily="18" charset="0"/>
+                              </a:rPr>
+                              <m:t>min</m:t>
+                            </m:r>
+                          </m:e>
+                          <m:lim>
+                            <m:r>
+                              <a:rPr lang="pt-BR" b="1" i="1">
+                                <a:latin typeface="Cambria Math" panose="02040503050406030204" pitchFamily="18" charset="0"/>
+                              </a:rPr>
+                              <m:t>𝒂</m:t>
+                            </m:r>
+                            <m:r>
+                              <a:rPr lang="pt-BR" b="1" i="1">
+                                <a:latin typeface="Cambria Math" panose="02040503050406030204" pitchFamily="18" charset="0"/>
+                              </a:rPr>
+                              <m:t> </m:t>
+                            </m:r>
+                          </m:lim>
+                        </m:limLow>
+                      </m:fName>
+                      <m:e>
+                        <m:sSub>
+                          <m:sSubPr>
+                            <m:ctrlPr>
+                              <a:rPr lang="pt-BR" i="1">
+                                <a:latin typeface="Cambria Math" panose="02040503050406030204" pitchFamily="18" charset="0"/>
+                              </a:rPr>
+                            </m:ctrlPr>
+                          </m:sSubPr>
+                          <m:e>
+                            <m:r>
+                              <a:rPr lang="pt-BR" i="1">
+                                <a:latin typeface="Cambria Math" panose="02040503050406030204" pitchFamily="18" charset="0"/>
+                              </a:rPr>
+                              <m:t>𝐽</m:t>
+                            </m:r>
+                          </m:e>
+                          <m:sub>
+                            <m:r>
+                              <a:rPr lang="pt-BR" i="1">
+                                <a:latin typeface="Cambria Math" panose="02040503050406030204" pitchFamily="18" charset="0"/>
+                              </a:rPr>
+                              <m:t>𝑒</m:t>
+                            </m:r>
+                          </m:sub>
+                        </m:sSub>
+                        <m:r>
+                          <a:rPr lang="pt-BR" i="1">
+                            <a:latin typeface="Cambria Math" panose="02040503050406030204" pitchFamily="18" charset="0"/>
+                          </a:rPr>
+                          <m:t>(</m:t>
+                        </m:r>
+                        <m:r>
+                          <a:rPr lang="pt-BR" b="1" i="1">
+                            <a:latin typeface="Cambria Math" panose="02040503050406030204" pitchFamily="18" charset="0"/>
+                          </a:rPr>
+                          <m:t>𝒂</m:t>
+                        </m:r>
+                        <m:r>
+                          <a:rPr lang="pt-BR" i="1">
+                            <a:latin typeface="Cambria Math" panose="02040503050406030204" pitchFamily="18" charset="0"/>
+                          </a:rPr>
+                          <m:t>)</m:t>
+                        </m:r>
+                      </m:e>
+                    </m:func>
+                  </m:oMath>
+                </a14:m>
+                <a:r>
+                  <a:rPr lang="pt-BR" dirty="0"/>
+                  <a:t>.</a:t>
+                </a:r>
+              </a:p>
+            </p:txBody>
+          </p:sp>
+        </mc:Choice>
+        <mc:Fallback>
+          <p:sp>
+            <p:nvSpPr>
+              <p:cNvPr id="3" name="Content Placeholder 2">
+                <a:extLst>
+                  <a:ext uri="{FF2B5EF4-FFF2-40B4-BE49-F238E27FC236}">
+                    <a16:creationId xmlns:a16="http://schemas.microsoft.com/office/drawing/2014/main" id="{A8F1D988-6925-C286-BA9F-B4A4851E2FFB}"/>
+                  </a:ext>
+                </a:extLst>
+              </p:cNvPr>
+              <p:cNvSpPr>
+                <a:spLocks noGrp="1" noRot="1" noChangeAspect="1" noMove="1" noResize="1" noEditPoints="1" noAdjustHandles="1" noChangeArrowheads="1" noChangeShapeType="1" noTextEdit="1"/>
+              </p:cNvSpPr>
+              <p:nvPr>
+                <p:ph idx="1"/>
+              </p:nvPr>
+            </p:nvSpPr>
+            <p:spPr>
+              <a:xfrm>
+                <a:off x="838199" y="1825624"/>
+                <a:ext cx="11157857" cy="5032375"/>
+              </a:xfrm>
+              <a:blipFill>
+                <a:blip r:embed="rId2"/>
+                <a:stretch>
+                  <a:fillRect l="-928" t="-1937" r="-1584"/>
+                </a:stretch>
+              </a:blipFill>
+            </p:spPr>
+            <p:txBody>
+              <a:bodyPr/>
+              <a:lstStyle/>
+              <a:p>
+                <a:r>
+                  <a:rPr lang="en-US">
+                    <a:noFill/>
+                  </a:rPr>
+                  <a:t> </a:t>
+                </a:r>
+              </a:p>
+            </p:txBody>
+          </p:sp>
+        </mc:Fallback>
+      </mc:AlternateContent>
+      <mc:AlternateContent xmlns:mc="http://schemas.openxmlformats.org/markup-compatibility/2006">
+        <mc:Choice xmlns:a14="http://schemas.microsoft.com/office/drawing/2010/main" Requires="a14">
+          <p:sp>
+            <p:nvSpPr>
+              <p:cNvPr id="5" name="TextBox 4">
+                <a:extLst>
+                  <a:ext uri="{FF2B5EF4-FFF2-40B4-BE49-F238E27FC236}">
+                    <a16:creationId xmlns:a16="http://schemas.microsoft.com/office/drawing/2014/main" id="{A6B354F9-74E2-2FAD-DDBA-5FD514A114CE}"/>
+                  </a:ext>
+                </a:extLst>
+              </p:cNvPr>
+              <p:cNvSpPr txBox="1"/>
+              <p:nvPr/>
+            </p:nvSpPr>
+            <p:spPr>
+              <a:xfrm>
+                <a:off x="9753600" y="6550223"/>
+                <a:ext cx="2438400" cy="307777"/>
+              </a:xfrm>
+              <a:prstGeom prst="rect">
+                <a:avLst/>
+              </a:prstGeom>
+              <a:noFill/>
+            </p:spPr>
+            <p:txBody>
+              <a:bodyPr wrap="square">
+                <a:spAutoFit/>
+              </a:bodyPr>
+              <a:lstStyle/>
+              <a:p>
+                <a:r>
+                  <a:rPr lang="pt-BR" sz="1400" b="1" dirty="0">
+                    <a:ea typeface="Cambria Math" panose="02040503050406030204" pitchFamily="18" charset="0"/>
+                  </a:rPr>
+                  <a:t>OBS</a:t>
+                </a:r>
+                <a:r>
+                  <a:rPr lang="pt-BR" sz="1400" dirty="0">
+                    <a:ea typeface="Cambria Math" panose="02040503050406030204" pitchFamily="18" charset="0"/>
+                  </a:rPr>
+                  <a:t>.: </a:t>
+                </a:r>
+                <a14:m>
+                  <m:oMath xmlns:m="http://schemas.openxmlformats.org/officeDocument/2006/math">
+                    <m:r>
+                      <a:rPr lang="pt-BR" sz="1400" i="1" smtClean="0">
+                        <a:latin typeface="Cambria Math" panose="02040503050406030204" pitchFamily="18" charset="0"/>
+                        <a:ea typeface="Cambria Math" panose="02040503050406030204" pitchFamily="18" charset="0"/>
+                      </a:rPr>
+                      <m:t>𝐾</m:t>
+                    </m:r>
+                  </m:oMath>
+                </a14:m>
+                <a:r>
+                  <a:rPr lang="pt-BR" sz="1400" dirty="0"/>
+                  <a:t> é o número de pesos.</a:t>
+                </a:r>
+                <a:endParaRPr lang="en-US" sz="1400" dirty="0"/>
+              </a:p>
+            </p:txBody>
+          </p:sp>
+        </mc:Choice>
+        <mc:Fallback>
+          <p:sp>
+            <p:nvSpPr>
+              <p:cNvPr id="5" name="TextBox 4">
+                <a:extLst>
+                  <a:ext uri="{FF2B5EF4-FFF2-40B4-BE49-F238E27FC236}">
+                    <a16:creationId xmlns:a16="http://schemas.microsoft.com/office/drawing/2014/main" id="{A6B354F9-74E2-2FAD-DDBA-5FD514A114CE}"/>
+                  </a:ext>
+                </a:extLst>
+              </p:cNvPr>
+              <p:cNvSpPr txBox="1">
+                <a:spLocks noRot="1" noChangeAspect="1" noMove="1" noResize="1" noEditPoints="1" noAdjustHandles="1" noChangeArrowheads="1" noChangeShapeType="1" noTextEdit="1"/>
+              </p:cNvSpPr>
+              <p:nvPr/>
+            </p:nvSpPr>
+            <p:spPr>
+              <a:xfrm>
+                <a:off x="9753600" y="6550223"/>
+                <a:ext cx="2438400" cy="307777"/>
+              </a:xfrm>
+              <a:prstGeom prst="rect">
+                <a:avLst/>
+              </a:prstGeom>
+              <a:blipFill>
+                <a:blip r:embed="rId3"/>
+                <a:stretch>
+                  <a:fillRect l="-750" t="-4000" b="-20000"/>
+                </a:stretch>
+              </a:blipFill>
+            </p:spPr>
+            <p:txBody>
+              <a:bodyPr/>
+              <a:lstStyle/>
+              <a:p>
+                <a:r>
+                  <a:rPr lang="en-US">
+                    <a:noFill/>
+                  </a:rPr>
+                  <a:t> </a:t>
+                </a:r>
+              </a:p>
+            </p:txBody>
+          </p:sp>
+        </mc:Fallback>
+      </mc:AlternateContent>
     </p:spTree>
     <p:extLst>
       <p:ext uri="{BB962C8B-B14F-4D97-AF65-F5344CB8AC3E}">
-        <p14:creationId xmlns:p14="http://schemas.microsoft.com/office/powerpoint/2010/main" val="1907726768"/>
+        <p14:creationId xmlns:p14="http://schemas.microsoft.com/office/powerpoint/2010/main" val="678142842"/>
       </p:ext>
     </p:extLst>
   </p:cSld>
@@ -7386,7 +8531,13 @@
   <p:cSld>
     <p:spTree>
       <p:nvGrpSpPr>
-        <p:cNvPr id="1" name=""/>
+        <p:cNvPr id="1" name="">
+          <a:extLst>
+            <a:ext uri="{FF2B5EF4-FFF2-40B4-BE49-F238E27FC236}">
+              <a16:creationId xmlns:a16="http://schemas.microsoft.com/office/drawing/2014/main" id="{2CAA1FF2-610F-29DC-A1C0-06044CE6D752}"/>
+            </a:ext>
+          </a:extLst>
+        </p:cNvPr>
         <p:cNvGrpSpPr/>
         <p:nvPr/>
       </p:nvGrpSpPr>
@@ -7400,64 +8551,46 @@
       </p:grpSpPr>
       <p:sp>
         <p:nvSpPr>
-          <p:cNvPr id="4" name="Título 1">
+          <p:cNvPr id="3" name="Espaço Reservado para Conteúdo 2">
             <a:extLst>
               <a:ext uri="{FF2B5EF4-FFF2-40B4-BE49-F238E27FC236}">
-                <a16:creationId xmlns:a16="http://schemas.microsoft.com/office/drawing/2014/main" id="{32666AC8-2E17-4DB4-B0F5-60C640CCFD2E}"/>
+                <a16:creationId xmlns:a16="http://schemas.microsoft.com/office/drawing/2014/main" id="{BEB786D8-DC7C-3952-8523-439D463A8F44}"/>
               </a:ext>
             </a:extLst>
           </p:cNvPr>
-          <p:cNvSpPr txBox="1">
-            <a:spLocks/>
+          <p:cNvSpPr>
+            <a:spLocks noGrp="1"/>
           </p:cNvSpPr>
-          <p:nvPr/>
+          <p:nvPr>
+            <p:ph idx="1"/>
+          </p:nvPr>
         </p:nvSpPr>
         <p:spPr>
           <a:xfrm>
-            <a:off x="1431533" y="2720526"/>
-            <a:ext cx="9144000" cy="1029541"/>
+            <a:off x="838199" y="2593975"/>
+            <a:ext cx="10853057" cy="2228396"/>
           </a:xfrm>
-          <a:prstGeom prst="rect">
-            <a:avLst/>
-          </a:prstGeom>
         </p:spPr>
         <p:txBody>
-          <a:bodyPr vert="horz" lIns="91440" tIns="45720" rIns="91440" bIns="45720" rtlCol="0" anchor="ctr">
+          <a:bodyPr>
             <a:normAutofit/>
           </a:bodyPr>
-          <a:lstStyle>
-            <a:lvl1pPr algn="l" defTabSz="914400" rtl="0" eaLnBrk="1" latinLnBrk="0" hangingPunct="1">
-              <a:lnSpc>
-                <a:spcPct val="90000"/>
-              </a:lnSpc>
-              <a:spcBef>
-                <a:spcPct val="0"/>
-              </a:spcBef>
+          <a:lstStyle/>
+          <a:p>
+            <a:pPr marL="0" indent="0" algn="ctr">
               <a:buNone/>
-              <a:defRPr sz="4400" kern="1200">
-                <a:solidFill>
-                  <a:schemeClr val="tx1"/>
-                </a:solidFill>
-                <a:latin typeface="+mj-lt"/>
-                <a:ea typeface="+mj-ea"/>
-                <a:cs typeface="+mj-cs"/>
-              </a:defRPr>
-            </a:lvl1pPr>
-          </a:lstStyle>
-          <a:p>
-            <a:pPr algn="ctr"/>
-            <a:r>
-              <a:rPr lang="pt-BR" sz="6600" dirty="0"/>
-              <a:t>Perguntas?</a:t>
-            </a:r>
-            <a:endParaRPr lang="pt-BR" sz="6600" b="1" i="1" dirty="0"/>
+            </a:pPr>
+            <a:r>
+              <a:rPr lang="pt-BR" sz="5400" i="1" dirty="0"/>
+              <a:t>Para treinarmos o modelo, precisamos de uma função de erro</a:t>
+            </a:r>
           </a:p>
         </p:txBody>
       </p:sp>
     </p:spTree>
     <p:extLst>
       <p:ext uri="{BB962C8B-B14F-4D97-AF65-F5344CB8AC3E}">
-        <p14:creationId xmlns:p14="http://schemas.microsoft.com/office/powerpoint/2010/main" val="3773005660"/>
+        <p14:creationId xmlns:p14="http://schemas.microsoft.com/office/powerpoint/2010/main" val="3208991609"/>
       </p:ext>
     </p:extLst>
   </p:cSld>
@@ -7486,64 +8619,2714 @@
       </p:grpSpPr>
       <p:sp>
         <p:nvSpPr>
-          <p:cNvPr id="4" name="Título 1">
+          <p:cNvPr id="2" name="Título 1">
             <a:extLst>
               <a:ext uri="{FF2B5EF4-FFF2-40B4-BE49-F238E27FC236}">
-                <a16:creationId xmlns:a16="http://schemas.microsoft.com/office/drawing/2014/main" id="{32666AC8-2E17-4DB4-B0F5-60C640CCFD2E}"/>
+                <a16:creationId xmlns:a16="http://schemas.microsoft.com/office/drawing/2014/main" id="{D22F9E6F-04DB-ABA7-5277-8F56D03FB979}"/>
               </a:ext>
             </a:extLst>
           </p:cNvPr>
-          <p:cNvSpPr txBox="1">
-            <a:spLocks/>
+          <p:cNvSpPr>
+            <a:spLocks noGrp="1"/>
           </p:cNvSpPr>
+          <p:nvPr>
+            <p:ph type="title"/>
+          </p:nvPr>
+        </p:nvSpPr>
+        <p:spPr/>
+        <p:txBody>
+          <a:bodyPr/>
+          <a:lstStyle/>
+          <a:p>
+            <a:r>
+              <a:rPr lang="pt-BR" dirty="0"/>
+              <a:t>Função de erro</a:t>
+            </a:r>
+          </a:p>
+        </p:txBody>
+      </p:sp>
+      <mc:AlternateContent xmlns:mc="http://schemas.openxmlformats.org/markup-compatibility/2006">
+        <mc:Choice xmlns:a14="http://schemas.microsoft.com/office/drawing/2010/main" Requires="a14">
+          <p:sp>
+            <p:nvSpPr>
+              <p:cNvPr id="3" name="Espaço Reservado para Conteúdo 2">
+                <a:extLst>
+                  <a:ext uri="{FF2B5EF4-FFF2-40B4-BE49-F238E27FC236}">
+                    <a16:creationId xmlns:a16="http://schemas.microsoft.com/office/drawing/2014/main" id="{843752C2-61B6-8E7E-17CE-7C009ECA9D67}"/>
+                  </a:ext>
+                </a:extLst>
+              </p:cNvPr>
+              <p:cNvSpPr>
+                <a:spLocks noGrp="1"/>
+              </p:cNvSpPr>
+              <p:nvPr>
+                <p:ph idx="1"/>
+              </p:nvPr>
+            </p:nvSpPr>
+            <p:spPr>
+              <a:xfrm>
+                <a:off x="838200" y="1825624"/>
+                <a:ext cx="11353800" cy="5032375"/>
+              </a:xfrm>
+            </p:spPr>
+            <p:txBody>
+              <a:bodyPr>
+                <a:normAutofit/>
+              </a:bodyPr>
+              <a:lstStyle/>
+              <a:p>
+                <a:r>
+                  <a:rPr lang="pt-BR" dirty="0"/>
+                  <a:t>Existem várias possibilidades para a </a:t>
+                </a:r>
+                <a:r>
+                  <a:rPr lang="pt-BR" b="1" dirty="0"/>
+                  <a:t>função de erro</a:t>
+                </a:r>
+                <a:r>
+                  <a:rPr lang="pt-BR" dirty="0"/>
+                  <a:t>.</a:t>
+                </a:r>
+              </a:p>
+              <a:p>
+                <a:r>
+                  <a:rPr lang="pt-BR" dirty="0"/>
+                  <a:t>Porém, em problemas de regressão, é comum utilizar-se o </a:t>
+                </a:r>
+                <a:r>
+                  <a:rPr lang="pt-BR" b="1" dirty="0">
+                    <a:solidFill>
+                      <a:srgbClr val="00B050"/>
+                    </a:solidFill>
+                  </a:rPr>
+                  <a:t>erro quadrático médio (EQM)</a:t>
+                </a:r>
+                <a:endParaRPr lang="pt-BR" dirty="0"/>
+              </a:p>
+              <a:p>
+                <a:pPr marL="0" indent="0" algn="ctr">
+                  <a:buNone/>
+                </a:pPr>
+                <a14:m>
+                  <m:oMathPara xmlns:m="http://schemas.openxmlformats.org/officeDocument/2006/math">
+                    <m:oMathParaPr>
+                      <m:jc m:val="centerGroup"/>
+                    </m:oMathParaPr>
+                    <m:oMath xmlns:m="http://schemas.openxmlformats.org/officeDocument/2006/math">
+                      <m:sSub>
+                        <m:sSubPr>
+                          <m:ctrlPr>
+                            <a:rPr lang="pt-BR" i="1">
+                              <a:latin typeface="Cambria Math" panose="02040503050406030204" pitchFamily="18" charset="0"/>
+                            </a:rPr>
+                          </m:ctrlPr>
+                        </m:sSubPr>
+                        <m:e>
+                          <m:r>
+                            <a:rPr lang="pt-BR" i="1">
+                              <a:latin typeface="Cambria Math" panose="02040503050406030204" pitchFamily="18" charset="0"/>
+                            </a:rPr>
+                            <m:t>𝐽</m:t>
+                          </m:r>
+                        </m:e>
+                        <m:sub>
+                          <m:r>
+                            <a:rPr lang="pt-BR" i="1">
+                              <a:latin typeface="Cambria Math" panose="02040503050406030204" pitchFamily="18" charset="0"/>
+                            </a:rPr>
+                            <m:t>𝑒</m:t>
+                          </m:r>
+                        </m:sub>
+                      </m:sSub>
+                      <m:d>
+                        <m:dPr>
+                          <m:ctrlPr>
+                            <a:rPr lang="pt-BR" i="1">
+                              <a:latin typeface="Cambria Math" panose="02040503050406030204" pitchFamily="18" charset="0"/>
+                            </a:rPr>
+                          </m:ctrlPr>
+                        </m:dPr>
+                        <m:e>
+                          <m:r>
+                            <a:rPr lang="pt-BR" b="1" i="1">
+                              <a:latin typeface="Cambria Math" panose="02040503050406030204" pitchFamily="18" charset="0"/>
+                            </a:rPr>
+                            <m:t>𝒂</m:t>
+                          </m:r>
+                        </m:e>
+                      </m:d>
+                      <m:r>
+                        <a:rPr lang="pt-BR" b="0" i="1" smtClean="0">
+                          <a:latin typeface="Cambria Math" panose="02040503050406030204" pitchFamily="18" charset="0"/>
+                        </a:rPr>
+                        <m:t>=</m:t>
+                      </m:r>
+                      <m:f>
+                        <m:fPr>
+                          <m:ctrlPr>
+                            <a:rPr lang="pt-BR" i="1">
+                              <a:latin typeface="Cambria Math" panose="02040503050406030204" pitchFamily="18" charset="0"/>
+                            </a:rPr>
+                          </m:ctrlPr>
+                        </m:fPr>
+                        <m:num>
+                          <m:r>
+                            <a:rPr lang="pt-BR" i="1">
+                              <a:latin typeface="Cambria Math" panose="02040503050406030204" pitchFamily="18" charset="0"/>
+                            </a:rPr>
+                            <m:t>1</m:t>
+                          </m:r>
+                        </m:num>
+                        <m:den>
+                          <m:r>
+                            <a:rPr lang="pt-BR" i="1">
+                              <a:latin typeface="Cambria Math" panose="02040503050406030204" pitchFamily="18" charset="0"/>
+                            </a:rPr>
+                            <m:t>𝑁</m:t>
+                          </m:r>
+                        </m:den>
+                      </m:f>
+                      <m:nary>
+                        <m:naryPr>
+                          <m:chr m:val="∑"/>
+                          <m:ctrlPr>
+                            <a:rPr lang="pt-BR" i="1">
+                              <a:latin typeface="Cambria Math" panose="02040503050406030204" pitchFamily="18" charset="0"/>
+                            </a:rPr>
+                          </m:ctrlPr>
+                        </m:naryPr>
+                        <m:sub>
+                          <m:r>
+                            <m:rPr>
+                              <m:brk m:alnAt="23"/>
+                            </m:rPr>
+                            <a:rPr lang="pt-BR" i="1">
+                              <a:latin typeface="Cambria Math" panose="02040503050406030204" pitchFamily="18" charset="0"/>
+                            </a:rPr>
+                            <m:t>𝑖</m:t>
+                          </m:r>
+                          <m:r>
+                            <a:rPr lang="pt-BR" i="1">
+                              <a:latin typeface="Cambria Math" panose="02040503050406030204" pitchFamily="18" charset="0"/>
+                            </a:rPr>
+                            <m:t>=0</m:t>
+                          </m:r>
+                        </m:sub>
+                        <m:sup>
+                          <m:r>
+                            <a:rPr lang="pt-BR" i="1">
+                              <a:latin typeface="Cambria Math" panose="02040503050406030204" pitchFamily="18" charset="0"/>
+                            </a:rPr>
+                            <m:t>𝑁</m:t>
+                          </m:r>
+                          <m:r>
+                            <a:rPr lang="pt-BR" i="1">
+                              <a:latin typeface="Cambria Math" panose="02040503050406030204" pitchFamily="18" charset="0"/>
+                            </a:rPr>
+                            <m:t>−1</m:t>
+                          </m:r>
+                        </m:sup>
+                        <m:e>
+                          <m:sSup>
+                            <m:sSupPr>
+                              <m:ctrlPr>
+                                <a:rPr lang="pt-BR" i="1">
+                                  <a:latin typeface="Cambria Math" panose="02040503050406030204" pitchFamily="18" charset="0"/>
+                                </a:rPr>
+                              </m:ctrlPr>
+                            </m:sSupPr>
+                            <m:e>
+                              <m:d>
+                                <m:dPr>
+                                  <m:ctrlPr>
+                                    <a:rPr lang="pt-BR" i="1" smtClean="0">
+                                      <a:latin typeface="Cambria Math" panose="02040503050406030204" pitchFamily="18" charset="0"/>
+                                    </a:rPr>
+                                  </m:ctrlPr>
+                                </m:dPr>
+                                <m:e>
+                                  <m:r>
+                                    <a:rPr lang="pt-BR" i="1">
+                                      <a:latin typeface="Cambria Math" panose="02040503050406030204" pitchFamily="18" charset="0"/>
+                                    </a:rPr>
+                                    <m:t>𝑦</m:t>
+                                  </m:r>
+                                  <m:r>
+                                    <a:rPr lang="pt-BR" i="1">
+                                      <a:latin typeface="Cambria Math" panose="02040503050406030204" pitchFamily="18" charset="0"/>
+                                    </a:rPr>
+                                    <m:t>(</m:t>
+                                  </m:r>
+                                  <m:r>
+                                    <a:rPr lang="pt-BR" i="1">
+                                      <a:latin typeface="Cambria Math" panose="02040503050406030204" pitchFamily="18" charset="0"/>
+                                    </a:rPr>
+                                    <m:t>𝑖</m:t>
+                                  </m:r>
+                                  <m:r>
+                                    <a:rPr lang="pt-BR" i="1">
+                                      <a:latin typeface="Cambria Math" panose="02040503050406030204" pitchFamily="18" charset="0"/>
+                                    </a:rPr>
+                                    <m:t>)−</m:t>
+                                  </m:r>
+                                  <m:acc>
+                                    <m:accPr>
+                                      <m:chr m:val="̂"/>
+                                      <m:ctrlPr>
+                                        <a:rPr lang="pt-BR" i="1" dirty="0" smtClean="0">
+                                          <a:latin typeface="Cambria Math" panose="02040503050406030204" pitchFamily="18" charset="0"/>
+                                        </a:rPr>
+                                      </m:ctrlPr>
+                                    </m:accPr>
+                                    <m:e>
+                                      <m:r>
+                                        <a:rPr lang="pt-BR" b="0" i="1" dirty="0" smtClean="0">
+                                          <a:latin typeface="Cambria Math" panose="02040503050406030204" pitchFamily="18" charset="0"/>
+                                        </a:rPr>
+                                        <m:t>𝑦</m:t>
+                                      </m:r>
+                                    </m:e>
+                                  </m:acc>
+                                  <m:r>
+                                    <a:rPr lang="pt-BR" b="0" i="1" smtClean="0">
+                                      <a:latin typeface="Cambria Math" panose="02040503050406030204" pitchFamily="18" charset="0"/>
+                                    </a:rPr>
+                                    <m:t>(</m:t>
+                                  </m:r>
+                                  <m:r>
+                                    <a:rPr lang="pt-BR" b="0" i="1" smtClean="0">
+                                      <a:latin typeface="Cambria Math" panose="02040503050406030204" pitchFamily="18" charset="0"/>
+                                    </a:rPr>
+                                    <m:t>𝑖</m:t>
+                                  </m:r>
+                                  <m:r>
+                                    <a:rPr lang="pt-BR" b="0" i="1" smtClean="0">
+                                      <a:latin typeface="Cambria Math" panose="02040503050406030204" pitchFamily="18" charset="0"/>
+                                    </a:rPr>
+                                    <m:t>)</m:t>
+                                  </m:r>
+                                </m:e>
+                              </m:d>
+                            </m:e>
+                            <m:sup>
+                              <m:r>
+                                <a:rPr lang="pt-BR" i="1">
+                                  <a:latin typeface="Cambria Math" panose="02040503050406030204" pitchFamily="18" charset="0"/>
+                                </a:rPr>
+                                <m:t>2</m:t>
+                              </m:r>
+                            </m:sup>
+                          </m:sSup>
+                        </m:e>
+                      </m:nary>
+                      <m:r>
+                        <a:rPr lang="pt-BR" b="0" i="1" smtClean="0">
+                          <a:latin typeface="Cambria Math" panose="02040503050406030204" pitchFamily="18" charset="0"/>
+                        </a:rPr>
+                        <m:t>=</m:t>
+                      </m:r>
+                      <m:limLow>
+                        <m:limLowPr>
+                          <m:ctrlPr>
+                            <a:rPr lang="pt-BR" b="0" i="1" smtClean="0">
+                              <a:latin typeface="Cambria Math" panose="02040503050406030204" pitchFamily="18" charset="0"/>
+                            </a:rPr>
+                          </m:ctrlPr>
+                        </m:limLowPr>
+                        <m:e>
+                          <m:groupChr>
+                            <m:groupChrPr>
+                              <m:chr m:val="⏟"/>
+                              <m:ctrlPr>
+                                <a:rPr lang="pt-BR" b="0" i="1" smtClean="0">
+                                  <a:latin typeface="Cambria Math" panose="02040503050406030204" pitchFamily="18" charset="0"/>
+                                </a:rPr>
+                              </m:ctrlPr>
+                            </m:groupChrPr>
+                            <m:e>
+                              <m:f>
+                                <m:fPr>
+                                  <m:ctrlPr>
+                                    <a:rPr lang="pt-BR" i="1">
+                                      <a:latin typeface="Cambria Math" panose="02040503050406030204" pitchFamily="18" charset="0"/>
+                                    </a:rPr>
+                                  </m:ctrlPr>
+                                </m:fPr>
+                                <m:num>
+                                  <m:r>
+                                    <a:rPr lang="pt-BR" i="1">
+                                      <a:latin typeface="Cambria Math" panose="02040503050406030204" pitchFamily="18" charset="0"/>
+                                    </a:rPr>
+                                    <m:t>1</m:t>
+                                  </m:r>
+                                </m:num>
+                                <m:den>
+                                  <m:r>
+                                    <a:rPr lang="pt-BR" i="1">
+                                      <a:latin typeface="Cambria Math" panose="02040503050406030204" pitchFamily="18" charset="0"/>
+                                    </a:rPr>
+                                    <m:t>𝑁</m:t>
+                                  </m:r>
+                                </m:den>
+                              </m:f>
+                              <m:sSup>
+                                <m:sSupPr>
+                                  <m:ctrlPr>
+                                    <a:rPr lang="pt-BR" i="1">
+                                      <a:latin typeface="Cambria Math" panose="02040503050406030204" pitchFamily="18" charset="0"/>
+                                    </a:rPr>
+                                  </m:ctrlPr>
+                                </m:sSupPr>
+                                <m:e>
+                                  <m:d>
+                                    <m:dPr>
+                                      <m:begChr m:val="‖"/>
+                                      <m:endChr m:val="‖"/>
+                                      <m:ctrlPr>
+                                        <a:rPr lang="pt-BR" i="1">
+                                          <a:latin typeface="Cambria Math" panose="02040503050406030204" pitchFamily="18" charset="0"/>
+                                        </a:rPr>
+                                      </m:ctrlPr>
+                                    </m:dPr>
+                                    <m:e>
+                                      <m:r>
+                                        <a:rPr lang="pt-BR" b="1" i="1">
+                                          <a:latin typeface="Cambria Math" panose="02040503050406030204" pitchFamily="18" charset="0"/>
+                                        </a:rPr>
+                                        <m:t>𝒚</m:t>
+                                      </m:r>
+                                      <m:r>
+                                        <a:rPr lang="pt-BR" i="1">
+                                          <a:latin typeface="Cambria Math" panose="02040503050406030204" pitchFamily="18" charset="0"/>
+                                        </a:rPr>
+                                        <m:t> −</m:t>
+                                      </m:r>
+                                      <m:r>
+                                        <a:rPr lang="pt-BR" b="1" i="1">
+                                          <a:latin typeface="Cambria Math" panose="02040503050406030204" pitchFamily="18" charset="0"/>
+                                        </a:rPr>
+                                        <m:t>𝑿𝒂</m:t>
+                                      </m:r>
+                                    </m:e>
+                                  </m:d>
+                                </m:e>
+                                <m:sup>
+                                  <m:r>
+                                    <a:rPr lang="pt-BR" i="1">
+                                      <a:latin typeface="Cambria Math" panose="02040503050406030204" pitchFamily="18" charset="0"/>
+                                    </a:rPr>
+                                    <m:t>2</m:t>
+                                  </m:r>
+                                </m:sup>
+                              </m:sSup>
+                            </m:e>
+                          </m:groupChr>
+                        </m:e>
+                        <m:lim>
+                          <m:r>
+                            <m:rPr>
+                              <m:sty m:val="p"/>
+                            </m:rPr>
+                            <a:rPr lang="pt-BR" b="0" i="0" smtClean="0">
+                              <a:latin typeface="Cambria Math" panose="02040503050406030204" pitchFamily="18" charset="0"/>
+                            </a:rPr>
+                            <m:t>forma</m:t>
+                          </m:r>
+                          <m:r>
+                            <a:rPr lang="pt-BR" b="0" i="0" smtClean="0">
+                              <a:latin typeface="Cambria Math" panose="02040503050406030204" pitchFamily="18" charset="0"/>
+                            </a:rPr>
+                            <m:t> </m:t>
+                          </m:r>
+                          <m:r>
+                            <m:rPr>
+                              <m:sty m:val="p"/>
+                            </m:rPr>
+                            <a:rPr lang="pt-BR" b="0" i="0" smtClean="0">
+                              <a:latin typeface="Cambria Math" panose="02040503050406030204" pitchFamily="18" charset="0"/>
+                            </a:rPr>
+                            <m:t>matricial</m:t>
+                          </m:r>
+                        </m:lim>
+                      </m:limLow>
+                      <m:r>
+                        <a:rPr lang="pt-BR" b="0" i="0" smtClean="0">
+                          <a:latin typeface="Cambria Math" panose="02040503050406030204" pitchFamily="18" charset="0"/>
+                        </a:rPr>
+                        <m:t>,</m:t>
+                      </m:r>
+                    </m:oMath>
+                  </m:oMathPara>
+                </a14:m>
+                <a:endParaRPr lang="pt-BR" dirty="0"/>
+              </a:p>
+              <a:p>
+                <a:pPr marL="0" indent="0">
+                  <a:buNone/>
+                </a:pPr>
+                <a:r>
+                  <a:rPr lang="pt-BR" dirty="0"/>
+                  <a:t>onde </a:t>
+                </a:r>
+                <a14:m>
+                  <m:oMath xmlns:m="http://schemas.openxmlformats.org/officeDocument/2006/math">
+                    <m:r>
+                      <a:rPr lang="pt-BR" i="1" smtClean="0">
+                        <a:latin typeface="Cambria Math" panose="02040503050406030204" pitchFamily="18" charset="0"/>
+                      </a:rPr>
+                      <m:t>𝑁</m:t>
+                    </m:r>
+                  </m:oMath>
+                </a14:m>
+                <a:r>
+                  <a:rPr lang="pt-BR" dirty="0"/>
+                  <a:t> é o número total de exemplos (ou amostras), </a:t>
+                </a:r>
+                <a14:m>
+                  <m:oMath xmlns:m="http://schemas.openxmlformats.org/officeDocument/2006/math">
+                    <m:r>
+                      <a:rPr lang="pt-BR" i="1">
+                        <a:latin typeface="Cambria Math" panose="02040503050406030204" pitchFamily="18" charset="0"/>
+                      </a:rPr>
+                      <m:t>𝑖</m:t>
+                    </m:r>
+                  </m:oMath>
+                </a14:m>
+                <a:r>
+                  <a:rPr lang="pt-BR" dirty="0"/>
+                  <a:t> o número do exemplo, </a:t>
+                </a:r>
+                <a14:m>
+                  <m:oMath xmlns:m="http://schemas.openxmlformats.org/officeDocument/2006/math">
+                    <m:r>
+                      <a:rPr lang="pt-BR" b="1" i="1">
+                        <a:latin typeface="Cambria Math" panose="02040503050406030204" pitchFamily="18" charset="0"/>
+                      </a:rPr>
+                      <m:t>𝒚</m:t>
+                    </m:r>
+                    <m:r>
+                      <a:rPr lang="pt-BR" b="1" i="1">
+                        <a:latin typeface="Cambria Math" panose="02040503050406030204" pitchFamily="18" charset="0"/>
+                      </a:rPr>
+                      <m:t>=</m:t>
+                    </m:r>
+                    <m:sSup>
+                      <m:sSupPr>
+                        <m:ctrlPr>
+                          <a:rPr lang="pt-BR" b="1" i="1">
+                            <a:latin typeface="Cambria Math" panose="02040503050406030204" pitchFamily="18" charset="0"/>
+                          </a:rPr>
+                        </m:ctrlPr>
+                      </m:sSupPr>
+                      <m:e>
+                        <m:r>
+                          <a:rPr lang="pt-BR" b="1" i="1">
+                            <a:latin typeface="Cambria Math" panose="02040503050406030204" pitchFamily="18" charset="0"/>
+                          </a:rPr>
+                          <m:t>[</m:t>
+                        </m:r>
+                        <m:r>
+                          <a:rPr lang="pt-BR" i="1">
+                            <a:latin typeface="Cambria Math" panose="02040503050406030204" pitchFamily="18" charset="0"/>
+                          </a:rPr>
+                          <m:t>𝑦</m:t>
+                        </m:r>
+                        <m:r>
+                          <a:rPr lang="pt-BR" i="1">
+                            <a:latin typeface="Cambria Math" panose="02040503050406030204" pitchFamily="18" charset="0"/>
+                          </a:rPr>
+                          <m:t>(0)</m:t>
+                        </m:r>
+                        <m:r>
+                          <a:rPr lang="pt-BR" b="1" i="1">
+                            <a:latin typeface="Cambria Math" panose="02040503050406030204" pitchFamily="18" charset="0"/>
+                            <a:ea typeface="Cambria Math" panose="02040503050406030204" pitchFamily="18" charset="0"/>
+                          </a:rPr>
+                          <m:t>…</m:t>
+                        </m:r>
+                        <m:r>
+                          <a:rPr lang="pt-BR" i="1">
+                            <a:latin typeface="Cambria Math" panose="02040503050406030204" pitchFamily="18" charset="0"/>
+                          </a:rPr>
+                          <m:t>𝑦</m:t>
+                        </m:r>
+                        <m:r>
+                          <a:rPr lang="pt-BR" i="1">
+                            <a:latin typeface="Cambria Math" panose="02040503050406030204" pitchFamily="18" charset="0"/>
+                          </a:rPr>
+                          <m:t>(</m:t>
+                        </m:r>
+                        <m:r>
+                          <a:rPr lang="pt-BR" i="1">
+                            <a:latin typeface="Cambria Math" panose="02040503050406030204" pitchFamily="18" charset="0"/>
+                          </a:rPr>
+                          <m:t>𝑁</m:t>
+                        </m:r>
+                        <m:r>
+                          <a:rPr lang="pt-BR" i="1">
+                            <a:latin typeface="Cambria Math" panose="02040503050406030204" pitchFamily="18" charset="0"/>
+                          </a:rPr>
+                          <m:t>−1)</m:t>
+                        </m:r>
+                        <m:r>
+                          <a:rPr lang="pt-BR" b="1" i="1">
+                            <a:latin typeface="Cambria Math" panose="02040503050406030204" pitchFamily="18" charset="0"/>
+                          </a:rPr>
+                          <m:t>]</m:t>
+                        </m:r>
+                      </m:e>
+                      <m:sup>
+                        <m:r>
+                          <a:rPr lang="pt-BR" i="1">
+                            <a:latin typeface="Cambria Math" panose="02040503050406030204" pitchFamily="18" charset="0"/>
+                          </a:rPr>
+                          <m:t>𝑇</m:t>
+                        </m:r>
+                      </m:sup>
+                    </m:sSup>
+                    <m:sSup>
+                      <m:sSupPr>
+                        <m:ctrlPr>
+                          <a:rPr lang="pt-BR" b="1" i="1">
+                            <a:latin typeface="Cambria Math" panose="02040503050406030204" pitchFamily="18" charset="0"/>
+                            <a:ea typeface="Cambria Math" panose="02040503050406030204" pitchFamily="18" charset="0"/>
+                          </a:rPr>
+                        </m:ctrlPr>
+                      </m:sSupPr>
+                      <m:e>
+                        <m:r>
+                          <a:rPr lang="pt-BR" b="1" i="1">
+                            <a:latin typeface="Cambria Math" panose="02040503050406030204" pitchFamily="18" charset="0"/>
+                            <a:ea typeface="Cambria Math" panose="02040503050406030204" pitchFamily="18" charset="0"/>
+                          </a:rPr>
+                          <m:t>∈</m:t>
+                        </m:r>
+                        <m:r>
+                          <a:rPr lang="pt-BR" b="1" i="1">
+                            <a:latin typeface="Cambria Math" panose="02040503050406030204" pitchFamily="18" charset="0"/>
+                            <a:ea typeface="Cambria Math" panose="02040503050406030204" pitchFamily="18" charset="0"/>
+                          </a:rPr>
+                          <m:t>ℝ</m:t>
+                        </m:r>
+                      </m:e>
+                      <m:sup>
+                        <m:r>
+                          <a:rPr lang="pt-BR" b="0" i="1" smtClean="0">
+                            <a:latin typeface="Cambria Math" panose="02040503050406030204" pitchFamily="18" charset="0"/>
+                            <a:ea typeface="Cambria Math" panose="02040503050406030204" pitchFamily="18" charset="0"/>
+                          </a:rPr>
+                          <m:t>𝑁</m:t>
+                        </m:r>
+                        <m:r>
+                          <a:rPr lang="pt-BR" i="1">
+                            <a:latin typeface="Cambria Math" panose="02040503050406030204" pitchFamily="18" charset="0"/>
+                            <a:ea typeface="Cambria Math" panose="02040503050406030204" pitchFamily="18" charset="0"/>
+                          </a:rPr>
+                          <m:t>×1</m:t>
+                        </m:r>
+                      </m:sup>
+                    </m:sSup>
+                  </m:oMath>
+                </a14:m>
+                <a:r>
+                  <a:rPr lang="pt-BR" dirty="0"/>
+                  <a:t>é um </a:t>
+                </a:r>
+                <a:r>
+                  <a:rPr lang="pt-BR" b="1" dirty="0">
+                    <a:solidFill>
+                      <a:srgbClr val="0070C0"/>
+                    </a:solidFill>
+                  </a:rPr>
+                  <a:t>vetor</a:t>
+                </a:r>
+                <a:r>
+                  <a:rPr lang="pt-BR" b="1" i="1" dirty="0">
+                    <a:solidFill>
+                      <a:srgbClr val="0070C0"/>
+                    </a:solidFill>
+                  </a:rPr>
+                  <a:t> </a:t>
+                </a:r>
+                <a:r>
+                  <a:rPr lang="pt-BR" dirty="0"/>
+                  <a:t>contendo todos os </a:t>
+                </a:r>
+                <a14:m>
+                  <m:oMath xmlns:m="http://schemas.openxmlformats.org/officeDocument/2006/math">
+                    <m:r>
+                      <a:rPr lang="pt-BR" i="1">
+                        <a:latin typeface="Cambria Math" panose="02040503050406030204" pitchFamily="18" charset="0"/>
+                      </a:rPr>
+                      <m:t>𝑁</m:t>
+                    </m:r>
+                    <m:r>
+                      <a:rPr lang="pt-BR" i="1">
+                        <a:latin typeface="Cambria Math" panose="02040503050406030204" pitchFamily="18" charset="0"/>
+                      </a:rPr>
+                      <m:t> </m:t>
+                    </m:r>
+                  </m:oMath>
+                </a14:m>
+                <a:r>
+                  <a:rPr lang="pt-BR" dirty="0"/>
+                  <a:t>valores esperados e </a:t>
+                </a:r>
+                <a14:m>
+                  <m:oMath xmlns:m="http://schemas.openxmlformats.org/officeDocument/2006/math">
+                    <m:r>
+                      <a:rPr lang="pt-BR" b="1" i="1">
+                        <a:latin typeface="Cambria Math" panose="02040503050406030204" pitchFamily="18" charset="0"/>
+                      </a:rPr>
+                      <m:t>𝑿</m:t>
+                    </m:r>
+                    <m:r>
+                      <a:rPr lang="pt-BR" b="1" i="1">
+                        <a:latin typeface="Cambria Math" panose="02040503050406030204" pitchFamily="18" charset="0"/>
+                      </a:rPr>
+                      <m:t>=</m:t>
+                    </m:r>
+                    <m:sSup>
+                      <m:sSupPr>
+                        <m:ctrlPr>
+                          <a:rPr lang="pt-BR" b="1" i="1">
+                            <a:latin typeface="Cambria Math" panose="02040503050406030204" pitchFamily="18" charset="0"/>
+                          </a:rPr>
+                        </m:ctrlPr>
+                      </m:sSupPr>
+                      <m:e>
+                        <m:r>
+                          <a:rPr lang="pt-BR" b="1" i="1">
+                            <a:latin typeface="Cambria Math" panose="02040503050406030204" pitchFamily="18" charset="0"/>
+                          </a:rPr>
+                          <m:t>[</m:t>
+                        </m:r>
+                        <m:r>
+                          <a:rPr lang="pt-BR" b="1" i="1">
+                            <a:latin typeface="Cambria Math" panose="02040503050406030204" pitchFamily="18" charset="0"/>
+                          </a:rPr>
+                          <m:t>𝒙</m:t>
+                        </m:r>
+                        <m:r>
+                          <a:rPr lang="pt-BR" i="1">
+                            <a:latin typeface="Cambria Math" panose="02040503050406030204" pitchFamily="18" charset="0"/>
+                          </a:rPr>
+                          <m:t>(</m:t>
+                        </m:r>
+                        <m:r>
+                          <a:rPr lang="pt-BR" i="1">
+                            <a:latin typeface="Cambria Math" panose="02040503050406030204" pitchFamily="18" charset="0"/>
+                          </a:rPr>
+                          <m:t>0</m:t>
+                        </m:r>
+                        <m:r>
+                          <a:rPr lang="pt-BR" i="1">
+                            <a:latin typeface="Cambria Math" panose="02040503050406030204" pitchFamily="18" charset="0"/>
+                          </a:rPr>
+                          <m:t>)</m:t>
+                        </m:r>
+                        <m:r>
+                          <a:rPr lang="pt-BR" b="1" i="1">
+                            <a:latin typeface="Cambria Math" panose="02040503050406030204" pitchFamily="18" charset="0"/>
+                            <a:ea typeface="Cambria Math" panose="02040503050406030204" pitchFamily="18" charset="0"/>
+                          </a:rPr>
+                          <m:t>…</m:t>
+                        </m:r>
+                        <m:r>
+                          <a:rPr lang="pt-BR" b="1" i="1">
+                            <a:latin typeface="Cambria Math" panose="02040503050406030204" pitchFamily="18" charset="0"/>
+                            <a:ea typeface="Cambria Math" panose="02040503050406030204" pitchFamily="18" charset="0"/>
+                          </a:rPr>
+                          <m:t>𝒙</m:t>
+                        </m:r>
+                        <m:r>
+                          <a:rPr lang="pt-BR" i="1">
+                            <a:latin typeface="Cambria Math" panose="02040503050406030204" pitchFamily="18" charset="0"/>
+                          </a:rPr>
+                          <m:t>(</m:t>
+                        </m:r>
+                        <m:r>
+                          <a:rPr lang="pt-BR" i="1">
+                            <a:latin typeface="Cambria Math" panose="02040503050406030204" pitchFamily="18" charset="0"/>
+                          </a:rPr>
+                          <m:t>𝑁</m:t>
+                        </m:r>
+                        <m:r>
+                          <a:rPr lang="pt-BR" i="1">
+                            <a:latin typeface="Cambria Math" panose="02040503050406030204" pitchFamily="18" charset="0"/>
+                          </a:rPr>
+                          <m:t>−1)</m:t>
+                        </m:r>
+                        <m:r>
+                          <a:rPr lang="pt-BR" b="1" i="1">
+                            <a:latin typeface="Cambria Math" panose="02040503050406030204" pitchFamily="18" charset="0"/>
+                          </a:rPr>
+                          <m:t>]</m:t>
+                        </m:r>
+                      </m:e>
+                      <m:sup>
+                        <m:r>
+                          <a:rPr lang="pt-BR" i="1">
+                            <a:latin typeface="Cambria Math" panose="02040503050406030204" pitchFamily="18" charset="0"/>
+                          </a:rPr>
+                          <m:t>𝑇</m:t>
+                        </m:r>
+                      </m:sup>
+                    </m:sSup>
+                  </m:oMath>
+                </a14:m>
+                <a:r>
+                  <a:rPr lang="pt-BR" b="1" dirty="0">
+                    <a:ea typeface="Cambria Math" panose="02040503050406030204" pitchFamily="18" charset="0"/>
+                  </a:rPr>
+                  <a:t> </a:t>
+                </a:r>
+                <a14:m>
+                  <m:oMath xmlns:m="http://schemas.openxmlformats.org/officeDocument/2006/math">
+                    <m:sSup>
+                      <m:sSupPr>
+                        <m:ctrlPr>
+                          <a:rPr lang="pt-BR" i="1">
+                            <a:latin typeface="Cambria Math" panose="02040503050406030204" pitchFamily="18" charset="0"/>
+                            <a:ea typeface="Cambria Math" panose="02040503050406030204" pitchFamily="18" charset="0"/>
+                          </a:rPr>
+                        </m:ctrlPr>
+                      </m:sSupPr>
+                      <m:e>
+                        <m:r>
+                          <a:rPr lang="pt-BR" b="0" i="1">
+                            <a:latin typeface="Cambria Math" panose="02040503050406030204" pitchFamily="18" charset="0"/>
+                            <a:ea typeface="Cambria Math" panose="02040503050406030204" pitchFamily="18" charset="0"/>
+                          </a:rPr>
+                          <m:t>∈</m:t>
+                        </m:r>
+                        <m:r>
+                          <a:rPr lang="pt-BR" b="0" i="1">
+                            <a:latin typeface="Cambria Math" panose="02040503050406030204" pitchFamily="18" charset="0"/>
+                            <a:ea typeface="Cambria Math" panose="02040503050406030204" pitchFamily="18" charset="0"/>
+                          </a:rPr>
+                          <m:t>ℝ</m:t>
+                        </m:r>
+                      </m:e>
+                      <m:sup>
+                        <m:r>
+                          <a:rPr lang="pt-BR" b="0" i="1">
+                            <a:latin typeface="Cambria Math" panose="02040503050406030204" pitchFamily="18" charset="0"/>
+                            <a:ea typeface="Cambria Math" panose="02040503050406030204" pitchFamily="18" charset="0"/>
+                          </a:rPr>
+                          <m:t>𝑁</m:t>
+                        </m:r>
+                        <m:r>
+                          <a:rPr lang="pt-BR" b="0" i="1">
+                            <a:latin typeface="Cambria Math" panose="02040503050406030204" pitchFamily="18" charset="0"/>
+                            <a:ea typeface="Cambria Math" panose="02040503050406030204" pitchFamily="18" charset="0"/>
+                          </a:rPr>
+                          <m:t>×</m:t>
+                        </m:r>
+                        <m:r>
+                          <a:rPr lang="pt-BR" b="0" i="1" smtClean="0">
+                            <a:latin typeface="Cambria Math" panose="02040503050406030204" pitchFamily="18" charset="0"/>
+                            <a:ea typeface="Cambria Math" panose="02040503050406030204" pitchFamily="18" charset="0"/>
+                          </a:rPr>
+                          <m:t>𝐾</m:t>
+                        </m:r>
+                        <m:r>
+                          <a:rPr lang="pt-BR" b="0" i="1" smtClean="0">
+                            <a:latin typeface="Cambria Math" panose="02040503050406030204" pitchFamily="18" charset="0"/>
+                            <a:ea typeface="Cambria Math" panose="02040503050406030204" pitchFamily="18" charset="0"/>
+                          </a:rPr>
+                          <m:t>+1</m:t>
+                        </m:r>
+                      </m:sup>
+                    </m:sSup>
+                  </m:oMath>
+                </a14:m>
+                <a:r>
+                  <a:rPr lang="pt-BR" dirty="0"/>
+                  <a:t> é uma </a:t>
+                </a:r>
+                <a:r>
+                  <a:rPr lang="pt-BR" b="1" dirty="0">
+                    <a:solidFill>
+                      <a:srgbClr val="0070C0"/>
+                    </a:solidFill>
+                  </a:rPr>
+                  <a:t>matriz</a:t>
+                </a:r>
+                <a:r>
+                  <a:rPr lang="pt-BR" dirty="0"/>
+                  <a:t> contendo todos os vetores de atributo.</a:t>
+                </a:r>
+              </a:p>
+              <a:p>
+                <a:r>
+                  <a:rPr lang="pt-BR" dirty="0"/>
+                  <a:t>O </a:t>
+                </a:r>
+                <a:r>
+                  <a:rPr lang="pt-BR" b="1" dirty="0">
+                    <a:solidFill>
+                      <a:srgbClr val="00B050"/>
+                    </a:solidFill>
+                  </a:rPr>
+                  <a:t>EQM</a:t>
+                </a:r>
+                <a:r>
+                  <a:rPr lang="pt-BR" dirty="0"/>
+                  <a:t> nada mais é do que a </a:t>
+                </a:r>
+                <a:r>
+                  <a:rPr lang="pt-BR" b="1" dirty="0">
+                    <a:solidFill>
+                      <a:srgbClr val="00B050"/>
+                    </a:solidFill>
+                  </a:rPr>
+                  <a:t>média aritmética do quadrado dos erros</a:t>
+                </a:r>
+                <a:r>
+                  <a:rPr lang="pt-BR" dirty="0"/>
+                  <a:t>.</a:t>
+                </a:r>
+              </a:p>
+            </p:txBody>
+          </p:sp>
+        </mc:Choice>
+        <mc:Fallback>
+          <p:sp>
+            <p:nvSpPr>
+              <p:cNvPr id="3" name="Espaço Reservado para Conteúdo 2">
+                <a:extLst>
+                  <a:ext uri="{FF2B5EF4-FFF2-40B4-BE49-F238E27FC236}">
+                    <a16:creationId xmlns:a16="http://schemas.microsoft.com/office/drawing/2014/main" id="{843752C2-61B6-8E7E-17CE-7C009ECA9D67}"/>
+                  </a:ext>
+                </a:extLst>
+              </p:cNvPr>
+              <p:cNvSpPr>
+                <a:spLocks noGrp="1" noRot="1" noChangeAspect="1" noMove="1" noResize="1" noEditPoints="1" noAdjustHandles="1" noChangeArrowheads="1" noChangeShapeType="1" noTextEdit="1"/>
+              </p:cNvSpPr>
+              <p:nvPr>
+                <p:ph idx="1"/>
+              </p:nvPr>
+            </p:nvSpPr>
+            <p:spPr>
+              <a:xfrm>
+                <a:off x="838200" y="1825624"/>
+                <a:ext cx="11353800" cy="5032375"/>
+              </a:xfrm>
+              <a:blipFill>
+                <a:blip r:embed="rId3"/>
+                <a:stretch>
+                  <a:fillRect l="-1128" t="-1937" r="-54"/>
+                </a:stretch>
+              </a:blipFill>
+            </p:spPr>
+            <p:txBody>
+              <a:bodyPr/>
+              <a:lstStyle/>
+              <a:p>
+                <a:r>
+                  <a:rPr lang="en-US">
+                    <a:noFill/>
+                  </a:rPr>
+                  <a:t> </a:t>
+                </a:r>
+              </a:p>
+            </p:txBody>
+          </p:sp>
+        </mc:Fallback>
+      </mc:AlternateContent>
+      <p:sp>
+        <p:nvSpPr>
+          <p:cNvPr id="4" name="TextBox 3">
+            <a:extLst>
+              <a:ext uri="{FF2B5EF4-FFF2-40B4-BE49-F238E27FC236}">
+                <a16:creationId xmlns:a16="http://schemas.microsoft.com/office/drawing/2014/main" id="{DA1B5748-659A-1A33-A0BB-36FDFC0D922B}"/>
+              </a:ext>
+            </a:extLst>
+          </p:cNvPr>
+          <p:cNvSpPr txBox="1"/>
           <p:nvPr/>
         </p:nvSpPr>
         <p:spPr>
           <a:xfrm>
-            <a:off x="1431533" y="2720526"/>
-            <a:ext cx="9144000" cy="1029541"/>
+            <a:off x="10424847" y="2782669"/>
+            <a:ext cx="1647409" cy="646331"/>
           </a:xfrm>
           <a:prstGeom prst="rect">
             <a:avLst/>
           </a:prstGeom>
+          <a:noFill/>
         </p:spPr>
         <p:txBody>
-          <a:bodyPr vert="horz" lIns="91440" tIns="45720" rIns="91440" bIns="45720" rtlCol="0" anchor="ctr">
+          <a:bodyPr wrap="square" rtlCol="0">
+            <a:spAutoFit/>
+          </a:bodyPr>
+          <a:lstStyle/>
+          <a:p>
+            <a:pPr algn="ctr"/>
+            <a:r>
+              <a:rPr lang="pt-BR" sz="1200" dirty="0"/>
+              <a:t>Erro entre a saída esperada e a saída da função hipótese.</a:t>
+            </a:r>
+          </a:p>
+        </p:txBody>
+      </p:sp>
+      <p:cxnSp>
+        <p:nvCxnSpPr>
+          <p:cNvPr id="5" name="Straight Arrow Connector 5">
+            <a:extLst>
+              <a:ext uri="{FF2B5EF4-FFF2-40B4-BE49-F238E27FC236}">
+                <a16:creationId xmlns:a16="http://schemas.microsoft.com/office/drawing/2014/main" id="{533A37AF-2E19-6028-AE93-9CF06895589A}"/>
+              </a:ext>
+            </a:extLst>
+          </p:cNvPr>
+          <p:cNvCxnSpPr>
+            <a:cxnSpLocks/>
+          </p:cNvCxnSpPr>
+          <p:nvPr/>
+        </p:nvCxnSpPr>
+        <p:spPr>
+          <a:xfrm flipH="1">
+            <a:off x="8675914" y="2967726"/>
+            <a:ext cx="1839686" cy="646331"/>
+          </a:xfrm>
+          <a:prstGeom prst="straightConnector1">
+            <a:avLst/>
+          </a:prstGeom>
+          <a:ln>
+            <a:solidFill>
+              <a:srgbClr val="FF0000"/>
+            </a:solidFill>
+            <a:tailEnd type="triangle"/>
+          </a:ln>
+        </p:spPr>
+        <p:style>
+          <a:lnRef idx="1">
+            <a:schemeClr val="accent1"/>
+          </a:lnRef>
+          <a:fillRef idx="0">
+            <a:schemeClr val="accent1"/>
+          </a:fillRef>
+          <a:effectRef idx="0">
+            <a:schemeClr val="accent1"/>
+          </a:effectRef>
+          <a:fontRef idx="minor">
+            <a:schemeClr val="tx1"/>
+          </a:fontRef>
+        </p:style>
+      </p:cxnSp>
+    </p:spTree>
+    <p:extLst>
+      <p:ext uri="{BB962C8B-B14F-4D97-AF65-F5344CB8AC3E}">
+        <p14:creationId xmlns:p14="http://schemas.microsoft.com/office/powerpoint/2010/main" val="4078334993"/>
+      </p:ext>
+    </p:extLst>
+  </p:cSld>
+  <p:clrMapOvr>
+    <a:masterClrMapping/>
+  </p:clrMapOvr>
+</p:sld>
+</file>
+
+<file path=ppt/slides/slide16.xml><?xml version="1.0" encoding="utf-8"?>
+<p:sld xmlns:a="http://schemas.openxmlformats.org/drawingml/2006/main" xmlns:r="http://schemas.openxmlformats.org/officeDocument/2006/relationships" xmlns:p="http://schemas.openxmlformats.org/presentationml/2006/main">
+  <p:cSld>
+    <p:spTree>
+      <p:nvGrpSpPr>
+        <p:cNvPr id="1" name=""/>
+        <p:cNvGrpSpPr/>
+        <p:nvPr/>
+      </p:nvGrpSpPr>
+      <p:grpSpPr>
+        <a:xfrm>
+          <a:off x="0" y="0"/>
+          <a:ext cx="0" cy="0"/>
+          <a:chOff x="0" y="0"/>
+          <a:chExt cx="0" cy="0"/>
+        </a:xfrm>
+      </p:grpSpPr>
+      <p:sp>
+        <p:nvSpPr>
+          <p:cNvPr id="2" name="Title 1">
+            <a:extLst>
+              <a:ext uri="{FF2B5EF4-FFF2-40B4-BE49-F238E27FC236}">
+                <a16:creationId xmlns:a16="http://schemas.microsoft.com/office/drawing/2014/main" id="{0AC4E842-F6C8-EE87-0AA0-9BEFA4B974FB}"/>
+              </a:ext>
+            </a:extLst>
+          </p:cNvPr>
+          <p:cNvSpPr>
+            <a:spLocks noGrp="1"/>
+          </p:cNvSpPr>
+          <p:nvPr>
+            <p:ph type="title"/>
+          </p:nvPr>
+        </p:nvSpPr>
+        <p:spPr/>
+        <p:txBody>
+          <a:bodyPr/>
+          <a:lstStyle/>
+          <a:p>
+            <a:r>
+              <a:rPr lang="pt-BR" dirty="0"/>
+              <a:t>Minimização da função de erro</a:t>
+            </a:r>
+            <a:endParaRPr lang="en-US" dirty="0"/>
+          </a:p>
+        </p:txBody>
+      </p:sp>
+      <mc:AlternateContent xmlns:mc="http://schemas.openxmlformats.org/markup-compatibility/2006">
+        <mc:Choice xmlns:a14="http://schemas.microsoft.com/office/drawing/2010/main" Requires="a14">
+          <p:sp>
+            <p:nvSpPr>
+              <p:cNvPr id="3" name="Content Placeholder 2">
+                <a:extLst>
+                  <a:ext uri="{FF2B5EF4-FFF2-40B4-BE49-F238E27FC236}">
+                    <a16:creationId xmlns:a16="http://schemas.microsoft.com/office/drawing/2014/main" id="{7A581B72-317A-3CC1-4214-6CBD69B4A604}"/>
+                  </a:ext>
+                </a:extLst>
+              </p:cNvPr>
+              <p:cNvSpPr>
+                <a:spLocks noGrp="1"/>
+              </p:cNvSpPr>
+              <p:nvPr>
+                <p:ph idx="1"/>
+              </p:nvPr>
+            </p:nvSpPr>
+            <p:spPr>
+              <a:xfrm>
+                <a:off x="838199" y="1825624"/>
+                <a:ext cx="11157857" cy="5032375"/>
+              </a:xfrm>
+            </p:spPr>
+            <p:txBody>
+              <a:bodyPr/>
+              <a:lstStyle/>
+              <a:p>
+                <a:r>
+                  <a:rPr lang="pt-BR" dirty="0"/>
+                  <a:t>Então, para encontrarmos o </a:t>
+                </a:r>
+                <a:r>
+                  <a:rPr lang="pt-BR" b="1" dirty="0"/>
+                  <a:t>vetor de pesos</a:t>
+                </a:r>
+                <a:r>
+                  <a:rPr lang="pt-BR" dirty="0"/>
+                  <a:t>, </a:t>
+                </a:r>
+                <a14:m>
+                  <m:oMath xmlns:m="http://schemas.openxmlformats.org/officeDocument/2006/math">
+                    <m:r>
+                      <a:rPr lang="pt-BR" b="1" i="1">
+                        <a:latin typeface="Cambria Math" panose="02040503050406030204" pitchFamily="18" charset="0"/>
+                      </a:rPr>
+                      <m:t>𝒂</m:t>
+                    </m:r>
+                  </m:oMath>
+                </a14:m>
+                <a:r>
+                  <a:rPr lang="pt-BR" dirty="0"/>
+                  <a:t>, devemos </a:t>
+                </a:r>
+                <a:r>
+                  <a:rPr lang="pt-BR" b="1" dirty="0">
+                    <a:solidFill>
+                      <a:srgbClr val="00B050"/>
+                    </a:solidFill>
+                  </a:rPr>
+                  <a:t>minimizar a função de erro</a:t>
+                </a:r>
+                <a:endParaRPr lang="pt-BR" dirty="0"/>
+              </a:p>
+              <a:p>
+                <a:pPr marL="0" indent="0">
+                  <a:buNone/>
+                </a:pPr>
+                <a14:m>
+                  <m:oMathPara xmlns:m="http://schemas.openxmlformats.org/officeDocument/2006/math">
+                    <m:oMathParaPr>
+                      <m:jc m:val="centerGroup"/>
+                    </m:oMathParaPr>
+                    <m:oMath xmlns:m="http://schemas.openxmlformats.org/officeDocument/2006/math">
+                      <m:func>
+                        <m:funcPr>
+                          <m:ctrlPr>
+                            <a:rPr lang="nl-BE" i="1">
+                              <a:latin typeface="Cambria Math" panose="02040503050406030204" pitchFamily="18" charset="0"/>
+                            </a:rPr>
+                          </m:ctrlPr>
+                        </m:funcPr>
+                        <m:fName>
+                          <m:limLow>
+                            <m:limLowPr>
+                              <m:ctrlPr>
+                                <a:rPr lang="nl-BE" i="1">
+                                  <a:latin typeface="Cambria Math" panose="02040503050406030204" pitchFamily="18" charset="0"/>
+                                </a:rPr>
+                              </m:ctrlPr>
+                            </m:limLowPr>
+                            <m:e>
+                              <m:r>
+                                <m:rPr>
+                                  <m:sty m:val="p"/>
+                                </m:rPr>
+                                <a:rPr lang="nl-BE">
+                                  <a:latin typeface="Cambria Math" panose="02040503050406030204" pitchFamily="18" charset="0"/>
+                                </a:rPr>
+                                <m:t>min</m:t>
+                              </m:r>
+                            </m:e>
+                            <m:lim>
+                              <m:r>
+                                <a:rPr lang="pt-BR" b="1" i="1">
+                                  <a:latin typeface="Cambria Math" panose="02040503050406030204" pitchFamily="18" charset="0"/>
+                                </a:rPr>
+                                <m:t>𝒂</m:t>
+                              </m:r>
+                              <m:r>
+                                <a:rPr lang="pt-BR" b="1" i="1">
+                                  <a:latin typeface="Cambria Math" panose="02040503050406030204" pitchFamily="18" charset="0"/>
+                                </a:rPr>
+                                <m:t>  </m:t>
+                              </m:r>
+                            </m:lim>
+                          </m:limLow>
+                        </m:fName>
+                        <m:e>
+                          <m:sSup>
+                            <m:sSupPr>
+                              <m:ctrlPr>
+                                <a:rPr lang="pt-BR" i="1">
+                                  <a:latin typeface="Cambria Math" panose="02040503050406030204" pitchFamily="18" charset="0"/>
+                                </a:rPr>
+                              </m:ctrlPr>
+                            </m:sSupPr>
+                            <m:e>
+                              <m:f>
+                                <m:fPr>
+                                  <m:ctrlPr>
+                                    <a:rPr lang="pt-BR" i="1">
+                                      <a:latin typeface="Cambria Math" panose="02040503050406030204" pitchFamily="18" charset="0"/>
+                                    </a:rPr>
+                                  </m:ctrlPr>
+                                </m:fPr>
+                                <m:num>
+                                  <m:r>
+                                    <a:rPr lang="pt-BR" i="1">
+                                      <a:latin typeface="Cambria Math" panose="02040503050406030204" pitchFamily="18" charset="0"/>
+                                    </a:rPr>
+                                    <m:t>1</m:t>
+                                  </m:r>
+                                </m:num>
+                                <m:den>
+                                  <m:r>
+                                    <a:rPr lang="pt-BR" i="1">
+                                      <a:latin typeface="Cambria Math" panose="02040503050406030204" pitchFamily="18" charset="0"/>
+                                    </a:rPr>
+                                    <m:t>𝑁</m:t>
+                                  </m:r>
+                                </m:den>
+                              </m:f>
+                              <m:d>
+                                <m:dPr>
+                                  <m:begChr m:val="‖"/>
+                                  <m:endChr m:val="‖"/>
+                                  <m:ctrlPr>
+                                    <a:rPr lang="pt-BR" i="1">
+                                      <a:latin typeface="Cambria Math" panose="02040503050406030204" pitchFamily="18" charset="0"/>
+                                    </a:rPr>
+                                  </m:ctrlPr>
+                                </m:dPr>
+                                <m:e>
+                                  <m:r>
+                                    <a:rPr lang="pt-BR" b="1" i="1">
+                                      <a:latin typeface="Cambria Math" panose="02040503050406030204" pitchFamily="18" charset="0"/>
+                                    </a:rPr>
+                                    <m:t>𝒚</m:t>
+                                  </m:r>
+                                  <m:r>
+                                    <a:rPr lang="pt-BR" i="1">
+                                      <a:latin typeface="Cambria Math" panose="02040503050406030204" pitchFamily="18" charset="0"/>
+                                    </a:rPr>
+                                    <m:t> −</m:t>
+                                  </m:r>
+                                  <m:r>
+                                    <a:rPr lang="pt-BR" b="1" i="1">
+                                      <a:latin typeface="Cambria Math" panose="02040503050406030204" pitchFamily="18" charset="0"/>
+                                    </a:rPr>
+                                    <m:t>𝑿</m:t>
+                                  </m:r>
+                                  <m:r>
+                                    <a:rPr lang="pt-BR" b="1" i="1">
+                                      <a:latin typeface="Cambria Math" panose="02040503050406030204" pitchFamily="18" charset="0"/>
+                                    </a:rPr>
+                                    <m:t>𝒂</m:t>
+                                  </m:r>
+                                </m:e>
+                              </m:d>
+                            </m:e>
+                            <m:sup>
+                              <m:r>
+                                <a:rPr lang="pt-BR" i="1">
+                                  <a:latin typeface="Cambria Math" panose="02040503050406030204" pitchFamily="18" charset="0"/>
+                                </a:rPr>
+                                <m:t>2</m:t>
+                              </m:r>
+                            </m:sup>
+                          </m:sSup>
+                        </m:e>
+                      </m:func>
+                      <m:r>
+                        <a:rPr lang="pt-BR" b="0" i="0" smtClean="0">
+                          <a:latin typeface="Cambria Math" panose="02040503050406030204" pitchFamily="18" charset="0"/>
+                        </a:rPr>
+                        <m:t>.</m:t>
+                      </m:r>
+                    </m:oMath>
+                  </m:oMathPara>
+                </a14:m>
+                <a:endParaRPr lang="pt-BR" dirty="0"/>
+              </a:p>
+              <a:p>
+                <a:r>
+                  <a:rPr lang="pt-BR" dirty="0"/>
+                  <a:t>Por ser constante, o termo 1/𝑁 não influencia na minimização e, portanto, pode ser omitido na equação acima.</a:t>
+                </a:r>
+              </a:p>
+              <a:p>
+                <a:pPr marL="0" indent="0">
+                  <a:buNone/>
+                </a:pPr>
+                <a:endParaRPr lang="pt-BR" dirty="0"/>
+              </a:p>
+              <a:p>
+                <a:pPr marL="0" indent="0" algn="ctr">
+                  <a:buNone/>
+                </a:pPr>
+                <a:r>
+                  <a:rPr lang="pt-BR" sz="4400" i="1" dirty="0"/>
+                  <a:t>Como encontramos os pesos que minimizam a função de erro?</a:t>
+                </a:r>
+              </a:p>
+              <a:p>
+                <a:endParaRPr lang="en-US" dirty="0"/>
+              </a:p>
+            </p:txBody>
+          </p:sp>
+        </mc:Choice>
+        <mc:Fallback>
+          <p:sp>
+            <p:nvSpPr>
+              <p:cNvPr id="3" name="Content Placeholder 2">
+                <a:extLst>
+                  <a:ext uri="{FF2B5EF4-FFF2-40B4-BE49-F238E27FC236}">
+                    <a16:creationId xmlns:a16="http://schemas.microsoft.com/office/drawing/2014/main" id="{7A581B72-317A-3CC1-4214-6CBD69B4A604}"/>
+                  </a:ext>
+                </a:extLst>
+              </p:cNvPr>
+              <p:cNvSpPr>
+                <a:spLocks noGrp="1" noRot="1" noChangeAspect="1" noMove="1" noResize="1" noEditPoints="1" noAdjustHandles="1" noChangeArrowheads="1" noChangeShapeType="1" noTextEdit="1"/>
+              </p:cNvSpPr>
+              <p:nvPr>
+                <p:ph idx="1"/>
+              </p:nvPr>
+            </p:nvSpPr>
+            <p:spPr>
+              <a:xfrm>
+                <a:off x="838199" y="1825624"/>
+                <a:ext cx="11157857" cy="5032375"/>
+              </a:xfrm>
+              <a:blipFill>
+                <a:blip r:embed="rId2"/>
+                <a:stretch>
+                  <a:fillRect l="-928" t="-1937" r="-1584"/>
+                </a:stretch>
+              </a:blipFill>
+            </p:spPr>
+            <p:txBody>
+              <a:bodyPr/>
+              <a:lstStyle/>
+              <a:p>
+                <a:r>
+                  <a:rPr lang="en-US">
+                    <a:noFill/>
+                  </a:rPr>
+                  <a:t> </a:t>
+                </a:r>
+              </a:p>
+            </p:txBody>
+          </p:sp>
+        </mc:Fallback>
+      </mc:AlternateContent>
+    </p:spTree>
+    <p:extLst>
+      <p:ext uri="{BB962C8B-B14F-4D97-AF65-F5344CB8AC3E}">
+        <p14:creationId xmlns:p14="http://schemas.microsoft.com/office/powerpoint/2010/main" val="2011756892"/>
+      </p:ext>
+    </p:extLst>
+  </p:cSld>
+  <p:clrMapOvr>
+    <a:masterClrMapping/>
+  </p:clrMapOvr>
+</p:sld>
+</file>
+
+<file path=ppt/slides/slide17.xml><?xml version="1.0" encoding="utf-8"?>
+<p:sld xmlns:a="http://schemas.openxmlformats.org/drawingml/2006/main" xmlns:r="http://schemas.openxmlformats.org/officeDocument/2006/relationships" xmlns:p="http://schemas.openxmlformats.org/presentationml/2006/main">
+  <p:cSld>
+    <p:spTree>
+      <p:nvGrpSpPr>
+        <p:cNvPr id="1" name=""/>
+        <p:cNvGrpSpPr/>
+        <p:nvPr/>
+      </p:nvGrpSpPr>
+      <p:grpSpPr>
+        <a:xfrm>
+          <a:off x="0" y="0"/>
+          <a:ext cx="0" cy="0"/>
+          <a:chOff x="0" y="0"/>
+          <a:chExt cx="0" cy="0"/>
+        </a:xfrm>
+      </p:grpSpPr>
+      <p:sp>
+        <p:nvSpPr>
+          <p:cNvPr id="2" name="Title 1">
+            <a:extLst>
+              <a:ext uri="{FF2B5EF4-FFF2-40B4-BE49-F238E27FC236}">
+                <a16:creationId xmlns:a16="http://schemas.microsoft.com/office/drawing/2014/main" id="{1C5DC745-C86C-4971-B0AF-00EE88E914C9}"/>
+              </a:ext>
+            </a:extLst>
+          </p:cNvPr>
+          <p:cNvSpPr>
+            <a:spLocks noGrp="1"/>
+          </p:cNvSpPr>
+          <p:nvPr>
+            <p:ph type="title"/>
+          </p:nvPr>
+        </p:nvSpPr>
+        <p:spPr>
+          <a:xfrm>
+            <a:off x="838200" y="365125"/>
+            <a:ext cx="10515600" cy="952231"/>
+          </a:xfrm>
+        </p:spPr>
+        <p:txBody>
+          <a:bodyPr/>
+          <a:lstStyle/>
+          <a:p>
+            <a:r>
+              <a:rPr lang="pt-BR" dirty="0"/>
+              <a:t>Resumo do problema da regressão linear</a:t>
+            </a:r>
+          </a:p>
+        </p:txBody>
+      </p:sp>
+      <p:sp>
+        <p:nvSpPr>
+          <p:cNvPr id="3" name="Content Placeholder 2">
+            <a:extLst>
+              <a:ext uri="{FF2B5EF4-FFF2-40B4-BE49-F238E27FC236}">
+                <a16:creationId xmlns:a16="http://schemas.microsoft.com/office/drawing/2014/main" id="{AF130550-3E6D-44FC-BB82-8D9766374925}"/>
+              </a:ext>
+            </a:extLst>
+          </p:cNvPr>
+          <p:cNvSpPr>
+            <a:spLocks noGrp="1"/>
+          </p:cNvSpPr>
+          <p:nvPr>
+            <p:ph idx="1"/>
+          </p:nvPr>
+        </p:nvSpPr>
+        <p:spPr>
+          <a:xfrm>
+            <a:off x="6346371" y="1551214"/>
+            <a:ext cx="5698145" cy="5306785"/>
+          </a:xfrm>
+        </p:spPr>
+        <p:txBody>
+          <a:bodyPr>
             <a:normAutofit/>
           </a:bodyPr>
-          <a:lstStyle>
-            <a:lvl1pPr algn="l" defTabSz="914400" rtl="0" eaLnBrk="1" latinLnBrk="0" hangingPunct="1">
-              <a:lnSpc>
-                <a:spcPct val="90000"/>
-              </a:lnSpc>
-              <a:spcBef>
-                <a:spcPct val="0"/>
-              </a:spcBef>
-              <a:buNone/>
-              <a:defRPr sz="4400" kern="1200">
+          <a:lstStyle/>
+          <a:p>
+            <a:r>
+              <a:rPr lang="pt-BR" dirty="0"/>
+              <a:t>Portanto, resumindo, nosso objetivo é </a:t>
+            </a:r>
+            <a:r>
+              <a:rPr lang="pt-BR" b="1" dirty="0">
+                <a:solidFill>
+                  <a:srgbClr val="00B050"/>
+                </a:solidFill>
+              </a:rPr>
+              <a:t>treinar</a:t>
+            </a:r>
+            <a:r>
+              <a:rPr lang="pt-BR" dirty="0"/>
+              <a:t> um </a:t>
+            </a:r>
+            <a:r>
+              <a:rPr lang="pt-BR" b="1" dirty="0">
+                <a:solidFill>
+                  <a:srgbClr val="00B050"/>
+                </a:solidFill>
+              </a:rPr>
+              <a:t>modelo</a:t>
+            </a:r>
+            <a:r>
+              <a:rPr lang="pt-BR" dirty="0"/>
+              <a:t>, a partir de um </a:t>
+            </a:r>
+            <a:r>
+              <a:rPr lang="pt-BR" b="1" dirty="0">
+                <a:solidFill>
+                  <a:srgbClr val="00B050"/>
+                </a:solidFill>
+              </a:rPr>
+              <a:t>conjunto de treinamento</a:t>
+            </a:r>
+            <a:r>
+              <a:rPr lang="pt-BR" dirty="0"/>
+              <a:t>, que </a:t>
+            </a:r>
+            <a:r>
+              <a:rPr lang="pt-BR" b="1" dirty="0">
+                <a:solidFill>
+                  <a:srgbClr val="00B050"/>
+                </a:solidFill>
+              </a:rPr>
+              <a:t>minimize o erro de aproximação</a:t>
+            </a:r>
+            <a:r>
+              <a:rPr lang="pt-BR" dirty="0"/>
+              <a:t>.</a:t>
+            </a:r>
+          </a:p>
+          <a:p>
+            <a:r>
+              <a:rPr lang="pt-BR" dirty="0"/>
+              <a:t>Assim, para </a:t>
+            </a:r>
+            <a:r>
+              <a:rPr lang="pt-BR" b="1" dirty="0">
+                <a:solidFill>
+                  <a:srgbClr val="00B050"/>
+                </a:solidFill>
+              </a:rPr>
+              <a:t>treinar</a:t>
+            </a:r>
+            <a:r>
+              <a:rPr lang="pt-BR" dirty="0"/>
+              <a:t> o modelo, precisamos encontrar </a:t>
+            </a:r>
+            <a:r>
+              <a:rPr lang="pt-BR" b="1" dirty="0">
+                <a:solidFill>
+                  <a:srgbClr val="7030A0"/>
+                </a:solidFill>
+              </a:rPr>
+              <a:t>maneiras</a:t>
+            </a:r>
+            <a:r>
+              <a:rPr lang="pt-BR" b="1" dirty="0">
+                <a:solidFill>
+                  <a:srgbClr val="00B050"/>
+                </a:solidFill>
+              </a:rPr>
+              <a:t> </a:t>
+            </a:r>
+            <a:r>
+              <a:rPr lang="pt-BR" dirty="0"/>
+              <a:t>de </a:t>
+            </a:r>
+            <a:r>
+              <a:rPr lang="pt-BR" b="1" dirty="0">
+                <a:solidFill>
+                  <a:schemeClr val="accent2"/>
+                </a:solidFill>
+              </a:rPr>
+              <a:t>ajustar seus pesos</a:t>
+            </a:r>
+            <a:r>
+              <a:rPr lang="pt-BR" b="1" dirty="0">
+                <a:solidFill>
+                  <a:srgbClr val="00B050"/>
+                </a:solidFill>
+              </a:rPr>
+              <a:t> </a:t>
+            </a:r>
+            <a:r>
+              <a:rPr lang="pt-BR" dirty="0"/>
+              <a:t>de forma que o erro seja minimizado.</a:t>
+            </a:r>
+          </a:p>
+        </p:txBody>
+      </p:sp>
+      <p:grpSp>
+        <p:nvGrpSpPr>
+          <p:cNvPr id="4" name="Group 3">
+            <a:extLst>
+              <a:ext uri="{FF2B5EF4-FFF2-40B4-BE49-F238E27FC236}">
+                <a16:creationId xmlns:a16="http://schemas.microsoft.com/office/drawing/2014/main" id="{DF988A4E-4866-35AF-BF8F-8DD7FA3EE9A8}"/>
+              </a:ext>
+            </a:extLst>
+          </p:cNvPr>
+          <p:cNvGrpSpPr/>
+          <p:nvPr/>
+        </p:nvGrpSpPr>
+        <p:grpSpPr>
+          <a:xfrm>
+            <a:off x="936690" y="1871206"/>
+            <a:ext cx="4908940" cy="3623775"/>
+            <a:chOff x="342900" y="1658935"/>
+            <a:chExt cx="4908940" cy="3623775"/>
+          </a:xfrm>
+        </p:grpSpPr>
+        <p:grpSp>
+          <p:nvGrpSpPr>
+            <p:cNvPr id="7" name="Agrupar 6">
+              <a:extLst>
+                <a:ext uri="{FF2B5EF4-FFF2-40B4-BE49-F238E27FC236}">
+                  <a16:creationId xmlns:a16="http://schemas.microsoft.com/office/drawing/2014/main" id="{A9CFBE1F-E739-ECB1-A43E-891E3E546A8C}"/>
+                </a:ext>
+              </a:extLst>
+            </p:cNvPr>
+            <p:cNvGrpSpPr/>
+            <p:nvPr/>
+          </p:nvGrpSpPr>
+          <p:grpSpPr>
+            <a:xfrm>
+              <a:off x="342900" y="2251139"/>
+              <a:ext cx="4908940" cy="3031571"/>
+              <a:chOff x="157187" y="2378075"/>
+              <a:chExt cx="4908940" cy="3031571"/>
+            </a:xfrm>
+          </p:grpSpPr>
+          <p:sp>
+            <p:nvSpPr>
+              <p:cNvPr id="20" name="Retângulo 19">
+                <a:extLst>
+                  <a:ext uri="{FF2B5EF4-FFF2-40B4-BE49-F238E27FC236}">
+                    <a16:creationId xmlns:a16="http://schemas.microsoft.com/office/drawing/2014/main" id="{C94DB9DA-6651-67B4-2FCB-6138D2059179}"/>
+                  </a:ext>
+                </a:extLst>
+              </p:cNvPr>
+              <p:cNvSpPr/>
+              <p:nvPr/>
+            </p:nvSpPr>
+            <p:spPr>
+              <a:xfrm>
+                <a:off x="425788" y="3029858"/>
+                <a:ext cx="463575" cy="1935842"/>
+              </a:xfrm>
+              <a:prstGeom prst="rect">
+                <a:avLst/>
+              </a:prstGeom>
+              <a:solidFill>
+                <a:schemeClr val="accent1">
+                  <a:alpha val="41000"/>
+                </a:schemeClr>
+              </a:solidFill>
+              <a:ln>
+                <a:solidFill>
+                  <a:schemeClr val="accent1">
+                    <a:shade val="15000"/>
+                  </a:schemeClr>
+                </a:solidFill>
+              </a:ln>
+            </p:spPr>
+            <p:style>
+              <a:lnRef idx="2">
+                <a:schemeClr val="accent1">
+                  <a:shade val="15000"/>
+                </a:schemeClr>
+              </a:lnRef>
+              <a:fillRef idx="1">
+                <a:schemeClr val="accent1"/>
+              </a:fillRef>
+              <a:effectRef idx="0">
+                <a:schemeClr val="accent1"/>
+              </a:effectRef>
+              <a:fontRef idx="minor">
+                <a:schemeClr val="lt1"/>
+              </a:fontRef>
+            </p:style>
+            <p:txBody>
+              <a:bodyPr rtlCol="0" anchor="ctr"/>
+              <a:lstStyle/>
+              <a:p>
+                <a:pPr algn="ctr"/>
+                <a:endParaRPr lang="pt-BR" dirty="0"/>
+              </a:p>
+            </p:txBody>
+          </p:sp>
+          <p:sp>
+            <p:nvSpPr>
+              <p:cNvPr id="8" name="Rectangle 12">
+                <a:extLst>
+                  <a:ext uri="{FF2B5EF4-FFF2-40B4-BE49-F238E27FC236}">
+                    <a16:creationId xmlns:a16="http://schemas.microsoft.com/office/drawing/2014/main" id="{5707A7FC-2643-5BF6-4ADB-DCD3B83DF68F}"/>
+                  </a:ext>
+                </a:extLst>
+              </p:cNvPr>
+              <p:cNvSpPr/>
+              <p:nvPr/>
+            </p:nvSpPr>
+            <p:spPr>
+              <a:xfrm>
+                <a:off x="1361788" y="3029857"/>
+                <a:ext cx="1216819" cy="849086"/>
+              </a:xfrm>
+              <a:prstGeom prst="rect">
+                <a:avLst/>
+              </a:prstGeom>
+              <a:noFill/>
+              <a:ln>
                 <a:solidFill>
                   <a:schemeClr val="tx1"/>
                 </a:solidFill>
-                <a:latin typeface="+mj-lt"/>
-                <a:ea typeface="+mj-ea"/>
-                <a:cs typeface="+mj-cs"/>
-              </a:defRPr>
-            </a:lvl1pPr>
-          </a:lstStyle>
-          <a:p>
-            <a:pPr algn="ctr"/>
-            <a:r>
-              <a:rPr lang="pt-BR" sz="6600" dirty="0"/>
-              <a:t>Obrigado!</a:t>
-            </a:r>
-            <a:endParaRPr lang="pt-BR" sz="6600" b="1" i="1" dirty="0"/>
+              </a:ln>
+            </p:spPr>
+            <p:style>
+              <a:lnRef idx="2">
+                <a:schemeClr val="accent1">
+                  <a:shade val="50000"/>
+                </a:schemeClr>
+              </a:lnRef>
+              <a:fillRef idx="1">
+                <a:schemeClr val="accent1"/>
+              </a:fillRef>
+              <a:effectRef idx="0">
+                <a:schemeClr val="accent1"/>
+              </a:effectRef>
+              <a:fontRef idx="minor">
+                <a:schemeClr val="lt1"/>
+              </a:fontRef>
+            </p:style>
+            <p:txBody>
+              <a:bodyPr rtlCol="0" anchor="ctr"/>
+              <a:lstStyle/>
+              <a:p>
+                <a:pPr algn="ctr"/>
+                <a:r>
+                  <a:rPr lang="pt-BR" dirty="0">
+                    <a:solidFill>
+                      <a:schemeClr val="tx1"/>
+                    </a:solidFill>
+                  </a:rPr>
+                  <a:t>Modelo de ML</a:t>
+                </a:r>
+                <a:br>
+                  <a:rPr lang="pt-BR" dirty="0">
+                    <a:solidFill>
+                      <a:schemeClr val="tx1"/>
+                    </a:solidFill>
+                  </a:rPr>
+                </a:br>
+                <a:r>
+                  <a:rPr lang="pt-BR" sz="1200" dirty="0">
+                    <a:solidFill>
+                      <a:schemeClr val="tx1"/>
+                    </a:solidFill>
+                  </a:rPr>
+                  <a:t>(e.g., polinômio)</a:t>
+                </a:r>
+                <a:endParaRPr lang="pt-BR" sz="1600" dirty="0">
+                  <a:solidFill>
+                    <a:schemeClr val="tx1"/>
+                  </a:solidFill>
+                </a:endParaRPr>
+              </a:p>
+            </p:txBody>
+          </p:sp>
+          <p:cxnSp>
+            <p:nvCxnSpPr>
+              <p:cNvPr id="10" name="Straight Arrow Connector 14">
+                <a:extLst>
+                  <a:ext uri="{FF2B5EF4-FFF2-40B4-BE49-F238E27FC236}">
+                    <a16:creationId xmlns:a16="http://schemas.microsoft.com/office/drawing/2014/main" id="{71024B44-4FCA-AB48-FD6A-BC22BAF1FE30}"/>
+                  </a:ext>
+                </a:extLst>
+              </p:cNvPr>
+              <p:cNvCxnSpPr>
+                <a:cxnSpLocks/>
+              </p:cNvCxnSpPr>
+              <p:nvPr/>
+            </p:nvCxnSpPr>
+            <p:spPr>
+              <a:xfrm>
+                <a:off x="893787" y="3471233"/>
+                <a:ext cx="468000" cy="0"/>
+              </a:xfrm>
+              <a:prstGeom prst="straightConnector1">
+                <a:avLst/>
+              </a:prstGeom>
+              <a:ln w="19050">
+                <a:tailEnd type="triangle"/>
+              </a:ln>
+            </p:spPr>
+            <p:style>
+              <a:lnRef idx="1">
+                <a:schemeClr val="accent1"/>
+              </a:lnRef>
+              <a:fillRef idx="0">
+                <a:schemeClr val="accent1"/>
+              </a:fillRef>
+              <a:effectRef idx="0">
+                <a:schemeClr val="accent1"/>
+              </a:effectRef>
+              <a:fontRef idx="minor">
+                <a:schemeClr val="tx1"/>
+              </a:fontRef>
+            </p:style>
+          </p:cxnSp>
+          <p:cxnSp>
+            <p:nvCxnSpPr>
+              <p:cNvPr id="11" name="Straight Arrow Connector 14">
+                <a:extLst>
+                  <a:ext uri="{FF2B5EF4-FFF2-40B4-BE49-F238E27FC236}">
+                    <a16:creationId xmlns:a16="http://schemas.microsoft.com/office/drawing/2014/main" id="{AFAD5EB5-BD73-1AA8-2DE8-86B253D42465}"/>
+                  </a:ext>
+                </a:extLst>
+              </p:cNvPr>
+              <p:cNvCxnSpPr>
+                <a:cxnSpLocks/>
+                <a:stCxn id="8" idx="3"/>
+                <a:endCxn id="12" idx="1"/>
+              </p:cNvCxnSpPr>
+              <p:nvPr/>
+            </p:nvCxnSpPr>
+            <p:spPr>
+              <a:xfrm>
+                <a:off x="2578607" y="3454400"/>
+                <a:ext cx="840366" cy="0"/>
+              </a:xfrm>
+              <a:prstGeom prst="straightConnector1">
+                <a:avLst/>
+              </a:prstGeom>
+              <a:ln w="19050">
+                <a:tailEnd type="triangle"/>
+              </a:ln>
+            </p:spPr>
+            <p:style>
+              <a:lnRef idx="1">
+                <a:schemeClr val="accent1"/>
+              </a:lnRef>
+              <a:fillRef idx="0">
+                <a:schemeClr val="accent1"/>
+              </a:fillRef>
+              <a:effectRef idx="0">
+                <a:schemeClr val="accent1"/>
+              </a:effectRef>
+              <a:fontRef idx="minor">
+                <a:schemeClr val="tx1"/>
+              </a:fontRef>
+            </p:style>
+          </p:cxnSp>
+          <p:sp>
+            <p:nvSpPr>
+              <p:cNvPr id="12" name="Rectangle 12">
+                <a:extLst>
+                  <a:ext uri="{FF2B5EF4-FFF2-40B4-BE49-F238E27FC236}">
+                    <a16:creationId xmlns:a16="http://schemas.microsoft.com/office/drawing/2014/main" id="{70B31B89-FB10-2FE0-309F-D08BB4008A71}"/>
+                  </a:ext>
+                </a:extLst>
+              </p:cNvPr>
+              <p:cNvSpPr/>
+              <p:nvPr/>
+            </p:nvSpPr>
+            <p:spPr>
+              <a:xfrm>
+                <a:off x="3418973" y="3029857"/>
+                <a:ext cx="1216818" cy="849086"/>
+              </a:xfrm>
+              <a:prstGeom prst="rect">
+                <a:avLst/>
+              </a:prstGeom>
+              <a:noFill/>
+              <a:ln>
+                <a:solidFill>
+                  <a:schemeClr val="tx1"/>
+                </a:solidFill>
+              </a:ln>
+            </p:spPr>
+            <p:style>
+              <a:lnRef idx="2">
+                <a:schemeClr val="accent1">
+                  <a:shade val="50000"/>
+                </a:schemeClr>
+              </a:lnRef>
+              <a:fillRef idx="1">
+                <a:schemeClr val="accent1"/>
+              </a:fillRef>
+              <a:effectRef idx="0">
+                <a:schemeClr val="accent1"/>
+              </a:effectRef>
+              <a:fontRef idx="minor">
+                <a:schemeClr val="lt1"/>
+              </a:fontRef>
+            </p:style>
+            <p:txBody>
+              <a:bodyPr rtlCol="0" anchor="ctr"/>
+              <a:lstStyle/>
+              <a:p>
+                <a:pPr algn="ctr"/>
+                <a:r>
+                  <a:rPr lang="pt-BR" dirty="0">
+                    <a:solidFill>
+                      <a:schemeClr val="tx1"/>
+                    </a:solidFill>
+                  </a:rPr>
+                  <a:t>Função de erro</a:t>
+                </a:r>
+              </a:p>
+            </p:txBody>
+          </p:sp>
+          <mc:AlternateContent xmlns:mc="http://schemas.openxmlformats.org/markup-compatibility/2006" xmlns:a14="http://schemas.microsoft.com/office/drawing/2010/main">
+            <mc:Choice Requires="a14">
+              <p:sp>
+                <p:nvSpPr>
+                  <p:cNvPr id="13" name="CaixaDeTexto 12">
+                    <a:extLst>
+                      <a:ext uri="{FF2B5EF4-FFF2-40B4-BE49-F238E27FC236}">
+                        <a16:creationId xmlns:a16="http://schemas.microsoft.com/office/drawing/2014/main" id="{37A5E096-7B54-8ADE-2BF6-C2E99C2CDB16}"/>
+                      </a:ext>
+                    </a:extLst>
+                  </p:cNvPr>
+                  <p:cNvSpPr txBox="1"/>
+                  <p:nvPr/>
+                </p:nvSpPr>
+                <p:spPr>
+                  <a:xfrm flipH="1">
+                    <a:off x="436587" y="3162012"/>
+                    <a:ext cx="467999" cy="461665"/>
+                  </a:xfrm>
+                  <a:prstGeom prst="rect">
+                    <a:avLst/>
+                  </a:prstGeom>
+                  <a:noFill/>
+                </p:spPr>
+                <p:txBody>
+                  <a:bodyPr wrap="square">
+                    <a:spAutoFit/>
+                  </a:bodyPr>
+                  <a:lstStyle/>
+                  <a:p>
+                    <a:pPr/>
+                    <a14:m>
+                      <m:oMathPara xmlns:m="http://schemas.openxmlformats.org/officeDocument/2006/math">
+                        <m:oMathParaPr>
+                          <m:jc m:val="center"/>
+                        </m:oMathParaPr>
+                        <m:oMath xmlns:m="http://schemas.openxmlformats.org/officeDocument/2006/math">
+                          <m:r>
+                            <a:rPr lang="pt-BR" sz="2400" b="1" i="1" smtClean="0">
+                              <a:latin typeface="Cambria Math" panose="02040503050406030204" pitchFamily="18" charset="0"/>
+                            </a:rPr>
+                            <m:t>𝑿</m:t>
+                          </m:r>
+                        </m:oMath>
+                      </m:oMathPara>
+                    </a14:m>
+                    <a:endParaRPr lang="pt-BR" sz="2400" b="1" dirty="0"/>
+                  </a:p>
+                </p:txBody>
+              </p:sp>
+            </mc:Choice>
+            <mc:Fallback xmlns="">
+              <p:sp>
+                <p:nvSpPr>
+                  <p:cNvPr id="13" name="CaixaDeTexto 12">
+                    <a:extLst>
+                      <a:ext uri="{FF2B5EF4-FFF2-40B4-BE49-F238E27FC236}">
+                        <a16:creationId xmlns:a16="http://schemas.microsoft.com/office/drawing/2014/main" id="{37A5E096-7B54-8ADE-2BF6-C2E99C2CDB16}"/>
+                      </a:ext>
+                    </a:extLst>
+                  </p:cNvPr>
+                  <p:cNvSpPr txBox="1">
+                    <a:spLocks noRot="1" noChangeAspect="1" noMove="1" noResize="1" noEditPoints="1" noAdjustHandles="1" noChangeArrowheads="1" noChangeShapeType="1" noTextEdit="1"/>
+                  </p:cNvSpPr>
+                  <p:nvPr/>
+                </p:nvSpPr>
+                <p:spPr>
+                  <a:xfrm flipH="1">
+                    <a:off x="436587" y="3162012"/>
+                    <a:ext cx="467999" cy="461665"/>
+                  </a:xfrm>
+                  <a:prstGeom prst="rect">
+                    <a:avLst/>
+                  </a:prstGeom>
+                  <a:blipFill>
+                    <a:blip r:embed="rId3"/>
+                    <a:stretch>
+                      <a:fillRect/>
+                    </a:stretch>
+                  </a:blipFill>
+                </p:spPr>
+                <p:txBody>
+                  <a:bodyPr/>
+                  <a:lstStyle/>
+                  <a:p>
+                    <a:r>
+                      <a:rPr lang="pt-BR">
+                        <a:noFill/>
+                      </a:rPr>
+                      <a:t> </a:t>
+                    </a:r>
+                  </a:p>
+                </p:txBody>
+              </p:sp>
+            </mc:Fallback>
+          </mc:AlternateContent>
+          <mc:AlternateContent xmlns:mc="http://schemas.openxmlformats.org/markup-compatibility/2006" xmlns:a14="http://schemas.microsoft.com/office/drawing/2010/main">
+            <mc:Choice Requires="a14">
+              <p:sp>
+                <p:nvSpPr>
+                  <p:cNvPr id="14" name="CaixaDeTexto 13">
+                    <a:extLst>
+                      <a:ext uri="{FF2B5EF4-FFF2-40B4-BE49-F238E27FC236}">
+                        <a16:creationId xmlns:a16="http://schemas.microsoft.com/office/drawing/2014/main" id="{6AFC799D-58CB-E1E2-0D69-3033A3F20565}"/>
+                      </a:ext>
+                    </a:extLst>
+                  </p:cNvPr>
+                  <p:cNvSpPr txBox="1"/>
+                  <p:nvPr/>
+                </p:nvSpPr>
+                <p:spPr>
+                  <a:xfrm flipH="1">
+                    <a:off x="425788" y="4367212"/>
+                    <a:ext cx="467999" cy="461665"/>
+                  </a:xfrm>
+                  <a:prstGeom prst="rect">
+                    <a:avLst/>
+                  </a:prstGeom>
+                  <a:noFill/>
+                </p:spPr>
+                <p:txBody>
+                  <a:bodyPr wrap="square">
+                    <a:spAutoFit/>
+                  </a:bodyPr>
+                  <a:lstStyle/>
+                  <a:p>
+                    <a:pPr/>
+                    <a14:m>
+                      <m:oMathPara xmlns:m="http://schemas.openxmlformats.org/officeDocument/2006/math">
+                        <m:oMathParaPr>
+                          <m:jc m:val="center"/>
+                        </m:oMathParaPr>
+                        <m:oMath xmlns:m="http://schemas.openxmlformats.org/officeDocument/2006/math">
+                          <m:r>
+                            <a:rPr lang="pt-BR" sz="2400" b="1" i="1" smtClean="0">
+                              <a:latin typeface="Cambria Math" panose="02040503050406030204" pitchFamily="18" charset="0"/>
+                            </a:rPr>
+                            <m:t>𝒚</m:t>
+                          </m:r>
+                        </m:oMath>
+                      </m:oMathPara>
+                    </a14:m>
+                    <a:endParaRPr lang="pt-BR" sz="2400" b="1" i="1" dirty="0"/>
+                  </a:p>
+                </p:txBody>
+              </p:sp>
+            </mc:Choice>
+            <mc:Fallback xmlns="">
+              <p:sp>
+                <p:nvSpPr>
+                  <p:cNvPr id="14" name="CaixaDeTexto 13">
+                    <a:extLst>
+                      <a:ext uri="{FF2B5EF4-FFF2-40B4-BE49-F238E27FC236}">
+                        <a16:creationId xmlns:a16="http://schemas.microsoft.com/office/drawing/2014/main" id="{6AFC799D-58CB-E1E2-0D69-3033A3F20565}"/>
+                      </a:ext>
+                    </a:extLst>
+                  </p:cNvPr>
+                  <p:cNvSpPr txBox="1">
+                    <a:spLocks noRot="1" noChangeAspect="1" noMove="1" noResize="1" noEditPoints="1" noAdjustHandles="1" noChangeArrowheads="1" noChangeShapeType="1" noTextEdit="1"/>
+                  </p:cNvSpPr>
+                  <p:nvPr/>
+                </p:nvSpPr>
+                <p:spPr>
+                  <a:xfrm flipH="1">
+                    <a:off x="425788" y="4367212"/>
+                    <a:ext cx="467999" cy="461665"/>
+                  </a:xfrm>
+                  <a:prstGeom prst="rect">
+                    <a:avLst/>
+                  </a:prstGeom>
+                  <a:blipFill>
+                    <a:blip r:embed="rId4"/>
+                    <a:stretch>
+                      <a:fillRect b="-12000"/>
+                    </a:stretch>
+                  </a:blipFill>
+                </p:spPr>
+                <p:txBody>
+                  <a:bodyPr/>
+                  <a:lstStyle/>
+                  <a:p>
+                    <a:r>
+                      <a:rPr lang="pt-BR">
+                        <a:noFill/>
+                      </a:rPr>
+                      <a:t> </a:t>
+                    </a:r>
+                  </a:p>
+                </p:txBody>
+              </p:sp>
+            </mc:Fallback>
+          </mc:AlternateContent>
+          <mc:AlternateContent xmlns:mc="http://schemas.openxmlformats.org/markup-compatibility/2006" xmlns:a14="http://schemas.microsoft.com/office/drawing/2010/main">
+            <mc:Choice Requires="a14">
+              <p:sp>
+                <p:nvSpPr>
+                  <p:cNvPr id="15" name="CaixaDeTexto 14">
+                    <a:extLst>
+                      <a:ext uri="{FF2B5EF4-FFF2-40B4-BE49-F238E27FC236}">
+                        <a16:creationId xmlns:a16="http://schemas.microsoft.com/office/drawing/2014/main" id="{50292170-E093-D561-BEDB-71584050F297}"/>
+                      </a:ext>
+                    </a:extLst>
+                  </p:cNvPr>
+                  <p:cNvSpPr txBox="1"/>
+                  <p:nvPr/>
+                </p:nvSpPr>
+                <p:spPr>
+                  <a:xfrm flipH="1">
+                    <a:off x="2578604" y="2978956"/>
+                    <a:ext cx="801039" cy="461665"/>
+                  </a:xfrm>
+                  <a:prstGeom prst="rect">
+                    <a:avLst/>
+                  </a:prstGeom>
+                  <a:noFill/>
+                </p:spPr>
+                <p:txBody>
+                  <a:bodyPr wrap="square">
+                    <a:spAutoFit/>
+                  </a:bodyPr>
+                  <a:lstStyle/>
+                  <a:p>
+                    <a:pPr/>
+                    <a14:m>
+                      <m:oMathPara xmlns:m="http://schemas.openxmlformats.org/officeDocument/2006/math">
+                        <m:oMathParaPr>
+                          <m:jc m:val="center"/>
+                        </m:oMathParaPr>
+                        <m:oMath xmlns:m="http://schemas.openxmlformats.org/officeDocument/2006/math">
+                          <m:acc>
+                            <m:accPr>
+                              <m:chr m:val="̂"/>
+                              <m:ctrlPr>
+                                <a:rPr lang="pt-BR" sz="2400" b="0" i="1" smtClean="0">
+                                  <a:latin typeface="Cambria Math" panose="02040503050406030204" pitchFamily="18" charset="0"/>
+                                </a:rPr>
+                              </m:ctrlPr>
+                            </m:accPr>
+                            <m:e>
+                              <m:r>
+                                <a:rPr lang="pt-BR" sz="2400" b="0" i="1" smtClean="0">
+                                  <a:latin typeface="Cambria Math" panose="02040503050406030204" pitchFamily="18" charset="0"/>
+                                </a:rPr>
+                                <m:t>𝑦</m:t>
+                              </m:r>
+                            </m:e>
+                          </m:acc>
+                        </m:oMath>
+                      </m:oMathPara>
+                    </a14:m>
+                    <a:endParaRPr lang="pt-BR" sz="2400" dirty="0"/>
+                  </a:p>
+                </p:txBody>
+              </p:sp>
+            </mc:Choice>
+            <mc:Fallback xmlns="">
+              <p:sp>
+                <p:nvSpPr>
+                  <p:cNvPr id="15" name="CaixaDeTexto 14">
+                    <a:extLst>
+                      <a:ext uri="{FF2B5EF4-FFF2-40B4-BE49-F238E27FC236}">
+                        <a16:creationId xmlns:a16="http://schemas.microsoft.com/office/drawing/2014/main" id="{50292170-E093-D561-BEDB-71584050F297}"/>
+                      </a:ext>
+                    </a:extLst>
+                  </p:cNvPr>
+                  <p:cNvSpPr txBox="1">
+                    <a:spLocks noRot="1" noChangeAspect="1" noMove="1" noResize="1" noEditPoints="1" noAdjustHandles="1" noChangeArrowheads="1" noChangeShapeType="1" noTextEdit="1"/>
+                  </p:cNvSpPr>
+                  <p:nvPr/>
+                </p:nvSpPr>
+                <p:spPr>
+                  <a:xfrm flipH="1">
+                    <a:off x="2578604" y="2978956"/>
+                    <a:ext cx="801039" cy="461665"/>
+                  </a:xfrm>
+                  <a:prstGeom prst="rect">
+                    <a:avLst/>
+                  </a:prstGeom>
+                  <a:blipFill>
+                    <a:blip r:embed="rId6"/>
+                    <a:stretch>
+                      <a:fillRect t="-3947" r="-21970" b="-10526"/>
+                    </a:stretch>
+                  </a:blipFill>
+                </p:spPr>
+                <p:txBody>
+                  <a:bodyPr/>
+                  <a:lstStyle/>
+                  <a:p>
+                    <a:r>
+                      <a:rPr lang="pt-BR">
+                        <a:noFill/>
+                      </a:rPr>
+                      <a:t> </a:t>
+                    </a:r>
+                  </a:p>
+                </p:txBody>
+              </p:sp>
+            </mc:Fallback>
+          </mc:AlternateContent>
+          <p:cxnSp>
+            <p:nvCxnSpPr>
+              <p:cNvPr id="16" name="Conector: Angulado 15">
+                <a:extLst>
+                  <a:ext uri="{FF2B5EF4-FFF2-40B4-BE49-F238E27FC236}">
+                    <a16:creationId xmlns:a16="http://schemas.microsoft.com/office/drawing/2014/main" id="{B009E62F-DEAF-CE49-8684-D2F3889690CD}"/>
+                  </a:ext>
+                </a:extLst>
+              </p:cNvPr>
+              <p:cNvCxnSpPr>
+                <a:cxnSpLocks/>
+                <a:stCxn id="14" idx="1"/>
+                <a:endCxn id="12" idx="2"/>
+              </p:cNvCxnSpPr>
+              <p:nvPr/>
+            </p:nvCxnSpPr>
+            <p:spPr>
+              <a:xfrm flipV="1">
+                <a:off x="893787" y="3878943"/>
+                <a:ext cx="3133595" cy="719102"/>
+              </a:xfrm>
+              <a:prstGeom prst="bentConnector2">
+                <a:avLst/>
+              </a:prstGeom>
+              <a:ln>
+                <a:tailEnd type="triangle"/>
+              </a:ln>
+            </p:spPr>
+            <p:style>
+              <a:lnRef idx="1">
+                <a:schemeClr val="accent1"/>
+              </a:lnRef>
+              <a:fillRef idx="0">
+                <a:schemeClr val="accent1"/>
+              </a:fillRef>
+              <a:effectRef idx="0">
+                <a:schemeClr val="accent1"/>
+              </a:effectRef>
+              <a:fontRef idx="minor">
+                <a:schemeClr val="tx1"/>
+              </a:fontRef>
+            </p:style>
+          </p:cxnSp>
+          <p:cxnSp>
+            <p:nvCxnSpPr>
+              <p:cNvPr id="17" name="Conector: Angulado 16">
+                <a:extLst>
+                  <a:ext uri="{FF2B5EF4-FFF2-40B4-BE49-F238E27FC236}">
+                    <a16:creationId xmlns:a16="http://schemas.microsoft.com/office/drawing/2014/main" id="{F90DC347-B7E4-3023-60C7-1C8283B3C88E}"/>
+                  </a:ext>
+                </a:extLst>
+              </p:cNvPr>
+              <p:cNvCxnSpPr>
+                <a:cxnSpLocks/>
+                <a:stCxn id="12" idx="3"/>
+              </p:cNvCxnSpPr>
+              <p:nvPr/>
+            </p:nvCxnSpPr>
+            <p:spPr>
+              <a:xfrm flipH="1" flipV="1">
+                <a:off x="2662503" y="2378075"/>
+                <a:ext cx="1973288" cy="1076325"/>
+              </a:xfrm>
+              <a:prstGeom prst="bentConnector3">
+                <a:avLst>
+                  <a:gd name="adj1" fmla="val -11585"/>
+                </a:avLst>
+              </a:prstGeom>
+              <a:ln>
+                <a:prstDash val="dash"/>
+                <a:headEnd type="none" w="med" len="med"/>
+                <a:tailEnd type="none" w="med" len="med"/>
+              </a:ln>
+            </p:spPr>
+            <p:style>
+              <a:lnRef idx="1">
+                <a:schemeClr val="accent1"/>
+              </a:lnRef>
+              <a:fillRef idx="0">
+                <a:schemeClr val="accent1"/>
+              </a:fillRef>
+              <a:effectRef idx="0">
+                <a:schemeClr val="accent1"/>
+              </a:effectRef>
+              <a:fontRef idx="minor">
+                <a:schemeClr val="tx1"/>
+              </a:fontRef>
+            </p:style>
+          </p:cxnSp>
+          <p:cxnSp>
+            <p:nvCxnSpPr>
+              <p:cNvPr id="18" name="Conector reto 17">
+                <a:extLst>
+                  <a:ext uri="{FF2B5EF4-FFF2-40B4-BE49-F238E27FC236}">
+                    <a16:creationId xmlns:a16="http://schemas.microsoft.com/office/drawing/2014/main" id="{29EF8501-71B8-2FB0-7ED2-028287A0A5BB}"/>
+                  </a:ext>
+                </a:extLst>
+              </p:cNvPr>
+              <p:cNvCxnSpPr/>
+              <p:nvPr/>
+            </p:nvCxnSpPr>
+            <p:spPr>
+              <a:xfrm flipH="1">
+                <a:off x="1450107" y="2378075"/>
+                <a:ext cx="1212396" cy="1743075"/>
+              </a:xfrm>
+              <a:prstGeom prst="line">
+                <a:avLst/>
+              </a:prstGeom>
+              <a:ln>
+                <a:prstDash val="dash"/>
+                <a:headEnd type="none" w="med" len="med"/>
+                <a:tailEnd type="triangle" w="med" len="med"/>
+              </a:ln>
+            </p:spPr>
+            <p:style>
+              <a:lnRef idx="1">
+                <a:schemeClr val="accent1"/>
+              </a:lnRef>
+              <a:fillRef idx="0">
+                <a:schemeClr val="accent1"/>
+              </a:fillRef>
+              <a:effectRef idx="0">
+                <a:schemeClr val="accent1"/>
+              </a:effectRef>
+              <a:fontRef idx="minor">
+                <a:schemeClr val="tx1"/>
+              </a:fontRef>
+            </p:style>
+          </p:cxnSp>
+          <p:sp>
+            <p:nvSpPr>
+              <p:cNvPr id="19" name="CaixaDeTexto 18">
+                <a:extLst>
+                  <a:ext uri="{FF2B5EF4-FFF2-40B4-BE49-F238E27FC236}">
+                    <a16:creationId xmlns:a16="http://schemas.microsoft.com/office/drawing/2014/main" id="{2B889678-B98C-9E1D-C61A-60F719853781}"/>
+                  </a:ext>
+                </a:extLst>
+              </p:cNvPr>
+              <p:cNvSpPr txBox="1"/>
+              <p:nvPr/>
+            </p:nvSpPr>
+            <p:spPr>
+              <a:xfrm>
+                <a:off x="893787" y="4074825"/>
+                <a:ext cx="1309262" cy="276999"/>
+              </a:xfrm>
+              <a:prstGeom prst="rect">
+                <a:avLst/>
+              </a:prstGeom>
+              <a:noFill/>
+            </p:spPr>
+            <p:txBody>
+              <a:bodyPr wrap="square" rtlCol="0">
+                <a:spAutoFit/>
+              </a:bodyPr>
+              <a:lstStyle/>
+              <a:p>
+                <a:pPr algn="ctr"/>
+                <a:r>
+                  <a:rPr lang="pt-BR" sz="1200" dirty="0"/>
+                  <a:t>Ajuste do modelo</a:t>
+                </a:r>
+              </a:p>
+            </p:txBody>
+          </p:sp>
+          <p:sp>
+            <p:nvSpPr>
+              <p:cNvPr id="21" name="CaixaDeTexto 20">
+                <a:extLst>
+                  <a:ext uri="{FF2B5EF4-FFF2-40B4-BE49-F238E27FC236}">
+                    <a16:creationId xmlns:a16="http://schemas.microsoft.com/office/drawing/2014/main" id="{D4DEEE4B-BFB7-7180-B620-019C107089CA}"/>
+                  </a:ext>
+                </a:extLst>
+              </p:cNvPr>
+              <p:cNvSpPr txBox="1"/>
+              <p:nvPr/>
+            </p:nvSpPr>
+            <p:spPr>
+              <a:xfrm>
+                <a:off x="157187" y="4947981"/>
+                <a:ext cx="1047413" cy="461665"/>
+              </a:xfrm>
+              <a:prstGeom prst="rect">
+                <a:avLst/>
+              </a:prstGeom>
+              <a:noFill/>
+            </p:spPr>
+            <p:txBody>
+              <a:bodyPr wrap="square" rtlCol="0">
+                <a:spAutoFit/>
+              </a:bodyPr>
+              <a:lstStyle/>
+              <a:p>
+                <a:pPr algn="ctr"/>
+                <a:r>
+                  <a:rPr lang="pt-BR" sz="1200" dirty="0"/>
+                  <a:t>Conjunto de treinamento</a:t>
+                </a:r>
+              </a:p>
+            </p:txBody>
+          </p:sp>
+          <p:sp>
+            <p:nvSpPr>
+              <p:cNvPr id="22" name="CaixaDeTexto 21">
+                <a:extLst>
+                  <a:ext uri="{FF2B5EF4-FFF2-40B4-BE49-F238E27FC236}">
+                    <a16:creationId xmlns:a16="http://schemas.microsoft.com/office/drawing/2014/main" id="{CB35AE44-A8A6-55E4-AF7C-6D1B1C22FD76}"/>
+                  </a:ext>
+                </a:extLst>
+              </p:cNvPr>
+              <p:cNvSpPr txBox="1"/>
+              <p:nvPr/>
+            </p:nvSpPr>
+            <p:spPr>
+              <a:xfrm>
+                <a:off x="2578607" y="3490140"/>
+                <a:ext cx="840365" cy="276999"/>
+              </a:xfrm>
+              <a:prstGeom prst="rect">
+                <a:avLst/>
+              </a:prstGeom>
+              <a:noFill/>
+            </p:spPr>
+            <p:txBody>
+              <a:bodyPr wrap="square" rtlCol="0">
+                <a:spAutoFit/>
+              </a:bodyPr>
+              <a:lstStyle/>
+              <a:p>
+                <a:pPr algn="ctr"/>
+                <a:r>
+                  <a:rPr lang="pt-BR" sz="1200" dirty="0"/>
+                  <a:t>estimativa</a:t>
+                </a:r>
+              </a:p>
+            </p:txBody>
+          </p:sp>
+          <p:sp>
+            <p:nvSpPr>
+              <p:cNvPr id="23" name="CaixaDeTexto 22">
+                <a:extLst>
+                  <a:ext uri="{FF2B5EF4-FFF2-40B4-BE49-F238E27FC236}">
+                    <a16:creationId xmlns:a16="http://schemas.microsoft.com/office/drawing/2014/main" id="{253F27F5-AE53-A49B-F8E5-AF810876A343}"/>
+                  </a:ext>
+                </a:extLst>
+              </p:cNvPr>
+              <p:cNvSpPr txBox="1"/>
+              <p:nvPr/>
+            </p:nvSpPr>
+            <p:spPr>
+              <a:xfrm>
+                <a:off x="4611210" y="3440621"/>
+                <a:ext cx="454917" cy="276999"/>
+              </a:xfrm>
+              <a:prstGeom prst="rect">
+                <a:avLst/>
+              </a:prstGeom>
+              <a:noFill/>
+            </p:spPr>
+            <p:txBody>
+              <a:bodyPr wrap="square" rtlCol="0">
+                <a:spAutoFit/>
+              </a:bodyPr>
+              <a:lstStyle/>
+              <a:p>
+                <a:pPr algn="ctr"/>
+                <a:r>
+                  <a:rPr lang="pt-BR" sz="1200" dirty="0"/>
+                  <a:t>erro</a:t>
+                </a:r>
+              </a:p>
+            </p:txBody>
+          </p:sp>
+        </p:grpSp>
+        <p:sp>
+          <p:nvSpPr>
+            <p:cNvPr id="5" name="CaixaDeTexto 4">
+              <a:extLst>
+                <a:ext uri="{FF2B5EF4-FFF2-40B4-BE49-F238E27FC236}">
+                  <a16:creationId xmlns:a16="http://schemas.microsoft.com/office/drawing/2014/main" id="{C18E8975-8592-CC3B-612B-6E6728CAA35F}"/>
+                </a:ext>
+              </a:extLst>
+            </p:cNvPr>
+            <p:cNvSpPr txBox="1"/>
+            <p:nvPr/>
+          </p:nvSpPr>
+          <p:spPr>
+            <a:xfrm>
+              <a:off x="2848216" y="1658935"/>
+              <a:ext cx="2209559" cy="600164"/>
+            </a:xfrm>
+            <a:prstGeom prst="rect">
+              <a:avLst/>
+            </a:prstGeom>
+            <a:noFill/>
+          </p:spPr>
+          <p:txBody>
+            <a:bodyPr wrap="square" rtlCol="0">
+              <a:spAutoFit/>
+            </a:bodyPr>
+            <a:lstStyle/>
+            <a:p>
+              <a:pPr algn="ctr"/>
+              <a:r>
+                <a:rPr lang="pt-BR" sz="1100" b="1" i="1" dirty="0">
+                  <a:solidFill>
+                    <a:schemeClr val="accent2"/>
+                  </a:solidFill>
+                </a:rPr>
+                <a:t>Indicação para onde deve-se caminhar </a:t>
+              </a:r>
+              <a:r>
+                <a:rPr lang="pt-BR" sz="1100" dirty="0"/>
+                <a:t>no espaço de hipóteses para que o erro seja minimizado</a:t>
+              </a:r>
+            </a:p>
+          </p:txBody>
+        </p:sp>
+      </p:grpSp>
+    </p:spTree>
+    <p:extLst>
+      <p:ext uri="{BB962C8B-B14F-4D97-AF65-F5344CB8AC3E}">
+        <p14:creationId xmlns:p14="http://schemas.microsoft.com/office/powerpoint/2010/main" val="1685913891"/>
+      </p:ext>
+    </p:extLst>
+  </p:cSld>
+  <p:clrMapOvr>
+    <a:masterClrMapping/>
+  </p:clrMapOvr>
+</p:sld>
+</file>
+
+<file path=ppt/slides/slide18.xml><?xml version="1.0" encoding="utf-8"?>
+<p:sld xmlns:a="http://schemas.openxmlformats.org/drawingml/2006/main" xmlns:r="http://schemas.openxmlformats.org/officeDocument/2006/relationships" xmlns:p="http://schemas.openxmlformats.org/presentationml/2006/main">
+  <p:cSld>
+    <p:spTree>
+      <p:nvGrpSpPr>
+        <p:cNvPr id="1" name=""/>
+        <p:cNvGrpSpPr/>
+        <p:nvPr/>
+      </p:nvGrpSpPr>
+      <p:grpSpPr>
+        <a:xfrm>
+          <a:off x="0" y="0"/>
+          <a:ext cx="0" cy="0"/>
+          <a:chOff x="0" y="0"/>
+          <a:chExt cx="0" cy="0"/>
+        </a:xfrm>
+      </p:grpSpPr>
+      <p:sp>
+        <p:nvSpPr>
+          <p:cNvPr id="2" name="Title 1">
+            <a:extLst>
+              <a:ext uri="{FF2B5EF4-FFF2-40B4-BE49-F238E27FC236}">
+                <a16:creationId xmlns:a16="http://schemas.microsoft.com/office/drawing/2014/main" id="{CED0B404-F3ED-8087-A024-C72B793DE4C8}"/>
+              </a:ext>
+            </a:extLst>
+          </p:cNvPr>
+          <p:cNvSpPr>
+            <a:spLocks noGrp="1"/>
+          </p:cNvSpPr>
+          <p:nvPr>
+            <p:ph type="title"/>
+          </p:nvPr>
+        </p:nvSpPr>
+        <p:spPr/>
+        <p:txBody>
+          <a:bodyPr/>
+          <a:lstStyle/>
+          <a:p>
+            <a:endParaRPr lang="en-US"/>
+          </a:p>
+        </p:txBody>
+      </p:sp>
+      <p:sp>
+        <p:nvSpPr>
+          <p:cNvPr id="3" name="Content Placeholder 2">
+            <a:extLst>
+              <a:ext uri="{FF2B5EF4-FFF2-40B4-BE49-F238E27FC236}">
+                <a16:creationId xmlns:a16="http://schemas.microsoft.com/office/drawing/2014/main" id="{C6D4684C-15AE-EBFA-CC52-BE2B10624210}"/>
+              </a:ext>
+            </a:extLst>
+          </p:cNvPr>
+          <p:cNvSpPr>
+            <a:spLocks noGrp="1"/>
+          </p:cNvSpPr>
+          <p:nvPr>
+            <p:ph idx="1"/>
+          </p:nvPr>
+        </p:nvSpPr>
+        <p:spPr/>
+        <p:txBody>
+          <a:bodyPr>
+            <a:normAutofit/>
+          </a:bodyPr>
+          <a:lstStyle/>
+          <a:p>
+            <a:r>
+              <a:rPr lang="pt-BR" sz="4800" b="1" dirty="0">
+                <a:solidFill>
+                  <a:srgbClr val="FF0000"/>
+                </a:solidFill>
+              </a:rPr>
+              <a:t>PAREI AQUI!!!!!!!!!!!</a:t>
+            </a:r>
+            <a:endParaRPr lang="en-US" sz="4800" b="1" dirty="0">
+              <a:solidFill>
+                <a:srgbClr val="FF0000"/>
+              </a:solidFill>
+            </a:endParaRPr>
           </a:p>
         </p:txBody>
       </p:sp>
     </p:spTree>
     <p:extLst>
       <p:ext uri="{BB962C8B-B14F-4D97-AF65-F5344CB8AC3E}">
-        <p14:creationId xmlns:p14="http://schemas.microsoft.com/office/powerpoint/2010/main" val="2655704619"/>
+        <p14:creationId xmlns:p14="http://schemas.microsoft.com/office/powerpoint/2010/main" val="956125625"/>
+      </p:ext>
+    </p:extLst>
+  </p:cSld>
+  <p:clrMapOvr>
+    <a:masterClrMapping/>
+  </p:clrMapOvr>
+</p:sld>
+</file>
+
+<file path=ppt/slides/slide19.xml><?xml version="1.0" encoding="utf-8"?>
+<p:sld xmlns:a="http://schemas.openxmlformats.org/drawingml/2006/main" xmlns:r="http://schemas.openxmlformats.org/officeDocument/2006/relationships" xmlns:p="http://schemas.openxmlformats.org/presentationml/2006/main">
+  <p:cSld>
+    <p:spTree>
+      <p:nvGrpSpPr>
+        <p:cNvPr id="1" name=""/>
+        <p:cNvGrpSpPr/>
+        <p:nvPr/>
+      </p:nvGrpSpPr>
+      <p:grpSpPr>
+        <a:xfrm>
+          <a:off x="0" y="0"/>
+          <a:ext cx="0" cy="0"/>
+          <a:chOff x="0" y="0"/>
+          <a:chExt cx="0" cy="0"/>
+        </a:xfrm>
+      </p:grpSpPr>
+      <p:sp>
+        <p:nvSpPr>
+          <p:cNvPr id="2" name="Title 1">
+            <a:extLst>
+              <a:ext uri="{FF2B5EF4-FFF2-40B4-BE49-F238E27FC236}">
+                <a16:creationId xmlns:a16="http://schemas.microsoft.com/office/drawing/2014/main" id="{327CA9BC-BDB8-0017-DAF6-E2CF307E39E9}"/>
+              </a:ext>
+            </a:extLst>
+          </p:cNvPr>
+          <p:cNvSpPr>
+            <a:spLocks noGrp="1"/>
+          </p:cNvSpPr>
+          <p:nvPr>
+            <p:ph type="title"/>
+          </p:nvPr>
+        </p:nvSpPr>
+        <p:spPr/>
+        <p:txBody>
+          <a:bodyPr/>
+          <a:lstStyle/>
+          <a:p>
+            <a:endParaRPr lang="en-US"/>
+          </a:p>
+        </p:txBody>
+      </p:sp>
+      <p:sp>
+        <p:nvSpPr>
+          <p:cNvPr id="3" name="Content Placeholder 2">
+            <a:extLst>
+              <a:ext uri="{FF2B5EF4-FFF2-40B4-BE49-F238E27FC236}">
+                <a16:creationId xmlns:a16="http://schemas.microsoft.com/office/drawing/2014/main" id="{DE0FC8F8-ADC7-A068-C2BC-465BFAC99DC0}"/>
+              </a:ext>
+            </a:extLst>
+          </p:cNvPr>
+          <p:cNvSpPr>
+            <a:spLocks noGrp="1"/>
+          </p:cNvSpPr>
+          <p:nvPr>
+            <p:ph idx="1"/>
+          </p:nvPr>
+        </p:nvSpPr>
+        <p:spPr/>
+        <p:txBody>
+          <a:bodyPr/>
+          <a:lstStyle/>
+          <a:p>
+            <a:r>
+              <a:rPr lang="pt-BR"/>
+              <a:t>Existem duas formas </a:t>
+            </a:r>
+            <a:r>
+              <a:rPr lang="pt-BR" dirty="0"/>
+              <a:t>de se encontrar o </a:t>
+            </a:r>
+            <a:r>
+              <a:rPr lang="pt-BR" b="1" dirty="0">
+                <a:solidFill>
+                  <a:srgbClr val="00B050"/>
+                </a:solidFill>
+              </a:rPr>
+              <a:t>conjunto de pesos ótimo </a:t>
+            </a:r>
+            <a:r>
+              <a:rPr lang="pt-BR" dirty="0"/>
+              <a:t>através da </a:t>
+            </a:r>
+            <a:r>
+              <a:rPr lang="pt-BR" b="1" dirty="0">
+                <a:solidFill>
+                  <a:srgbClr val="7030A0"/>
+                </a:solidFill>
+              </a:rPr>
+              <a:t>minimização da função </a:t>
+            </a:r>
+            <a:r>
+              <a:rPr lang="pt-BR" b="1">
+                <a:solidFill>
+                  <a:srgbClr val="7030A0"/>
+                </a:solidFill>
+              </a:rPr>
+              <a:t>de erro</a:t>
+            </a:r>
+            <a:endParaRPr lang="pt-BR" b="1" dirty="0">
+              <a:solidFill>
+                <a:srgbClr val="7030A0"/>
+              </a:solidFill>
+            </a:endParaRPr>
+          </a:p>
+          <a:p>
+            <a:pPr lvl="1"/>
+            <a:endParaRPr lang="pt-BR" dirty="0"/>
+          </a:p>
+          <a:p>
+            <a:endParaRPr lang="en-US" dirty="0"/>
+          </a:p>
+        </p:txBody>
+      </p:sp>
+    </p:spTree>
+    <p:extLst>
+      <p:ext uri="{BB962C8B-B14F-4D97-AF65-F5344CB8AC3E}">
+        <p14:creationId xmlns:p14="http://schemas.microsoft.com/office/powerpoint/2010/main" val="3306137314"/>
       </p:ext>
     </p:extLst>
   </p:cSld>
@@ -8444,6 +12227,178 @@
     <p:extLst>
       <p:ext uri="{BB962C8B-B14F-4D97-AF65-F5344CB8AC3E}">
         <p14:creationId xmlns:p14="http://schemas.microsoft.com/office/powerpoint/2010/main" val="301802495"/>
+      </p:ext>
+    </p:extLst>
+  </p:cSld>
+  <p:clrMapOvr>
+    <a:masterClrMapping/>
+  </p:clrMapOvr>
+</p:sld>
+</file>
+
+<file path=ppt/slides/slide20.xml><?xml version="1.0" encoding="utf-8"?>
+<p:sld xmlns:a="http://schemas.openxmlformats.org/drawingml/2006/main" xmlns:r="http://schemas.openxmlformats.org/officeDocument/2006/relationships" xmlns:p="http://schemas.openxmlformats.org/presentationml/2006/main">
+  <p:cSld>
+    <p:spTree>
+      <p:nvGrpSpPr>
+        <p:cNvPr id="1" name=""/>
+        <p:cNvGrpSpPr/>
+        <p:nvPr/>
+      </p:nvGrpSpPr>
+      <p:grpSpPr>
+        <a:xfrm>
+          <a:off x="0" y="0"/>
+          <a:ext cx="0" cy="0"/>
+          <a:chOff x="0" y="0"/>
+          <a:chExt cx="0" cy="0"/>
+        </a:xfrm>
+      </p:grpSpPr>
+      <p:sp>
+        <p:nvSpPr>
+          <p:cNvPr id="4" name="Título 1">
+            <a:extLst>
+              <a:ext uri="{FF2B5EF4-FFF2-40B4-BE49-F238E27FC236}">
+                <a16:creationId xmlns:a16="http://schemas.microsoft.com/office/drawing/2014/main" id="{32666AC8-2E17-4DB4-B0F5-60C640CCFD2E}"/>
+              </a:ext>
+            </a:extLst>
+          </p:cNvPr>
+          <p:cNvSpPr txBox="1">
+            <a:spLocks/>
+          </p:cNvSpPr>
+          <p:nvPr/>
+        </p:nvSpPr>
+        <p:spPr>
+          <a:xfrm>
+            <a:off x="1431533" y="2720526"/>
+            <a:ext cx="9144000" cy="1029541"/>
+          </a:xfrm>
+          <a:prstGeom prst="rect">
+            <a:avLst/>
+          </a:prstGeom>
+        </p:spPr>
+        <p:txBody>
+          <a:bodyPr vert="horz" lIns="91440" tIns="45720" rIns="91440" bIns="45720" rtlCol="0" anchor="ctr">
+            <a:normAutofit/>
+          </a:bodyPr>
+          <a:lstStyle>
+            <a:lvl1pPr algn="l" defTabSz="914400" rtl="0" eaLnBrk="1" latinLnBrk="0" hangingPunct="1">
+              <a:lnSpc>
+                <a:spcPct val="90000"/>
+              </a:lnSpc>
+              <a:spcBef>
+                <a:spcPct val="0"/>
+              </a:spcBef>
+              <a:buNone/>
+              <a:defRPr sz="4400" kern="1200">
+                <a:solidFill>
+                  <a:schemeClr val="tx1"/>
+                </a:solidFill>
+                <a:latin typeface="+mj-lt"/>
+                <a:ea typeface="+mj-ea"/>
+                <a:cs typeface="+mj-cs"/>
+              </a:defRPr>
+            </a:lvl1pPr>
+          </a:lstStyle>
+          <a:p>
+            <a:pPr algn="ctr"/>
+            <a:r>
+              <a:rPr lang="pt-BR" sz="6600" dirty="0"/>
+              <a:t>Perguntas?</a:t>
+            </a:r>
+            <a:endParaRPr lang="pt-BR" sz="6600" b="1" i="1" dirty="0"/>
+          </a:p>
+        </p:txBody>
+      </p:sp>
+    </p:spTree>
+    <p:extLst>
+      <p:ext uri="{BB962C8B-B14F-4D97-AF65-F5344CB8AC3E}">
+        <p14:creationId xmlns:p14="http://schemas.microsoft.com/office/powerpoint/2010/main" val="3773005660"/>
+      </p:ext>
+    </p:extLst>
+  </p:cSld>
+  <p:clrMapOvr>
+    <a:masterClrMapping/>
+  </p:clrMapOvr>
+</p:sld>
+</file>
+
+<file path=ppt/slides/slide21.xml><?xml version="1.0" encoding="utf-8"?>
+<p:sld xmlns:a="http://schemas.openxmlformats.org/drawingml/2006/main" xmlns:r="http://schemas.openxmlformats.org/officeDocument/2006/relationships" xmlns:p="http://schemas.openxmlformats.org/presentationml/2006/main">
+  <p:cSld>
+    <p:spTree>
+      <p:nvGrpSpPr>
+        <p:cNvPr id="1" name=""/>
+        <p:cNvGrpSpPr/>
+        <p:nvPr/>
+      </p:nvGrpSpPr>
+      <p:grpSpPr>
+        <a:xfrm>
+          <a:off x="0" y="0"/>
+          <a:ext cx="0" cy="0"/>
+          <a:chOff x="0" y="0"/>
+          <a:chExt cx="0" cy="0"/>
+        </a:xfrm>
+      </p:grpSpPr>
+      <p:sp>
+        <p:nvSpPr>
+          <p:cNvPr id="4" name="Título 1">
+            <a:extLst>
+              <a:ext uri="{FF2B5EF4-FFF2-40B4-BE49-F238E27FC236}">
+                <a16:creationId xmlns:a16="http://schemas.microsoft.com/office/drawing/2014/main" id="{32666AC8-2E17-4DB4-B0F5-60C640CCFD2E}"/>
+              </a:ext>
+            </a:extLst>
+          </p:cNvPr>
+          <p:cNvSpPr txBox="1">
+            <a:spLocks/>
+          </p:cNvSpPr>
+          <p:nvPr/>
+        </p:nvSpPr>
+        <p:spPr>
+          <a:xfrm>
+            <a:off x="1431533" y="2720526"/>
+            <a:ext cx="9144000" cy="1029541"/>
+          </a:xfrm>
+          <a:prstGeom prst="rect">
+            <a:avLst/>
+          </a:prstGeom>
+        </p:spPr>
+        <p:txBody>
+          <a:bodyPr vert="horz" lIns="91440" tIns="45720" rIns="91440" bIns="45720" rtlCol="0" anchor="ctr">
+            <a:normAutofit/>
+          </a:bodyPr>
+          <a:lstStyle>
+            <a:lvl1pPr algn="l" defTabSz="914400" rtl="0" eaLnBrk="1" latinLnBrk="0" hangingPunct="1">
+              <a:lnSpc>
+                <a:spcPct val="90000"/>
+              </a:lnSpc>
+              <a:spcBef>
+                <a:spcPct val="0"/>
+              </a:spcBef>
+              <a:buNone/>
+              <a:defRPr sz="4400" kern="1200">
+                <a:solidFill>
+                  <a:schemeClr val="tx1"/>
+                </a:solidFill>
+                <a:latin typeface="+mj-lt"/>
+                <a:ea typeface="+mj-ea"/>
+                <a:cs typeface="+mj-cs"/>
+              </a:defRPr>
+            </a:lvl1pPr>
+          </a:lstStyle>
+          <a:p>
+            <a:pPr algn="ctr"/>
+            <a:r>
+              <a:rPr lang="pt-BR" sz="6600" dirty="0"/>
+              <a:t>Obrigado!</a:t>
+            </a:r>
+            <a:endParaRPr lang="pt-BR" sz="6600" b="1" i="1" dirty="0"/>
+          </a:p>
+        </p:txBody>
+      </p:sp>
+    </p:spTree>
+    <p:extLst>
+      <p:ext uri="{BB962C8B-B14F-4D97-AF65-F5344CB8AC3E}">
+        <p14:creationId xmlns:p14="http://schemas.microsoft.com/office/powerpoint/2010/main" val="2655704619"/>
       </p:ext>
     </p:extLst>
   </p:cSld>

--- a/slides/C24_Regressão.pptx
+++ b/slides/C24_Regressão.pptx
@@ -5,10 +5,10 @@
     <p:sldMasterId id="2147483648" r:id="rId1"/>
   </p:sldMasterIdLst>
   <p:notesMasterIdLst>
-    <p:notesMasterId r:id="rId23"/>
+    <p:notesMasterId r:id="rId28"/>
   </p:notesMasterIdLst>
   <p:handoutMasterIdLst>
-    <p:handoutMasterId r:id="rId24"/>
+    <p:handoutMasterId r:id="rId29"/>
   </p:handoutMasterIdLst>
   <p:sldIdLst>
     <p:sldId id="256" r:id="rId2"/>
@@ -28,10 +28,15 @@
     <p:sldId id="481" r:id="rId16"/>
     <p:sldId id="525" r:id="rId17"/>
     <p:sldId id="320" r:id="rId18"/>
-    <p:sldId id="521" r:id="rId19"/>
-    <p:sldId id="526" r:id="rId20"/>
-    <p:sldId id="293" r:id="rId21"/>
-    <p:sldId id="306" r:id="rId22"/>
+    <p:sldId id="526" r:id="rId19"/>
+    <p:sldId id="527" r:id="rId20"/>
+    <p:sldId id="528" r:id="rId21"/>
+    <p:sldId id="521" r:id="rId22"/>
+    <p:sldId id="529" r:id="rId23"/>
+    <p:sldId id="530" r:id="rId24"/>
+    <p:sldId id="531" r:id="rId25"/>
+    <p:sldId id="293" r:id="rId26"/>
+    <p:sldId id="306" r:id="rId27"/>
   </p:sldIdLst>
   <p:sldSz cx="12192000" cy="6858000"/>
   <p:notesSz cx="7315200" cy="9601200"/>
@@ -5752,8 +5757,8 @@
           </a:p>
         </p:txBody>
       </p:sp>
-      <mc:AlternateContent xmlns:mc="http://schemas.openxmlformats.org/markup-compatibility/2006">
-        <mc:Choice xmlns:a14="http://schemas.microsoft.com/office/drawing/2010/main" Requires="a14">
+      <mc:AlternateContent xmlns:mc="http://schemas.openxmlformats.org/markup-compatibility/2006" xmlns:a14="http://schemas.microsoft.com/office/drawing/2010/main">
+        <mc:Choice Requires="a14">
           <p:sp>
             <p:nvSpPr>
               <p:cNvPr id="3" name="Espaço Reservado para Conteúdo 2">
@@ -6199,7 +6204,7 @@
             </p:txBody>
           </p:sp>
         </mc:Choice>
-        <mc:Fallback>
+        <mc:Fallback xmlns="">
           <p:sp>
             <p:nvSpPr>
               <p:cNvPr id="3" name="Espaço Reservado para Conteúdo 2">
@@ -6307,8 +6312,8 @@
           </a:p>
         </p:txBody>
       </p:sp>
-      <mc:AlternateContent xmlns:mc="http://schemas.openxmlformats.org/markup-compatibility/2006">
-        <mc:Choice xmlns:a14="http://schemas.microsoft.com/office/drawing/2010/main" Requires="a14">
+      <mc:AlternateContent xmlns:mc="http://schemas.openxmlformats.org/markup-compatibility/2006" xmlns:a14="http://schemas.microsoft.com/office/drawing/2010/main">
+        <mc:Choice Requires="a14">
           <p:sp>
             <p:nvSpPr>
               <p:cNvPr id="3" name="Espaço Reservado para Conteúdo 2">
@@ -7532,7 +7537,7 @@
             </p:txBody>
           </p:sp>
         </mc:Choice>
-        <mc:Fallback>
+        <mc:Fallback xmlns="">
           <p:sp>
             <p:nvSpPr>
               <p:cNvPr id="3" name="Espaço Reservado para Conteúdo 2">
@@ -7803,8 +7808,8 @@
           </a:p>
         </p:txBody>
       </p:sp>
-      <mc:AlternateContent xmlns:mc="http://schemas.openxmlformats.org/markup-compatibility/2006">
-        <mc:Choice xmlns:a14="http://schemas.microsoft.com/office/drawing/2010/main" Requires="a14">
+      <mc:AlternateContent xmlns:mc="http://schemas.openxmlformats.org/markup-compatibility/2006" xmlns:a14="http://schemas.microsoft.com/office/drawing/2010/main">
+        <mc:Choice Requires="a14">
           <p:sp>
             <p:nvSpPr>
               <p:cNvPr id="3" name="Content Placeholder 2">
@@ -8362,7 +8367,7 @@
             </p:txBody>
           </p:sp>
         </mc:Choice>
-        <mc:Fallback>
+        <mc:Fallback xmlns="">
           <p:sp>
             <p:nvSpPr>
               <p:cNvPr id="3" name="Content Placeholder 2">
@@ -8406,8 +8411,8 @@
           </p:sp>
         </mc:Fallback>
       </mc:AlternateContent>
-      <mc:AlternateContent xmlns:mc="http://schemas.openxmlformats.org/markup-compatibility/2006">
-        <mc:Choice xmlns:a14="http://schemas.microsoft.com/office/drawing/2010/main" Requires="a14">
+      <mc:AlternateContent xmlns:mc="http://schemas.openxmlformats.org/markup-compatibility/2006" xmlns:a14="http://schemas.microsoft.com/office/drawing/2010/main">
+        <mc:Choice Requires="a14">
           <p:sp>
             <p:nvSpPr>
               <p:cNvPr id="5" name="TextBox 4">
@@ -8468,7 +8473,7 @@
             </p:txBody>
           </p:sp>
         </mc:Choice>
-        <mc:Fallback>
+        <mc:Fallback xmlns="">
           <p:sp>
             <p:nvSpPr>
               <p:cNvPr id="5" name="TextBox 4">
@@ -8645,8 +8650,8 @@
           </a:p>
         </p:txBody>
       </p:sp>
-      <mc:AlternateContent xmlns:mc="http://schemas.openxmlformats.org/markup-compatibility/2006">
-        <mc:Choice xmlns:a14="http://schemas.microsoft.com/office/drawing/2010/main" Requires="a14">
+      <mc:AlternateContent xmlns:mc="http://schemas.openxmlformats.org/markup-compatibility/2006" xmlns:a14="http://schemas.microsoft.com/office/drawing/2010/main">
+        <mc:Choice Requires="a14">
           <p:sp>
             <p:nvSpPr>
               <p:cNvPr id="3" name="Espaço Reservado para Conteúdo 2">
@@ -9311,19 +9316,7 @@
                           <a:rPr lang="pt-BR" i="1">
                             <a:latin typeface="Cambria Math" panose="02040503050406030204" pitchFamily="18" charset="0"/>
                           </a:rPr>
-                          <m:t>(</m:t>
-                        </m:r>
-                        <m:r>
-                          <a:rPr lang="pt-BR" i="1">
-                            <a:latin typeface="Cambria Math" panose="02040503050406030204" pitchFamily="18" charset="0"/>
-                          </a:rPr>
-                          <m:t>0</m:t>
-                        </m:r>
-                        <m:r>
-                          <a:rPr lang="pt-BR" i="1">
-                            <a:latin typeface="Cambria Math" panose="02040503050406030204" pitchFamily="18" charset="0"/>
-                          </a:rPr>
-                          <m:t>)</m:t>
+                          <m:t>(0)</m:t>
                         </m:r>
                         <m:r>
                           <a:rPr lang="pt-BR" b="1" i="1">
@@ -9491,7 +9484,7 @@
             </p:txBody>
           </p:sp>
         </mc:Choice>
-        <mc:Fallback>
+        <mc:Fallback xmlns="">
           <p:sp>
             <p:nvSpPr>
               <p:cNvPr id="3" name="Espaço Reservado para Conteúdo 2">
@@ -9674,8 +9667,8 @@
           </a:p>
         </p:txBody>
       </p:sp>
-      <mc:AlternateContent xmlns:mc="http://schemas.openxmlformats.org/markup-compatibility/2006">
-        <mc:Choice xmlns:a14="http://schemas.microsoft.com/office/drawing/2010/main" Requires="a14">
+      <mc:AlternateContent xmlns:mc="http://schemas.openxmlformats.org/markup-compatibility/2006" xmlns:a14="http://schemas.microsoft.com/office/drawing/2010/main">
+        <mc:Choice Requires="a14">
           <p:sp>
             <p:nvSpPr>
               <p:cNvPr id="3" name="Content Placeholder 2">
@@ -9854,13 +9847,7 @@
                                     <a:rPr lang="pt-BR" b="1" i="1">
                                       <a:latin typeface="Cambria Math" panose="02040503050406030204" pitchFamily="18" charset="0"/>
                                     </a:rPr>
-                                    <m:t>𝑿</m:t>
-                                  </m:r>
-                                  <m:r>
-                                    <a:rPr lang="pt-BR" b="1" i="1">
-                                      <a:latin typeface="Cambria Math" panose="02040503050406030204" pitchFamily="18" charset="0"/>
-                                    </a:rPr>
-                                    <m:t>𝒂</m:t>
+                                    <m:t>𝑿𝒂</m:t>
                                   </m:r>
                                 </m:e>
                               </m:d>
@@ -9914,7 +9901,7 @@
             </p:txBody>
           </p:sp>
         </mc:Choice>
-        <mc:Fallback>
+        <mc:Fallback xmlns="">
           <p:sp>
             <p:nvSpPr>
               <p:cNvPr id="3" name="Content Placeholder 2">
@@ -10926,8 +10913,8 @@
             </p:nvSpPr>
             <p:spPr>
               <a:xfrm>
-                <a:off x="893787" y="4074825"/>
-                <a:ext cx="1309262" cy="276999"/>
+                <a:off x="841698" y="4084657"/>
+                <a:ext cx="1321837" cy="461665"/>
               </a:xfrm>
               <a:prstGeom prst="rect">
                 <a:avLst/>
@@ -10943,7 +10930,7 @@
                 <a:pPr algn="ctr"/>
                 <a:r>
                   <a:rPr lang="pt-BR" sz="1200" dirty="0"/>
-                  <a:t>Ajuste do modelo</a:t>
+                  <a:t>Ajuste dos pesos do modelo</a:t>
                 </a:r>
               </a:p>
             </p:txBody>
@@ -11015,7 +11002,7 @@
                 <a:pPr algn="ctr"/>
                 <a:r>
                   <a:rPr lang="pt-BR" sz="1200" dirty="0"/>
-                  <a:t>estimativa</a:t>
+                  <a:t>predição</a:t>
                 </a:r>
               </a:p>
             </p:txBody>
@@ -11137,7 +11124,7 @@
           <p:cNvPr id="2" name="Title 1">
             <a:extLst>
               <a:ext uri="{FF2B5EF4-FFF2-40B4-BE49-F238E27FC236}">
-                <a16:creationId xmlns:a16="http://schemas.microsoft.com/office/drawing/2014/main" id="{CED0B404-F3ED-8087-A024-C72B793DE4C8}"/>
+                <a16:creationId xmlns:a16="http://schemas.microsoft.com/office/drawing/2014/main" id="{327CA9BC-BDB8-0017-DAF6-E2CF307E39E9}"/>
               </a:ext>
             </a:extLst>
           </p:cNvPr>
@@ -11153,53 +11140,471 @@
           <a:bodyPr/>
           <a:lstStyle/>
           <a:p>
-            <a:endParaRPr lang="en-US"/>
+            <a:r>
+              <a:rPr lang="pt-BR" dirty="0"/>
+              <a:t>Como encontrar os pesos ótimos?</a:t>
+            </a:r>
+            <a:endParaRPr lang="en-US" dirty="0"/>
           </a:p>
         </p:txBody>
       </p:sp>
-      <p:sp>
-        <p:nvSpPr>
-          <p:cNvPr id="3" name="Content Placeholder 2">
-            <a:extLst>
-              <a:ext uri="{FF2B5EF4-FFF2-40B4-BE49-F238E27FC236}">
-                <a16:creationId xmlns:a16="http://schemas.microsoft.com/office/drawing/2014/main" id="{C6D4684C-15AE-EBFA-CC52-BE2B10624210}"/>
-              </a:ext>
-            </a:extLst>
-          </p:cNvPr>
-          <p:cNvSpPr>
-            <a:spLocks noGrp="1"/>
-          </p:cNvSpPr>
-          <p:nvPr>
-            <p:ph idx="1"/>
-          </p:nvPr>
-        </p:nvSpPr>
-        <p:spPr/>
-        <p:txBody>
-          <a:bodyPr>
-            <a:normAutofit/>
-          </a:bodyPr>
-          <a:lstStyle/>
-          <a:p>
-            <a:r>
-              <a:rPr lang="pt-BR" sz="4800" b="1" dirty="0">
-                <a:solidFill>
-                  <a:srgbClr val="FF0000"/>
-                </a:solidFill>
-              </a:rPr>
-              <a:t>PAREI AQUI!!!!!!!!!!!</a:t>
-            </a:r>
-            <a:endParaRPr lang="en-US" sz="4800" b="1" dirty="0">
-              <a:solidFill>
-                <a:srgbClr val="FF0000"/>
-              </a:solidFill>
-            </a:endParaRPr>
-          </a:p>
-        </p:txBody>
-      </p:sp>
+      <mc:AlternateContent xmlns:mc="http://schemas.openxmlformats.org/markup-compatibility/2006">
+        <mc:Choice xmlns:a14="http://schemas.microsoft.com/office/drawing/2010/main" Requires="a14">
+          <p:sp>
+            <p:nvSpPr>
+              <p:cNvPr id="3" name="Content Placeholder 2">
+                <a:extLst>
+                  <a:ext uri="{FF2B5EF4-FFF2-40B4-BE49-F238E27FC236}">
+                    <a16:creationId xmlns:a16="http://schemas.microsoft.com/office/drawing/2014/main" id="{DE0FC8F8-ADC7-A068-C2BC-465BFAC99DC0}"/>
+                  </a:ext>
+                </a:extLst>
+              </p:cNvPr>
+              <p:cNvSpPr>
+                <a:spLocks noGrp="1"/>
+              </p:cNvSpPr>
+              <p:nvPr>
+                <p:ph idx="1"/>
+              </p:nvPr>
+            </p:nvSpPr>
+            <p:spPr>
+              <a:xfrm>
+                <a:off x="838200" y="1825624"/>
+                <a:ext cx="11190514" cy="5032375"/>
+              </a:xfrm>
+            </p:spPr>
+            <p:txBody>
+              <a:bodyPr/>
+              <a:lstStyle/>
+              <a:p>
+                <a:r>
+                  <a:rPr lang="pt-BR" dirty="0"/>
+                  <a:t>Existem dois caminhos principais para se encontrar o </a:t>
+                </a:r>
+                <a:r>
+                  <a:rPr lang="pt-BR" b="1" dirty="0">
+                    <a:solidFill>
+                      <a:srgbClr val="00B050"/>
+                    </a:solidFill>
+                  </a:rPr>
+                  <a:t>conjunto de pesos ótimo</a:t>
+                </a:r>
+                <a:endParaRPr lang="pt-BR" dirty="0"/>
+              </a:p>
+              <a:p>
+                <a:pPr lvl="1">
+                  <a:buFont typeface="Wingdings" panose="05000000000000000000" pitchFamily="2" charset="2"/>
+                  <a:buChar char="§"/>
+                </a:pPr>
+                <a:r>
+                  <a:rPr lang="en-US" b="1" dirty="0" err="1"/>
+                  <a:t>Equação</a:t>
+                </a:r>
+                <a:r>
+                  <a:rPr lang="en-US" b="1" dirty="0"/>
+                  <a:t> normal</a:t>
+                </a:r>
+              </a:p>
+              <a:p>
+                <a:pPr lvl="2">
+                  <a:buFont typeface="Courier New" panose="02070309020205020404" pitchFamily="49" charset="0"/>
+                  <a:buChar char="o"/>
+                </a:pPr>
+                <a:r>
+                  <a:rPr lang="en-US" dirty="0" err="1"/>
+                  <a:t>Também</a:t>
+                </a:r>
+                <a:r>
+                  <a:rPr lang="en-US" dirty="0"/>
+                  <a:t> </a:t>
+                </a:r>
+                <a:r>
+                  <a:rPr lang="en-US" dirty="0" err="1"/>
+                  <a:t>conhecido</a:t>
+                </a:r>
+                <a:r>
+                  <a:rPr lang="en-US" dirty="0"/>
+                  <a:t> </a:t>
+                </a:r>
+                <a:r>
+                  <a:rPr lang="en-US" dirty="0" err="1"/>
+                  <a:t>como</a:t>
+                </a:r>
+                <a:r>
+                  <a:rPr lang="en-US" dirty="0"/>
+                  <a:t> </a:t>
+                </a:r>
+                <a:r>
+                  <a:rPr lang="en-US" dirty="0" err="1"/>
+                  <a:t>método</a:t>
+                </a:r>
+                <a:r>
+                  <a:rPr lang="en-US" dirty="0"/>
+                  <a:t> dos </a:t>
+                </a:r>
+                <a:r>
+                  <a:rPr lang="en-US" dirty="0" err="1"/>
+                  <a:t>mínimos</a:t>
+                </a:r>
+                <a:r>
+                  <a:rPr lang="en-US" dirty="0"/>
+                  <a:t> </a:t>
+                </a:r>
+                <a:r>
+                  <a:rPr lang="en-US" dirty="0" err="1"/>
+                  <a:t>quadrados</a:t>
+                </a:r>
+                <a:r>
+                  <a:rPr lang="en-US" dirty="0"/>
+                  <a:t> </a:t>
+                </a:r>
+                <a:r>
+                  <a:rPr lang="en-US" dirty="0" err="1"/>
+                  <a:t>ordinários</a:t>
+                </a:r>
+                <a:r>
+                  <a:rPr lang="en-US" dirty="0"/>
+                  <a:t>.</a:t>
+                </a:r>
+              </a:p>
+              <a:p>
+                <a:pPr lvl="2">
+                  <a:buFont typeface="Courier New" panose="02070309020205020404" pitchFamily="49" charset="0"/>
+                  <a:buChar char="o"/>
+                </a:pPr>
+                <a:r>
+                  <a:rPr lang="en-US" dirty="0"/>
+                  <a:t>É </a:t>
+                </a:r>
+                <a:r>
+                  <a:rPr lang="en-US" dirty="0" err="1"/>
+                  <a:t>uma</a:t>
+                </a:r>
+                <a:r>
+                  <a:rPr lang="en-US" dirty="0"/>
+                  <a:t> </a:t>
+                </a:r>
+                <a:r>
+                  <a:rPr lang="en-US" dirty="0" err="1"/>
+                  <a:t>solução</a:t>
+                </a:r>
+                <a:r>
+                  <a:rPr lang="en-US" dirty="0"/>
+                  <a:t> </a:t>
+                </a:r>
+                <a:r>
+                  <a:rPr lang="en-US" dirty="0" err="1"/>
+                  <a:t>analítica</a:t>
+                </a:r>
+                <a:r>
+                  <a:rPr lang="en-US" dirty="0"/>
+                  <a:t>.</a:t>
+                </a:r>
+                <a:endParaRPr lang="pt-BR" dirty="0"/>
+              </a:p>
+              <a:p>
+                <a:pPr lvl="2">
+                  <a:buFont typeface="Courier New" panose="02070309020205020404" pitchFamily="49" charset="0"/>
+                  <a:buChar char="o"/>
+                </a:pPr>
+                <a:r>
+                  <a:rPr lang="pt-BR" dirty="0"/>
+                  <a:t>É uma abordagem puramente algébrica, resultando em uma equação fechada.</a:t>
+                </a:r>
+              </a:p>
+              <a:p>
+                <a:pPr marL="914400" lvl="2" indent="0">
+                  <a:buNone/>
+                </a:pPr>
+                <a14:m>
+                  <m:oMathPara xmlns:m="http://schemas.openxmlformats.org/officeDocument/2006/math">
+                    <m:oMathParaPr>
+                      <m:jc m:val="center"/>
+                    </m:oMathParaPr>
+                    <m:oMath xmlns:m="http://schemas.openxmlformats.org/officeDocument/2006/math">
+                      <m:sSub>
+                        <m:sSubPr>
+                          <m:ctrlPr>
+                            <a:rPr lang="pt-BR" b="1" i="1">
+                              <a:latin typeface="Cambria Math" panose="02040503050406030204" pitchFamily="18" charset="0"/>
+                            </a:rPr>
+                          </m:ctrlPr>
+                        </m:sSubPr>
+                        <m:e>
+                          <m:r>
+                            <a:rPr lang="pt-BR" b="1" i="1">
+                              <a:latin typeface="Cambria Math" panose="02040503050406030204" pitchFamily="18" charset="0"/>
+                            </a:rPr>
+                            <m:t>𝒂</m:t>
+                          </m:r>
+                        </m:e>
+                        <m:sub>
+                          <m:r>
+                            <m:rPr>
+                              <m:sty m:val="p"/>
+                            </m:rPr>
+                            <a:rPr lang="pt-BR">
+                              <a:latin typeface="Cambria Math" panose="02040503050406030204" pitchFamily="18" charset="0"/>
+                            </a:rPr>
+                            <m:t>opt</m:t>
+                          </m:r>
+                        </m:sub>
+                      </m:sSub>
+                      <m:r>
+                        <a:rPr lang="pt-BR" b="1" i="1">
+                          <a:latin typeface="Cambria Math" panose="02040503050406030204" pitchFamily="18" charset="0"/>
+                        </a:rPr>
+                        <m:t> </m:t>
+                      </m:r>
+                      <m:r>
+                        <a:rPr lang="pt-BR">
+                          <a:latin typeface="Cambria Math" panose="02040503050406030204" pitchFamily="18" charset="0"/>
+                        </a:rPr>
+                        <m:t>=</m:t>
+                      </m:r>
+                      <m:sSup>
+                        <m:sSupPr>
+                          <m:ctrlPr>
+                            <a:rPr lang="pt-BR" i="1">
+                              <a:latin typeface="Cambria Math" panose="02040503050406030204" pitchFamily="18" charset="0"/>
+                            </a:rPr>
+                          </m:ctrlPr>
+                        </m:sSupPr>
+                        <m:e>
+                          <m:d>
+                            <m:dPr>
+                              <m:ctrlPr>
+                                <a:rPr lang="pt-BR" i="1">
+                                  <a:latin typeface="Cambria Math" panose="02040503050406030204" pitchFamily="18" charset="0"/>
+                                </a:rPr>
+                              </m:ctrlPr>
+                            </m:dPr>
+                            <m:e>
+                              <m:sSup>
+                                <m:sSupPr>
+                                  <m:ctrlPr>
+                                    <a:rPr lang="pt-BR" i="1">
+                                      <a:latin typeface="Cambria Math" panose="02040503050406030204" pitchFamily="18" charset="0"/>
+                                    </a:rPr>
+                                  </m:ctrlPr>
+                                </m:sSupPr>
+                                <m:e>
+                                  <m:r>
+                                    <a:rPr lang="pt-BR" b="1" i="1">
+                                      <a:latin typeface="Cambria Math" panose="02040503050406030204" pitchFamily="18" charset="0"/>
+                                    </a:rPr>
+                                    <m:t>𝑿</m:t>
+                                  </m:r>
+                                </m:e>
+                                <m:sup>
+                                  <m:r>
+                                    <a:rPr lang="pt-BR" i="1">
+                                      <a:latin typeface="Cambria Math" panose="02040503050406030204" pitchFamily="18" charset="0"/>
+                                    </a:rPr>
+                                    <m:t>𝑇</m:t>
+                                  </m:r>
+                                </m:sup>
+                              </m:sSup>
+                              <m:r>
+                                <a:rPr lang="pt-BR" b="1" i="1">
+                                  <a:latin typeface="Cambria Math" panose="02040503050406030204" pitchFamily="18" charset="0"/>
+                                </a:rPr>
+                                <m:t>𝑿</m:t>
+                              </m:r>
+                            </m:e>
+                          </m:d>
+                        </m:e>
+                        <m:sup>
+                          <m:r>
+                            <a:rPr lang="pt-BR" i="1">
+                              <a:latin typeface="Cambria Math" panose="02040503050406030204" pitchFamily="18" charset="0"/>
+                            </a:rPr>
+                            <m:t>−1</m:t>
+                          </m:r>
+                        </m:sup>
+                      </m:sSup>
+                      <m:sSup>
+                        <m:sSupPr>
+                          <m:ctrlPr>
+                            <a:rPr lang="pt-BR" i="1">
+                              <a:latin typeface="Cambria Math" panose="02040503050406030204" pitchFamily="18" charset="0"/>
+                            </a:rPr>
+                          </m:ctrlPr>
+                        </m:sSupPr>
+                        <m:e>
+                          <m:r>
+                            <a:rPr lang="pt-BR" i="1">
+                              <a:latin typeface="Cambria Math" panose="02040503050406030204" pitchFamily="18" charset="0"/>
+                            </a:rPr>
+                            <m:t> </m:t>
+                          </m:r>
+                          <m:r>
+                            <a:rPr lang="pt-BR" b="1" i="1">
+                              <a:latin typeface="Cambria Math" panose="02040503050406030204" pitchFamily="18" charset="0"/>
+                            </a:rPr>
+                            <m:t>𝑿</m:t>
+                          </m:r>
+                        </m:e>
+                        <m:sup>
+                          <m:r>
+                            <a:rPr lang="pt-BR" i="1">
+                              <a:latin typeface="Cambria Math" panose="02040503050406030204" pitchFamily="18" charset="0"/>
+                            </a:rPr>
+                            <m:t>𝑇</m:t>
+                          </m:r>
+                        </m:sup>
+                      </m:sSup>
+                      <m:r>
+                        <a:rPr lang="pt-BR" b="1" i="1">
+                          <a:latin typeface="Cambria Math" panose="02040503050406030204" pitchFamily="18" charset="0"/>
+                        </a:rPr>
+                        <m:t>𝒚</m:t>
+                      </m:r>
+                    </m:oMath>
+                  </m:oMathPara>
+                </a14:m>
+                <a:endParaRPr lang="pt-BR" dirty="0"/>
+              </a:p>
+              <a:p>
+                <a:pPr lvl="2">
+                  <a:buFont typeface="Courier New" panose="02070309020205020404" pitchFamily="49" charset="0"/>
+                  <a:buChar char="o"/>
+                </a:pPr>
+                <a:r>
+                  <a:rPr lang="pt-BR" dirty="0"/>
+                  <a:t>Encontra a solução ótima de uma única vez.</a:t>
+                </a:r>
+              </a:p>
+              <a:p>
+                <a:pPr lvl="1">
+                  <a:buFont typeface="Wingdings" panose="05000000000000000000" pitchFamily="2" charset="2"/>
+                  <a:buChar char="§"/>
+                </a:pPr>
+                <a:r>
+                  <a:rPr lang="en-US" b="1" dirty="0" err="1"/>
+                  <a:t>Gradiente</a:t>
+                </a:r>
+                <a:r>
+                  <a:rPr lang="en-US" b="1" dirty="0"/>
+                  <a:t> </a:t>
+                </a:r>
+                <a:r>
+                  <a:rPr lang="en-US" b="1" dirty="0" err="1"/>
+                  <a:t>descendente</a:t>
+                </a:r>
+                <a:endParaRPr lang="en-US" b="1" dirty="0"/>
+              </a:p>
+              <a:p>
+                <a:pPr lvl="2">
+                  <a:buFont typeface="Courier New" panose="02070309020205020404" pitchFamily="49" charset="0"/>
+                  <a:buChar char="o"/>
+                </a:pPr>
+                <a:r>
+                  <a:rPr lang="en-US" dirty="0"/>
+                  <a:t>É </a:t>
+                </a:r>
+                <a:r>
+                  <a:rPr lang="en-US" dirty="0" err="1"/>
+                  <a:t>uma</a:t>
+                </a:r>
+                <a:r>
+                  <a:rPr lang="en-US" dirty="0"/>
+                  <a:t> </a:t>
+                </a:r>
+                <a:r>
+                  <a:rPr lang="en-US" dirty="0" err="1"/>
+                  <a:t>otimização</a:t>
+                </a:r>
+                <a:r>
+                  <a:rPr lang="en-US" dirty="0"/>
+                  <a:t> </a:t>
+                </a:r>
+                <a:r>
+                  <a:rPr lang="en-US" dirty="0" err="1"/>
+                  <a:t>iterativa</a:t>
+                </a:r>
+                <a:r>
+                  <a:rPr lang="en-US" dirty="0"/>
+                  <a:t>.</a:t>
+                </a:r>
+                <a:endParaRPr lang="pt-BR" dirty="0"/>
+              </a:p>
+              <a:p>
+                <a:pPr lvl="2">
+                  <a:buFont typeface="Courier New" panose="02070309020205020404" pitchFamily="49" charset="0"/>
+                  <a:buChar char="o"/>
+                </a:pPr>
+                <a:r>
+                  <a:rPr lang="pt-BR" dirty="0"/>
+                  <a:t>O modelo aprende os pesos "passo a passo".</a:t>
+                </a:r>
+              </a:p>
+              <a:p>
+                <a:pPr lvl="2">
+                  <a:buFont typeface="Courier New" panose="02070309020205020404" pitchFamily="49" charset="0"/>
+                  <a:buChar char="o"/>
+                </a:pPr>
+                <a:r>
+                  <a:rPr lang="pt-BR" dirty="0"/>
+                  <a:t>Pode não encontrar a solução ótima, devido a vários fatores (e.g., passo de aprendizagem, sobreajuste/subajuste, número de iterações, etc.)</a:t>
+                </a:r>
+              </a:p>
+              <a:p>
+                <a:pPr marL="914400" lvl="2" indent="0">
+                  <a:buNone/>
+                </a:pPr>
+                <a:endParaRPr lang="en-US" b="1" dirty="0"/>
+              </a:p>
+            </p:txBody>
+          </p:sp>
+        </mc:Choice>
+        <mc:Fallback>
+          <p:sp>
+            <p:nvSpPr>
+              <p:cNvPr id="3" name="Content Placeholder 2">
+                <a:extLst>
+                  <a:ext uri="{FF2B5EF4-FFF2-40B4-BE49-F238E27FC236}">
+                    <a16:creationId xmlns:a16="http://schemas.microsoft.com/office/drawing/2014/main" id="{DE0FC8F8-ADC7-A068-C2BC-465BFAC99DC0}"/>
+                  </a:ext>
+                </a:extLst>
+              </p:cNvPr>
+              <p:cNvSpPr>
+                <a:spLocks noGrp="1" noRot="1" noChangeAspect="1" noMove="1" noResize="1" noEditPoints="1" noAdjustHandles="1" noChangeArrowheads="1" noChangeShapeType="1" noTextEdit="1"/>
+              </p:cNvSpPr>
+              <p:nvPr>
+                <p:ph idx="1"/>
+              </p:nvPr>
+            </p:nvSpPr>
+            <p:spPr>
+              <a:xfrm>
+                <a:off x="838200" y="1825624"/>
+                <a:ext cx="11190514" cy="5032375"/>
+              </a:xfrm>
+              <a:blipFill>
+                <a:blip r:embed="rId2"/>
+                <a:stretch>
+                  <a:fillRect l="-981" t="-1937"/>
+                </a:stretch>
+              </a:blipFill>
+            </p:spPr>
+            <p:txBody>
+              <a:bodyPr/>
+              <a:lstStyle/>
+              <a:p>
+                <a:r>
+                  <a:rPr lang="en-US">
+                    <a:noFill/>
+                  </a:rPr>
+                  <a:t> </a:t>
+                </a:r>
+              </a:p>
+            </p:txBody>
+          </p:sp>
+        </mc:Fallback>
+      </mc:AlternateContent>
     </p:spTree>
     <p:extLst>
       <p:ext uri="{BB962C8B-B14F-4D97-AF65-F5344CB8AC3E}">
-        <p14:creationId xmlns:p14="http://schemas.microsoft.com/office/powerpoint/2010/main" val="956125625"/>
+        <p14:creationId xmlns:p14="http://schemas.microsoft.com/office/powerpoint/2010/main" val="3306137314"/>
       </p:ext>
     </p:extLst>
   </p:cSld>
@@ -11231,7 +11636,7 @@
           <p:cNvPr id="2" name="Title 1">
             <a:extLst>
               <a:ext uri="{FF2B5EF4-FFF2-40B4-BE49-F238E27FC236}">
-                <a16:creationId xmlns:a16="http://schemas.microsoft.com/office/drawing/2014/main" id="{327CA9BC-BDB8-0017-DAF6-E2CF307E39E9}"/>
+                <a16:creationId xmlns:a16="http://schemas.microsoft.com/office/drawing/2014/main" id="{BD8226F9-1BF6-0C19-88C6-7B4563BEBDBC}"/>
               </a:ext>
             </a:extLst>
           </p:cNvPr>
@@ -11247,86 +11652,3071 @@
           <a:bodyPr/>
           <a:lstStyle/>
           <a:p>
-            <a:endParaRPr lang="en-US"/>
+            <a:r>
+              <a:rPr lang="pt-BR" noProof="0" dirty="0"/>
+              <a:t>Comparativo das abordagens</a:t>
+            </a:r>
           </a:p>
         </p:txBody>
       </p:sp>
-      <p:sp>
-        <p:nvSpPr>
-          <p:cNvPr id="3" name="Content Placeholder 2">
-            <a:extLst>
-              <a:ext uri="{FF2B5EF4-FFF2-40B4-BE49-F238E27FC236}">
-                <a16:creationId xmlns:a16="http://schemas.microsoft.com/office/drawing/2014/main" id="{DE0FC8F8-ADC7-A068-C2BC-465BFAC99DC0}"/>
-              </a:ext>
-            </a:extLst>
-          </p:cNvPr>
-          <p:cNvSpPr>
-            <a:spLocks noGrp="1"/>
-          </p:cNvSpPr>
-          <p:nvPr>
-            <p:ph idx="1"/>
-          </p:nvPr>
-        </p:nvSpPr>
-        <p:spPr/>
-        <p:txBody>
-          <a:bodyPr/>
-          <a:lstStyle/>
-          <a:p>
-            <a:r>
-              <a:rPr lang="pt-BR"/>
-              <a:t>Existem duas formas </a:t>
-            </a:r>
-            <a:r>
-              <a:rPr lang="pt-BR" dirty="0"/>
-              <a:t>de se encontrar o </a:t>
-            </a:r>
-            <a:r>
-              <a:rPr lang="pt-BR" b="1" dirty="0">
-                <a:solidFill>
-                  <a:srgbClr val="00B050"/>
-                </a:solidFill>
-              </a:rPr>
-              <a:t>conjunto de pesos ótimo </a:t>
-            </a:r>
-            <a:r>
-              <a:rPr lang="pt-BR" dirty="0"/>
-              <a:t>através da </a:t>
-            </a:r>
-            <a:r>
-              <a:rPr lang="pt-BR" b="1" dirty="0">
-                <a:solidFill>
-                  <a:srgbClr val="7030A0"/>
-                </a:solidFill>
-              </a:rPr>
-              <a:t>minimização da função </a:t>
-            </a:r>
-            <a:r>
-              <a:rPr lang="pt-BR" b="1">
-                <a:solidFill>
-                  <a:srgbClr val="7030A0"/>
-                </a:solidFill>
-              </a:rPr>
-              <a:t>de erro</a:t>
-            </a:r>
-            <a:endParaRPr lang="pt-BR" b="1" dirty="0">
-              <a:solidFill>
-                <a:srgbClr val="7030A0"/>
-              </a:solidFill>
-            </a:endParaRPr>
-          </a:p>
-          <a:p>
-            <a:pPr lvl="1"/>
-            <a:endParaRPr lang="pt-BR" dirty="0"/>
-          </a:p>
-          <a:p>
-            <a:endParaRPr lang="en-US" dirty="0"/>
-          </a:p>
-        </p:txBody>
-      </p:sp>
+      <mc:AlternateContent xmlns:mc="http://schemas.openxmlformats.org/markup-compatibility/2006">
+        <mc:Choice xmlns:a14="http://schemas.microsoft.com/office/drawing/2010/main" Requires="a14">
+          <p:graphicFrame>
+            <p:nvGraphicFramePr>
+              <p:cNvPr id="4" name="Content Placeholder 3">
+                <a:extLst>
+                  <a:ext uri="{FF2B5EF4-FFF2-40B4-BE49-F238E27FC236}">
+                    <a16:creationId xmlns:a16="http://schemas.microsoft.com/office/drawing/2014/main" id="{9F89DE01-7C6C-8A47-35FC-16E58BA14EAA}"/>
+                  </a:ext>
+                </a:extLst>
+              </p:cNvPr>
+              <p:cNvGraphicFramePr>
+                <a:graphicFrameLocks noGrp="1"/>
+              </p:cNvGraphicFramePr>
+              <p:nvPr>
+                <p:ph idx="1"/>
+                <p:extLst>
+                  <p:ext uri="{D42A27DB-BD31-4B8C-83A1-F6EECF244321}">
+                    <p14:modId xmlns:p14="http://schemas.microsoft.com/office/powerpoint/2010/main" val="4230852870"/>
+                  </p:ext>
+                </p:extLst>
+              </p:nvPr>
+            </p:nvGraphicFramePr>
+            <p:xfrm>
+              <a:off x="241041" y="1690688"/>
+              <a:ext cx="11709918" cy="3992880"/>
+            </p:xfrm>
+            <a:graphic>
+              <a:graphicData uri="http://schemas.openxmlformats.org/drawingml/2006/table">
+                <a:tbl>
+                  <a:tblPr/>
+                  <a:tblGrid>
+                    <a:gridCol w="2008663">
+                      <a:extLst>
+                        <a:ext uri="{9D8B030D-6E8A-4147-A177-3AD203B41FA5}">
+                          <a16:colId xmlns:a16="http://schemas.microsoft.com/office/drawing/2014/main" val="2676689337"/>
+                        </a:ext>
+                      </a:extLst>
+                    </a:gridCol>
+                    <a:gridCol w="4742847">
+                      <a:extLst>
+                        <a:ext uri="{9D8B030D-6E8A-4147-A177-3AD203B41FA5}">
+                          <a16:colId xmlns:a16="http://schemas.microsoft.com/office/drawing/2014/main" val="921422884"/>
+                        </a:ext>
+                      </a:extLst>
+                    </a:gridCol>
+                    <a:gridCol w="4958408">
+                      <a:extLst>
+                        <a:ext uri="{9D8B030D-6E8A-4147-A177-3AD203B41FA5}">
+                          <a16:colId xmlns:a16="http://schemas.microsoft.com/office/drawing/2014/main" val="4252031962"/>
+                        </a:ext>
+                      </a:extLst>
+                    </a:gridCol>
+                  </a:tblGrid>
+                  <a:tr h="0">
+                    <a:tc>
+                      <a:txBody>
+                        <a:bodyPr/>
+                        <a:lstStyle/>
+                        <a:p>
+                          <a:pPr algn="ctr">
+                            <a:buNone/>
+                          </a:pPr>
+                          <a:r>
+                            <a:rPr lang="pt-BR" sz="2000" b="1" noProof="0" dirty="0">
+                              <a:latin typeface="+mn-lt"/>
+                            </a:rPr>
+                            <a:t>Característica</a:t>
+                          </a:r>
+                        </a:p>
+                      </a:txBody>
+                      <a:tcPr anchor="ctr">
+                        <a:lnL w="12700" cap="flat" cmpd="sng" algn="ctr">
+                          <a:solidFill>
+                            <a:schemeClr val="tx1"/>
+                          </a:solidFill>
+                          <a:prstDash val="solid"/>
+                          <a:round/>
+                          <a:headEnd type="none" w="med" len="med"/>
+                          <a:tailEnd type="none" w="med" len="med"/>
+                        </a:lnL>
+                        <a:lnR w="12700" cap="flat" cmpd="sng" algn="ctr">
+                          <a:solidFill>
+                            <a:schemeClr val="tx1"/>
+                          </a:solidFill>
+                          <a:prstDash val="solid"/>
+                          <a:round/>
+                          <a:headEnd type="none" w="med" len="med"/>
+                          <a:tailEnd type="none" w="med" len="med"/>
+                        </a:lnR>
+                        <a:lnT w="12700" cap="flat" cmpd="sng" algn="ctr">
+                          <a:solidFill>
+                            <a:schemeClr val="tx1"/>
+                          </a:solidFill>
+                          <a:prstDash val="solid"/>
+                          <a:round/>
+                          <a:headEnd type="none" w="med" len="med"/>
+                          <a:tailEnd type="none" w="med" len="med"/>
+                        </a:lnT>
+                        <a:lnB w="12700" cap="flat" cmpd="sng" algn="ctr">
+                          <a:solidFill>
+                            <a:schemeClr val="tx1"/>
+                          </a:solidFill>
+                          <a:prstDash val="solid"/>
+                          <a:round/>
+                          <a:headEnd type="none" w="med" len="med"/>
+                          <a:tailEnd type="none" w="med" len="med"/>
+                        </a:lnB>
+                        <a:noFill/>
+                      </a:tcPr>
+                    </a:tc>
+                    <a:tc>
+                      <a:txBody>
+                        <a:bodyPr/>
+                        <a:lstStyle/>
+                        <a:p>
+                          <a:pPr algn="ctr">
+                            <a:buNone/>
+                          </a:pPr>
+                          <a:r>
+                            <a:rPr lang="pt-BR" sz="2000" b="1" noProof="0" dirty="0">
+                              <a:latin typeface="+mn-lt"/>
+                            </a:rPr>
+                            <a:t>Gradiente descendente</a:t>
+                          </a:r>
+                        </a:p>
+                      </a:txBody>
+                      <a:tcPr anchor="ctr">
+                        <a:lnL w="12700" cap="flat" cmpd="sng" algn="ctr">
+                          <a:solidFill>
+                            <a:schemeClr val="tx1"/>
+                          </a:solidFill>
+                          <a:prstDash val="solid"/>
+                          <a:round/>
+                          <a:headEnd type="none" w="med" len="med"/>
+                          <a:tailEnd type="none" w="med" len="med"/>
+                        </a:lnL>
+                        <a:lnR w="12700" cap="flat" cmpd="sng" algn="ctr">
+                          <a:solidFill>
+                            <a:schemeClr val="tx1"/>
+                          </a:solidFill>
+                          <a:prstDash val="solid"/>
+                          <a:round/>
+                          <a:headEnd type="none" w="med" len="med"/>
+                          <a:tailEnd type="none" w="med" len="med"/>
+                        </a:lnR>
+                        <a:lnT w="12700" cap="flat" cmpd="sng" algn="ctr">
+                          <a:solidFill>
+                            <a:schemeClr val="tx1"/>
+                          </a:solidFill>
+                          <a:prstDash val="solid"/>
+                          <a:round/>
+                          <a:headEnd type="none" w="med" len="med"/>
+                          <a:tailEnd type="none" w="med" len="med"/>
+                        </a:lnT>
+                        <a:lnB w="12700" cap="flat" cmpd="sng" algn="ctr">
+                          <a:solidFill>
+                            <a:schemeClr val="tx1"/>
+                          </a:solidFill>
+                          <a:prstDash val="solid"/>
+                          <a:round/>
+                          <a:headEnd type="none" w="med" len="med"/>
+                          <a:tailEnd type="none" w="med" len="med"/>
+                        </a:lnB>
+                        <a:noFill/>
+                      </a:tcPr>
+                    </a:tc>
+                    <a:tc>
+                      <a:txBody>
+                        <a:bodyPr/>
+                        <a:lstStyle/>
+                        <a:p>
+                          <a:pPr algn="ctr">
+                            <a:buNone/>
+                          </a:pPr>
+                          <a:r>
+                            <a:rPr lang="pt-BR" sz="2000" b="1" noProof="0" dirty="0">
+                              <a:latin typeface="+mn-lt"/>
+                            </a:rPr>
+                            <a:t>Equação normal</a:t>
+                          </a:r>
+                        </a:p>
+                      </a:txBody>
+                      <a:tcPr anchor="ctr">
+                        <a:lnL w="12700" cap="flat" cmpd="sng" algn="ctr">
+                          <a:solidFill>
+                            <a:schemeClr val="tx1"/>
+                          </a:solidFill>
+                          <a:prstDash val="solid"/>
+                          <a:round/>
+                          <a:headEnd type="none" w="med" len="med"/>
+                          <a:tailEnd type="none" w="med" len="med"/>
+                        </a:lnL>
+                        <a:lnR w="12700" cap="flat" cmpd="sng" algn="ctr">
+                          <a:solidFill>
+                            <a:schemeClr val="tx1"/>
+                          </a:solidFill>
+                          <a:prstDash val="solid"/>
+                          <a:round/>
+                          <a:headEnd type="none" w="med" len="med"/>
+                          <a:tailEnd type="none" w="med" len="med"/>
+                        </a:lnR>
+                        <a:lnT w="12700" cap="flat" cmpd="sng" algn="ctr">
+                          <a:solidFill>
+                            <a:schemeClr val="tx1"/>
+                          </a:solidFill>
+                          <a:prstDash val="solid"/>
+                          <a:round/>
+                          <a:headEnd type="none" w="med" len="med"/>
+                          <a:tailEnd type="none" w="med" len="med"/>
+                        </a:lnT>
+                        <a:lnB w="12700" cap="flat" cmpd="sng" algn="ctr">
+                          <a:solidFill>
+                            <a:schemeClr val="tx1"/>
+                          </a:solidFill>
+                          <a:prstDash val="solid"/>
+                          <a:round/>
+                          <a:headEnd type="none" w="med" len="med"/>
+                          <a:tailEnd type="none" w="med" len="med"/>
+                        </a:lnB>
+                        <a:noFill/>
+                      </a:tcPr>
+                    </a:tc>
+                    <a:extLst>
+                      <a:ext uri="{0D108BD9-81ED-4DB2-BD59-A6C34878D82A}">
+                        <a16:rowId xmlns:a16="http://schemas.microsoft.com/office/drawing/2014/main" val="1904083088"/>
+                      </a:ext>
+                    </a:extLst>
+                  </a:tr>
+                  <a:tr h="0">
+                    <a:tc>
+                      <a:txBody>
+                        <a:bodyPr/>
+                        <a:lstStyle/>
+                        <a:p>
+                          <a:pPr algn="ctr">
+                            <a:buNone/>
+                          </a:pPr>
+                          <a:r>
+                            <a:rPr lang="pt-BR" sz="2000" b="1" noProof="0" dirty="0">
+                              <a:latin typeface="+mn-lt"/>
+                            </a:rPr>
+                            <a:t>Tipo</a:t>
+                          </a:r>
+                          <a:endParaRPr lang="pt-BR" sz="2000" noProof="0" dirty="0">
+                            <a:latin typeface="+mn-lt"/>
+                          </a:endParaRPr>
+                        </a:p>
+                      </a:txBody>
+                      <a:tcPr anchor="ctr">
+                        <a:lnL w="12700" cap="flat" cmpd="sng" algn="ctr">
+                          <a:solidFill>
+                            <a:schemeClr val="tx1"/>
+                          </a:solidFill>
+                          <a:prstDash val="solid"/>
+                          <a:round/>
+                          <a:headEnd type="none" w="med" len="med"/>
+                          <a:tailEnd type="none" w="med" len="med"/>
+                        </a:lnL>
+                        <a:lnR w="12700" cap="flat" cmpd="sng" algn="ctr">
+                          <a:solidFill>
+                            <a:schemeClr val="tx1"/>
+                          </a:solidFill>
+                          <a:prstDash val="solid"/>
+                          <a:round/>
+                          <a:headEnd type="none" w="med" len="med"/>
+                          <a:tailEnd type="none" w="med" len="med"/>
+                        </a:lnR>
+                        <a:lnT w="12700" cap="flat" cmpd="sng" algn="ctr">
+                          <a:solidFill>
+                            <a:schemeClr val="tx1"/>
+                          </a:solidFill>
+                          <a:prstDash val="solid"/>
+                          <a:round/>
+                          <a:headEnd type="none" w="med" len="med"/>
+                          <a:tailEnd type="none" w="med" len="med"/>
+                        </a:lnT>
+                        <a:lnB w="12700" cap="flat" cmpd="sng" algn="ctr">
+                          <a:solidFill>
+                            <a:schemeClr val="tx1"/>
+                          </a:solidFill>
+                          <a:prstDash val="solid"/>
+                          <a:round/>
+                          <a:headEnd type="none" w="med" len="med"/>
+                          <a:tailEnd type="none" w="med" len="med"/>
+                        </a:lnB>
+                        <a:noFill/>
+                      </a:tcPr>
+                    </a:tc>
+                    <a:tc>
+                      <a:txBody>
+                        <a:bodyPr/>
+                        <a:lstStyle/>
+                        <a:p>
+                          <a:pPr algn="ctr">
+                            <a:buNone/>
+                          </a:pPr>
+                          <a:r>
+                            <a:rPr lang="pt-BR" sz="2000" noProof="0" dirty="0">
+                              <a:latin typeface="+mn-lt"/>
+                            </a:rPr>
+                            <a:t>Algorítmico/Iterativo</a:t>
+                          </a:r>
+                        </a:p>
+                      </a:txBody>
+                      <a:tcPr anchor="ctr">
+                        <a:lnL w="12700" cap="flat" cmpd="sng" algn="ctr">
+                          <a:solidFill>
+                            <a:schemeClr val="tx1"/>
+                          </a:solidFill>
+                          <a:prstDash val="solid"/>
+                          <a:round/>
+                          <a:headEnd type="none" w="med" len="med"/>
+                          <a:tailEnd type="none" w="med" len="med"/>
+                        </a:lnL>
+                        <a:lnR w="12700" cap="flat" cmpd="sng" algn="ctr">
+                          <a:solidFill>
+                            <a:schemeClr val="tx1"/>
+                          </a:solidFill>
+                          <a:prstDash val="solid"/>
+                          <a:round/>
+                          <a:headEnd type="none" w="med" len="med"/>
+                          <a:tailEnd type="none" w="med" len="med"/>
+                        </a:lnR>
+                        <a:lnT w="12700" cap="flat" cmpd="sng" algn="ctr">
+                          <a:solidFill>
+                            <a:schemeClr val="tx1"/>
+                          </a:solidFill>
+                          <a:prstDash val="solid"/>
+                          <a:round/>
+                          <a:headEnd type="none" w="med" len="med"/>
+                          <a:tailEnd type="none" w="med" len="med"/>
+                        </a:lnT>
+                        <a:lnB w="12700" cap="flat" cmpd="sng" algn="ctr">
+                          <a:solidFill>
+                            <a:schemeClr val="tx1"/>
+                          </a:solidFill>
+                          <a:prstDash val="solid"/>
+                          <a:round/>
+                          <a:headEnd type="none" w="med" len="med"/>
+                          <a:tailEnd type="none" w="med" len="med"/>
+                        </a:lnB>
+                        <a:noFill/>
+                      </a:tcPr>
+                    </a:tc>
+                    <a:tc>
+                      <a:txBody>
+                        <a:bodyPr/>
+                        <a:lstStyle/>
+                        <a:p>
+                          <a:pPr algn="ctr">
+                            <a:buNone/>
+                          </a:pPr>
+                          <a:r>
+                            <a:rPr lang="pt-BR" sz="2000" noProof="0" dirty="0">
+                              <a:latin typeface="+mn-lt"/>
+                            </a:rPr>
+                            <a:t>Analítico/Direto</a:t>
+                          </a:r>
+                        </a:p>
+                      </a:txBody>
+                      <a:tcPr anchor="ctr">
+                        <a:lnL w="12700" cap="flat" cmpd="sng" algn="ctr">
+                          <a:solidFill>
+                            <a:schemeClr val="tx1"/>
+                          </a:solidFill>
+                          <a:prstDash val="solid"/>
+                          <a:round/>
+                          <a:headEnd type="none" w="med" len="med"/>
+                          <a:tailEnd type="none" w="med" len="med"/>
+                        </a:lnL>
+                        <a:lnR w="12700" cap="flat" cmpd="sng" algn="ctr">
+                          <a:solidFill>
+                            <a:schemeClr val="tx1"/>
+                          </a:solidFill>
+                          <a:prstDash val="solid"/>
+                          <a:round/>
+                          <a:headEnd type="none" w="med" len="med"/>
+                          <a:tailEnd type="none" w="med" len="med"/>
+                        </a:lnR>
+                        <a:lnT w="12700" cap="flat" cmpd="sng" algn="ctr">
+                          <a:solidFill>
+                            <a:schemeClr val="tx1"/>
+                          </a:solidFill>
+                          <a:prstDash val="solid"/>
+                          <a:round/>
+                          <a:headEnd type="none" w="med" len="med"/>
+                          <a:tailEnd type="none" w="med" len="med"/>
+                        </a:lnT>
+                        <a:lnB w="12700" cap="flat" cmpd="sng" algn="ctr">
+                          <a:solidFill>
+                            <a:schemeClr val="tx1"/>
+                          </a:solidFill>
+                          <a:prstDash val="solid"/>
+                          <a:round/>
+                          <a:headEnd type="none" w="med" len="med"/>
+                          <a:tailEnd type="none" w="med" len="med"/>
+                        </a:lnB>
+                        <a:noFill/>
+                      </a:tcPr>
+                    </a:tc>
+                    <a:extLst>
+                      <a:ext uri="{0D108BD9-81ED-4DB2-BD59-A6C34878D82A}">
+                        <a16:rowId xmlns:a16="http://schemas.microsoft.com/office/drawing/2014/main" val="2085415063"/>
+                      </a:ext>
+                    </a:extLst>
+                  </a:tr>
+                  <a:tr h="0">
+                    <a:tc>
+                      <a:txBody>
+                        <a:bodyPr/>
+                        <a:lstStyle/>
+                        <a:p>
+                          <a:pPr algn="ctr">
+                            <a:buNone/>
+                          </a:pPr>
+                          <a:r>
+                            <a:rPr lang="pt-BR" sz="2000" b="1" noProof="0" dirty="0">
+                              <a:latin typeface="+mn-lt"/>
+                            </a:rPr>
+                            <a:t>Complexidade</a:t>
+                          </a:r>
+                          <a:endParaRPr lang="pt-BR" sz="2000" noProof="0" dirty="0">
+                            <a:latin typeface="+mn-lt"/>
+                          </a:endParaRPr>
+                        </a:p>
+                      </a:txBody>
+                      <a:tcPr anchor="ctr">
+                        <a:lnL w="12700" cap="flat" cmpd="sng" algn="ctr">
+                          <a:solidFill>
+                            <a:schemeClr val="tx1"/>
+                          </a:solidFill>
+                          <a:prstDash val="solid"/>
+                          <a:round/>
+                          <a:headEnd type="none" w="med" len="med"/>
+                          <a:tailEnd type="none" w="med" len="med"/>
+                        </a:lnL>
+                        <a:lnR w="12700" cap="flat" cmpd="sng" algn="ctr">
+                          <a:solidFill>
+                            <a:schemeClr val="tx1"/>
+                          </a:solidFill>
+                          <a:prstDash val="solid"/>
+                          <a:round/>
+                          <a:headEnd type="none" w="med" len="med"/>
+                          <a:tailEnd type="none" w="med" len="med"/>
+                        </a:lnR>
+                        <a:lnT w="12700" cap="flat" cmpd="sng" algn="ctr">
+                          <a:solidFill>
+                            <a:schemeClr val="tx1"/>
+                          </a:solidFill>
+                          <a:prstDash val="solid"/>
+                          <a:round/>
+                          <a:headEnd type="none" w="med" len="med"/>
+                          <a:tailEnd type="none" w="med" len="med"/>
+                        </a:lnT>
+                        <a:lnB w="12700" cap="flat" cmpd="sng" algn="ctr">
+                          <a:solidFill>
+                            <a:schemeClr val="tx1"/>
+                          </a:solidFill>
+                          <a:prstDash val="solid"/>
+                          <a:round/>
+                          <a:headEnd type="none" w="med" len="med"/>
+                          <a:tailEnd type="none" w="med" len="med"/>
+                        </a:lnB>
+                        <a:noFill/>
+                      </a:tcPr>
+                    </a:tc>
+                    <a:tc>
+                      <a:txBody>
+                        <a:bodyPr/>
+                        <a:lstStyle/>
+                        <a:p>
+                          <a:pPr algn="ctr">
+                            <a:buNone/>
+                          </a:pPr>
+                          <a14:m>
+                            <m:oMathPara xmlns:m="http://schemas.openxmlformats.org/officeDocument/2006/math">
+                              <m:oMathParaPr>
+                                <m:jc m:val="centerGroup"/>
+                              </m:oMathParaPr>
+                              <m:oMath xmlns:m="http://schemas.openxmlformats.org/officeDocument/2006/math">
+                                <m:sSup>
+                                  <m:sSupPr>
+                                    <m:ctrlPr>
+                                      <a:rPr lang="pt-BR" sz="2000" i="1" noProof="0" smtClean="0">
+                                        <a:latin typeface="Cambria Math" panose="02040503050406030204" pitchFamily="18" charset="0"/>
+                                      </a:rPr>
+                                    </m:ctrlPr>
+                                  </m:sSupPr>
+                                  <m:e>
+                                    <m:r>
+                                      <a:rPr lang="pt-BR" sz="2000" b="0" i="1" noProof="0" smtClean="0">
+                                        <a:latin typeface="Cambria Math" panose="02040503050406030204" pitchFamily="18" charset="0"/>
+                                      </a:rPr>
+                                      <m:t>𝑂</m:t>
+                                    </m:r>
+                                    <m:r>
+                                      <a:rPr lang="pt-BR" sz="2000" b="0" i="1" noProof="0" smtClean="0">
+                                        <a:latin typeface="Cambria Math" panose="02040503050406030204" pitchFamily="18" charset="0"/>
+                                      </a:rPr>
+                                      <m:t>(</m:t>
+                                    </m:r>
+                                    <m:r>
+                                      <a:rPr lang="pt-BR" sz="2000" b="0" i="1" noProof="0" smtClean="0">
+                                        <a:latin typeface="Cambria Math" panose="02040503050406030204" pitchFamily="18" charset="0"/>
+                                      </a:rPr>
+                                      <m:t>𝐼</m:t>
+                                    </m:r>
+                                    <m:sSup>
+                                      <m:sSupPr>
+                                        <m:ctrlPr>
+                                          <a:rPr lang="pt-BR" sz="2000" b="0" i="1" noProof="0" smtClean="0">
+                                            <a:latin typeface="Cambria Math" panose="02040503050406030204" pitchFamily="18" charset="0"/>
+                                          </a:rPr>
+                                        </m:ctrlPr>
+                                      </m:sSupPr>
+                                      <m:e>
+                                        <m:r>
+                                          <a:rPr lang="pt-BR" sz="2000" b="0" i="1" noProof="0" smtClean="0">
+                                            <a:latin typeface="Cambria Math" panose="02040503050406030204" pitchFamily="18" charset="0"/>
+                                          </a:rPr>
+                                          <m:t>𝐾</m:t>
+                                        </m:r>
+                                      </m:e>
+                                      <m:sup>
+                                        <m:r>
+                                          <a:rPr lang="pt-BR" sz="2000" b="0" i="1" noProof="0" smtClean="0">
+                                            <a:latin typeface="Cambria Math" panose="02040503050406030204" pitchFamily="18" charset="0"/>
+                                          </a:rPr>
+                                          <m:t>2</m:t>
+                                        </m:r>
+                                      </m:sup>
+                                    </m:sSup>
+                                    <m:r>
+                                      <a:rPr lang="pt-BR" sz="2000" b="0" i="1" noProof="0" smtClean="0">
+                                        <a:latin typeface="Cambria Math" panose="02040503050406030204" pitchFamily="18" charset="0"/>
+                                      </a:rPr>
+                                      <m:t>)</m:t>
+                                    </m:r>
+                                  </m:e>
+                                  <m:sup>
+                                    <m:r>
+                                      <a:rPr lang="pt-BR" sz="2000" b="0" i="1" noProof="0" smtClean="0">
+                                        <a:latin typeface="Cambria Math" panose="02040503050406030204" pitchFamily="18" charset="0"/>
+                                      </a:rPr>
+                                      <m:t>∗</m:t>
+                                    </m:r>
+                                  </m:sup>
+                                </m:sSup>
+                              </m:oMath>
+                            </m:oMathPara>
+                          </a14:m>
+                          <a:endParaRPr lang="pt-BR" sz="2000" noProof="0" dirty="0">
+                            <a:latin typeface="+mn-lt"/>
+                          </a:endParaRPr>
+                        </a:p>
+                      </a:txBody>
+                      <a:tcPr anchor="ctr">
+                        <a:lnL w="12700" cap="flat" cmpd="sng" algn="ctr">
+                          <a:solidFill>
+                            <a:schemeClr val="tx1"/>
+                          </a:solidFill>
+                          <a:prstDash val="solid"/>
+                          <a:round/>
+                          <a:headEnd type="none" w="med" len="med"/>
+                          <a:tailEnd type="none" w="med" len="med"/>
+                        </a:lnL>
+                        <a:lnR w="12700" cap="flat" cmpd="sng" algn="ctr">
+                          <a:solidFill>
+                            <a:schemeClr val="tx1"/>
+                          </a:solidFill>
+                          <a:prstDash val="solid"/>
+                          <a:round/>
+                          <a:headEnd type="none" w="med" len="med"/>
+                          <a:tailEnd type="none" w="med" len="med"/>
+                        </a:lnR>
+                        <a:lnT w="12700" cap="flat" cmpd="sng" algn="ctr">
+                          <a:solidFill>
+                            <a:schemeClr val="tx1"/>
+                          </a:solidFill>
+                          <a:prstDash val="solid"/>
+                          <a:round/>
+                          <a:headEnd type="none" w="med" len="med"/>
+                          <a:tailEnd type="none" w="med" len="med"/>
+                        </a:lnT>
+                        <a:lnB w="12700" cap="flat" cmpd="sng" algn="ctr">
+                          <a:solidFill>
+                            <a:schemeClr val="tx1"/>
+                          </a:solidFill>
+                          <a:prstDash val="solid"/>
+                          <a:round/>
+                          <a:headEnd type="none" w="med" len="med"/>
+                          <a:tailEnd type="none" w="med" len="med"/>
+                        </a:lnB>
+                        <a:noFill/>
+                      </a:tcPr>
+                    </a:tc>
+                    <a:tc>
+                      <a:txBody>
+                        <a:bodyPr/>
+                        <a:lstStyle/>
+                        <a:p>
+                          <a:pPr algn="ctr">
+                            <a:buNone/>
+                          </a:pPr>
+                          <a14:m>
+                            <m:oMathPara xmlns:m="http://schemas.openxmlformats.org/officeDocument/2006/math">
+                              <m:oMathParaPr>
+                                <m:jc m:val="centerGroup"/>
+                              </m:oMathParaPr>
+                              <m:oMath xmlns:m="http://schemas.openxmlformats.org/officeDocument/2006/math">
+                                <m:sSup>
+                                  <m:sSupPr>
+                                    <m:ctrlPr>
+                                      <a:rPr lang="pt-BR" sz="2000" i="1" noProof="0" smtClean="0">
+                                        <a:latin typeface="Cambria Math" panose="02040503050406030204" pitchFamily="18" charset="0"/>
+                                      </a:rPr>
+                                    </m:ctrlPr>
+                                  </m:sSupPr>
+                                  <m:e>
+                                    <m:r>
+                                      <a:rPr lang="pt-BR" sz="2000" b="0" i="1" noProof="0" smtClean="0">
+                                        <a:latin typeface="Cambria Math" panose="02040503050406030204" pitchFamily="18" charset="0"/>
+                                      </a:rPr>
+                                      <m:t>𝑂</m:t>
+                                    </m:r>
+                                    <m:d>
+                                      <m:dPr>
+                                        <m:ctrlPr>
+                                          <a:rPr lang="pt-BR" sz="2000" b="0" i="1" noProof="0" smtClean="0">
+                                            <a:latin typeface="Cambria Math" panose="02040503050406030204" pitchFamily="18" charset="0"/>
+                                          </a:rPr>
+                                        </m:ctrlPr>
+                                      </m:dPr>
+                                      <m:e>
+                                        <m:sSup>
+                                          <m:sSupPr>
+                                            <m:ctrlPr>
+                                              <a:rPr lang="pt-BR" sz="2000" b="0" i="1" noProof="0" smtClean="0">
+                                                <a:latin typeface="Cambria Math" panose="02040503050406030204" pitchFamily="18" charset="0"/>
+                                              </a:rPr>
+                                            </m:ctrlPr>
+                                          </m:sSupPr>
+                                          <m:e>
+                                            <m:r>
+                                              <a:rPr lang="pt-BR" sz="2000" b="0" i="1" noProof="0" smtClean="0">
+                                                <a:latin typeface="Cambria Math" panose="02040503050406030204" pitchFamily="18" charset="0"/>
+                                              </a:rPr>
+                                              <m:t>𝐾</m:t>
+                                            </m:r>
+                                          </m:e>
+                                          <m:sup>
+                                            <m:r>
+                                              <a:rPr lang="pt-BR" sz="2000" b="0" i="1" noProof="0" smtClean="0">
+                                                <a:latin typeface="Cambria Math" panose="02040503050406030204" pitchFamily="18" charset="0"/>
+                                              </a:rPr>
+                                              <m:t>3</m:t>
+                                            </m:r>
+                                          </m:sup>
+                                        </m:sSup>
+                                      </m:e>
+                                    </m:d>
+                                  </m:e>
+                                  <m:sup>
+                                    <m:r>
+                                      <a:rPr lang="pt-BR" sz="2000" b="0" i="1" noProof="0" smtClean="0">
+                                        <a:latin typeface="Cambria Math" panose="02040503050406030204" pitchFamily="18" charset="0"/>
+                                      </a:rPr>
+                                      <m:t>∗∗</m:t>
+                                    </m:r>
+                                  </m:sup>
+                                </m:sSup>
+                              </m:oMath>
+                            </m:oMathPara>
+                          </a14:m>
+                          <a:endParaRPr lang="pt-BR" sz="2000" noProof="0" dirty="0">
+                            <a:latin typeface="+mn-lt"/>
+                          </a:endParaRPr>
+                        </a:p>
+                      </a:txBody>
+                      <a:tcPr anchor="ctr">
+                        <a:lnL w="12700" cap="flat" cmpd="sng" algn="ctr">
+                          <a:solidFill>
+                            <a:schemeClr val="tx1"/>
+                          </a:solidFill>
+                          <a:prstDash val="solid"/>
+                          <a:round/>
+                          <a:headEnd type="none" w="med" len="med"/>
+                          <a:tailEnd type="none" w="med" len="med"/>
+                        </a:lnL>
+                        <a:lnR w="12700" cap="flat" cmpd="sng" algn="ctr">
+                          <a:solidFill>
+                            <a:schemeClr val="tx1"/>
+                          </a:solidFill>
+                          <a:prstDash val="solid"/>
+                          <a:round/>
+                          <a:headEnd type="none" w="med" len="med"/>
+                          <a:tailEnd type="none" w="med" len="med"/>
+                        </a:lnR>
+                        <a:lnT w="12700" cap="flat" cmpd="sng" algn="ctr">
+                          <a:solidFill>
+                            <a:schemeClr val="tx1"/>
+                          </a:solidFill>
+                          <a:prstDash val="solid"/>
+                          <a:round/>
+                          <a:headEnd type="none" w="med" len="med"/>
+                          <a:tailEnd type="none" w="med" len="med"/>
+                        </a:lnT>
+                        <a:lnB w="12700" cap="flat" cmpd="sng" algn="ctr">
+                          <a:solidFill>
+                            <a:schemeClr val="tx1"/>
+                          </a:solidFill>
+                          <a:prstDash val="solid"/>
+                          <a:round/>
+                          <a:headEnd type="none" w="med" len="med"/>
+                          <a:tailEnd type="none" w="med" len="med"/>
+                        </a:lnB>
+                        <a:noFill/>
+                      </a:tcPr>
+                    </a:tc>
+                    <a:extLst>
+                      <a:ext uri="{0D108BD9-81ED-4DB2-BD59-A6C34878D82A}">
+                        <a16:rowId xmlns:a16="http://schemas.microsoft.com/office/drawing/2014/main" val="3585385241"/>
+                      </a:ext>
+                    </a:extLst>
+                  </a:tr>
+                  <a:tr h="0">
+                    <a:tc>
+                      <a:txBody>
+                        <a:bodyPr/>
+                        <a:lstStyle/>
+                        <a:p>
+                          <a:pPr algn="ctr">
+                            <a:buNone/>
+                          </a:pPr>
+                          <a:r>
+                            <a:rPr lang="pt-BR" sz="2000" b="1" noProof="0" dirty="0">
+                              <a:latin typeface="+mn-lt"/>
+                            </a:rPr>
+                            <a:t>Escalabilidade</a:t>
+                          </a:r>
+                          <a:endParaRPr lang="pt-BR" sz="2000" noProof="0" dirty="0">
+                            <a:latin typeface="+mn-lt"/>
+                          </a:endParaRPr>
+                        </a:p>
+                      </a:txBody>
+                      <a:tcPr anchor="ctr">
+                        <a:lnL w="12700" cap="flat" cmpd="sng" algn="ctr">
+                          <a:solidFill>
+                            <a:schemeClr val="tx1"/>
+                          </a:solidFill>
+                          <a:prstDash val="solid"/>
+                          <a:round/>
+                          <a:headEnd type="none" w="med" len="med"/>
+                          <a:tailEnd type="none" w="med" len="med"/>
+                        </a:lnL>
+                        <a:lnR w="12700" cap="flat" cmpd="sng" algn="ctr">
+                          <a:solidFill>
+                            <a:schemeClr val="tx1"/>
+                          </a:solidFill>
+                          <a:prstDash val="solid"/>
+                          <a:round/>
+                          <a:headEnd type="none" w="med" len="med"/>
+                          <a:tailEnd type="none" w="med" len="med"/>
+                        </a:lnR>
+                        <a:lnT w="12700" cap="flat" cmpd="sng" algn="ctr">
+                          <a:solidFill>
+                            <a:schemeClr val="tx1"/>
+                          </a:solidFill>
+                          <a:prstDash val="solid"/>
+                          <a:round/>
+                          <a:headEnd type="none" w="med" len="med"/>
+                          <a:tailEnd type="none" w="med" len="med"/>
+                        </a:lnT>
+                        <a:lnB w="12700" cap="flat" cmpd="sng" algn="ctr">
+                          <a:solidFill>
+                            <a:schemeClr val="tx1"/>
+                          </a:solidFill>
+                          <a:prstDash val="solid"/>
+                          <a:round/>
+                          <a:headEnd type="none" w="med" len="med"/>
+                          <a:tailEnd type="none" w="med" len="med"/>
+                        </a:lnB>
+                        <a:noFill/>
+                      </a:tcPr>
+                    </a:tc>
+                    <a:tc>
+                      <a:txBody>
+                        <a:bodyPr/>
+                        <a:lstStyle/>
+                        <a:p>
+                          <a:pPr algn="ctr">
+                            <a:buNone/>
+                          </a:pPr>
+                          <a:r>
+                            <a:rPr lang="pt-BR" sz="2000" noProof="0" dirty="0">
+                              <a:latin typeface="+mn-lt"/>
+                            </a:rPr>
+                            <a:t>Alta (lida bem com milhões de dados)</a:t>
+                          </a:r>
+                        </a:p>
+                      </a:txBody>
+                      <a:tcPr anchor="ctr">
+                        <a:lnL w="12700" cap="flat" cmpd="sng" algn="ctr">
+                          <a:solidFill>
+                            <a:schemeClr val="tx1"/>
+                          </a:solidFill>
+                          <a:prstDash val="solid"/>
+                          <a:round/>
+                          <a:headEnd type="none" w="med" len="med"/>
+                          <a:tailEnd type="none" w="med" len="med"/>
+                        </a:lnL>
+                        <a:lnR w="12700" cap="flat" cmpd="sng" algn="ctr">
+                          <a:solidFill>
+                            <a:schemeClr val="tx1"/>
+                          </a:solidFill>
+                          <a:prstDash val="solid"/>
+                          <a:round/>
+                          <a:headEnd type="none" w="med" len="med"/>
+                          <a:tailEnd type="none" w="med" len="med"/>
+                        </a:lnR>
+                        <a:lnT w="12700" cap="flat" cmpd="sng" algn="ctr">
+                          <a:solidFill>
+                            <a:schemeClr val="tx1"/>
+                          </a:solidFill>
+                          <a:prstDash val="solid"/>
+                          <a:round/>
+                          <a:headEnd type="none" w="med" len="med"/>
+                          <a:tailEnd type="none" w="med" len="med"/>
+                        </a:lnT>
+                        <a:lnB w="12700" cap="flat" cmpd="sng" algn="ctr">
+                          <a:solidFill>
+                            <a:schemeClr val="tx1"/>
+                          </a:solidFill>
+                          <a:prstDash val="solid"/>
+                          <a:round/>
+                          <a:headEnd type="none" w="med" len="med"/>
+                          <a:tailEnd type="none" w="med" len="med"/>
+                        </a:lnB>
+                        <a:noFill/>
+                      </a:tcPr>
+                    </a:tc>
+                    <a:tc>
+                      <a:txBody>
+                        <a:bodyPr/>
+                        <a:lstStyle/>
+                        <a:p>
+                          <a:pPr algn="ctr">
+                            <a:buNone/>
+                          </a:pPr>
+                          <a:r>
+                            <a:rPr lang="pt-BR" sz="2000" noProof="0" dirty="0">
+                              <a:latin typeface="+mn-lt"/>
+                            </a:rPr>
+                            <a:t>Baixa (lenta para muitas variáveis)</a:t>
+                          </a:r>
+                        </a:p>
+                      </a:txBody>
+                      <a:tcPr anchor="ctr">
+                        <a:lnL w="12700" cap="flat" cmpd="sng" algn="ctr">
+                          <a:solidFill>
+                            <a:schemeClr val="tx1"/>
+                          </a:solidFill>
+                          <a:prstDash val="solid"/>
+                          <a:round/>
+                          <a:headEnd type="none" w="med" len="med"/>
+                          <a:tailEnd type="none" w="med" len="med"/>
+                        </a:lnL>
+                        <a:lnR w="12700" cap="flat" cmpd="sng" algn="ctr">
+                          <a:solidFill>
+                            <a:schemeClr val="tx1"/>
+                          </a:solidFill>
+                          <a:prstDash val="solid"/>
+                          <a:round/>
+                          <a:headEnd type="none" w="med" len="med"/>
+                          <a:tailEnd type="none" w="med" len="med"/>
+                        </a:lnR>
+                        <a:lnT w="12700" cap="flat" cmpd="sng" algn="ctr">
+                          <a:solidFill>
+                            <a:schemeClr val="tx1"/>
+                          </a:solidFill>
+                          <a:prstDash val="solid"/>
+                          <a:round/>
+                          <a:headEnd type="none" w="med" len="med"/>
+                          <a:tailEnd type="none" w="med" len="med"/>
+                        </a:lnT>
+                        <a:lnB w="12700" cap="flat" cmpd="sng" algn="ctr">
+                          <a:solidFill>
+                            <a:schemeClr val="tx1"/>
+                          </a:solidFill>
+                          <a:prstDash val="solid"/>
+                          <a:round/>
+                          <a:headEnd type="none" w="med" len="med"/>
+                          <a:tailEnd type="none" w="med" len="med"/>
+                        </a:lnB>
+                        <a:noFill/>
+                      </a:tcPr>
+                    </a:tc>
+                    <a:extLst>
+                      <a:ext uri="{0D108BD9-81ED-4DB2-BD59-A6C34878D82A}">
+                        <a16:rowId xmlns:a16="http://schemas.microsoft.com/office/drawing/2014/main" val="3293643069"/>
+                      </a:ext>
+                    </a:extLst>
+                  </a:tr>
+                  <a:tr h="0">
+                    <a:tc>
+                      <a:txBody>
+                        <a:bodyPr/>
+                        <a:lstStyle/>
+                        <a:p>
+                          <a:pPr algn="ctr">
+                            <a:buNone/>
+                          </a:pPr>
+                          <a:r>
+                            <a:rPr lang="pt-BR" sz="2000" b="1" noProof="0" dirty="0">
+                              <a:latin typeface="+mn-lt"/>
+                            </a:rPr>
+                            <a:t>Parâmetros</a:t>
+                          </a:r>
+                          <a:endParaRPr lang="pt-BR" sz="2000" noProof="0" dirty="0">
+                            <a:latin typeface="+mn-lt"/>
+                          </a:endParaRPr>
+                        </a:p>
+                      </a:txBody>
+                      <a:tcPr anchor="ctr">
+                        <a:lnL w="12700" cap="flat" cmpd="sng" algn="ctr">
+                          <a:solidFill>
+                            <a:schemeClr val="tx1"/>
+                          </a:solidFill>
+                          <a:prstDash val="solid"/>
+                          <a:round/>
+                          <a:headEnd type="none" w="med" len="med"/>
+                          <a:tailEnd type="none" w="med" len="med"/>
+                        </a:lnL>
+                        <a:lnR w="12700" cap="flat" cmpd="sng" algn="ctr">
+                          <a:solidFill>
+                            <a:schemeClr val="tx1"/>
+                          </a:solidFill>
+                          <a:prstDash val="solid"/>
+                          <a:round/>
+                          <a:headEnd type="none" w="med" len="med"/>
+                          <a:tailEnd type="none" w="med" len="med"/>
+                        </a:lnR>
+                        <a:lnT w="12700" cap="flat" cmpd="sng" algn="ctr">
+                          <a:solidFill>
+                            <a:schemeClr val="tx1"/>
+                          </a:solidFill>
+                          <a:prstDash val="solid"/>
+                          <a:round/>
+                          <a:headEnd type="none" w="med" len="med"/>
+                          <a:tailEnd type="none" w="med" len="med"/>
+                        </a:lnT>
+                        <a:lnB w="12700" cap="flat" cmpd="sng" algn="ctr">
+                          <a:solidFill>
+                            <a:schemeClr val="tx1"/>
+                          </a:solidFill>
+                          <a:prstDash val="solid"/>
+                          <a:round/>
+                          <a:headEnd type="none" w="med" len="med"/>
+                          <a:tailEnd type="none" w="med" len="med"/>
+                        </a:lnB>
+                        <a:noFill/>
+                      </a:tcPr>
+                    </a:tc>
+                    <a:tc>
+                      <a:txBody>
+                        <a:bodyPr/>
+                        <a:lstStyle/>
+                        <a:p>
+                          <a:pPr algn="ctr">
+                            <a:buNone/>
+                          </a:pPr>
+                          <a:r>
+                            <a:rPr lang="pt-BR" sz="2000" noProof="0" dirty="0">
+                              <a:latin typeface="+mn-lt"/>
+                            </a:rPr>
+                            <a:t>Exige ajuste de </a:t>
+                          </a:r>
+                          <a14:m>
+                            <m:oMath xmlns:m="http://schemas.openxmlformats.org/officeDocument/2006/math">
+                              <m:r>
+                                <a:rPr lang="pt-BR" sz="2000" i="1" noProof="0" smtClean="0">
+                                  <a:latin typeface="Cambria Math" panose="02040503050406030204" pitchFamily="18" charset="0"/>
+                                  <a:ea typeface="Cambria Math" panose="02040503050406030204" pitchFamily="18" charset="0"/>
+                                </a:rPr>
+                                <m:t>𝛼</m:t>
+                              </m:r>
+                            </m:oMath>
+                          </a14:m>
+                          <a:endParaRPr lang="pt-BR" sz="2000" noProof="0" dirty="0">
+                            <a:latin typeface="+mn-lt"/>
+                          </a:endParaRPr>
+                        </a:p>
+                      </a:txBody>
+                      <a:tcPr anchor="ctr">
+                        <a:lnL w="12700" cap="flat" cmpd="sng" algn="ctr">
+                          <a:solidFill>
+                            <a:schemeClr val="tx1"/>
+                          </a:solidFill>
+                          <a:prstDash val="solid"/>
+                          <a:round/>
+                          <a:headEnd type="none" w="med" len="med"/>
+                          <a:tailEnd type="none" w="med" len="med"/>
+                        </a:lnL>
+                        <a:lnR w="12700" cap="flat" cmpd="sng" algn="ctr">
+                          <a:solidFill>
+                            <a:schemeClr val="tx1"/>
+                          </a:solidFill>
+                          <a:prstDash val="solid"/>
+                          <a:round/>
+                          <a:headEnd type="none" w="med" len="med"/>
+                          <a:tailEnd type="none" w="med" len="med"/>
+                        </a:lnR>
+                        <a:lnT w="12700" cap="flat" cmpd="sng" algn="ctr">
+                          <a:solidFill>
+                            <a:schemeClr val="tx1"/>
+                          </a:solidFill>
+                          <a:prstDash val="solid"/>
+                          <a:round/>
+                          <a:headEnd type="none" w="med" len="med"/>
+                          <a:tailEnd type="none" w="med" len="med"/>
+                        </a:lnT>
+                        <a:lnB w="12700" cap="flat" cmpd="sng" algn="ctr">
+                          <a:solidFill>
+                            <a:schemeClr val="tx1"/>
+                          </a:solidFill>
+                          <a:prstDash val="solid"/>
+                          <a:round/>
+                          <a:headEnd type="none" w="med" len="med"/>
+                          <a:tailEnd type="none" w="med" len="med"/>
+                        </a:lnB>
+                        <a:noFill/>
+                      </a:tcPr>
+                    </a:tc>
+                    <a:tc>
+                      <a:txBody>
+                        <a:bodyPr/>
+                        <a:lstStyle/>
+                        <a:p>
+                          <a:pPr algn="ctr">
+                            <a:buNone/>
+                          </a:pPr>
+                          <a:r>
+                            <a:rPr lang="pt-BR" sz="2000" noProof="0" dirty="0">
+                              <a:latin typeface="+mn-lt"/>
+                            </a:rPr>
+                            <a:t>Nenhum</a:t>
+                          </a:r>
+                        </a:p>
+                      </a:txBody>
+                      <a:tcPr anchor="ctr">
+                        <a:lnL w="12700" cap="flat" cmpd="sng" algn="ctr">
+                          <a:solidFill>
+                            <a:schemeClr val="tx1"/>
+                          </a:solidFill>
+                          <a:prstDash val="solid"/>
+                          <a:round/>
+                          <a:headEnd type="none" w="med" len="med"/>
+                          <a:tailEnd type="none" w="med" len="med"/>
+                        </a:lnL>
+                        <a:lnR w="12700" cap="flat" cmpd="sng" algn="ctr">
+                          <a:solidFill>
+                            <a:schemeClr val="tx1"/>
+                          </a:solidFill>
+                          <a:prstDash val="solid"/>
+                          <a:round/>
+                          <a:headEnd type="none" w="med" len="med"/>
+                          <a:tailEnd type="none" w="med" len="med"/>
+                        </a:lnR>
+                        <a:lnT w="12700" cap="flat" cmpd="sng" algn="ctr">
+                          <a:solidFill>
+                            <a:schemeClr val="tx1"/>
+                          </a:solidFill>
+                          <a:prstDash val="solid"/>
+                          <a:round/>
+                          <a:headEnd type="none" w="med" len="med"/>
+                          <a:tailEnd type="none" w="med" len="med"/>
+                        </a:lnT>
+                        <a:lnB w="12700" cap="flat" cmpd="sng" algn="ctr">
+                          <a:solidFill>
+                            <a:schemeClr val="tx1"/>
+                          </a:solidFill>
+                          <a:prstDash val="solid"/>
+                          <a:round/>
+                          <a:headEnd type="none" w="med" len="med"/>
+                          <a:tailEnd type="none" w="med" len="med"/>
+                        </a:lnB>
+                        <a:noFill/>
+                      </a:tcPr>
+                    </a:tc>
+                    <a:extLst>
+                      <a:ext uri="{0D108BD9-81ED-4DB2-BD59-A6C34878D82A}">
+                        <a16:rowId xmlns:a16="http://schemas.microsoft.com/office/drawing/2014/main" val="2874329883"/>
+                      </a:ext>
+                    </a:extLst>
+                  </a:tr>
+                  <a:tr h="0">
+                    <a:tc>
+                      <a:txBody>
+                        <a:bodyPr/>
+                        <a:lstStyle/>
+                        <a:p>
+                          <a:pPr algn="ctr">
+                            <a:buNone/>
+                          </a:pPr>
+                          <a:r>
+                            <a:rPr lang="pt-BR" sz="2000" b="1" noProof="0" dirty="0">
+                              <a:latin typeface="+mn-lt"/>
+                            </a:rPr>
+                            <a:t>Uso principal</a:t>
+                          </a:r>
+                          <a:endParaRPr lang="pt-BR" sz="2000" noProof="0" dirty="0">
+                            <a:latin typeface="+mn-lt"/>
+                          </a:endParaRPr>
+                        </a:p>
+                      </a:txBody>
+                      <a:tcPr anchor="ctr">
+                        <a:lnL w="12700" cap="flat" cmpd="sng" algn="ctr">
+                          <a:solidFill>
+                            <a:schemeClr val="tx1"/>
+                          </a:solidFill>
+                          <a:prstDash val="solid"/>
+                          <a:round/>
+                          <a:headEnd type="none" w="med" len="med"/>
+                          <a:tailEnd type="none" w="med" len="med"/>
+                        </a:lnL>
+                        <a:lnR w="12700" cap="flat" cmpd="sng" algn="ctr">
+                          <a:solidFill>
+                            <a:schemeClr val="tx1"/>
+                          </a:solidFill>
+                          <a:prstDash val="solid"/>
+                          <a:round/>
+                          <a:headEnd type="none" w="med" len="med"/>
+                          <a:tailEnd type="none" w="med" len="med"/>
+                        </a:lnR>
+                        <a:lnT w="12700" cap="flat" cmpd="sng" algn="ctr">
+                          <a:solidFill>
+                            <a:schemeClr val="tx1"/>
+                          </a:solidFill>
+                          <a:prstDash val="solid"/>
+                          <a:round/>
+                          <a:headEnd type="none" w="med" len="med"/>
+                          <a:tailEnd type="none" w="med" len="med"/>
+                        </a:lnT>
+                        <a:lnB w="12700" cap="flat" cmpd="sng" algn="ctr">
+                          <a:solidFill>
+                            <a:schemeClr val="tx1"/>
+                          </a:solidFill>
+                          <a:prstDash val="solid"/>
+                          <a:round/>
+                          <a:headEnd type="none" w="med" len="med"/>
+                          <a:tailEnd type="none" w="med" len="med"/>
+                        </a:lnB>
+                        <a:noFill/>
+                      </a:tcPr>
+                    </a:tc>
+                    <a:tc>
+                      <a:txBody>
+                        <a:bodyPr/>
+                        <a:lstStyle/>
+                        <a:p>
+                          <a:pPr algn="ctr">
+                            <a:buNone/>
+                          </a:pPr>
+                          <a:r>
+                            <a:rPr lang="pt-BR" sz="2000" noProof="0" dirty="0">
+                              <a:latin typeface="+mn-lt"/>
+                            </a:rPr>
+                            <a:t>Regressão linear e logística/Redes neurais</a:t>
+                          </a:r>
+                        </a:p>
+                      </a:txBody>
+                      <a:tcPr anchor="ctr">
+                        <a:lnL w="12700" cap="flat" cmpd="sng" algn="ctr">
+                          <a:solidFill>
+                            <a:schemeClr val="tx1"/>
+                          </a:solidFill>
+                          <a:prstDash val="solid"/>
+                          <a:round/>
+                          <a:headEnd type="none" w="med" len="med"/>
+                          <a:tailEnd type="none" w="med" len="med"/>
+                        </a:lnL>
+                        <a:lnR w="12700" cap="flat" cmpd="sng" algn="ctr">
+                          <a:solidFill>
+                            <a:schemeClr val="tx1"/>
+                          </a:solidFill>
+                          <a:prstDash val="solid"/>
+                          <a:round/>
+                          <a:headEnd type="none" w="med" len="med"/>
+                          <a:tailEnd type="none" w="med" len="med"/>
+                        </a:lnR>
+                        <a:lnT w="12700" cap="flat" cmpd="sng" algn="ctr">
+                          <a:solidFill>
+                            <a:schemeClr val="tx1"/>
+                          </a:solidFill>
+                          <a:prstDash val="solid"/>
+                          <a:round/>
+                          <a:headEnd type="none" w="med" len="med"/>
+                          <a:tailEnd type="none" w="med" len="med"/>
+                        </a:lnT>
+                        <a:lnB w="12700" cap="flat" cmpd="sng" algn="ctr">
+                          <a:solidFill>
+                            <a:schemeClr val="tx1"/>
+                          </a:solidFill>
+                          <a:prstDash val="solid"/>
+                          <a:round/>
+                          <a:headEnd type="none" w="med" len="med"/>
+                          <a:tailEnd type="none" w="med" len="med"/>
+                        </a:lnB>
+                        <a:noFill/>
+                      </a:tcPr>
+                    </a:tc>
+                    <a:tc>
+                      <a:txBody>
+                        <a:bodyPr/>
+                        <a:lstStyle/>
+                        <a:p>
+                          <a:pPr algn="ctr">
+                            <a:buNone/>
+                          </a:pPr>
+                          <a:r>
+                            <a:rPr lang="pt-BR" sz="2000" noProof="0" dirty="0">
+                              <a:latin typeface="+mn-lt"/>
+                            </a:rPr>
+                            <a:t>Estatística clássica/</a:t>
+                          </a:r>
+                          <a:r>
+                            <a:rPr lang="pt-BR" sz="2000" i="1" noProof="0" dirty="0" err="1">
+                              <a:latin typeface="+mn-lt"/>
+                            </a:rPr>
+                            <a:t>Datasets</a:t>
+                          </a:r>
+                          <a:r>
+                            <a:rPr lang="pt-BR" sz="2000" noProof="0" dirty="0">
+                              <a:latin typeface="+mn-lt"/>
+                            </a:rPr>
+                            <a:t> pequenos</a:t>
+                          </a:r>
+                        </a:p>
+                      </a:txBody>
+                      <a:tcPr anchor="ctr">
+                        <a:lnL w="12700" cap="flat" cmpd="sng" algn="ctr">
+                          <a:solidFill>
+                            <a:schemeClr val="tx1"/>
+                          </a:solidFill>
+                          <a:prstDash val="solid"/>
+                          <a:round/>
+                          <a:headEnd type="none" w="med" len="med"/>
+                          <a:tailEnd type="none" w="med" len="med"/>
+                        </a:lnL>
+                        <a:lnR w="12700" cap="flat" cmpd="sng" algn="ctr">
+                          <a:solidFill>
+                            <a:schemeClr val="tx1"/>
+                          </a:solidFill>
+                          <a:prstDash val="solid"/>
+                          <a:round/>
+                          <a:headEnd type="none" w="med" len="med"/>
+                          <a:tailEnd type="none" w="med" len="med"/>
+                        </a:lnR>
+                        <a:lnT w="12700" cap="flat" cmpd="sng" algn="ctr">
+                          <a:solidFill>
+                            <a:schemeClr val="tx1"/>
+                          </a:solidFill>
+                          <a:prstDash val="solid"/>
+                          <a:round/>
+                          <a:headEnd type="none" w="med" len="med"/>
+                          <a:tailEnd type="none" w="med" len="med"/>
+                        </a:lnT>
+                        <a:lnB w="12700" cap="flat" cmpd="sng" algn="ctr">
+                          <a:solidFill>
+                            <a:schemeClr val="tx1"/>
+                          </a:solidFill>
+                          <a:prstDash val="solid"/>
+                          <a:round/>
+                          <a:headEnd type="none" w="med" len="med"/>
+                          <a:tailEnd type="none" w="med" len="med"/>
+                        </a:lnB>
+                        <a:noFill/>
+                      </a:tcPr>
+                    </a:tc>
+                    <a:extLst>
+                      <a:ext uri="{0D108BD9-81ED-4DB2-BD59-A6C34878D82A}">
+                        <a16:rowId xmlns:a16="http://schemas.microsoft.com/office/drawing/2014/main" val="1234521875"/>
+                      </a:ext>
+                    </a:extLst>
+                  </a:tr>
+                  <a:tr h="392816">
+                    <a:tc>
+                      <a:txBody>
+                        <a:bodyPr/>
+                        <a:lstStyle/>
+                        <a:p>
+                          <a:pPr algn="ctr">
+                            <a:buNone/>
+                          </a:pPr>
+                          <a:r>
+                            <a:rPr lang="pt-BR" sz="2000" b="1" noProof="0" dirty="0">
+                              <a:latin typeface="+mn-lt"/>
+                            </a:rPr>
+                            <a:t>Observações</a:t>
+                          </a:r>
+                        </a:p>
+                      </a:txBody>
+                      <a:tcPr anchor="ctr">
+                        <a:lnL w="12700" cap="flat" cmpd="sng" algn="ctr">
+                          <a:solidFill>
+                            <a:schemeClr val="tx1"/>
+                          </a:solidFill>
+                          <a:prstDash val="solid"/>
+                          <a:round/>
+                          <a:headEnd type="none" w="med" len="med"/>
+                          <a:tailEnd type="none" w="med" len="med"/>
+                        </a:lnL>
+                        <a:lnR w="12700" cap="flat" cmpd="sng" algn="ctr">
+                          <a:solidFill>
+                            <a:schemeClr val="tx1"/>
+                          </a:solidFill>
+                          <a:prstDash val="solid"/>
+                          <a:round/>
+                          <a:headEnd type="none" w="med" len="med"/>
+                          <a:tailEnd type="none" w="med" len="med"/>
+                        </a:lnR>
+                        <a:lnT w="12700" cap="flat" cmpd="sng" algn="ctr">
+                          <a:solidFill>
+                            <a:schemeClr val="tx1"/>
+                          </a:solidFill>
+                          <a:prstDash val="solid"/>
+                          <a:round/>
+                          <a:headEnd type="none" w="med" len="med"/>
+                          <a:tailEnd type="none" w="med" len="med"/>
+                        </a:lnT>
+                        <a:lnB w="12700" cap="flat" cmpd="sng" algn="ctr">
+                          <a:solidFill>
+                            <a:schemeClr val="tx1"/>
+                          </a:solidFill>
+                          <a:prstDash val="solid"/>
+                          <a:round/>
+                          <a:headEnd type="none" w="med" len="med"/>
+                          <a:tailEnd type="none" w="med" len="med"/>
+                        </a:lnB>
+                        <a:noFill/>
+                      </a:tcPr>
+                    </a:tc>
+                    <a:tc>
+                      <a:txBody>
+                        <a:bodyPr/>
+                        <a:lstStyle/>
+                        <a:p>
+                          <a:pPr marL="342900" indent="-342900" algn="l">
+                            <a:buFont typeface="Arial" panose="020B0604020202020204" pitchFamily="34" charset="0"/>
+                            <a:buChar char="•"/>
+                          </a:pPr>
+                          <a:r>
+                            <a:rPr lang="pt-BR" sz="2000" noProof="0" dirty="0">
+                              <a:latin typeface="+mn-lt"/>
+                            </a:rPr>
+                            <a:t>Pode exigir muitas iterações para convergir.</a:t>
+                          </a:r>
+                        </a:p>
+                        <a:p>
+                          <a:pPr marL="342900" indent="-342900" algn="l">
+                            <a:buFont typeface="Arial" panose="020B0604020202020204" pitchFamily="34" charset="0"/>
+                            <a:buChar char="•"/>
+                          </a:pPr>
+                          <a:r>
+                            <a:rPr lang="pt-BR" sz="2000" noProof="0" dirty="0">
+                              <a:latin typeface="+mn-lt"/>
+                            </a:rPr>
+                            <a:t>A função de erro deve ser </a:t>
+                          </a:r>
+                          <a:r>
+                            <a:rPr lang="pt-BR" sz="2000" noProof="0" dirty="0" err="1">
+                              <a:latin typeface="+mn-lt"/>
+                            </a:rPr>
+                            <a:t>diferenciável</a:t>
+                          </a:r>
+                          <a:r>
+                            <a:rPr lang="pt-BR" sz="2000" noProof="0" dirty="0">
+                              <a:latin typeface="+mn-lt"/>
+                            </a:rPr>
+                            <a:t>.</a:t>
+                          </a:r>
+                        </a:p>
+                        <a:p>
+                          <a:pPr marL="342900" indent="-342900" algn="l">
+                            <a:buFont typeface="Arial" panose="020B0604020202020204" pitchFamily="34" charset="0"/>
+                            <a:buChar char="•"/>
+                          </a:pPr>
+                          <a:r>
+                            <a:rPr lang="pt-BR" sz="2000" noProof="0" dirty="0">
+                              <a:latin typeface="+mn-lt"/>
+                            </a:rPr>
+                            <a:t>É flexível, podendo ser ajustado à quantidade de memória disponível.</a:t>
+                          </a:r>
+                        </a:p>
+                      </a:txBody>
+                      <a:tcPr anchor="ctr">
+                        <a:lnL w="12700" cap="flat" cmpd="sng" algn="ctr">
+                          <a:solidFill>
+                            <a:schemeClr val="tx1"/>
+                          </a:solidFill>
+                          <a:prstDash val="solid"/>
+                          <a:round/>
+                          <a:headEnd type="none" w="med" len="med"/>
+                          <a:tailEnd type="none" w="med" len="med"/>
+                        </a:lnL>
+                        <a:lnR w="12700" cap="flat" cmpd="sng" algn="ctr">
+                          <a:solidFill>
+                            <a:schemeClr val="tx1"/>
+                          </a:solidFill>
+                          <a:prstDash val="solid"/>
+                          <a:round/>
+                          <a:headEnd type="none" w="med" len="med"/>
+                          <a:tailEnd type="none" w="med" len="med"/>
+                        </a:lnR>
+                        <a:lnT w="12700" cap="flat" cmpd="sng" algn="ctr">
+                          <a:solidFill>
+                            <a:schemeClr val="tx1"/>
+                          </a:solidFill>
+                          <a:prstDash val="solid"/>
+                          <a:round/>
+                          <a:headEnd type="none" w="med" len="med"/>
+                          <a:tailEnd type="none" w="med" len="med"/>
+                        </a:lnT>
+                        <a:lnB w="12700" cap="flat" cmpd="sng" algn="ctr">
+                          <a:solidFill>
+                            <a:schemeClr val="tx1"/>
+                          </a:solidFill>
+                          <a:prstDash val="solid"/>
+                          <a:round/>
+                          <a:headEnd type="none" w="med" len="med"/>
+                          <a:tailEnd type="none" w="med" len="med"/>
+                        </a:lnB>
+                        <a:noFill/>
+                      </a:tcPr>
+                    </a:tc>
+                    <a:tc>
+                      <a:txBody>
+                        <a:bodyPr/>
+                        <a:lstStyle/>
+                        <a:p>
+                          <a:pPr marL="342900" indent="-342900" algn="l">
+                            <a:buFont typeface="Arial" panose="020B0604020202020204" pitchFamily="34" charset="0"/>
+                            <a:buChar char="•"/>
+                          </a:pPr>
+                          <a:r>
+                            <a:rPr lang="pt-BR" sz="2000" noProof="0" dirty="0">
+                              <a:latin typeface="+mn-lt"/>
+                            </a:rPr>
+                            <a:t>Não encontra solução para modelos puramente não lineares (e.g., redes neurais).</a:t>
+                          </a:r>
+                        </a:p>
+                        <a:p>
+                          <a:pPr marL="342900" indent="-342900" algn="l">
+                            <a:buFont typeface="Arial" panose="020B0604020202020204" pitchFamily="34" charset="0"/>
+                            <a:buChar char="•"/>
+                          </a:pPr>
+                          <a:r>
+                            <a:rPr lang="pt-BR" sz="2000" noProof="0" dirty="0">
+                              <a:latin typeface="+mn-lt"/>
+                            </a:rPr>
+                            <a:t>Consome</a:t>
+                          </a:r>
+                          <a:r>
+                            <a:rPr lang="pt-BR" sz="2000" baseline="0" noProof="0" dirty="0">
+                              <a:latin typeface="+mn-lt"/>
+                            </a:rPr>
+                            <a:t> muita memória s</a:t>
+                          </a:r>
+                          <a:r>
+                            <a:rPr lang="pt-BR" sz="2000" noProof="0" dirty="0">
+                              <a:latin typeface="+mn-lt"/>
+                            </a:rPr>
+                            <a:t>e </a:t>
+                          </a:r>
+                          <a14:m>
+                            <m:oMath xmlns:m="http://schemas.openxmlformats.org/officeDocument/2006/math">
+                              <m:r>
+                                <a:rPr lang="pt-BR" sz="2000" b="0" i="1" noProof="0" smtClean="0">
+                                  <a:latin typeface="Cambria Math" panose="02040503050406030204" pitchFamily="18" charset="0"/>
+                                </a:rPr>
+                                <m:t>𝐾</m:t>
+                              </m:r>
+                            </m:oMath>
+                          </a14:m>
+                          <a:r>
+                            <a:rPr lang="pt-BR" sz="2000" noProof="0" dirty="0">
+                              <a:latin typeface="+mn-lt"/>
+                            </a:rPr>
+                            <a:t> e </a:t>
+                          </a:r>
+                          <a14:m>
+                            <m:oMath xmlns:m="http://schemas.openxmlformats.org/officeDocument/2006/math">
+                              <m:r>
+                                <a:rPr lang="pt-BR" sz="2000" b="0" i="1" noProof="0" smtClean="0">
+                                  <a:latin typeface="Cambria Math" panose="02040503050406030204" pitchFamily="18" charset="0"/>
+                                </a:rPr>
+                                <m:t>𝑁</m:t>
+                              </m:r>
+                            </m:oMath>
+                          </a14:m>
+                          <a:r>
+                            <a:rPr lang="pt-BR" sz="2000" noProof="0" dirty="0">
+                              <a:latin typeface="+mn-lt"/>
+                            </a:rPr>
+                            <a:t> são muito</a:t>
+                          </a:r>
+                          <a:r>
+                            <a:rPr lang="pt-BR" sz="2000" baseline="0" noProof="0" dirty="0">
+                              <a:latin typeface="+mn-lt"/>
+                            </a:rPr>
+                            <a:t> grandes.</a:t>
+                          </a:r>
+                          <a:endParaRPr lang="pt-BR" sz="2000" noProof="0" dirty="0">
+                            <a:latin typeface="+mn-lt"/>
+                          </a:endParaRPr>
+                        </a:p>
+                      </a:txBody>
+                      <a:tcPr anchor="ctr">
+                        <a:lnL w="12700" cap="flat" cmpd="sng" algn="ctr">
+                          <a:solidFill>
+                            <a:schemeClr val="tx1"/>
+                          </a:solidFill>
+                          <a:prstDash val="solid"/>
+                          <a:round/>
+                          <a:headEnd type="none" w="med" len="med"/>
+                          <a:tailEnd type="none" w="med" len="med"/>
+                        </a:lnL>
+                        <a:lnR w="12700" cap="flat" cmpd="sng" algn="ctr">
+                          <a:solidFill>
+                            <a:schemeClr val="tx1"/>
+                          </a:solidFill>
+                          <a:prstDash val="solid"/>
+                          <a:round/>
+                          <a:headEnd type="none" w="med" len="med"/>
+                          <a:tailEnd type="none" w="med" len="med"/>
+                        </a:lnR>
+                        <a:lnT w="12700" cap="flat" cmpd="sng" algn="ctr">
+                          <a:solidFill>
+                            <a:schemeClr val="tx1"/>
+                          </a:solidFill>
+                          <a:prstDash val="solid"/>
+                          <a:round/>
+                          <a:headEnd type="none" w="med" len="med"/>
+                          <a:tailEnd type="none" w="med" len="med"/>
+                        </a:lnT>
+                        <a:lnB w="12700" cap="flat" cmpd="sng" algn="ctr">
+                          <a:solidFill>
+                            <a:schemeClr val="tx1"/>
+                          </a:solidFill>
+                          <a:prstDash val="solid"/>
+                          <a:round/>
+                          <a:headEnd type="none" w="med" len="med"/>
+                          <a:tailEnd type="none" w="med" len="med"/>
+                        </a:lnB>
+                        <a:noFill/>
+                      </a:tcPr>
+                    </a:tc>
+                    <a:extLst>
+                      <a:ext uri="{0D108BD9-81ED-4DB2-BD59-A6C34878D82A}">
+                        <a16:rowId xmlns:a16="http://schemas.microsoft.com/office/drawing/2014/main" val="2070400338"/>
+                      </a:ext>
+                    </a:extLst>
+                  </a:tr>
+                </a:tbl>
+              </a:graphicData>
+            </a:graphic>
+          </p:graphicFrame>
+        </mc:Choice>
+        <mc:Fallback>
+          <p:graphicFrame>
+            <p:nvGraphicFramePr>
+              <p:cNvPr id="4" name="Content Placeholder 3">
+                <a:extLst>
+                  <a:ext uri="{FF2B5EF4-FFF2-40B4-BE49-F238E27FC236}">
+                    <a16:creationId xmlns:a16="http://schemas.microsoft.com/office/drawing/2014/main" id="{9F89DE01-7C6C-8A47-35FC-16E58BA14EAA}"/>
+                  </a:ext>
+                </a:extLst>
+              </p:cNvPr>
+              <p:cNvGraphicFramePr>
+                <a:graphicFrameLocks noGrp="1"/>
+              </p:cNvGraphicFramePr>
+              <p:nvPr>
+                <p:ph idx="1"/>
+                <p:extLst>
+                  <p:ext uri="{D42A27DB-BD31-4B8C-83A1-F6EECF244321}">
+                    <p14:modId xmlns:p14="http://schemas.microsoft.com/office/powerpoint/2010/main" val="4230852870"/>
+                  </p:ext>
+                </p:extLst>
+              </p:nvPr>
+            </p:nvGraphicFramePr>
+            <p:xfrm>
+              <a:off x="241041" y="1690688"/>
+              <a:ext cx="11709918" cy="3992880"/>
+            </p:xfrm>
+            <a:graphic>
+              <a:graphicData uri="http://schemas.openxmlformats.org/drawingml/2006/table">
+                <a:tbl>
+                  <a:tblPr/>
+                  <a:tblGrid>
+                    <a:gridCol w="2008663">
+                      <a:extLst>
+                        <a:ext uri="{9D8B030D-6E8A-4147-A177-3AD203B41FA5}">
+                          <a16:colId xmlns:a16="http://schemas.microsoft.com/office/drawing/2014/main" val="2676689337"/>
+                        </a:ext>
+                      </a:extLst>
+                    </a:gridCol>
+                    <a:gridCol w="4742847">
+                      <a:extLst>
+                        <a:ext uri="{9D8B030D-6E8A-4147-A177-3AD203B41FA5}">
+                          <a16:colId xmlns:a16="http://schemas.microsoft.com/office/drawing/2014/main" val="921422884"/>
+                        </a:ext>
+                      </a:extLst>
+                    </a:gridCol>
+                    <a:gridCol w="4958408">
+                      <a:extLst>
+                        <a:ext uri="{9D8B030D-6E8A-4147-A177-3AD203B41FA5}">
+                          <a16:colId xmlns:a16="http://schemas.microsoft.com/office/drawing/2014/main" val="4252031962"/>
+                        </a:ext>
+                      </a:extLst>
+                    </a:gridCol>
+                  </a:tblGrid>
+                  <a:tr h="396240">
+                    <a:tc>
+                      <a:txBody>
+                        <a:bodyPr/>
+                        <a:lstStyle/>
+                        <a:p>
+                          <a:pPr algn="ctr">
+                            <a:buNone/>
+                          </a:pPr>
+                          <a:r>
+                            <a:rPr lang="pt-BR" sz="2000" b="1" noProof="0" dirty="0">
+                              <a:latin typeface="+mn-lt"/>
+                            </a:rPr>
+                            <a:t>Característica</a:t>
+                          </a:r>
+                        </a:p>
+                      </a:txBody>
+                      <a:tcPr anchor="ctr">
+                        <a:lnL w="12700" cap="flat" cmpd="sng" algn="ctr">
+                          <a:solidFill>
+                            <a:schemeClr val="tx1"/>
+                          </a:solidFill>
+                          <a:prstDash val="solid"/>
+                          <a:round/>
+                          <a:headEnd type="none" w="med" len="med"/>
+                          <a:tailEnd type="none" w="med" len="med"/>
+                        </a:lnL>
+                        <a:lnR w="12700" cap="flat" cmpd="sng" algn="ctr">
+                          <a:solidFill>
+                            <a:schemeClr val="tx1"/>
+                          </a:solidFill>
+                          <a:prstDash val="solid"/>
+                          <a:round/>
+                          <a:headEnd type="none" w="med" len="med"/>
+                          <a:tailEnd type="none" w="med" len="med"/>
+                        </a:lnR>
+                        <a:lnT w="12700" cap="flat" cmpd="sng" algn="ctr">
+                          <a:solidFill>
+                            <a:schemeClr val="tx1"/>
+                          </a:solidFill>
+                          <a:prstDash val="solid"/>
+                          <a:round/>
+                          <a:headEnd type="none" w="med" len="med"/>
+                          <a:tailEnd type="none" w="med" len="med"/>
+                        </a:lnT>
+                        <a:lnB w="12700" cap="flat" cmpd="sng" algn="ctr">
+                          <a:solidFill>
+                            <a:schemeClr val="tx1"/>
+                          </a:solidFill>
+                          <a:prstDash val="solid"/>
+                          <a:round/>
+                          <a:headEnd type="none" w="med" len="med"/>
+                          <a:tailEnd type="none" w="med" len="med"/>
+                        </a:lnB>
+                        <a:noFill/>
+                      </a:tcPr>
+                    </a:tc>
+                    <a:tc>
+                      <a:txBody>
+                        <a:bodyPr/>
+                        <a:lstStyle/>
+                        <a:p>
+                          <a:pPr algn="ctr">
+                            <a:buNone/>
+                          </a:pPr>
+                          <a:r>
+                            <a:rPr lang="pt-BR" sz="2000" b="1" noProof="0" dirty="0">
+                              <a:latin typeface="+mn-lt"/>
+                            </a:rPr>
+                            <a:t>Gradiente descendente</a:t>
+                          </a:r>
+                        </a:p>
+                      </a:txBody>
+                      <a:tcPr anchor="ctr">
+                        <a:lnL w="12700" cap="flat" cmpd="sng" algn="ctr">
+                          <a:solidFill>
+                            <a:schemeClr val="tx1"/>
+                          </a:solidFill>
+                          <a:prstDash val="solid"/>
+                          <a:round/>
+                          <a:headEnd type="none" w="med" len="med"/>
+                          <a:tailEnd type="none" w="med" len="med"/>
+                        </a:lnL>
+                        <a:lnR w="12700" cap="flat" cmpd="sng" algn="ctr">
+                          <a:solidFill>
+                            <a:schemeClr val="tx1"/>
+                          </a:solidFill>
+                          <a:prstDash val="solid"/>
+                          <a:round/>
+                          <a:headEnd type="none" w="med" len="med"/>
+                          <a:tailEnd type="none" w="med" len="med"/>
+                        </a:lnR>
+                        <a:lnT w="12700" cap="flat" cmpd="sng" algn="ctr">
+                          <a:solidFill>
+                            <a:schemeClr val="tx1"/>
+                          </a:solidFill>
+                          <a:prstDash val="solid"/>
+                          <a:round/>
+                          <a:headEnd type="none" w="med" len="med"/>
+                          <a:tailEnd type="none" w="med" len="med"/>
+                        </a:lnT>
+                        <a:lnB w="12700" cap="flat" cmpd="sng" algn="ctr">
+                          <a:solidFill>
+                            <a:schemeClr val="tx1"/>
+                          </a:solidFill>
+                          <a:prstDash val="solid"/>
+                          <a:round/>
+                          <a:headEnd type="none" w="med" len="med"/>
+                          <a:tailEnd type="none" w="med" len="med"/>
+                        </a:lnB>
+                        <a:noFill/>
+                      </a:tcPr>
+                    </a:tc>
+                    <a:tc>
+                      <a:txBody>
+                        <a:bodyPr/>
+                        <a:lstStyle/>
+                        <a:p>
+                          <a:pPr algn="ctr">
+                            <a:buNone/>
+                          </a:pPr>
+                          <a:r>
+                            <a:rPr lang="pt-BR" sz="2000" b="1" noProof="0" dirty="0">
+                              <a:latin typeface="+mn-lt"/>
+                            </a:rPr>
+                            <a:t>Equação normal</a:t>
+                          </a:r>
+                        </a:p>
+                      </a:txBody>
+                      <a:tcPr anchor="ctr">
+                        <a:lnL w="12700" cap="flat" cmpd="sng" algn="ctr">
+                          <a:solidFill>
+                            <a:schemeClr val="tx1"/>
+                          </a:solidFill>
+                          <a:prstDash val="solid"/>
+                          <a:round/>
+                          <a:headEnd type="none" w="med" len="med"/>
+                          <a:tailEnd type="none" w="med" len="med"/>
+                        </a:lnL>
+                        <a:lnR w="12700" cap="flat" cmpd="sng" algn="ctr">
+                          <a:solidFill>
+                            <a:schemeClr val="tx1"/>
+                          </a:solidFill>
+                          <a:prstDash val="solid"/>
+                          <a:round/>
+                          <a:headEnd type="none" w="med" len="med"/>
+                          <a:tailEnd type="none" w="med" len="med"/>
+                        </a:lnR>
+                        <a:lnT w="12700" cap="flat" cmpd="sng" algn="ctr">
+                          <a:solidFill>
+                            <a:schemeClr val="tx1"/>
+                          </a:solidFill>
+                          <a:prstDash val="solid"/>
+                          <a:round/>
+                          <a:headEnd type="none" w="med" len="med"/>
+                          <a:tailEnd type="none" w="med" len="med"/>
+                        </a:lnT>
+                        <a:lnB w="12700" cap="flat" cmpd="sng" algn="ctr">
+                          <a:solidFill>
+                            <a:schemeClr val="tx1"/>
+                          </a:solidFill>
+                          <a:prstDash val="solid"/>
+                          <a:round/>
+                          <a:headEnd type="none" w="med" len="med"/>
+                          <a:tailEnd type="none" w="med" len="med"/>
+                        </a:lnB>
+                        <a:noFill/>
+                      </a:tcPr>
+                    </a:tc>
+                    <a:extLst>
+                      <a:ext uri="{0D108BD9-81ED-4DB2-BD59-A6C34878D82A}">
+                        <a16:rowId xmlns:a16="http://schemas.microsoft.com/office/drawing/2014/main" val="1904083088"/>
+                      </a:ext>
+                    </a:extLst>
+                  </a:tr>
+                  <a:tr h="396240">
+                    <a:tc>
+                      <a:txBody>
+                        <a:bodyPr/>
+                        <a:lstStyle/>
+                        <a:p>
+                          <a:pPr algn="ctr">
+                            <a:buNone/>
+                          </a:pPr>
+                          <a:r>
+                            <a:rPr lang="pt-BR" sz="2000" b="1" noProof="0" dirty="0">
+                              <a:latin typeface="+mn-lt"/>
+                            </a:rPr>
+                            <a:t>Tipo</a:t>
+                          </a:r>
+                          <a:endParaRPr lang="pt-BR" sz="2000" noProof="0" dirty="0">
+                            <a:latin typeface="+mn-lt"/>
+                          </a:endParaRPr>
+                        </a:p>
+                      </a:txBody>
+                      <a:tcPr anchor="ctr">
+                        <a:lnL w="12700" cap="flat" cmpd="sng" algn="ctr">
+                          <a:solidFill>
+                            <a:schemeClr val="tx1"/>
+                          </a:solidFill>
+                          <a:prstDash val="solid"/>
+                          <a:round/>
+                          <a:headEnd type="none" w="med" len="med"/>
+                          <a:tailEnd type="none" w="med" len="med"/>
+                        </a:lnL>
+                        <a:lnR w="12700" cap="flat" cmpd="sng" algn="ctr">
+                          <a:solidFill>
+                            <a:schemeClr val="tx1"/>
+                          </a:solidFill>
+                          <a:prstDash val="solid"/>
+                          <a:round/>
+                          <a:headEnd type="none" w="med" len="med"/>
+                          <a:tailEnd type="none" w="med" len="med"/>
+                        </a:lnR>
+                        <a:lnT w="12700" cap="flat" cmpd="sng" algn="ctr">
+                          <a:solidFill>
+                            <a:schemeClr val="tx1"/>
+                          </a:solidFill>
+                          <a:prstDash val="solid"/>
+                          <a:round/>
+                          <a:headEnd type="none" w="med" len="med"/>
+                          <a:tailEnd type="none" w="med" len="med"/>
+                        </a:lnT>
+                        <a:lnB w="12700" cap="flat" cmpd="sng" algn="ctr">
+                          <a:solidFill>
+                            <a:schemeClr val="tx1"/>
+                          </a:solidFill>
+                          <a:prstDash val="solid"/>
+                          <a:round/>
+                          <a:headEnd type="none" w="med" len="med"/>
+                          <a:tailEnd type="none" w="med" len="med"/>
+                        </a:lnB>
+                        <a:noFill/>
+                      </a:tcPr>
+                    </a:tc>
+                    <a:tc>
+                      <a:txBody>
+                        <a:bodyPr/>
+                        <a:lstStyle/>
+                        <a:p>
+                          <a:pPr algn="ctr">
+                            <a:buNone/>
+                          </a:pPr>
+                          <a:r>
+                            <a:rPr lang="pt-BR" sz="2000" noProof="0" dirty="0">
+                              <a:latin typeface="+mn-lt"/>
+                            </a:rPr>
+                            <a:t>Algorítmico/Iterativo</a:t>
+                          </a:r>
+                        </a:p>
+                      </a:txBody>
+                      <a:tcPr anchor="ctr">
+                        <a:lnL w="12700" cap="flat" cmpd="sng" algn="ctr">
+                          <a:solidFill>
+                            <a:schemeClr val="tx1"/>
+                          </a:solidFill>
+                          <a:prstDash val="solid"/>
+                          <a:round/>
+                          <a:headEnd type="none" w="med" len="med"/>
+                          <a:tailEnd type="none" w="med" len="med"/>
+                        </a:lnL>
+                        <a:lnR w="12700" cap="flat" cmpd="sng" algn="ctr">
+                          <a:solidFill>
+                            <a:schemeClr val="tx1"/>
+                          </a:solidFill>
+                          <a:prstDash val="solid"/>
+                          <a:round/>
+                          <a:headEnd type="none" w="med" len="med"/>
+                          <a:tailEnd type="none" w="med" len="med"/>
+                        </a:lnR>
+                        <a:lnT w="12700" cap="flat" cmpd="sng" algn="ctr">
+                          <a:solidFill>
+                            <a:schemeClr val="tx1"/>
+                          </a:solidFill>
+                          <a:prstDash val="solid"/>
+                          <a:round/>
+                          <a:headEnd type="none" w="med" len="med"/>
+                          <a:tailEnd type="none" w="med" len="med"/>
+                        </a:lnT>
+                        <a:lnB w="12700" cap="flat" cmpd="sng" algn="ctr">
+                          <a:solidFill>
+                            <a:schemeClr val="tx1"/>
+                          </a:solidFill>
+                          <a:prstDash val="solid"/>
+                          <a:round/>
+                          <a:headEnd type="none" w="med" len="med"/>
+                          <a:tailEnd type="none" w="med" len="med"/>
+                        </a:lnB>
+                        <a:noFill/>
+                      </a:tcPr>
+                    </a:tc>
+                    <a:tc>
+                      <a:txBody>
+                        <a:bodyPr/>
+                        <a:lstStyle/>
+                        <a:p>
+                          <a:pPr algn="ctr">
+                            <a:buNone/>
+                          </a:pPr>
+                          <a:r>
+                            <a:rPr lang="pt-BR" sz="2000" noProof="0" dirty="0">
+                              <a:latin typeface="+mn-lt"/>
+                            </a:rPr>
+                            <a:t>Analítico/Direto</a:t>
+                          </a:r>
+                        </a:p>
+                      </a:txBody>
+                      <a:tcPr anchor="ctr">
+                        <a:lnL w="12700" cap="flat" cmpd="sng" algn="ctr">
+                          <a:solidFill>
+                            <a:schemeClr val="tx1"/>
+                          </a:solidFill>
+                          <a:prstDash val="solid"/>
+                          <a:round/>
+                          <a:headEnd type="none" w="med" len="med"/>
+                          <a:tailEnd type="none" w="med" len="med"/>
+                        </a:lnL>
+                        <a:lnR w="12700" cap="flat" cmpd="sng" algn="ctr">
+                          <a:solidFill>
+                            <a:schemeClr val="tx1"/>
+                          </a:solidFill>
+                          <a:prstDash val="solid"/>
+                          <a:round/>
+                          <a:headEnd type="none" w="med" len="med"/>
+                          <a:tailEnd type="none" w="med" len="med"/>
+                        </a:lnR>
+                        <a:lnT w="12700" cap="flat" cmpd="sng" algn="ctr">
+                          <a:solidFill>
+                            <a:schemeClr val="tx1"/>
+                          </a:solidFill>
+                          <a:prstDash val="solid"/>
+                          <a:round/>
+                          <a:headEnd type="none" w="med" len="med"/>
+                          <a:tailEnd type="none" w="med" len="med"/>
+                        </a:lnT>
+                        <a:lnB w="12700" cap="flat" cmpd="sng" algn="ctr">
+                          <a:solidFill>
+                            <a:schemeClr val="tx1"/>
+                          </a:solidFill>
+                          <a:prstDash val="solid"/>
+                          <a:round/>
+                          <a:headEnd type="none" w="med" len="med"/>
+                          <a:tailEnd type="none" w="med" len="med"/>
+                        </a:lnB>
+                        <a:noFill/>
+                      </a:tcPr>
+                    </a:tc>
+                    <a:extLst>
+                      <a:ext uri="{0D108BD9-81ED-4DB2-BD59-A6C34878D82A}">
+                        <a16:rowId xmlns:a16="http://schemas.microsoft.com/office/drawing/2014/main" val="2085415063"/>
+                      </a:ext>
+                    </a:extLst>
+                  </a:tr>
+                  <a:tr h="396240">
+                    <a:tc>
+                      <a:txBody>
+                        <a:bodyPr/>
+                        <a:lstStyle/>
+                        <a:p>
+                          <a:pPr algn="ctr">
+                            <a:buNone/>
+                          </a:pPr>
+                          <a:r>
+                            <a:rPr lang="pt-BR" sz="2000" b="1" noProof="0" dirty="0">
+                              <a:latin typeface="+mn-lt"/>
+                            </a:rPr>
+                            <a:t>Complexidade</a:t>
+                          </a:r>
+                          <a:endParaRPr lang="pt-BR" sz="2000" noProof="0" dirty="0">
+                            <a:latin typeface="+mn-lt"/>
+                          </a:endParaRPr>
+                        </a:p>
+                      </a:txBody>
+                      <a:tcPr anchor="ctr">
+                        <a:lnL w="12700" cap="flat" cmpd="sng" algn="ctr">
+                          <a:solidFill>
+                            <a:schemeClr val="tx1"/>
+                          </a:solidFill>
+                          <a:prstDash val="solid"/>
+                          <a:round/>
+                          <a:headEnd type="none" w="med" len="med"/>
+                          <a:tailEnd type="none" w="med" len="med"/>
+                        </a:lnL>
+                        <a:lnR w="12700" cap="flat" cmpd="sng" algn="ctr">
+                          <a:solidFill>
+                            <a:schemeClr val="tx1"/>
+                          </a:solidFill>
+                          <a:prstDash val="solid"/>
+                          <a:round/>
+                          <a:headEnd type="none" w="med" len="med"/>
+                          <a:tailEnd type="none" w="med" len="med"/>
+                        </a:lnR>
+                        <a:lnT w="12700" cap="flat" cmpd="sng" algn="ctr">
+                          <a:solidFill>
+                            <a:schemeClr val="tx1"/>
+                          </a:solidFill>
+                          <a:prstDash val="solid"/>
+                          <a:round/>
+                          <a:headEnd type="none" w="med" len="med"/>
+                          <a:tailEnd type="none" w="med" len="med"/>
+                        </a:lnT>
+                        <a:lnB w="12700" cap="flat" cmpd="sng" algn="ctr">
+                          <a:solidFill>
+                            <a:schemeClr val="tx1"/>
+                          </a:solidFill>
+                          <a:prstDash val="solid"/>
+                          <a:round/>
+                          <a:headEnd type="none" w="med" len="med"/>
+                          <a:tailEnd type="none" w="med" len="med"/>
+                        </a:lnB>
+                        <a:noFill/>
+                      </a:tcPr>
+                    </a:tc>
+                    <a:tc>
+                      <a:txBody>
+                        <a:bodyPr/>
+                        <a:lstStyle/>
+                        <a:p>
+                          <a:endParaRPr lang="en-US"/>
+                        </a:p>
+                      </a:txBody>
+                      <a:tcPr anchor="ctr">
+                        <a:lnL w="12700" cap="flat" cmpd="sng" algn="ctr">
+                          <a:solidFill>
+                            <a:schemeClr val="tx1"/>
+                          </a:solidFill>
+                          <a:prstDash val="solid"/>
+                          <a:round/>
+                          <a:headEnd type="none" w="med" len="med"/>
+                          <a:tailEnd type="none" w="med" len="med"/>
+                        </a:lnL>
+                        <a:lnR w="12700" cap="flat" cmpd="sng" algn="ctr">
+                          <a:solidFill>
+                            <a:schemeClr val="tx1"/>
+                          </a:solidFill>
+                          <a:prstDash val="solid"/>
+                          <a:round/>
+                          <a:headEnd type="none" w="med" len="med"/>
+                          <a:tailEnd type="none" w="med" len="med"/>
+                        </a:lnR>
+                        <a:lnT w="12700" cap="flat" cmpd="sng" algn="ctr">
+                          <a:solidFill>
+                            <a:schemeClr val="tx1"/>
+                          </a:solidFill>
+                          <a:prstDash val="solid"/>
+                          <a:round/>
+                          <a:headEnd type="none" w="med" len="med"/>
+                          <a:tailEnd type="none" w="med" len="med"/>
+                        </a:lnT>
+                        <a:lnB w="12700" cap="flat" cmpd="sng" algn="ctr">
+                          <a:solidFill>
+                            <a:schemeClr val="tx1"/>
+                          </a:solidFill>
+                          <a:prstDash val="solid"/>
+                          <a:round/>
+                          <a:headEnd type="none" w="med" len="med"/>
+                          <a:tailEnd type="none" w="med" len="med"/>
+                        </a:lnB>
+                        <a:blipFill>
+                          <a:blip r:embed="rId2"/>
+                          <a:stretch>
+                            <a:fillRect l="-42545" t="-207692" r="-104884" b="-735385"/>
+                          </a:stretch>
+                        </a:blipFill>
+                      </a:tcPr>
+                    </a:tc>
+                    <a:tc>
+                      <a:txBody>
+                        <a:bodyPr/>
+                        <a:lstStyle/>
+                        <a:p>
+                          <a:endParaRPr lang="en-US"/>
+                        </a:p>
+                      </a:txBody>
+                      <a:tcPr anchor="ctr">
+                        <a:lnL w="12700" cap="flat" cmpd="sng" algn="ctr">
+                          <a:solidFill>
+                            <a:schemeClr val="tx1"/>
+                          </a:solidFill>
+                          <a:prstDash val="solid"/>
+                          <a:round/>
+                          <a:headEnd type="none" w="med" len="med"/>
+                          <a:tailEnd type="none" w="med" len="med"/>
+                        </a:lnL>
+                        <a:lnR w="12700" cap="flat" cmpd="sng" algn="ctr">
+                          <a:solidFill>
+                            <a:schemeClr val="tx1"/>
+                          </a:solidFill>
+                          <a:prstDash val="solid"/>
+                          <a:round/>
+                          <a:headEnd type="none" w="med" len="med"/>
+                          <a:tailEnd type="none" w="med" len="med"/>
+                        </a:lnR>
+                        <a:lnT w="12700" cap="flat" cmpd="sng" algn="ctr">
+                          <a:solidFill>
+                            <a:schemeClr val="tx1"/>
+                          </a:solidFill>
+                          <a:prstDash val="solid"/>
+                          <a:round/>
+                          <a:headEnd type="none" w="med" len="med"/>
+                          <a:tailEnd type="none" w="med" len="med"/>
+                        </a:lnT>
+                        <a:lnB w="12700" cap="flat" cmpd="sng" algn="ctr">
+                          <a:solidFill>
+                            <a:schemeClr val="tx1"/>
+                          </a:solidFill>
+                          <a:prstDash val="solid"/>
+                          <a:round/>
+                          <a:headEnd type="none" w="med" len="med"/>
+                          <a:tailEnd type="none" w="med" len="med"/>
+                        </a:lnB>
+                        <a:blipFill>
+                          <a:blip r:embed="rId2"/>
+                          <a:stretch>
+                            <a:fillRect l="-136241" t="-207692" r="-246" b="-735385"/>
+                          </a:stretch>
+                        </a:blipFill>
+                      </a:tcPr>
+                    </a:tc>
+                    <a:extLst>
+                      <a:ext uri="{0D108BD9-81ED-4DB2-BD59-A6C34878D82A}">
+                        <a16:rowId xmlns:a16="http://schemas.microsoft.com/office/drawing/2014/main" val="3585385241"/>
+                      </a:ext>
+                    </a:extLst>
+                  </a:tr>
+                  <a:tr h="396240">
+                    <a:tc>
+                      <a:txBody>
+                        <a:bodyPr/>
+                        <a:lstStyle/>
+                        <a:p>
+                          <a:pPr algn="ctr">
+                            <a:buNone/>
+                          </a:pPr>
+                          <a:r>
+                            <a:rPr lang="pt-BR" sz="2000" b="1" noProof="0" dirty="0">
+                              <a:latin typeface="+mn-lt"/>
+                            </a:rPr>
+                            <a:t>Escalabilidade</a:t>
+                          </a:r>
+                          <a:endParaRPr lang="pt-BR" sz="2000" noProof="0" dirty="0">
+                            <a:latin typeface="+mn-lt"/>
+                          </a:endParaRPr>
+                        </a:p>
+                      </a:txBody>
+                      <a:tcPr anchor="ctr">
+                        <a:lnL w="12700" cap="flat" cmpd="sng" algn="ctr">
+                          <a:solidFill>
+                            <a:schemeClr val="tx1"/>
+                          </a:solidFill>
+                          <a:prstDash val="solid"/>
+                          <a:round/>
+                          <a:headEnd type="none" w="med" len="med"/>
+                          <a:tailEnd type="none" w="med" len="med"/>
+                        </a:lnL>
+                        <a:lnR w="12700" cap="flat" cmpd="sng" algn="ctr">
+                          <a:solidFill>
+                            <a:schemeClr val="tx1"/>
+                          </a:solidFill>
+                          <a:prstDash val="solid"/>
+                          <a:round/>
+                          <a:headEnd type="none" w="med" len="med"/>
+                          <a:tailEnd type="none" w="med" len="med"/>
+                        </a:lnR>
+                        <a:lnT w="12700" cap="flat" cmpd="sng" algn="ctr">
+                          <a:solidFill>
+                            <a:schemeClr val="tx1"/>
+                          </a:solidFill>
+                          <a:prstDash val="solid"/>
+                          <a:round/>
+                          <a:headEnd type="none" w="med" len="med"/>
+                          <a:tailEnd type="none" w="med" len="med"/>
+                        </a:lnT>
+                        <a:lnB w="12700" cap="flat" cmpd="sng" algn="ctr">
+                          <a:solidFill>
+                            <a:schemeClr val="tx1"/>
+                          </a:solidFill>
+                          <a:prstDash val="solid"/>
+                          <a:round/>
+                          <a:headEnd type="none" w="med" len="med"/>
+                          <a:tailEnd type="none" w="med" len="med"/>
+                        </a:lnB>
+                        <a:noFill/>
+                      </a:tcPr>
+                    </a:tc>
+                    <a:tc>
+                      <a:txBody>
+                        <a:bodyPr/>
+                        <a:lstStyle/>
+                        <a:p>
+                          <a:pPr algn="ctr">
+                            <a:buNone/>
+                          </a:pPr>
+                          <a:r>
+                            <a:rPr lang="pt-BR" sz="2000" noProof="0" dirty="0">
+                              <a:latin typeface="+mn-lt"/>
+                            </a:rPr>
+                            <a:t>Alta (lida bem com milhões de dados)</a:t>
+                          </a:r>
+                        </a:p>
+                      </a:txBody>
+                      <a:tcPr anchor="ctr">
+                        <a:lnL w="12700" cap="flat" cmpd="sng" algn="ctr">
+                          <a:solidFill>
+                            <a:schemeClr val="tx1"/>
+                          </a:solidFill>
+                          <a:prstDash val="solid"/>
+                          <a:round/>
+                          <a:headEnd type="none" w="med" len="med"/>
+                          <a:tailEnd type="none" w="med" len="med"/>
+                        </a:lnL>
+                        <a:lnR w="12700" cap="flat" cmpd="sng" algn="ctr">
+                          <a:solidFill>
+                            <a:schemeClr val="tx1"/>
+                          </a:solidFill>
+                          <a:prstDash val="solid"/>
+                          <a:round/>
+                          <a:headEnd type="none" w="med" len="med"/>
+                          <a:tailEnd type="none" w="med" len="med"/>
+                        </a:lnR>
+                        <a:lnT w="12700" cap="flat" cmpd="sng" algn="ctr">
+                          <a:solidFill>
+                            <a:schemeClr val="tx1"/>
+                          </a:solidFill>
+                          <a:prstDash val="solid"/>
+                          <a:round/>
+                          <a:headEnd type="none" w="med" len="med"/>
+                          <a:tailEnd type="none" w="med" len="med"/>
+                        </a:lnT>
+                        <a:lnB w="12700" cap="flat" cmpd="sng" algn="ctr">
+                          <a:solidFill>
+                            <a:schemeClr val="tx1"/>
+                          </a:solidFill>
+                          <a:prstDash val="solid"/>
+                          <a:round/>
+                          <a:headEnd type="none" w="med" len="med"/>
+                          <a:tailEnd type="none" w="med" len="med"/>
+                        </a:lnB>
+                        <a:noFill/>
+                      </a:tcPr>
+                    </a:tc>
+                    <a:tc>
+                      <a:txBody>
+                        <a:bodyPr/>
+                        <a:lstStyle/>
+                        <a:p>
+                          <a:pPr algn="ctr">
+                            <a:buNone/>
+                          </a:pPr>
+                          <a:r>
+                            <a:rPr lang="pt-BR" sz="2000" noProof="0" dirty="0">
+                              <a:latin typeface="+mn-lt"/>
+                            </a:rPr>
+                            <a:t>Baixa (lenta para muitas variáveis)</a:t>
+                          </a:r>
+                        </a:p>
+                      </a:txBody>
+                      <a:tcPr anchor="ctr">
+                        <a:lnL w="12700" cap="flat" cmpd="sng" algn="ctr">
+                          <a:solidFill>
+                            <a:schemeClr val="tx1"/>
+                          </a:solidFill>
+                          <a:prstDash val="solid"/>
+                          <a:round/>
+                          <a:headEnd type="none" w="med" len="med"/>
+                          <a:tailEnd type="none" w="med" len="med"/>
+                        </a:lnL>
+                        <a:lnR w="12700" cap="flat" cmpd="sng" algn="ctr">
+                          <a:solidFill>
+                            <a:schemeClr val="tx1"/>
+                          </a:solidFill>
+                          <a:prstDash val="solid"/>
+                          <a:round/>
+                          <a:headEnd type="none" w="med" len="med"/>
+                          <a:tailEnd type="none" w="med" len="med"/>
+                        </a:lnR>
+                        <a:lnT w="12700" cap="flat" cmpd="sng" algn="ctr">
+                          <a:solidFill>
+                            <a:schemeClr val="tx1"/>
+                          </a:solidFill>
+                          <a:prstDash val="solid"/>
+                          <a:round/>
+                          <a:headEnd type="none" w="med" len="med"/>
+                          <a:tailEnd type="none" w="med" len="med"/>
+                        </a:lnT>
+                        <a:lnB w="12700" cap="flat" cmpd="sng" algn="ctr">
+                          <a:solidFill>
+                            <a:schemeClr val="tx1"/>
+                          </a:solidFill>
+                          <a:prstDash val="solid"/>
+                          <a:round/>
+                          <a:headEnd type="none" w="med" len="med"/>
+                          <a:tailEnd type="none" w="med" len="med"/>
+                        </a:lnB>
+                        <a:noFill/>
+                      </a:tcPr>
+                    </a:tc>
+                    <a:extLst>
+                      <a:ext uri="{0D108BD9-81ED-4DB2-BD59-A6C34878D82A}">
+                        <a16:rowId xmlns:a16="http://schemas.microsoft.com/office/drawing/2014/main" val="3293643069"/>
+                      </a:ext>
+                    </a:extLst>
+                  </a:tr>
+                  <a:tr h="396240">
+                    <a:tc>
+                      <a:txBody>
+                        <a:bodyPr/>
+                        <a:lstStyle/>
+                        <a:p>
+                          <a:pPr algn="ctr">
+                            <a:buNone/>
+                          </a:pPr>
+                          <a:r>
+                            <a:rPr lang="pt-BR" sz="2000" b="1" noProof="0" dirty="0">
+                              <a:latin typeface="+mn-lt"/>
+                            </a:rPr>
+                            <a:t>Parâmetros</a:t>
+                          </a:r>
+                          <a:endParaRPr lang="pt-BR" sz="2000" noProof="0" dirty="0">
+                            <a:latin typeface="+mn-lt"/>
+                          </a:endParaRPr>
+                        </a:p>
+                      </a:txBody>
+                      <a:tcPr anchor="ctr">
+                        <a:lnL w="12700" cap="flat" cmpd="sng" algn="ctr">
+                          <a:solidFill>
+                            <a:schemeClr val="tx1"/>
+                          </a:solidFill>
+                          <a:prstDash val="solid"/>
+                          <a:round/>
+                          <a:headEnd type="none" w="med" len="med"/>
+                          <a:tailEnd type="none" w="med" len="med"/>
+                        </a:lnL>
+                        <a:lnR w="12700" cap="flat" cmpd="sng" algn="ctr">
+                          <a:solidFill>
+                            <a:schemeClr val="tx1"/>
+                          </a:solidFill>
+                          <a:prstDash val="solid"/>
+                          <a:round/>
+                          <a:headEnd type="none" w="med" len="med"/>
+                          <a:tailEnd type="none" w="med" len="med"/>
+                        </a:lnR>
+                        <a:lnT w="12700" cap="flat" cmpd="sng" algn="ctr">
+                          <a:solidFill>
+                            <a:schemeClr val="tx1"/>
+                          </a:solidFill>
+                          <a:prstDash val="solid"/>
+                          <a:round/>
+                          <a:headEnd type="none" w="med" len="med"/>
+                          <a:tailEnd type="none" w="med" len="med"/>
+                        </a:lnT>
+                        <a:lnB w="12700" cap="flat" cmpd="sng" algn="ctr">
+                          <a:solidFill>
+                            <a:schemeClr val="tx1"/>
+                          </a:solidFill>
+                          <a:prstDash val="solid"/>
+                          <a:round/>
+                          <a:headEnd type="none" w="med" len="med"/>
+                          <a:tailEnd type="none" w="med" len="med"/>
+                        </a:lnB>
+                        <a:noFill/>
+                      </a:tcPr>
+                    </a:tc>
+                    <a:tc>
+                      <a:txBody>
+                        <a:bodyPr/>
+                        <a:lstStyle/>
+                        <a:p>
+                          <a:endParaRPr lang="en-US"/>
+                        </a:p>
+                      </a:txBody>
+                      <a:tcPr anchor="ctr">
+                        <a:lnL w="12700" cap="flat" cmpd="sng" algn="ctr">
+                          <a:solidFill>
+                            <a:schemeClr val="tx1"/>
+                          </a:solidFill>
+                          <a:prstDash val="solid"/>
+                          <a:round/>
+                          <a:headEnd type="none" w="med" len="med"/>
+                          <a:tailEnd type="none" w="med" len="med"/>
+                        </a:lnL>
+                        <a:lnR w="12700" cap="flat" cmpd="sng" algn="ctr">
+                          <a:solidFill>
+                            <a:schemeClr val="tx1"/>
+                          </a:solidFill>
+                          <a:prstDash val="solid"/>
+                          <a:round/>
+                          <a:headEnd type="none" w="med" len="med"/>
+                          <a:tailEnd type="none" w="med" len="med"/>
+                        </a:lnR>
+                        <a:lnT w="12700" cap="flat" cmpd="sng" algn="ctr">
+                          <a:solidFill>
+                            <a:schemeClr val="tx1"/>
+                          </a:solidFill>
+                          <a:prstDash val="solid"/>
+                          <a:round/>
+                          <a:headEnd type="none" w="med" len="med"/>
+                          <a:tailEnd type="none" w="med" len="med"/>
+                        </a:lnT>
+                        <a:lnB w="12700" cap="flat" cmpd="sng" algn="ctr">
+                          <a:solidFill>
+                            <a:schemeClr val="tx1"/>
+                          </a:solidFill>
+                          <a:prstDash val="solid"/>
+                          <a:round/>
+                          <a:headEnd type="none" w="med" len="med"/>
+                          <a:tailEnd type="none" w="med" len="med"/>
+                        </a:lnB>
+                        <a:blipFill>
+                          <a:blip r:embed="rId2"/>
+                          <a:stretch>
+                            <a:fillRect l="-42545" t="-407692" r="-104884" b="-535385"/>
+                          </a:stretch>
+                        </a:blipFill>
+                      </a:tcPr>
+                    </a:tc>
+                    <a:tc>
+                      <a:txBody>
+                        <a:bodyPr/>
+                        <a:lstStyle/>
+                        <a:p>
+                          <a:pPr algn="ctr">
+                            <a:buNone/>
+                          </a:pPr>
+                          <a:r>
+                            <a:rPr lang="pt-BR" sz="2000" noProof="0" dirty="0">
+                              <a:latin typeface="+mn-lt"/>
+                            </a:rPr>
+                            <a:t>Nenhum</a:t>
+                          </a:r>
+                        </a:p>
+                      </a:txBody>
+                      <a:tcPr anchor="ctr">
+                        <a:lnL w="12700" cap="flat" cmpd="sng" algn="ctr">
+                          <a:solidFill>
+                            <a:schemeClr val="tx1"/>
+                          </a:solidFill>
+                          <a:prstDash val="solid"/>
+                          <a:round/>
+                          <a:headEnd type="none" w="med" len="med"/>
+                          <a:tailEnd type="none" w="med" len="med"/>
+                        </a:lnL>
+                        <a:lnR w="12700" cap="flat" cmpd="sng" algn="ctr">
+                          <a:solidFill>
+                            <a:schemeClr val="tx1"/>
+                          </a:solidFill>
+                          <a:prstDash val="solid"/>
+                          <a:round/>
+                          <a:headEnd type="none" w="med" len="med"/>
+                          <a:tailEnd type="none" w="med" len="med"/>
+                        </a:lnR>
+                        <a:lnT w="12700" cap="flat" cmpd="sng" algn="ctr">
+                          <a:solidFill>
+                            <a:schemeClr val="tx1"/>
+                          </a:solidFill>
+                          <a:prstDash val="solid"/>
+                          <a:round/>
+                          <a:headEnd type="none" w="med" len="med"/>
+                          <a:tailEnd type="none" w="med" len="med"/>
+                        </a:lnT>
+                        <a:lnB w="12700" cap="flat" cmpd="sng" algn="ctr">
+                          <a:solidFill>
+                            <a:schemeClr val="tx1"/>
+                          </a:solidFill>
+                          <a:prstDash val="solid"/>
+                          <a:round/>
+                          <a:headEnd type="none" w="med" len="med"/>
+                          <a:tailEnd type="none" w="med" len="med"/>
+                        </a:lnB>
+                        <a:noFill/>
+                      </a:tcPr>
+                    </a:tc>
+                    <a:extLst>
+                      <a:ext uri="{0D108BD9-81ED-4DB2-BD59-A6C34878D82A}">
+                        <a16:rowId xmlns:a16="http://schemas.microsoft.com/office/drawing/2014/main" val="2874329883"/>
+                      </a:ext>
+                    </a:extLst>
+                  </a:tr>
+                  <a:tr h="396240">
+                    <a:tc>
+                      <a:txBody>
+                        <a:bodyPr/>
+                        <a:lstStyle/>
+                        <a:p>
+                          <a:pPr algn="ctr">
+                            <a:buNone/>
+                          </a:pPr>
+                          <a:r>
+                            <a:rPr lang="pt-BR" sz="2000" b="1" noProof="0" dirty="0">
+                              <a:latin typeface="+mn-lt"/>
+                            </a:rPr>
+                            <a:t>Uso principal</a:t>
+                          </a:r>
+                          <a:endParaRPr lang="pt-BR" sz="2000" noProof="0" dirty="0">
+                            <a:latin typeface="+mn-lt"/>
+                          </a:endParaRPr>
+                        </a:p>
+                      </a:txBody>
+                      <a:tcPr anchor="ctr">
+                        <a:lnL w="12700" cap="flat" cmpd="sng" algn="ctr">
+                          <a:solidFill>
+                            <a:schemeClr val="tx1"/>
+                          </a:solidFill>
+                          <a:prstDash val="solid"/>
+                          <a:round/>
+                          <a:headEnd type="none" w="med" len="med"/>
+                          <a:tailEnd type="none" w="med" len="med"/>
+                        </a:lnL>
+                        <a:lnR w="12700" cap="flat" cmpd="sng" algn="ctr">
+                          <a:solidFill>
+                            <a:schemeClr val="tx1"/>
+                          </a:solidFill>
+                          <a:prstDash val="solid"/>
+                          <a:round/>
+                          <a:headEnd type="none" w="med" len="med"/>
+                          <a:tailEnd type="none" w="med" len="med"/>
+                        </a:lnR>
+                        <a:lnT w="12700" cap="flat" cmpd="sng" algn="ctr">
+                          <a:solidFill>
+                            <a:schemeClr val="tx1"/>
+                          </a:solidFill>
+                          <a:prstDash val="solid"/>
+                          <a:round/>
+                          <a:headEnd type="none" w="med" len="med"/>
+                          <a:tailEnd type="none" w="med" len="med"/>
+                        </a:lnT>
+                        <a:lnB w="12700" cap="flat" cmpd="sng" algn="ctr">
+                          <a:solidFill>
+                            <a:schemeClr val="tx1"/>
+                          </a:solidFill>
+                          <a:prstDash val="solid"/>
+                          <a:round/>
+                          <a:headEnd type="none" w="med" len="med"/>
+                          <a:tailEnd type="none" w="med" len="med"/>
+                        </a:lnB>
+                        <a:noFill/>
+                      </a:tcPr>
+                    </a:tc>
+                    <a:tc>
+                      <a:txBody>
+                        <a:bodyPr/>
+                        <a:lstStyle/>
+                        <a:p>
+                          <a:pPr algn="ctr">
+                            <a:buNone/>
+                          </a:pPr>
+                          <a:r>
+                            <a:rPr lang="pt-BR" sz="2000" noProof="0" dirty="0">
+                              <a:latin typeface="+mn-lt"/>
+                            </a:rPr>
+                            <a:t>Regressão linear e logística/Redes neurais</a:t>
+                          </a:r>
+                        </a:p>
+                      </a:txBody>
+                      <a:tcPr anchor="ctr">
+                        <a:lnL w="12700" cap="flat" cmpd="sng" algn="ctr">
+                          <a:solidFill>
+                            <a:schemeClr val="tx1"/>
+                          </a:solidFill>
+                          <a:prstDash val="solid"/>
+                          <a:round/>
+                          <a:headEnd type="none" w="med" len="med"/>
+                          <a:tailEnd type="none" w="med" len="med"/>
+                        </a:lnL>
+                        <a:lnR w="12700" cap="flat" cmpd="sng" algn="ctr">
+                          <a:solidFill>
+                            <a:schemeClr val="tx1"/>
+                          </a:solidFill>
+                          <a:prstDash val="solid"/>
+                          <a:round/>
+                          <a:headEnd type="none" w="med" len="med"/>
+                          <a:tailEnd type="none" w="med" len="med"/>
+                        </a:lnR>
+                        <a:lnT w="12700" cap="flat" cmpd="sng" algn="ctr">
+                          <a:solidFill>
+                            <a:schemeClr val="tx1"/>
+                          </a:solidFill>
+                          <a:prstDash val="solid"/>
+                          <a:round/>
+                          <a:headEnd type="none" w="med" len="med"/>
+                          <a:tailEnd type="none" w="med" len="med"/>
+                        </a:lnT>
+                        <a:lnB w="12700" cap="flat" cmpd="sng" algn="ctr">
+                          <a:solidFill>
+                            <a:schemeClr val="tx1"/>
+                          </a:solidFill>
+                          <a:prstDash val="solid"/>
+                          <a:round/>
+                          <a:headEnd type="none" w="med" len="med"/>
+                          <a:tailEnd type="none" w="med" len="med"/>
+                        </a:lnB>
+                        <a:noFill/>
+                      </a:tcPr>
+                    </a:tc>
+                    <a:tc>
+                      <a:txBody>
+                        <a:bodyPr/>
+                        <a:lstStyle/>
+                        <a:p>
+                          <a:pPr algn="ctr">
+                            <a:buNone/>
+                          </a:pPr>
+                          <a:r>
+                            <a:rPr lang="pt-BR" sz="2000" noProof="0" dirty="0">
+                              <a:latin typeface="+mn-lt"/>
+                            </a:rPr>
+                            <a:t>Estatística clássica/</a:t>
+                          </a:r>
+                          <a:r>
+                            <a:rPr lang="pt-BR" sz="2000" i="1" noProof="0" dirty="0" err="1">
+                              <a:latin typeface="+mn-lt"/>
+                            </a:rPr>
+                            <a:t>Datasets</a:t>
+                          </a:r>
+                          <a:r>
+                            <a:rPr lang="pt-BR" sz="2000" noProof="0" dirty="0">
+                              <a:latin typeface="+mn-lt"/>
+                            </a:rPr>
+                            <a:t> pequenos</a:t>
+                          </a:r>
+                        </a:p>
+                      </a:txBody>
+                      <a:tcPr anchor="ctr">
+                        <a:lnL w="12700" cap="flat" cmpd="sng" algn="ctr">
+                          <a:solidFill>
+                            <a:schemeClr val="tx1"/>
+                          </a:solidFill>
+                          <a:prstDash val="solid"/>
+                          <a:round/>
+                          <a:headEnd type="none" w="med" len="med"/>
+                          <a:tailEnd type="none" w="med" len="med"/>
+                        </a:lnL>
+                        <a:lnR w="12700" cap="flat" cmpd="sng" algn="ctr">
+                          <a:solidFill>
+                            <a:schemeClr val="tx1"/>
+                          </a:solidFill>
+                          <a:prstDash val="solid"/>
+                          <a:round/>
+                          <a:headEnd type="none" w="med" len="med"/>
+                          <a:tailEnd type="none" w="med" len="med"/>
+                        </a:lnR>
+                        <a:lnT w="12700" cap="flat" cmpd="sng" algn="ctr">
+                          <a:solidFill>
+                            <a:schemeClr val="tx1"/>
+                          </a:solidFill>
+                          <a:prstDash val="solid"/>
+                          <a:round/>
+                          <a:headEnd type="none" w="med" len="med"/>
+                          <a:tailEnd type="none" w="med" len="med"/>
+                        </a:lnT>
+                        <a:lnB w="12700" cap="flat" cmpd="sng" algn="ctr">
+                          <a:solidFill>
+                            <a:schemeClr val="tx1"/>
+                          </a:solidFill>
+                          <a:prstDash val="solid"/>
+                          <a:round/>
+                          <a:headEnd type="none" w="med" len="med"/>
+                          <a:tailEnd type="none" w="med" len="med"/>
+                        </a:lnB>
+                        <a:noFill/>
+                      </a:tcPr>
+                    </a:tc>
+                    <a:extLst>
+                      <a:ext uri="{0D108BD9-81ED-4DB2-BD59-A6C34878D82A}">
+                        <a16:rowId xmlns:a16="http://schemas.microsoft.com/office/drawing/2014/main" val="1234521875"/>
+                      </a:ext>
+                    </a:extLst>
+                  </a:tr>
+                  <a:tr h="1615440">
+                    <a:tc>
+                      <a:txBody>
+                        <a:bodyPr/>
+                        <a:lstStyle/>
+                        <a:p>
+                          <a:pPr algn="ctr">
+                            <a:buNone/>
+                          </a:pPr>
+                          <a:r>
+                            <a:rPr lang="pt-BR" sz="2000" b="1" noProof="0" dirty="0">
+                              <a:latin typeface="+mn-lt"/>
+                            </a:rPr>
+                            <a:t>Observações</a:t>
+                          </a:r>
+                        </a:p>
+                      </a:txBody>
+                      <a:tcPr anchor="ctr">
+                        <a:lnL w="12700" cap="flat" cmpd="sng" algn="ctr">
+                          <a:solidFill>
+                            <a:schemeClr val="tx1"/>
+                          </a:solidFill>
+                          <a:prstDash val="solid"/>
+                          <a:round/>
+                          <a:headEnd type="none" w="med" len="med"/>
+                          <a:tailEnd type="none" w="med" len="med"/>
+                        </a:lnL>
+                        <a:lnR w="12700" cap="flat" cmpd="sng" algn="ctr">
+                          <a:solidFill>
+                            <a:schemeClr val="tx1"/>
+                          </a:solidFill>
+                          <a:prstDash val="solid"/>
+                          <a:round/>
+                          <a:headEnd type="none" w="med" len="med"/>
+                          <a:tailEnd type="none" w="med" len="med"/>
+                        </a:lnR>
+                        <a:lnT w="12700" cap="flat" cmpd="sng" algn="ctr">
+                          <a:solidFill>
+                            <a:schemeClr val="tx1"/>
+                          </a:solidFill>
+                          <a:prstDash val="solid"/>
+                          <a:round/>
+                          <a:headEnd type="none" w="med" len="med"/>
+                          <a:tailEnd type="none" w="med" len="med"/>
+                        </a:lnT>
+                        <a:lnB w="12700" cap="flat" cmpd="sng" algn="ctr">
+                          <a:solidFill>
+                            <a:schemeClr val="tx1"/>
+                          </a:solidFill>
+                          <a:prstDash val="solid"/>
+                          <a:round/>
+                          <a:headEnd type="none" w="med" len="med"/>
+                          <a:tailEnd type="none" w="med" len="med"/>
+                        </a:lnB>
+                        <a:noFill/>
+                      </a:tcPr>
+                    </a:tc>
+                    <a:tc>
+                      <a:txBody>
+                        <a:bodyPr/>
+                        <a:lstStyle/>
+                        <a:p>
+                          <a:pPr marL="342900" indent="-342900" algn="l">
+                            <a:buFont typeface="Arial" panose="020B0604020202020204" pitchFamily="34" charset="0"/>
+                            <a:buChar char="•"/>
+                          </a:pPr>
+                          <a:r>
+                            <a:rPr lang="pt-BR" sz="2000" noProof="0" dirty="0">
+                              <a:latin typeface="+mn-lt"/>
+                            </a:rPr>
+                            <a:t>Pode exigir muitas iterações para convergir.</a:t>
+                          </a:r>
+                        </a:p>
+                        <a:p>
+                          <a:pPr marL="342900" indent="-342900" algn="l">
+                            <a:buFont typeface="Arial" panose="020B0604020202020204" pitchFamily="34" charset="0"/>
+                            <a:buChar char="•"/>
+                          </a:pPr>
+                          <a:r>
+                            <a:rPr lang="pt-BR" sz="2000" noProof="0" dirty="0">
+                              <a:latin typeface="+mn-lt"/>
+                            </a:rPr>
+                            <a:t>A função de erro deve ser </a:t>
+                          </a:r>
+                          <a:r>
+                            <a:rPr lang="pt-BR" sz="2000" noProof="0" dirty="0" err="1">
+                              <a:latin typeface="+mn-lt"/>
+                            </a:rPr>
+                            <a:t>diferenciável</a:t>
+                          </a:r>
+                          <a:r>
+                            <a:rPr lang="pt-BR" sz="2000" noProof="0" dirty="0">
+                              <a:latin typeface="+mn-lt"/>
+                            </a:rPr>
+                            <a:t>.</a:t>
+                          </a:r>
+                        </a:p>
+                        <a:p>
+                          <a:pPr marL="342900" indent="-342900" algn="l">
+                            <a:buFont typeface="Arial" panose="020B0604020202020204" pitchFamily="34" charset="0"/>
+                            <a:buChar char="•"/>
+                          </a:pPr>
+                          <a:r>
+                            <a:rPr lang="pt-BR" sz="2000" noProof="0" dirty="0">
+                              <a:latin typeface="+mn-lt"/>
+                            </a:rPr>
+                            <a:t>É flexível, podendo ser ajustado à quantidade de memória disponível.</a:t>
+                          </a:r>
+                        </a:p>
+                      </a:txBody>
+                      <a:tcPr anchor="ctr">
+                        <a:lnL w="12700" cap="flat" cmpd="sng" algn="ctr">
+                          <a:solidFill>
+                            <a:schemeClr val="tx1"/>
+                          </a:solidFill>
+                          <a:prstDash val="solid"/>
+                          <a:round/>
+                          <a:headEnd type="none" w="med" len="med"/>
+                          <a:tailEnd type="none" w="med" len="med"/>
+                        </a:lnL>
+                        <a:lnR w="12700" cap="flat" cmpd="sng" algn="ctr">
+                          <a:solidFill>
+                            <a:schemeClr val="tx1"/>
+                          </a:solidFill>
+                          <a:prstDash val="solid"/>
+                          <a:round/>
+                          <a:headEnd type="none" w="med" len="med"/>
+                          <a:tailEnd type="none" w="med" len="med"/>
+                        </a:lnR>
+                        <a:lnT w="12700" cap="flat" cmpd="sng" algn="ctr">
+                          <a:solidFill>
+                            <a:schemeClr val="tx1"/>
+                          </a:solidFill>
+                          <a:prstDash val="solid"/>
+                          <a:round/>
+                          <a:headEnd type="none" w="med" len="med"/>
+                          <a:tailEnd type="none" w="med" len="med"/>
+                        </a:lnT>
+                        <a:lnB w="12700" cap="flat" cmpd="sng" algn="ctr">
+                          <a:solidFill>
+                            <a:schemeClr val="tx1"/>
+                          </a:solidFill>
+                          <a:prstDash val="solid"/>
+                          <a:round/>
+                          <a:headEnd type="none" w="med" len="med"/>
+                          <a:tailEnd type="none" w="med" len="med"/>
+                        </a:lnB>
+                        <a:noFill/>
+                      </a:tcPr>
+                    </a:tc>
+                    <a:tc>
+                      <a:txBody>
+                        <a:bodyPr/>
+                        <a:lstStyle/>
+                        <a:p>
+                          <a:endParaRPr lang="en-US"/>
+                        </a:p>
+                      </a:txBody>
+                      <a:tcPr anchor="ctr">
+                        <a:lnL w="12700" cap="flat" cmpd="sng" algn="ctr">
+                          <a:solidFill>
+                            <a:schemeClr val="tx1"/>
+                          </a:solidFill>
+                          <a:prstDash val="solid"/>
+                          <a:round/>
+                          <a:headEnd type="none" w="med" len="med"/>
+                          <a:tailEnd type="none" w="med" len="med"/>
+                        </a:lnL>
+                        <a:lnR w="12700" cap="flat" cmpd="sng" algn="ctr">
+                          <a:solidFill>
+                            <a:schemeClr val="tx1"/>
+                          </a:solidFill>
+                          <a:prstDash val="solid"/>
+                          <a:round/>
+                          <a:headEnd type="none" w="med" len="med"/>
+                          <a:tailEnd type="none" w="med" len="med"/>
+                        </a:lnR>
+                        <a:lnT w="12700" cap="flat" cmpd="sng" algn="ctr">
+                          <a:solidFill>
+                            <a:schemeClr val="tx1"/>
+                          </a:solidFill>
+                          <a:prstDash val="solid"/>
+                          <a:round/>
+                          <a:headEnd type="none" w="med" len="med"/>
+                          <a:tailEnd type="none" w="med" len="med"/>
+                        </a:lnT>
+                        <a:lnB w="12700" cap="flat" cmpd="sng" algn="ctr">
+                          <a:solidFill>
+                            <a:schemeClr val="tx1"/>
+                          </a:solidFill>
+                          <a:prstDash val="solid"/>
+                          <a:round/>
+                          <a:headEnd type="none" w="med" len="med"/>
+                          <a:tailEnd type="none" w="med" len="med"/>
+                        </a:lnB>
+                        <a:blipFill>
+                          <a:blip r:embed="rId2"/>
+                          <a:stretch>
+                            <a:fillRect l="-136241" t="-149434" r="-246" b="-6415"/>
+                          </a:stretch>
+                        </a:blipFill>
+                      </a:tcPr>
+                    </a:tc>
+                    <a:extLst>
+                      <a:ext uri="{0D108BD9-81ED-4DB2-BD59-A6C34878D82A}">
+                        <a16:rowId xmlns:a16="http://schemas.microsoft.com/office/drawing/2014/main" val="2070400338"/>
+                      </a:ext>
+                    </a:extLst>
+                  </a:tr>
+                </a:tbl>
+              </a:graphicData>
+            </a:graphic>
+          </p:graphicFrame>
+        </mc:Fallback>
+      </mc:AlternateContent>
+      <mc:AlternateContent xmlns:mc="http://schemas.openxmlformats.org/markup-compatibility/2006">
+        <mc:Choice xmlns:a14="http://schemas.microsoft.com/office/drawing/2010/main" Requires="a14">
+          <p:sp>
+            <p:nvSpPr>
+              <p:cNvPr id="7" name="TextBox 6">
+                <a:extLst>
+                  <a:ext uri="{FF2B5EF4-FFF2-40B4-BE49-F238E27FC236}">
+                    <a16:creationId xmlns:a16="http://schemas.microsoft.com/office/drawing/2014/main" id="{B6ADA1D5-0763-3EF2-0C26-C666D2EF6C89}"/>
+                  </a:ext>
+                </a:extLst>
+              </p:cNvPr>
+              <p:cNvSpPr txBox="1"/>
+              <p:nvPr/>
+            </p:nvSpPr>
+            <p:spPr>
+              <a:xfrm>
+                <a:off x="161481" y="5683568"/>
+                <a:ext cx="6096000" cy="523220"/>
+              </a:xfrm>
+              <a:prstGeom prst="rect">
+                <a:avLst/>
+              </a:prstGeom>
+              <a:noFill/>
+            </p:spPr>
+            <p:txBody>
+              <a:bodyPr wrap="square">
+                <a:spAutoFit/>
+              </a:bodyPr>
+              <a:lstStyle/>
+              <a:p>
+                <a:pPr/>
+                <a:r>
+                  <a:rPr lang="pt-BR" sz="1400" noProof="0" dirty="0"/>
+                  <a:t>* </a:t>
+                </a:r>
+                <a14:m>
+                  <m:oMath xmlns:m="http://schemas.openxmlformats.org/officeDocument/2006/math">
+                    <m:r>
+                      <a:rPr lang="pt-BR" sz="1400" i="1">
+                        <a:latin typeface="Cambria Math" panose="02040503050406030204" pitchFamily="18" charset="0"/>
+                      </a:rPr>
+                      <m:t>𝐼</m:t>
+                    </m:r>
+                  </m:oMath>
+                </a14:m>
+                <a:r>
+                  <a:rPr lang="pt-BR" sz="1400" dirty="0"/>
+                  <a:t> é o número de iterações</a:t>
+                </a:r>
+                <a:endParaRPr lang="pt-BR" sz="1400" noProof="0" dirty="0"/>
+              </a:p>
+              <a:p>
+                <a:pPr/>
+                <a:r>
+                  <a:rPr lang="pt-BR" sz="1400" dirty="0"/>
+                  <a:t>** </a:t>
+                </a:r>
+                <a:r>
+                  <a:rPr lang="pt-BR" sz="1400" noProof="0" dirty="0"/>
+                  <a:t>Complexidade para o cálculo da inversa de </a:t>
+                </a:r>
+                <a14:m>
+                  <m:oMath xmlns:m="http://schemas.openxmlformats.org/officeDocument/2006/math">
+                    <m:sSup>
+                      <m:sSupPr>
+                        <m:ctrlPr>
+                          <a:rPr lang="pt-BR" sz="1400" i="1" noProof="0">
+                            <a:latin typeface="Cambria Math" panose="02040503050406030204" pitchFamily="18" charset="0"/>
+                          </a:rPr>
+                        </m:ctrlPr>
+                      </m:sSupPr>
+                      <m:e>
+                        <m:r>
+                          <a:rPr lang="pt-BR" sz="1400" b="0" i="1" noProof="0">
+                            <a:latin typeface="Cambria Math" panose="02040503050406030204" pitchFamily="18" charset="0"/>
+                          </a:rPr>
+                          <m:t>𝑋</m:t>
+                        </m:r>
+                      </m:e>
+                      <m:sup>
+                        <m:r>
+                          <a:rPr lang="pt-BR" sz="1400" b="0" i="1" noProof="0">
+                            <a:latin typeface="Cambria Math" panose="02040503050406030204" pitchFamily="18" charset="0"/>
+                          </a:rPr>
+                          <m:t>𝑇</m:t>
+                        </m:r>
+                      </m:sup>
+                    </m:sSup>
+                    <m:r>
+                      <a:rPr lang="pt-BR" sz="1400" b="0" i="1" noProof="0">
+                        <a:latin typeface="Cambria Math" panose="02040503050406030204" pitchFamily="18" charset="0"/>
+                      </a:rPr>
+                      <m:t>𝑋</m:t>
+                    </m:r>
+                  </m:oMath>
+                </a14:m>
+                <a:r>
+                  <a:rPr lang="pt-BR" sz="1400" noProof="0" dirty="0"/>
+                  <a:t> </a:t>
+                </a:r>
+              </a:p>
+            </p:txBody>
+          </p:sp>
+        </mc:Choice>
+        <mc:Fallback>
+          <p:sp>
+            <p:nvSpPr>
+              <p:cNvPr id="7" name="TextBox 6">
+                <a:extLst>
+                  <a:ext uri="{FF2B5EF4-FFF2-40B4-BE49-F238E27FC236}">
+                    <a16:creationId xmlns:a16="http://schemas.microsoft.com/office/drawing/2014/main" id="{B6ADA1D5-0763-3EF2-0C26-C666D2EF6C89}"/>
+                  </a:ext>
+                </a:extLst>
+              </p:cNvPr>
+              <p:cNvSpPr txBox="1">
+                <a:spLocks noRot="1" noChangeAspect="1" noMove="1" noResize="1" noEditPoints="1" noAdjustHandles="1" noChangeArrowheads="1" noChangeShapeType="1" noTextEdit="1"/>
+              </p:cNvSpPr>
+              <p:nvPr/>
+            </p:nvSpPr>
+            <p:spPr>
+              <a:xfrm>
+                <a:off x="161481" y="5683568"/>
+                <a:ext cx="6096000" cy="523220"/>
+              </a:xfrm>
+              <a:prstGeom prst="rect">
+                <a:avLst/>
+              </a:prstGeom>
+              <a:blipFill>
+                <a:blip r:embed="rId3"/>
+                <a:stretch>
+                  <a:fillRect l="-300" t="-1163" b="-12791"/>
+                </a:stretch>
+              </a:blipFill>
+            </p:spPr>
+            <p:txBody>
+              <a:bodyPr/>
+              <a:lstStyle/>
+              <a:p>
+                <a:r>
+                  <a:rPr lang="en-US">
+                    <a:noFill/>
+                  </a:rPr>
+                  <a:t> </a:t>
+                </a:r>
+              </a:p>
+            </p:txBody>
+          </p:sp>
+        </mc:Fallback>
+      </mc:AlternateContent>
     </p:spTree>
     <p:extLst>
       <p:ext uri="{BB962C8B-B14F-4D97-AF65-F5344CB8AC3E}">
-        <p14:creationId xmlns:p14="http://schemas.microsoft.com/office/powerpoint/2010/main" val="3306137314"/>
+        <p14:creationId xmlns:p14="http://schemas.microsoft.com/office/powerpoint/2010/main" val="846380531"/>
       </p:ext>
     </p:extLst>
   </p:cSld>
@@ -12255,6 +15645,443 @@
       </p:grpSpPr>
       <p:sp>
         <p:nvSpPr>
+          <p:cNvPr id="3" name="Content Placeholder 2">
+            <a:extLst>
+              <a:ext uri="{FF2B5EF4-FFF2-40B4-BE49-F238E27FC236}">
+                <a16:creationId xmlns:a16="http://schemas.microsoft.com/office/drawing/2014/main" id="{E9FA39D5-1A7D-603C-1F90-C3C1D9D9D79C}"/>
+              </a:ext>
+            </a:extLst>
+          </p:cNvPr>
+          <p:cNvSpPr>
+            <a:spLocks noGrp="1"/>
+          </p:cNvSpPr>
+          <p:nvPr>
+            <p:ph idx="1"/>
+          </p:nvPr>
+        </p:nvSpPr>
+        <p:spPr>
+          <a:xfrm>
+            <a:off x="838200" y="1799220"/>
+            <a:ext cx="10515600" cy="3259559"/>
+          </a:xfrm>
+        </p:spPr>
+        <p:txBody>
+          <a:bodyPr/>
+          <a:lstStyle/>
+          <a:p>
+            <a:pPr marL="0" indent="0" algn="ctr">
+              <a:buNone/>
+            </a:pPr>
+            <a:r>
+              <a:rPr lang="pt-BR" sz="5400" i="1" dirty="0"/>
+              <a:t>Como o gradiente descendente é a abordagem mais usada com boa parte dos algoritmos de ML, vamos focar no seu aprendizado.</a:t>
+            </a:r>
+            <a:endParaRPr lang="en-US" sz="5400" i="1" dirty="0"/>
+          </a:p>
+        </p:txBody>
+      </p:sp>
+    </p:spTree>
+    <p:extLst>
+      <p:ext uri="{BB962C8B-B14F-4D97-AF65-F5344CB8AC3E}">
+        <p14:creationId xmlns:p14="http://schemas.microsoft.com/office/powerpoint/2010/main" val="3195010555"/>
+      </p:ext>
+    </p:extLst>
+  </p:cSld>
+  <p:clrMapOvr>
+    <a:masterClrMapping/>
+  </p:clrMapOvr>
+</p:sld>
+</file>
+
+<file path=ppt/slides/slide21.xml><?xml version="1.0" encoding="utf-8"?>
+<p:sld xmlns:a="http://schemas.openxmlformats.org/drawingml/2006/main" xmlns:r="http://schemas.openxmlformats.org/officeDocument/2006/relationships" xmlns:p="http://schemas.openxmlformats.org/presentationml/2006/main">
+  <p:cSld>
+    <p:spTree>
+      <p:nvGrpSpPr>
+        <p:cNvPr id="1" name=""/>
+        <p:cNvGrpSpPr/>
+        <p:nvPr/>
+      </p:nvGrpSpPr>
+      <p:grpSpPr>
+        <a:xfrm>
+          <a:off x="0" y="0"/>
+          <a:ext cx="0" cy="0"/>
+          <a:chOff x="0" y="0"/>
+          <a:chExt cx="0" cy="0"/>
+        </a:xfrm>
+      </p:grpSpPr>
+      <p:sp>
+        <p:nvSpPr>
+          <p:cNvPr id="2" name="Title 1">
+            <a:extLst>
+              <a:ext uri="{FF2B5EF4-FFF2-40B4-BE49-F238E27FC236}">
+                <a16:creationId xmlns:a16="http://schemas.microsoft.com/office/drawing/2014/main" id="{CED0B404-F3ED-8087-A024-C72B793DE4C8}"/>
+              </a:ext>
+            </a:extLst>
+          </p:cNvPr>
+          <p:cNvSpPr>
+            <a:spLocks noGrp="1"/>
+          </p:cNvSpPr>
+          <p:nvPr>
+            <p:ph type="title"/>
+          </p:nvPr>
+        </p:nvSpPr>
+        <p:spPr/>
+        <p:txBody>
+          <a:bodyPr/>
+          <a:lstStyle/>
+          <a:p>
+            <a:endParaRPr lang="en-US"/>
+          </a:p>
+        </p:txBody>
+      </p:sp>
+      <p:sp>
+        <p:nvSpPr>
+          <p:cNvPr id="3" name="Content Placeholder 2">
+            <a:extLst>
+              <a:ext uri="{FF2B5EF4-FFF2-40B4-BE49-F238E27FC236}">
+                <a16:creationId xmlns:a16="http://schemas.microsoft.com/office/drawing/2014/main" id="{C6D4684C-15AE-EBFA-CC52-BE2B10624210}"/>
+              </a:ext>
+            </a:extLst>
+          </p:cNvPr>
+          <p:cNvSpPr>
+            <a:spLocks noGrp="1"/>
+          </p:cNvSpPr>
+          <p:nvPr>
+            <p:ph idx="1"/>
+          </p:nvPr>
+        </p:nvSpPr>
+        <p:spPr/>
+        <p:txBody>
+          <a:bodyPr>
+            <a:normAutofit/>
+          </a:bodyPr>
+          <a:lstStyle/>
+          <a:p>
+            <a:r>
+              <a:rPr lang="pt-BR" sz="4800" b="1" dirty="0">
+                <a:solidFill>
+                  <a:srgbClr val="FF0000"/>
+                </a:solidFill>
+              </a:rPr>
+              <a:t>PAREI AQUI!!!!!!!!!!!</a:t>
+            </a:r>
+            <a:endParaRPr lang="en-US" sz="4800" b="1" dirty="0">
+              <a:solidFill>
+                <a:srgbClr val="FF0000"/>
+              </a:solidFill>
+            </a:endParaRPr>
+          </a:p>
+        </p:txBody>
+      </p:sp>
+    </p:spTree>
+    <p:extLst>
+      <p:ext uri="{BB962C8B-B14F-4D97-AF65-F5344CB8AC3E}">
+        <p14:creationId xmlns:p14="http://schemas.microsoft.com/office/powerpoint/2010/main" val="956125625"/>
+      </p:ext>
+    </p:extLst>
+  </p:cSld>
+  <p:clrMapOvr>
+    <a:masterClrMapping/>
+  </p:clrMapOvr>
+</p:sld>
+</file>
+
+<file path=ppt/slides/slide22.xml><?xml version="1.0" encoding="utf-8"?>
+<p:sld xmlns:a="http://schemas.openxmlformats.org/drawingml/2006/main" xmlns:r="http://schemas.openxmlformats.org/officeDocument/2006/relationships" xmlns:p="http://schemas.openxmlformats.org/presentationml/2006/main">
+  <p:cSld>
+    <p:spTree>
+      <p:nvGrpSpPr>
+        <p:cNvPr id="1" name=""/>
+        <p:cNvGrpSpPr/>
+        <p:nvPr/>
+      </p:nvGrpSpPr>
+      <p:grpSpPr>
+        <a:xfrm>
+          <a:off x="0" y="0"/>
+          <a:ext cx="0" cy="0"/>
+          <a:chOff x="0" y="0"/>
+          <a:chExt cx="0" cy="0"/>
+        </a:xfrm>
+      </p:grpSpPr>
+      <p:sp>
+        <p:nvSpPr>
+          <p:cNvPr id="2" name="Title 1">
+            <a:extLst>
+              <a:ext uri="{FF2B5EF4-FFF2-40B4-BE49-F238E27FC236}">
+                <a16:creationId xmlns:a16="http://schemas.microsoft.com/office/drawing/2014/main" id="{0DB225A9-57A2-5D4C-C592-FC96B4AB25F3}"/>
+              </a:ext>
+            </a:extLst>
+          </p:cNvPr>
+          <p:cNvSpPr>
+            <a:spLocks noGrp="1"/>
+          </p:cNvSpPr>
+          <p:nvPr>
+            <p:ph type="title"/>
+          </p:nvPr>
+        </p:nvSpPr>
+        <p:spPr/>
+        <p:txBody>
+          <a:bodyPr/>
+          <a:lstStyle/>
+          <a:p>
+            <a:r>
+              <a:rPr lang="pt-BR" dirty="0"/>
+              <a:t>Superfície de erro</a:t>
+            </a:r>
+            <a:endParaRPr lang="en-US" dirty="0"/>
+          </a:p>
+        </p:txBody>
+      </p:sp>
+      <p:sp>
+        <p:nvSpPr>
+          <p:cNvPr id="3" name="Content Placeholder 2">
+            <a:extLst>
+              <a:ext uri="{FF2B5EF4-FFF2-40B4-BE49-F238E27FC236}">
+                <a16:creationId xmlns:a16="http://schemas.microsoft.com/office/drawing/2014/main" id="{84E2E11B-9833-18C1-2157-693893D8C114}"/>
+              </a:ext>
+            </a:extLst>
+          </p:cNvPr>
+          <p:cNvSpPr>
+            <a:spLocks noGrp="1"/>
+          </p:cNvSpPr>
+          <p:nvPr>
+            <p:ph idx="1"/>
+          </p:nvPr>
+        </p:nvSpPr>
+        <p:spPr/>
+        <p:txBody>
+          <a:bodyPr/>
+          <a:lstStyle/>
+          <a:p>
+            <a:r>
+              <a:rPr lang="pt-BR" dirty="0"/>
+              <a:t>Antes de discutirmos como o gradiente </a:t>
+            </a:r>
+            <a:r>
+              <a:rPr lang="pt-BR" dirty="0" err="1"/>
+              <a:t>descendete</a:t>
+            </a:r>
+            <a:r>
+              <a:rPr lang="pt-BR" dirty="0"/>
+              <a:t> funciona, precisamos entender o que é a superfície de erro.</a:t>
+            </a:r>
+            <a:endParaRPr lang="en-US" dirty="0"/>
+          </a:p>
+        </p:txBody>
+      </p:sp>
+    </p:spTree>
+    <p:extLst>
+      <p:ext uri="{BB962C8B-B14F-4D97-AF65-F5344CB8AC3E}">
+        <p14:creationId xmlns:p14="http://schemas.microsoft.com/office/powerpoint/2010/main" val="2956549283"/>
+      </p:ext>
+    </p:extLst>
+  </p:cSld>
+  <p:clrMapOvr>
+    <a:masterClrMapping/>
+  </p:clrMapOvr>
+</p:sld>
+</file>
+
+<file path=ppt/slides/slide23.xml><?xml version="1.0" encoding="utf-8"?>
+<p:sld xmlns:a="http://schemas.openxmlformats.org/drawingml/2006/main" xmlns:r="http://schemas.openxmlformats.org/officeDocument/2006/relationships" xmlns:p="http://schemas.openxmlformats.org/presentationml/2006/main">
+  <p:cSld>
+    <p:spTree>
+      <p:nvGrpSpPr>
+        <p:cNvPr id="1" name=""/>
+        <p:cNvGrpSpPr/>
+        <p:nvPr/>
+      </p:nvGrpSpPr>
+      <p:grpSpPr>
+        <a:xfrm>
+          <a:off x="0" y="0"/>
+          <a:ext cx="0" cy="0"/>
+          <a:chOff x="0" y="0"/>
+          <a:chExt cx="0" cy="0"/>
+        </a:xfrm>
+      </p:grpSpPr>
+      <p:sp>
+        <p:nvSpPr>
+          <p:cNvPr id="2" name="Title 1">
+            <a:extLst>
+              <a:ext uri="{FF2B5EF4-FFF2-40B4-BE49-F238E27FC236}">
+                <a16:creationId xmlns:a16="http://schemas.microsoft.com/office/drawing/2014/main" id="{2356DF96-42E3-2871-6B68-006B83AA25F6}"/>
+              </a:ext>
+            </a:extLst>
+          </p:cNvPr>
+          <p:cNvSpPr>
+            <a:spLocks noGrp="1"/>
+          </p:cNvSpPr>
+          <p:nvPr>
+            <p:ph type="title"/>
+          </p:nvPr>
+        </p:nvSpPr>
+        <p:spPr/>
+        <p:txBody>
+          <a:bodyPr/>
+          <a:lstStyle/>
+          <a:p>
+            <a:endParaRPr lang="en-US" dirty="0"/>
+          </a:p>
+        </p:txBody>
+      </p:sp>
+      <p:sp>
+        <p:nvSpPr>
+          <p:cNvPr id="3" name="Content Placeholder 2">
+            <a:extLst>
+              <a:ext uri="{FF2B5EF4-FFF2-40B4-BE49-F238E27FC236}">
+                <a16:creationId xmlns:a16="http://schemas.microsoft.com/office/drawing/2014/main" id="{C322F058-3AE4-7D79-7745-EC0140C3D997}"/>
+              </a:ext>
+            </a:extLst>
+          </p:cNvPr>
+          <p:cNvSpPr>
+            <a:spLocks noGrp="1"/>
+          </p:cNvSpPr>
+          <p:nvPr>
+            <p:ph idx="1"/>
+          </p:nvPr>
+        </p:nvSpPr>
+        <p:spPr/>
+        <p:txBody>
+          <a:bodyPr/>
+          <a:lstStyle/>
+          <a:p>
+            <a:r>
+              <a:rPr lang="pt-BR" dirty="0"/>
+              <a:t>O </a:t>
+            </a:r>
+            <a:r>
+              <a:rPr lang="pt-BR" dirty="0" err="1"/>
+              <a:t>gradinete</a:t>
+            </a:r>
+            <a:r>
+              <a:rPr lang="pt-BR" dirty="0"/>
+              <a:t> descendente é a busca iterativa pela parte mais baixa da superfície de erro,.</a:t>
+            </a:r>
+            <a:endParaRPr lang="en-US" dirty="0"/>
+          </a:p>
+        </p:txBody>
+      </p:sp>
+    </p:spTree>
+    <p:extLst>
+      <p:ext uri="{BB962C8B-B14F-4D97-AF65-F5344CB8AC3E}">
+        <p14:creationId xmlns:p14="http://schemas.microsoft.com/office/powerpoint/2010/main" val="1531472052"/>
+      </p:ext>
+    </p:extLst>
+  </p:cSld>
+  <p:clrMapOvr>
+    <a:masterClrMapping/>
+  </p:clrMapOvr>
+</p:sld>
+</file>
+
+<file path=ppt/slides/slide24.xml><?xml version="1.0" encoding="utf-8"?>
+<p:sld xmlns:a="http://schemas.openxmlformats.org/drawingml/2006/main" xmlns:r="http://schemas.openxmlformats.org/officeDocument/2006/relationships" xmlns:p="http://schemas.openxmlformats.org/presentationml/2006/main">
+  <p:cSld>
+    <p:spTree>
+      <p:nvGrpSpPr>
+        <p:cNvPr id="1" name=""/>
+        <p:cNvGrpSpPr/>
+        <p:nvPr/>
+      </p:nvGrpSpPr>
+      <p:grpSpPr>
+        <a:xfrm>
+          <a:off x="0" y="0"/>
+          <a:ext cx="0" cy="0"/>
+          <a:chOff x="0" y="0"/>
+          <a:chExt cx="0" cy="0"/>
+        </a:xfrm>
+      </p:grpSpPr>
+      <p:sp>
+        <p:nvSpPr>
+          <p:cNvPr id="2" name="Title 1">
+            <a:extLst>
+              <a:ext uri="{FF2B5EF4-FFF2-40B4-BE49-F238E27FC236}">
+                <a16:creationId xmlns:a16="http://schemas.microsoft.com/office/drawing/2014/main" id="{73862A92-55C2-431E-3FAA-7DC08A0AC671}"/>
+              </a:ext>
+            </a:extLst>
+          </p:cNvPr>
+          <p:cNvSpPr>
+            <a:spLocks noGrp="1"/>
+          </p:cNvSpPr>
+          <p:nvPr>
+            <p:ph type="title"/>
+          </p:nvPr>
+        </p:nvSpPr>
+        <p:spPr/>
+        <p:txBody>
+          <a:bodyPr/>
+          <a:lstStyle/>
+          <a:p>
+            <a:r>
+              <a:rPr lang="pt-BR" dirty="0"/>
+              <a:t>Validação cruzada</a:t>
+            </a:r>
+            <a:endParaRPr lang="en-US" dirty="0"/>
+          </a:p>
+        </p:txBody>
+      </p:sp>
+      <p:sp>
+        <p:nvSpPr>
+          <p:cNvPr id="3" name="Content Placeholder 2">
+            <a:extLst>
+              <a:ext uri="{FF2B5EF4-FFF2-40B4-BE49-F238E27FC236}">
+                <a16:creationId xmlns:a16="http://schemas.microsoft.com/office/drawing/2014/main" id="{44A91331-8D79-4209-9910-250A54A6D3D3}"/>
+              </a:ext>
+            </a:extLst>
+          </p:cNvPr>
+          <p:cNvSpPr>
+            <a:spLocks noGrp="1"/>
+          </p:cNvSpPr>
+          <p:nvPr>
+            <p:ph idx="1"/>
+          </p:nvPr>
+        </p:nvSpPr>
+        <p:spPr/>
+        <p:txBody>
+          <a:bodyPr/>
+          <a:lstStyle/>
+          <a:p>
+            <a:r>
+              <a:rPr lang="pt-BR" dirty="0"/>
+              <a:t>Validação cruzada para encontrar grau dos polinômios</a:t>
+            </a:r>
+            <a:endParaRPr lang="en-US" dirty="0"/>
+          </a:p>
+        </p:txBody>
+      </p:sp>
+    </p:spTree>
+    <p:extLst>
+      <p:ext uri="{BB962C8B-B14F-4D97-AF65-F5344CB8AC3E}">
+        <p14:creationId xmlns:p14="http://schemas.microsoft.com/office/powerpoint/2010/main" val="1500185514"/>
+      </p:ext>
+    </p:extLst>
+  </p:cSld>
+  <p:clrMapOvr>
+    <a:masterClrMapping/>
+  </p:clrMapOvr>
+</p:sld>
+</file>
+
+<file path=ppt/slides/slide25.xml><?xml version="1.0" encoding="utf-8"?>
+<p:sld xmlns:a="http://schemas.openxmlformats.org/drawingml/2006/main" xmlns:r="http://schemas.openxmlformats.org/officeDocument/2006/relationships" xmlns:p="http://schemas.openxmlformats.org/presentationml/2006/main">
+  <p:cSld>
+    <p:spTree>
+      <p:nvGrpSpPr>
+        <p:cNvPr id="1" name=""/>
+        <p:cNvGrpSpPr/>
+        <p:nvPr/>
+      </p:nvGrpSpPr>
+      <p:grpSpPr>
+        <a:xfrm>
+          <a:off x="0" y="0"/>
+          <a:ext cx="0" cy="0"/>
+          <a:chOff x="0" y="0"/>
+          <a:chExt cx="0" cy="0"/>
+        </a:xfrm>
+      </p:grpSpPr>
+      <p:sp>
+        <p:nvSpPr>
           <p:cNvPr id="4" name="Título 1">
             <a:extLst>
               <a:ext uri="{FF2B5EF4-FFF2-40B4-BE49-F238E27FC236}">
@@ -12322,7 +16149,7 @@
 </p:sld>
 </file>
 
-<file path=ppt/slides/slide21.xml><?xml version="1.0" encoding="utf-8"?>
+<file path=ppt/slides/slide26.xml><?xml version="1.0" encoding="utf-8"?>
 <p:sld xmlns:a="http://schemas.openxmlformats.org/drawingml/2006/main" xmlns:r="http://schemas.openxmlformats.org/officeDocument/2006/relationships" xmlns:p="http://schemas.openxmlformats.org/presentationml/2006/main">
   <p:cSld>
     <p:spTree>

--- a/slides/C24_Regressão.pptx
+++ b/slides/C24_Regressão.pptx
@@ -5,10 +5,10 @@
     <p:sldMasterId id="2147483648" r:id="rId1"/>
   </p:sldMasterIdLst>
   <p:notesMasterIdLst>
-    <p:notesMasterId r:id="rId28"/>
+    <p:notesMasterId r:id="rId29"/>
   </p:notesMasterIdLst>
   <p:handoutMasterIdLst>
-    <p:handoutMasterId r:id="rId29"/>
+    <p:handoutMasterId r:id="rId30"/>
   </p:handoutMasterIdLst>
   <p:sldIdLst>
     <p:sldId id="256" r:id="rId2"/>
@@ -33,10 +33,11 @@
     <p:sldId id="528" r:id="rId21"/>
     <p:sldId id="521" r:id="rId22"/>
     <p:sldId id="529" r:id="rId23"/>
-    <p:sldId id="530" r:id="rId24"/>
-    <p:sldId id="531" r:id="rId25"/>
-    <p:sldId id="293" r:id="rId26"/>
-    <p:sldId id="306" r:id="rId27"/>
+    <p:sldId id="532" r:id="rId24"/>
+    <p:sldId id="533" r:id="rId25"/>
+    <p:sldId id="531" r:id="rId26"/>
+    <p:sldId id="293" r:id="rId27"/>
+    <p:sldId id="306" r:id="rId28"/>
   </p:sldIdLst>
   <p:sldSz cx="12192000" cy="6858000"/>
   <p:notesSz cx="7315200" cy="9601200"/>
@@ -366,7 +367,7 @@
           <a:p>
             <a:fld id="{F7E56D9B-79AD-444A-AFED-DEC23408F8B4}" type="slidenum">
               <a:rPr lang="nl-BE" smtClean="0"/>
-              <a:t>‹#›</a:t>
+              <a:t>‹nº›</a:t>
             </a:fld>
             <a:endParaRPr lang="nl-BE"/>
           </a:p>
@@ -623,7 +624,7 @@
           <a:p>
             <a:fld id="{6FC8D850-966F-45A6-8DE7-15B891E7D40D}" type="slidenum">
               <a:rPr lang="pt-BR" smtClean="0"/>
-              <a:t>‹#›</a:t>
+              <a:t>‹nº›</a:t>
             </a:fld>
             <a:endParaRPr lang="pt-BR"/>
           </a:p>
@@ -2331,7 +2332,7 @@
           <p:cNvPr id="2" name="Título 1">
             <a:extLst>
               <a:ext uri="{FF2B5EF4-FFF2-40B4-BE49-F238E27FC236}">
-                <a16:creationId xmlns:a16="http://schemas.microsoft.com/office/drawing/2014/main" id="{1DB9B4FF-B06E-403C-A326-BDC64D8FF94E}"/>
+                <a16:creationId xmlns:a16="http://schemas.microsoft.com/office/drawing/2014/main" xmlns="" id="{1DB9B4FF-B06E-403C-A326-BDC64D8FF94E}"/>
               </a:ext>
             </a:extLst>
           </p:cNvPr>
@@ -2368,7 +2369,7 @@
           <p:cNvPr id="3" name="Subtítulo 2">
             <a:extLst>
               <a:ext uri="{FF2B5EF4-FFF2-40B4-BE49-F238E27FC236}">
-                <a16:creationId xmlns:a16="http://schemas.microsoft.com/office/drawing/2014/main" id="{247BDFCE-746E-45BF-A319-4733D58D1632}"/>
+                <a16:creationId xmlns:a16="http://schemas.microsoft.com/office/drawing/2014/main" xmlns="" id="{247BDFCE-746E-45BF-A319-4733D58D1632}"/>
               </a:ext>
             </a:extLst>
           </p:cNvPr>
@@ -2438,7 +2439,7 @@
           <p:cNvPr id="4" name="Espaço Reservado para Data 3">
             <a:extLst>
               <a:ext uri="{FF2B5EF4-FFF2-40B4-BE49-F238E27FC236}">
-                <a16:creationId xmlns:a16="http://schemas.microsoft.com/office/drawing/2014/main" id="{9EDE2778-5372-4104-B96D-968184DA8288}"/>
+                <a16:creationId xmlns:a16="http://schemas.microsoft.com/office/drawing/2014/main" xmlns="" id="{9EDE2778-5372-4104-B96D-968184DA8288}"/>
               </a:ext>
             </a:extLst>
           </p:cNvPr>
@@ -2467,7 +2468,7 @@
           <p:cNvPr id="5" name="Espaço Reservado para Rodapé 4">
             <a:extLst>
               <a:ext uri="{FF2B5EF4-FFF2-40B4-BE49-F238E27FC236}">
-                <a16:creationId xmlns:a16="http://schemas.microsoft.com/office/drawing/2014/main" id="{C1DD0F41-C861-4051-988D-3024A37A4B93}"/>
+                <a16:creationId xmlns:a16="http://schemas.microsoft.com/office/drawing/2014/main" xmlns="" id="{C1DD0F41-C861-4051-988D-3024A37A4B93}"/>
               </a:ext>
             </a:extLst>
           </p:cNvPr>
@@ -2492,7 +2493,7 @@
           <p:cNvPr id="6" name="Espaço Reservado para Número de Slide 5">
             <a:extLst>
               <a:ext uri="{FF2B5EF4-FFF2-40B4-BE49-F238E27FC236}">
-                <a16:creationId xmlns:a16="http://schemas.microsoft.com/office/drawing/2014/main" id="{07E5967E-D980-431A-A5DB-3F0C5030A81E}"/>
+                <a16:creationId xmlns:a16="http://schemas.microsoft.com/office/drawing/2014/main" xmlns="" id="{07E5967E-D980-431A-A5DB-3F0C5030A81E}"/>
               </a:ext>
             </a:extLst>
           </p:cNvPr>
@@ -2510,7 +2511,7 @@
           <a:p>
             <a:fld id="{1A7E88B7-70CE-4035-AE73-13FA6FB985D4}" type="slidenum">
               <a:rPr lang="pt-BR" smtClean="0"/>
-              <a:t>‹#›</a:t>
+              <a:t>‹nº›</a:t>
             </a:fld>
             <a:endParaRPr lang="pt-BR"/>
           </a:p>
@@ -2551,7 +2552,7 @@
           <p:cNvPr id="2" name="Título 1">
             <a:extLst>
               <a:ext uri="{FF2B5EF4-FFF2-40B4-BE49-F238E27FC236}">
-                <a16:creationId xmlns:a16="http://schemas.microsoft.com/office/drawing/2014/main" id="{9036C49F-3E68-4175-81BA-3C3FEE44308A}"/>
+                <a16:creationId xmlns:a16="http://schemas.microsoft.com/office/drawing/2014/main" xmlns="" id="{9036C49F-3E68-4175-81BA-3C3FEE44308A}"/>
               </a:ext>
             </a:extLst>
           </p:cNvPr>
@@ -2579,7 +2580,7 @@
           <p:cNvPr id="3" name="Espaço Reservado para Texto Vertical 2">
             <a:extLst>
               <a:ext uri="{FF2B5EF4-FFF2-40B4-BE49-F238E27FC236}">
-                <a16:creationId xmlns:a16="http://schemas.microsoft.com/office/drawing/2014/main" id="{426FA736-3DD3-4D4E-B57B-BBE1D8F7D424}"/>
+                <a16:creationId xmlns:a16="http://schemas.microsoft.com/office/drawing/2014/main" xmlns="" id="{426FA736-3DD3-4D4E-B57B-BBE1D8F7D424}"/>
               </a:ext>
             </a:extLst>
           </p:cNvPr>
@@ -2636,7 +2637,7 @@
           <p:cNvPr id="4" name="Espaço Reservado para Data 3">
             <a:extLst>
               <a:ext uri="{FF2B5EF4-FFF2-40B4-BE49-F238E27FC236}">
-                <a16:creationId xmlns:a16="http://schemas.microsoft.com/office/drawing/2014/main" id="{99E8855C-D8FD-48F6-B14E-861E0DE4D915}"/>
+                <a16:creationId xmlns:a16="http://schemas.microsoft.com/office/drawing/2014/main" xmlns="" id="{99E8855C-D8FD-48F6-B14E-861E0DE4D915}"/>
               </a:ext>
             </a:extLst>
           </p:cNvPr>
@@ -2665,7 +2666,7 @@
           <p:cNvPr id="5" name="Espaço Reservado para Rodapé 4">
             <a:extLst>
               <a:ext uri="{FF2B5EF4-FFF2-40B4-BE49-F238E27FC236}">
-                <a16:creationId xmlns:a16="http://schemas.microsoft.com/office/drawing/2014/main" id="{97C0BB88-2F21-42A5-ACFF-83DA47F2D340}"/>
+                <a16:creationId xmlns:a16="http://schemas.microsoft.com/office/drawing/2014/main" xmlns="" id="{97C0BB88-2F21-42A5-ACFF-83DA47F2D340}"/>
               </a:ext>
             </a:extLst>
           </p:cNvPr>
@@ -2690,7 +2691,7 @@
           <p:cNvPr id="6" name="Espaço Reservado para Número de Slide 5">
             <a:extLst>
               <a:ext uri="{FF2B5EF4-FFF2-40B4-BE49-F238E27FC236}">
-                <a16:creationId xmlns:a16="http://schemas.microsoft.com/office/drawing/2014/main" id="{6CB462B3-1F22-4C05-B4B8-7A279FB7D5E9}"/>
+                <a16:creationId xmlns:a16="http://schemas.microsoft.com/office/drawing/2014/main" xmlns="" id="{6CB462B3-1F22-4C05-B4B8-7A279FB7D5E9}"/>
               </a:ext>
             </a:extLst>
           </p:cNvPr>
@@ -2708,7 +2709,7 @@
           <a:p>
             <a:fld id="{1A7E88B7-70CE-4035-AE73-13FA6FB985D4}" type="slidenum">
               <a:rPr lang="pt-BR" smtClean="0"/>
-              <a:t>‹#›</a:t>
+              <a:t>‹nº›</a:t>
             </a:fld>
             <a:endParaRPr lang="pt-BR"/>
           </a:p>
@@ -2749,7 +2750,7 @@
           <p:cNvPr id="2" name="Título Vertical 1">
             <a:extLst>
               <a:ext uri="{FF2B5EF4-FFF2-40B4-BE49-F238E27FC236}">
-                <a16:creationId xmlns:a16="http://schemas.microsoft.com/office/drawing/2014/main" id="{EAEAB728-701C-4207-A9D5-23FF45C60502}"/>
+                <a16:creationId xmlns:a16="http://schemas.microsoft.com/office/drawing/2014/main" xmlns="" id="{EAEAB728-701C-4207-A9D5-23FF45C60502}"/>
               </a:ext>
             </a:extLst>
           </p:cNvPr>
@@ -2782,7 +2783,7 @@
           <p:cNvPr id="3" name="Espaço Reservado para Texto Vertical 2">
             <a:extLst>
               <a:ext uri="{FF2B5EF4-FFF2-40B4-BE49-F238E27FC236}">
-                <a16:creationId xmlns:a16="http://schemas.microsoft.com/office/drawing/2014/main" id="{BA8C8CCF-7823-480A-9A19-0F664DD17E3B}"/>
+                <a16:creationId xmlns:a16="http://schemas.microsoft.com/office/drawing/2014/main" xmlns="" id="{BA8C8CCF-7823-480A-9A19-0F664DD17E3B}"/>
               </a:ext>
             </a:extLst>
           </p:cNvPr>
@@ -2844,7 +2845,7 @@
           <p:cNvPr id="4" name="Espaço Reservado para Data 3">
             <a:extLst>
               <a:ext uri="{FF2B5EF4-FFF2-40B4-BE49-F238E27FC236}">
-                <a16:creationId xmlns:a16="http://schemas.microsoft.com/office/drawing/2014/main" id="{721D5734-7B1F-425D-942F-6EB73344027C}"/>
+                <a16:creationId xmlns:a16="http://schemas.microsoft.com/office/drawing/2014/main" xmlns="" id="{721D5734-7B1F-425D-942F-6EB73344027C}"/>
               </a:ext>
             </a:extLst>
           </p:cNvPr>
@@ -2873,7 +2874,7 @@
           <p:cNvPr id="5" name="Espaço Reservado para Rodapé 4">
             <a:extLst>
               <a:ext uri="{FF2B5EF4-FFF2-40B4-BE49-F238E27FC236}">
-                <a16:creationId xmlns:a16="http://schemas.microsoft.com/office/drawing/2014/main" id="{1E1AAEAC-F08D-45FE-89EC-B1B349A868C9}"/>
+                <a16:creationId xmlns:a16="http://schemas.microsoft.com/office/drawing/2014/main" xmlns="" id="{1E1AAEAC-F08D-45FE-89EC-B1B349A868C9}"/>
               </a:ext>
             </a:extLst>
           </p:cNvPr>
@@ -2898,7 +2899,7 @@
           <p:cNvPr id="6" name="Espaço Reservado para Número de Slide 5">
             <a:extLst>
               <a:ext uri="{FF2B5EF4-FFF2-40B4-BE49-F238E27FC236}">
-                <a16:creationId xmlns:a16="http://schemas.microsoft.com/office/drawing/2014/main" id="{BAA44493-9911-47B2-87A6-C2141A972BC8}"/>
+                <a16:creationId xmlns:a16="http://schemas.microsoft.com/office/drawing/2014/main" xmlns="" id="{BAA44493-9911-47B2-87A6-C2141A972BC8}"/>
               </a:ext>
             </a:extLst>
           </p:cNvPr>
@@ -2916,7 +2917,7 @@
           <a:p>
             <a:fld id="{1A7E88B7-70CE-4035-AE73-13FA6FB985D4}" type="slidenum">
               <a:rPr lang="pt-BR" smtClean="0"/>
-              <a:t>‹#›</a:t>
+              <a:t>‹nº›</a:t>
             </a:fld>
             <a:endParaRPr lang="pt-BR"/>
           </a:p>
@@ -2957,7 +2958,7 @@
           <p:cNvPr id="2" name="Título 1">
             <a:extLst>
               <a:ext uri="{FF2B5EF4-FFF2-40B4-BE49-F238E27FC236}">
-                <a16:creationId xmlns:a16="http://schemas.microsoft.com/office/drawing/2014/main" id="{71BD44A5-8F21-4626-A01D-48A1C874B1D5}"/>
+                <a16:creationId xmlns:a16="http://schemas.microsoft.com/office/drawing/2014/main" xmlns="" id="{71BD44A5-8F21-4626-A01D-48A1C874B1D5}"/>
               </a:ext>
             </a:extLst>
           </p:cNvPr>
@@ -2985,7 +2986,7 @@
           <p:cNvPr id="3" name="Espaço Reservado para Conteúdo 2">
             <a:extLst>
               <a:ext uri="{FF2B5EF4-FFF2-40B4-BE49-F238E27FC236}">
-                <a16:creationId xmlns:a16="http://schemas.microsoft.com/office/drawing/2014/main" id="{B79E8085-65A9-48AA-951D-71D978BFF4ED}"/>
+                <a16:creationId xmlns:a16="http://schemas.microsoft.com/office/drawing/2014/main" xmlns="" id="{B79E8085-65A9-48AA-951D-71D978BFF4ED}"/>
               </a:ext>
             </a:extLst>
           </p:cNvPr>
@@ -3042,7 +3043,7 @@
           <p:cNvPr id="4" name="Espaço Reservado para Data 3">
             <a:extLst>
               <a:ext uri="{FF2B5EF4-FFF2-40B4-BE49-F238E27FC236}">
-                <a16:creationId xmlns:a16="http://schemas.microsoft.com/office/drawing/2014/main" id="{F05BE1AF-51EA-425D-B188-DE7BD675009F}"/>
+                <a16:creationId xmlns:a16="http://schemas.microsoft.com/office/drawing/2014/main" xmlns="" id="{F05BE1AF-51EA-425D-B188-DE7BD675009F}"/>
               </a:ext>
             </a:extLst>
           </p:cNvPr>
@@ -3071,7 +3072,7 @@
           <p:cNvPr id="5" name="Espaço Reservado para Rodapé 4">
             <a:extLst>
               <a:ext uri="{FF2B5EF4-FFF2-40B4-BE49-F238E27FC236}">
-                <a16:creationId xmlns:a16="http://schemas.microsoft.com/office/drawing/2014/main" id="{121BE632-29CF-4CB9-B365-C9EF38F89BE6}"/>
+                <a16:creationId xmlns:a16="http://schemas.microsoft.com/office/drawing/2014/main" xmlns="" id="{121BE632-29CF-4CB9-B365-C9EF38F89BE6}"/>
               </a:ext>
             </a:extLst>
           </p:cNvPr>
@@ -3096,7 +3097,7 @@
           <p:cNvPr id="6" name="Espaço Reservado para Número de Slide 5">
             <a:extLst>
               <a:ext uri="{FF2B5EF4-FFF2-40B4-BE49-F238E27FC236}">
-                <a16:creationId xmlns:a16="http://schemas.microsoft.com/office/drawing/2014/main" id="{60CF3DD1-9AEC-4A57-B461-4E4DD86FAC18}"/>
+                <a16:creationId xmlns:a16="http://schemas.microsoft.com/office/drawing/2014/main" xmlns="" id="{60CF3DD1-9AEC-4A57-B461-4E4DD86FAC18}"/>
               </a:ext>
             </a:extLst>
           </p:cNvPr>
@@ -3114,7 +3115,7 @@
           <a:p>
             <a:fld id="{1A7E88B7-70CE-4035-AE73-13FA6FB985D4}" type="slidenum">
               <a:rPr lang="pt-BR" smtClean="0"/>
-              <a:t>‹#›</a:t>
+              <a:t>‹nº›</a:t>
             </a:fld>
             <a:endParaRPr lang="pt-BR"/>
           </a:p>
@@ -3155,7 +3156,7 @@
           <p:cNvPr id="2" name="Título 1">
             <a:extLst>
               <a:ext uri="{FF2B5EF4-FFF2-40B4-BE49-F238E27FC236}">
-                <a16:creationId xmlns:a16="http://schemas.microsoft.com/office/drawing/2014/main" id="{34AB2FF0-A4D7-4E28-991D-FF26140D5988}"/>
+                <a16:creationId xmlns:a16="http://schemas.microsoft.com/office/drawing/2014/main" xmlns="" id="{34AB2FF0-A4D7-4E28-991D-FF26140D5988}"/>
               </a:ext>
             </a:extLst>
           </p:cNvPr>
@@ -3192,7 +3193,7 @@
           <p:cNvPr id="3" name="Espaço Reservado para Texto 2">
             <a:extLst>
               <a:ext uri="{FF2B5EF4-FFF2-40B4-BE49-F238E27FC236}">
-                <a16:creationId xmlns:a16="http://schemas.microsoft.com/office/drawing/2014/main" id="{E2AC45B0-4145-40DB-8E61-105461170604}"/>
+                <a16:creationId xmlns:a16="http://schemas.microsoft.com/office/drawing/2014/main" xmlns="" id="{E2AC45B0-4145-40DB-8E61-105461170604}"/>
               </a:ext>
             </a:extLst>
           </p:cNvPr>
@@ -3317,7 +3318,7 @@
           <p:cNvPr id="4" name="Espaço Reservado para Data 3">
             <a:extLst>
               <a:ext uri="{FF2B5EF4-FFF2-40B4-BE49-F238E27FC236}">
-                <a16:creationId xmlns:a16="http://schemas.microsoft.com/office/drawing/2014/main" id="{50F1D3FB-740A-4EBA-A309-2CE71D12ECFB}"/>
+                <a16:creationId xmlns:a16="http://schemas.microsoft.com/office/drawing/2014/main" xmlns="" id="{50F1D3FB-740A-4EBA-A309-2CE71D12ECFB}"/>
               </a:ext>
             </a:extLst>
           </p:cNvPr>
@@ -3346,7 +3347,7 @@
           <p:cNvPr id="5" name="Espaço Reservado para Rodapé 4">
             <a:extLst>
               <a:ext uri="{FF2B5EF4-FFF2-40B4-BE49-F238E27FC236}">
-                <a16:creationId xmlns:a16="http://schemas.microsoft.com/office/drawing/2014/main" id="{BDCAB18F-8715-4465-A940-F9C193A2ACE9}"/>
+                <a16:creationId xmlns:a16="http://schemas.microsoft.com/office/drawing/2014/main" xmlns="" id="{BDCAB18F-8715-4465-A940-F9C193A2ACE9}"/>
               </a:ext>
             </a:extLst>
           </p:cNvPr>
@@ -3371,7 +3372,7 @@
           <p:cNvPr id="6" name="Espaço Reservado para Número de Slide 5">
             <a:extLst>
               <a:ext uri="{FF2B5EF4-FFF2-40B4-BE49-F238E27FC236}">
-                <a16:creationId xmlns:a16="http://schemas.microsoft.com/office/drawing/2014/main" id="{353466C6-8248-429F-8056-FF040BF509EB}"/>
+                <a16:creationId xmlns:a16="http://schemas.microsoft.com/office/drawing/2014/main" xmlns="" id="{353466C6-8248-429F-8056-FF040BF509EB}"/>
               </a:ext>
             </a:extLst>
           </p:cNvPr>
@@ -3389,7 +3390,7 @@
           <a:p>
             <a:fld id="{1A7E88B7-70CE-4035-AE73-13FA6FB985D4}" type="slidenum">
               <a:rPr lang="pt-BR" smtClean="0"/>
-              <a:t>‹#›</a:t>
+              <a:t>‹nº›</a:t>
             </a:fld>
             <a:endParaRPr lang="pt-BR"/>
           </a:p>
@@ -3430,7 +3431,7 @@
           <p:cNvPr id="2" name="Título 1">
             <a:extLst>
               <a:ext uri="{FF2B5EF4-FFF2-40B4-BE49-F238E27FC236}">
-                <a16:creationId xmlns:a16="http://schemas.microsoft.com/office/drawing/2014/main" id="{BC7BB9F0-F14B-4A91-B2B7-35BC47FE4DE7}"/>
+                <a16:creationId xmlns:a16="http://schemas.microsoft.com/office/drawing/2014/main" xmlns="" id="{BC7BB9F0-F14B-4A91-B2B7-35BC47FE4DE7}"/>
               </a:ext>
             </a:extLst>
           </p:cNvPr>
@@ -3458,7 +3459,7 @@
           <p:cNvPr id="3" name="Espaço Reservado para Conteúdo 2">
             <a:extLst>
               <a:ext uri="{FF2B5EF4-FFF2-40B4-BE49-F238E27FC236}">
-                <a16:creationId xmlns:a16="http://schemas.microsoft.com/office/drawing/2014/main" id="{EC1FC1C4-73DA-47A6-8496-B0B457F7D39A}"/>
+                <a16:creationId xmlns:a16="http://schemas.microsoft.com/office/drawing/2014/main" xmlns="" id="{EC1FC1C4-73DA-47A6-8496-B0B457F7D39A}"/>
               </a:ext>
             </a:extLst>
           </p:cNvPr>
@@ -3520,7 +3521,7 @@
           <p:cNvPr id="4" name="Espaço Reservado para Conteúdo 3">
             <a:extLst>
               <a:ext uri="{FF2B5EF4-FFF2-40B4-BE49-F238E27FC236}">
-                <a16:creationId xmlns:a16="http://schemas.microsoft.com/office/drawing/2014/main" id="{E92F06A8-A449-4D92-9912-76873E529B38}"/>
+                <a16:creationId xmlns:a16="http://schemas.microsoft.com/office/drawing/2014/main" xmlns="" id="{E92F06A8-A449-4D92-9912-76873E529B38}"/>
               </a:ext>
             </a:extLst>
           </p:cNvPr>
@@ -3582,7 +3583,7 @@
           <p:cNvPr id="5" name="Espaço Reservado para Data 4">
             <a:extLst>
               <a:ext uri="{FF2B5EF4-FFF2-40B4-BE49-F238E27FC236}">
-                <a16:creationId xmlns:a16="http://schemas.microsoft.com/office/drawing/2014/main" id="{938070A4-BC2F-4D55-BD8D-DEAF11BB9EE9}"/>
+                <a16:creationId xmlns:a16="http://schemas.microsoft.com/office/drawing/2014/main" xmlns="" id="{938070A4-BC2F-4D55-BD8D-DEAF11BB9EE9}"/>
               </a:ext>
             </a:extLst>
           </p:cNvPr>
@@ -3611,7 +3612,7 @@
           <p:cNvPr id="6" name="Espaço Reservado para Rodapé 5">
             <a:extLst>
               <a:ext uri="{FF2B5EF4-FFF2-40B4-BE49-F238E27FC236}">
-                <a16:creationId xmlns:a16="http://schemas.microsoft.com/office/drawing/2014/main" id="{45CC2DB8-844A-465F-BA9A-7734C80C7F43}"/>
+                <a16:creationId xmlns:a16="http://schemas.microsoft.com/office/drawing/2014/main" xmlns="" id="{45CC2DB8-844A-465F-BA9A-7734C80C7F43}"/>
               </a:ext>
             </a:extLst>
           </p:cNvPr>
@@ -3636,7 +3637,7 @@
           <p:cNvPr id="7" name="Espaço Reservado para Número de Slide 6">
             <a:extLst>
               <a:ext uri="{FF2B5EF4-FFF2-40B4-BE49-F238E27FC236}">
-                <a16:creationId xmlns:a16="http://schemas.microsoft.com/office/drawing/2014/main" id="{4CC606A8-097B-4040-94E0-CD8C88280D8F}"/>
+                <a16:creationId xmlns:a16="http://schemas.microsoft.com/office/drawing/2014/main" xmlns="" id="{4CC606A8-097B-4040-94E0-CD8C88280D8F}"/>
               </a:ext>
             </a:extLst>
           </p:cNvPr>
@@ -3654,7 +3655,7 @@
           <a:p>
             <a:fld id="{1A7E88B7-70CE-4035-AE73-13FA6FB985D4}" type="slidenum">
               <a:rPr lang="pt-BR" smtClean="0"/>
-              <a:t>‹#›</a:t>
+              <a:t>‹nº›</a:t>
             </a:fld>
             <a:endParaRPr lang="pt-BR"/>
           </a:p>
@@ -3695,7 +3696,7 @@
           <p:cNvPr id="2" name="Título 1">
             <a:extLst>
               <a:ext uri="{FF2B5EF4-FFF2-40B4-BE49-F238E27FC236}">
-                <a16:creationId xmlns:a16="http://schemas.microsoft.com/office/drawing/2014/main" id="{76D66686-0143-4CB6-8C09-BA326F1E7ACA}"/>
+                <a16:creationId xmlns:a16="http://schemas.microsoft.com/office/drawing/2014/main" xmlns="" id="{76D66686-0143-4CB6-8C09-BA326F1E7ACA}"/>
               </a:ext>
             </a:extLst>
           </p:cNvPr>
@@ -3728,7 +3729,7 @@
           <p:cNvPr id="3" name="Espaço Reservado para Texto 2">
             <a:extLst>
               <a:ext uri="{FF2B5EF4-FFF2-40B4-BE49-F238E27FC236}">
-                <a16:creationId xmlns:a16="http://schemas.microsoft.com/office/drawing/2014/main" id="{0227AB85-F59E-4BCE-B846-4FA0992C2F23}"/>
+                <a16:creationId xmlns:a16="http://schemas.microsoft.com/office/drawing/2014/main" xmlns="" id="{0227AB85-F59E-4BCE-B846-4FA0992C2F23}"/>
               </a:ext>
             </a:extLst>
           </p:cNvPr>
@@ -3799,7 +3800,7 @@
           <p:cNvPr id="4" name="Espaço Reservado para Conteúdo 3">
             <a:extLst>
               <a:ext uri="{FF2B5EF4-FFF2-40B4-BE49-F238E27FC236}">
-                <a16:creationId xmlns:a16="http://schemas.microsoft.com/office/drawing/2014/main" id="{3373456C-7319-4D0A-827D-D29F6B083F5D}"/>
+                <a16:creationId xmlns:a16="http://schemas.microsoft.com/office/drawing/2014/main" xmlns="" id="{3373456C-7319-4D0A-827D-D29F6B083F5D}"/>
               </a:ext>
             </a:extLst>
           </p:cNvPr>
@@ -3861,7 +3862,7 @@
           <p:cNvPr id="5" name="Espaço Reservado para Texto 4">
             <a:extLst>
               <a:ext uri="{FF2B5EF4-FFF2-40B4-BE49-F238E27FC236}">
-                <a16:creationId xmlns:a16="http://schemas.microsoft.com/office/drawing/2014/main" id="{4CD109D0-2E83-4262-8029-A871CEC47406}"/>
+                <a16:creationId xmlns:a16="http://schemas.microsoft.com/office/drawing/2014/main" xmlns="" id="{4CD109D0-2E83-4262-8029-A871CEC47406}"/>
               </a:ext>
             </a:extLst>
           </p:cNvPr>
@@ -3932,7 +3933,7 @@
           <p:cNvPr id="6" name="Espaço Reservado para Conteúdo 5">
             <a:extLst>
               <a:ext uri="{FF2B5EF4-FFF2-40B4-BE49-F238E27FC236}">
-                <a16:creationId xmlns:a16="http://schemas.microsoft.com/office/drawing/2014/main" id="{AD706E3A-CFBB-4A6C-A65F-D0360A9E74FE}"/>
+                <a16:creationId xmlns:a16="http://schemas.microsoft.com/office/drawing/2014/main" xmlns="" id="{AD706E3A-CFBB-4A6C-A65F-D0360A9E74FE}"/>
               </a:ext>
             </a:extLst>
           </p:cNvPr>
@@ -3994,7 +3995,7 @@
           <p:cNvPr id="7" name="Espaço Reservado para Data 6">
             <a:extLst>
               <a:ext uri="{FF2B5EF4-FFF2-40B4-BE49-F238E27FC236}">
-                <a16:creationId xmlns:a16="http://schemas.microsoft.com/office/drawing/2014/main" id="{4172C0E5-5AF0-4805-BB51-443733CD2BD5}"/>
+                <a16:creationId xmlns:a16="http://schemas.microsoft.com/office/drawing/2014/main" xmlns="" id="{4172C0E5-5AF0-4805-BB51-443733CD2BD5}"/>
               </a:ext>
             </a:extLst>
           </p:cNvPr>
@@ -4023,7 +4024,7 @@
           <p:cNvPr id="8" name="Espaço Reservado para Rodapé 7">
             <a:extLst>
               <a:ext uri="{FF2B5EF4-FFF2-40B4-BE49-F238E27FC236}">
-                <a16:creationId xmlns:a16="http://schemas.microsoft.com/office/drawing/2014/main" id="{0E801648-156F-497E-99CF-797DF48051E1}"/>
+                <a16:creationId xmlns:a16="http://schemas.microsoft.com/office/drawing/2014/main" xmlns="" id="{0E801648-156F-497E-99CF-797DF48051E1}"/>
               </a:ext>
             </a:extLst>
           </p:cNvPr>
@@ -4048,7 +4049,7 @@
           <p:cNvPr id="9" name="Espaço Reservado para Número de Slide 8">
             <a:extLst>
               <a:ext uri="{FF2B5EF4-FFF2-40B4-BE49-F238E27FC236}">
-                <a16:creationId xmlns:a16="http://schemas.microsoft.com/office/drawing/2014/main" id="{EEE23D32-80E7-4796-A137-66BF842E4B53}"/>
+                <a16:creationId xmlns:a16="http://schemas.microsoft.com/office/drawing/2014/main" xmlns="" id="{EEE23D32-80E7-4796-A137-66BF842E4B53}"/>
               </a:ext>
             </a:extLst>
           </p:cNvPr>
@@ -4066,7 +4067,7 @@
           <a:p>
             <a:fld id="{1A7E88B7-70CE-4035-AE73-13FA6FB985D4}" type="slidenum">
               <a:rPr lang="pt-BR" smtClean="0"/>
-              <a:t>‹#›</a:t>
+              <a:t>‹nº›</a:t>
             </a:fld>
             <a:endParaRPr lang="pt-BR"/>
           </a:p>
@@ -4107,7 +4108,7 @@
           <p:cNvPr id="2" name="Título 1">
             <a:extLst>
               <a:ext uri="{FF2B5EF4-FFF2-40B4-BE49-F238E27FC236}">
-                <a16:creationId xmlns:a16="http://schemas.microsoft.com/office/drawing/2014/main" id="{2BCE2379-C78F-47E1-8CFC-B846E7AF148D}"/>
+                <a16:creationId xmlns:a16="http://schemas.microsoft.com/office/drawing/2014/main" xmlns="" id="{2BCE2379-C78F-47E1-8CFC-B846E7AF148D}"/>
               </a:ext>
             </a:extLst>
           </p:cNvPr>
@@ -4135,7 +4136,7 @@
           <p:cNvPr id="3" name="Espaço Reservado para Data 2">
             <a:extLst>
               <a:ext uri="{FF2B5EF4-FFF2-40B4-BE49-F238E27FC236}">
-                <a16:creationId xmlns:a16="http://schemas.microsoft.com/office/drawing/2014/main" id="{342600A9-7F92-4E22-9D94-E4717252A817}"/>
+                <a16:creationId xmlns:a16="http://schemas.microsoft.com/office/drawing/2014/main" xmlns="" id="{342600A9-7F92-4E22-9D94-E4717252A817}"/>
               </a:ext>
             </a:extLst>
           </p:cNvPr>
@@ -4164,7 +4165,7 @@
           <p:cNvPr id="4" name="Espaço Reservado para Rodapé 3">
             <a:extLst>
               <a:ext uri="{FF2B5EF4-FFF2-40B4-BE49-F238E27FC236}">
-                <a16:creationId xmlns:a16="http://schemas.microsoft.com/office/drawing/2014/main" id="{192E6BED-F546-40CC-A2DF-99CBA853654E}"/>
+                <a16:creationId xmlns:a16="http://schemas.microsoft.com/office/drawing/2014/main" xmlns="" id="{192E6BED-F546-40CC-A2DF-99CBA853654E}"/>
               </a:ext>
             </a:extLst>
           </p:cNvPr>
@@ -4189,7 +4190,7 @@
           <p:cNvPr id="5" name="Espaço Reservado para Número de Slide 4">
             <a:extLst>
               <a:ext uri="{FF2B5EF4-FFF2-40B4-BE49-F238E27FC236}">
-                <a16:creationId xmlns:a16="http://schemas.microsoft.com/office/drawing/2014/main" id="{6091CC40-A8C4-4063-80EB-CC5099621678}"/>
+                <a16:creationId xmlns:a16="http://schemas.microsoft.com/office/drawing/2014/main" xmlns="" id="{6091CC40-A8C4-4063-80EB-CC5099621678}"/>
               </a:ext>
             </a:extLst>
           </p:cNvPr>
@@ -4207,7 +4208,7 @@
           <a:p>
             <a:fld id="{1A7E88B7-70CE-4035-AE73-13FA6FB985D4}" type="slidenum">
               <a:rPr lang="pt-BR" smtClean="0"/>
-              <a:t>‹#›</a:t>
+              <a:t>‹nº›</a:t>
             </a:fld>
             <a:endParaRPr lang="pt-BR"/>
           </a:p>
@@ -4248,7 +4249,7 @@
           <p:cNvPr id="2" name="Espaço Reservado para Data 1">
             <a:extLst>
               <a:ext uri="{FF2B5EF4-FFF2-40B4-BE49-F238E27FC236}">
-                <a16:creationId xmlns:a16="http://schemas.microsoft.com/office/drawing/2014/main" id="{DD19515C-212C-4EAE-84A3-8FF4BC844F1B}"/>
+                <a16:creationId xmlns:a16="http://schemas.microsoft.com/office/drawing/2014/main" xmlns="" id="{DD19515C-212C-4EAE-84A3-8FF4BC844F1B}"/>
               </a:ext>
             </a:extLst>
           </p:cNvPr>
@@ -4277,7 +4278,7 @@
           <p:cNvPr id="3" name="Espaço Reservado para Rodapé 2">
             <a:extLst>
               <a:ext uri="{FF2B5EF4-FFF2-40B4-BE49-F238E27FC236}">
-                <a16:creationId xmlns:a16="http://schemas.microsoft.com/office/drawing/2014/main" id="{94D3D120-B3E8-4C96-861D-7A4F12F49B3A}"/>
+                <a16:creationId xmlns:a16="http://schemas.microsoft.com/office/drawing/2014/main" xmlns="" id="{94D3D120-B3E8-4C96-861D-7A4F12F49B3A}"/>
               </a:ext>
             </a:extLst>
           </p:cNvPr>
@@ -4302,7 +4303,7 @@
           <p:cNvPr id="4" name="Espaço Reservado para Número de Slide 3">
             <a:extLst>
               <a:ext uri="{FF2B5EF4-FFF2-40B4-BE49-F238E27FC236}">
-                <a16:creationId xmlns:a16="http://schemas.microsoft.com/office/drawing/2014/main" id="{42E49B68-FA1B-468B-9F17-D5C09243D454}"/>
+                <a16:creationId xmlns:a16="http://schemas.microsoft.com/office/drawing/2014/main" xmlns="" id="{42E49B68-FA1B-468B-9F17-D5C09243D454}"/>
               </a:ext>
             </a:extLst>
           </p:cNvPr>
@@ -4320,7 +4321,7 @@
           <a:p>
             <a:fld id="{1A7E88B7-70CE-4035-AE73-13FA6FB985D4}" type="slidenum">
               <a:rPr lang="pt-BR" smtClean="0"/>
-              <a:t>‹#›</a:t>
+              <a:t>‹nº›</a:t>
             </a:fld>
             <a:endParaRPr lang="pt-BR"/>
           </a:p>
@@ -4361,7 +4362,7 @@
           <p:cNvPr id="2" name="Título 1">
             <a:extLst>
               <a:ext uri="{FF2B5EF4-FFF2-40B4-BE49-F238E27FC236}">
-                <a16:creationId xmlns:a16="http://schemas.microsoft.com/office/drawing/2014/main" id="{1C17BCBE-A897-4319-85EC-D87909C24980}"/>
+                <a16:creationId xmlns:a16="http://schemas.microsoft.com/office/drawing/2014/main" xmlns="" id="{1C17BCBE-A897-4319-85EC-D87909C24980}"/>
               </a:ext>
             </a:extLst>
           </p:cNvPr>
@@ -4398,7 +4399,7 @@
           <p:cNvPr id="3" name="Espaço Reservado para Conteúdo 2">
             <a:extLst>
               <a:ext uri="{FF2B5EF4-FFF2-40B4-BE49-F238E27FC236}">
-                <a16:creationId xmlns:a16="http://schemas.microsoft.com/office/drawing/2014/main" id="{4226F885-0204-4913-868B-4B8B82576F17}"/>
+                <a16:creationId xmlns:a16="http://schemas.microsoft.com/office/drawing/2014/main" xmlns="" id="{4226F885-0204-4913-868B-4B8B82576F17}"/>
               </a:ext>
             </a:extLst>
           </p:cNvPr>
@@ -4488,7 +4489,7 @@
           <p:cNvPr id="4" name="Espaço Reservado para Texto 3">
             <a:extLst>
               <a:ext uri="{FF2B5EF4-FFF2-40B4-BE49-F238E27FC236}">
-                <a16:creationId xmlns:a16="http://schemas.microsoft.com/office/drawing/2014/main" id="{00F9F784-A858-441B-8AB5-697098141751}"/>
+                <a16:creationId xmlns:a16="http://schemas.microsoft.com/office/drawing/2014/main" xmlns="" id="{00F9F784-A858-441B-8AB5-697098141751}"/>
               </a:ext>
             </a:extLst>
           </p:cNvPr>
@@ -4559,7 +4560,7 @@
           <p:cNvPr id="5" name="Espaço Reservado para Data 4">
             <a:extLst>
               <a:ext uri="{FF2B5EF4-FFF2-40B4-BE49-F238E27FC236}">
-                <a16:creationId xmlns:a16="http://schemas.microsoft.com/office/drawing/2014/main" id="{A4DC363A-5000-472E-8B17-02E7DCB8840A}"/>
+                <a16:creationId xmlns:a16="http://schemas.microsoft.com/office/drawing/2014/main" xmlns="" id="{A4DC363A-5000-472E-8B17-02E7DCB8840A}"/>
               </a:ext>
             </a:extLst>
           </p:cNvPr>
@@ -4588,7 +4589,7 @@
           <p:cNvPr id="6" name="Espaço Reservado para Rodapé 5">
             <a:extLst>
               <a:ext uri="{FF2B5EF4-FFF2-40B4-BE49-F238E27FC236}">
-                <a16:creationId xmlns:a16="http://schemas.microsoft.com/office/drawing/2014/main" id="{5548425D-2C21-4C56-BAD4-662978775C28}"/>
+                <a16:creationId xmlns:a16="http://schemas.microsoft.com/office/drawing/2014/main" xmlns="" id="{5548425D-2C21-4C56-BAD4-662978775C28}"/>
               </a:ext>
             </a:extLst>
           </p:cNvPr>
@@ -4613,7 +4614,7 @@
           <p:cNvPr id="7" name="Espaço Reservado para Número de Slide 6">
             <a:extLst>
               <a:ext uri="{FF2B5EF4-FFF2-40B4-BE49-F238E27FC236}">
-                <a16:creationId xmlns:a16="http://schemas.microsoft.com/office/drawing/2014/main" id="{C63E9726-E64C-42B2-AE8A-8C235A956B48}"/>
+                <a16:creationId xmlns:a16="http://schemas.microsoft.com/office/drawing/2014/main" xmlns="" id="{C63E9726-E64C-42B2-AE8A-8C235A956B48}"/>
               </a:ext>
             </a:extLst>
           </p:cNvPr>
@@ -4631,7 +4632,7 @@
           <a:p>
             <a:fld id="{1A7E88B7-70CE-4035-AE73-13FA6FB985D4}" type="slidenum">
               <a:rPr lang="pt-BR" smtClean="0"/>
-              <a:t>‹#›</a:t>
+              <a:t>‹nº›</a:t>
             </a:fld>
             <a:endParaRPr lang="pt-BR"/>
           </a:p>
@@ -4672,7 +4673,7 @@
           <p:cNvPr id="2" name="Título 1">
             <a:extLst>
               <a:ext uri="{FF2B5EF4-FFF2-40B4-BE49-F238E27FC236}">
-                <a16:creationId xmlns:a16="http://schemas.microsoft.com/office/drawing/2014/main" id="{11086A78-3E74-450C-96A6-CA8AC37AF772}"/>
+                <a16:creationId xmlns:a16="http://schemas.microsoft.com/office/drawing/2014/main" xmlns="" id="{11086A78-3E74-450C-96A6-CA8AC37AF772}"/>
               </a:ext>
             </a:extLst>
           </p:cNvPr>
@@ -4709,7 +4710,7 @@
           <p:cNvPr id="3" name="Espaço Reservado para Imagem 2">
             <a:extLst>
               <a:ext uri="{FF2B5EF4-FFF2-40B4-BE49-F238E27FC236}">
-                <a16:creationId xmlns:a16="http://schemas.microsoft.com/office/drawing/2014/main" id="{5F5B7312-975A-4DBC-9B2F-3652ADA006FD}"/>
+                <a16:creationId xmlns:a16="http://schemas.microsoft.com/office/drawing/2014/main" xmlns="" id="{5F5B7312-975A-4DBC-9B2F-3652ADA006FD}"/>
               </a:ext>
             </a:extLst>
           </p:cNvPr>
@@ -4776,7 +4777,7 @@
           <p:cNvPr id="4" name="Espaço Reservado para Texto 3">
             <a:extLst>
               <a:ext uri="{FF2B5EF4-FFF2-40B4-BE49-F238E27FC236}">
-                <a16:creationId xmlns:a16="http://schemas.microsoft.com/office/drawing/2014/main" id="{AAF805F5-1DFF-41C6-944C-7D79FE0D0963}"/>
+                <a16:creationId xmlns:a16="http://schemas.microsoft.com/office/drawing/2014/main" xmlns="" id="{AAF805F5-1DFF-41C6-944C-7D79FE0D0963}"/>
               </a:ext>
             </a:extLst>
           </p:cNvPr>
@@ -4847,7 +4848,7 @@
           <p:cNvPr id="5" name="Espaço Reservado para Data 4">
             <a:extLst>
               <a:ext uri="{FF2B5EF4-FFF2-40B4-BE49-F238E27FC236}">
-                <a16:creationId xmlns:a16="http://schemas.microsoft.com/office/drawing/2014/main" id="{02113D81-8665-4516-BD81-C6A1F254EECD}"/>
+                <a16:creationId xmlns:a16="http://schemas.microsoft.com/office/drawing/2014/main" xmlns="" id="{02113D81-8665-4516-BD81-C6A1F254EECD}"/>
               </a:ext>
             </a:extLst>
           </p:cNvPr>
@@ -4876,7 +4877,7 @@
           <p:cNvPr id="6" name="Espaço Reservado para Rodapé 5">
             <a:extLst>
               <a:ext uri="{FF2B5EF4-FFF2-40B4-BE49-F238E27FC236}">
-                <a16:creationId xmlns:a16="http://schemas.microsoft.com/office/drawing/2014/main" id="{2B00C88B-FF32-40AA-A187-727D96FD7862}"/>
+                <a16:creationId xmlns:a16="http://schemas.microsoft.com/office/drawing/2014/main" xmlns="" id="{2B00C88B-FF32-40AA-A187-727D96FD7862}"/>
               </a:ext>
             </a:extLst>
           </p:cNvPr>
@@ -4901,7 +4902,7 @@
           <p:cNvPr id="7" name="Espaço Reservado para Número de Slide 6">
             <a:extLst>
               <a:ext uri="{FF2B5EF4-FFF2-40B4-BE49-F238E27FC236}">
-                <a16:creationId xmlns:a16="http://schemas.microsoft.com/office/drawing/2014/main" id="{A04D1A2D-69F7-4B8F-A730-BC26DC340BA6}"/>
+                <a16:creationId xmlns:a16="http://schemas.microsoft.com/office/drawing/2014/main" xmlns="" id="{A04D1A2D-69F7-4B8F-A730-BC26DC340BA6}"/>
               </a:ext>
             </a:extLst>
           </p:cNvPr>
@@ -4919,7 +4920,7 @@
           <a:p>
             <a:fld id="{1A7E88B7-70CE-4035-AE73-13FA6FB985D4}" type="slidenum">
               <a:rPr lang="pt-BR" smtClean="0"/>
-              <a:t>‹#›</a:t>
+              <a:t>‹nº›</a:t>
             </a:fld>
             <a:endParaRPr lang="pt-BR"/>
           </a:p>
@@ -4965,7 +4966,7 @@
           <p:cNvPr id="2" name="Espaço Reservado para Título 1">
             <a:extLst>
               <a:ext uri="{FF2B5EF4-FFF2-40B4-BE49-F238E27FC236}">
-                <a16:creationId xmlns:a16="http://schemas.microsoft.com/office/drawing/2014/main" id="{E69A0273-1966-4A1B-9370-4C1CE5036371}"/>
+                <a16:creationId xmlns:a16="http://schemas.microsoft.com/office/drawing/2014/main" xmlns="" id="{E69A0273-1966-4A1B-9370-4C1CE5036371}"/>
               </a:ext>
             </a:extLst>
           </p:cNvPr>
@@ -5003,7 +5004,7 @@
           <p:cNvPr id="3" name="Espaço Reservado para Texto 2">
             <a:extLst>
               <a:ext uri="{FF2B5EF4-FFF2-40B4-BE49-F238E27FC236}">
-                <a16:creationId xmlns:a16="http://schemas.microsoft.com/office/drawing/2014/main" id="{3B9CF87A-0448-49A7-AB25-EBC1D56A40EF}"/>
+                <a16:creationId xmlns:a16="http://schemas.microsoft.com/office/drawing/2014/main" xmlns="" id="{3B9CF87A-0448-49A7-AB25-EBC1D56A40EF}"/>
               </a:ext>
             </a:extLst>
           </p:cNvPr>
@@ -5070,7 +5071,7 @@
           <p:cNvPr id="4" name="Espaço Reservado para Data 3">
             <a:extLst>
               <a:ext uri="{FF2B5EF4-FFF2-40B4-BE49-F238E27FC236}">
-                <a16:creationId xmlns:a16="http://schemas.microsoft.com/office/drawing/2014/main" id="{2EF7B1F2-BB5A-44D0-816D-16AD2C71430E}"/>
+                <a16:creationId xmlns:a16="http://schemas.microsoft.com/office/drawing/2014/main" xmlns="" id="{2EF7B1F2-BB5A-44D0-816D-16AD2C71430E}"/>
               </a:ext>
             </a:extLst>
           </p:cNvPr>
@@ -5117,7 +5118,7 @@
           <p:cNvPr id="5" name="Espaço Reservado para Rodapé 4">
             <a:extLst>
               <a:ext uri="{FF2B5EF4-FFF2-40B4-BE49-F238E27FC236}">
-                <a16:creationId xmlns:a16="http://schemas.microsoft.com/office/drawing/2014/main" id="{C703F94C-2CC8-4DAA-BC35-14FC3E841DCD}"/>
+                <a16:creationId xmlns:a16="http://schemas.microsoft.com/office/drawing/2014/main" xmlns="" id="{C703F94C-2CC8-4DAA-BC35-14FC3E841DCD}"/>
               </a:ext>
             </a:extLst>
           </p:cNvPr>
@@ -5160,7 +5161,7 @@
           <p:cNvPr id="6" name="Espaço Reservado para Número de Slide 5">
             <a:extLst>
               <a:ext uri="{FF2B5EF4-FFF2-40B4-BE49-F238E27FC236}">
-                <a16:creationId xmlns:a16="http://schemas.microsoft.com/office/drawing/2014/main" id="{64051336-7048-457A-8B61-D94291D71648}"/>
+                <a16:creationId xmlns:a16="http://schemas.microsoft.com/office/drawing/2014/main" xmlns="" id="{64051336-7048-457A-8B61-D94291D71648}"/>
               </a:ext>
             </a:extLst>
           </p:cNvPr>
@@ -5196,7 +5197,7 @@
           <a:p>
             <a:fld id="{1A7E88B7-70CE-4035-AE73-13FA6FB985D4}" type="slidenum">
               <a:rPr lang="pt-BR" smtClean="0"/>
-              <a:t>‹#›</a:t>
+              <a:t>‹nº›</a:t>
             </a:fld>
             <a:endParaRPr lang="pt-BR"/>
           </a:p>
@@ -5528,7 +5529,7 @@
           <p:cNvPr id="4" name="CaixaDeTexto 3">
             <a:extLst>
               <a:ext uri="{FF2B5EF4-FFF2-40B4-BE49-F238E27FC236}">
-                <a16:creationId xmlns:a16="http://schemas.microsoft.com/office/drawing/2014/main" id="{430EB894-B7D4-434C-9D1A-A14094D9BEEC}"/>
+                <a16:creationId xmlns:a16="http://schemas.microsoft.com/office/drawing/2014/main" xmlns="" id="{430EB894-B7D4-434C-9D1A-A14094D9BEEC}"/>
               </a:ext>
             </a:extLst>
           </p:cNvPr>
@@ -5572,7 +5573,7 @@
           <p:cNvPr id="1026" name="Picture 2" descr="Logo">
             <a:extLst>
               <a:ext uri="{FF2B5EF4-FFF2-40B4-BE49-F238E27FC236}">
-                <a16:creationId xmlns:a16="http://schemas.microsoft.com/office/drawing/2014/main" id="{3F2642E0-4F6A-4196-8F58-E77D36E9A33F}"/>
+                <a16:creationId xmlns:a16="http://schemas.microsoft.com/office/drawing/2014/main" xmlns="" id="{3F2642E0-4F6A-4196-8F58-E77D36E9A33F}"/>
               </a:ext>
             </a:extLst>
           </p:cNvPr>
@@ -5617,7 +5618,7 @@
           <p:cNvPr id="5122" name="Picture 2" descr="Image result for machine learning">
             <a:extLst>
               <a:ext uri="{FF2B5EF4-FFF2-40B4-BE49-F238E27FC236}">
-                <a16:creationId xmlns:a16="http://schemas.microsoft.com/office/drawing/2014/main" id="{810CE0A2-4102-44A6-A370-175E7896CDCB}"/>
+                <a16:creationId xmlns:a16="http://schemas.microsoft.com/office/drawing/2014/main" xmlns="" id="{810CE0A2-4102-44A6-A370-175E7896CDCB}"/>
               </a:ext>
             </a:extLst>
           </p:cNvPr>
@@ -5662,7 +5663,7 @@
           <p:cNvPr id="7" name="Título 1">
             <a:extLst>
               <a:ext uri="{FF2B5EF4-FFF2-40B4-BE49-F238E27FC236}">
-                <a16:creationId xmlns:a16="http://schemas.microsoft.com/office/drawing/2014/main" id="{32666AC8-2E17-4DB4-B0F5-60C640CCFD2E}"/>
+                <a16:creationId xmlns:a16="http://schemas.microsoft.com/office/drawing/2014/main" xmlns="" id="{32666AC8-2E17-4DB4-B0F5-60C640CCFD2E}"/>
               </a:ext>
             </a:extLst>
           </p:cNvPr>
@@ -5688,6 +5689,10 @@
             <a:r>
               <a:rPr lang="pt-BR" sz="6600" dirty="0"/>
               <a:t>C24 – Inteligência Artificial:</a:t>
+            </a:r>
+            <a:r>
+              <a:rPr lang="pt-BR" sz="7200" dirty="0"/>
+              <a:t/>
             </a:r>
             <a:br>
               <a:rPr lang="pt-BR" sz="7200" dirty="0"/>
@@ -5734,7 +5739,7 @@
           <p:cNvPr id="2" name="Título 1">
             <a:extLst>
               <a:ext uri="{FF2B5EF4-FFF2-40B4-BE49-F238E27FC236}">
-                <a16:creationId xmlns:a16="http://schemas.microsoft.com/office/drawing/2014/main" id="{B3645331-4B2E-BB50-BF81-FDF8C639EED5}"/>
+                <a16:creationId xmlns:a16="http://schemas.microsoft.com/office/drawing/2014/main" xmlns="" id="{B3645331-4B2E-BB50-BF81-FDF8C639EED5}"/>
               </a:ext>
             </a:extLst>
           </p:cNvPr>
@@ -5764,7 +5769,7 @@
               <p:cNvPr id="3" name="Espaço Reservado para Conteúdo 2">
                 <a:extLst>
                   <a:ext uri="{FF2B5EF4-FFF2-40B4-BE49-F238E27FC236}">
-                    <a16:creationId xmlns:a16="http://schemas.microsoft.com/office/drawing/2014/main" id="{67745B10-6162-30F7-6050-58C45B781852}"/>
+                    <a16:creationId xmlns:a16="http://schemas.microsoft.com/office/drawing/2014/main" xmlns="" id="{67745B10-6162-30F7-6050-58C45B781852}"/>
                   </a:ext>
                 </a:extLst>
               </p:cNvPr>
@@ -6269,7 +6274,7 @@
         <p:cNvPr id="1" name="">
           <a:extLst>
             <a:ext uri="{FF2B5EF4-FFF2-40B4-BE49-F238E27FC236}">
-              <a16:creationId xmlns:a16="http://schemas.microsoft.com/office/drawing/2014/main" id="{6050803C-34C9-CCF4-6673-47CCCF2C74AF}"/>
+              <a16:creationId xmlns:a16="http://schemas.microsoft.com/office/drawing/2014/main" xmlns="" id="{6050803C-34C9-CCF4-6673-47CCCF2C74AF}"/>
             </a:ext>
           </a:extLst>
         </p:cNvPr>
@@ -6289,7 +6294,7 @@
           <p:cNvPr id="2" name="Título 1">
             <a:extLst>
               <a:ext uri="{FF2B5EF4-FFF2-40B4-BE49-F238E27FC236}">
-                <a16:creationId xmlns:a16="http://schemas.microsoft.com/office/drawing/2014/main" id="{E7B6B386-02B2-D964-73F3-196F9F79BAF2}"/>
+                <a16:creationId xmlns:a16="http://schemas.microsoft.com/office/drawing/2014/main" xmlns="" id="{E7B6B386-02B2-D964-73F3-196F9F79BAF2}"/>
               </a:ext>
             </a:extLst>
           </p:cNvPr>
@@ -6319,7 +6324,7 @@
               <p:cNvPr id="3" name="Espaço Reservado para Conteúdo 2">
                 <a:extLst>
                   <a:ext uri="{FF2B5EF4-FFF2-40B4-BE49-F238E27FC236}">
-                    <a16:creationId xmlns:a16="http://schemas.microsoft.com/office/drawing/2014/main" id="{9C482631-ECEA-B4D7-2D72-82A636953ACA}"/>
+                    <a16:creationId xmlns:a16="http://schemas.microsoft.com/office/drawing/2014/main" xmlns="" id="{9C482631-ECEA-B4D7-2D72-82A636953ACA}"/>
                   </a:ext>
                 </a:extLst>
               </p:cNvPr>
@@ -7586,7 +7591,7 @@
           <p:cNvPr id="1028" name="Picture 4">
             <a:extLst>
               <a:ext uri="{FF2B5EF4-FFF2-40B4-BE49-F238E27FC236}">
-                <a16:creationId xmlns:a16="http://schemas.microsoft.com/office/drawing/2014/main" id="{12007748-1241-43BA-BCB2-C3CEA1054E90}"/>
+                <a16:creationId xmlns:a16="http://schemas.microsoft.com/office/drawing/2014/main" xmlns="" id="{12007748-1241-43BA-BCB2-C3CEA1054E90}"/>
               </a:ext>
             </a:extLst>
           </p:cNvPr>
@@ -7633,7 +7638,7 @@
           <p:cNvPr id="1030" name="Picture 6">
             <a:extLst>
               <a:ext uri="{FF2B5EF4-FFF2-40B4-BE49-F238E27FC236}">
-                <a16:creationId xmlns:a16="http://schemas.microsoft.com/office/drawing/2014/main" id="{D0BE679B-48AF-4331-B659-21FE08DC204B}"/>
+                <a16:creationId xmlns:a16="http://schemas.microsoft.com/office/drawing/2014/main" xmlns="" id="{D0BE679B-48AF-4331-B659-21FE08DC204B}"/>
               </a:ext>
             </a:extLst>
           </p:cNvPr>
@@ -7696,7 +7701,7 @@
         <p:cNvPr id="1" name="">
           <a:extLst>
             <a:ext uri="{FF2B5EF4-FFF2-40B4-BE49-F238E27FC236}">
-              <a16:creationId xmlns:a16="http://schemas.microsoft.com/office/drawing/2014/main" id="{E791E141-9BEA-1A7F-F3BE-B2EC1675E232}"/>
+              <a16:creationId xmlns:a16="http://schemas.microsoft.com/office/drawing/2014/main" xmlns="" id="{E791E141-9BEA-1A7F-F3BE-B2EC1675E232}"/>
             </a:ext>
           </a:extLst>
         </p:cNvPr>
@@ -7716,7 +7721,7 @@
           <p:cNvPr id="3" name="Espaço Reservado para Conteúdo 2">
             <a:extLst>
               <a:ext uri="{FF2B5EF4-FFF2-40B4-BE49-F238E27FC236}">
-                <a16:creationId xmlns:a16="http://schemas.microsoft.com/office/drawing/2014/main" id="{7636E6F2-3CD7-063A-5B72-5FF656E61DA5}"/>
+                <a16:creationId xmlns:a16="http://schemas.microsoft.com/office/drawing/2014/main" xmlns="" id="{7636E6F2-3CD7-063A-5B72-5FF656E61DA5}"/>
               </a:ext>
             </a:extLst>
           </p:cNvPr>
@@ -7784,7 +7789,7 @@
           <p:cNvPr id="2" name="Title 1">
             <a:extLst>
               <a:ext uri="{FF2B5EF4-FFF2-40B4-BE49-F238E27FC236}">
-                <a16:creationId xmlns:a16="http://schemas.microsoft.com/office/drawing/2014/main" id="{E88D1460-F0A9-8CC3-99B3-716DC4544139}"/>
+                <a16:creationId xmlns:a16="http://schemas.microsoft.com/office/drawing/2014/main" xmlns="" id="{E88D1460-F0A9-8CC3-99B3-716DC4544139}"/>
               </a:ext>
             </a:extLst>
           </p:cNvPr>
@@ -7815,7 +7820,7 @@
               <p:cNvPr id="3" name="Content Placeholder 2">
                 <a:extLst>
                   <a:ext uri="{FF2B5EF4-FFF2-40B4-BE49-F238E27FC236}">
-                    <a16:creationId xmlns:a16="http://schemas.microsoft.com/office/drawing/2014/main" id="{A8F1D988-6925-C286-BA9F-B4A4851E2FFB}"/>
+                    <a16:creationId xmlns:a16="http://schemas.microsoft.com/office/drawing/2014/main" xmlns="" id="{A8F1D988-6925-C286-BA9F-B4A4851E2FFB}"/>
                   </a:ext>
                 </a:extLst>
               </p:cNvPr>
@@ -8418,7 +8423,7 @@
               <p:cNvPr id="5" name="TextBox 4">
                 <a:extLst>
                   <a:ext uri="{FF2B5EF4-FFF2-40B4-BE49-F238E27FC236}">
-                    <a16:creationId xmlns:a16="http://schemas.microsoft.com/office/drawing/2014/main" id="{A6B354F9-74E2-2FAD-DDBA-5FD514A114CE}"/>
+                    <a16:creationId xmlns:a16="http://schemas.microsoft.com/office/drawing/2014/main" xmlns="" id="{A6B354F9-74E2-2FAD-DDBA-5FD514A114CE}"/>
                   </a:ext>
                 </a:extLst>
               </p:cNvPr>
@@ -8539,7 +8544,7 @@
         <p:cNvPr id="1" name="">
           <a:extLst>
             <a:ext uri="{FF2B5EF4-FFF2-40B4-BE49-F238E27FC236}">
-              <a16:creationId xmlns:a16="http://schemas.microsoft.com/office/drawing/2014/main" id="{2CAA1FF2-610F-29DC-A1C0-06044CE6D752}"/>
+              <a16:creationId xmlns:a16="http://schemas.microsoft.com/office/drawing/2014/main" xmlns="" id="{2CAA1FF2-610F-29DC-A1C0-06044CE6D752}"/>
             </a:ext>
           </a:extLst>
         </p:cNvPr>
@@ -8559,7 +8564,7 @@
           <p:cNvPr id="3" name="Espaço Reservado para Conteúdo 2">
             <a:extLst>
               <a:ext uri="{FF2B5EF4-FFF2-40B4-BE49-F238E27FC236}">
-                <a16:creationId xmlns:a16="http://schemas.microsoft.com/office/drawing/2014/main" id="{BEB786D8-DC7C-3952-8523-439D463A8F44}"/>
+                <a16:creationId xmlns:a16="http://schemas.microsoft.com/office/drawing/2014/main" xmlns="" id="{BEB786D8-DC7C-3952-8523-439D463A8F44}"/>
               </a:ext>
             </a:extLst>
           </p:cNvPr>
@@ -8627,7 +8632,7 @@
           <p:cNvPr id="2" name="Título 1">
             <a:extLst>
               <a:ext uri="{FF2B5EF4-FFF2-40B4-BE49-F238E27FC236}">
-                <a16:creationId xmlns:a16="http://schemas.microsoft.com/office/drawing/2014/main" id="{D22F9E6F-04DB-ABA7-5277-8F56D03FB979}"/>
+                <a16:creationId xmlns:a16="http://schemas.microsoft.com/office/drawing/2014/main" xmlns="" id="{D22F9E6F-04DB-ABA7-5277-8F56D03FB979}"/>
               </a:ext>
             </a:extLst>
           </p:cNvPr>
@@ -8657,7 +8662,7 @@
               <p:cNvPr id="3" name="Espaço Reservado para Conteúdo 2">
                 <a:extLst>
                   <a:ext uri="{FF2B5EF4-FFF2-40B4-BE49-F238E27FC236}">
-                    <a16:creationId xmlns:a16="http://schemas.microsoft.com/office/drawing/2014/main" id="{843752C2-61B6-8E7E-17CE-7C009ECA9D67}"/>
+                    <a16:creationId xmlns:a16="http://schemas.microsoft.com/office/drawing/2014/main" xmlns="" id="{843752C2-61B6-8E7E-17CE-7C009ECA9D67}"/>
                   </a:ext>
                 </a:extLst>
               </p:cNvPr>
@@ -9533,7 +9538,7 @@
           <p:cNvPr id="4" name="TextBox 3">
             <a:extLst>
               <a:ext uri="{FF2B5EF4-FFF2-40B4-BE49-F238E27FC236}">
-                <a16:creationId xmlns:a16="http://schemas.microsoft.com/office/drawing/2014/main" id="{DA1B5748-659A-1A33-A0BB-36FDFC0D922B}"/>
+                <a16:creationId xmlns:a16="http://schemas.microsoft.com/office/drawing/2014/main" xmlns="" id="{DA1B5748-659A-1A33-A0BB-36FDFC0D922B}"/>
               </a:ext>
             </a:extLst>
           </p:cNvPr>
@@ -9569,7 +9574,7 @@
           <p:cNvPr id="5" name="Straight Arrow Connector 5">
             <a:extLst>
               <a:ext uri="{FF2B5EF4-FFF2-40B4-BE49-F238E27FC236}">
-                <a16:creationId xmlns:a16="http://schemas.microsoft.com/office/drawing/2014/main" id="{533A37AF-2E19-6028-AE93-9CF06895589A}"/>
+                <a16:creationId xmlns:a16="http://schemas.microsoft.com/office/drawing/2014/main" xmlns="" id="{533A37AF-2E19-6028-AE93-9CF06895589A}"/>
               </a:ext>
             </a:extLst>
           </p:cNvPr>
@@ -9643,7 +9648,7 @@
           <p:cNvPr id="2" name="Title 1">
             <a:extLst>
               <a:ext uri="{FF2B5EF4-FFF2-40B4-BE49-F238E27FC236}">
-                <a16:creationId xmlns:a16="http://schemas.microsoft.com/office/drawing/2014/main" id="{0AC4E842-F6C8-EE87-0AA0-9BEFA4B974FB}"/>
+                <a16:creationId xmlns:a16="http://schemas.microsoft.com/office/drawing/2014/main" xmlns="" id="{0AC4E842-F6C8-EE87-0AA0-9BEFA4B974FB}"/>
               </a:ext>
             </a:extLst>
           </p:cNvPr>
@@ -9674,7 +9679,7 @@
               <p:cNvPr id="3" name="Content Placeholder 2">
                 <a:extLst>
                   <a:ext uri="{FF2B5EF4-FFF2-40B4-BE49-F238E27FC236}">
-                    <a16:creationId xmlns:a16="http://schemas.microsoft.com/office/drawing/2014/main" id="{7A581B72-317A-3CC1-4214-6CBD69B4A604}"/>
+                    <a16:creationId xmlns:a16="http://schemas.microsoft.com/office/drawing/2014/main" xmlns="" id="{7A581B72-317A-3CC1-4214-6CBD69B4A604}"/>
                   </a:ext>
                 </a:extLst>
               </p:cNvPr>
@@ -9980,7 +9985,7 @@
           <p:cNvPr id="2" name="Title 1">
             <a:extLst>
               <a:ext uri="{FF2B5EF4-FFF2-40B4-BE49-F238E27FC236}">
-                <a16:creationId xmlns:a16="http://schemas.microsoft.com/office/drawing/2014/main" id="{1C5DC745-C86C-4971-B0AF-00EE88E914C9}"/>
+                <a16:creationId xmlns:a16="http://schemas.microsoft.com/office/drawing/2014/main" xmlns="" id="{1C5DC745-C86C-4971-B0AF-00EE88E914C9}"/>
               </a:ext>
             </a:extLst>
           </p:cNvPr>
@@ -10013,7 +10018,7 @@
           <p:cNvPr id="3" name="Content Placeholder 2">
             <a:extLst>
               <a:ext uri="{FF2B5EF4-FFF2-40B4-BE49-F238E27FC236}">
-                <a16:creationId xmlns:a16="http://schemas.microsoft.com/office/drawing/2014/main" id="{AF130550-3E6D-44FC-BB82-8D9766374925}"/>
+                <a16:creationId xmlns:a16="http://schemas.microsoft.com/office/drawing/2014/main" xmlns="" id="{AF130550-3E6D-44FC-BB82-8D9766374925}"/>
               </a:ext>
             </a:extLst>
           </p:cNvPr>
@@ -10154,7 +10159,7 @@
           <p:cNvPr id="4" name="Group 3">
             <a:extLst>
               <a:ext uri="{FF2B5EF4-FFF2-40B4-BE49-F238E27FC236}">
-                <a16:creationId xmlns:a16="http://schemas.microsoft.com/office/drawing/2014/main" id="{DF988A4E-4866-35AF-BF8F-8DD7FA3EE9A8}"/>
+                <a16:creationId xmlns:a16="http://schemas.microsoft.com/office/drawing/2014/main" xmlns="" id="{DF988A4E-4866-35AF-BF8F-8DD7FA3EE9A8}"/>
               </a:ext>
             </a:extLst>
           </p:cNvPr>
@@ -10174,7 +10179,7 @@
             <p:cNvPr id="7" name="Agrupar 6">
               <a:extLst>
                 <a:ext uri="{FF2B5EF4-FFF2-40B4-BE49-F238E27FC236}">
-                  <a16:creationId xmlns:a16="http://schemas.microsoft.com/office/drawing/2014/main" id="{A9CFBE1F-E739-ECB1-A43E-891E3E546A8C}"/>
+                  <a16:creationId xmlns:a16="http://schemas.microsoft.com/office/drawing/2014/main" xmlns="" id="{A9CFBE1F-E739-ECB1-A43E-891E3E546A8C}"/>
                 </a:ext>
               </a:extLst>
             </p:cNvPr>
@@ -10194,7 +10199,7 @@
               <p:cNvPr id="20" name="Retângulo 19">
                 <a:extLst>
                   <a:ext uri="{FF2B5EF4-FFF2-40B4-BE49-F238E27FC236}">
-                    <a16:creationId xmlns:a16="http://schemas.microsoft.com/office/drawing/2014/main" id="{C94DB9DA-6651-67B4-2FCB-6138D2059179}"/>
+                    <a16:creationId xmlns:a16="http://schemas.microsoft.com/office/drawing/2014/main" xmlns="" id="{C94DB9DA-6651-67B4-2FCB-6138D2059179}"/>
                   </a:ext>
                 </a:extLst>
               </p:cNvPr>
@@ -10252,7 +10257,7 @@
               <p:cNvPr id="8" name="Rectangle 12">
                 <a:extLst>
                   <a:ext uri="{FF2B5EF4-FFF2-40B4-BE49-F238E27FC236}">
-                    <a16:creationId xmlns:a16="http://schemas.microsoft.com/office/drawing/2014/main" id="{5707A7FC-2643-5BF6-4ADB-DCD3B83DF68F}"/>
+                    <a16:creationId xmlns:a16="http://schemas.microsoft.com/office/drawing/2014/main" xmlns="" id="{5707A7FC-2643-5BF6-4ADB-DCD3B83DF68F}"/>
                   </a:ext>
                 </a:extLst>
               </p:cNvPr>
@@ -10331,7 +10336,7 @@
               <p:cNvPr id="10" name="Straight Arrow Connector 14">
                 <a:extLst>
                   <a:ext uri="{FF2B5EF4-FFF2-40B4-BE49-F238E27FC236}">
-                    <a16:creationId xmlns:a16="http://schemas.microsoft.com/office/drawing/2014/main" id="{71024B44-4FCA-AB48-FD6A-BC22BAF1FE30}"/>
+                    <a16:creationId xmlns:a16="http://schemas.microsoft.com/office/drawing/2014/main" xmlns="" id="{71024B44-4FCA-AB48-FD6A-BC22BAF1FE30}"/>
                   </a:ext>
                 </a:extLst>
               </p:cNvPr>
@@ -10372,7 +10377,7 @@
               <p:cNvPr id="11" name="Straight Arrow Connector 14">
                 <a:extLst>
                   <a:ext uri="{FF2B5EF4-FFF2-40B4-BE49-F238E27FC236}">
-                    <a16:creationId xmlns:a16="http://schemas.microsoft.com/office/drawing/2014/main" id="{AFAD5EB5-BD73-1AA8-2DE8-86B253D42465}"/>
+                    <a16:creationId xmlns:a16="http://schemas.microsoft.com/office/drawing/2014/main" xmlns="" id="{AFAD5EB5-BD73-1AA8-2DE8-86B253D42465}"/>
                   </a:ext>
                 </a:extLst>
               </p:cNvPr>
@@ -10415,7 +10420,7 @@
               <p:cNvPr id="12" name="Rectangle 12">
                 <a:extLst>
                   <a:ext uri="{FF2B5EF4-FFF2-40B4-BE49-F238E27FC236}">
-                    <a16:creationId xmlns:a16="http://schemas.microsoft.com/office/drawing/2014/main" id="{70B31B89-FB10-2FE0-309F-D08BB4008A71}"/>
+                    <a16:creationId xmlns:a16="http://schemas.microsoft.com/office/drawing/2014/main" xmlns="" id="{70B31B89-FB10-2FE0-309F-D08BB4008A71}"/>
                   </a:ext>
                 </a:extLst>
               </p:cNvPr>
@@ -10476,7 +10481,7 @@
                   <p:cNvPr id="13" name="CaixaDeTexto 12">
                     <a:extLst>
                       <a:ext uri="{FF2B5EF4-FFF2-40B4-BE49-F238E27FC236}">
-                        <a16:creationId xmlns:a16="http://schemas.microsoft.com/office/drawing/2014/main" id="{37A5E096-7B54-8ADE-2BF6-C2E99C2CDB16}"/>
+                        <a16:creationId xmlns:a16="http://schemas.microsoft.com/office/drawing/2014/main" xmlns="" id="{37A5E096-7B54-8ADE-2BF6-C2E99C2CDB16}"/>
                       </a:ext>
                     </a:extLst>
                   </p:cNvPr>
@@ -10572,7 +10577,7 @@
                   <p:cNvPr id="14" name="CaixaDeTexto 13">
                     <a:extLst>
                       <a:ext uri="{FF2B5EF4-FFF2-40B4-BE49-F238E27FC236}">
-                        <a16:creationId xmlns:a16="http://schemas.microsoft.com/office/drawing/2014/main" id="{6AFC799D-58CB-E1E2-0D69-3033A3F20565}"/>
+                        <a16:creationId xmlns:a16="http://schemas.microsoft.com/office/drawing/2014/main" xmlns="" id="{6AFC799D-58CB-E1E2-0D69-3033A3F20565}"/>
                       </a:ext>
                     </a:extLst>
                   </p:cNvPr>
@@ -10668,7 +10673,7 @@
                   <p:cNvPr id="15" name="CaixaDeTexto 14">
                     <a:extLst>
                       <a:ext uri="{FF2B5EF4-FFF2-40B4-BE49-F238E27FC236}">
-                        <a16:creationId xmlns:a16="http://schemas.microsoft.com/office/drawing/2014/main" id="{50292170-E093-D561-BEDB-71584050F297}"/>
+                        <a16:creationId xmlns:a16="http://schemas.microsoft.com/office/drawing/2014/main" xmlns="" id="{50292170-E093-D561-BEDB-71584050F297}"/>
                       </a:ext>
                     </a:extLst>
                   </p:cNvPr>
@@ -10774,7 +10779,7 @@
               <p:cNvPr id="16" name="Conector: Angulado 15">
                 <a:extLst>
                   <a:ext uri="{FF2B5EF4-FFF2-40B4-BE49-F238E27FC236}">
-                    <a16:creationId xmlns:a16="http://schemas.microsoft.com/office/drawing/2014/main" id="{B009E62F-DEAF-CE49-8684-D2F3889690CD}"/>
+                    <a16:creationId xmlns:a16="http://schemas.microsoft.com/office/drawing/2014/main" xmlns="" id="{B009E62F-DEAF-CE49-8684-D2F3889690CD}"/>
                   </a:ext>
                 </a:extLst>
               </p:cNvPr>
@@ -10817,7 +10822,7 @@
               <p:cNvPr id="17" name="Conector: Angulado 16">
                 <a:extLst>
                   <a:ext uri="{FF2B5EF4-FFF2-40B4-BE49-F238E27FC236}">
-                    <a16:creationId xmlns:a16="http://schemas.microsoft.com/office/drawing/2014/main" id="{F90DC347-B7E4-3023-60C7-1C8283B3C88E}"/>
+                    <a16:creationId xmlns:a16="http://schemas.microsoft.com/office/drawing/2014/main" xmlns="" id="{F90DC347-B7E4-3023-60C7-1C8283B3C88E}"/>
                   </a:ext>
                 </a:extLst>
               </p:cNvPr>
@@ -10863,7 +10868,7 @@
               <p:cNvPr id="18" name="Conector reto 17">
                 <a:extLst>
                   <a:ext uri="{FF2B5EF4-FFF2-40B4-BE49-F238E27FC236}">
-                    <a16:creationId xmlns:a16="http://schemas.microsoft.com/office/drawing/2014/main" id="{29EF8501-71B8-2FB0-7ED2-028287A0A5BB}"/>
+                    <a16:creationId xmlns:a16="http://schemas.microsoft.com/office/drawing/2014/main" xmlns="" id="{29EF8501-71B8-2FB0-7ED2-028287A0A5BB}"/>
                   </a:ext>
                 </a:extLst>
               </p:cNvPr>
@@ -10904,7 +10909,7 @@
               <p:cNvPr id="19" name="CaixaDeTexto 18">
                 <a:extLst>
                   <a:ext uri="{FF2B5EF4-FFF2-40B4-BE49-F238E27FC236}">
-                    <a16:creationId xmlns:a16="http://schemas.microsoft.com/office/drawing/2014/main" id="{2B889678-B98C-9E1D-C61A-60F719853781}"/>
+                    <a16:creationId xmlns:a16="http://schemas.microsoft.com/office/drawing/2014/main" xmlns="" id="{2B889678-B98C-9E1D-C61A-60F719853781}"/>
                   </a:ext>
                 </a:extLst>
               </p:cNvPr>
@@ -10940,7 +10945,7 @@
               <p:cNvPr id="21" name="CaixaDeTexto 20">
                 <a:extLst>
                   <a:ext uri="{FF2B5EF4-FFF2-40B4-BE49-F238E27FC236}">
-                    <a16:creationId xmlns:a16="http://schemas.microsoft.com/office/drawing/2014/main" id="{D4DEEE4B-BFB7-7180-B620-019C107089CA}"/>
+                    <a16:creationId xmlns:a16="http://schemas.microsoft.com/office/drawing/2014/main" xmlns="" id="{D4DEEE4B-BFB7-7180-B620-019C107089CA}"/>
                   </a:ext>
                 </a:extLst>
               </p:cNvPr>
@@ -10976,7 +10981,7 @@
               <p:cNvPr id="22" name="CaixaDeTexto 21">
                 <a:extLst>
                   <a:ext uri="{FF2B5EF4-FFF2-40B4-BE49-F238E27FC236}">
-                    <a16:creationId xmlns:a16="http://schemas.microsoft.com/office/drawing/2014/main" id="{CB35AE44-A8A6-55E4-AF7C-6D1B1C22FD76}"/>
+                    <a16:creationId xmlns:a16="http://schemas.microsoft.com/office/drawing/2014/main" xmlns="" id="{CB35AE44-A8A6-55E4-AF7C-6D1B1C22FD76}"/>
                   </a:ext>
                 </a:extLst>
               </p:cNvPr>
@@ -11012,7 +11017,7 @@
               <p:cNvPr id="23" name="CaixaDeTexto 22">
                 <a:extLst>
                   <a:ext uri="{FF2B5EF4-FFF2-40B4-BE49-F238E27FC236}">
-                    <a16:creationId xmlns:a16="http://schemas.microsoft.com/office/drawing/2014/main" id="{253F27F5-AE53-A49B-F8E5-AF810876A343}"/>
+                    <a16:creationId xmlns:a16="http://schemas.microsoft.com/office/drawing/2014/main" xmlns="" id="{253F27F5-AE53-A49B-F8E5-AF810876A343}"/>
                   </a:ext>
                 </a:extLst>
               </p:cNvPr>
@@ -11049,7 +11054,7 @@
             <p:cNvPr id="5" name="CaixaDeTexto 4">
               <a:extLst>
                 <a:ext uri="{FF2B5EF4-FFF2-40B4-BE49-F238E27FC236}">
-                  <a16:creationId xmlns:a16="http://schemas.microsoft.com/office/drawing/2014/main" id="{C18E8975-8592-CC3B-612B-6E6728CAA35F}"/>
+                  <a16:creationId xmlns:a16="http://schemas.microsoft.com/office/drawing/2014/main" xmlns="" id="{C18E8975-8592-CC3B-612B-6E6728CAA35F}"/>
                 </a:ext>
               </a:extLst>
             </p:cNvPr>
@@ -11124,7 +11129,7 @@
           <p:cNvPr id="2" name="Title 1">
             <a:extLst>
               <a:ext uri="{FF2B5EF4-FFF2-40B4-BE49-F238E27FC236}">
-                <a16:creationId xmlns:a16="http://schemas.microsoft.com/office/drawing/2014/main" id="{327CA9BC-BDB8-0017-DAF6-E2CF307E39E9}"/>
+                <a16:creationId xmlns:a16="http://schemas.microsoft.com/office/drawing/2014/main" xmlns="" id="{327CA9BC-BDB8-0017-DAF6-E2CF307E39E9}"/>
               </a:ext>
             </a:extLst>
           </p:cNvPr>
@@ -11148,14 +11153,14 @@
           </a:p>
         </p:txBody>
       </p:sp>
-      <mc:AlternateContent xmlns:mc="http://schemas.openxmlformats.org/markup-compatibility/2006">
-        <mc:Choice xmlns:a14="http://schemas.microsoft.com/office/drawing/2010/main" Requires="a14">
+      <mc:AlternateContent xmlns:mc="http://schemas.openxmlformats.org/markup-compatibility/2006" xmlns:a14="http://schemas.microsoft.com/office/drawing/2010/main">
+        <mc:Choice Requires="a14">
           <p:sp>
             <p:nvSpPr>
               <p:cNvPr id="3" name="Content Placeholder 2">
                 <a:extLst>
                   <a:ext uri="{FF2B5EF4-FFF2-40B4-BE49-F238E27FC236}">
-                    <a16:creationId xmlns:a16="http://schemas.microsoft.com/office/drawing/2014/main" id="{DE0FC8F8-ADC7-A068-C2BC-465BFAC99DC0}"/>
+                    <a16:creationId xmlns:a16="http://schemas.microsoft.com/office/drawing/2014/main" xmlns="" id="{DE0FC8F8-ADC7-A068-C2BC-465BFAC99DC0}"/>
                   </a:ext>
                 </a:extLst>
               </p:cNvPr>
@@ -11557,7 +11562,7 @@
             </p:txBody>
           </p:sp>
         </mc:Choice>
-        <mc:Fallback>
+        <mc:Fallback xmlns="">
           <p:sp>
             <p:nvSpPr>
               <p:cNvPr id="3" name="Content Placeholder 2">
@@ -11636,7 +11641,7 @@
           <p:cNvPr id="2" name="Title 1">
             <a:extLst>
               <a:ext uri="{FF2B5EF4-FFF2-40B4-BE49-F238E27FC236}">
-                <a16:creationId xmlns:a16="http://schemas.microsoft.com/office/drawing/2014/main" id="{BD8226F9-1BF6-0C19-88C6-7B4563BEBDBC}"/>
+                <a16:creationId xmlns:a16="http://schemas.microsoft.com/office/drawing/2014/main" xmlns="" id="{BD8226F9-1BF6-0C19-88C6-7B4563BEBDBC}"/>
               </a:ext>
             </a:extLst>
           </p:cNvPr>
@@ -11666,7 +11671,7 @@
               <p:cNvPr id="4" name="Content Placeholder 3">
                 <a:extLst>
                   <a:ext uri="{FF2B5EF4-FFF2-40B4-BE49-F238E27FC236}">
-                    <a16:creationId xmlns:a16="http://schemas.microsoft.com/office/drawing/2014/main" id="{9F89DE01-7C6C-8A47-35FC-16E58BA14EAA}"/>
+                    <a16:creationId xmlns:a16="http://schemas.microsoft.com/office/drawing/2014/main" xmlns="" id="{9F89DE01-7C6C-8A47-35FC-16E58BA14EAA}"/>
                   </a:ext>
                 </a:extLst>
               </p:cNvPr>
@@ -11677,14 +11682,14 @@
                 <p:ph idx="1"/>
                 <p:extLst>
                   <p:ext uri="{D42A27DB-BD31-4B8C-83A1-F6EECF244321}">
-                    <p14:modId xmlns:p14="http://schemas.microsoft.com/office/powerpoint/2010/main" val="4230852870"/>
+                    <p14:modId xmlns:p14="http://schemas.microsoft.com/office/powerpoint/2010/main" val="3122598902"/>
                   </p:ext>
                 </p:extLst>
               </p:nvPr>
             </p:nvGraphicFramePr>
             <p:xfrm>
               <a:off x="241041" y="1690688"/>
-              <a:ext cx="11709918" cy="3992880"/>
+              <a:ext cx="11709918" cy="4297680"/>
             </p:xfrm>
             <a:graphic>
               <a:graphicData uri="http://schemas.openxmlformats.org/drawingml/2006/table">
@@ -11694,21 +11699,21 @@
                     <a:gridCol w="2008663">
                       <a:extLst>
                         <a:ext uri="{9D8B030D-6E8A-4147-A177-3AD203B41FA5}">
-                          <a16:colId xmlns:a16="http://schemas.microsoft.com/office/drawing/2014/main" val="2676689337"/>
+                          <a16:colId xmlns:a16="http://schemas.microsoft.com/office/drawing/2014/main" xmlns="" val="2676689337"/>
                         </a:ext>
                       </a:extLst>
                     </a:gridCol>
                     <a:gridCol w="4742847">
                       <a:extLst>
                         <a:ext uri="{9D8B030D-6E8A-4147-A177-3AD203B41FA5}">
-                          <a16:colId xmlns:a16="http://schemas.microsoft.com/office/drawing/2014/main" val="921422884"/>
+                          <a16:colId xmlns:a16="http://schemas.microsoft.com/office/drawing/2014/main" xmlns="" val="921422884"/>
                         </a:ext>
                       </a:extLst>
                     </a:gridCol>
                     <a:gridCol w="4958408">
                       <a:extLst>
                         <a:ext uri="{9D8B030D-6E8A-4147-A177-3AD203B41FA5}">
-                          <a16:colId xmlns:a16="http://schemas.microsoft.com/office/drawing/2014/main" val="4252031962"/>
+                          <a16:colId xmlns:a16="http://schemas.microsoft.com/office/drawing/2014/main" xmlns="" val="4252031962"/>
                         </a:ext>
                       </a:extLst>
                     </a:gridCol>
@@ -11884,7 +11889,7 @@
                     </a:tc>
                     <a:extLst>
                       <a:ext uri="{0D108BD9-81ED-4DB2-BD59-A6C34878D82A}">
-                        <a16:rowId xmlns:a16="http://schemas.microsoft.com/office/drawing/2014/main" val="1904083088"/>
+                        <a16:rowId xmlns:a16="http://schemas.microsoft.com/office/drawing/2014/main" xmlns="" val="1904083088"/>
                       </a:ext>
                     </a:extLst>
                   </a:tr>
@@ -12062,7 +12067,7 @@
                     </a:tc>
                     <a:extLst>
                       <a:ext uri="{0D108BD9-81ED-4DB2-BD59-A6C34878D82A}">
-                        <a16:rowId xmlns:a16="http://schemas.microsoft.com/office/drawing/2014/main" val="2085415063"/>
+                        <a16:rowId xmlns:a16="http://schemas.microsoft.com/office/drawing/2014/main" xmlns="" val="2085415063"/>
                       </a:ext>
                     </a:extLst>
                   </a:tr>
@@ -12381,7 +12386,7 @@
                     </a:tc>
                     <a:extLst>
                       <a:ext uri="{0D108BD9-81ED-4DB2-BD59-A6C34878D82A}">
-                        <a16:rowId xmlns:a16="http://schemas.microsoft.com/office/drawing/2014/main" val="3585385241"/>
+                        <a16:rowId xmlns:a16="http://schemas.microsoft.com/office/drawing/2014/main" xmlns="" val="3585385241"/>
                       </a:ext>
                     </a:extLst>
                   </a:tr>
@@ -12559,7 +12564,7 @@
                     </a:tc>
                     <a:extLst>
                       <a:ext uri="{0D108BD9-81ED-4DB2-BD59-A6C34878D82A}">
-                        <a16:rowId xmlns:a16="http://schemas.microsoft.com/office/drawing/2014/main" val="3293643069"/>
+                        <a16:rowId xmlns:a16="http://schemas.microsoft.com/office/drawing/2014/main" xmlns="" val="3293643069"/>
                       </a:ext>
                     </a:extLst>
                   </a:tr>
@@ -12751,7 +12756,7 @@
                     </a:tc>
                     <a:extLst>
                       <a:ext uri="{0D108BD9-81ED-4DB2-BD59-A6C34878D82A}">
-                        <a16:rowId xmlns:a16="http://schemas.microsoft.com/office/drawing/2014/main" val="2874329883"/>
+                        <a16:rowId xmlns:a16="http://schemas.microsoft.com/office/drawing/2014/main" xmlns="" val="2874329883"/>
                       </a:ext>
                     </a:extLst>
                   </a:tr>
@@ -12941,7 +12946,7 @@
                     </a:tc>
                     <a:extLst>
                       <a:ext uri="{0D108BD9-81ED-4DB2-BD59-A6C34878D82A}">
-                        <a16:rowId xmlns:a16="http://schemas.microsoft.com/office/drawing/2014/main" val="1234521875"/>
+                        <a16:rowId xmlns:a16="http://schemas.microsoft.com/office/drawing/2014/main" xmlns="" val="1234521875"/>
                       </a:ext>
                     </a:extLst>
                   </a:tr>
@@ -13030,13 +13035,13 @@
                             <a:t>A função de erro deve ser </a:t>
                           </a:r>
                           <a:r>
-                            <a:rPr lang="pt-BR" sz="2000" noProof="0" dirty="0" err="1">
+                            <a:rPr lang="pt-BR" sz="2000" noProof="0" dirty="0" err="1" smtClean="0">
                               <a:latin typeface="+mn-lt"/>
                             </a:rPr>
                             <a:t>diferenciável</a:t>
                           </a:r>
                           <a:r>
-                            <a:rPr lang="pt-BR" sz="2000" noProof="0" dirty="0">
+                            <a:rPr lang="pt-BR" sz="2000" noProof="0" dirty="0" smtClean="0">
                               <a:latin typeface="+mn-lt"/>
                             </a:rPr>
                             <a:t>.</a:t>
@@ -13048,11 +13053,71 @@
                             <a:buChar char="•"/>
                           </a:pPr>
                           <a:r>
-                            <a:rPr lang="pt-BR" sz="2000" noProof="0" dirty="0">
+                            <a:rPr lang="pt-BR" sz="2000" b="0" i="0" noProof="0" dirty="0" smtClean="0">
+                              <a:solidFill>
+                                <a:schemeClr val="tx1"/>
+                              </a:solidFill>
                               <a:latin typeface="+mn-lt"/>
                             </a:rPr>
-                            <a:t>É flexível, podendo ser ajustado à quantidade de memória disponível.</a:t>
+                            <a:t>C</a:t>
                           </a:r>
+                          <a:r>
+                            <a:rPr lang="pt-BR" sz="2000" b="0" i="0" dirty="0" err="1" smtClean="0">
+                              <a:solidFill>
+                                <a:schemeClr val="tx1"/>
+                              </a:solidFill>
+                            </a:rPr>
+                            <a:t>omplexidade</a:t>
+                          </a:r>
+                          <a:r>
+                            <a:rPr lang="pt-BR" sz="2000" b="0" i="0" dirty="0" smtClean="0">
+                              <a:solidFill>
+                                <a:schemeClr val="tx1"/>
+                              </a:solidFill>
+                            </a:rPr>
+                            <a:t> computacional ajustável</a:t>
+                          </a:r>
+                          <a:r>
+                            <a:rPr lang="pt-BR" sz="2000" b="0" i="0" baseline="0" dirty="0" smtClean="0">
+                              <a:solidFill>
+                                <a:schemeClr val="tx1"/>
+                              </a:solidFill>
+                            </a:rPr>
+                            <a:t> à </a:t>
+                          </a:r>
+                          <a:r>
+                            <a:rPr lang="pt-BR" sz="2000" b="0" i="0" noProof="0" dirty="0" smtClean="0">
+                              <a:solidFill>
+                                <a:schemeClr val="tx1"/>
+                              </a:solidFill>
+                              <a:latin typeface="+mn-lt"/>
+                            </a:rPr>
+                            <a:t>quantidade </a:t>
+                          </a:r>
+                          <a:r>
+                            <a:rPr lang="pt-BR" sz="2000" b="0" i="0" noProof="0" dirty="0">
+                              <a:solidFill>
+                                <a:schemeClr val="tx1"/>
+                              </a:solidFill>
+                              <a:latin typeface="+mn-lt"/>
+                            </a:rPr>
+                            <a:t>de memória </a:t>
+                          </a:r>
+                          <a:r>
+                            <a:rPr lang="pt-BR" sz="2000" b="0" i="0" noProof="0" dirty="0" smtClean="0">
+                              <a:solidFill>
+                                <a:schemeClr val="tx1"/>
+                              </a:solidFill>
+                              <a:latin typeface="+mn-lt"/>
+                            </a:rPr>
+                            <a:t>e recursos disponíveis.</a:t>
+                          </a:r>
+                          <a:endParaRPr lang="pt-BR" sz="2000" b="0" i="0" noProof="0" dirty="0">
+                            <a:solidFill>
+                              <a:schemeClr val="tx1"/>
+                            </a:solidFill>
+                            <a:latin typeface="+mn-lt"/>
+                          </a:endParaRPr>
                         </a:p>
                       </a:txBody>
                       <a:tcPr anchor="ctr">
@@ -13219,7 +13284,7 @@
                     </a:tc>
                     <a:extLst>
                       <a:ext uri="{0D108BD9-81ED-4DB2-BD59-A6C34878D82A}">
-                        <a16:rowId xmlns:a16="http://schemas.microsoft.com/office/drawing/2014/main" val="2070400338"/>
+                        <a16:rowId xmlns:a16="http://schemas.microsoft.com/office/drawing/2014/main" xmlns="" val="2070400338"/>
                       </a:ext>
                     </a:extLst>
                   </a:tr>
@@ -13234,7 +13299,7 @@
               <p:cNvPr id="4" name="Content Placeholder 3">
                 <a:extLst>
                   <a:ext uri="{FF2B5EF4-FFF2-40B4-BE49-F238E27FC236}">
-                    <a16:creationId xmlns:a16="http://schemas.microsoft.com/office/drawing/2014/main" id="{9F89DE01-7C6C-8A47-35FC-16E58BA14EAA}"/>
+                    <a16:creationId xmlns:a16="http://schemas.microsoft.com/office/drawing/2014/main" xmlns:a14="http://schemas.microsoft.com/office/drawing/2010/main" xmlns="" id="{9F89DE01-7C6C-8A47-35FC-16E58BA14EAA}"/>
                   </a:ext>
                 </a:extLst>
               </p:cNvPr>
@@ -13245,14 +13310,14 @@
                 <p:ph idx="1"/>
                 <p:extLst>
                   <p:ext uri="{D42A27DB-BD31-4B8C-83A1-F6EECF244321}">
-                    <p14:modId xmlns:p14="http://schemas.microsoft.com/office/powerpoint/2010/main" val="4230852870"/>
+                    <p14:modId xmlns:p14="http://schemas.microsoft.com/office/powerpoint/2010/main" val="3122598902"/>
                   </p:ext>
                 </p:extLst>
               </p:nvPr>
             </p:nvGraphicFramePr>
             <p:xfrm>
               <a:off x="241041" y="1690688"/>
-              <a:ext cx="11709918" cy="3992880"/>
+              <a:ext cx="11709918" cy="4297680"/>
             </p:xfrm>
             <a:graphic>
               <a:graphicData uri="http://schemas.openxmlformats.org/drawingml/2006/table">
@@ -13262,21 +13327,21 @@
                     <a:gridCol w="2008663">
                       <a:extLst>
                         <a:ext uri="{9D8B030D-6E8A-4147-A177-3AD203B41FA5}">
-                          <a16:colId xmlns:a16="http://schemas.microsoft.com/office/drawing/2014/main" val="2676689337"/>
+                          <a16:colId xmlns:a16="http://schemas.microsoft.com/office/drawing/2014/main" xmlns:a14="http://schemas.microsoft.com/office/drawing/2010/main" xmlns="" val="2676689337"/>
                         </a:ext>
                       </a:extLst>
                     </a:gridCol>
                     <a:gridCol w="4742847">
                       <a:extLst>
                         <a:ext uri="{9D8B030D-6E8A-4147-A177-3AD203B41FA5}">
-                          <a16:colId xmlns:a16="http://schemas.microsoft.com/office/drawing/2014/main" val="921422884"/>
+                          <a16:colId xmlns:a16="http://schemas.microsoft.com/office/drawing/2014/main" xmlns:a14="http://schemas.microsoft.com/office/drawing/2010/main" xmlns="" val="921422884"/>
                         </a:ext>
                       </a:extLst>
                     </a:gridCol>
                     <a:gridCol w="4958408">
                       <a:extLst>
                         <a:ext uri="{9D8B030D-6E8A-4147-A177-3AD203B41FA5}">
-                          <a16:colId xmlns:a16="http://schemas.microsoft.com/office/drawing/2014/main" val="4252031962"/>
+                          <a16:colId xmlns:a16="http://schemas.microsoft.com/office/drawing/2014/main" xmlns:a14="http://schemas.microsoft.com/office/drawing/2010/main" xmlns="" val="4252031962"/>
                         </a:ext>
                       </a:extLst>
                     </a:gridCol>
@@ -13452,7 +13517,7 @@
                     </a:tc>
                     <a:extLst>
                       <a:ext uri="{0D108BD9-81ED-4DB2-BD59-A6C34878D82A}">
-                        <a16:rowId xmlns:a16="http://schemas.microsoft.com/office/drawing/2014/main" val="1904083088"/>
+                        <a16:rowId xmlns:a16="http://schemas.microsoft.com/office/drawing/2014/main" xmlns:a14="http://schemas.microsoft.com/office/drawing/2010/main" xmlns="" val="1904083088"/>
                       </a:ext>
                     </a:extLst>
                   </a:tr>
@@ -13630,7 +13695,7 @@
                     </a:tc>
                     <a:extLst>
                       <a:ext uri="{0D108BD9-81ED-4DB2-BD59-A6C34878D82A}">
-                        <a16:rowId xmlns:a16="http://schemas.microsoft.com/office/drawing/2014/main" val="2085415063"/>
+                        <a16:rowId xmlns:a16="http://schemas.microsoft.com/office/drawing/2014/main" xmlns:a14="http://schemas.microsoft.com/office/drawing/2010/main" xmlns="" val="2085415063"/>
                       </a:ext>
                     </a:extLst>
                   </a:tr>
@@ -13699,7 +13764,7 @@
                         <a:bodyPr/>
                         <a:lstStyle/>
                         <a:p>
-                          <a:endParaRPr lang="en-US"/>
+                          <a:endParaRPr lang="pt-BR"/>
                         </a:p>
                       </a:txBody>
                       <a:tcPr anchor="ctr">
@@ -13739,10 +13804,10 @@
                           <a:headEnd type="none" w="med" len="med"/>
                           <a:tailEnd type="none" w="med" len="med"/>
                         </a:lnB>
-                        <a:blipFill>
+                        <a:blipFill rotWithShape="0">
                           <a:blip r:embed="rId2"/>
                           <a:stretch>
-                            <a:fillRect l="-42545" t="-207692" r="-104884" b="-735385"/>
+                            <a:fillRect l="-42545" t="-207692" r="-104884" b="-812308"/>
                           </a:stretch>
                         </a:blipFill>
                       </a:tcPr>
@@ -13752,7 +13817,7 @@
                         <a:bodyPr/>
                         <a:lstStyle/>
                         <a:p>
-                          <a:endParaRPr lang="en-US"/>
+                          <a:endParaRPr lang="pt-BR"/>
                         </a:p>
                       </a:txBody>
                       <a:tcPr anchor="ctr">
@@ -13792,17 +13857,17 @@
                           <a:headEnd type="none" w="med" len="med"/>
                           <a:tailEnd type="none" w="med" len="med"/>
                         </a:lnB>
-                        <a:blipFill>
+                        <a:blipFill rotWithShape="0">
                           <a:blip r:embed="rId2"/>
                           <a:stretch>
-                            <a:fillRect l="-136241" t="-207692" r="-246" b="-735385"/>
+                            <a:fillRect l="-136241" t="-207692" r="-246" b="-812308"/>
                           </a:stretch>
                         </a:blipFill>
                       </a:tcPr>
                     </a:tc>
                     <a:extLst>
                       <a:ext uri="{0D108BD9-81ED-4DB2-BD59-A6C34878D82A}">
-                        <a16:rowId xmlns:a16="http://schemas.microsoft.com/office/drawing/2014/main" val="3585385241"/>
+                        <a16:rowId xmlns:a16="http://schemas.microsoft.com/office/drawing/2014/main" xmlns:a14="http://schemas.microsoft.com/office/drawing/2010/main" xmlns="" val="3585385241"/>
                       </a:ext>
                     </a:extLst>
                   </a:tr>
@@ -13980,7 +14045,7 @@
                     </a:tc>
                     <a:extLst>
                       <a:ext uri="{0D108BD9-81ED-4DB2-BD59-A6C34878D82A}">
-                        <a16:rowId xmlns:a16="http://schemas.microsoft.com/office/drawing/2014/main" val="3293643069"/>
+                        <a16:rowId xmlns:a16="http://schemas.microsoft.com/office/drawing/2014/main" xmlns:a14="http://schemas.microsoft.com/office/drawing/2010/main" xmlns="" val="3293643069"/>
                       </a:ext>
                     </a:extLst>
                   </a:tr>
@@ -14049,7 +14114,7 @@
                         <a:bodyPr/>
                         <a:lstStyle/>
                         <a:p>
-                          <a:endParaRPr lang="en-US"/>
+                          <a:endParaRPr lang="pt-BR"/>
                         </a:p>
                       </a:txBody>
                       <a:tcPr anchor="ctr">
@@ -14089,10 +14154,10 @@
                           <a:headEnd type="none" w="med" len="med"/>
                           <a:tailEnd type="none" w="med" len="med"/>
                         </a:lnB>
-                        <a:blipFill>
+                        <a:blipFill rotWithShape="0">
                           <a:blip r:embed="rId2"/>
                           <a:stretch>
-                            <a:fillRect l="-42545" t="-407692" r="-104884" b="-535385"/>
+                            <a:fillRect l="-42545" t="-407692" r="-104884" b="-612308"/>
                           </a:stretch>
                         </a:blipFill>
                       </a:tcPr>
@@ -14155,7 +14220,7 @@
                     </a:tc>
                     <a:extLst>
                       <a:ext uri="{0D108BD9-81ED-4DB2-BD59-A6C34878D82A}">
-                        <a16:rowId xmlns:a16="http://schemas.microsoft.com/office/drawing/2014/main" val="2874329883"/>
+                        <a16:rowId xmlns:a16="http://schemas.microsoft.com/office/drawing/2014/main" xmlns:a14="http://schemas.microsoft.com/office/drawing/2010/main" xmlns="" val="2874329883"/>
                       </a:ext>
                     </a:extLst>
                   </a:tr>
@@ -14345,11 +14410,11 @@
                     </a:tc>
                     <a:extLst>
                       <a:ext uri="{0D108BD9-81ED-4DB2-BD59-A6C34878D82A}">
-                        <a16:rowId xmlns:a16="http://schemas.microsoft.com/office/drawing/2014/main" val="1234521875"/>
+                        <a16:rowId xmlns:a16="http://schemas.microsoft.com/office/drawing/2014/main" xmlns:a14="http://schemas.microsoft.com/office/drawing/2010/main" xmlns="" val="1234521875"/>
                       </a:ext>
                     </a:extLst>
                   </a:tr>
-                  <a:tr h="1615440">
+                  <a:tr h="1920240">
                     <a:tc>
                       <a:txBody>
                         <a:bodyPr/>
@@ -14434,13 +14499,13 @@
                             <a:t>A função de erro deve ser </a:t>
                           </a:r>
                           <a:r>
-                            <a:rPr lang="pt-BR" sz="2000" noProof="0" dirty="0" err="1">
+                            <a:rPr lang="pt-BR" sz="2000" noProof="0" dirty="0" err="1" smtClean="0">
                               <a:latin typeface="+mn-lt"/>
                             </a:rPr>
                             <a:t>diferenciável</a:t>
                           </a:r>
                           <a:r>
-                            <a:rPr lang="pt-BR" sz="2000" noProof="0" dirty="0">
+                            <a:rPr lang="pt-BR" sz="2000" noProof="0" dirty="0" smtClean="0">
                               <a:latin typeface="+mn-lt"/>
                             </a:rPr>
                             <a:t>.</a:t>
@@ -14452,11 +14517,71 @@
                             <a:buChar char="•"/>
                           </a:pPr>
                           <a:r>
-                            <a:rPr lang="pt-BR" sz="2000" noProof="0" dirty="0">
+                            <a:rPr lang="pt-BR" sz="2000" b="0" i="0" noProof="0" dirty="0" smtClean="0">
+                              <a:solidFill>
+                                <a:schemeClr val="tx1"/>
+                              </a:solidFill>
                               <a:latin typeface="+mn-lt"/>
                             </a:rPr>
-                            <a:t>É flexível, podendo ser ajustado à quantidade de memória disponível.</a:t>
+                            <a:t>C</a:t>
                           </a:r>
+                          <a:r>
+                            <a:rPr lang="pt-BR" sz="2000" b="0" i="0" dirty="0" err="1" smtClean="0">
+                              <a:solidFill>
+                                <a:schemeClr val="tx1"/>
+                              </a:solidFill>
+                            </a:rPr>
+                            <a:t>omplexidade</a:t>
+                          </a:r>
+                          <a:r>
+                            <a:rPr lang="pt-BR" sz="2000" b="0" i="0" dirty="0" smtClean="0">
+                              <a:solidFill>
+                                <a:schemeClr val="tx1"/>
+                              </a:solidFill>
+                            </a:rPr>
+                            <a:t> computacional ajustável</a:t>
+                          </a:r>
+                          <a:r>
+                            <a:rPr lang="pt-BR" sz="2000" b="0" i="0" baseline="0" dirty="0" smtClean="0">
+                              <a:solidFill>
+                                <a:schemeClr val="tx1"/>
+                              </a:solidFill>
+                            </a:rPr>
+                            <a:t> à </a:t>
+                          </a:r>
+                          <a:r>
+                            <a:rPr lang="pt-BR" sz="2000" b="0" i="0" noProof="0" dirty="0" smtClean="0">
+                              <a:solidFill>
+                                <a:schemeClr val="tx1"/>
+                              </a:solidFill>
+                              <a:latin typeface="+mn-lt"/>
+                            </a:rPr>
+                            <a:t>quantidade </a:t>
+                          </a:r>
+                          <a:r>
+                            <a:rPr lang="pt-BR" sz="2000" b="0" i="0" noProof="0" dirty="0">
+                              <a:solidFill>
+                                <a:schemeClr val="tx1"/>
+                              </a:solidFill>
+                              <a:latin typeface="+mn-lt"/>
+                            </a:rPr>
+                            <a:t>de memória </a:t>
+                          </a:r>
+                          <a:r>
+                            <a:rPr lang="pt-BR" sz="2000" b="0" i="0" noProof="0" dirty="0" smtClean="0">
+                              <a:solidFill>
+                                <a:schemeClr val="tx1"/>
+                              </a:solidFill>
+                              <a:latin typeface="+mn-lt"/>
+                            </a:rPr>
+                            <a:t>e recursos disponíveis.</a:t>
+                          </a:r>
+                          <a:endParaRPr lang="pt-BR" sz="2000" b="0" i="0" noProof="0" dirty="0">
+                            <a:solidFill>
+                              <a:schemeClr val="tx1"/>
+                            </a:solidFill>
+                            <a:latin typeface="+mn-lt"/>
+                          </a:endParaRPr>
                         </a:p>
                       </a:txBody>
                       <a:tcPr anchor="ctr">
@@ -14504,7 +14629,7 @@
                         <a:bodyPr/>
                         <a:lstStyle/>
                         <a:p>
-                          <a:endParaRPr lang="en-US"/>
+                          <a:endParaRPr lang="pt-BR"/>
                         </a:p>
                       </a:txBody>
                       <a:tcPr anchor="ctr">
@@ -14544,17 +14669,17 @@
                           <a:headEnd type="none" w="med" len="med"/>
                           <a:tailEnd type="none" w="med" len="med"/>
                         </a:lnB>
-                        <a:blipFill>
+                        <a:blipFill rotWithShape="0">
                           <a:blip r:embed="rId2"/>
                           <a:stretch>
-                            <a:fillRect l="-136241" t="-149434" r="-246" b="-6415"/>
+                            <a:fillRect l="-136241" t="-125714" r="-246" b="-5397"/>
                           </a:stretch>
                         </a:blipFill>
                       </a:tcPr>
                     </a:tc>
                     <a:extLst>
                       <a:ext uri="{0D108BD9-81ED-4DB2-BD59-A6C34878D82A}">
-                        <a16:rowId xmlns:a16="http://schemas.microsoft.com/office/drawing/2014/main" val="2070400338"/>
+                        <a16:rowId xmlns:a16="http://schemas.microsoft.com/office/drawing/2014/main" xmlns:a14="http://schemas.microsoft.com/office/drawing/2010/main" xmlns="" val="2070400338"/>
                       </a:ext>
                     </a:extLst>
                   </a:tr>
@@ -14571,7 +14696,7 @@
               <p:cNvPr id="7" name="TextBox 6">
                 <a:extLst>
                   <a:ext uri="{FF2B5EF4-FFF2-40B4-BE49-F238E27FC236}">
-                    <a16:creationId xmlns:a16="http://schemas.microsoft.com/office/drawing/2014/main" id="{B6ADA1D5-0763-3EF2-0C26-C666D2EF6C89}"/>
+                    <a16:creationId xmlns:a16="http://schemas.microsoft.com/office/drawing/2014/main" xmlns="" id="{B6ADA1D5-0763-3EF2-0C26-C666D2EF6C89}"/>
                   </a:ext>
                 </a:extLst>
               </p:cNvPr>
@@ -14580,7 +14705,7 @@
             </p:nvSpPr>
             <p:spPr>
               <a:xfrm>
-                <a:off x="161481" y="5683568"/>
+                <a:off x="241041" y="5988368"/>
                 <a:ext cx="6096000" cy="523220"/>
               </a:xfrm>
               <a:prstGeom prst="rect">
@@ -14594,7 +14719,6 @@
               </a:bodyPr>
               <a:lstStyle/>
               <a:p>
-                <a:pPr/>
                 <a:r>
                   <a:rPr lang="pt-BR" sz="1400" noProof="0" dirty="0"/>
                   <a:t>* </a:t>
@@ -14616,7 +14740,6 @@
                 <a:endParaRPr lang="pt-BR" sz="1400" noProof="0" dirty="0"/>
               </a:p>
               <a:p>
-                <a:pPr/>
                 <a:r>
                   <a:rPr lang="pt-BR" sz="1400" dirty="0"/>
                   <a:t>** </a:t>
@@ -14674,7 +14797,7 @@
               <p:cNvPr id="7" name="TextBox 6">
                 <a:extLst>
                   <a:ext uri="{FF2B5EF4-FFF2-40B4-BE49-F238E27FC236}">
-                    <a16:creationId xmlns:a16="http://schemas.microsoft.com/office/drawing/2014/main" id="{B6ADA1D5-0763-3EF2-0C26-C666D2EF6C89}"/>
+                    <a16:creationId xmlns:a16="http://schemas.microsoft.com/office/drawing/2014/main" xmlns:a14="http://schemas.microsoft.com/office/drawing/2010/main" xmlns="" id="{B6ADA1D5-0763-3EF2-0C26-C666D2EF6C89}"/>
                   </a:ext>
                 </a:extLst>
               </p:cNvPr>
@@ -14685,13 +14808,13 @@
             </p:nvSpPr>
             <p:spPr>
               <a:xfrm>
-                <a:off x="161481" y="5683568"/>
+                <a:off x="241041" y="5988368"/>
                 <a:ext cx="6096000" cy="523220"/>
               </a:xfrm>
               <a:prstGeom prst="rect">
                 <a:avLst/>
               </a:prstGeom>
-              <a:blipFill>
+              <a:blipFill rotWithShape="0">
                 <a:blip r:embed="rId3"/>
                 <a:stretch>
                   <a:fillRect l="-300" t="-1163" b="-12791"/>
@@ -14703,7 +14826,7 @@
               <a:lstStyle/>
               <a:p>
                 <a:r>
-                  <a:rPr lang="en-US">
+                  <a:rPr lang="pt-BR">
                     <a:noFill/>
                   </a:rPr>
                   <a:t> </a:t>
@@ -15648,7 +15771,7 @@
           <p:cNvPr id="3" name="Content Placeholder 2">
             <a:extLst>
               <a:ext uri="{FF2B5EF4-FFF2-40B4-BE49-F238E27FC236}">
-                <a16:creationId xmlns:a16="http://schemas.microsoft.com/office/drawing/2014/main" id="{E9FA39D5-1A7D-603C-1F90-C3C1D9D9D79C}"/>
+                <a16:creationId xmlns:a16="http://schemas.microsoft.com/office/drawing/2014/main" xmlns="" id="{E9FA39D5-1A7D-603C-1F90-C3C1D9D9D79C}"/>
               </a:ext>
             </a:extLst>
           </p:cNvPr>
@@ -15674,7 +15797,15 @@
             </a:pPr>
             <a:r>
               <a:rPr lang="pt-BR" sz="5400" i="1" dirty="0"/>
-              <a:t>Como o gradiente descendente é a abordagem mais usada com boa parte dos algoritmos de ML, vamos focar no seu aprendizado.</a:t>
+              <a:t>Como o gradiente descendente é a abordagem mais usada </a:t>
+            </a:r>
+            <a:r>
+              <a:rPr lang="pt-BR" sz="5400" i="1" dirty="0" smtClean="0"/>
+              <a:t>com grande parte </a:t>
+            </a:r>
+            <a:r>
+              <a:rPr lang="pt-BR" sz="5400" i="1" dirty="0"/>
+              <a:t>dos algoritmos de ML, vamos focar no seu aprendizado.</a:t>
             </a:r>
             <a:endParaRPr lang="en-US" sz="5400" i="1" dirty="0"/>
           </a:p>
@@ -15715,7 +15846,7 @@
           <p:cNvPr id="2" name="Title 1">
             <a:extLst>
               <a:ext uri="{FF2B5EF4-FFF2-40B4-BE49-F238E27FC236}">
-                <a16:creationId xmlns:a16="http://schemas.microsoft.com/office/drawing/2014/main" id="{CED0B404-F3ED-8087-A024-C72B793DE4C8}"/>
+                <a16:creationId xmlns:a16="http://schemas.microsoft.com/office/drawing/2014/main" xmlns="" id="{CED0B404-F3ED-8087-A024-C72B793DE4C8}"/>
               </a:ext>
             </a:extLst>
           </p:cNvPr>
@@ -15740,7 +15871,7 @@
           <p:cNvPr id="3" name="Content Placeholder 2">
             <a:extLst>
               <a:ext uri="{FF2B5EF4-FFF2-40B4-BE49-F238E27FC236}">
-                <a16:creationId xmlns:a16="http://schemas.microsoft.com/office/drawing/2014/main" id="{C6D4684C-15AE-EBFA-CC52-BE2B10624210}"/>
+                <a16:creationId xmlns:a16="http://schemas.microsoft.com/office/drawing/2014/main" xmlns="" id="{C6D4684C-15AE-EBFA-CC52-BE2B10624210}"/>
               </a:ext>
             </a:extLst>
           </p:cNvPr>
@@ -15809,7 +15940,7 @@
           <p:cNvPr id="2" name="Title 1">
             <a:extLst>
               <a:ext uri="{FF2B5EF4-FFF2-40B4-BE49-F238E27FC236}">
-                <a16:creationId xmlns:a16="http://schemas.microsoft.com/office/drawing/2014/main" id="{0DB225A9-57A2-5D4C-C592-FC96B4AB25F3}"/>
+                <a16:creationId xmlns:a16="http://schemas.microsoft.com/office/drawing/2014/main" xmlns="" id="{0DB225A9-57A2-5D4C-C592-FC96B4AB25F3}"/>
               </a:ext>
             </a:extLst>
           </p:cNvPr>
@@ -15833,40 +15964,373 @@
           </a:p>
         </p:txBody>
       </p:sp>
-      <p:sp>
-        <p:nvSpPr>
-          <p:cNvPr id="3" name="Content Placeholder 2">
+      <mc:AlternateContent xmlns:mc="http://schemas.openxmlformats.org/markup-compatibility/2006">
+        <mc:Choice xmlns:a14="http://schemas.microsoft.com/office/drawing/2010/main" Requires="a14">
+          <p:sp>
+            <p:nvSpPr>
+              <p:cNvPr id="3" name="Content Placeholder 2">
+                <a:extLst>
+                  <a:ext uri="{FF2B5EF4-FFF2-40B4-BE49-F238E27FC236}">
+                    <a16:creationId xmlns:a16="http://schemas.microsoft.com/office/drawing/2014/main" xmlns="" id="{84E2E11B-9833-18C1-2157-693893D8C114}"/>
+                  </a:ext>
+                </a:extLst>
+              </p:cNvPr>
+              <p:cNvSpPr>
+                <a:spLocks noGrp="1"/>
+              </p:cNvSpPr>
+              <p:nvPr>
+                <p:ph idx="1"/>
+              </p:nvPr>
+            </p:nvSpPr>
+            <p:spPr>
+              <a:xfrm>
+                <a:off x="5401994" y="1825624"/>
+                <a:ext cx="6790006" cy="5032375"/>
+              </a:xfrm>
+            </p:spPr>
+            <p:txBody>
+              <a:bodyPr>
+                <a:normAutofit/>
+              </a:bodyPr>
+              <a:lstStyle/>
+              <a:p>
+                <a:r>
+                  <a:rPr lang="pt-BR" dirty="0"/>
+                  <a:t>Antes de discutirmos como o gradiente </a:t>
+                </a:r>
+                <a:r>
+                  <a:rPr lang="pt-BR" dirty="0" smtClean="0"/>
+                  <a:t>descendente </a:t>
+                </a:r>
+                <a:r>
+                  <a:rPr lang="pt-BR" dirty="0"/>
+                  <a:t>funciona, precisamos entender o que é a </a:t>
+                </a:r>
+                <a:r>
+                  <a:rPr lang="pt-BR" b="1" dirty="0"/>
+                  <a:t>superfície de erro</a:t>
+                </a:r>
+                <a:r>
+                  <a:rPr lang="pt-BR" dirty="0" smtClean="0"/>
+                  <a:t>.</a:t>
+                </a:r>
+              </a:p>
+              <a:p>
+                <a:r>
+                  <a:rPr lang="pt-BR" dirty="0" smtClean="0"/>
+                  <a:t>Ela é </a:t>
+                </a:r>
+                <a:r>
+                  <a:rPr lang="pt-BR" dirty="0"/>
+                  <a:t>uma representação geométrica de quão "errado" o nosso modelo está </a:t>
+                </a:r>
+                <a:r>
+                  <a:rPr lang="pt-BR" b="1" dirty="0"/>
+                  <a:t>para cada combinação possível de </a:t>
+                </a:r>
+                <a:r>
+                  <a:rPr lang="pt-BR" b="1" dirty="0" smtClean="0"/>
+                  <a:t>pesos</a:t>
+                </a:r>
+                <a:r>
+                  <a:rPr lang="pt-BR" dirty="0" smtClean="0"/>
+                  <a:t>.</a:t>
+                </a:r>
+              </a:p>
+              <a:p>
+                <a:pPr marL="0" indent="0">
+                  <a:buNone/>
+                </a:pPr>
+                <a14:m>
+                  <m:oMathPara xmlns:m="http://schemas.openxmlformats.org/officeDocument/2006/math">
+                    <m:oMathParaPr>
+                      <m:jc m:val="centerGroup"/>
+                    </m:oMathParaPr>
+                    <m:oMath xmlns:m="http://schemas.openxmlformats.org/officeDocument/2006/math">
+                      <m:sSub>
+                        <m:sSubPr>
+                          <m:ctrlPr>
+                            <a:rPr lang="pt-BR" i="1">
+                              <a:latin typeface="Cambria Math" panose="02040503050406030204" pitchFamily="18" charset="0"/>
+                            </a:rPr>
+                          </m:ctrlPr>
+                        </m:sSubPr>
+                        <m:e>
+                          <m:r>
+                            <a:rPr lang="pt-BR" i="1">
+                              <a:latin typeface="Cambria Math" panose="02040503050406030204" pitchFamily="18" charset="0"/>
+                            </a:rPr>
+                            <m:t>𝐽</m:t>
+                          </m:r>
+                        </m:e>
+                        <m:sub>
+                          <m:r>
+                            <a:rPr lang="pt-BR" i="1">
+                              <a:latin typeface="Cambria Math" panose="02040503050406030204" pitchFamily="18" charset="0"/>
+                            </a:rPr>
+                            <m:t>𝑒</m:t>
+                          </m:r>
+                        </m:sub>
+                      </m:sSub>
+                      <m:d>
+                        <m:dPr>
+                          <m:ctrlPr>
+                            <a:rPr lang="pt-BR" i="1">
+                              <a:latin typeface="Cambria Math" panose="02040503050406030204" pitchFamily="18" charset="0"/>
+                            </a:rPr>
+                          </m:ctrlPr>
+                        </m:dPr>
+                        <m:e>
+                          <m:r>
+                            <a:rPr lang="pt-BR" b="1" i="1">
+                              <a:latin typeface="Cambria Math" panose="02040503050406030204" pitchFamily="18" charset="0"/>
+                            </a:rPr>
+                            <m:t>𝒂</m:t>
+                          </m:r>
+                        </m:e>
+                      </m:d>
+                      <m:r>
+                        <a:rPr lang="pt-BR" i="1">
+                          <a:latin typeface="Cambria Math" panose="02040503050406030204" pitchFamily="18" charset="0"/>
+                        </a:rPr>
+                        <m:t>=</m:t>
+                      </m:r>
+                      <m:f>
+                        <m:fPr>
+                          <m:ctrlPr>
+                            <a:rPr lang="pt-BR" i="1">
+                              <a:latin typeface="Cambria Math" panose="02040503050406030204" pitchFamily="18" charset="0"/>
+                            </a:rPr>
+                          </m:ctrlPr>
+                        </m:fPr>
+                        <m:num>
+                          <m:r>
+                            <a:rPr lang="pt-BR" i="1">
+                              <a:latin typeface="Cambria Math" panose="02040503050406030204" pitchFamily="18" charset="0"/>
+                            </a:rPr>
+                            <m:t>1</m:t>
+                          </m:r>
+                        </m:num>
+                        <m:den>
+                          <m:r>
+                            <a:rPr lang="pt-BR" i="1">
+                              <a:latin typeface="Cambria Math" panose="02040503050406030204" pitchFamily="18" charset="0"/>
+                            </a:rPr>
+                            <m:t>𝑁</m:t>
+                          </m:r>
+                        </m:den>
+                      </m:f>
+                      <m:sSup>
+                        <m:sSupPr>
+                          <m:ctrlPr>
+                            <a:rPr lang="pt-BR" i="1">
+                              <a:latin typeface="Cambria Math" panose="02040503050406030204" pitchFamily="18" charset="0"/>
+                            </a:rPr>
+                          </m:ctrlPr>
+                        </m:sSupPr>
+                        <m:e>
+                          <m:d>
+                            <m:dPr>
+                              <m:begChr m:val="‖"/>
+                              <m:endChr m:val="‖"/>
+                              <m:ctrlPr>
+                                <a:rPr lang="pt-BR" i="1">
+                                  <a:latin typeface="Cambria Math" panose="02040503050406030204" pitchFamily="18" charset="0"/>
+                                </a:rPr>
+                              </m:ctrlPr>
+                            </m:dPr>
+                            <m:e>
+                              <m:r>
+                                <a:rPr lang="pt-BR" b="1" i="1">
+                                  <a:latin typeface="Cambria Math" panose="02040503050406030204" pitchFamily="18" charset="0"/>
+                                </a:rPr>
+                                <m:t>𝒚</m:t>
+                              </m:r>
+                              <m:r>
+                                <a:rPr lang="pt-BR" i="1">
+                                  <a:latin typeface="Cambria Math" panose="02040503050406030204" pitchFamily="18" charset="0"/>
+                                </a:rPr>
+                                <m:t> −</m:t>
+                              </m:r>
+                              <m:r>
+                                <a:rPr lang="pt-BR" b="1" i="1">
+                                  <a:latin typeface="Cambria Math" panose="02040503050406030204" pitchFamily="18" charset="0"/>
+                                </a:rPr>
+                                <m:t>𝑿𝒂</m:t>
+                              </m:r>
+                            </m:e>
+                          </m:d>
+                        </m:e>
+                        <m:sup>
+                          <m:r>
+                            <a:rPr lang="pt-BR" i="1">
+                              <a:latin typeface="Cambria Math" panose="02040503050406030204" pitchFamily="18" charset="0"/>
+                            </a:rPr>
+                            <m:t>2</m:t>
+                          </m:r>
+                        </m:sup>
+                      </m:sSup>
+                    </m:oMath>
+                  </m:oMathPara>
+                </a14:m>
+                <a:endParaRPr lang="pt-BR" dirty="0" smtClean="0"/>
+              </a:p>
+              <a:p>
+                <a:r>
+                  <a:rPr lang="pt-BR" dirty="0" smtClean="0"/>
+                  <a:t>Quando </a:t>
+                </a:r>
+                <a:r>
+                  <a:rPr lang="pt-BR" dirty="0"/>
+                  <a:t>usamos a função </a:t>
+                </a:r>
+                <a:r>
+                  <a:rPr lang="pt-BR" dirty="0" smtClean="0"/>
+                  <a:t>do EQM, a </a:t>
+                </a:r>
+                <a:r>
+                  <a:rPr lang="pt-BR" dirty="0"/>
+                  <a:t>superfície resultante tem </a:t>
+                </a:r>
+                <a:r>
+                  <a:rPr lang="pt-BR" dirty="0" smtClean="0"/>
+                  <a:t>sempre o </a:t>
+                </a:r>
+                <a:r>
+                  <a:rPr lang="pt-BR" dirty="0"/>
+                  <a:t>formato de uma </a:t>
+                </a:r>
+                <a:r>
+                  <a:rPr lang="pt-BR" b="1" dirty="0"/>
+                  <a:t>tigela</a:t>
+                </a:r>
+                <a:r>
+                  <a:rPr lang="pt-BR" dirty="0"/>
+                  <a:t> </a:t>
+                </a:r>
+                <a:r>
+                  <a:rPr lang="pt-BR" dirty="0" smtClean="0"/>
+                  <a:t>(i.e., é uma </a:t>
+                </a:r>
+                <a:r>
+                  <a:rPr lang="pt-BR" dirty="0"/>
+                  <a:t>superfície convexa</a:t>
+                </a:r>
+                <a:r>
+                  <a:rPr lang="pt-BR" dirty="0" smtClean="0"/>
+                  <a:t>).</a:t>
+                </a:r>
+              </a:p>
+            </p:txBody>
+          </p:sp>
+        </mc:Choice>
+        <mc:Fallback>
+          <p:sp>
+            <p:nvSpPr>
+              <p:cNvPr id="3" name="Content Placeholder 2">
+                <a:extLst>
+                  <a:ext uri="{FF2B5EF4-FFF2-40B4-BE49-F238E27FC236}">
+                    <a16:creationId xmlns:a16="http://schemas.microsoft.com/office/drawing/2014/main" xmlns="" id="{84E2E11B-9833-18C1-2157-693893D8C114}"/>
+                  </a:ext>
+                </a:extLst>
+              </p:cNvPr>
+              <p:cNvSpPr>
+                <a:spLocks noGrp="1" noRot="1" noChangeAspect="1" noMove="1" noResize="1" noEditPoints="1" noAdjustHandles="1" noChangeArrowheads="1" noChangeShapeType="1" noTextEdit="1"/>
+              </p:cNvSpPr>
+              <p:nvPr>
+                <p:ph idx="1"/>
+              </p:nvPr>
+            </p:nvSpPr>
+            <p:spPr>
+              <a:xfrm>
+                <a:off x="5401994" y="1825624"/>
+                <a:ext cx="6790006" cy="5032375"/>
+              </a:xfrm>
+              <a:blipFill rotWithShape="0">
+                <a:blip r:embed="rId2"/>
+                <a:stretch>
+                  <a:fillRect l="-1616" t="-1937" r="-1795" b="-847"/>
+                </a:stretch>
+              </a:blipFill>
+            </p:spPr>
+            <p:txBody>
+              <a:bodyPr/>
+              <a:lstStyle/>
+              <a:p>
+                <a:r>
+                  <a:rPr lang="pt-BR">
+                    <a:noFill/>
+                  </a:rPr>
+                  <a:t> </a:t>
+                </a:r>
+              </a:p>
+            </p:txBody>
+          </p:sp>
+        </mc:Fallback>
+      </mc:AlternateContent>
+      <p:pic>
+        <p:nvPicPr>
+          <p:cNvPr id="4" name="Imagem 3">
             <a:extLst>
               <a:ext uri="{FF2B5EF4-FFF2-40B4-BE49-F238E27FC236}">
-                <a16:creationId xmlns:a16="http://schemas.microsoft.com/office/drawing/2014/main" id="{84E2E11B-9833-18C1-2157-693893D8C114}"/>
+                <a16:creationId xmlns:a16="http://schemas.microsoft.com/office/drawing/2014/main" xmlns="" id="{A426D12A-684D-3903-6005-F2BFA77FCF21}"/>
               </a:ext>
             </a:extLst>
           </p:cNvPr>
-          <p:cNvSpPr>
-            <a:spLocks noGrp="1"/>
-          </p:cNvSpPr>
-          <p:nvPr>
-            <p:ph idx="1"/>
-          </p:nvPr>
+          <p:cNvPicPr>
+            <a:picLocks noChangeAspect="1"/>
+          </p:cNvPicPr>
+          <p:nvPr/>
+        </p:nvPicPr>
+        <p:blipFill>
+          <a:blip r:embed="rId3">
+            <a:extLst>
+              <a:ext uri="{28A0092B-C50C-407E-A947-70E740481C1C}">
+                <a14:useLocalDpi xmlns:a14="http://schemas.microsoft.com/office/drawing/2010/main" val="0"/>
+              </a:ext>
+            </a:extLst>
+          </a:blip>
+          <a:stretch>
+            <a:fillRect/>
+          </a:stretch>
+        </p:blipFill>
+        <p:spPr>
+          <a:xfrm>
+            <a:off x="607365" y="1825624"/>
+            <a:ext cx="4288193" cy="4257008"/>
+          </a:xfrm>
+          <a:prstGeom prst="rect">
+            <a:avLst/>
+          </a:prstGeom>
+        </p:spPr>
+      </p:pic>
+      <p:sp>
+        <p:nvSpPr>
+          <p:cNvPr id="5" name="CaixaDeTexto 4"/>
+          <p:cNvSpPr txBox="1"/>
+          <p:nvPr/>
         </p:nvSpPr>
-        <p:spPr/>
+        <p:spPr>
+          <a:xfrm>
+            <a:off x="1045449" y="6217568"/>
+            <a:ext cx="3412024" cy="369332"/>
+          </a:xfrm>
+          <a:prstGeom prst="rect">
+            <a:avLst/>
+          </a:prstGeom>
+          <a:noFill/>
+        </p:spPr>
         <p:txBody>
-          <a:bodyPr/>
+          <a:bodyPr wrap="none" rtlCol="0">
+            <a:spAutoFit/>
+          </a:bodyPr>
           <a:lstStyle/>
           <a:p>
             <a:r>
-              <a:rPr lang="pt-BR" dirty="0"/>
-              <a:t>Antes de discutirmos como o gradiente </a:t>
-            </a:r>
-            <a:r>
-              <a:rPr lang="pt-BR" dirty="0" err="1"/>
-              <a:t>descendete</a:t>
-            </a:r>
-            <a:r>
-              <a:rPr lang="pt-BR" dirty="0"/>
-              <a:t> funciona, precisamos entender o que é a superfície de erro.</a:t>
-            </a:r>
-            <a:endParaRPr lang="en-US" dirty="0"/>
+              <a:rPr lang="pt-BR" dirty="0" smtClean="0"/>
+              <a:t>Função hipótese com um atributo.</a:t>
+            </a:r>
+            <a:endParaRPr lang="pt-BR" dirty="0"/>
           </a:p>
         </p:txBody>
       </p:sp>
@@ -15905,7 +16369,7 @@
           <p:cNvPr id="2" name="Title 1">
             <a:extLst>
               <a:ext uri="{FF2B5EF4-FFF2-40B4-BE49-F238E27FC236}">
-                <a16:creationId xmlns:a16="http://schemas.microsoft.com/office/drawing/2014/main" id="{2356DF96-42E3-2871-6B68-006B83AA25F6}"/>
+                <a16:creationId xmlns:a16="http://schemas.microsoft.com/office/drawing/2014/main" xmlns="" id="{0DB225A9-57A2-5D4C-C592-FC96B4AB25F3}"/>
               </a:ext>
             </a:extLst>
           </p:cNvPr>
@@ -15921,6 +16385,10 @@
           <a:bodyPr/>
           <a:lstStyle/>
           <a:p>
+            <a:r>
+              <a:rPr lang="pt-BR" dirty="0"/>
+              <a:t>Superfície de erro</a:t>
+            </a:r>
             <a:endParaRPr lang="en-US" dirty="0"/>
           </a:p>
         </p:txBody>
@@ -15930,7 +16398,7 @@
           <p:cNvPr id="3" name="Content Placeholder 2">
             <a:extLst>
               <a:ext uri="{FF2B5EF4-FFF2-40B4-BE49-F238E27FC236}">
-                <a16:creationId xmlns:a16="http://schemas.microsoft.com/office/drawing/2014/main" id="{C322F058-3AE4-7D79-7745-EC0140C3D997}"/>
+                <a16:creationId xmlns:a16="http://schemas.microsoft.com/office/drawing/2014/main" xmlns="" id="{84E2E11B-9833-18C1-2157-693893D8C114}"/>
               </a:ext>
             </a:extLst>
           </p:cNvPr>
@@ -15941,31 +16409,1475 @@
             <p:ph idx="1"/>
           </p:nvPr>
         </p:nvSpPr>
-        <p:spPr/>
+        <p:spPr>
+          <a:xfrm>
+            <a:off x="5345722" y="1825624"/>
+            <a:ext cx="6639951" cy="5032375"/>
+          </a:xfrm>
+        </p:spPr>
         <p:txBody>
-          <a:bodyPr/>
+          <a:bodyPr>
+            <a:normAutofit/>
+          </a:bodyPr>
           <a:lstStyle/>
           <a:p>
             <a:r>
+              <a:rPr lang="pt-BR" dirty="0" smtClean="0"/>
+              <a:t>O </a:t>
+            </a:r>
+            <a:r>
               <a:rPr lang="pt-BR" dirty="0"/>
-              <a:t>O </a:t>
-            </a:r>
-            <a:r>
-              <a:rPr lang="pt-BR" dirty="0" err="1"/>
-              <a:t>gradinete</a:t>
-            </a:r>
+              <a:t>que isso significa na prática?</a:t>
+            </a:r>
+          </a:p>
+          <a:p>
+            <a:pPr lvl="1">
+              <a:buFont typeface="Wingdings" panose="05000000000000000000" pitchFamily="2" charset="2"/>
+              <a:buChar char="§"/>
+            </a:pPr>
             <a:r>
               <a:rPr lang="pt-BR" dirty="0"/>
-              <a:t> descendente é a busca iterativa pela parte mais baixa da superfície de erro,.</a:t>
-            </a:r>
-            <a:endParaRPr lang="en-US" dirty="0"/>
+              <a:t>Existe apenas </a:t>
+            </a:r>
+            <a:r>
+              <a:rPr lang="pt-BR" b="1" dirty="0"/>
+              <a:t>um único ponto mais baixo</a:t>
+            </a:r>
+            <a:r>
+              <a:rPr lang="pt-BR" dirty="0"/>
+              <a:t> (o </a:t>
+            </a:r>
+            <a:r>
+              <a:rPr lang="pt-BR" dirty="0" smtClean="0"/>
+              <a:t>mínimo global</a:t>
+            </a:r>
+            <a:r>
+              <a:rPr lang="pt-BR" dirty="0"/>
+              <a:t>).</a:t>
+            </a:r>
+          </a:p>
+          <a:p>
+            <a:pPr lvl="1">
+              <a:buFont typeface="Wingdings" panose="05000000000000000000" pitchFamily="2" charset="2"/>
+              <a:buChar char="§"/>
+            </a:pPr>
+            <a:r>
+              <a:rPr lang="pt-BR" dirty="0" smtClean="0"/>
+              <a:t>Portanto, não </a:t>
+            </a:r>
+            <a:r>
+              <a:rPr lang="pt-BR" dirty="0"/>
+              <a:t>importa onde </a:t>
+            </a:r>
+            <a:r>
+              <a:rPr lang="pt-BR" dirty="0" smtClean="0"/>
+              <a:t>valores iniciais são inicializados, o gradiente descendente </a:t>
+            </a:r>
+            <a:r>
+              <a:rPr lang="pt-BR" b="1" dirty="0" smtClean="0"/>
+              <a:t>sempre</a:t>
+            </a:r>
+            <a:r>
+              <a:rPr lang="pt-BR" dirty="0" smtClean="0"/>
+              <a:t> </a:t>
+            </a:r>
+            <a:r>
+              <a:rPr lang="pt-BR" dirty="0"/>
+              <a:t>chegará à melhor solução possível</a:t>
+            </a:r>
+            <a:r>
+              <a:rPr lang="pt-BR" dirty="0" smtClean="0"/>
+              <a:t>.</a:t>
+            </a:r>
+            <a:endParaRPr lang="pt-BR" dirty="0"/>
+          </a:p>
+        </p:txBody>
+      </p:sp>
+      <p:grpSp>
+        <p:nvGrpSpPr>
+          <p:cNvPr id="4" name="Agrupar 4">
+            <a:extLst>
+              <a:ext uri="{FF2B5EF4-FFF2-40B4-BE49-F238E27FC236}">
+                <a16:creationId xmlns:a16="http://schemas.microsoft.com/office/drawing/2014/main" xmlns="" id="{84412B71-A2C7-E89B-BE04-C2E70AB63FB6}"/>
+              </a:ext>
+            </a:extLst>
+          </p:cNvPr>
+          <p:cNvGrpSpPr/>
+          <p:nvPr/>
+        </p:nvGrpSpPr>
+        <p:grpSpPr>
+          <a:xfrm>
+            <a:off x="500575" y="1825624"/>
+            <a:ext cx="4381189" cy="4083507"/>
+            <a:chOff x="55618" y="2251324"/>
+            <a:chExt cx="4381189" cy="4083507"/>
+          </a:xfrm>
+        </p:grpSpPr>
+        <p:grpSp>
+          <p:nvGrpSpPr>
+            <p:cNvPr id="5" name="Agrupar 5">
+              <a:extLst>
+                <a:ext uri="{FF2B5EF4-FFF2-40B4-BE49-F238E27FC236}">
+                  <a16:creationId xmlns:a16="http://schemas.microsoft.com/office/drawing/2014/main" xmlns="" id="{FB0DCC50-E74B-B0C7-FD19-2CD268B79A24}"/>
+                </a:ext>
+              </a:extLst>
+            </p:cNvPr>
+            <p:cNvGrpSpPr/>
+            <p:nvPr/>
+          </p:nvGrpSpPr>
+          <p:grpSpPr>
+            <a:xfrm>
+              <a:off x="55618" y="2251324"/>
+              <a:ext cx="4381189" cy="4083507"/>
+              <a:chOff x="930667" y="1938641"/>
+              <a:chExt cx="4381189" cy="4083507"/>
+            </a:xfrm>
+          </p:grpSpPr>
+          <p:grpSp>
+            <p:nvGrpSpPr>
+              <p:cNvPr id="8" name="Agrupar 8">
+                <a:extLst>
+                  <a:ext uri="{FF2B5EF4-FFF2-40B4-BE49-F238E27FC236}">
+                    <a16:creationId xmlns:a16="http://schemas.microsoft.com/office/drawing/2014/main" xmlns="" id="{7FD92229-0631-3DCD-1FF9-A49AE18B66EF}"/>
+                  </a:ext>
+                </a:extLst>
+              </p:cNvPr>
+              <p:cNvGrpSpPr/>
+              <p:nvPr/>
+            </p:nvGrpSpPr>
+            <p:grpSpPr>
+              <a:xfrm>
+                <a:off x="930667" y="1938641"/>
+                <a:ext cx="4381189" cy="4083507"/>
+                <a:chOff x="447782" y="1825625"/>
+                <a:chExt cx="4381189" cy="4083507"/>
+              </a:xfrm>
+            </p:grpSpPr>
+            <p:grpSp>
+              <p:nvGrpSpPr>
+                <p:cNvPr id="18" name="Agrupar 44">
+                  <a:extLst>
+                    <a:ext uri="{FF2B5EF4-FFF2-40B4-BE49-F238E27FC236}">
+                      <a16:creationId xmlns:a16="http://schemas.microsoft.com/office/drawing/2014/main" xmlns="" id="{9E0EE296-BA0A-9E88-428D-23EFF31F9CDD}"/>
+                    </a:ext>
+                  </a:extLst>
+                </p:cNvPr>
+                <p:cNvGrpSpPr/>
+                <p:nvPr/>
+              </p:nvGrpSpPr>
+              <p:grpSpPr>
+                <a:xfrm>
+                  <a:off x="447782" y="1825625"/>
+                  <a:ext cx="4381189" cy="3859236"/>
+                  <a:chOff x="1592492" y="1393380"/>
+                  <a:chExt cx="3155387" cy="2846768"/>
+                </a:xfrm>
+              </p:grpSpPr>
+              <p:pic>
+                <p:nvPicPr>
+                  <p:cNvPr id="27" name="Picture 2" descr="Visualization for Function Optimization in Python -  MachineLearningMastery.com">
+                    <a:extLst>
+                      <a:ext uri="{FF2B5EF4-FFF2-40B4-BE49-F238E27FC236}">
+                        <a16:creationId xmlns:a16="http://schemas.microsoft.com/office/drawing/2014/main" xmlns="" id="{44D88D47-5822-C7A4-E1B5-0AF53981D02F}"/>
+                      </a:ext>
+                    </a:extLst>
+                  </p:cNvPr>
+                  <p:cNvPicPr>
+                    <a:picLocks noChangeAspect="1" noChangeArrowheads="1"/>
+                  </p:cNvPicPr>
+                  <p:nvPr/>
+                </p:nvPicPr>
+                <p:blipFill rotWithShape="1">
+                  <a:blip r:embed="rId2">
+                    <a:extLst>
+                      <a:ext uri="{28A0092B-C50C-407E-A947-70E740481C1C}">
+                        <a14:useLocalDpi xmlns:a14="http://schemas.microsoft.com/office/drawing/2010/main" val="0"/>
+                      </a:ext>
+                    </a:extLst>
+                  </a:blip>
+                  <a:srcRect l="25468" t="17228" r="16217" b="10711"/>
+                  <a:stretch/>
+                </p:blipFill>
+                <p:spPr bwMode="auto">
+                  <a:xfrm>
+                    <a:off x="1592492" y="1393380"/>
+                    <a:ext cx="3069081" cy="2844369"/>
+                  </a:xfrm>
+                  <a:prstGeom prst="rect">
+                    <a:avLst/>
+                  </a:prstGeom>
+                  <a:noFill/>
+                  <a:extLst>
+                    <a:ext uri="{909E8E84-426E-40DD-AFC4-6F175D3DCCD1}">
+                      <a14:hiddenFill xmlns:a14="http://schemas.microsoft.com/office/drawing/2010/main">
+                        <a:solidFill>
+                          <a:srgbClr val="FFFFFF"/>
+                        </a:solidFill>
+                      </a14:hiddenFill>
+                    </a:ext>
+                  </a:extLst>
+                </p:spPr>
+              </p:pic>
+              <mc:AlternateContent xmlns:mc="http://schemas.openxmlformats.org/markup-compatibility/2006" xmlns:a14="http://schemas.microsoft.com/office/drawing/2010/main">
+                <mc:Choice Requires="a14">
+                  <p:sp>
+                    <p:nvSpPr>
+                      <p:cNvPr id="28" name="CaixaDeTexto 27">
+                        <a:extLst>
+                          <a:ext uri="{FF2B5EF4-FFF2-40B4-BE49-F238E27FC236}">
+                            <a16:creationId xmlns:a16="http://schemas.microsoft.com/office/drawing/2014/main" xmlns="" id="{D3302DEB-0BAF-20B2-A12B-7E3667CD882F}"/>
+                          </a:ext>
+                        </a:extLst>
+                      </p:cNvPr>
+                      <p:cNvSpPr txBox="1"/>
+                      <p:nvPr/>
+                    </p:nvSpPr>
+                    <p:spPr>
+                      <a:xfrm>
+                        <a:off x="2025506" y="3945007"/>
+                        <a:ext cx="547099" cy="295141"/>
+                      </a:xfrm>
+                      <a:prstGeom prst="rect">
+                        <a:avLst/>
+                      </a:prstGeom>
+                      <a:noFill/>
+                    </p:spPr>
+                    <p:txBody>
+                      <a:bodyPr wrap="square">
+                        <a:spAutoFit/>
+                      </a:bodyPr>
+                      <a:lstStyle/>
+                      <a:p>
+                        <a:pPr/>
+                        <a14:m>
+                          <m:oMathPara xmlns:m="http://schemas.openxmlformats.org/officeDocument/2006/math">
+                            <m:oMathParaPr>
+                              <m:jc m:val="centerGroup"/>
+                            </m:oMathParaPr>
+                            <m:oMath xmlns:m="http://schemas.openxmlformats.org/officeDocument/2006/math">
+                              <m:sSub>
+                                <m:sSubPr>
+                                  <m:ctrlPr>
+                                    <a:rPr lang="pt-BR" sz="2000" i="1" smtClean="0">
+                                      <a:latin typeface="Cambria Math" panose="02040503050406030204" pitchFamily="18" charset="0"/>
+                                    </a:rPr>
+                                  </m:ctrlPr>
+                                </m:sSubPr>
+                                <m:e>
+                                  <m:r>
+                                    <a:rPr lang="pt-BR" sz="2000" i="1">
+                                      <a:latin typeface="Cambria Math" panose="02040503050406030204" pitchFamily="18" charset="0"/>
+                                    </a:rPr>
+                                    <m:t>𝑎</m:t>
+                                  </m:r>
+                                </m:e>
+                                <m:sub>
+                                  <m:r>
+                                    <a:rPr lang="pt-BR" sz="2000" i="1">
+                                      <a:latin typeface="Cambria Math" panose="02040503050406030204" pitchFamily="18" charset="0"/>
+                                    </a:rPr>
+                                    <m:t>0</m:t>
+                                  </m:r>
+                                </m:sub>
+                              </m:sSub>
+                            </m:oMath>
+                          </m:oMathPara>
+                        </a14:m>
+                        <a:endParaRPr lang="pt-BR" sz="2000" dirty="0"/>
+                      </a:p>
+                    </p:txBody>
+                  </p:sp>
+                </mc:Choice>
+                <mc:Fallback xmlns="">
+                  <p:sp>
+                    <p:nvSpPr>
+                      <p:cNvPr id="27" name="CaixaDeTexto 26">
+                        <a:extLst>
+                          <a:ext uri="{FF2B5EF4-FFF2-40B4-BE49-F238E27FC236}">
+                            <a16:creationId xmlns:a16="http://schemas.microsoft.com/office/drawing/2014/main" id="{00D42F04-97F1-C0EA-6B00-D0BD117CDEFF}"/>
+                          </a:ext>
+                        </a:extLst>
+                      </p:cNvPr>
+                      <p:cNvSpPr txBox="1">
+                        <a:spLocks noRot="1" noChangeAspect="1" noMove="1" noResize="1" noEditPoints="1" noAdjustHandles="1" noChangeArrowheads="1" noChangeShapeType="1" noTextEdit="1"/>
+                      </p:cNvSpPr>
+                      <p:nvPr/>
+                    </p:nvSpPr>
+                    <p:spPr>
+                      <a:xfrm>
+                        <a:off x="2025506" y="3945007"/>
+                        <a:ext cx="547099" cy="295141"/>
+                      </a:xfrm>
+                      <a:prstGeom prst="rect">
+                        <a:avLst/>
+                      </a:prstGeom>
+                      <a:blipFill>
+                        <a:blip r:embed="rId4"/>
+                        <a:stretch>
+                          <a:fillRect/>
+                        </a:stretch>
+                      </a:blipFill>
+                    </p:spPr>
+                    <p:txBody>
+                      <a:bodyPr/>
+                      <a:lstStyle/>
+                      <a:p>
+                        <a:r>
+                          <a:rPr lang="pt-BR">
+                            <a:noFill/>
+                          </a:rPr>
+                          <a:t> </a:t>
+                        </a:r>
+                      </a:p>
+                    </p:txBody>
+                  </p:sp>
+                </mc:Fallback>
+              </mc:AlternateContent>
+              <mc:AlternateContent xmlns:mc="http://schemas.openxmlformats.org/markup-compatibility/2006" xmlns:a14="http://schemas.microsoft.com/office/drawing/2010/main">
+                <mc:Choice Requires="a14">
+                  <p:sp>
+                    <p:nvSpPr>
+                      <p:cNvPr id="29" name="CaixaDeTexto 28">
+                        <a:extLst>
+                          <a:ext uri="{FF2B5EF4-FFF2-40B4-BE49-F238E27FC236}">
+                            <a16:creationId xmlns:a16="http://schemas.microsoft.com/office/drawing/2014/main" xmlns="" id="{0264388D-BD42-DE8D-1EDA-911DD626CE21}"/>
+                          </a:ext>
+                        </a:extLst>
+                      </p:cNvPr>
+                      <p:cNvSpPr txBox="1"/>
+                      <p:nvPr/>
+                    </p:nvSpPr>
+                    <p:spPr>
+                      <a:xfrm>
+                        <a:off x="4099817" y="3575675"/>
+                        <a:ext cx="423809" cy="295141"/>
+                      </a:xfrm>
+                      <a:prstGeom prst="rect">
+                        <a:avLst/>
+                      </a:prstGeom>
+                      <a:noFill/>
+                    </p:spPr>
+                    <p:txBody>
+                      <a:bodyPr wrap="square">
+                        <a:spAutoFit/>
+                      </a:bodyPr>
+                      <a:lstStyle/>
+                      <a:p>
+                        <a:pPr/>
+                        <a14:m>
+                          <m:oMathPara xmlns:m="http://schemas.openxmlformats.org/officeDocument/2006/math">
+                            <m:oMathParaPr>
+                              <m:jc m:val="centerGroup"/>
+                            </m:oMathParaPr>
+                            <m:oMath xmlns:m="http://schemas.openxmlformats.org/officeDocument/2006/math">
+                              <m:sSub>
+                                <m:sSubPr>
+                                  <m:ctrlPr>
+                                    <a:rPr lang="pt-BR" sz="2000" i="1" smtClean="0">
+                                      <a:latin typeface="Cambria Math" panose="02040503050406030204" pitchFamily="18" charset="0"/>
+                                    </a:rPr>
+                                  </m:ctrlPr>
+                                </m:sSubPr>
+                                <m:e>
+                                  <m:r>
+                                    <a:rPr lang="pt-BR" sz="2000" i="1">
+                                      <a:latin typeface="Cambria Math" panose="02040503050406030204" pitchFamily="18" charset="0"/>
+                                    </a:rPr>
+                                    <m:t>𝑎</m:t>
+                                  </m:r>
+                                </m:e>
+                                <m:sub>
+                                  <m:r>
+                                    <a:rPr lang="pt-BR" sz="2000" i="1">
+                                      <a:latin typeface="Cambria Math" panose="02040503050406030204" pitchFamily="18" charset="0"/>
+                                    </a:rPr>
+                                    <m:t>1</m:t>
+                                  </m:r>
+                                </m:sub>
+                              </m:sSub>
+                            </m:oMath>
+                          </m:oMathPara>
+                        </a14:m>
+                        <a:endParaRPr lang="pt-BR" sz="2000" dirty="0"/>
+                      </a:p>
+                    </p:txBody>
+                  </p:sp>
+                </mc:Choice>
+                <mc:Fallback xmlns="">
+                  <p:sp>
+                    <p:nvSpPr>
+                      <p:cNvPr id="29" name="CaixaDeTexto 28">
+                        <a:extLst>
+                          <a:ext uri="{FF2B5EF4-FFF2-40B4-BE49-F238E27FC236}">
+                            <a16:creationId xmlns:a16="http://schemas.microsoft.com/office/drawing/2014/main" id="{1FCA9EDF-24EB-6DAA-4AB3-9E76EE2FB342}"/>
+                          </a:ext>
+                        </a:extLst>
+                      </p:cNvPr>
+                      <p:cNvSpPr txBox="1">
+                        <a:spLocks noRot="1" noChangeAspect="1" noMove="1" noResize="1" noEditPoints="1" noAdjustHandles="1" noChangeArrowheads="1" noChangeShapeType="1" noTextEdit="1"/>
+                      </p:cNvSpPr>
+                      <p:nvPr/>
+                    </p:nvSpPr>
+                    <p:spPr>
+                      <a:xfrm>
+                        <a:off x="4099817" y="3575675"/>
+                        <a:ext cx="423809" cy="295141"/>
+                      </a:xfrm>
+                      <a:prstGeom prst="rect">
+                        <a:avLst/>
+                      </a:prstGeom>
+                      <a:blipFill>
+                        <a:blip r:embed="rId5"/>
+                        <a:stretch>
+                          <a:fillRect/>
+                        </a:stretch>
+                      </a:blipFill>
+                    </p:spPr>
+                    <p:txBody>
+                      <a:bodyPr/>
+                      <a:lstStyle/>
+                      <a:p>
+                        <a:r>
+                          <a:rPr lang="pt-BR">
+                            <a:noFill/>
+                          </a:rPr>
+                          <a:t> </a:t>
+                        </a:r>
+                      </a:p>
+                    </p:txBody>
+                  </p:sp>
+                </mc:Fallback>
+              </mc:AlternateContent>
+              <mc:AlternateContent xmlns:mc="http://schemas.openxmlformats.org/markup-compatibility/2006" xmlns:a14="http://schemas.microsoft.com/office/drawing/2010/main">
+                <mc:Choice Requires="a14">
+                  <p:sp>
+                    <p:nvSpPr>
+                      <p:cNvPr id="30" name="CaixaDeTexto 29">
+                        <a:extLst>
+                          <a:ext uri="{FF2B5EF4-FFF2-40B4-BE49-F238E27FC236}">
+                            <a16:creationId xmlns:a16="http://schemas.microsoft.com/office/drawing/2014/main" xmlns="" id="{585BAA01-510A-C118-CA93-5A46D3C329CC}"/>
+                          </a:ext>
+                        </a:extLst>
+                      </p:cNvPr>
+                      <p:cNvSpPr txBox="1"/>
+                      <p:nvPr/>
+                    </p:nvSpPr>
+                    <p:spPr>
+                      <a:xfrm>
+                        <a:off x="4190506" y="1542308"/>
+                        <a:ext cx="557373" cy="272438"/>
+                      </a:xfrm>
+                      <a:prstGeom prst="rect">
+                        <a:avLst/>
+                      </a:prstGeom>
+                      <a:noFill/>
+                    </p:spPr>
+                    <p:txBody>
+                      <a:bodyPr wrap="square">
+                        <a:spAutoFit/>
+                      </a:bodyPr>
+                      <a:lstStyle/>
+                      <a:p>
+                        <a:pPr/>
+                        <a14:m>
+                          <m:oMathPara xmlns:m="http://schemas.openxmlformats.org/officeDocument/2006/math">
+                            <m:oMathParaPr>
+                              <m:jc m:val="centerGroup"/>
+                            </m:oMathParaPr>
+                            <m:oMath xmlns:m="http://schemas.openxmlformats.org/officeDocument/2006/math">
+                              <m:r>
+                                <a:rPr lang="pt-BR" sz="1800" b="1" i="0" smtClean="0">
+                                  <a:latin typeface="Cambria Math" panose="02040503050406030204" pitchFamily="18" charset="0"/>
+                                </a:rPr>
+                                <m:t>𝐄𝐐𝐌</m:t>
+                              </m:r>
+                            </m:oMath>
+                          </m:oMathPara>
+                        </a14:m>
+                        <a:endParaRPr lang="pt-BR" b="1" dirty="0"/>
+                      </a:p>
+                    </p:txBody>
+                  </p:sp>
+                </mc:Choice>
+                <mc:Fallback xmlns="">
+                  <p:sp>
+                    <p:nvSpPr>
+                      <p:cNvPr id="41" name="CaixaDeTexto 40">
+                        <a:extLst>
+                          <a:ext uri="{FF2B5EF4-FFF2-40B4-BE49-F238E27FC236}">
+                            <a16:creationId xmlns:a16="http://schemas.microsoft.com/office/drawing/2014/main" id="{B86ACC41-6A24-7A4D-DE0B-040FA766A60D}"/>
+                          </a:ext>
+                        </a:extLst>
+                      </p:cNvPr>
+                      <p:cNvSpPr txBox="1">
+                        <a:spLocks noRot="1" noChangeAspect="1" noMove="1" noResize="1" noEditPoints="1" noAdjustHandles="1" noChangeArrowheads="1" noChangeShapeType="1" noTextEdit="1"/>
+                      </p:cNvSpPr>
+                      <p:nvPr/>
+                    </p:nvSpPr>
+                    <p:spPr>
+                      <a:xfrm>
+                        <a:off x="4190506" y="1542308"/>
+                        <a:ext cx="557373" cy="272438"/>
+                      </a:xfrm>
+                      <a:prstGeom prst="rect">
+                        <a:avLst/>
+                      </a:prstGeom>
+                      <a:blipFill>
+                        <a:blip r:embed="rId6"/>
+                        <a:stretch>
+                          <a:fillRect b="-9836"/>
+                        </a:stretch>
+                      </a:blipFill>
+                    </p:spPr>
+                    <p:txBody>
+                      <a:bodyPr/>
+                      <a:lstStyle/>
+                      <a:p>
+                        <a:r>
+                          <a:rPr lang="pt-BR">
+                            <a:noFill/>
+                          </a:rPr>
+                          <a:t> </a:t>
+                        </a:r>
+                      </a:p>
+                    </p:txBody>
+                  </p:sp>
+                </mc:Fallback>
+              </mc:AlternateContent>
+            </p:grpSp>
+            <p:sp>
+              <p:nvSpPr>
+                <p:cNvPr id="19" name="Elipse 18">
+                  <a:extLst>
+                    <a:ext uri="{FF2B5EF4-FFF2-40B4-BE49-F238E27FC236}">
+                      <a16:creationId xmlns:a16="http://schemas.microsoft.com/office/drawing/2014/main" xmlns="" id="{048570E9-84B4-263B-42B4-31A2588FB83B}"/>
+                    </a:ext>
+                  </a:extLst>
+                </p:cNvPr>
+                <p:cNvSpPr>
+                  <a:spLocks noChangeAspect="1"/>
+                </p:cNvSpPr>
+                <p:nvPr/>
+              </p:nvSpPr>
+              <p:spPr>
+                <a:xfrm>
+                  <a:off x="1548001" y="3424885"/>
+                  <a:ext cx="72000" cy="72000"/>
+                </a:xfrm>
+                <a:prstGeom prst="ellipse">
+                  <a:avLst/>
+                </a:prstGeom>
+                <a:solidFill>
+                  <a:srgbClr val="FF0000"/>
+                </a:solidFill>
+                <a:ln>
+                  <a:solidFill>
+                    <a:srgbClr val="FF0000"/>
+                  </a:solidFill>
+                </a:ln>
+              </p:spPr>
+              <p:style>
+                <a:lnRef idx="2">
+                  <a:schemeClr val="accent1">
+                    <a:shade val="15000"/>
+                  </a:schemeClr>
+                </a:lnRef>
+                <a:fillRef idx="1">
+                  <a:schemeClr val="accent1"/>
+                </a:fillRef>
+                <a:effectRef idx="0">
+                  <a:schemeClr val="accent1"/>
+                </a:effectRef>
+                <a:fontRef idx="minor">
+                  <a:schemeClr val="lt1"/>
+                </a:fontRef>
+              </p:style>
+              <p:txBody>
+                <a:bodyPr rtlCol="0" anchor="ctr"/>
+                <a:lstStyle/>
+                <a:p>
+                  <a:pPr algn="ctr"/>
+                  <a:endParaRPr lang="pt-BR" dirty="0"/>
+                </a:p>
+              </p:txBody>
+            </p:sp>
+            <p:cxnSp>
+              <p:nvCxnSpPr>
+                <p:cNvPr id="20" name="Conector reto 19">
+                  <a:extLst>
+                    <a:ext uri="{FF2B5EF4-FFF2-40B4-BE49-F238E27FC236}">
+                      <a16:creationId xmlns:a16="http://schemas.microsoft.com/office/drawing/2014/main" xmlns="" id="{F03C6EA3-09F9-5AF4-2C93-055E20E87D18}"/>
+                    </a:ext>
+                  </a:extLst>
+                </p:cNvPr>
+                <p:cNvCxnSpPr>
+                  <a:cxnSpLocks/>
+                  <a:endCxn id="19" idx="4"/>
+                </p:cNvCxnSpPr>
+                <p:nvPr/>
+              </p:nvCxnSpPr>
+              <p:spPr>
+                <a:xfrm flipH="1" flipV="1">
+                  <a:off x="1584001" y="3496885"/>
+                  <a:ext cx="11005" cy="464868"/>
+                </a:xfrm>
+                <a:prstGeom prst="line">
+                  <a:avLst/>
+                </a:prstGeom>
+                <a:ln w="19050">
+                  <a:solidFill>
+                    <a:schemeClr val="tx1"/>
+                  </a:solidFill>
+                  <a:prstDash val="sysDash"/>
+                </a:ln>
+              </p:spPr>
+              <p:style>
+                <a:lnRef idx="1">
+                  <a:schemeClr val="accent1"/>
+                </a:lnRef>
+                <a:fillRef idx="0">
+                  <a:schemeClr val="accent1"/>
+                </a:fillRef>
+                <a:effectRef idx="0">
+                  <a:schemeClr val="accent1"/>
+                </a:effectRef>
+                <a:fontRef idx="minor">
+                  <a:schemeClr val="tx1"/>
+                </a:fontRef>
+              </p:style>
+            </p:cxnSp>
+            <p:cxnSp>
+              <p:nvCxnSpPr>
+                <p:cNvPr id="21" name="Conector reto 20">
+                  <a:extLst>
+                    <a:ext uri="{FF2B5EF4-FFF2-40B4-BE49-F238E27FC236}">
+                      <a16:creationId xmlns:a16="http://schemas.microsoft.com/office/drawing/2014/main" xmlns="" id="{09BF1C12-E6A9-0B8A-A4BE-A0CDC64BF5EB}"/>
+                    </a:ext>
+                  </a:extLst>
+                </p:cNvPr>
+                <p:cNvCxnSpPr>
+                  <a:cxnSpLocks/>
+                </p:cNvCxnSpPr>
+                <p:nvPr/>
+              </p:nvCxnSpPr>
+              <p:spPr>
+                <a:xfrm flipH="1" flipV="1">
+                  <a:off x="2644775" y="4469673"/>
+                  <a:ext cx="931863" cy="278540"/>
+                </a:xfrm>
+                <a:prstGeom prst="line">
+                  <a:avLst/>
+                </a:prstGeom>
+                <a:ln w="19050">
+                  <a:solidFill>
+                    <a:schemeClr val="tx1"/>
+                  </a:solidFill>
+                  <a:prstDash val="sysDash"/>
+                </a:ln>
+              </p:spPr>
+              <p:style>
+                <a:lnRef idx="1">
+                  <a:schemeClr val="accent1"/>
+                </a:lnRef>
+                <a:fillRef idx="0">
+                  <a:schemeClr val="accent1"/>
+                </a:fillRef>
+                <a:effectRef idx="0">
+                  <a:schemeClr val="accent1"/>
+                </a:effectRef>
+                <a:fontRef idx="minor">
+                  <a:schemeClr val="tx1"/>
+                </a:fontRef>
+              </p:style>
+            </p:cxnSp>
+            <p:cxnSp>
+              <p:nvCxnSpPr>
+                <p:cNvPr id="22" name="Conector reto 21">
+                  <a:extLst>
+                    <a:ext uri="{FF2B5EF4-FFF2-40B4-BE49-F238E27FC236}">
+                      <a16:creationId xmlns:a16="http://schemas.microsoft.com/office/drawing/2014/main" xmlns="" id="{BAD148F8-88A1-9983-64AC-7DC9A33D0083}"/>
+                    </a:ext>
+                  </a:extLst>
+                </p:cNvPr>
+                <p:cNvCxnSpPr>
+                  <a:cxnSpLocks/>
+                </p:cNvCxnSpPr>
+                <p:nvPr/>
+              </p:nvCxnSpPr>
+              <p:spPr>
+                <a:xfrm flipH="1">
+                  <a:off x="857476" y="4155281"/>
+                  <a:ext cx="737530" cy="628784"/>
+                </a:xfrm>
+                <a:prstGeom prst="line">
+                  <a:avLst/>
+                </a:prstGeom>
+                <a:ln w="19050">
+                  <a:solidFill>
+                    <a:schemeClr val="tx1"/>
+                  </a:solidFill>
+                  <a:prstDash val="sysDash"/>
+                </a:ln>
+              </p:spPr>
+              <p:style>
+                <a:lnRef idx="1">
+                  <a:schemeClr val="accent1"/>
+                </a:lnRef>
+                <a:fillRef idx="0">
+                  <a:schemeClr val="accent1"/>
+                </a:fillRef>
+                <a:effectRef idx="0">
+                  <a:schemeClr val="accent1"/>
+                </a:effectRef>
+                <a:fontRef idx="minor">
+                  <a:schemeClr val="tx1"/>
+                </a:fontRef>
+              </p:style>
+            </p:cxnSp>
+            <p:cxnSp>
+              <p:nvCxnSpPr>
+                <p:cNvPr id="23" name="Conector reto 22">
+                  <a:extLst>
+                    <a:ext uri="{FF2B5EF4-FFF2-40B4-BE49-F238E27FC236}">
+                      <a16:creationId xmlns:a16="http://schemas.microsoft.com/office/drawing/2014/main" xmlns="" id="{C07E394D-50B1-689C-6846-C8A7447896B9}"/>
+                    </a:ext>
+                  </a:extLst>
+                </p:cNvPr>
+                <p:cNvCxnSpPr>
+                  <a:cxnSpLocks/>
+                </p:cNvCxnSpPr>
+                <p:nvPr/>
+              </p:nvCxnSpPr>
+              <p:spPr>
+                <a:xfrm flipH="1" flipV="1">
+                  <a:off x="1600660" y="4144018"/>
+                  <a:ext cx="73266" cy="32908"/>
+                </a:xfrm>
+                <a:prstGeom prst="line">
+                  <a:avLst/>
+                </a:prstGeom>
+                <a:ln w="19050">
+                  <a:solidFill>
+                    <a:schemeClr val="tx1"/>
+                  </a:solidFill>
+                  <a:prstDash val="sysDash"/>
+                </a:ln>
+              </p:spPr>
+              <p:style>
+                <a:lnRef idx="1">
+                  <a:schemeClr val="accent1"/>
+                </a:lnRef>
+                <a:fillRef idx="0">
+                  <a:schemeClr val="accent1"/>
+                </a:fillRef>
+                <a:effectRef idx="0">
+                  <a:schemeClr val="accent1"/>
+                </a:effectRef>
+                <a:fontRef idx="minor">
+                  <a:schemeClr val="tx1"/>
+                </a:fontRef>
+              </p:style>
+            </p:cxnSp>
+            <p:cxnSp>
+              <p:nvCxnSpPr>
+                <p:cNvPr id="24" name="Conector reto 23">
+                  <a:extLst>
+                    <a:ext uri="{FF2B5EF4-FFF2-40B4-BE49-F238E27FC236}">
+                      <a16:creationId xmlns:a16="http://schemas.microsoft.com/office/drawing/2014/main" xmlns="" id="{A506799A-6B61-E22B-5542-D0125466F84F}"/>
+                    </a:ext>
+                  </a:extLst>
+                </p:cNvPr>
+                <p:cNvCxnSpPr>
+                  <a:cxnSpLocks/>
+                </p:cNvCxnSpPr>
+                <p:nvPr/>
+              </p:nvCxnSpPr>
+              <p:spPr>
+                <a:xfrm flipV="1">
+                  <a:off x="1602149" y="4110038"/>
+                  <a:ext cx="0" cy="40910"/>
+                </a:xfrm>
+                <a:prstGeom prst="line">
+                  <a:avLst/>
+                </a:prstGeom>
+                <a:ln w="19050">
+                  <a:solidFill>
+                    <a:schemeClr val="tx1"/>
+                  </a:solidFill>
+                  <a:prstDash val="sysDash"/>
+                </a:ln>
+              </p:spPr>
+              <p:style>
+                <a:lnRef idx="1">
+                  <a:schemeClr val="accent1"/>
+                </a:lnRef>
+                <a:fillRef idx="0">
+                  <a:schemeClr val="accent1"/>
+                </a:fillRef>
+                <a:effectRef idx="0">
+                  <a:schemeClr val="accent1"/>
+                </a:effectRef>
+                <a:fontRef idx="minor">
+                  <a:schemeClr val="tx1"/>
+                </a:fontRef>
+              </p:style>
+            </p:cxnSp>
+            <p:cxnSp>
+              <p:nvCxnSpPr>
+                <p:cNvPr id="25" name="Conector de Seta Reta 51">
+                  <a:extLst>
+                    <a:ext uri="{FF2B5EF4-FFF2-40B4-BE49-F238E27FC236}">
+                      <a16:creationId xmlns:a16="http://schemas.microsoft.com/office/drawing/2014/main" xmlns="" id="{4C86C60D-83E6-EFF1-0757-FBEE2440C7F6}"/>
+                    </a:ext>
+                  </a:extLst>
+                </p:cNvPr>
+                <p:cNvCxnSpPr>
+                  <a:cxnSpLocks/>
+                </p:cNvCxnSpPr>
+                <p:nvPr/>
+              </p:nvCxnSpPr>
+              <p:spPr>
+                <a:xfrm flipH="1" flipV="1">
+                  <a:off x="2406947" y="4469673"/>
+                  <a:ext cx="623733" cy="1211936"/>
+                </a:xfrm>
+                <a:prstGeom prst="straightConnector1">
+                  <a:avLst/>
+                </a:prstGeom>
+                <a:ln>
+                  <a:solidFill>
+                    <a:srgbClr val="FF0000"/>
+                  </a:solidFill>
+                  <a:tailEnd type="triangle"/>
+                </a:ln>
+              </p:spPr>
+              <p:style>
+                <a:lnRef idx="1">
+                  <a:schemeClr val="accent1"/>
+                </a:lnRef>
+                <a:fillRef idx="0">
+                  <a:schemeClr val="accent1"/>
+                </a:fillRef>
+                <a:effectRef idx="0">
+                  <a:schemeClr val="accent1"/>
+                </a:effectRef>
+                <a:fontRef idx="minor">
+                  <a:schemeClr val="tx1"/>
+                </a:fontRef>
+              </p:style>
+            </p:cxnSp>
+            <p:sp>
+              <p:nvSpPr>
+                <p:cNvPr id="26" name="CaixaDeTexto 25">
+                  <a:extLst>
+                    <a:ext uri="{FF2B5EF4-FFF2-40B4-BE49-F238E27FC236}">
+                      <a16:creationId xmlns:a16="http://schemas.microsoft.com/office/drawing/2014/main" xmlns="" id="{FB4BC05E-298F-2552-BE8C-2BBFA977ECA2}"/>
+                    </a:ext>
+                  </a:extLst>
+                </p:cNvPr>
+                <p:cNvSpPr txBox="1"/>
+                <p:nvPr/>
+              </p:nvSpPr>
+              <p:spPr>
+                <a:xfrm>
+                  <a:off x="2426116" y="5601355"/>
+                  <a:ext cx="1483596" cy="307777"/>
+                </a:xfrm>
+                <a:prstGeom prst="rect">
+                  <a:avLst/>
+                </a:prstGeom>
+                <a:noFill/>
+              </p:spPr>
+              <p:txBody>
+                <a:bodyPr wrap="square" rtlCol="0">
+                  <a:spAutoFit/>
+                </a:bodyPr>
+                <a:lstStyle/>
+                <a:p>
+                  <a:r>
+                    <a:rPr lang="pt-BR" sz="1400" b="1" dirty="0">
+                      <a:solidFill>
+                        <a:srgbClr val="00B0F0"/>
+                      </a:solidFill>
+                    </a:rPr>
+                    <a:t>ponto de mínimo</a:t>
+                  </a:r>
+                </a:p>
+              </p:txBody>
+            </p:sp>
+          </p:grpSp>
+          <p:sp>
+            <p:nvSpPr>
+              <p:cNvPr id="9" name="Elipse 8">
+                <a:extLst>
+                  <a:ext uri="{FF2B5EF4-FFF2-40B4-BE49-F238E27FC236}">
+                    <a16:creationId xmlns:a16="http://schemas.microsoft.com/office/drawing/2014/main" xmlns="" id="{35F2A8C3-8F29-6C0D-DEBF-574DE751D83A}"/>
+                  </a:ext>
+                </a:extLst>
+              </p:cNvPr>
+              <p:cNvSpPr>
+                <a:spLocks noChangeAspect="1"/>
+              </p:cNvSpPr>
+              <p:nvPr/>
+            </p:nvSpPr>
+            <p:spPr>
+              <a:xfrm>
+                <a:off x="2099351" y="3779808"/>
+                <a:ext cx="72000" cy="72000"/>
+              </a:xfrm>
+              <a:prstGeom prst="ellipse">
+                <a:avLst/>
+              </a:prstGeom>
+              <a:solidFill>
+                <a:srgbClr val="FF0000"/>
+              </a:solidFill>
+              <a:ln>
+                <a:solidFill>
+                  <a:srgbClr val="FF0000"/>
+                </a:solidFill>
+              </a:ln>
+            </p:spPr>
+            <p:style>
+              <a:lnRef idx="2">
+                <a:schemeClr val="accent1">
+                  <a:shade val="15000"/>
+                </a:schemeClr>
+              </a:lnRef>
+              <a:fillRef idx="1">
+                <a:schemeClr val="accent1"/>
+              </a:fillRef>
+              <a:effectRef idx="0">
+                <a:schemeClr val="accent1"/>
+              </a:effectRef>
+              <a:fontRef idx="minor">
+                <a:schemeClr val="lt1"/>
+              </a:fontRef>
+            </p:style>
+            <p:txBody>
+              <a:bodyPr rtlCol="0" anchor="ctr"/>
+              <a:lstStyle/>
+              <a:p>
+                <a:pPr algn="ctr"/>
+                <a:endParaRPr lang="pt-BR" dirty="0"/>
+              </a:p>
+            </p:txBody>
+          </p:sp>
+          <p:sp>
+            <p:nvSpPr>
+              <p:cNvPr id="10" name="Elipse 9">
+                <a:extLst>
+                  <a:ext uri="{FF2B5EF4-FFF2-40B4-BE49-F238E27FC236}">
+                    <a16:creationId xmlns:a16="http://schemas.microsoft.com/office/drawing/2014/main" xmlns="" id="{D1D65435-8067-43D7-8B85-B58B5FE78F2B}"/>
+                  </a:ext>
+                </a:extLst>
+              </p:cNvPr>
+              <p:cNvSpPr>
+                <a:spLocks noChangeAspect="1"/>
+              </p:cNvSpPr>
+              <p:nvPr/>
+            </p:nvSpPr>
+            <p:spPr>
+              <a:xfrm>
+                <a:off x="2192811" y="3941684"/>
+                <a:ext cx="72000" cy="72000"/>
+              </a:xfrm>
+              <a:prstGeom prst="ellipse">
+                <a:avLst/>
+              </a:prstGeom>
+              <a:solidFill>
+                <a:srgbClr val="FF0000"/>
+              </a:solidFill>
+              <a:ln>
+                <a:solidFill>
+                  <a:srgbClr val="FF0000"/>
+                </a:solidFill>
+              </a:ln>
+            </p:spPr>
+            <p:style>
+              <a:lnRef idx="2">
+                <a:schemeClr val="accent1">
+                  <a:shade val="15000"/>
+                </a:schemeClr>
+              </a:lnRef>
+              <a:fillRef idx="1">
+                <a:schemeClr val="accent1"/>
+              </a:fillRef>
+              <a:effectRef idx="0">
+                <a:schemeClr val="accent1"/>
+              </a:effectRef>
+              <a:fontRef idx="minor">
+                <a:schemeClr val="lt1"/>
+              </a:fontRef>
+            </p:style>
+            <p:txBody>
+              <a:bodyPr rtlCol="0" anchor="ctr"/>
+              <a:lstStyle/>
+              <a:p>
+                <a:pPr algn="ctr"/>
+                <a:endParaRPr lang="pt-BR" dirty="0"/>
+              </a:p>
+            </p:txBody>
+          </p:sp>
+          <p:sp>
+            <p:nvSpPr>
+              <p:cNvPr id="11" name="Elipse 10">
+                <a:extLst>
+                  <a:ext uri="{FF2B5EF4-FFF2-40B4-BE49-F238E27FC236}">
+                    <a16:creationId xmlns:a16="http://schemas.microsoft.com/office/drawing/2014/main" xmlns="" id="{CE6F24E9-AEC3-E8E8-ACE1-5AB643448FDA}"/>
+                  </a:ext>
+                </a:extLst>
+              </p:cNvPr>
+              <p:cNvSpPr>
+                <a:spLocks noChangeAspect="1"/>
+              </p:cNvSpPr>
+              <p:nvPr/>
+            </p:nvSpPr>
+            <p:spPr>
+              <a:xfrm>
+                <a:off x="2316384" y="4063903"/>
+                <a:ext cx="72000" cy="72000"/>
+              </a:xfrm>
+              <a:prstGeom prst="ellipse">
+                <a:avLst/>
+              </a:prstGeom>
+              <a:solidFill>
+                <a:srgbClr val="FF0000"/>
+              </a:solidFill>
+              <a:ln>
+                <a:solidFill>
+                  <a:srgbClr val="FF0000"/>
+                </a:solidFill>
+              </a:ln>
+            </p:spPr>
+            <p:style>
+              <a:lnRef idx="2">
+                <a:schemeClr val="accent1">
+                  <a:shade val="15000"/>
+                </a:schemeClr>
+              </a:lnRef>
+              <a:fillRef idx="1">
+                <a:schemeClr val="accent1"/>
+              </a:fillRef>
+              <a:effectRef idx="0">
+                <a:schemeClr val="accent1"/>
+              </a:effectRef>
+              <a:fontRef idx="minor">
+                <a:schemeClr val="lt1"/>
+              </a:fontRef>
+            </p:style>
+            <p:txBody>
+              <a:bodyPr rtlCol="0" anchor="ctr"/>
+              <a:lstStyle/>
+              <a:p>
+                <a:pPr algn="ctr"/>
+                <a:endParaRPr lang="pt-BR" dirty="0"/>
+              </a:p>
+            </p:txBody>
+          </p:sp>
+          <p:sp>
+            <p:nvSpPr>
+              <p:cNvPr id="12" name="Elipse 11">
+                <a:extLst>
+                  <a:ext uri="{FF2B5EF4-FFF2-40B4-BE49-F238E27FC236}">
+                    <a16:creationId xmlns:a16="http://schemas.microsoft.com/office/drawing/2014/main" xmlns="" id="{8FACFAF7-7CF9-2A68-6DC3-73E2F744A7A7}"/>
+                  </a:ext>
+                </a:extLst>
+              </p:cNvPr>
+              <p:cNvSpPr>
+                <a:spLocks noChangeAspect="1"/>
+              </p:cNvSpPr>
+              <p:nvPr/>
+            </p:nvSpPr>
+            <p:spPr>
+              <a:xfrm>
+                <a:off x="2490467" y="4126542"/>
+                <a:ext cx="72000" cy="72000"/>
+              </a:xfrm>
+              <a:prstGeom prst="ellipse">
+                <a:avLst/>
+              </a:prstGeom>
+              <a:solidFill>
+                <a:srgbClr val="FF0000"/>
+              </a:solidFill>
+              <a:ln>
+                <a:solidFill>
+                  <a:srgbClr val="FF0000"/>
+                </a:solidFill>
+              </a:ln>
+            </p:spPr>
+            <p:style>
+              <a:lnRef idx="2">
+                <a:schemeClr val="accent1">
+                  <a:shade val="15000"/>
+                </a:schemeClr>
+              </a:lnRef>
+              <a:fillRef idx="1">
+                <a:schemeClr val="accent1"/>
+              </a:fillRef>
+              <a:effectRef idx="0">
+                <a:schemeClr val="accent1"/>
+              </a:effectRef>
+              <a:fontRef idx="minor">
+                <a:schemeClr val="lt1"/>
+              </a:fontRef>
+            </p:style>
+            <p:txBody>
+              <a:bodyPr rtlCol="0" anchor="ctr"/>
+              <a:lstStyle/>
+              <a:p>
+                <a:pPr algn="ctr"/>
+                <a:endParaRPr lang="pt-BR" dirty="0"/>
+              </a:p>
+            </p:txBody>
+          </p:sp>
+          <p:cxnSp>
+            <p:nvCxnSpPr>
+              <p:cNvPr id="13" name="Conector: Curvo 13">
+                <a:extLst>
+                  <a:ext uri="{FF2B5EF4-FFF2-40B4-BE49-F238E27FC236}">
+                    <a16:creationId xmlns:a16="http://schemas.microsoft.com/office/drawing/2014/main" xmlns="" id="{23FC64BF-9399-8DED-CE7B-6F37E3B76D0A}"/>
+                  </a:ext>
+                </a:extLst>
+              </p:cNvPr>
+              <p:cNvCxnSpPr>
+                <a:cxnSpLocks/>
+                <a:stCxn id="19" idx="0"/>
+                <a:endCxn id="9" idx="0"/>
+              </p:cNvCxnSpPr>
+              <p:nvPr/>
+            </p:nvCxnSpPr>
+            <p:spPr>
+              <a:xfrm rot="16200000" flipH="1">
+                <a:off x="1980164" y="3624622"/>
+                <a:ext cx="241907" cy="68465"/>
+              </a:xfrm>
+              <a:prstGeom prst="curvedConnector3">
+                <a:avLst>
+                  <a:gd name="adj1" fmla="val -29531"/>
+                </a:avLst>
+              </a:prstGeom>
+              <a:ln>
+                <a:solidFill>
+                  <a:srgbClr val="FF0000"/>
+                </a:solidFill>
+                <a:prstDash val="dash"/>
+                <a:tailEnd type="triangle"/>
+              </a:ln>
+            </p:spPr>
+            <p:style>
+              <a:lnRef idx="1">
+                <a:schemeClr val="accent1"/>
+              </a:lnRef>
+              <a:fillRef idx="0">
+                <a:schemeClr val="accent1"/>
+              </a:fillRef>
+              <a:effectRef idx="0">
+                <a:schemeClr val="accent1"/>
+              </a:effectRef>
+              <a:fontRef idx="minor">
+                <a:schemeClr val="tx1"/>
+              </a:fontRef>
+            </p:style>
+          </p:cxnSp>
+          <p:cxnSp>
+            <p:nvCxnSpPr>
+              <p:cNvPr id="14" name="Conector: Curvo 14">
+                <a:extLst>
+                  <a:ext uri="{FF2B5EF4-FFF2-40B4-BE49-F238E27FC236}">
+                    <a16:creationId xmlns:a16="http://schemas.microsoft.com/office/drawing/2014/main" xmlns="" id="{6CFC6E21-F686-D9AD-1678-277756D9D6E1}"/>
+                  </a:ext>
+                </a:extLst>
+              </p:cNvPr>
+              <p:cNvCxnSpPr>
+                <a:cxnSpLocks/>
+                <a:stCxn id="9" idx="0"/>
+                <a:endCxn id="10" idx="0"/>
+              </p:cNvCxnSpPr>
+              <p:nvPr/>
+            </p:nvCxnSpPr>
+            <p:spPr>
+              <a:xfrm rot="16200000" flipH="1">
+                <a:off x="2101143" y="3814016"/>
+                <a:ext cx="161876" cy="93460"/>
+              </a:xfrm>
+              <a:prstGeom prst="curvedConnector3">
+                <a:avLst>
+                  <a:gd name="adj1" fmla="val -85320"/>
+                </a:avLst>
+              </a:prstGeom>
+              <a:ln>
+                <a:solidFill>
+                  <a:srgbClr val="FF0000"/>
+                </a:solidFill>
+                <a:prstDash val="dash"/>
+                <a:tailEnd type="triangle"/>
+              </a:ln>
+            </p:spPr>
+            <p:style>
+              <a:lnRef idx="1">
+                <a:schemeClr val="accent1"/>
+              </a:lnRef>
+              <a:fillRef idx="0">
+                <a:schemeClr val="accent1"/>
+              </a:fillRef>
+              <a:effectRef idx="0">
+                <a:schemeClr val="accent1"/>
+              </a:effectRef>
+              <a:fontRef idx="minor">
+                <a:schemeClr val="tx1"/>
+              </a:fontRef>
+            </p:style>
+          </p:cxnSp>
+          <p:cxnSp>
+            <p:nvCxnSpPr>
+              <p:cNvPr id="15" name="Conector: Curvo 15">
+                <a:extLst>
+                  <a:ext uri="{FF2B5EF4-FFF2-40B4-BE49-F238E27FC236}">
+                    <a16:creationId xmlns:a16="http://schemas.microsoft.com/office/drawing/2014/main" xmlns="" id="{EA4C6F73-7F27-70C2-998B-E17C2EF4CE32}"/>
+                  </a:ext>
+                </a:extLst>
+              </p:cNvPr>
+              <p:cNvCxnSpPr>
+                <a:cxnSpLocks/>
+                <a:stCxn id="10" idx="0"/>
+                <a:endCxn id="11" idx="0"/>
+              </p:cNvCxnSpPr>
+              <p:nvPr/>
+            </p:nvCxnSpPr>
+            <p:spPr>
+              <a:xfrm rot="16200000" flipH="1">
+                <a:off x="2229487" y="3941007"/>
+                <a:ext cx="122219" cy="123573"/>
+              </a:xfrm>
+              <a:prstGeom prst="curvedConnector3">
+                <a:avLst>
+                  <a:gd name="adj1" fmla="val -120798"/>
+                </a:avLst>
+              </a:prstGeom>
+              <a:ln>
+                <a:solidFill>
+                  <a:srgbClr val="FF0000"/>
+                </a:solidFill>
+                <a:prstDash val="dash"/>
+                <a:tailEnd type="triangle"/>
+              </a:ln>
+            </p:spPr>
+            <p:style>
+              <a:lnRef idx="1">
+                <a:schemeClr val="accent1"/>
+              </a:lnRef>
+              <a:fillRef idx="0">
+                <a:schemeClr val="accent1"/>
+              </a:fillRef>
+              <a:effectRef idx="0">
+                <a:schemeClr val="accent1"/>
+              </a:effectRef>
+              <a:fontRef idx="minor">
+                <a:schemeClr val="tx1"/>
+              </a:fontRef>
+            </p:style>
+          </p:cxnSp>
+          <p:cxnSp>
+            <p:nvCxnSpPr>
+              <p:cNvPr id="16" name="Conector: Curvo 16">
+                <a:extLst>
+                  <a:ext uri="{FF2B5EF4-FFF2-40B4-BE49-F238E27FC236}">
+                    <a16:creationId xmlns:a16="http://schemas.microsoft.com/office/drawing/2014/main" xmlns="" id="{A4A39634-3F5F-74B0-1F5F-3C4537D68CCD}"/>
+                  </a:ext>
+                </a:extLst>
+              </p:cNvPr>
+              <p:cNvCxnSpPr>
+                <a:cxnSpLocks/>
+                <a:stCxn id="11" idx="0"/>
+                <a:endCxn id="12" idx="0"/>
+              </p:cNvCxnSpPr>
+              <p:nvPr/>
+            </p:nvCxnSpPr>
+            <p:spPr>
+              <a:xfrm rot="16200000" flipH="1">
+                <a:off x="2408105" y="4008181"/>
+                <a:ext cx="62639" cy="174083"/>
+              </a:xfrm>
+              <a:prstGeom prst="curvedConnector3">
+                <a:avLst>
+                  <a:gd name="adj1" fmla="val -235697"/>
+                </a:avLst>
+              </a:prstGeom>
+              <a:ln>
+                <a:solidFill>
+                  <a:srgbClr val="FF0000"/>
+                </a:solidFill>
+                <a:prstDash val="dash"/>
+                <a:tailEnd type="triangle"/>
+              </a:ln>
+            </p:spPr>
+            <p:style>
+              <a:lnRef idx="1">
+                <a:schemeClr val="accent1"/>
+              </a:lnRef>
+              <a:fillRef idx="0">
+                <a:schemeClr val="accent1"/>
+              </a:fillRef>
+              <a:effectRef idx="0">
+                <a:schemeClr val="accent1"/>
+              </a:effectRef>
+              <a:fontRef idx="minor">
+                <a:schemeClr val="tx1"/>
+              </a:fontRef>
+            </p:style>
+          </p:cxnSp>
+          <p:sp>
+            <p:nvSpPr>
+              <p:cNvPr id="17" name="CaixaDeTexto 16">
+                <a:extLst>
+                  <a:ext uri="{FF2B5EF4-FFF2-40B4-BE49-F238E27FC236}">
+                    <a16:creationId xmlns:a16="http://schemas.microsoft.com/office/drawing/2014/main" xmlns="" id="{204AE0DB-6550-BA4B-42F4-3D291466092E}"/>
+                  </a:ext>
+                </a:extLst>
+              </p:cNvPr>
+              <p:cNvSpPr txBox="1"/>
+              <p:nvPr/>
+            </p:nvSpPr>
+            <p:spPr>
+              <a:xfrm>
+                <a:off x="2085034" y="3336761"/>
+                <a:ext cx="1753377" cy="276999"/>
+              </a:xfrm>
+              <a:prstGeom prst="rect">
+                <a:avLst/>
+              </a:prstGeom>
+              <a:noFill/>
+            </p:spPr>
+            <p:txBody>
+              <a:bodyPr wrap="square" rtlCol="0">
+                <a:spAutoFit/>
+              </a:bodyPr>
+              <a:lstStyle/>
+              <a:p>
+                <a:r>
+                  <a:rPr lang="pt-BR" sz="1200" dirty="0"/>
+                  <a:t>iterações</a:t>
+                </a:r>
+              </a:p>
+            </p:txBody>
+          </p:sp>
+        </p:grpSp>
+        <p:sp>
+          <p:nvSpPr>
+            <p:cNvPr id="6" name="CaixaDeTexto 5">
+              <a:extLst>
+                <a:ext uri="{FF2B5EF4-FFF2-40B4-BE49-F238E27FC236}">
+                  <a16:creationId xmlns:a16="http://schemas.microsoft.com/office/drawing/2014/main" xmlns="" id="{17F23E77-B76E-73C8-AB63-BA858F6FEDAE}"/>
+                </a:ext>
+              </a:extLst>
+            </p:cNvPr>
+            <p:cNvSpPr txBox="1"/>
+            <p:nvPr/>
+          </p:nvSpPr>
+          <p:spPr>
+            <a:xfrm>
+              <a:off x="261646" y="2536599"/>
+              <a:ext cx="737531" cy="461665"/>
+            </a:xfrm>
+            <a:prstGeom prst="rect">
+              <a:avLst/>
+            </a:prstGeom>
+            <a:noFill/>
+          </p:spPr>
+          <p:txBody>
+            <a:bodyPr wrap="square" rtlCol="0">
+              <a:spAutoFit/>
+            </a:bodyPr>
+            <a:lstStyle/>
+            <a:p>
+              <a:pPr algn="ctr"/>
+              <a:r>
+                <a:rPr lang="pt-BR" sz="1200" dirty="0"/>
+                <a:t>ponto inicial</a:t>
+              </a:r>
+            </a:p>
+          </p:txBody>
+        </p:sp>
+        <p:cxnSp>
+          <p:nvCxnSpPr>
+            <p:cNvPr id="7" name="Conector de Seta Reta 7">
+              <a:extLst>
+                <a:ext uri="{FF2B5EF4-FFF2-40B4-BE49-F238E27FC236}">
+                  <a16:creationId xmlns:a16="http://schemas.microsoft.com/office/drawing/2014/main" xmlns="" id="{E63CF6F2-828D-404E-FB76-EDD94F5EE7C4}"/>
+                </a:ext>
+              </a:extLst>
+            </p:cNvPr>
+            <p:cNvCxnSpPr>
+              <a:cxnSpLocks/>
+              <a:stCxn id="6" idx="2"/>
+            </p:cNvCxnSpPr>
+            <p:nvPr/>
+          </p:nvCxnSpPr>
+          <p:spPr>
+            <a:xfrm>
+              <a:off x="630412" y="2998264"/>
+              <a:ext cx="525425" cy="852320"/>
+            </a:xfrm>
+            <a:prstGeom prst="straightConnector1">
+              <a:avLst/>
+            </a:prstGeom>
+            <a:ln>
+              <a:solidFill>
+                <a:schemeClr val="tx1"/>
+              </a:solidFill>
+              <a:tailEnd type="triangle"/>
+            </a:ln>
+          </p:spPr>
+          <p:style>
+            <a:lnRef idx="1">
+              <a:schemeClr val="accent1"/>
+            </a:lnRef>
+            <a:fillRef idx="0">
+              <a:schemeClr val="accent1"/>
+            </a:fillRef>
+            <a:effectRef idx="0">
+              <a:schemeClr val="accent1"/>
+            </a:effectRef>
+            <a:fontRef idx="minor">
+              <a:schemeClr val="tx1"/>
+            </a:fontRef>
+          </p:style>
+        </p:cxnSp>
+      </p:grpSp>
+      <p:sp>
+        <p:nvSpPr>
+          <p:cNvPr id="31" name="CaixaDeTexto 30"/>
+          <p:cNvSpPr txBox="1"/>
+          <p:nvPr/>
+        </p:nvSpPr>
+        <p:spPr>
+          <a:xfrm>
+            <a:off x="740658" y="6188984"/>
+            <a:ext cx="3581943" cy="369332"/>
+          </a:xfrm>
+          <a:prstGeom prst="rect">
+            <a:avLst/>
+          </a:prstGeom>
+          <a:noFill/>
+        </p:spPr>
+        <p:txBody>
+          <a:bodyPr wrap="none" rtlCol="0">
+            <a:spAutoFit/>
+          </a:bodyPr>
+          <a:lstStyle/>
+          <a:p>
+            <a:r>
+              <a:rPr lang="pt-BR" dirty="0" smtClean="0"/>
+              <a:t>Função hipótese com dois atributos.</a:t>
+            </a:r>
+            <a:endParaRPr lang="pt-BR" dirty="0"/>
           </a:p>
         </p:txBody>
       </p:sp>
     </p:spTree>
     <p:extLst>
       <p:ext uri="{BB962C8B-B14F-4D97-AF65-F5344CB8AC3E}">
-        <p14:creationId xmlns:p14="http://schemas.microsoft.com/office/powerpoint/2010/main" val="1531472052"/>
+        <p14:creationId xmlns:p14="http://schemas.microsoft.com/office/powerpoint/2010/main" val="2012100744"/>
       </p:ext>
     </p:extLst>
   </p:cSld>
@@ -15994,13 +17906,7 @@
       </p:grpSpPr>
       <p:sp>
         <p:nvSpPr>
-          <p:cNvPr id="2" name="Title 1">
-            <a:extLst>
-              <a:ext uri="{FF2B5EF4-FFF2-40B4-BE49-F238E27FC236}">
-                <a16:creationId xmlns:a16="http://schemas.microsoft.com/office/drawing/2014/main" id="{73862A92-55C2-431E-3FAA-7DC08A0AC671}"/>
-              </a:ext>
-            </a:extLst>
-          </p:cNvPr>
+          <p:cNvPr id="2" name="Título 1"/>
           <p:cNvSpPr>
             <a:spLocks noGrp="1"/>
           </p:cNvSpPr>
@@ -16014,22 +17920,16 @@
           <a:lstStyle/>
           <a:p>
             <a:r>
-              <a:rPr lang="pt-BR" dirty="0"/>
-              <a:t>Validação cruzada</a:t>
-            </a:r>
-            <a:endParaRPr lang="en-US" dirty="0"/>
+              <a:rPr lang="pt-BR" dirty="0" smtClean="0"/>
+              <a:t>Gradiente descendente</a:t>
+            </a:r>
+            <a:endParaRPr lang="pt-BR" dirty="0"/>
           </a:p>
         </p:txBody>
       </p:sp>
       <p:sp>
         <p:nvSpPr>
-          <p:cNvPr id="3" name="Content Placeholder 2">
-            <a:extLst>
-              <a:ext uri="{FF2B5EF4-FFF2-40B4-BE49-F238E27FC236}">
-                <a16:creationId xmlns:a16="http://schemas.microsoft.com/office/drawing/2014/main" id="{44A91331-8D79-4209-9910-250A54A6D3D3}"/>
-              </a:ext>
-            </a:extLst>
-          </p:cNvPr>
+          <p:cNvPr id="3" name="Espaço Reservado para Conteúdo 2"/>
           <p:cNvSpPr>
             <a:spLocks noGrp="1"/>
           </p:cNvSpPr>
@@ -16037,23 +17937,1436 @@
             <p:ph idx="1"/>
           </p:nvPr>
         </p:nvSpPr>
-        <p:spPr/>
+        <p:spPr>
+          <a:xfrm>
+            <a:off x="5739663" y="1825624"/>
+            <a:ext cx="6246010" cy="5032375"/>
+          </a:xfrm>
+        </p:spPr>
         <p:txBody>
           <a:bodyPr/>
           <a:lstStyle/>
           <a:p>
             <a:r>
+              <a:rPr lang="pt-BR" dirty="0" smtClean="0"/>
+              <a:t>Procura </a:t>
+            </a:r>
+            <a:r>
               <a:rPr lang="pt-BR" dirty="0"/>
-              <a:t>Validação cruzada para encontrar grau dos polinômios</a:t>
-            </a:r>
-            <a:endParaRPr lang="en-US" dirty="0"/>
+              <a:t>de forma iterativa o ponto mais baixo da superfície de erro, </a:t>
+            </a:r>
+            <a:r>
+              <a:rPr lang="pt-BR" dirty="0" smtClean="0"/>
+              <a:t>i.e., </a:t>
+            </a:r>
+            <a:r>
+              <a:rPr lang="pt-BR" dirty="0"/>
+              <a:t>o ponto que nos dá os pesos ótimos</a:t>
+            </a:r>
+            <a:r>
+              <a:rPr lang="pt-BR" dirty="0" smtClean="0"/>
+              <a:t>.</a:t>
+            </a:r>
+          </a:p>
+          <a:p>
+            <a:r>
+              <a:rPr lang="pt-BR" dirty="0" smtClean="0"/>
+              <a:t>É inicializado com </a:t>
+            </a:r>
+            <a:r>
+              <a:rPr lang="pt-BR" b="1" dirty="0" smtClean="0"/>
+              <a:t>pesos (i.e., em pontos) aleatórios</a:t>
+            </a:r>
+            <a:r>
+              <a:rPr lang="pt-BR" dirty="0" smtClean="0"/>
+              <a:t>.</a:t>
+            </a:r>
+            <a:endParaRPr lang="pt-BR" dirty="0"/>
+          </a:p>
+          <a:p>
+            <a:r>
+              <a:rPr lang="pt-BR" dirty="0"/>
+              <a:t>E, a cada iteração, </a:t>
+            </a:r>
+            <a:r>
+              <a:rPr lang="pt-BR" dirty="0" smtClean="0"/>
+              <a:t>ele </a:t>
+            </a:r>
+            <a:r>
+              <a:rPr lang="pt-BR" b="1" dirty="0" smtClean="0"/>
+              <a:t>refina</a:t>
+            </a:r>
+            <a:r>
+              <a:rPr lang="pt-BR" dirty="0" smtClean="0"/>
+              <a:t> </a:t>
+            </a:r>
+            <a:r>
+              <a:rPr lang="pt-BR" dirty="0"/>
+              <a:t>os valores dos pesos, ficando mais e mais próximos do ponto de mínimo</a:t>
+            </a:r>
+            <a:r>
+              <a:rPr lang="pt-BR" dirty="0" smtClean="0"/>
+              <a:t>.</a:t>
+            </a:r>
+            <a:endParaRPr lang="pt-BR" dirty="0"/>
           </a:p>
         </p:txBody>
       </p:sp>
+      <p:grpSp>
+        <p:nvGrpSpPr>
+          <p:cNvPr id="4" name="Agrupar 4">
+            <a:extLst>
+              <a:ext uri="{FF2B5EF4-FFF2-40B4-BE49-F238E27FC236}">
+                <a16:creationId xmlns:a16="http://schemas.microsoft.com/office/drawing/2014/main" xmlns="" id="{84412B71-A2C7-E89B-BE04-C2E70AB63FB6}"/>
+              </a:ext>
+            </a:extLst>
+          </p:cNvPr>
+          <p:cNvGrpSpPr/>
+          <p:nvPr/>
+        </p:nvGrpSpPr>
+        <p:grpSpPr>
+          <a:xfrm>
+            <a:off x="838200" y="1994437"/>
+            <a:ext cx="4381189" cy="4083507"/>
+            <a:chOff x="55618" y="2251324"/>
+            <a:chExt cx="4381189" cy="4083507"/>
+          </a:xfrm>
+        </p:grpSpPr>
+        <p:grpSp>
+          <p:nvGrpSpPr>
+            <p:cNvPr id="5" name="Agrupar 5">
+              <a:extLst>
+                <a:ext uri="{FF2B5EF4-FFF2-40B4-BE49-F238E27FC236}">
+                  <a16:creationId xmlns:a16="http://schemas.microsoft.com/office/drawing/2014/main" xmlns="" id="{FB0DCC50-E74B-B0C7-FD19-2CD268B79A24}"/>
+                </a:ext>
+              </a:extLst>
+            </p:cNvPr>
+            <p:cNvGrpSpPr/>
+            <p:nvPr/>
+          </p:nvGrpSpPr>
+          <p:grpSpPr>
+            <a:xfrm>
+              <a:off x="55618" y="2251324"/>
+              <a:ext cx="4381189" cy="4083507"/>
+              <a:chOff x="930667" y="1938641"/>
+              <a:chExt cx="4381189" cy="4083507"/>
+            </a:xfrm>
+          </p:grpSpPr>
+          <p:grpSp>
+            <p:nvGrpSpPr>
+              <p:cNvPr id="8" name="Agrupar 8">
+                <a:extLst>
+                  <a:ext uri="{FF2B5EF4-FFF2-40B4-BE49-F238E27FC236}">
+                    <a16:creationId xmlns:a16="http://schemas.microsoft.com/office/drawing/2014/main" xmlns="" id="{7FD92229-0631-3DCD-1FF9-A49AE18B66EF}"/>
+                  </a:ext>
+                </a:extLst>
+              </p:cNvPr>
+              <p:cNvGrpSpPr/>
+              <p:nvPr/>
+            </p:nvGrpSpPr>
+            <p:grpSpPr>
+              <a:xfrm>
+                <a:off x="930667" y="1938641"/>
+                <a:ext cx="4381189" cy="4083507"/>
+                <a:chOff x="447782" y="1825625"/>
+                <a:chExt cx="4381189" cy="4083507"/>
+              </a:xfrm>
+            </p:grpSpPr>
+            <p:grpSp>
+              <p:nvGrpSpPr>
+                <p:cNvPr id="18" name="Agrupar 44">
+                  <a:extLst>
+                    <a:ext uri="{FF2B5EF4-FFF2-40B4-BE49-F238E27FC236}">
+                      <a16:creationId xmlns:a16="http://schemas.microsoft.com/office/drawing/2014/main" xmlns="" id="{9E0EE296-BA0A-9E88-428D-23EFF31F9CDD}"/>
+                    </a:ext>
+                  </a:extLst>
+                </p:cNvPr>
+                <p:cNvGrpSpPr/>
+                <p:nvPr/>
+              </p:nvGrpSpPr>
+              <p:grpSpPr>
+                <a:xfrm>
+                  <a:off x="447782" y="1825625"/>
+                  <a:ext cx="4381189" cy="3859236"/>
+                  <a:chOff x="1592492" y="1393380"/>
+                  <a:chExt cx="3155387" cy="2846768"/>
+                </a:xfrm>
+              </p:grpSpPr>
+              <p:pic>
+                <p:nvPicPr>
+                  <p:cNvPr id="27" name="Picture 2" descr="Visualization for Function Optimization in Python -  MachineLearningMastery.com">
+                    <a:extLst>
+                      <a:ext uri="{FF2B5EF4-FFF2-40B4-BE49-F238E27FC236}">
+                        <a16:creationId xmlns:a16="http://schemas.microsoft.com/office/drawing/2014/main" xmlns="" id="{44D88D47-5822-C7A4-E1B5-0AF53981D02F}"/>
+                      </a:ext>
+                    </a:extLst>
+                  </p:cNvPr>
+                  <p:cNvPicPr>
+                    <a:picLocks noChangeAspect="1" noChangeArrowheads="1"/>
+                  </p:cNvPicPr>
+                  <p:nvPr/>
+                </p:nvPicPr>
+                <p:blipFill rotWithShape="1">
+                  <a:blip r:embed="rId2">
+                    <a:extLst>
+                      <a:ext uri="{28A0092B-C50C-407E-A947-70E740481C1C}">
+                        <a14:useLocalDpi xmlns:a14="http://schemas.microsoft.com/office/drawing/2010/main" val="0"/>
+                      </a:ext>
+                    </a:extLst>
+                  </a:blip>
+                  <a:srcRect l="25468" t="17228" r="16217" b="10711"/>
+                  <a:stretch/>
+                </p:blipFill>
+                <p:spPr bwMode="auto">
+                  <a:xfrm>
+                    <a:off x="1592492" y="1393380"/>
+                    <a:ext cx="3069081" cy="2844369"/>
+                  </a:xfrm>
+                  <a:prstGeom prst="rect">
+                    <a:avLst/>
+                  </a:prstGeom>
+                  <a:noFill/>
+                  <a:extLst>
+                    <a:ext uri="{909E8E84-426E-40DD-AFC4-6F175D3DCCD1}">
+                      <a14:hiddenFill xmlns:a14="http://schemas.microsoft.com/office/drawing/2010/main">
+                        <a:solidFill>
+                          <a:srgbClr val="FFFFFF"/>
+                        </a:solidFill>
+                      </a14:hiddenFill>
+                    </a:ext>
+                  </a:extLst>
+                </p:spPr>
+              </p:pic>
+              <mc:AlternateContent xmlns:mc="http://schemas.openxmlformats.org/markup-compatibility/2006" xmlns:a14="http://schemas.microsoft.com/office/drawing/2010/main">
+                <mc:Choice Requires="a14">
+                  <p:sp>
+                    <p:nvSpPr>
+                      <p:cNvPr id="28" name="CaixaDeTexto 27">
+                        <a:extLst>
+                          <a:ext uri="{FF2B5EF4-FFF2-40B4-BE49-F238E27FC236}">
+                            <a16:creationId xmlns:a16="http://schemas.microsoft.com/office/drawing/2014/main" xmlns="" id="{D3302DEB-0BAF-20B2-A12B-7E3667CD882F}"/>
+                          </a:ext>
+                        </a:extLst>
+                      </p:cNvPr>
+                      <p:cNvSpPr txBox="1"/>
+                      <p:nvPr/>
+                    </p:nvSpPr>
+                    <p:spPr>
+                      <a:xfrm>
+                        <a:off x="2025506" y="3945007"/>
+                        <a:ext cx="547099" cy="295141"/>
+                      </a:xfrm>
+                      <a:prstGeom prst="rect">
+                        <a:avLst/>
+                      </a:prstGeom>
+                      <a:noFill/>
+                    </p:spPr>
+                    <p:txBody>
+                      <a:bodyPr wrap="square">
+                        <a:spAutoFit/>
+                      </a:bodyPr>
+                      <a:lstStyle/>
+                      <a:p>
+                        <a:pPr/>
+                        <a14:m>
+                          <m:oMathPara xmlns:m="http://schemas.openxmlformats.org/officeDocument/2006/math">
+                            <m:oMathParaPr>
+                              <m:jc m:val="centerGroup"/>
+                            </m:oMathParaPr>
+                            <m:oMath xmlns:m="http://schemas.openxmlformats.org/officeDocument/2006/math">
+                              <m:sSub>
+                                <m:sSubPr>
+                                  <m:ctrlPr>
+                                    <a:rPr lang="pt-BR" sz="2000" i="1" smtClean="0">
+                                      <a:latin typeface="Cambria Math" panose="02040503050406030204" pitchFamily="18" charset="0"/>
+                                    </a:rPr>
+                                  </m:ctrlPr>
+                                </m:sSubPr>
+                                <m:e>
+                                  <m:r>
+                                    <a:rPr lang="pt-BR" sz="2000" i="1">
+                                      <a:latin typeface="Cambria Math" panose="02040503050406030204" pitchFamily="18" charset="0"/>
+                                    </a:rPr>
+                                    <m:t>𝑎</m:t>
+                                  </m:r>
+                                </m:e>
+                                <m:sub>
+                                  <m:r>
+                                    <a:rPr lang="pt-BR" sz="2000" i="1">
+                                      <a:latin typeface="Cambria Math" panose="02040503050406030204" pitchFamily="18" charset="0"/>
+                                    </a:rPr>
+                                    <m:t>0</m:t>
+                                  </m:r>
+                                </m:sub>
+                              </m:sSub>
+                            </m:oMath>
+                          </m:oMathPara>
+                        </a14:m>
+                        <a:endParaRPr lang="pt-BR" sz="2000" dirty="0"/>
+                      </a:p>
+                    </p:txBody>
+                  </p:sp>
+                </mc:Choice>
+                <mc:Fallback xmlns="">
+                  <p:sp>
+                    <p:nvSpPr>
+                      <p:cNvPr id="27" name="CaixaDeTexto 26">
+                        <a:extLst>
+                          <a:ext uri="{FF2B5EF4-FFF2-40B4-BE49-F238E27FC236}">
+                            <a16:creationId xmlns:a16="http://schemas.microsoft.com/office/drawing/2014/main" id="{00D42F04-97F1-C0EA-6B00-D0BD117CDEFF}"/>
+                          </a:ext>
+                        </a:extLst>
+                      </p:cNvPr>
+                      <p:cNvSpPr txBox="1">
+                        <a:spLocks noRot="1" noChangeAspect="1" noMove="1" noResize="1" noEditPoints="1" noAdjustHandles="1" noChangeArrowheads="1" noChangeShapeType="1" noTextEdit="1"/>
+                      </p:cNvSpPr>
+                      <p:nvPr/>
+                    </p:nvSpPr>
+                    <p:spPr>
+                      <a:xfrm>
+                        <a:off x="2025506" y="3945007"/>
+                        <a:ext cx="547099" cy="295141"/>
+                      </a:xfrm>
+                      <a:prstGeom prst="rect">
+                        <a:avLst/>
+                      </a:prstGeom>
+                      <a:blipFill>
+                        <a:blip r:embed="rId4"/>
+                        <a:stretch>
+                          <a:fillRect/>
+                        </a:stretch>
+                      </a:blipFill>
+                    </p:spPr>
+                    <p:txBody>
+                      <a:bodyPr/>
+                      <a:lstStyle/>
+                      <a:p>
+                        <a:r>
+                          <a:rPr lang="pt-BR">
+                            <a:noFill/>
+                          </a:rPr>
+                          <a:t> </a:t>
+                        </a:r>
+                      </a:p>
+                    </p:txBody>
+                  </p:sp>
+                </mc:Fallback>
+              </mc:AlternateContent>
+              <mc:AlternateContent xmlns:mc="http://schemas.openxmlformats.org/markup-compatibility/2006" xmlns:a14="http://schemas.microsoft.com/office/drawing/2010/main">
+                <mc:Choice Requires="a14">
+                  <p:sp>
+                    <p:nvSpPr>
+                      <p:cNvPr id="29" name="CaixaDeTexto 28">
+                        <a:extLst>
+                          <a:ext uri="{FF2B5EF4-FFF2-40B4-BE49-F238E27FC236}">
+                            <a16:creationId xmlns:a16="http://schemas.microsoft.com/office/drawing/2014/main" xmlns="" id="{0264388D-BD42-DE8D-1EDA-911DD626CE21}"/>
+                          </a:ext>
+                        </a:extLst>
+                      </p:cNvPr>
+                      <p:cNvSpPr txBox="1"/>
+                      <p:nvPr/>
+                    </p:nvSpPr>
+                    <p:spPr>
+                      <a:xfrm>
+                        <a:off x="4099817" y="3575675"/>
+                        <a:ext cx="423809" cy="295141"/>
+                      </a:xfrm>
+                      <a:prstGeom prst="rect">
+                        <a:avLst/>
+                      </a:prstGeom>
+                      <a:noFill/>
+                    </p:spPr>
+                    <p:txBody>
+                      <a:bodyPr wrap="square">
+                        <a:spAutoFit/>
+                      </a:bodyPr>
+                      <a:lstStyle/>
+                      <a:p>
+                        <a:pPr/>
+                        <a14:m>
+                          <m:oMathPara xmlns:m="http://schemas.openxmlformats.org/officeDocument/2006/math">
+                            <m:oMathParaPr>
+                              <m:jc m:val="centerGroup"/>
+                            </m:oMathParaPr>
+                            <m:oMath xmlns:m="http://schemas.openxmlformats.org/officeDocument/2006/math">
+                              <m:sSub>
+                                <m:sSubPr>
+                                  <m:ctrlPr>
+                                    <a:rPr lang="pt-BR" sz="2000" i="1" smtClean="0">
+                                      <a:latin typeface="Cambria Math" panose="02040503050406030204" pitchFamily="18" charset="0"/>
+                                    </a:rPr>
+                                  </m:ctrlPr>
+                                </m:sSubPr>
+                                <m:e>
+                                  <m:r>
+                                    <a:rPr lang="pt-BR" sz="2000" i="1">
+                                      <a:latin typeface="Cambria Math" panose="02040503050406030204" pitchFamily="18" charset="0"/>
+                                    </a:rPr>
+                                    <m:t>𝑎</m:t>
+                                  </m:r>
+                                </m:e>
+                                <m:sub>
+                                  <m:r>
+                                    <a:rPr lang="pt-BR" sz="2000" i="1">
+                                      <a:latin typeface="Cambria Math" panose="02040503050406030204" pitchFamily="18" charset="0"/>
+                                    </a:rPr>
+                                    <m:t>1</m:t>
+                                  </m:r>
+                                </m:sub>
+                              </m:sSub>
+                            </m:oMath>
+                          </m:oMathPara>
+                        </a14:m>
+                        <a:endParaRPr lang="pt-BR" sz="2000" dirty="0"/>
+                      </a:p>
+                    </p:txBody>
+                  </p:sp>
+                </mc:Choice>
+                <mc:Fallback xmlns="">
+                  <p:sp>
+                    <p:nvSpPr>
+                      <p:cNvPr id="29" name="CaixaDeTexto 28">
+                        <a:extLst>
+                          <a:ext uri="{FF2B5EF4-FFF2-40B4-BE49-F238E27FC236}">
+                            <a16:creationId xmlns:a16="http://schemas.microsoft.com/office/drawing/2014/main" id="{1FCA9EDF-24EB-6DAA-4AB3-9E76EE2FB342}"/>
+                          </a:ext>
+                        </a:extLst>
+                      </p:cNvPr>
+                      <p:cNvSpPr txBox="1">
+                        <a:spLocks noRot="1" noChangeAspect="1" noMove="1" noResize="1" noEditPoints="1" noAdjustHandles="1" noChangeArrowheads="1" noChangeShapeType="1" noTextEdit="1"/>
+                      </p:cNvSpPr>
+                      <p:nvPr/>
+                    </p:nvSpPr>
+                    <p:spPr>
+                      <a:xfrm>
+                        <a:off x="4099817" y="3575675"/>
+                        <a:ext cx="423809" cy="295141"/>
+                      </a:xfrm>
+                      <a:prstGeom prst="rect">
+                        <a:avLst/>
+                      </a:prstGeom>
+                      <a:blipFill>
+                        <a:blip r:embed="rId5"/>
+                        <a:stretch>
+                          <a:fillRect/>
+                        </a:stretch>
+                      </a:blipFill>
+                    </p:spPr>
+                    <p:txBody>
+                      <a:bodyPr/>
+                      <a:lstStyle/>
+                      <a:p>
+                        <a:r>
+                          <a:rPr lang="pt-BR">
+                            <a:noFill/>
+                          </a:rPr>
+                          <a:t> </a:t>
+                        </a:r>
+                      </a:p>
+                    </p:txBody>
+                  </p:sp>
+                </mc:Fallback>
+              </mc:AlternateContent>
+              <mc:AlternateContent xmlns:mc="http://schemas.openxmlformats.org/markup-compatibility/2006" xmlns:a14="http://schemas.microsoft.com/office/drawing/2010/main">
+                <mc:Choice Requires="a14">
+                  <p:sp>
+                    <p:nvSpPr>
+                      <p:cNvPr id="30" name="CaixaDeTexto 29">
+                        <a:extLst>
+                          <a:ext uri="{FF2B5EF4-FFF2-40B4-BE49-F238E27FC236}">
+                            <a16:creationId xmlns:a16="http://schemas.microsoft.com/office/drawing/2014/main" xmlns="" id="{585BAA01-510A-C118-CA93-5A46D3C329CC}"/>
+                          </a:ext>
+                        </a:extLst>
+                      </p:cNvPr>
+                      <p:cNvSpPr txBox="1"/>
+                      <p:nvPr/>
+                    </p:nvSpPr>
+                    <p:spPr>
+                      <a:xfrm>
+                        <a:off x="4190506" y="1542308"/>
+                        <a:ext cx="557373" cy="272438"/>
+                      </a:xfrm>
+                      <a:prstGeom prst="rect">
+                        <a:avLst/>
+                      </a:prstGeom>
+                      <a:noFill/>
+                    </p:spPr>
+                    <p:txBody>
+                      <a:bodyPr wrap="square">
+                        <a:spAutoFit/>
+                      </a:bodyPr>
+                      <a:lstStyle/>
+                      <a:p>
+                        <a:pPr/>
+                        <a14:m>
+                          <m:oMathPara xmlns:m="http://schemas.openxmlformats.org/officeDocument/2006/math">
+                            <m:oMathParaPr>
+                              <m:jc m:val="centerGroup"/>
+                            </m:oMathParaPr>
+                            <m:oMath xmlns:m="http://schemas.openxmlformats.org/officeDocument/2006/math">
+                              <m:r>
+                                <a:rPr lang="pt-BR" sz="1800" b="1" i="0" smtClean="0">
+                                  <a:latin typeface="Cambria Math" panose="02040503050406030204" pitchFamily="18" charset="0"/>
+                                </a:rPr>
+                                <m:t>𝐄𝐐𝐌</m:t>
+                              </m:r>
+                            </m:oMath>
+                          </m:oMathPara>
+                        </a14:m>
+                        <a:endParaRPr lang="pt-BR" b="1" dirty="0"/>
+                      </a:p>
+                    </p:txBody>
+                  </p:sp>
+                </mc:Choice>
+                <mc:Fallback xmlns="">
+                  <p:sp>
+                    <p:nvSpPr>
+                      <p:cNvPr id="41" name="CaixaDeTexto 40">
+                        <a:extLst>
+                          <a:ext uri="{FF2B5EF4-FFF2-40B4-BE49-F238E27FC236}">
+                            <a16:creationId xmlns:a16="http://schemas.microsoft.com/office/drawing/2014/main" id="{B86ACC41-6A24-7A4D-DE0B-040FA766A60D}"/>
+                          </a:ext>
+                        </a:extLst>
+                      </p:cNvPr>
+                      <p:cNvSpPr txBox="1">
+                        <a:spLocks noRot="1" noChangeAspect="1" noMove="1" noResize="1" noEditPoints="1" noAdjustHandles="1" noChangeArrowheads="1" noChangeShapeType="1" noTextEdit="1"/>
+                      </p:cNvSpPr>
+                      <p:nvPr/>
+                    </p:nvSpPr>
+                    <p:spPr>
+                      <a:xfrm>
+                        <a:off x="4190506" y="1542308"/>
+                        <a:ext cx="557373" cy="272438"/>
+                      </a:xfrm>
+                      <a:prstGeom prst="rect">
+                        <a:avLst/>
+                      </a:prstGeom>
+                      <a:blipFill>
+                        <a:blip r:embed="rId6"/>
+                        <a:stretch>
+                          <a:fillRect b="-9836"/>
+                        </a:stretch>
+                      </a:blipFill>
+                    </p:spPr>
+                    <p:txBody>
+                      <a:bodyPr/>
+                      <a:lstStyle/>
+                      <a:p>
+                        <a:r>
+                          <a:rPr lang="pt-BR">
+                            <a:noFill/>
+                          </a:rPr>
+                          <a:t> </a:t>
+                        </a:r>
+                      </a:p>
+                    </p:txBody>
+                  </p:sp>
+                </mc:Fallback>
+              </mc:AlternateContent>
+            </p:grpSp>
+            <p:sp>
+              <p:nvSpPr>
+                <p:cNvPr id="19" name="Elipse 18">
+                  <a:extLst>
+                    <a:ext uri="{FF2B5EF4-FFF2-40B4-BE49-F238E27FC236}">
+                      <a16:creationId xmlns:a16="http://schemas.microsoft.com/office/drawing/2014/main" xmlns="" id="{048570E9-84B4-263B-42B4-31A2588FB83B}"/>
+                    </a:ext>
+                  </a:extLst>
+                </p:cNvPr>
+                <p:cNvSpPr>
+                  <a:spLocks noChangeAspect="1"/>
+                </p:cNvSpPr>
+                <p:nvPr/>
+              </p:nvSpPr>
+              <p:spPr>
+                <a:xfrm>
+                  <a:off x="1548001" y="3424885"/>
+                  <a:ext cx="72000" cy="72000"/>
+                </a:xfrm>
+                <a:prstGeom prst="ellipse">
+                  <a:avLst/>
+                </a:prstGeom>
+                <a:solidFill>
+                  <a:srgbClr val="FF0000"/>
+                </a:solidFill>
+                <a:ln>
+                  <a:solidFill>
+                    <a:srgbClr val="FF0000"/>
+                  </a:solidFill>
+                </a:ln>
+              </p:spPr>
+              <p:style>
+                <a:lnRef idx="2">
+                  <a:schemeClr val="accent1">
+                    <a:shade val="15000"/>
+                  </a:schemeClr>
+                </a:lnRef>
+                <a:fillRef idx="1">
+                  <a:schemeClr val="accent1"/>
+                </a:fillRef>
+                <a:effectRef idx="0">
+                  <a:schemeClr val="accent1"/>
+                </a:effectRef>
+                <a:fontRef idx="minor">
+                  <a:schemeClr val="lt1"/>
+                </a:fontRef>
+              </p:style>
+              <p:txBody>
+                <a:bodyPr rtlCol="0" anchor="ctr"/>
+                <a:lstStyle/>
+                <a:p>
+                  <a:pPr algn="ctr"/>
+                  <a:endParaRPr lang="pt-BR" dirty="0"/>
+                </a:p>
+              </p:txBody>
+            </p:sp>
+            <p:cxnSp>
+              <p:nvCxnSpPr>
+                <p:cNvPr id="20" name="Conector reto 19">
+                  <a:extLst>
+                    <a:ext uri="{FF2B5EF4-FFF2-40B4-BE49-F238E27FC236}">
+                      <a16:creationId xmlns:a16="http://schemas.microsoft.com/office/drawing/2014/main" xmlns="" id="{F03C6EA3-09F9-5AF4-2C93-055E20E87D18}"/>
+                    </a:ext>
+                  </a:extLst>
+                </p:cNvPr>
+                <p:cNvCxnSpPr>
+                  <a:cxnSpLocks/>
+                  <a:endCxn id="19" idx="4"/>
+                </p:cNvCxnSpPr>
+                <p:nvPr/>
+              </p:nvCxnSpPr>
+              <p:spPr>
+                <a:xfrm flipH="1" flipV="1">
+                  <a:off x="1584001" y="3496885"/>
+                  <a:ext cx="11005" cy="464868"/>
+                </a:xfrm>
+                <a:prstGeom prst="line">
+                  <a:avLst/>
+                </a:prstGeom>
+                <a:ln w="19050">
+                  <a:solidFill>
+                    <a:schemeClr val="tx1"/>
+                  </a:solidFill>
+                  <a:prstDash val="sysDash"/>
+                </a:ln>
+              </p:spPr>
+              <p:style>
+                <a:lnRef idx="1">
+                  <a:schemeClr val="accent1"/>
+                </a:lnRef>
+                <a:fillRef idx="0">
+                  <a:schemeClr val="accent1"/>
+                </a:fillRef>
+                <a:effectRef idx="0">
+                  <a:schemeClr val="accent1"/>
+                </a:effectRef>
+                <a:fontRef idx="minor">
+                  <a:schemeClr val="tx1"/>
+                </a:fontRef>
+              </p:style>
+            </p:cxnSp>
+            <p:cxnSp>
+              <p:nvCxnSpPr>
+                <p:cNvPr id="21" name="Conector reto 20">
+                  <a:extLst>
+                    <a:ext uri="{FF2B5EF4-FFF2-40B4-BE49-F238E27FC236}">
+                      <a16:creationId xmlns:a16="http://schemas.microsoft.com/office/drawing/2014/main" xmlns="" id="{09BF1C12-E6A9-0B8A-A4BE-A0CDC64BF5EB}"/>
+                    </a:ext>
+                  </a:extLst>
+                </p:cNvPr>
+                <p:cNvCxnSpPr>
+                  <a:cxnSpLocks/>
+                </p:cNvCxnSpPr>
+                <p:nvPr/>
+              </p:nvCxnSpPr>
+              <p:spPr>
+                <a:xfrm flipH="1" flipV="1">
+                  <a:off x="2644775" y="4469673"/>
+                  <a:ext cx="931863" cy="278540"/>
+                </a:xfrm>
+                <a:prstGeom prst="line">
+                  <a:avLst/>
+                </a:prstGeom>
+                <a:ln w="19050">
+                  <a:solidFill>
+                    <a:schemeClr val="tx1"/>
+                  </a:solidFill>
+                  <a:prstDash val="sysDash"/>
+                </a:ln>
+              </p:spPr>
+              <p:style>
+                <a:lnRef idx="1">
+                  <a:schemeClr val="accent1"/>
+                </a:lnRef>
+                <a:fillRef idx="0">
+                  <a:schemeClr val="accent1"/>
+                </a:fillRef>
+                <a:effectRef idx="0">
+                  <a:schemeClr val="accent1"/>
+                </a:effectRef>
+                <a:fontRef idx="minor">
+                  <a:schemeClr val="tx1"/>
+                </a:fontRef>
+              </p:style>
+            </p:cxnSp>
+            <p:cxnSp>
+              <p:nvCxnSpPr>
+                <p:cNvPr id="22" name="Conector reto 21">
+                  <a:extLst>
+                    <a:ext uri="{FF2B5EF4-FFF2-40B4-BE49-F238E27FC236}">
+                      <a16:creationId xmlns:a16="http://schemas.microsoft.com/office/drawing/2014/main" xmlns="" id="{BAD148F8-88A1-9983-64AC-7DC9A33D0083}"/>
+                    </a:ext>
+                  </a:extLst>
+                </p:cNvPr>
+                <p:cNvCxnSpPr>
+                  <a:cxnSpLocks/>
+                </p:cNvCxnSpPr>
+                <p:nvPr/>
+              </p:nvCxnSpPr>
+              <p:spPr>
+                <a:xfrm flipH="1">
+                  <a:off x="857476" y="4155281"/>
+                  <a:ext cx="737530" cy="628784"/>
+                </a:xfrm>
+                <a:prstGeom prst="line">
+                  <a:avLst/>
+                </a:prstGeom>
+                <a:ln w="19050">
+                  <a:solidFill>
+                    <a:schemeClr val="tx1"/>
+                  </a:solidFill>
+                  <a:prstDash val="sysDash"/>
+                </a:ln>
+              </p:spPr>
+              <p:style>
+                <a:lnRef idx="1">
+                  <a:schemeClr val="accent1"/>
+                </a:lnRef>
+                <a:fillRef idx="0">
+                  <a:schemeClr val="accent1"/>
+                </a:fillRef>
+                <a:effectRef idx="0">
+                  <a:schemeClr val="accent1"/>
+                </a:effectRef>
+                <a:fontRef idx="minor">
+                  <a:schemeClr val="tx1"/>
+                </a:fontRef>
+              </p:style>
+            </p:cxnSp>
+            <p:cxnSp>
+              <p:nvCxnSpPr>
+                <p:cNvPr id="23" name="Conector reto 22">
+                  <a:extLst>
+                    <a:ext uri="{FF2B5EF4-FFF2-40B4-BE49-F238E27FC236}">
+                      <a16:creationId xmlns:a16="http://schemas.microsoft.com/office/drawing/2014/main" xmlns="" id="{C07E394D-50B1-689C-6846-C8A7447896B9}"/>
+                    </a:ext>
+                  </a:extLst>
+                </p:cNvPr>
+                <p:cNvCxnSpPr>
+                  <a:cxnSpLocks/>
+                </p:cNvCxnSpPr>
+                <p:nvPr/>
+              </p:nvCxnSpPr>
+              <p:spPr>
+                <a:xfrm flipH="1" flipV="1">
+                  <a:off x="1600660" y="4144018"/>
+                  <a:ext cx="73266" cy="32908"/>
+                </a:xfrm>
+                <a:prstGeom prst="line">
+                  <a:avLst/>
+                </a:prstGeom>
+                <a:ln w="19050">
+                  <a:solidFill>
+                    <a:schemeClr val="tx1"/>
+                  </a:solidFill>
+                  <a:prstDash val="sysDash"/>
+                </a:ln>
+              </p:spPr>
+              <p:style>
+                <a:lnRef idx="1">
+                  <a:schemeClr val="accent1"/>
+                </a:lnRef>
+                <a:fillRef idx="0">
+                  <a:schemeClr val="accent1"/>
+                </a:fillRef>
+                <a:effectRef idx="0">
+                  <a:schemeClr val="accent1"/>
+                </a:effectRef>
+                <a:fontRef idx="minor">
+                  <a:schemeClr val="tx1"/>
+                </a:fontRef>
+              </p:style>
+            </p:cxnSp>
+            <p:cxnSp>
+              <p:nvCxnSpPr>
+                <p:cNvPr id="24" name="Conector reto 23">
+                  <a:extLst>
+                    <a:ext uri="{FF2B5EF4-FFF2-40B4-BE49-F238E27FC236}">
+                      <a16:creationId xmlns:a16="http://schemas.microsoft.com/office/drawing/2014/main" xmlns="" id="{A506799A-6B61-E22B-5542-D0125466F84F}"/>
+                    </a:ext>
+                  </a:extLst>
+                </p:cNvPr>
+                <p:cNvCxnSpPr>
+                  <a:cxnSpLocks/>
+                </p:cNvCxnSpPr>
+                <p:nvPr/>
+              </p:nvCxnSpPr>
+              <p:spPr>
+                <a:xfrm flipV="1">
+                  <a:off x="1602149" y="4110038"/>
+                  <a:ext cx="0" cy="40910"/>
+                </a:xfrm>
+                <a:prstGeom prst="line">
+                  <a:avLst/>
+                </a:prstGeom>
+                <a:ln w="19050">
+                  <a:solidFill>
+                    <a:schemeClr val="tx1"/>
+                  </a:solidFill>
+                  <a:prstDash val="sysDash"/>
+                </a:ln>
+              </p:spPr>
+              <p:style>
+                <a:lnRef idx="1">
+                  <a:schemeClr val="accent1"/>
+                </a:lnRef>
+                <a:fillRef idx="0">
+                  <a:schemeClr val="accent1"/>
+                </a:fillRef>
+                <a:effectRef idx="0">
+                  <a:schemeClr val="accent1"/>
+                </a:effectRef>
+                <a:fontRef idx="minor">
+                  <a:schemeClr val="tx1"/>
+                </a:fontRef>
+              </p:style>
+            </p:cxnSp>
+            <p:cxnSp>
+              <p:nvCxnSpPr>
+                <p:cNvPr id="25" name="Conector de Seta Reta 51">
+                  <a:extLst>
+                    <a:ext uri="{FF2B5EF4-FFF2-40B4-BE49-F238E27FC236}">
+                      <a16:creationId xmlns:a16="http://schemas.microsoft.com/office/drawing/2014/main" xmlns="" id="{4C86C60D-83E6-EFF1-0757-FBEE2440C7F6}"/>
+                    </a:ext>
+                  </a:extLst>
+                </p:cNvPr>
+                <p:cNvCxnSpPr>
+                  <a:cxnSpLocks/>
+                </p:cNvCxnSpPr>
+                <p:nvPr/>
+              </p:nvCxnSpPr>
+              <p:spPr>
+                <a:xfrm flipH="1" flipV="1">
+                  <a:off x="2406947" y="4469673"/>
+                  <a:ext cx="623733" cy="1211936"/>
+                </a:xfrm>
+                <a:prstGeom prst="straightConnector1">
+                  <a:avLst/>
+                </a:prstGeom>
+                <a:ln>
+                  <a:solidFill>
+                    <a:srgbClr val="FF0000"/>
+                  </a:solidFill>
+                  <a:tailEnd type="triangle"/>
+                </a:ln>
+              </p:spPr>
+              <p:style>
+                <a:lnRef idx="1">
+                  <a:schemeClr val="accent1"/>
+                </a:lnRef>
+                <a:fillRef idx="0">
+                  <a:schemeClr val="accent1"/>
+                </a:fillRef>
+                <a:effectRef idx="0">
+                  <a:schemeClr val="accent1"/>
+                </a:effectRef>
+                <a:fontRef idx="minor">
+                  <a:schemeClr val="tx1"/>
+                </a:fontRef>
+              </p:style>
+            </p:cxnSp>
+            <p:sp>
+              <p:nvSpPr>
+                <p:cNvPr id="26" name="CaixaDeTexto 25">
+                  <a:extLst>
+                    <a:ext uri="{FF2B5EF4-FFF2-40B4-BE49-F238E27FC236}">
+                      <a16:creationId xmlns:a16="http://schemas.microsoft.com/office/drawing/2014/main" xmlns="" id="{FB4BC05E-298F-2552-BE8C-2BBFA977ECA2}"/>
+                    </a:ext>
+                  </a:extLst>
+                </p:cNvPr>
+                <p:cNvSpPr txBox="1"/>
+                <p:nvPr/>
+              </p:nvSpPr>
+              <p:spPr>
+                <a:xfrm>
+                  <a:off x="2426116" y="5601355"/>
+                  <a:ext cx="1483596" cy="307777"/>
+                </a:xfrm>
+                <a:prstGeom prst="rect">
+                  <a:avLst/>
+                </a:prstGeom>
+                <a:noFill/>
+              </p:spPr>
+              <p:txBody>
+                <a:bodyPr wrap="square" rtlCol="0">
+                  <a:spAutoFit/>
+                </a:bodyPr>
+                <a:lstStyle/>
+                <a:p>
+                  <a:r>
+                    <a:rPr lang="pt-BR" sz="1400" b="1" dirty="0">
+                      <a:solidFill>
+                        <a:srgbClr val="00B0F0"/>
+                      </a:solidFill>
+                    </a:rPr>
+                    <a:t>ponto de mínimo</a:t>
+                  </a:r>
+                </a:p>
+              </p:txBody>
+            </p:sp>
+          </p:grpSp>
+          <p:sp>
+            <p:nvSpPr>
+              <p:cNvPr id="9" name="Elipse 8">
+                <a:extLst>
+                  <a:ext uri="{FF2B5EF4-FFF2-40B4-BE49-F238E27FC236}">
+                    <a16:creationId xmlns:a16="http://schemas.microsoft.com/office/drawing/2014/main" xmlns="" id="{35F2A8C3-8F29-6C0D-DEBF-574DE751D83A}"/>
+                  </a:ext>
+                </a:extLst>
+              </p:cNvPr>
+              <p:cNvSpPr>
+                <a:spLocks noChangeAspect="1"/>
+              </p:cNvSpPr>
+              <p:nvPr/>
+            </p:nvSpPr>
+            <p:spPr>
+              <a:xfrm>
+                <a:off x="2099351" y="3779808"/>
+                <a:ext cx="72000" cy="72000"/>
+              </a:xfrm>
+              <a:prstGeom prst="ellipse">
+                <a:avLst/>
+              </a:prstGeom>
+              <a:solidFill>
+                <a:srgbClr val="FF0000"/>
+              </a:solidFill>
+              <a:ln>
+                <a:solidFill>
+                  <a:srgbClr val="FF0000"/>
+                </a:solidFill>
+              </a:ln>
+            </p:spPr>
+            <p:style>
+              <a:lnRef idx="2">
+                <a:schemeClr val="accent1">
+                  <a:shade val="15000"/>
+                </a:schemeClr>
+              </a:lnRef>
+              <a:fillRef idx="1">
+                <a:schemeClr val="accent1"/>
+              </a:fillRef>
+              <a:effectRef idx="0">
+                <a:schemeClr val="accent1"/>
+              </a:effectRef>
+              <a:fontRef idx="minor">
+                <a:schemeClr val="lt1"/>
+              </a:fontRef>
+            </p:style>
+            <p:txBody>
+              <a:bodyPr rtlCol="0" anchor="ctr"/>
+              <a:lstStyle/>
+              <a:p>
+                <a:pPr algn="ctr"/>
+                <a:endParaRPr lang="pt-BR" dirty="0"/>
+              </a:p>
+            </p:txBody>
+          </p:sp>
+          <p:sp>
+            <p:nvSpPr>
+              <p:cNvPr id="10" name="Elipse 9">
+                <a:extLst>
+                  <a:ext uri="{FF2B5EF4-FFF2-40B4-BE49-F238E27FC236}">
+                    <a16:creationId xmlns:a16="http://schemas.microsoft.com/office/drawing/2014/main" xmlns="" id="{D1D65435-8067-43D7-8B85-B58B5FE78F2B}"/>
+                  </a:ext>
+                </a:extLst>
+              </p:cNvPr>
+              <p:cNvSpPr>
+                <a:spLocks noChangeAspect="1"/>
+              </p:cNvSpPr>
+              <p:nvPr/>
+            </p:nvSpPr>
+            <p:spPr>
+              <a:xfrm>
+                <a:off x="2192811" y="3941684"/>
+                <a:ext cx="72000" cy="72000"/>
+              </a:xfrm>
+              <a:prstGeom prst="ellipse">
+                <a:avLst/>
+              </a:prstGeom>
+              <a:solidFill>
+                <a:srgbClr val="FF0000"/>
+              </a:solidFill>
+              <a:ln>
+                <a:solidFill>
+                  <a:srgbClr val="FF0000"/>
+                </a:solidFill>
+              </a:ln>
+            </p:spPr>
+            <p:style>
+              <a:lnRef idx="2">
+                <a:schemeClr val="accent1">
+                  <a:shade val="15000"/>
+                </a:schemeClr>
+              </a:lnRef>
+              <a:fillRef idx="1">
+                <a:schemeClr val="accent1"/>
+              </a:fillRef>
+              <a:effectRef idx="0">
+                <a:schemeClr val="accent1"/>
+              </a:effectRef>
+              <a:fontRef idx="minor">
+                <a:schemeClr val="lt1"/>
+              </a:fontRef>
+            </p:style>
+            <p:txBody>
+              <a:bodyPr rtlCol="0" anchor="ctr"/>
+              <a:lstStyle/>
+              <a:p>
+                <a:pPr algn="ctr"/>
+                <a:endParaRPr lang="pt-BR" dirty="0"/>
+              </a:p>
+            </p:txBody>
+          </p:sp>
+          <p:sp>
+            <p:nvSpPr>
+              <p:cNvPr id="11" name="Elipse 10">
+                <a:extLst>
+                  <a:ext uri="{FF2B5EF4-FFF2-40B4-BE49-F238E27FC236}">
+                    <a16:creationId xmlns:a16="http://schemas.microsoft.com/office/drawing/2014/main" xmlns="" id="{CE6F24E9-AEC3-E8E8-ACE1-5AB643448FDA}"/>
+                  </a:ext>
+                </a:extLst>
+              </p:cNvPr>
+              <p:cNvSpPr>
+                <a:spLocks noChangeAspect="1"/>
+              </p:cNvSpPr>
+              <p:nvPr/>
+            </p:nvSpPr>
+            <p:spPr>
+              <a:xfrm>
+                <a:off x="2316384" y="4063903"/>
+                <a:ext cx="72000" cy="72000"/>
+              </a:xfrm>
+              <a:prstGeom prst="ellipse">
+                <a:avLst/>
+              </a:prstGeom>
+              <a:solidFill>
+                <a:srgbClr val="FF0000"/>
+              </a:solidFill>
+              <a:ln>
+                <a:solidFill>
+                  <a:srgbClr val="FF0000"/>
+                </a:solidFill>
+              </a:ln>
+            </p:spPr>
+            <p:style>
+              <a:lnRef idx="2">
+                <a:schemeClr val="accent1">
+                  <a:shade val="15000"/>
+                </a:schemeClr>
+              </a:lnRef>
+              <a:fillRef idx="1">
+                <a:schemeClr val="accent1"/>
+              </a:fillRef>
+              <a:effectRef idx="0">
+                <a:schemeClr val="accent1"/>
+              </a:effectRef>
+              <a:fontRef idx="minor">
+                <a:schemeClr val="lt1"/>
+              </a:fontRef>
+            </p:style>
+            <p:txBody>
+              <a:bodyPr rtlCol="0" anchor="ctr"/>
+              <a:lstStyle/>
+              <a:p>
+                <a:pPr algn="ctr"/>
+                <a:endParaRPr lang="pt-BR" dirty="0"/>
+              </a:p>
+            </p:txBody>
+          </p:sp>
+          <p:sp>
+            <p:nvSpPr>
+              <p:cNvPr id="12" name="Elipse 11">
+                <a:extLst>
+                  <a:ext uri="{FF2B5EF4-FFF2-40B4-BE49-F238E27FC236}">
+                    <a16:creationId xmlns:a16="http://schemas.microsoft.com/office/drawing/2014/main" xmlns="" id="{8FACFAF7-7CF9-2A68-6DC3-73E2F744A7A7}"/>
+                  </a:ext>
+                </a:extLst>
+              </p:cNvPr>
+              <p:cNvSpPr>
+                <a:spLocks noChangeAspect="1"/>
+              </p:cNvSpPr>
+              <p:nvPr/>
+            </p:nvSpPr>
+            <p:spPr>
+              <a:xfrm>
+                <a:off x="2490467" y="4126542"/>
+                <a:ext cx="72000" cy="72000"/>
+              </a:xfrm>
+              <a:prstGeom prst="ellipse">
+                <a:avLst/>
+              </a:prstGeom>
+              <a:solidFill>
+                <a:srgbClr val="FF0000"/>
+              </a:solidFill>
+              <a:ln>
+                <a:solidFill>
+                  <a:srgbClr val="FF0000"/>
+                </a:solidFill>
+              </a:ln>
+            </p:spPr>
+            <p:style>
+              <a:lnRef idx="2">
+                <a:schemeClr val="accent1">
+                  <a:shade val="15000"/>
+                </a:schemeClr>
+              </a:lnRef>
+              <a:fillRef idx="1">
+                <a:schemeClr val="accent1"/>
+              </a:fillRef>
+              <a:effectRef idx="0">
+                <a:schemeClr val="accent1"/>
+              </a:effectRef>
+              <a:fontRef idx="minor">
+                <a:schemeClr val="lt1"/>
+              </a:fontRef>
+            </p:style>
+            <p:txBody>
+              <a:bodyPr rtlCol="0" anchor="ctr"/>
+              <a:lstStyle/>
+              <a:p>
+                <a:pPr algn="ctr"/>
+                <a:endParaRPr lang="pt-BR" dirty="0"/>
+              </a:p>
+            </p:txBody>
+          </p:sp>
+          <p:cxnSp>
+            <p:nvCxnSpPr>
+              <p:cNvPr id="13" name="Conector: Curvo 13">
+                <a:extLst>
+                  <a:ext uri="{FF2B5EF4-FFF2-40B4-BE49-F238E27FC236}">
+                    <a16:creationId xmlns:a16="http://schemas.microsoft.com/office/drawing/2014/main" xmlns="" id="{23FC64BF-9399-8DED-CE7B-6F37E3B76D0A}"/>
+                  </a:ext>
+                </a:extLst>
+              </p:cNvPr>
+              <p:cNvCxnSpPr>
+                <a:cxnSpLocks/>
+                <a:stCxn id="19" idx="0"/>
+                <a:endCxn id="9" idx="0"/>
+              </p:cNvCxnSpPr>
+              <p:nvPr/>
+            </p:nvCxnSpPr>
+            <p:spPr>
+              <a:xfrm rot="16200000" flipH="1">
+                <a:off x="1980164" y="3624622"/>
+                <a:ext cx="241907" cy="68465"/>
+              </a:xfrm>
+              <a:prstGeom prst="curvedConnector3">
+                <a:avLst>
+                  <a:gd name="adj1" fmla="val -29531"/>
+                </a:avLst>
+              </a:prstGeom>
+              <a:ln>
+                <a:solidFill>
+                  <a:srgbClr val="FF0000"/>
+                </a:solidFill>
+                <a:prstDash val="dash"/>
+                <a:tailEnd type="triangle"/>
+              </a:ln>
+            </p:spPr>
+            <p:style>
+              <a:lnRef idx="1">
+                <a:schemeClr val="accent1"/>
+              </a:lnRef>
+              <a:fillRef idx="0">
+                <a:schemeClr val="accent1"/>
+              </a:fillRef>
+              <a:effectRef idx="0">
+                <a:schemeClr val="accent1"/>
+              </a:effectRef>
+              <a:fontRef idx="minor">
+                <a:schemeClr val="tx1"/>
+              </a:fontRef>
+            </p:style>
+          </p:cxnSp>
+          <p:cxnSp>
+            <p:nvCxnSpPr>
+              <p:cNvPr id="14" name="Conector: Curvo 14">
+                <a:extLst>
+                  <a:ext uri="{FF2B5EF4-FFF2-40B4-BE49-F238E27FC236}">
+                    <a16:creationId xmlns:a16="http://schemas.microsoft.com/office/drawing/2014/main" xmlns="" id="{6CFC6E21-F686-D9AD-1678-277756D9D6E1}"/>
+                  </a:ext>
+                </a:extLst>
+              </p:cNvPr>
+              <p:cNvCxnSpPr>
+                <a:cxnSpLocks/>
+                <a:stCxn id="9" idx="0"/>
+                <a:endCxn id="10" idx="0"/>
+              </p:cNvCxnSpPr>
+              <p:nvPr/>
+            </p:nvCxnSpPr>
+            <p:spPr>
+              <a:xfrm rot="16200000" flipH="1">
+                <a:off x="2101143" y="3814016"/>
+                <a:ext cx="161876" cy="93460"/>
+              </a:xfrm>
+              <a:prstGeom prst="curvedConnector3">
+                <a:avLst>
+                  <a:gd name="adj1" fmla="val -85320"/>
+                </a:avLst>
+              </a:prstGeom>
+              <a:ln>
+                <a:solidFill>
+                  <a:srgbClr val="FF0000"/>
+                </a:solidFill>
+                <a:prstDash val="dash"/>
+                <a:tailEnd type="triangle"/>
+              </a:ln>
+            </p:spPr>
+            <p:style>
+              <a:lnRef idx="1">
+                <a:schemeClr val="accent1"/>
+              </a:lnRef>
+              <a:fillRef idx="0">
+                <a:schemeClr val="accent1"/>
+              </a:fillRef>
+              <a:effectRef idx="0">
+                <a:schemeClr val="accent1"/>
+              </a:effectRef>
+              <a:fontRef idx="minor">
+                <a:schemeClr val="tx1"/>
+              </a:fontRef>
+            </p:style>
+          </p:cxnSp>
+          <p:cxnSp>
+            <p:nvCxnSpPr>
+              <p:cNvPr id="15" name="Conector: Curvo 15">
+                <a:extLst>
+                  <a:ext uri="{FF2B5EF4-FFF2-40B4-BE49-F238E27FC236}">
+                    <a16:creationId xmlns:a16="http://schemas.microsoft.com/office/drawing/2014/main" xmlns="" id="{EA4C6F73-7F27-70C2-998B-E17C2EF4CE32}"/>
+                  </a:ext>
+                </a:extLst>
+              </p:cNvPr>
+              <p:cNvCxnSpPr>
+                <a:cxnSpLocks/>
+                <a:stCxn id="10" idx="0"/>
+                <a:endCxn id="11" idx="0"/>
+              </p:cNvCxnSpPr>
+              <p:nvPr/>
+            </p:nvCxnSpPr>
+            <p:spPr>
+              <a:xfrm rot="16200000" flipH="1">
+                <a:off x="2229487" y="3941007"/>
+                <a:ext cx="122219" cy="123573"/>
+              </a:xfrm>
+              <a:prstGeom prst="curvedConnector3">
+                <a:avLst>
+                  <a:gd name="adj1" fmla="val -120798"/>
+                </a:avLst>
+              </a:prstGeom>
+              <a:ln>
+                <a:solidFill>
+                  <a:srgbClr val="FF0000"/>
+                </a:solidFill>
+                <a:prstDash val="dash"/>
+                <a:tailEnd type="triangle"/>
+              </a:ln>
+            </p:spPr>
+            <p:style>
+              <a:lnRef idx="1">
+                <a:schemeClr val="accent1"/>
+              </a:lnRef>
+              <a:fillRef idx="0">
+                <a:schemeClr val="accent1"/>
+              </a:fillRef>
+              <a:effectRef idx="0">
+                <a:schemeClr val="accent1"/>
+              </a:effectRef>
+              <a:fontRef idx="minor">
+                <a:schemeClr val="tx1"/>
+              </a:fontRef>
+            </p:style>
+          </p:cxnSp>
+          <p:cxnSp>
+            <p:nvCxnSpPr>
+              <p:cNvPr id="16" name="Conector: Curvo 16">
+                <a:extLst>
+                  <a:ext uri="{FF2B5EF4-FFF2-40B4-BE49-F238E27FC236}">
+                    <a16:creationId xmlns:a16="http://schemas.microsoft.com/office/drawing/2014/main" xmlns="" id="{A4A39634-3F5F-74B0-1F5F-3C4537D68CCD}"/>
+                  </a:ext>
+                </a:extLst>
+              </p:cNvPr>
+              <p:cNvCxnSpPr>
+                <a:cxnSpLocks/>
+                <a:stCxn id="11" idx="0"/>
+                <a:endCxn id="12" idx="0"/>
+              </p:cNvCxnSpPr>
+              <p:nvPr/>
+            </p:nvCxnSpPr>
+            <p:spPr>
+              <a:xfrm rot="16200000" flipH="1">
+                <a:off x="2408105" y="4008181"/>
+                <a:ext cx="62639" cy="174083"/>
+              </a:xfrm>
+              <a:prstGeom prst="curvedConnector3">
+                <a:avLst>
+                  <a:gd name="adj1" fmla="val -235697"/>
+                </a:avLst>
+              </a:prstGeom>
+              <a:ln>
+                <a:solidFill>
+                  <a:srgbClr val="FF0000"/>
+                </a:solidFill>
+                <a:prstDash val="dash"/>
+                <a:tailEnd type="triangle"/>
+              </a:ln>
+            </p:spPr>
+            <p:style>
+              <a:lnRef idx="1">
+                <a:schemeClr val="accent1"/>
+              </a:lnRef>
+              <a:fillRef idx="0">
+                <a:schemeClr val="accent1"/>
+              </a:fillRef>
+              <a:effectRef idx="0">
+                <a:schemeClr val="accent1"/>
+              </a:effectRef>
+              <a:fontRef idx="minor">
+                <a:schemeClr val="tx1"/>
+              </a:fontRef>
+            </p:style>
+          </p:cxnSp>
+          <p:sp>
+            <p:nvSpPr>
+              <p:cNvPr id="17" name="CaixaDeTexto 16">
+                <a:extLst>
+                  <a:ext uri="{FF2B5EF4-FFF2-40B4-BE49-F238E27FC236}">
+                    <a16:creationId xmlns:a16="http://schemas.microsoft.com/office/drawing/2014/main" xmlns="" id="{204AE0DB-6550-BA4B-42F4-3D291466092E}"/>
+                  </a:ext>
+                </a:extLst>
+              </p:cNvPr>
+              <p:cNvSpPr txBox="1"/>
+              <p:nvPr/>
+            </p:nvSpPr>
+            <p:spPr>
+              <a:xfrm>
+                <a:off x="2085034" y="3336761"/>
+                <a:ext cx="1753377" cy="276999"/>
+              </a:xfrm>
+              <a:prstGeom prst="rect">
+                <a:avLst/>
+              </a:prstGeom>
+              <a:noFill/>
+            </p:spPr>
+            <p:txBody>
+              <a:bodyPr wrap="square" rtlCol="0">
+                <a:spAutoFit/>
+              </a:bodyPr>
+              <a:lstStyle/>
+              <a:p>
+                <a:r>
+                  <a:rPr lang="pt-BR" sz="1200" dirty="0"/>
+                  <a:t>iterações</a:t>
+                </a:r>
+              </a:p>
+            </p:txBody>
+          </p:sp>
+        </p:grpSp>
+        <p:sp>
+          <p:nvSpPr>
+            <p:cNvPr id="6" name="CaixaDeTexto 5">
+              <a:extLst>
+                <a:ext uri="{FF2B5EF4-FFF2-40B4-BE49-F238E27FC236}">
+                  <a16:creationId xmlns:a16="http://schemas.microsoft.com/office/drawing/2014/main" xmlns="" id="{17F23E77-B76E-73C8-AB63-BA858F6FEDAE}"/>
+                </a:ext>
+              </a:extLst>
+            </p:cNvPr>
+            <p:cNvSpPr txBox="1"/>
+            <p:nvPr/>
+          </p:nvSpPr>
+          <p:spPr>
+            <a:xfrm>
+              <a:off x="261646" y="2536599"/>
+              <a:ext cx="737531" cy="461665"/>
+            </a:xfrm>
+            <a:prstGeom prst="rect">
+              <a:avLst/>
+            </a:prstGeom>
+            <a:noFill/>
+          </p:spPr>
+          <p:txBody>
+            <a:bodyPr wrap="square" rtlCol="0">
+              <a:spAutoFit/>
+            </a:bodyPr>
+            <a:lstStyle/>
+            <a:p>
+              <a:pPr algn="ctr"/>
+              <a:r>
+                <a:rPr lang="pt-BR" sz="1200" dirty="0"/>
+                <a:t>ponto inicial</a:t>
+              </a:r>
+            </a:p>
+          </p:txBody>
+        </p:sp>
+        <p:cxnSp>
+          <p:nvCxnSpPr>
+            <p:cNvPr id="7" name="Conector de Seta Reta 7">
+              <a:extLst>
+                <a:ext uri="{FF2B5EF4-FFF2-40B4-BE49-F238E27FC236}">
+                  <a16:creationId xmlns:a16="http://schemas.microsoft.com/office/drawing/2014/main" xmlns="" id="{E63CF6F2-828D-404E-FB76-EDD94F5EE7C4}"/>
+                </a:ext>
+              </a:extLst>
+            </p:cNvPr>
+            <p:cNvCxnSpPr>
+              <a:cxnSpLocks/>
+              <a:stCxn id="6" idx="2"/>
+            </p:cNvCxnSpPr>
+            <p:nvPr/>
+          </p:nvCxnSpPr>
+          <p:spPr>
+            <a:xfrm>
+              <a:off x="630412" y="2998264"/>
+              <a:ext cx="525425" cy="852320"/>
+            </a:xfrm>
+            <a:prstGeom prst="straightConnector1">
+              <a:avLst/>
+            </a:prstGeom>
+            <a:ln>
+              <a:solidFill>
+                <a:schemeClr val="tx1"/>
+              </a:solidFill>
+              <a:tailEnd type="triangle"/>
+            </a:ln>
+          </p:spPr>
+          <p:style>
+            <a:lnRef idx="1">
+              <a:schemeClr val="accent1"/>
+            </a:lnRef>
+            <a:fillRef idx="0">
+              <a:schemeClr val="accent1"/>
+            </a:fillRef>
+            <a:effectRef idx="0">
+              <a:schemeClr val="accent1"/>
+            </a:effectRef>
+            <a:fontRef idx="minor">
+              <a:schemeClr val="tx1"/>
+            </a:fontRef>
+          </p:style>
+        </p:cxnSp>
+      </p:grpSp>
     </p:spTree>
     <p:extLst>
       <p:ext uri="{BB962C8B-B14F-4D97-AF65-F5344CB8AC3E}">
-        <p14:creationId xmlns:p14="http://schemas.microsoft.com/office/powerpoint/2010/main" val="1500185514"/>
+        <p14:creationId xmlns:p14="http://schemas.microsoft.com/office/powerpoint/2010/main" val="462476194"/>
       </p:ext>
     </p:extLst>
   </p:cSld>
@@ -16082,10 +19395,98 @@
       </p:grpSpPr>
       <p:sp>
         <p:nvSpPr>
+          <p:cNvPr id="2" name="Title 1">
+            <a:extLst>
+              <a:ext uri="{FF2B5EF4-FFF2-40B4-BE49-F238E27FC236}">
+                <a16:creationId xmlns:a16="http://schemas.microsoft.com/office/drawing/2014/main" xmlns="" id="{73862A92-55C2-431E-3FAA-7DC08A0AC671}"/>
+              </a:ext>
+            </a:extLst>
+          </p:cNvPr>
+          <p:cNvSpPr>
+            <a:spLocks noGrp="1"/>
+          </p:cNvSpPr>
+          <p:nvPr>
+            <p:ph type="title"/>
+          </p:nvPr>
+        </p:nvSpPr>
+        <p:spPr/>
+        <p:txBody>
+          <a:bodyPr/>
+          <a:lstStyle/>
+          <a:p>
+            <a:r>
+              <a:rPr lang="pt-BR" dirty="0"/>
+              <a:t>Validação cruzada</a:t>
+            </a:r>
+            <a:endParaRPr lang="en-US" dirty="0"/>
+          </a:p>
+        </p:txBody>
+      </p:sp>
+      <p:sp>
+        <p:nvSpPr>
+          <p:cNvPr id="3" name="Content Placeholder 2">
+            <a:extLst>
+              <a:ext uri="{FF2B5EF4-FFF2-40B4-BE49-F238E27FC236}">
+                <a16:creationId xmlns:a16="http://schemas.microsoft.com/office/drawing/2014/main" xmlns="" id="{44A91331-8D79-4209-9910-250A54A6D3D3}"/>
+              </a:ext>
+            </a:extLst>
+          </p:cNvPr>
+          <p:cNvSpPr>
+            <a:spLocks noGrp="1"/>
+          </p:cNvSpPr>
+          <p:nvPr>
+            <p:ph idx="1"/>
+          </p:nvPr>
+        </p:nvSpPr>
+        <p:spPr/>
+        <p:txBody>
+          <a:bodyPr/>
+          <a:lstStyle/>
+          <a:p>
+            <a:r>
+              <a:rPr lang="pt-BR" dirty="0"/>
+              <a:t>Validação cruzada para encontrar grau dos polinômios</a:t>
+            </a:r>
+            <a:endParaRPr lang="en-US" dirty="0"/>
+          </a:p>
+        </p:txBody>
+      </p:sp>
+    </p:spTree>
+    <p:extLst>
+      <p:ext uri="{BB962C8B-B14F-4D97-AF65-F5344CB8AC3E}">
+        <p14:creationId xmlns:p14="http://schemas.microsoft.com/office/powerpoint/2010/main" val="1500185514"/>
+      </p:ext>
+    </p:extLst>
+  </p:cSld>
+  <p:clrMapOvr>
+    <a:masterClrMapping/>
+  </p:clrMapOvr>
+</p:sld>
+</file>
+
+<file path=ppt/slides/slide26.xml><?xml version="1.0" encoding="utf-8"?>
+<p:sld xmlns:a="http://schemas.openxmlformats.org/drawingml/2006/main" xmlns:r="http://schemas.openxmlformats.org/officeDocument/2006/relationships" xmlns:p="http://schemas.openxmlformats.org/presentationml/2006/main">
+  <p:cSld>
+    <p:spTree>
+      <p:nvGrpSpPr>
+        <p:cNvPr id="1" name=""/>
+        <p:cNvGrpSpPr/>
+        <p:nvPr/>
+      </p:nvGrpSpPr>
+      <p:grpSpPr>
+        <a:xfrm>
+          <a:off x="0" y="0"/>
+          <a:ext cx="0" cy="0"/>
+          <a:chOff x="0" y="0"/>
+          <a:chExt cx="0" cy="0"/>
+        </a:xfrm>
+      </p:grpSpPr>
+      <p:sp>
+        <p:nvSpPr>
           <p:cNvPr id="4" name="Título 1">
             <a:extLst>
               <a:ext uri="{FF2B5EF4-FFF2-40B4-BE49-F238E27FC236}">
-                <a16:creationId xmlns:a16="http://schemas.microsoft.com/office/drawing/2014/main" id="{32666AC8-2E17-4DB4-B0F5-60C640CCFD2E}"/>
+                <a16:creationId xmlns:a16="http://schemas.microsoft.com/office/drawing/2014/main" xmlns="" id="{32666AC8-2E17-4DB4-B0F5-60C640CCFD2E}"/>
               </a:ext>
             </a:extLst>
           </p:cNvPr>
@@ -16149,7 +19550,7 @@
 </p:sld>
 </file>
 
-<file path=ppt/slides/slide26.xml><?xml version="1.0" encoding="utf-8"?>
+<file path=ppt/slides/slide27.xml><?xml version="1.0" encoding="utf-8"?>
 <p:sld xmlns:a="http://schemas.openxmlformats.org/drawingml/2006/main" xmlns:r="http://schemas.openxmlformats.org/officeDocument/2006/relationships" xmlns:p="http://schemas.openxmlformats.org/presentationml/2006/main">
   <p:cSld>
     <p:spTree>
@@ -16171,7 +19572,7 @@
           <p:cNvPr id="4" name="Título 1">
             <a:extLst>
               <a:ext uri="{FF2B5EF4-FFF2-40B4-BE49-F238E27FC236}">
-                <a16:creationId xmlns:a16="http://schemas.microsoft.com/office/drawing/2014/main" id="{32666AC8-2E17-4DB4-B0F5-60C640CCFD2E}"/>
+                <a16:creationId xmlns:a16="http://schemas.microsoft.com/office/drawing/2014/main" xmlns="" id="{32666AC8-2E17-4DB4-B0F5-60C640CCFD2E}"/>
               </a:ext>
             </a:extLst>
           </p:cNvPr>
@@ -16605,7 +20006,7 @@
           <p:cNvPr id="5" name="Imagem 4">
             <a:extLst>
               <a:ext uri="{FF2B5EF4-FFF2-40B4-BE49-F238E27FC236}">
-                <a16:creationId xmlns:a16="http://schemas.microsoft.com/office/drawing/2014/main" id="{D3B9ED84-5245-7889-8D8D-F74C85EB5B65}"/>
+                <a16:creationId xmlns:a16="http://schemas.microsoft.com/office/drawing/2014/main" xmlns="" id="{D3B9ED84-5245-7889-8D8D-F74C85EB5B65}"/>
               </a:ext>
             </a:extLst>
           </p:cNvPr>
@@ -16634,7 +20035,7 @@
           <p:cNvPr id="15" name="Picture 2" descr="Picolé Electron – Sorvete Itália">
             <a:extLst>
               <a:ext uri="{FF2B5EF4-FFF2-40B4-BE49-F238E27FC236}">
-                <a16:creationId xmlns:a16="http://schemas.microsoft.com/office/drawing/2014/main" id="{673E1C42-10C3-AF6F-1FF0-110BD135CF87}"/>
+                <a16:creationId xmlns:a16="http://schemas.microsoft.com/office/drawing/2014/main" xmlns="" id="{673E1C42-10C3-AF6F-1FF0-110BD135CF87}"/>
               </a:ext>
             </a:extLst>
           </p:cNvPr>
@@ -16711,7 +20112,7 @@
           <p:cNvPr id="3" name="Espaço Reservado para Conteúdo 2">
             <a:extLst>
               <a:ext uri="{FF2B5EF4-FFF2-40B4-BE49-F238E27FC236}">
-                <a16:creationId xmlns:a16="http://schemas.microsoft.com/office/drawing/2014/main" id="{36C16A22-1E29-D959-69D9-364EB3DA7640}"/>
+                <a16:creationId xmlns:a16="http://schemas.microsoft.com/office/drawing/2014/main" xmlns="" id="{36C16A22-1E29-D959-69D9-364EB3DA7640}"/>
               </a:ext>
             </a:extLst>
           </p:cNvPr>
@@ -16779,7 +20180,7 @@
           <p:cNvPr id="1026" name="Picture 2" descr="Machine Learning : 'Regression' - Day 3">
             <a:extLst>
               <a:ext uri="{FF2B5EF4-FFF2-40B4-BE49-F238E27FC236}">
-                <a16:creationId xmlns:a16="http://schemas.microsoft.com/office/drawing/2014/main" id="{8C5B78AE-E842-ED4F-93D3-10BD11500339}"/>
+                <a16:creationId xmlns:a16="http://schemas.microsoft.com/office/drawing/2014/main" xmlns="" id="{8C5B78AE-E842-ED4F-93D3-10BD11500339}"/>
               </a:ext>
             </a:extLst>
           </p:cNvPr>
@@ -16826,7 +20227,7 @@
           <p:cNvPr id="3" name="TextBox 2">
             <a:extLst>
               <a:ext uri="{FF2B5EF4-FFF2-40B4-BE49-F238E27FC236}">
-                <a16:creationId xmlns:a16="http://schemas.microsoft.com/office/drawing/2014/main" id="{F8207647-D845-CF7E-6030-46E4389E11DD}"/>
+                <a16:creationId xmlns:a16="http://schemas.microsoft.com/office/drawing/2014/main" xmlns="" id="{F8207647-D845-CF7E-6030-46E4389E11DD}"/>
               </a:ext>
             </a:extLst>
           </p:cNvPr>
@@ -16895,7 +20296,7 @@
           <p:cNvPr id="2" name="Título 1">
             <a:extLst>
               <a:ext uri="{FF2B5EF4-FFF2-40B4-BE49-F238E27FC236}">
-                <a16:creationId xmlns:a16="http://schemas.microsoft.com/office/drawing/2014/main" id="{DE06FD5B-6F51-847E-A4A8-1A8128322F68}"/>
+                <a16:creationId xmlns:a16="http://schemas.microsoft.com/office/drawing/2014/main" xmlns="" id="{DE06FD5B-6F51-847E-A4A8-1A8128322F68}"/>
               </a:ext>
             </a:extLst>
           </p:cNvPr>
@@ -16923,7 +20324,7 @@
           <p:cNvPr id="3" name="Espaço Reservado para Conteúdo 2">
             <a:extLst>
               <a:ext uri="{FF2B5EF4-FFF2-40B4-BE49-F238E27FC236}">
-                <a16:creationId xmlns:a16="http://schemas.microsoft.com/office/drawing/2014/main" id="{B76F0953-075A-79EF-554F-4E05524F1DC5}"/>
+                <a16:creationId xmlns:a16="http://schemas.microsoft.com/office/drawing/2014/main" xmlns="" id="{B76F0953-075A-79EF-554F-4E05524F1DC5}"/>
               </a:ext>
             </a:extLst>
           </p:cNvPr>
@@ -17004,7 +20405,7 @@
           <p:cNvPr id="4" name="Group 3">
             <a:extLst>
               <a:ext uri="{FF2B5EF4-FFF2-40B4-BE49-F238E27FC236}">
-                <a16:creationId xmlns:a16="http://schemas.microsoft.com/office/drawing/2014/main" id="{CAA6EE23-CD07-9149-8335-18879B84AB15}"/>
+                <a16:creationId xmlns:a16="http://schemas.microsoft.com/office/drawing/2014/main" xmlns="" id="{CAA6EE23-CD07-9149-8335-18879B84AB15}"/>
               </a:ext>
             </a:extLst>
           </p:cNvPr>
@@ -17024,7 +20425,7 @@
             <p:cNvPr id="7" name="Agrupar 8">
               <a:extLst>
                 <a:ext uri="{FF2B5EF4-FFF2-40B4-BE49-F238E27FC236}">
-                  <a16:creationId xmlns:a16="http://schemas.microsoft.com/office/drawing/2014/main" id="{CF20AF4F-BFBD-21EC-07E1-41C0B2191505}"/>
+                  <a16:creationId xmlns:a16="http://schemas.microsoft.com/office/drawing/2014/main" xmlns="" id="{CF20AF4F-BFBD-21EC-07E1-41C0B2191505}"/>
                 </a:ext>
               </a:extLst>
             </p:cNvPr>
@@ -17044,7 +20445,7 @@
               <p:cNvPr id="11" name="Imagem 4">
                 <a:extLst>
                   <a:ext uri="{FF2B5EF4-FFF2-40B4-BE49-F238E27FC236}">
-                    <a16:creationId xmlns:a16="http://schemas.microsoft.com/office/drawing/2014/main" id="{4D31E461-1A6A-29D1-2297-DFBFD51CB0D8}"/>
+                    <a16:creationId xmlns:a16="http://schemas.microsoft.com/office/drawing/2014/main" xmlns="" id="{4D31E461-1A6A-29D1-2297-DFBFD51CB0D8}"/>
                   </a:ext>
                 </a:extLst>
               </p:cNvPr>
@@ -17081,7 +20482,7 @@
                   <p:cNvPr id="12" name="CaixaDeTexto 5">
                     <a:extLst>
                       <a:ext uri="{FF2B5EF4-FFF2-40B4-BE49-F238E27FC236}">
-                        <a16:creationId xmlns:a16="http://schemas.microsoft.com/office/drawing/2014/main" id="{E01136AD-4899-EC9B-8DFF-D35176FFB912}"/>
+                        <a16:creationId xmlns:a16="http://schemas.microsoft.com/office/drawing/2014/main" xmlns="" id="{E01136AD-4899-EC9B-8DFF-D35176FFB912}"/>
                       </a:ext>
                     </a:extLst>
                   </p:cNvPr>
@@ -17193,7 +20594,7 @@
               <p:cNvPr id="13" name="Conector de Seta Reta 7">
                 <a:extLst>
                   <a:ext uri="{FF2B5EF4-FFF2-40B4-BE49-F238E27FC236}">
-                    <a16:creationId xmlns:a16="http://schemas.microsoft.com/office/drawing/2014/main" id="{E6A4E71A-8296-6E9B-6F53-58CD005C17C6}"/>
+                    <a16:creationId xmlns:a16="http://schemas.microsoft.com/office/drawing/2014/main" xmlns="" id="{E6A4E71A-8296-6E9B-6F53-58CD005C17C6}"/>
                   </a:ext>
                 </a:extLst>
               </p:cNvPr>
@@ -17238,7 +20639,7 @@
                 <p:cNvPr id="10" name="CaixaDeTexto 3">
                   <a:extLst>
                     <a:ext uri="{FF2B5EF4-FFF2-40B4-BE49-F238E27FC236}">
-                      <a16:creationId xmlns:a16="http://schemas.microsoft.com/office/drawing/2014/main" id="{9E8479D2-8EC0-0456-F706-2969C0BC1122}"/>
+                      <a16:creationId xmlns:a16="http://schemas.microsoft.com/office/drawing/2014/main" xmlns="" id="{9E8479D2-8EC0-0456-F706-2969C0BC1122}"/>
                     </a:ext>
                   </a:extLst>
                 </p:cNvPr>
@@ -17381,7 +20782,7 @@
           <p:cNvPr id="2" name="Título 1">
             <a:extLst>
               <a:ext uri="{FF2B5EF4-FFF2-40B4-BE49-F238E27FC236}">
-                <a16:creationId xmlns:a16="http://schemas.microsoft.com/office/drawing/2014/main" id="{DE06FD5B-6F51-847E-A4A8-1A8128322F68}"/>
+                <a16:creationId xmlns:a16="http://schemas.microsoft.com/office/drawing/2014/main" xmlns="" id="{DE06FD5B-6F51-847E-A4A8-1A8128322F68}"/>
               </a:ext>
             </a:extLst>
           </p:cNvPr>
@@ -17411,7 +20812,7 @@
               <p:cNvPr id="3" name="Espaço Reservado para Conteúdo 2">
                 <a:extLst>
                   <a:ext uri="{FF2B5EF4-FFF2-40B4-BE49-F238E27FC236}">
-                    <a16:creationId xmlns:a16="http://schemas.microsoft.com/office/drawing/2014/main" id="{B76F0953-075A-79EF-554F-4E05524F1DC5}"/>
+                    <a16:creationId xmlns:a16="http://schemas.microsoft.com/office/drawing/2014/main" xmlns="" id="{B76F0953-075A-79EF-554F-4E05524F1DC5}"/>
                   </a:ext>
                 </a:extLst>
               </p:cNvPr>
@@ -17864,7 +21265,7 @@
           <p:cNvPr id="7" name="Group 6">
             <a:extLst>
               <a:ext uri="{FF2B5EF4-FFF2-40B4-BE49-F238E27FC236}">
-                <a16:creationId xmlns:a16="http://schemas.microsoft.com/office/drawing/2014/main" id="{0B11DDB3-BDC9-57EF-0BC8-921A1B6B8D9B}"/>
+                <a16:creationId xmlns:a16="http://schemas.microsoft.com/office/drawing/2014/main" xmlns="" id="{0B11DDB3-BDC9-57EF-0BC8-921A1B6B8D9B}"/>
               </a:ext>
             </a:extLst>
           </p:cNvPr>
@@ -17884,7 +21285,7 @@
             <p:cNvPr id="9" name="Agrupar 8">
               <a:extLst>
                 <a:ext uri="{FF2B5EF4-FFF2-40B4-BE49-F238E27FC236}">
-                  <a16:creationId xmlns:a16="http://schemas.microsoft.com/office/drawing/2014/main" id="{7184A45B-D6CC-54CD-EE0B-7CE85A9D94D5}"/>
+                  <a16:creationId xmlns:a16="http://schemas.microsoft.com/office/drawing/2014/main" xmlns="" id="{7184A45B-D6CC-54CD-EE0B-7CE85A9D94D5}"/>
                 </a:ext>
               </a:extLst>
             </p:cNvPr>
@@ -17904,7 +21305,7 @@
               <p:cNvPr id="5" name="Imagem 4">
                 <a:extLst>
                   <a:ext uri="{FF2B5EF4-FFF2-40B4-BE49-F238E27FC236}">
-                    <a16:creationId xmlns:a16="http://schemas.microsoft.com/office/drawing/2014/main" id="{AF1170FE-5534-DC43-8150-E2919F18F249}"/>
+                    <a16:creationId xmlns:a16="http://schemas.microsoft.com/office/drawing/2014/main" xmlns="" id="{AF1170FE-5534-DC43-8150-E2919F18F249}"/>
                   </a:ext>
                 </a:extLst>
               </p:cNvPr>
@@ -17941,7 +21342,7 @@
                   <p:cNvPr id="6" name="CaixaDeTexto 5">
                     <a:extLst>
                       <a:ext uri="{FF2B5EF4-FFF2-40B4-BE49-F238E27FC236}">
-                        <a16:creationId xmlns:a16="http://schemas.microsoft.com/office/drawing/2014/main" id="{10491C75-CC2B-4E6F-00D1-D7BCDA1CAC51}"/>
+                        <a16:creationId xmlns:a16="http://schemas.microsoft.com/office/drawing/2014/main" xmlns="" id="{10491C75-CC2B-4E6F-00D1-D7BCDA1CAC51}"/>
                       </a:ext>
                     </a:extLst>
                   </p:cNvPr>
@@ -18053,7 +21454,7 @@
               <p:cNvPr id="8" name="Conector de Seta Reta 7">
                 <a:extLst>
                   <a:ext uri="{FF2B5EF4-FFF2-40B4-BE49-F238E27FC236}">
-                    <a16:creationId xmlns:a16="http://schemas.microsoft.com/office/drawing/2014/main" id="{29596D1D-F48C-73D6-3778-6E52A3153EFC}"/>
+                    <a16:creationId xmlns:a16="http://schemas.microsoft.com/office/drawing/2014/main" xmlns="" id="{29596D1D-F48C-73D6-3778-6E52A3153EFC}"/>
                   </a:ext>
                 </a:extLst>
               </p:cNvPr>
@@ -18098,7 +21499,7 @@
                 <p:cNvPr id="4" name="CaixaDeTexto 3">
                   <a:extLst>
                     <a:ext uri="{FF2B5EF4-FFF2-40B4-BE49-F238E27FC236}">
-                      <a16:creationId xmlns:a16="http://schemas.microsoft.com/office/drawing/2014/main" id="{B6371B7D-BB1A-D7F3-A54B-3E89596BFE8C}"/>
+                      <a16:creationId xmlns:a16="http://schemas.microsoft.com/office/drawing/2014/main" xmlns="" id="{B6371B7D-BB1A-D7F3-A54B-3E89596BFE8C}"/>
                     </a:ext>
                   </a:extLst>
                 </p:cNvPr>
@@ -18241,7 +21642,7 @@
           <p:cNvPr id="2" name="Título 1">
             <a:extLst>
               <a:ext uri="{FF2B5EF4-FFF2-40B4-BE49-F238E27FC236}">
-                <a16:creationId xmlns:a16="http://schemas.microsoft.com/office/drawing/2014/main" id="{6C106918-4928-8D8F-109D-FE4154A6ACEE}"/>
+                <a16:creationId xmlns:a16="http://schemas.microsoft.com/office/drawing/2014/main" xmlns="" id="{6C106918-4928-8D8F-109D-FE4154A6ACEE}"/>
               </a:ext>
             </a:extLst>
           </p:cNvPr>
@@ -18271,7 +21672,7 @@
               <p:cNvPr id="3" name="Espaço Reservado para Conteúdo 2">
                 <a:extLst>
                   <a:ext uri="{FF2B5EF4-FFF2-40B4-BE49-F238E27FC236}">
-                    <a16:creationId xmlns:a16="http://schemas.microsoft.com/office/drawing/2014/main" id="{5873D4D9-70C9-4892-D3C8-28B1750BC291}"/>
+                    <a16:creationId xmlns:a16="http://schemas.microsoft.com/office/drawing/2014/main" xmlns="" id="{5873D4D9-70C9-4892-D3C8-28B1750BC291}"/>
                   </a:ext>
                 </a:extLst>
               </p:cNvPr>
@@ -18409,7 +21810,7 @@
           <p:cNvPr id="5" name="Group 4">
             <a:extLst>
               <a:ext uri="{FF2B5EF4-FFF2-40B4-BE49-F238E27FC236}">
-                <a16:creationId xmlns:a16="http://schemas.microsoft.com/office/drawing/2014/main" id="{1235B076-2510-BA54-045E-9FDA19549589}"/>
+                <a16:creationId xmlns:a16="http://schemas.microsoft.com/office/drawing/2014/main" xmlns="" id="{1235B076-2510-BA54-045E-9FDA19549589}"/>
               </a:ext>
             </a:extLst>
           </p:cNvPr>
@@ -18429,7 +21830,7 @@
             <p:cNvPr id="8" name="Agrupar 8">
               <a:extLst>
                 <a:ext uri="{FF2B5EF4-FFF2-40B4-BE49-F238E27FC236}">
-                  <a16:creationId xmlns:a16="http://schemas.microsoft.com/office/drawing/2014/main" id="{6BA6F8C4-313D-7B7A-8A78-327F3069654F}"/>
+                  <a16:creationId xmlns:a16="http://schemas.microsoft.com/office/drawing/2014/main" xmlns="" id="{6BA6F8C4-313D-7B7A-8A78-327F3069654F}"/>
                 </a:ext>
               </a:extLst>
             </p:cNvPr>
@@ -18449,7 +21850,7 @@
               <p:cNvPr id="10" name="Imagem 4">
                 <a:extLst>
                   <a:ext uri="{FF2B5EF4-FFF2-40B4-BE49-F238E27FC236}">
-                    <a16:creationId xmlns:a16="http://schemas.microsoft.com/office/drawing/2014/main" id="{2FDB8C03-A236-C2AB-BA26-35BCEB125546}"/>
+                    <a16:creationId xmlns:a16="http://schemas.microsoft.com/office/drawing/2014/main" xmlns="" id="{2FDB8C03-A236-C2AB-BA26-35BCEB125546}"/>
                   </a:ext>
                 </a:extLst>
               </p:cNvPr>
@@ -18486,7 +21887,7 @@
                   <p:cNvPr id="11" name="CaixaDeTexto 5">
                     <a:extLst>
                       <a:ext uri="{FF2B5EF4-FFF2-40B4-BE49-F238E27FC236}">
-                        <a16:creationId xmlns:a16="http://schemas.microsoft.com/office/drawing/2014/main" id="{D1A24C38-EFA6-2F8B-5C0C-9C486DD9AA95}"/>
+                        <a16:creationId xmlns:a16="http://schemas.microsoft.com/office/drawing/2014/main" xmlns="" id="{D1A24C38-EFA6-2F8B-5C0C-9C486DD9AA95}"/>
                       </a:ext>
                     </a:extLst>
                   </p:cNvPr>
@@ -18598,7 +21999,7 @@
               <p:cNvPr id="12" name="Conector de Seta Reta 7">
                 <a:extLst>
                   <a:ext uri="{FF2B5EF4-FFF2-40B4-BE49-F238E27FC236}">
-                    <a16:creationId xmlns:a16="http://schemas.microsoft.com/office/drawing/2014/main" id="{57EE6B8B-A053-340A-CAEE-30CFEBD53D7E}"/>
+                    <a16:creationId xmlns:a16="http://schemas.microsoft.com/office/drawing/2014/main" xmlns="" id="{57EE6B8B-A053-340A-CAEE-30CFEBD53D7E}"/>
                   </a:ext>
                 </a:extLst>
               </p:cNvPr>
@@ -18643,7 +22044,7 @@
                 <p:cNvPr id="9" name="CaixaDeTexto 3">
                   <a:extLst>
                     <a:ext uri="{FF2B5EF4-FFF2-40B4-BE49-F238E27FC236}">
-                      <a16:creationId xmlns:a16="http://schemas.microsoft.com/office/drawing/2014/main" id="{84693792-F9CA-4DDE-7B29-0D00BA687EFA}"/>
+                      <a16:creationId xmlns:a16="http://schemas.microsoft.com/office/drawing/2014/main" xmlns="" id="{84693792-F9CA-4DDE-7B29-0D00BA687EFA}"/>
                     </a:ext>
                   </a:extLst>
                 </p:cNvPr>
@@ -18786,7 +22187,7 @@
           <p:cNvPr id="2" name="Título 1">
             <a:extLst>
               <a:ext uri="{FF2B5EF4-FFF2-40B4-BE49-F238E27FC236}">
-                <a16:creationId xmlns:a16="http://schemas.microsoft.com/office/drawing/2014/main" id="{6C106918-4928-8D8F-109D-FE4154A6ACEE}"/>
+                <a16:creationId xmlns:a16="http://schemas.microsoft.com/office/drawing/2014/main" xmlns="" id="{6C106918-4928-8D8F-109D-FE4154A6ACEE}"/>
               </a:ext>
             </a:extLst>
           </p:cNvPr>
@@ -18814,7 +22215,7 @@
           <p:cNvPr id="5" name="CaixaDeTexto 4">
             <a:extLst>
               <a:ext uri="{FF2B5EF4-FFF2-40B4-BE49-F238E27FC236}">
-                <a16:creationId xmlns:a16="http://schemas.microsoft.com/office/drawing/2014/main" id="{77D13973-0CC4-804D-B65C-ACF1497CA131}"/>
+                <a16:creationId xmlns:a16="http://schemas.microsoft.com/office/drawing/2014/main" xmlns="" id="{77D13973-0CC4-804D-B65C-ACF1497CA131}"/>
               </a:ext>
             </a:extLst>
           </p:cNvPr>
@@ -18856,7 +22257,7 @@
           <p:cNvPr id="4" name="Group 3">
             <a:extLst>
               <a:ext uri="{FF2B5EF4-FFF2-40B4-BE49-F238E27FC236}">
-                <a16:creationId xmlns:a16="http://schemas.microsoft.com/office/drawing/2014/main" id="{74FA83DA-1176-B494-DF6D-26AABD487B72}"/>
+                <a16:creationId xmlns:a16="http://schemas.microsoft.com/office/drawing/2014/main" xmlns="" id="{74FA83DA-1176-B494-DF6D-26AABD487B72}"/>
               </a:ext>
             </a:extLst>
           </p:cNvPr>
@@ -18876,7 +22277,7 @@
             <p:cNvPr id="8" name="Agrupar 8">
               <a:extLst>
                 <a:ext uri="{FF2B5EF4-FFF2-40B4-BE49-F238E27FC236}">
-                  <a16:creationId xmlns:a16="http://schemas.microsoft.com/office/drawing/2014/main" id="{3601490F-BA92-2E2F-4176-8548977CDC6B}"/>
+                  <a16:creationId xmlns:a16="http://schemas.microsoft.com/office/drawing/2014/main" xmlns="" id="{3601490F-BA92-2E2F-4176-8548977CDC6B}"/>
                 </a:ext>
               </a:extLst>
             </p:cNvPr>
@@ -18896,7 +22297,7 @@
               <p:cNvPr id="10" name="Imagem 4">
                 <a:extLst>
                   <a:ext uri="{FF2B5EF4-FFF2-40B4-BE49-F238E27FC236}">
-                    <a16:creationId xmlns:a16="http://schemas.microsoft.com/office/drawing/2014/main" id="{5C8759EA-A495-1092-5721-C2D5BB969782}"/>
+                    <a16:creationId xmlns:a16="http://schemas.microsoft.com/office/drawing/2014/main" xmlns="" id="{5C8759EA-A495-1092-5721-C2D5BB969782}"/>
                   </a:ext>
                 </a:extLst>
               </p:cNvPr>
@@ -18933,7 +22334,7 @@
                   <p:cNvPr id="11" name="CaixaDeTexto 5">
                     <a:extLst>
                       <a:ext uri="{FF2B5EF4-FFF2-40B4-BE49-F238E27FC236}">
-                        <a16:creationId xmlns:a16="http://schemas.microsoft.com/office/drawing/2014/main" id="{3DC28E94-1E78-E96F-81AC-6660B1EAE0DB}"/>
+                        <a16:creationId xmlns:a16="http://schemas.microsoft.com/office/drawing/2014/main" xmlns="" id="{3DC28E94-1E78-E96F-81AC-6660B1EAE0DB}"/>
                       </a:ext>
                     </a:extLst>
                   </p:cNvPr>
@@ -19045,7 +22446,7 @@
               <p:cNvPr id="12" name="Conector de Seta Reta 7">
                 <a:extLst>
                   <a:ext uri="{FF2B5EF4-FFF2-40B4-BE49-F238E27FC236}">
-                    <a16:creationId xmlns:a16="http://schemas.microsoft.com/office/drawing/2014/main" id="{18708C14-B461-C0FC-A091-97D0B01047D3}"/>
+                    <a16:creationId xmlns:a16="http://schemas.microsoft.com/office/drawing/2014/main" xmlns="" id="{18708C14-B461-C0FC-A091-97D0B01047D3}"/>
                   </a:ext>
                 </a:extLst>
               </p:cNvPr>
@@ -19090,7 +22491,7 @@
                 <p:cNvPr id="9" name="CaixaDeTexto 3">
                   <a:extLst>
                     <a:ext uri="{FF2B5EF4-FFF2-40B4-BE49-F238E27FC236}">
-                      <a16:creationId xmlns:a16="http://schemas.microsoft.com/office/drawing/2014/main" id="{CD48A18A-A494-29A6-49E8-BAE3B1ECBF7E}"/>
+                      <a16:creationId xmlns:a16="http://schemas.microsoft.com/office/drawing/2014/main" xmlns="" id="{CD48A18A-A494-29A6-49E8-BAE3B1ECBF7E}"/>
                     </a:ext>
                   </a:extLst>
                 </p:cNvPr>
